--- a/AI_PBMS_8Slide.pptx
+++ b/AI_PBMS_8Slide.pptx
@@ -509,7 +509,7 @@
           <a:lstStyle/>
           <a:p>
             <a:r>
-              <a:t>Every public battery dataset reports pack-level voltage and current. That is</a:t>
+              <a:t>Every public battery dataset reports pack-level voltage and current, which is</a:t>
             </a:r>
           </a:p>
           <a:p>
@@ -519,22 +519,27 @@
           </a:p>
           <a:p>
             <a:r>
-              <a:t>individual cells. So we built the dataset. An 8S2P NMC pack, a JBD BMS on all eight</a:t>
-            </a:r>
-          </a:p>
-          <a:p>
-            <a:r>
-              <a:t>taps, a programmable supply charging and an electronic load discharging. Around fifty</a:t>
-            </a:r>
-          </a:p>
-          <a:p>
-            <a:r>
-              <a:t>cycles, three hours each, over a hundred hours logged, roughly 155,000 rows. Every</a:t>
-            </a:r>
-          </a:p>
-          <a:p>
-            <a:r>
-              <a:t>number in this deck came off that bench.</a:t>
+              <a:t>individual cells. So we built the dataset — an 8S2P NMC pack, a JBD BMS on all</a:t>
+            </a:r>
+          </a:p>
+          <a:p>
+            <a:r>
+              <a:t>eight taps, roughly fifty cycles and 155,000 rows. The chart bottom right is</a:t>
+            </a:r>
+          </a:p>
+          <a:p>
+            <a:r>
+              <a:t>what a hundred hours bought us: seven cells tracking together, and cell one</a:t>
+            </a:r>
+          </a:p>
+          <a:p>
+            <a:r>
+              <a:t>sitting 289 millivolts below them for the entire discharge. That one defect</a:t>
+            </a:r>
+          </a:p>
+          <a:p>
+            <a:r>
+              <a:t>shaped everything that follows.</a:t>
             </a:r>
           </a:p>
         </p:txBody>
@@ -604,32 +609,37 @@
           <a:lstStyle/>
           <a:p>
             <a:r>
-              <a:t>Eight in series gives the 33.6-volt bus the drivetrain wants. Two in parallel</a:t>
-            </a:r>
-          </a:p>
-          <a:p>
-            <a:r>
-              <a:t>gives 8 amp-hours and the current headroom to run realistic profiles. Eight series</a:t>
-            </a:r>
-          </a:p>
-          <a:p>
-            <a:r>
-              <a:t>groups means eight sense taps, so imbalance is measured, not inferred. On modelling,</a:t>
-            </a:r>
-          </a:p>
-          <a:p>
-            <a:r>
-              <a:t>one RC branch caught the instant ohmic drop but missed the slow recovery after a load</a:t>
-            </a:r>
-          </a:p>
-          <a:p>
-            <a:r>
-              <a:t>step. A second branch fixed it — fast at about 0.18 seconds, slow at about 1.05.</a:t>
-            </a:r>
-          </a:p>
-          <a:p>
-            <a:r>
-              <a:t>These five parameters were fitted on a clean HPPC segment.</a:t>
+              <a:t>Eight in series gives the 33.6-volt bus the drivetrain wants; two in parallel</a:t>
+            </a:r>
+          </a:p>
+          <a:p>
+            <a:r>
+              <a:t>gives eight amp-hours and the current headroom for realistic profiles. Eight</a:t>
+            </a:r>
+          </a:p>
+          <a:p>
+            <a:r>
+              <a:t>series groups means eight sense taps, so imbalance is measured rather than</a:t>
+            </a:r>
+          </a:p>
+          <a:p>
+            <a:r>
+              <a:t>inferred. On modelling, one RC branch caught the instant ohmic drop but missed</a:t>
+            </a:r>
+          </a:p>
+          <a:p>
+            <a:r>
+              <a:t>the slow recovery after a load step, so we went to two — fast at 0.18 seconds,</a:t>
+            </a:r>
+          </a:p>
+          <a:p>
+            <a:r>
+              <a:t>slow at 1.05. All five parameters were fitted on a clean HPPC segment, and the</a:t>
+            </a:r>
+          </a:p>
+          <a:p>
+            <a:r>
+              <a:t>same estimation gave us the OCV curve: 13.4 millivolts per percent of charge.</a:t>
             </a:r>
           </a:p>
         </p:txBody>
@@ -699,37 +709,42 @@
           <a:lstStyle/>
           <a:p>
             <a:r>
-              <a:t>The pipeline is short on purpose: BMS, BLE through bleak, jbd_logger v9. Two</a:t>
-            </a:r>
-          </a:p>
-          <a:p>
-            <a:r>
-              <a:t>things bit us. BLE fragments long responses across frames, so early logs were</a:t>
-            </a:r>
-          </a:p>
-          <a:p>
-            <a:r>
-              <a:t>silently truncated — we now reassemble before parsing. And the four thermistors were</a:t>
-            </a:r>
-          </a:p>
-          <a:p>
-            <a:r>
-              <a:t>read at the wrong byte offset, scrambling the thermal channels. The bigger finding</a:t>
-            </a:r>
-          </a:p>
-          <a:p>
-            <a:r>
-              <a:t>was in the data: cell one sat a quarter-volt below median every cycle, which labelled</a:t>
-            </a:r>
-          </a:p>
-          <a:p>
-            <a:r>
-              <a:t>over seventy percent of rows Cell Imbalance. We balanced with physics-informed</a:t>
-            </a:r>
-          </a:p>
-          <a:p>
-            <a:r>
-              <a:t>synthetic faults rather than throwing real rows away.</a:t>
+              <a:t>The pipeline is short on purpose. Two things bit us: BLE fragments long</a:t>
+            </a:r>
+          </a:p>
+          <a:p>
+            <a:r>
+              <a:t>responses across frames, so early logs were silently truncated, and the four</a:t>
+            </a:r>
+          </a:p>
+          <a:p>
+            <a:r>
+              <a:t>thermistors were read at the wrong byte offset. From seventeen raw channels we</a:t>
+            </a:r>
+          </a:p>
+          <a:p>
+            <a:r>
+              <a:t>derive fifty-one features — rolling statistics, first derivatives, per-cell rise</a:t>
+            </a:r>
+          </a:p>
+          <a:p>
+            <a:r>
+              <a:t>and drop rates, driving-mode flags. The chart top right is read out of the</a:t>
+            </a:r>
+          </a:p>
+          <a:p>
+            <a:r>
+              <a:t>trained model, not our opinion. Because cell one is chronically low, a</a:t>
+            </a:r>
+          </a:p>
+          <a:p>
+            <a:r>
+              <a:t>rule-based labeller marked seventy percent of rows as imbalance, so we balanced</a:t>
+            </a:r>
+          </a:p>
+          <a:p>
+            <a:r>
+              <a:t>with physics-informed synthetic faults rather than discarding real data.</a:t>
             </a:r>
           </a:p>
         </p:txBody>
@@ -799,37 +814,62 @@
           <a:lstStyle/>
           <a:p>
             <a:r>
-              <a:t>Tabular sensor data with fifty engineered features is what gradient-boosted</a:t>
-            </a:r>
-          </a:p>
-          <a:p>
-            <a:r>
-              <a:t>trees are good at, and each alternative fails a constraint we actually have. The</a:t>
-            </a:r>
-          </a:p>
-          <a:p>
-            <a:r>
-              <a:t>Transformer and the LSTM need a sequence buffer — latency and memory we do not have</a:t>
-            </a:r>
-          </a:p>
-          <a:p>
-            <a:r>
-              <a:t>— and neither gives an attribution an engineer can argue with. Random Forest needs a</a:t>
-            </a:r>
-          </a:p>
-          <a:p>
-            <a:r>
-              <a:t>much bigger model for the same accuracy. A rule-based BMS only reacts after a</a:t>
-            </a:r>
-          </a:p>
-          <a:p>
-            <a:r>
-              <a:t>threshold is already breached. XGBoost: 98.55 percent, 0.85 milliseconds on the Pi 5,</a:t>
-            </a:r>
-          </a:p>
-          <a:p>
-            <a:r>
-              <a:t>and inspectable.</a:t>
+              <a:t>We did not argue about which model to use — we trained all six on the identical</a:t>
+            </a:r>
+          </a:p>
+          <a:p>
+            <a:r>
+              <a:t>split and measured them. The Transformer is actually the most accurate at 95.11</a:t>
+            </a:r>
+          </a:p>
+          <a:p>
+            <a:r>
+              <a:t>percent, a point ahead of XGBoost. We still shipped XGBoost, and here is the</a:t>
+            </a:r>
+          </a:p>
+          <a:p>
+            <a:r>
+              <a:t>honest reason: the Transformer needs a sixty-row lookback, which at one hertz</a:t>
+            </a:r>
+          </a:p>
+          <a:p>
+            <a:r>
+              <a:t>means a full minute of buffered data before it can say anything, plus a torch</a:t>
+            </a:r>
+          </a:p>
+          <a:p>
+            <a:r>
+              <a:t>runtime on the Pi and no feature attribution an engineer can interrogate.</a:t>
+            </a:r>
+          </a:p>
+          <a:p>
+            <a:r>
+              <a:t>XGBoost predicts from a single row, instantly, and tells you which features</a:t>
+            </a:r>
+          </a:p>
+          <a:p>
+            <a:r>
+              <a:t>drove it. Random Forest is 176 megabytes and seventy-three times slower for</a:t>
+            </a:r>
+          </a:p>
+          <a:p>
+            <a:r>
+              <a:t>worse accuracy. And look at the bottom row: a conventional rule-based BMS scores</a:t>
+            </a:r>
+          </a:p>
+          <a:p>
+            <a:r>
+              <a:t>twenty-two percent — because cell one's chronic gap puts eighty-four percent of</a:t>
+            </a:r>
+          </a:p>
+          <a:p>
+            <a:r>
+              <a:t>healthy rows over the imbalance threshold, so it false-alarms constantly and</a:t>
+            </a:r>
+          </a:p>
+          <a:p>
+            <a:r>
+              <a:t>still never detects a weak cell.</a:t>
             </a:r>
           </a:p>
         </p:txBody>
@@ -899,37 +939,42 @@
           <a:lstStyle/>
           <a:p>
             <a:r>
-              <a:t>Three tiers, each doing what the others cannot. The JBD BMS senses: eight taps,</a:t>
-            </a:r>
-          </a:p>
-          <a:p>
-            <a:r>
-              <a:t>four thermistors, pack voltage and current. The Pi 5 runs the logger, the inference</a:t>
-            </a:r>
-          </a:p>
-          <a:p>
-            <a:r>
-              <a:t>and the dashboard. Inference sits at the edge deliberately — push it to a server and</a:t>
-            </a:r>
-          </a:p>
-          <a:p>
-            <a:r>
-              <a:t>every network hiccup becomes an unmonitored window. The third tier exists because</a:t>
-            </a:r>
-          </a:p>
-          <a:p>
-            <a:r>
-              <a:t>general-purpose computers hang. An Arduino on its own rail watches for a heartbeat</a:t>
-            </a:r>
-          </a:p>
-          <a:p>
-            <a:r>
-              <a:t>and pulls the Pi's RUN pin if it stops. Zynq-7000 is our path to take inference off</a:t>
-            </a:r>
-          </a:p>
-          <a:p>
-            <a:r>
-              <a:t>the CPU entirely.</a:t>
+              <a:t>Normal, Overvoltage and Overtemperature all clear ninety-seven percent F1. Cell</a:t>
+            </a:r>
+          </a:p>
+          <a:p>
+            <a:r>
+              <a:t>Imbalance recall is sixty-five, and that is the weakest number here — its misses</a:t>
+            </a:r>
+          </a:p>
+          <a:p>
+            <a:r>
+              <a:t>go to Undervoltage, which is physically sensible: one cell drops and pack</a:t>
+            </a:r>
+          </a:p>
+          <a:p>
+            <a:r>
+              <a:t>voltage follows. Around the classifier we wrap two things. A confidence band:</a:t>
+            </a:r>
+          </a:p>
+          <a:p>
+            <a:r>
+              <a:t>below zero-point-five we abstain, up to zero-eight-five we warn, above that we</a:t>
+            </a:r>
+          </a:p>
+          <a:p>
+            <a:r>
+              <a:t>alert. And in front of it, an IsolationForest gate for failure modes we have</a:t>
+            </a:r>
+          </a:p>
+          <a:p>
+            <a:r>
+              <a:t>never seen — AUROC nine-one-three, a hundred percent precision, zero false</a:t>
+            </a:r>
+          </a:p>
+          <a:p>
+            <a:r>
+              <a:t>positives, catching one unknown in four. Tuned that way deliberately.</a:t>
             </a:r>
           </a:p>
         </p:txBody>
@@ -999,37 +1044,37 @@
           <a:lstStyle/>
           <a:p>
             <a:r>
-              <a:t>Flask on the Pi, published through a Cloudflare tunnel so a reviewer can open it</a:t>
-            </a:r>
-          </a:p>
-          <a:p>
-            <a:r>
-              <a:t>without us opening a port. It is operator-facing, not engineer-facing: live per-cell</a:t>
-            </a:r>
-          </a:p>
-          <a:p>
-            <a:r>
-              <a:t>voltages, pack current with direction, four thermal zones, and a charge or discharge</a:t>
-            </a:r>
-          </a:p>
-          <a:p>
-            <a:r>
-              <a:t>ETA smoothed with an EMA so it does not jitter. The piece worth noting is driving</a:t>
-            </a:r>
-          </a:p>
-          <a:p>
-            <a:r>
-              <a:t>context. Four modes from the change in current magnitude between samples — because a</a:t>
-            </a:r>
-          </a:p>
-          <a:p>
-            <a:r>
-              <a:t>voltage sag under hard acceleration is normal, and the same sag at idle is a fault.</a:t>
-            </a:r>
-          </a:p>
-          <a:p>
-            <a:r>
-              <a:t>Thresholds follow the mode.</a:t>
+              <a:t>Three tiers, each doing what the others cannot. The BMS senses, the Pi 5 runs</a:t>
+            </a:r>
+          </a:p>
+          <a:p>
+            <a:r>
+              <a:t>the logger and the inference and the dashboard, and an Arduino on its own power</a:t>
+            </a:r>
+          </a:p>
+          <a:p>
+            <a:r>
+              <a:t>rail watches for a heartbeat — if it stops, it pulls the Pi's RUN pin and forces</a:t>
+            </a:r>
+          </a:p>
+          <a:p>
+            <a:r>
+              <a:t>a reset. Inference sits at the edge deliberately: push it to a server and every</a:t>
+            </a:r>
+          </a:p>
+          <a:p>
+            <a:r>
+              <a:t>network hiccup becomes an unmonitored window. The lower diagram is the whole</a:t>
+            </a:r>
+          </a:p>
+          <a:p>
+            <a:r>
+              <a:t>data path — edge, service, interface — with everything published through a</a:t>
+            </a:r>
+          </a:p>
+          <a:p>
+            <a:r>
+              <a:t>Cloudflare tunnel so we never open an inbound port on the Pi.</a:t>
             </a:r>
           </a:p>
         </p:txBody>
@@ -1099,37 +1144,42 @@
           <a:lstStyle/>
           <a:p>
             <a:r>
-              <a:t>Six classes. The part I care more about is the confidence framework around them.</a:t>
-            </a:r>
-          </a:p>
-          <a:p>
-            <a:r>
-              <a:t>The classifier returns a probability and we split it three ways. Below 0.50 we</a:t>
-            </a:r>
-          </a:p>
-          <a:p>
-            <a:r>
-              <a:t>abstain outright — nothing is raised and the sample goes for review. Between 0.50 and</a:t>
-            </a:r>
-          </a:p>
-          <a:p>
-            <a:r>
-              <a:t>0.85 we log a warning that does not block the operator. Only above 0.85 do we raise</a:t>
-            </a:r>
-          </a:p>
-          <a:p>
-            <a:r>
-              <a:t>an alert with a corrective action. In a safety-critical system a confidently wrong</a:t>
-            </a:r>
-          </a:p>
-          <a:p>
-            <a:r>
-              <a:t>prediction is worse than none: an abstention sends someone to look, a false alert</a:t>
-            </a:r>
-          </a:p>
-          <a:p>
-            <a:r>
-              <a:t>teaches them to ignore the dashboard.</a:t>
+              <a:t>The platform is Flask on the Pi behind a Cloudflare tunnel. It is</a:t>
+            </a:r>
+          </a:p>
+          <a:p>
+            <a:r>
+              <a:t>operator-facing: live per-cell voltages, pack current with direction, four</a:t>
+            </a:r>
+          </a:p>
+          <a:p>
+            <a:r>
+              <a:t>thermal zones, and an ETA smoothed with an EMA so it does not jitter. The piece</a:t>
+            </a:r>
+          </a:p>
+          <a:p>
+            <a:r>
+              <a:t>worth calling out is driving context — four modes derived from the change in</a:t>
+            </a:r>
+          </a:p>
+          <a:p>
+            <a:r>
+              <a:t>current magnitude, because a voltage sag under hard acceleration is normal and</a:t>
+            </a:r>
+          </a:p>
+          <a:p>
+            <a:r>
+              <a:t>the same sag at idle is a fault. And the cycle engine compares each live cycle</a:t>
+            </a:r>
+          </a:p>
+          <a:p>
+            <a:r>
+              <a:t>against the average of all thirty-nine before it, so degradation shows up before</a:t>
+            </a:r>
+          </a:p>
+          <a:p>
+            <a:r>
+              <a:t>any absolute threshold is breached.</a:t>
             </a:r>
           </a:p>
         </p:txBody>
@@ -1199,37 +1249,42 @@
           <a:lstStyle/>
           <a:p>
             <a:r>
-              <a:t>This is what makes it reusable. Upload the datasheet for whatever cell you are</a:t>
-            </a:r>
-          </a:p>
-          <a:p>
-            <a:r>
-              <a:t>running; the parser pulls chemistry, voltages, capacity, current and thermal limits,</a:t>
-            </a:r>
-          </a:p>
-          <a:p>
-            <a:r>
-              <a:t>and derives series and parallel counts. Then it tiers the chemistry: NMC is direct</a:t>
-            </a:r>
-          </a:p>
-          <a:p>
-            <a:r>
-              <a:t>reuse, NCA and LCO share the 4.2-volt ceiling so they only shift, LFP needs a real</a:t>
-            </a:r>
-          </a:p>
-          <a:p>
-            <a:r>
-              <a:t>remap to 2.50–3.65 volts, and LTO at 2.4 nominal needs everything rescaled. The chart</a:t>
-            </a:r>
-          </a:p>
-          <a:p>
-            <a:r>
-              <a:t>shows why — our measured NMC curve moves about 13 millivolts per percent SOC, so</a:t>
-            </a:r>
-          </a:p>
-          <a:p>
-            <a:r>
-              <a:t>voltage tracks charge. On LFP's plateau it does not, and no offset fixes that.</a:t>
+              <a:t>The last piece is what makes this reusable. Upload the manufacturer datasheet,</a:t>
+            </a:r>
+          </a:p>
+          <a:p>
+            <a:r>
+              <a:t>the parser pulls chemistry and every limit, pack sizing derives the series and</a:t>
+            </a:r>
+          </a:p>
+          <a:p>
+            <a:r>
+              <a:t>parallel counts, and the chemistry gets tiered: NMC is direct reuse, NCA and LCO</a:t>
+            </a:r>
+          </a:p>
+          <a:p>
+            <a:r>
+              <a:t>share the ceiling so they only shift, LFP needs a genuine remap to 2.50 to 3.65</a:t>
+            </a:r>
+          </a:p>
+          <a:p>
+            <a:r>
+              <a:t>volts because of that flat OCV curve, and LTO needs everything rescaled. And you</a:t>
+            </a:r>
+          </a:p>
+          <a:p>
+            <a:r>
+              <a:t>can retrain on your own field telemetry from the browser. What is not finished:</a:t>
+            </a:r>
+          </a:p>
+          <a:p>
+            <a:r>
+              <a:t>imbalance recall, OOD recall, the Zynq path, a real LFP bench, and state of</a:t>
+            </a:r>
+          </a:p>
+          <a:p>
+            <a:r>
+              <a:t>health. Thank you — happy to take questions.</a:t>
             </a:r>
           </a:p>
         </p:txBody>
@@ -4280,7 +4335,7 @@
                 </a:solidFill>
                 <a:latin typeface="Inter"/>
               </a:rPr>
-              <a:t>AI-PBMS — AI-Powered Predictive Battery Management System  ·  Team ANS_4X</a:t>
+              <a:t>AI-PBMS — AI-Powered Predictive Battery Management System  ·  Team ANS_4X  ·  PSG iTech</a:t>
             </a:r>
           </a:p>
         </p:txBody>
@@ -4503,8 +4558,8 @@
         </p:nvSpPr>
         <p:spPr>
           <a:xfrm>
-            <a:off x="566928" y="1700784"/>
-            <a:ext cx="5797296" cy="3017520"/>
+            <a:off x="566928" y="1664208"/>
+            <a:ext cx="5797296" cy="2148840"/>
           </a:xfrm>
           <a:prstGeom prst="rect">
             <a:avLst/>
@@ -4532,7 +4587,7 @@
               <a:buChar char="●"/>
             </a:pPr>
             <a:r>
-              <a:rPr sz="1650">
+              <a:rPr sz="1500">
                 <a:solidFill>
                   <a:srgbClr val="0F172A"/>
                 </a:solidFill>
@@ -4557,7 +4612,7 @@
               <a:buChar char="●"/>
             </a:pPr>
             <a:r>
-              <a:rPr sz="1650">
+              <a:rPr sz="1500">
                 <a:solidFill>
                   <a:srgbClr val="0F172A"/>
                 </a:solidFill>
@@ -4582,7 +4637,7 @@
               <a:buChar char="●"/>
             </a:pPr>
             <a:r>
-              <a:rPr sz="1650">
+              <a:rPr sz="1500">
                 <a:solidFill>
                   <a:srgbClr val="0F172A"/>
                 </a:solidFill>
@@ -4607,38 +4662,13 @@
               <a:buChar char="●"/>
             </a:pPr>
             <a:r>
-              <a:rPr sz="1650">
+              <a:rPr sz="1500">
                 <a:solidFill>
                   <a:srgbClr val="0F172A"/>
                 </a:solidFill>
                 <a:latin typeface="Inter"/>
               </a:rPr>
-              <a:t>Programmable DC supply charges; electronic load drives discharge profiles.</a:t>
-            </a:r>
-          </a:p>
-          <a:p>
-            <a:pPr marL="274320" indent="-274320">
-              <a:lnSpc>
-                <a:spcPct val="116000"/>
-              </a:lnSpc>
-              <a:spcAft>
-                <a:spcPts val="900"/>
-              </a:spcAft>
-              <a:buClr>
-                <a:srgbClr val="0E7490"/>
-              </a:buClr>
-              <a:buSzPct val="62000"/>
-              <a:buFont typeface="Arial" pitchFamily="34" charset="0"/>
-              <a:buChar char="●"/>
-            </a:pPr>
-            <a:r>
-              <a:rPr sz="1650">
-                <a:solidFill>
-                  <a:srgbClr val="0F172A"/>
-                </a:solidFill>
-                <a:latin typeface="Inter"/>
-              </a:rPr>
-              <a:t>Every row the model ever sees came from this rig.</a:t>
+              <a:t>Programmable supply charges; electronic load drives discharge.</a:t>
             </a:r>
           </a:p>
         </p:txBody>
@@ -4651,7 +4681,7 @@
         </p:nvSpPr>
         <p:spPr>
           <a:xfrm>
-            <a:off x="566928" y="4882896"/>
+            <a:off x="566928" y="3913632"/>
             <a:ext cx="1339595" cy="786384"/>
           </a:xfrm>
           <a:prstGeom prst="rect">
@@ -4695,7 +4725,7 @@
         </p:nvSpPr>
         <p:spPr>
           <a:xfrm>
-            <a:off x="566928" y="4974336"/>
+            <a:off x="566928" y="4005072"/>
             <a:ext cx="1339595" cy="329184"/>
           </a:xfrm>
           <a:prstGeom prst="rect">
@@ -4737,7 +4767,7 @@
         </p:nvSpPr>
         <p:spPr>
           <a:xfrm>
-            <a:off x="566928" y="5340096"/>
+            <a:off x="566928" y="4370832"/>
             <a:ext cx="1339595" cy="256032"/>
           </a:xfrm>
           <a:prstGeom prst="rect">
@@ -4766,7 +4796,7 @@
                 </a:solidFill>
                 <a:latin typeface="Inter"/>
               </a:rPr>
-              <a:t>charge–discharge cycles</a:t>
+              <a:t>cycles</a:t>
             </a:r>
           </a:p>
         </p:txBody>
@@ -4779,7 +4809,7 @@
         </p:nvSpPr>
         <p:spPr>
           <a:xfrm>
-            <a:off x="2052827" y="4882896"/>
+            <a:off x="2052827" y="3913632"/>
             <a:ext cx="1339595" cy="786384"/>
           </a:xfrm>
           <a:prstGeom prst="rect">
@@ -4823,7 +4853,7 @@
         </p:nvSpPr>
         <p:spPr>
           <a:xfrm>
-            <a:off x="2052827" y="4974336"/>
+            <a:off x="2052827" y="4005072"/>
             <a:ext cx="1339595" cy="329184"/>
           </a:xfrm>
           <a:prstGeom prst="rect">
@@ -4865,7 +4895,7 @@
         </p:nvSpPr>
         <p:spPr>
           <a:xfrm>
-            <a:off x="2052827" y="5340096"/>
+            <a:off x="2052827" y="4370832"/>
             <a:ext cx="1339595" cy="256032"/>
           </a:xfrm>
           <a:prstGeom prst="rect">
@@ -4894,7 +4924,7 @@
                 </a:solidFill>
                 <a:latin typeface="Inter"/>
               </a:rPr>
-              <a:t>per cycle</a:t>
+              <a:t>each</a:t>
             </a:r>
           </a:p>
         </p:txBody>
@@ -4907,7 +4937,7 @@
         </p:nvSpPr>
         <p:spPr>
           <a:xfrm>
-            <a:off x="3538727" y="4882896"/>
+            <a:off x="3538727" y="3913632"/>
             <a:ext cx="1339595" cy="786384"/>
           </a:xfrm>
           <a:prstGeom prst="rect">
@@ -4951,7 +4981,7 @@
         </p:nvSpPr>
         <p:spPr>
           <a:xfrm>
-            <a:off x="3538727" y="4974336"/>
+            <a:off x="3538727" y="4005072"/>
             <a:ext cx="1339595" cy="329184"/>
           </a:xfrm>
           <a:prstGeom prst="rect">
@@ -4993,7 +5023,7 @@
         </p:nvSpPr>
         <p:spPr>
           <a:xfrm>
-            <a:off x="3538727" y="5340096"/>
+            <a:off x="3538727" y="4370832"/>
             <a:ext cx="1339595" cy="256032"/>
           </a:xfrm>
           <a:prstGeom prst="rect">
@@ -5022,7 +5052,7 @@
                 </a:solidFill>
                 <a:latin typeface="Inter"/>
               </a:rPr>
-              <a:t>supervised logging</a:t>
+              <a:t>logged</a:t>
             </a:r>
           </a:p>
         </p:txBody>
@@ -5035,7 +5065,7 @@
         </p:nvSpPr>
         <p:spPr>
           <a:xfrm>
-            <a:off x="5024627" y="4882896"/>
+            <a:off x="5024627" y="3913632"/>
             <a:ext cx="1339595" cy="786384"/>
           </a:xfrm>
           <a:prstGeom prst="rect">
@@ -5079,7 +5109,7 @@
         </p:nvSpPr>
         <p:spPr>
           <a:xfrm>
-            <a:off x="5024627" y="4974336"/>
+            <a:off x="5024627" y="4005072"/>
             <a:ext cx="1339595" cy="329184"/>
           </a:xfrm>
           <a:prstGeom prst="rect">
@@ -5121,7 +5151,7 @@
         </p:nvSpPr>
         <p:spPr>
           <a:xfrm>
-            <a:off x="5024627" y="5340096"/>
+            <a:off x="5024627" y="4370832"/>
             <a:ext cx="1339595" cy="256032"/>
           </a:xfrm>
           <a:prstGeom prst="rect">
@@ -5150,7 +5180,7 @@
                 </a:solidFill>
                 <a:latin typeface="Inter"/>
               </a:rPr>
-              <a:t>rows logged</a:t>
+              <a:t>rows</a:t>
             </a:r>
           </a:p>
         </p:txBody>
@@ -5163,8 +5193,136 @@
         </p:nvSpPr>
         <p:spPr>
           <a:xfrm>
-            <a:off x="6693408" y="1682610"/>
-            <a:ext cx="4931359" cy="3748811"/>
+            <a:off x="566928" y="4882896"/>
+            <a:ext cx="5797296" cy="1188720"/>
+          </a:xfrm>
+          <a:prstGeom prst="rect">
+            <a:avLst/>
+          </a:prstGeom>
+          <a:solidFill>
+            <a:srgbClr val="F1F5F9"/>
+          </a:solidFill>
+          <a:ln w="9525">
+            <a:solidFill>
+              <a:srgbClr val="CBD5E1"/>
+            </a:solidFill>
+          </a:ln>
+          <a:effectLst/>
+        </p:spPr>
+        <p:style>
+          <a:lnRef idx="1">
+            <a:schemeClr val="accent1"/>
+          </a:lnRef>
+          <a:fillRef idx="3">
+            <a:schemeClr val="accent1"/>
+          </a:fillRef>
+          <a:effectRef idx="2">
+            <a:schemeClr val="accent1"/>
+          </a:effectRef>
+          <a:fontRef idx="minor">
+            <a:schemeClr val="lt1"/>
+          </a:fontRef>
+        </p:style>
+        <p:txBody>
+          <a:bodyPr rtlCol="0" anchor="ctr"/>
+          <a:lstStyle/>
+          <a:p/>
+        </p:txBody>
+      </p:sp>
+      <p:sp>
+        <p:nvSpPr>
+          <p:cNvPr id="22" name="TextBox 21"/>
+          <p:cNvSpPr txBox="1"/>
+          <p:nvPr/>
+        </p:nvSpPr>
+        <p:spPr>
+          <a:xfrm>
+            <a:off x="768096" y="4992624"/>
+            <a:ext cx="5394959" cy="219456"/>
+          </a:xfrm>
+          <a:prstGeom prst="rect">
+            <a:avLst/>
+          </a:prstGeom>
+          <a:noFill/>
+        </p:spPr>
+        <p:txBody>
+          <a:bodyPr wrap="square" anchor="t" lIns="0" rIns="0" tIns="0" bIns="0">
+            <a:spAutoFit/>
+          </a:bodyPr>
+          <a:lstStyle/>
+          <a:p>
+            <a:pPr algn="l">
+              <a:lnSpc>
+                <a:spcPct val="118000"/>
+              </a:lnSpc>
+              <a:spcAft>
+                <a:spcPts val="0"/>
+              </a:spcAft>
+            </a:pPr>
+            <a:r>
+              <a:rPr sz="950" b="1">
+                <a:solidFill>
+                  <a:srgbClr val="B91C1C"/>
+                </a:solidFill>
+                <a:latin typeface="Inter"/>
+              </a:rPr>
+              <a:t>WHAT THE DATA SHOWED</a:t>
+            </a:r>
+          </a:p>
+        </p:txBody>
+      </p:sp>
+      <p:sp>
+        <p:nvSpPr>
+          <p:cNvPr id="23" name="TextBox 22"/>
+          <p:cNvSpPr txBox="1"/>
+          <p:nvPr/>
+        </p:nvSpPr>
+        <p:spPr>
+          <a:xfrm>
+            <a:off x="768096" y="5248656"/>
+            <a:ext cx="5394959" cy="731520"/>
+          </a:xfrm>
+          <a:prstGeom prst="rect">
+            <a:avLst/>
+          </a:prstGeom>
+          <a:noFill/>
+        </p:spPr>
+        <p:txBody>
+          <a:bodyPr wrap="square" anchor="t" lIns="0" rIns="0" tIns="0" bIns="0">
+            <a:spAutoFit/>
+          </a:bodyPr>
+          <a:lstStyle/>
+          <a:p>
+            <a:pPr algn="l">
+              <a:lnSpc>
+                <a:spcPct val="126000"/>
+              </a:lnSpc>
+              <a:spcAft>
+                <a:spcPts val="0"/>
+              </a:spcAft>
+            </a:pPr>
+            <a:r>
+              <a:rPr sz="1200" b="0">
+                <a:solidFill>
+                  <a:srgbClr val="0F172A"/>
+                </a:solidFill>
+                <a:latin typeface="Inter"/>
+              </a:rPr>
+              <a:t>Cell 1 runs 289 mV below its neighbours in every cycle. A pack-level voltmeter reads 30.5 V and calls this healthy.</a:t>
+            </a:r>
+          </a:p>
+        </p:txBody>
+      </p:sp>
+      <p:sp>
+        <p:nvSpPr>
+          <p:cNvPr id="24" name="Rectangle 23"/>
+          <p:cNvSpPr/>
+          <p:nvPr/>
+        </p:nvSpPr>
+        <p:spPr>
+          <a:xfrm>
+            <a:off x="8111210" y="1554480"/>
+            <a:ext cx="2095754" cy="1627632"/>
           </a:xfrm>
           <a:prstGeom prst="rect">
             <a:avLst/>
@@ -5201,7 +5359,7 @@
       </p:sp>
       <p:pic>
         <p:nvPicPr>
-          <p:cNvPr id="22" name="Picture 21" descr="p03_img1_x38.jpeg"/>
+          <p:cNvPr id="25" name="Picture 24" descr="p03_img1_x38.jpeg"/>
           <p:cNvPicPr>
             <a:picLocks noChangeAspect="1"/>
           </p:cNvPicPr>
@@ -5215,56 +5373,38 @@
         </p:blipFill>
         <p:spPr>
           <a:xfrm>
-            <a:off x="6812280" y="1801482"/>
-            <a:ext cx="4693615" cy="3511067"/>
+            <a:off x="8230082" y="1673352"/>
+            <a:ext cx="1858010" cy="1389888"/>
           </a:xfrm>
           <a:prstGeom prst="rect">
             <a:avLst/>
           </a:prstGeom>
         </p:spPr>
       </p:pic>
-      <p:sp>
-        <p:nvSpPr>
-          <p:cNvPr id="23" name="TextBox 22"/>
-          <p:cNvSpPr txBox="1"/>
-          <p:nvPr/>
-        </p:nvSpPr>
-        <p:spPr>
-          <a:xfrm>
-            <a:off x="6693408" y="5614416"/>
-            <a:ext cx="4931359" cy="237744"/>
-          </a:xfrm>
-          <a:prstGeom prst="rect">
-            <a:avLst/>
-          </a:prstGeom>
-          <a:noFill/>
-        </p:spPr>
-        <p:txBody>
-          <a:bodyPr wrap="square" anchor="t" lIns="0" rIns="0" tIns="0" bIns="0">
-            <a:spAutoFit/>
-          </a:bodyPr>
-          <a:lstStyle/>
-          <a:p>
-            <a:pPr algn="ctr">
-              <a:lnSpc>
-                <a:spcPct val="118000"/>
-              </a:lnSpc>
-              <a:spcAft>
-                <a:spcPts val="0"/>
-              </a:spcAft>
-            </a:pPr>
-            <a:r>
-              <a:rPr sz="950" b="0">
-                <a:solidFill>
-                  <a:srgbClr val="475569"/>
-                </a:solidFill>
-                <a:latin typeface="Inter"/>
-              </a:rPr>
-              <a:t>8S2P pack, JBD BMS and programmable electronic load on the bench</a:t>
-            </a:r>
-          </a:p>
-        </p:txBody>
-      </p:sp>
+      <p:pic>
+        <p:nvPicPr>
+          <p:cNvPr id="26" name="Picture 25" descr="fig_cell_traces.png"/>
+          <p:cNvPicPr>
+            <a:picLocks noChangeAspect="1"/>
+          </p:cNvPicPr>
+          <p:nvPr/>
+        </p:nvPicPr>
+        <p:blipFill>
+          <a:blip r:embed="rId3"/>
+          <a:stretch>
+            <a:fillRect/>
+          </a:stretch>
+        </p:blipFill>
+        <p:spPr>
+          <a:xfrm>
+            <a:off x="7163937" y="3310128"/>
+            <a:ext cx="3990300" cy="2834640"/>
+          </a:xfrm>
+          <a:prstGeom prst="rect">
+            <a:avLst/>
+          </a:prstGeom>
+        </p:spPr>
+      </p:pic>
     </p:spTree>
   </p:cSld>
   <p:clrMapOvr>
@@ -5328,7 +5468,7 @@
                 </a:solidFill>
                 <a:latin typeface="Inter"/>
               </a:rPr>
-              <a:t>Pack topology and the model behind it</a:t>
+              <a:t>The pack, and the model of the pack</a:t>
             </a:r>
           </a:p>
         </p:txBody>
@@ -5509,8 +5649,8 @@
         </p:nvSpPr>
         <p:spPr>
           <a:xfrm>
-            <a:off x="566928" y="1463040"/>
-            <a:ext cx="5797296" cy="2395728"/>
+            <a:off x="566928" y="1517904"/>
+            <a:ext cx="2761488" cy="2011680"/>
           </a:xfrm>
           <a:prstGeom prst="rect">
             <a:avLst/>
@@ -5528,7 +5668,7 @@
                 <a:spcPct val="116000"/>
               </a:lnSpc>
               <a:spcAft>
-                <a:spcPts val="900"/>
+                <a:spcPts val="700"/>
               </a:spcAft>
               <a:buClr>
                 <a:srgbClr val="0E7490"/>
@@ -5538,13 +5678,13 @@
               <a:buChar char="●"/>
             </a:pPr>
             <a:r>
-              <a:rPr sz="1650">
+              <a:rPr sz="1350">
                 <a:solidFill>
                   <a:srgbClr val="0F172A"/>
                 </a:solidFill>
                 <a:latin typeface="Inter"/>
               </a:rPr>
-              <a:t>8S sets the 33.6 V nominal bus the drivetrain expects.</a:t>
+              <a:t>8S sets the 33.6 V nominal bus voltage.</a:t>
             </a:r>
           </a:p>
           <a:p>
@@ -5553,7 +5693,7 @@
                 <a:spcPct val="116000"/>
               </a:lnSpc>
               <a:spcAft>
-                <a:spcPts val="900"/>
+                <a:spcPts val="700"/>
               </a:spcAft>
               <a:buClr>
                 <a:srgbClr val="0E7490"/>
@@ -5563,13 +5703,13 @@
               <a:buChar char="●"/>
             </a:pPr>
             <a:r>
-              <a:rPr sz="1650">
+              <a:rPr sz="1350">
                 <a:solidFill>
                   <a:srgbClr val="0F172A"/>
                 </a:solidFill>
                 <a:latin typeface="Inter"/>
               </a:rPr>
-              <a:t>2P buys 8 Ah capacity and the current headroom.</a:t>
+              <a:t>2P buys 8 Ah and current headroom.</a:t>
             </a:r>
           </a:p>
           <a:p>
@@ -5578,7 +5718,7 @@
                 <a:spcPct val="116000"/>
               </a:lnSpc>
               <a:spcAft>
-                <a:spcPts val="900"/>
+                <a:spcPts val="700"/>
               </a:spcAft>
               <a:buClr>
                 <a:srgbClr val="0E7490"/>
@@ -5588,22 +5728,45 @@
               <a:buChar char="●"/>
             </a:pPr>
             <a:r>
-              <a:rPr sz="1650">
+              <a:rPr sz="1350">
                 <a:solidFill>
                   <a:srgbClr val="0F172A"/>
                 </a:solidFill>
                 <a:latin typeface="Inter"/>
               </a:rPr>
-              <a:t>Eight per-cell taps make imbalance observable rather than inferred.</a:t>
-            </a:r>
-          </a:p>
+              <a:t>Sixteen LG INR21700-M50 cells.</a:t>
+            </a:r>
+          </a:p>
+        </p:txBody>
+      </p:sp>
+      <p:sp>
+        <p:nvSpPr>
+          <p:cNvPr id="8" name="TextBox 7"/>
+          <p:cNvSpPr txBox="1"/>
+          <p:nvPr/>
+        </p:nvSpPr>
+        <p:spPr>
+          <a:xfrm>
+            <a:off x="3602736" y="1517904"/>
+            <a:ext cx="2761488" cy="2011680"/>
+          </a:xfrm>
+          <a:prstGeom prst="rect">
+            <a:avLst/>
+          </a:prstGeom>
+          <a:noFill/>
+        </p:spPr>
+        <p:txBody>
+          <a:bodyPr wrap="square" lIns="0" rIns="0" tIns="0" bIns="0">
+            <a:spAutoFit/>
+          </a:bodyPr>
+          <a:lstStyle/>
           <a:p>
             <a:pPr marL="274320" indent="-274320">
               <a:lnSpc>
                 <a:spcPct val="116000"/>
               </a:lnSpc>
               <a:spcAft>
-                <a:spcPts val="900"/>
+                <a:spcPts val="700"/>
               </a:spcAft>
               <a:buClr>
                 <a:srgbClr val="0E7490"/>
@@ -5613,27 +5776,77 @@
               <a:buChar char="●"/>
             </a:pPr>
             <a:r>
-              <a:rPr sz="1650">
+              <a:rPr sz="1350">
                 <a:solidFill>
                   <a:srgbClr val="0F172A"/>
                 </a:solidFill>
                 <a:latin typeface="Inter"/>
               </a:rPr>
-              <a:t>1RC caught the instant drop but missed slow recovery.</a:t>
-            </a:r>
-          </a:p>
-        </p:txBody>
-      </p:sp>
-      <p:sp>
-        <p:nvSpPr>
-          <p:cNvPr id="8" name="TextBox 7"/>
+              <a:t>Eight taps make imbalance observable.</a:t>
+            </a:r>
+          </a:p>
+          <a:p>
+            <a:pPr marL="274320" indent="-274320">
+              <a:lnSpc>
+                <a:spcPct val="116000"/>
+              </a:lnSpc>
+              <a:spcAft>
+                <a:spcPts val="700"/>
+              </a:spcAft>
+              <a:buClr>
+                <a:srgbClr val="0E7490"/>
+              </a:buClr>
+              <a:buSzPct val="62000"/>
+              <a:buFont typeface="Arial" pitchFamily="34" charset="0"/>
+              <a:buChar char="●"/>
+            </a:pPr>
+            <a:r>
+              <a:rPr sz="1350">
+                <a:solidFill>
+                  <a:srgbClr val="0F172A"/>
+                </a:solidFill>
+                <a:latin typeface="Inter"/>
+              </a:rPr>
+              <a:t>Four NTCs give thermal resolution.</a:t>
+            </a:r>
+          </a:p>
+          <a:p>
+            <a:pPr marL="274320" indent="-274320">
+              <a:lnSpc>
+                <a:spcPct val="116000"/>
+              </a:lnSpc>
+              <a:spcAft>
+                <a:spcPts val="700"/>
+              </a:spcAft>
+              <a:buClr>
+                <a:srgbClr val="0E7490"/>
+              </a:buClr>
+              <a:buSzPct val="62000"/>
+              <a:buFont typeface="Arial" pitchFamily="34" charset="0"/>
+              <a:buChar char="●"/>
+            </a:pPr>
+            <a:r>
+              <a:rPr sz="1350">
+                <a:solidFill>
+                  <a:srgbClr val="0F172A"/>
+                </a:solidFill>
+                <a:latin typeface="Inter"/>
+              </a:rPr>
+              <a:t>1RC missed the slow relaxation.</a:t>
+            </a:r>
+          </a:p>
+        </p:txBody>
+      </p:sp>
+      <p:sp>
+        <p:nvSpPr>
+          <p:cNvPr id="9" name="TextBox 8"/>
           <p:cNvSpPr txBox="1"/>
           <p:nvPr/>
         </p:nvSpPr>
         <p:spPr>
           <a:xfrm>
-            <a:off x="566928" y="4059936"/>
-            <a:ext cx="5797296" cy="256032"/>
+            <a:off x="566928" y="3675887"/>
+            <a:ext cx="5797296" cy="219456"/>
           </a:xfrm>
           <a:prstGeom prst="rect">
             <a:avLst/>
@@ -5655,7 +5868,7 @@
               </a:spcAft>
             </a:pPr>
             <a:r>
-              <a:rPr sz="1000" b="1">
+              <a:rPr sz="950" b="1">
                 <a:solidFill>
                   <a:srgbClr val="475569"/>
                 </a:solidFill>
@@ -5668,13 +5881,13 @@
       </p:sp>
       <p:sp>
         <p:nvSpPr>
-          <p:cNvPr id="9" name="Rectangle 8"/>
+          <p:cNvPr id="10" name="Rectangle 9"/>
           <p:cNvSpPr/>
           <p:nvPr/>
         </p:nvSpPr>
         <p:spPr>
           <a:xfrm>
-            <a:off x="566928" y="4370832"/>
+            <a:off x="566928" y="3950208"/>
             <a:ext cx="1834895" cy="786384"/>
           </a:xfrm>
           <a:prstGeom prst="rect">
@@ -5712,13 +5925,13 @@
       </p:sp>
       <p:sp>
         <p:nvSpPr>
-          <p:cNvPr id="10" name="TextBox 9"/>
+          <p:cNvPr id="11" name="TextBox 10"/>
           <p:cNvSpPr txBox="1"/>
           <p:nvPr/>
         </p:nvSpPr>
         <p:spPr>
           <a:xfrm>
-            <a:off x="566928" y="4462272"/>
+            <a:off x="566928" y="4041648"/>
             <a:ext cx="1834895" cy="329184"/>
           </a:xfrm>
           <a:prstGeom prst="rect">
@@ -5754,13 +5967,13 @@
       </p:sp>
       <p:sp>
         <p:nvSpPr>
-          <p:cNvPr id="11" name="TextBox 10"/>
+          <p:cNvPr id="12" name="TextBox 11"/>
           <p:cNvSpPr txBox="1"/>
           <p:nvPr/>
         </p:nvSpPr>
         <p:spPr>
           <a:xfrm>
-            <a:off x="566928" y="4828032"/>
+            <a:off x="566928" y="4407408"/>
             <a:ext cx="1834895" cy="256032"/>
           </a:xfrm>
           <a:prstGeom prst="rect">
@@ -5796,13 +6009,13 @@
       </p:sp>
       <p:sp>
         <p:nvSpPr>
-          <p:cNvPr id="12" name="Rectangle 11"/>
+          <p:cNvPr id="13" name="Rectangle 12"/>
           <p:cNvSpPr/>
           <p:nvPr/>
         </p:nvSpPr>
         <p:spPr>
           <a:xfrm>
-            <a:off x="2548128" y="4370832"/>
+            <a:off x="2548128" y="3950208"/>
             <a:ext cx="1834895" cy="786384"/>
           </a:xfrm>
           <a:prstGeom prst="rect">
@@ -5840,13 +6053,13 @@
       </p:sp>
       <p:sp>
         <p:nvSpPr>
-          <p:cNvPr id="13" name="TextBox 12"/>
+          <p:cNvPr id="14" name="TextBox 13"/>
           <p:cNvSpPr txBox="1"/>
           <p:nvPr/>
         </p:nvSpPr>
         <p:spPr>
           <a:xfrm>
-            <a:off x="2548128" y="4462272"/>
+            <a:off x="2548128" y="4041648"/>
             <a:ext cx="1834895" cy="329184"/>
           </a:xfrm>
           <a:prstGeom prst="rect">
@@ -5882,13 +6095,13 @@
       </p:sp>
       <p:sp>
         <p:nvSpPr>
-          <p:cNvPr id="14" name="TextBox 13"/>
+          <p:cNvPr id="15" name="TextBox 14"/>
           <p:cNvSpPr txBox="1"/>
           <p:nvPr/>
         </p:nvSpPr>
         <p:spPr>
           <a:xfrm>
-            <a:off x="2548128" y="4828032"/>
+            <a:off x="2548128" y="4407408"/>
             <a:ext cx="1834895" cy="256032"/>
           </a:xfrm>
           <a:prstGeom prst="rect">
@@ -5924,13 +6137,13 @@
       </p:sp>
       <p:sp>
         <p:nvSpPr>
-          <p:cNvPr id="15" name="Rectangle 14"/>
+          <p:cNvPr id="16" name="Rectangle 15"/>
           <p:cNvSpPr/>
           <p:nvPr/>
         </p:nvSpPr>
         <p:spPr>
           <a:xfrm>
-            <a:off x="4529328" y="4370832"/>
+            <a:off x="4529328" y="3950208"/>
             <a:ext cx="1834895" cy="786384"/>
           </a:xfrm>
           <a:prstGeom prst="rect">
@@ -5968,13 +6181,13 @@
       </p:sp>
       <p:sp>
         <p:nvSpPr>
-          <p:cNvPr id="16" name="TextBox 15"/>
+          <p:cNvPr id="17" name="TextBox 16"/>
           <p:cNvSpPr txBox="1"/>
           <p:nvPr/>
         </p:nvSpPr>
         <p:spPr>
           <a:xfrm>
-            <a:off x="4529328" y="4462272"/>
+            <a:off x="4529328" y="4041648"/>
             <a:ext cx="1834895" cy="329184"/>
           </a:xfrm>
           <a:prstGeom prst="rect">
@@ -6010,13 +6223,13 @@
       </p:sp>
       <p:sp>
         <p:nvSpPr>
-          <p:cNvPr id="17" name="TextBox 16"/>
+          <p:cNvPr id="18" name="TextBox 17"/>
           <p:cNvSpPr txBox="1"/>
           <p:nvPr/>
         </p:nvSpPr>
         <p:spPr>
           <a:xfrm>
-            <a:off x="4529328" y="4828032"/>
+            <a:off x="4529328" y="4407408"/>
             <a:ext cx="1834895" cy="256032"/>
           </a:xfrm>
           <a:prstGeom prst="rect">
@@ -6052,13 +6265,13 @@
       </p:sp>
       <p:sp>
         <p:nvSpPr>
-          <p:cNvPr id="18" name="Rectangle 17"/>
+          <p:cNvPr id="19" name="Rectangle 18"/>
           <p:cNvSpPr/>
           <p:nvPr/>
         </p:nvSpPr>
         <p:spPr>
           <a:xfrm>
-            <a:off x="566928" y="5266944"/>
+            <a:off x="566928" y="4846320"/>
             <a:ext cx="1834895" cy="786384"/>
           </a:xfrm>
           <a:prstGeom prst="rect">
@@ -6096,13 +6309,13 @@
       </p:sp>
       <p:sp>
         <p:nvSpPr>
-          <p:cNvPr id="19" name="TextBox 18"/>
+          <p:cNvPr id="20" name="TextBox 19"/>
           <p:cNvSpPr txBox="1"/>
           <p:nvPr/>
         </p:nvSpPr>
         <p:spPr>
           <a:xfrm>
-            <a:off x="566928" y="5358383"/>
+            <a:off x="566928" y="4937759"/>
             <a:ext cx="1834895" cy="329184"/>
           </a:xfrm>
           <a:prstGeom prst="rect">
@@ -6138,13 +6351,13 @@
       </p:sp>
       <p:sp>
         <p:nvSpPr>
-          <p:cNvPr id="20" name="TextBox 19"/>
+          <p:cNvPr id="21" name="TextBox 20"/>
           <p:cNvSpPr txBox="1"/>
           <p:nvPr/>
         </p:nvSpPr>
         <p:spPr>
           <a:xfrm>
-            <a:off x="566928" y="5724144"/>
+            <a:off x="566928" y="5303520"/>
             <a:ext cx="1834895" cy="256032"/>
           </a:xfrm>
           <a:prstGeom prst="rect">
@@ -6180,13 +6393,13 @@
       </p:sp>
       <p:sp>
         <p:nvSpPr>
-          <p:cNvPr id="21" name="Rectangle 20"/>
+          <p:cNvPr id="22" name="Rectangle 21"/>
           <p:cNvSpPr/>
           <p:nvPr/>
         </p:nvSpPr>
         <p:spPr>
           <a:xfrm>
-            <a:off x="2548128" y="5266944"/>
+            <a:off x="2548128" y="4846320"/>
             <a:ext cx="1834895" cy="786384"/>
           </a:xfrm>
           <a:prstGeom prst="rect">
@@ -6224,13 +6437,13 @@
       </p:sp>
       <p:sp>
         <p:nvSpPr>
-          <p:cNvPr id="22" name="TextBox 21"/>
+          <p:cNvPr id="23" name="TextBox 22"/>
           <p:cNvSpPr txBox="1"/>
           <p:nvPr/>
         </p:nvSpPr>
         <p:spPr>
           <a:xfrm>
-            <a:off x="2548128" y="5358383"/>
+            <a:off x="2548128" y="4937759"/>
             <a:ext cx="1834895" cy="329184"/>
           </a:xfrm>
           <a:prstGeom prst="rect">
@@ -6266,13 +6479,13 @@
       </p:sp>
       <p:sp>
         <p:nvSpPr>
-          <p:cNvPr id="23" name="TextBox 22"/>
+          <p:cNvPr id="24" name="TextBox 23"/>
           <p:cNvSpPr txBox="1"/>
           <p:nvPr/>
         </p:nvSpPr>
         <p:spPr>
           <a:xfrm>
-            <a:off x="2548128" y="5724144"/>
+            <a:off x="2548128" y="5303520"/>
             <a:ext cx="1834895" cy="256032"/>
           </a:xfrm>
           <a:prstGeom prst="rect">
@@ -6308,13 +6521,13 @@
       </p:sp>
       <p:sp>
         <p:nvSpPr>
-          <p:cNvPr id="24" name="Rectangle 23"/>
+          <p:cNvPr id="25" name="Rectangle 24"/>
           <p:cNvSpPr/>
           <p:nvPr/>
         </p:nvSpPr>
         <p:spPr>
           <a:xfrm>
-            <a:off x="4529328" y="5266944"/>
+            <a:off x="4529328" y="4846320"/>
             <a:ext cx="1834895" cy="786384"/>
           </a:xfrm>
           <a:prstGeom prst="rect">
@@ -6352,13 +6565,13 @@
       </p:sp>
       <p:sp>
         <p:nvSpPr>
-          <p:cNvPr id="25" name="TextBox 24"/>
+          <p:cNvPr id="26" name="TextBox 25"/>
           <p:cNvSpPr txBox="1"/>
           <p:nvPr/>
         </p:nvSpPr>
         <p:spPr>
           <a:xfrm>
-            <a:off x="4529328" y="5358383"/>
+            <a:off x="4529328" y="4937759"/>
             <a:ext cx="1834895" cy="329184"/>
           </a:xfrm>
           <a:prstGeom prst="rect">
@@ -6387,20 +6600,20 @@
                 </a:solidFill>
                 <a:latin typeface="Inter"/>
               </a:rPr>
-              <a:t>2RC</a:t>
-            </a:r>
-          </a:p>
-        </p:txBody>
-      </p:sp>
-      <p:sp>
-        <p:nvSpPr>
-          <p:cNvPr id="26" name="TextBox 25"/>
+              <a:t>13.4 mV</a:t>
+            </a:r>
+          </a:p>
+        </p:txBody>
+      </p:sp>
+      <p:sp>
+        <p:nvSpPr>
+          <p:cNvPr id="27" name="TextBox 26"/>
           <p:cNvSpPr txBox="1"/>
           <p:nvPr/>
         </p:nvSpPr>
         <p:spPr>
           <a:xfrm>
-            <a:off x="4529328" y="5724144"/>
+            <a:off x="4529328" y="5303520"/>
             <a:ext cx="1834895" cy="256032"/>
           </a:xfrm>
           <a:prstGeom prst="rect">
@@ -6429,14 +6642,56 @@
                 </a:solidFill>
                 <a:latin typeface="Inter"/>
               </a:rPr>
-              <a:t>Vt = OCV − IR₀ − V₁ − V₂</a:t>
+              <a:t>per 1% SOC</a:t>
+            </a:r>
+          </a:p>
+        </p:txBody>
+      </p:sp>
+      <p:sp>
+        <p:nvSpPr>
+          <p:cNvPr id="28" name="TextBox 27"/>
+          <p:cNvSpPr txBox="1"/>
+          <p:nvPr/>
+        </p:nvSpPr>
+        <p:spPr>
+          <a:xfrm>
+            <a:off x="566928" y="5833872"/>
+            <a:ext cx="5797296" cy="274320"/>
+          </a:xfrm>
+          <a:prstGeom prst="rect">
+            <a:avLst/>
+          </a:prstGeom>
+          <a:noFill/>
+        </p:spPr>
+        <p:txBody>
+          <a:bodyPr wrap="square" anchor="t" lIns="0" rIns="0" tIns="0" bIns="0">
+            <a:spAutoFit/>
+          </a:bodyPr>
+          <a:lstStyle/>
+          <a:p>
+            <a:pPr algn="l">
+              <a:lnSpc>
+                <a:spcPct val="118000"/>
+              </a:lnSpc>
+              <a:spcAft>
+                <a:spcPts val="0"/>
+              </a:spcAft>
+            </a:pPr>
+            <a:r>
+              <a:rPr sz="1200" b="1">
+                <a:solidFill>
+                  <a:srgbClr val="0E7490"/>
+                </a:solidFill>
+                <a:latin typeface="Inter"/>
+              </a:rPr>
+              <a:t>Vt = OCV(SOC) − I·R₀ − V_RC1 − V_RC2</a:t>
             </a:r>
           </a:p>
         </p:txBody>
       </p:sp>
       <p:pic>
         <p:nvPicPr>
-          <p:cNvPr id="27" name="Picture 26" descr="diag_pack_8s2p.png"/>
+          <p:cNvPr id="29" name="Picture 28" descr="diag_pack_8s2p.png"/>
           <p:cNvPicPr>
             <a:picLocks noChangeAspect="1"/>
           </p:cNvPicPr>
@@ -6450,8 +6705,8 @@
         </p:blipFill>
         <p:spPr>
           <a:xfrm>
-            <a:off x="7015513" y="1408176"/>
-            <a:ext cx="4287149" cy="2212848"/>
+            <a:off x="7281245" y="1444752"/>
+            <a:ext cx="3755684" cy="1938528"/>
           </a:xfrm>
           <a:prstGeom prst="rect">
             <a:avLst/>
@@ -6460,7 +6715,7 @@
       </p:pic>
       <p:pic>
         <p:nvPicPr>
-          <p:cNvPr id="28" name="Picture 27" descr="diag_2rc_ecm.png"/>
+          <p:cNvPr id="30" name="Picture 29" descr="diag_2rc_ecm.png"/>
           <p:cNvPicPr>
             <a:picLocks noChangeAspect="1"/>
           </p:cNvPicPr>
@@ -6474,8 +6729,8 @@
         </p:blipFill>
         <p:spPr>
           <a:xfrm>
-            <a:off x="7027957" y="3675887"/>
-            <a:ext cx="4262259" cy="2286000"/>
+            <a:off x="6985335" y="3639312"/>
+            <a:ext cx="4347504" cy="2331720"/>
           </a:xfrm>
           <a:prstGeom prst="rect">
             <a:avLst/>
@@ -6545,7 +6800,7 @@
                 </a:solidFill>
                 <a:latin typeface="Inter"/>
               </a:rPr>
-              <a:t>From BLE frames to labelled rows</a:t>
+              <a:t>From BLE frames to a balanced training set</a:t>
             </a:r>
           </a:p>
         </p:txBody>
@@ -6727,7 +6982,7 @@
         <p:spPr>
           <a:xfrm>
             <a:off x="566928" y="1517904"/>
-            <a:ext cx="5797296" cy="2788920"/>
+            <a:ext cx="2761488" cy="2148840"/>
           </a:xfrm>
           <a:prstGeom prst="rect">
             <a:avLst/>
@@ -6745,7 +7000,7 @@
                 <a:spcPct val="116000"/>
               </a:lnSpc>
               <a:spcAft>
-                <a:spcPts val="900"/>
+                <a:spcPts val="700"/>
               </a:spcAft>
               <a:buClr>
                 <a:srgbClr val="0E7490"/>
@@ -6755,13 +7010,13 @@
               <a:buChar char="●"/>
             </a:pPr>
             <a:r>
-              <a:rPr sz="1650">
+              <a:rPr sz="1350">
                 <a:solidFill>
                   <a:srgbClr val="0F172A"/>
                 </a:solidFill>
                 <a:latin typeface="Inter"/>
               </a:rPr>
-              <a:t>JBD BMS → BLE via bleak → jbd_logger v9 on the Pi.</a:t>
+              <a:t>JBD BMS → BLE (bleak) → jbd_logger v9.</a:t>
             </a:r>
           </a:p>
           <a:p>
@@ -6770,7 +7025,7 @@
                 <a:spcPct val="116000"/>
               </a:lnSpc>
               <a:spcAft>
-                <a:spcPts val="900"/>
+                <a:spcPts val="700"/>
               </a:spcAft>
               <a:buClr>
                 <a:srgbClr val="0E7490"/>
@@ -6780,13 +7035,13 @@
               <a:buChar char="●"/>
             </a:pPr>
             <a:r>
-              <a:rPr sz="1650">
+              <a:rPr sz="1350">
                 <a:solidFill>
                   <a:srgbClr val="0F172A"/>
                 </a:solidFill>
                 <a:latin typeface="Inter"/>
               </a:rPr>
-              <a:t>BLE fragmented long responses; frames reassembled before any parsing.</a:t>
+              <a:t>Fragmented BLE frames reassembled first.</a:t>
             </a:r>
           </a:p>
           <a:p>
@@ -6795,7 +7050,7 @@
                 <a:spcPct val="116000"/>
               </a:lnSpc>
               <a:spcAft>
-                <a:spcPts val="900"/>
+                <a:spcPts val="700"/>
               </a:spcAft>
               <a:buClr>
                 <a:srgbClr val="0E7490"/>
@@ -6805,22 +7060,45 @@
               <a:buChar char="●"/>
             </a:pPr>
             <a:r>
-              <a:rPr sz="1650">
+              <a:rPr sz="1350">
                 <a:solidFill>
                   <a:srgbClr val="0F172A"/>
                 </a:solidFill>
                 <a:latin typeface="Inter"/>
               </a:rPr>
-              <a:t>NTC byte-offset fix realigned all four thermistor channels.</a:t>
-            </a:r>
-          </a:p>
+              <a:t>NTC byte-offset fix realigned four channels.</a:t>
+            </a:r>
+          </a:p>
+        </p:txBody>
+      </p:sp>
+      <p:sp>
+        <p:nvSpPr>
+          <p:cNvPr id="8" name="TextBox 7"/>
+          <p:cNvSpPr txBox="1"/>
+          <p:nvPr/>
+        </p:nvSpPr>
+        <p:spPr>
+          <a:xfrm>
+            <a:off x="3602736" y="1517904"/>
+            <a:ext cx="2761488" cy="2148840"/>
+          </a:xfrm>
+          <a:prstGeom prst="rect">
+            <a:avLst/>
+          </a:prstGeom>
+          <a:noFill/>
+        </p:spPr>
+        <p:txBody>
+          <a:bodyPr wrap="square" lIns="0" rIns="0" tIns="0" bIns="0">
+            <a:spAutoFit/>
+          </a:bodyPr>
+          <a:lstStyle/>
           <a:p>
             <a:pPr marL="274320" indent="-274320">
               <a:lnSpc>
                 <a:spcPct val="116000"/>
               </a:lnSpc>
               <a:spcAft>
-                <a:spcPts val="900"/>
+                <a:spcPts val="700"/>
               </a:spcAft>
               <a:buClr>
                 <a:srgbClr val="0E7490"/>
@@ -6830,13 +7108,13 @@
               <a:buChar char="●"/>
             </a:pPr>
             <a:r>
-              <a:rPr sz="1650">
+              <a:rPr sz="1350">
                 <a:solidFill>
                   <a:srgbClr val="0F172A"/>
                 </a:solidFill>
                 <a:latin typeface="Inter"/>
               </a:rPr>
-              <a:t>cell_v1 sat ~0.25 V below pack median in every cycle.</a:t>
+              <a:t>17 raw channels become 51 features.</a:t>
             </a:r>
           </a:p>
           <a:p>
@@ -6845,7 +7123,7 @@
                 <a:spcPct val="116000"/>
               </a:lnSpc>
               <a:spcAft>
-                <a:spcPts val="900"/>
+                <a:spcPts val="700"/>
               </a:spcAft>
               <a:buClr>
                 <a:srgbClr val="0E7490"/>
@@ -6855,27 +7133,52 @@
               <a:buChar char="●"/>
             </a:pPr>
             <a:r>
-              <a:rPr sz="1650">
+              <a:rPr sz="1350">
                 <a:solidFill>
                   <a:srgbClr val="0F172A"/>
                 </a:solidFill>
                 <a:latin typeface="Inter"/>
               </a:rPr>
-              <a:t>That one weak cell labelled 70.2% of rows Cell Imbalance.</a:t>
-            </a:r>
-          </a:p>
-        </p:txBody>
-      </p:sp>
-      <p:sp>
-        <p:nvSpPr>
-          <p:cNvPr id="8" name="Rectangle 7"/>
+              <a:t>Rolling stats, derivatives, per-cell rates.</a:t>
+            </a:r>
+          </a:p>
+          <a:p>
+            <a:pPr marL="274320" indent="-274320">
+              <a:lnSpc>
+                <a:spcPct val="116000"/>
+              </a:lnSpc>
+              <a:spcAft>
+                <a:spcPts val="700"/>
+              </a:spcAft>
+              <a:buClr>
+                <a:srgbClr val="0E7490"/>
+              </a:buClr>
+              <a:buSzPct val="62000"/>
+              <a:buFont typeface="Arial" pitchFamily="34" charset="0"/>
+              <a:buChar char="●"/>
+            </a:pPr>
+            <a:r>
+              <a:rPr sz="1350">
+                <a:solidFill>
+                  <a:srgbClr val="0F172A"/>
+                </a:solidFill>
+                <a:latin typeface="Inter"/>
+              </a:rPr>
+              <a:t>cell_v1 skew labelled 70.2% Cell Imbalance.</a:t>
+            </a:r>
+          </a:p>
+        </p:txBody>
+      </p:sp>
+      <p:sp>
+        <p:nvSpPr>
+          <p:cNvPr id="9" name="Rectangle 8"/>
           <p:cNvSpPr/>
           <p:nvPr/>
         </p:nvSpPr>
         <p:spPr>
           <a:xfrm>
-            <a:off x="566928" y="4590288"/>
-            <a:ext cx="5797296" cy="1481328"/>
+            <a:off x="566928" y="3785615"/>
+            <a:ext cx="5797296" cy="1115568"/>
           </a:xfrm>
           <a:prstGeom prst="rect">
             <a:avLst/>
@@ -6912,14 +7215,14 @@
       </p:sp>
       <p:sp>
         <p:nvSpPr>
-          <p:cNvPr id="9" name="TextBox 8"/>
+          <p:cNvPr id="10" name="TextBox 9"/>
           <p:cNvSpPr txBox="1"/>
           <p:nvPr/>
         </p:nvSpPr>
         <p:spPr>
           <a:xfrm>
-            <a:off x="768096" y="4736592"/>
-            <a:ext cx="5394959" cy="237744"/>
+            <a:off x="768096" y="3895344"/>
+            <a:ext cx="5394959" cy="219456"/>
           </a:xfrm>
           <a:prstGeom prst="rect">
             <a:avLst/>
@@ -6941,7 +7244,7 @@
               </a:spcAft>
             </a:pPr>
             <a:r>
-              <a:rPr sz="1000" b="1">
+              <a:rPr sz="950" b="1">
                 <a:solidFill>
                   <a:srgbClr val="B45309"/>
                 </a:solidFill>
@@ -6954,14 +7257,14 @@
       </p:sp>
       <p:sp>
         <p:nvSpPr>
-          <p:cNvPr id="10" name="TextBox 9"/>
+          <p:cNvPr id="11" name="TextBox 10"/>
           <p:cNvSpPr txBox="1"/>
           <p:nvPr/>
         </p:nvSpPr>
         <p:spPr>
           <a:xfrm>
-            <a:off x="768096" y="5010912"/>
-            <a:ext cx="5394959" cy="969264"/>
+            <a:off x="768096" y="4151376"/>
+            <a:ext cx="5394959" cy="676656"/>
           </a:xfrm>
           <a:prstGeom prst="rect">
             <a:avLst/>
@@ -6983,20 +7286,148 @@
               </a:spcAft>
             </a:pPr>
             <a:r>
-              <a:rPr sz="1250" b="0">
+              <a:rPr sz="1150" b="0">
                 <a:solidFill>
                   <a:srgbClr val="0F172A"/>
                 </a:solidFill>
                 <a:latin typeface="Inter"/>
               </a:rPr>
-              <a:t>Physics-informed synthetic faults generated against datasheet limits, then down-sampled to an equal count per class — a 50/50 real-to-synthetic split that removes the normalcy bias without discarding real rows.</a:t>
+              <a:t>Physics-informed synthetic faults generated against datasheet limits, then balanced to an equal count per class — 50/50 real to synthetic.</a:t>
+            </a:r>
+          </a:p>
+        </p:txBody>
+      </p:sp>
+      <p:sp>
+        <p:nvSpPr>
+          <p:cNvPr id="12" name="Rectangle 11"/>
+          <p:cNvSpPr/>
+          <p:nvPr/>
+        </p:nvSpPr>
+        <p:spPr>
+          <a:xfrm>
+            <a:off x="566928" y="5010912"/>
+            <a:ext cx="5797296" cy="1060704"/>
+          </a:xfrm>
+          <a:prstGeom prst="rect">
+            <a:avLst/>
+          </a:prstGeom>
+          <a:solidFill>
+            <a:srgbClr val="F1F5F9"/>
+          </a:solidFill>
+          <a:ln w="9525">
+            <a:solidFill>
+              <a:srgbClr val="CBD5E1"/>
+            </a:solidFill>
+          </a:ln>
+          <a:effectLst/>
+        </p:spPr>
+        <p:style>
+          <a:lnRef idx="1">
+            <a:schemeClr val="accent1"/>
+          </a:lnRef>
+          <a:fillRef idx="3">
+            <a:schemeClr val="accent1"/>
+          </a:fillRef>
+          <a:effectRef idx="2">
+            <a:schemeClr val="accent1"/>
+          </a:effectRef>
+          <a:fontRef idx="minor">
+            <a:schemeClr val="lt1"/>
+          </a:fontRef>
+        </p:style>
+        <p:txBody>
+          <a:bodyPr rtlCol="0" anchor="ctr"/>
+          <a:lstStyle/>
+          <a:p/>
+        </p:txBody>
+      </p:sp>
+      <p:sp>
+        <p:nvSpPr>
+          <p:cNvPr id="13" name="TextBox 12"/>
+          <p:cNvSpPr txBox="1"/>
+          <p:nvPr/>
+        </p:nvSpPr>
+        <p:spPr>
+          <a:xfrm>
+            <a:off x="768096" y="5120640"/>
+            <a:ext cx="5394959" cy="219456"/>
+          </a:xfrm>
+          <a:prstGeom prst="rect">
+            <a:avLst/>
+          </a:prstGeom>
+          <a:noFill/>
+        </p:spPr>
+        <p:txBody>
+          <a:bodyPr wrap="square" anchor="t" lIns="0" rIns="0" tIns="0" bIns="0">
+            <a:spAutoFit/>
+          </a:bodyPr>
+          <a:lstStyle/>
+          <a:p>
+            <a:pPr algn="l">
+              <a:lnSpc>
+                <a:spcPct val="118000"/>
+              </a:lnSpc>
+              <a:spcAft>
+                <a:spcPts val="0"/>
+              </a:spcAft>
+            </a:pPr>
+            <a:r>
+              <a:rPr sz="950" b="1">
+                <a:solidFill>
+                  <a:srgbClr val="0E7490"/>
+                </a:solidFill>
+                <a:latin typeface="Inter"/>
+              </a:rPr>
+              <a:t>LEAKAGE CONTROL</a:t>
+            </a:r>
+          </a:p>
+        </p:txBody>
+      </p:sp>
+      <p:sp>
+        <p:nvSpPr>
+          <p:cNvPr id="14" name="TextBox 13"/>
+          <p:cNvSpPr txBox="1"/>
+          <p:nvPr/>
+        </p:nvSpPr>
+        <p:spPr>
+          <a:xfrm>
+            <a:off x="768096" y="5376672"/>
+            <a:ext cx="5394959" cy="640080"/>
+          </a:xfrm>
+          <a:prstGeom prst="rect">
+            <a:avLst/>
+          </a:prstGeom>
+          <a:noFill/>
+        </p:spPr>
+        <p:txBody>
+          <a:bodyPr wrap="square" anchor="t" lIns="0" rIns="0" tIns="0" bIns="0">
+            <a:spAutoFit/>
+          </a:bodyPr>
+          <a:lstStyle/>
+          <a:p>
+            <a:pPr algn="l">
+              <a:lnSpc>
+                <a:spcPct val="124000"/>
+              </a:lnSpc>
+              <a:spcAft>
+                <a:spcPts val="0"/>
+              </a:spcAft>
+            </a:pPr>
+            <a:r>
+              <a:rPr sz="1150" b="0">
+                <a:solidFill>
+                  <a:srgbClr val="0F172A"/>
+                </a:solidFill>
+                <a:latin typeface="Inter"/>
+              </a:rPr>
+              <a:t>Windows and derivatives computed inside each (split, label) group, so none straddles a train/test boundary. 208,010 rows, 70/15/15.</a:t>
             </a:r>
           </a:p>
         </p:txBody>
       </p:sp>
       <p:pic>
         <p:nvPicPr>
-          <p:cNvPr id="11" name="Picture 10" descr="fig_class_distribution.png"/>
+          <p:cNvPr id="15" name="Picture 14" descr="fig_feature_importance.png"/>
           <p:cNvPicPr>
             <a:picLocks noChangeAspect="1"/>
           </p:cNvPicPr>
@@ -7010,8 +7441,32 @@
         </p:blipFill>
         <p:spPr>
           <a:xfrm>
-            <a:off x="6693408" y="1783391"/>
-            <a:ext cx="4931359" cy="3958729"/>
+            <a:off x="7448719" y="1444752"/>
+            <a:ext cx="3420735" cy="2514600"/>
+          </a:xfrm>
+          <a:prstGeom prst="rect">
+            <a:avLst/>
+          </a:prstGeom>
+        </p:spPr>
+      </p:pic>
+      <p:pic>
+        <p:nvPicPr>
+          <p:cNvPr id="16" name="Picture 15" descr="fig_dataset_composition.png"/>
+          <p:cNvPicPr>
+            <a:picLocks noChangeAspect="1"/>
+          </p:cNvPicPr>
+          <p:nvPr/>
+        </p:nvPicPr>
+        <p:blipFill>
+          <a:blip r:embed="rId3"/>
+          <a:stretch>
+            <a:fillRect/>
+          </a:stretch>
+        </p:blipFill>
+        <p:spPr>
+          <a:xfrm>
+            <a:off x="7540869" y="4059935"/>
+            <a:ext cx="3236436" cy="2103120"/>
           </a:xfrm>
           <a:prstGeom prst="rect">
             <a:avLst/>
@@ -7081,7 +7536,7 @@
                 </a:solidFill>
                 <a:latin typeface="Inter"/>
               </a:rPr>
-              <a:t>Why XGBoost, and not the obvious alternatives</a:t>
+              <a:t>We benchmarked all six on the same split</a:t>
             </a:r>
           </a:p>
         </p:txBody>
@@ -7262,8 +7717,8 @@
         </p:nvSpPr>
         <p:spPr>
           <a:xfrm>
-            <a:off x="566928" y="1481328"/>
-            <a:ext cx="11057839" cy="402336"/>
+            <a:off x="566928" y="1444752"/>
+            <a:ext cx="11057839" cy="384048"/>
           </a:xfrm>
           <a:prstGeom prst="rect">
             <a:avLst/>
@@ -7306,8 +7761,8 @@
         </p:nvSpPr>
         <p:spPr>
           <a:xfrm>
-            <a:off x="649224" y="1481328"/>
-            <a:ext cx="1805482" cy="402336"/>
+            <a:off x="649224" y="1444752"/>
+            <a:ext cx="1869033" cy="384048"/>
           </a:xfrm>
           <a:prstGeom prst="rect">
             <a:avLst/>
@@ -7329,7 +7784,7 @@
               </a:spcAft>
             </a:pPr>
             <a:r>
-              <a:rPr sz="1050" b="1">
+              <a:rPr sz="1000" b="1">
                 <a:solidFill>
                   <a:srgbClr val="0F172A"/>
                 </a:solidFill>
@@ -7348,8 +7803,8 @@
         </p:nvSpPr>
         <p:spPr>
           <a:xfrm>
-            <a:off x="2619298" y="1481328"/>
-            <a:ext cx="1106424" cy="402336"/>
+            <a:off x="2682849" y="1444752"/>
+            <a:ext cx="1169974" cy="384048"/>
           </a:xfrm>
           <a:prstGeom prst="rect">
             <a:avLst/>
@@ -7371,7 +7826,7 @@
               </a:spcAft>
             </a:pPr>
             <a:r>
-              <a:rPr sz="1050" b="1">
+              <a:rPr sz="1000" b="1">
                 <a:solidFill>
                   <a:srgbClr val="0F172A"/>
                 </a:solidFill>
@@ -7390,8 +7845,8 @@
         </p:nvSpPr>
         <p:spPr>
           <a:xfrm>
-            <a:off x="3890314" y="1481328"/>
-            <a:ext cx="1106424" cy="402336"/>
+            <a:off x="4017416" y="1444752"/>
+            <a:ext cx="1106424" cy="384048"/>
           </a:xfrm>
           <a:prstGeom prst="rect">
             <a:avLst/>
@@ -7413,13 +7868,13 @@
               </a:spcAft>
             </a:pPr>
             <a:r>
-              <a:rPr sz="1050" b="1">
+              <a:rPr sz="1000" b="1">
                 <a:solidFill>
                   <a:srgbClr val="0F172A"/>
                 </a:solidFill>
                 <a:latin typeface="Inter"/>
               </a:rPr>
-              <a:t>Latency</a:t>
+              <a:t>Macro F1</a:t>
             </a:r>
           </a:p>
         </p:txBody>
@@ -7432,8 +7887,8 @@
         </p:nvSpPr>
         <p:spPr>
           <a:xfrm>
-            <a:off x="5161330" y="1481328"/>
-            <a:ext cx="915771" cy="402336"/>
+            <a:off x="5288432" y="1444752"/>
+            <a:ext cx="1106424" cy="384048"/>
           </a:xfrm>
           <a:prstGeom prst="rect">
             <a:avLst/>
@@ -7455,13 +7910,13 @@
               </a:spcAft>
             </a:pPr>
             <a:r>
-              <a:rPr sz="1050" b="1">
+              <a:rPr sz="1000" b="1">
                 <a:solidFill>
                   <a:srgbClr val="0F172A"/>
                 </a:solidFill>
                 <a:latin typeface="Inter"/>
               </a:rPr>
-              <a:t>Size</a:t>
+              <a:t>Latency</a:t>
             </a:r>
           </a:p>
         </p:txBody>
@@ -7474,8 +7929,8 @@
         </p:nvSpPr>
         <p:spPr>
           <a:xfrm>
-            <a:off x="6241694" y="1481328"/>
-            <a:ext cx="915771" cy="402336"/>
+            <a:off x="6559448" y="1444752"/>
+            <a:ext cx="1042873" cy="384048"/>
           </a:xfrm>
           <a:prstGeom prst="rect">
             <a:avLst/>
@@ -7497,13 +7952,13 @@
               </a:spcAft>
             </a:pPr>
             <a:r>
-              <a:rPr sz="1050" b="1">
+              <a:rPr sz="1000" b="1">
                 <a:solidFill>
                   <a:srgbClr val="0F172A"/>
                 </a:solidFill>
                 <a:latin typeface="Inter"/>
               </a:rPr>
-              <a:t>Edge</a:t>
+              <a:t>Size</a:t>
             </a:r>
           </a:p>
         </p:txBody>
@@ -7516,8 +7971,8 @@
         </p:nvSpPr>
         <p:spPr>
           <a:xfrm>
-            <a:off x="7322058" y="1481328"/>
-            <a:ext cx="1360627" cy="402336"/>
+            <a:off x="7766913" y="1444752"/>
+            <a:ext cx="852220" cy="384048"/>
           </a:xfrm>
           <a:prstGeom prst="rect">
             <a:avLst/>
@@ -7539,13 +7994,13 @@
               </a:spcAft>
             </a:pPr>
             <a:r>
-              <a:rPr sz="1050" b="1">
+              <a:rPr sz="1000" b="1">
                 <a:solidFill>
                   <a:srgbClr val="0F172A"/>
                 </a:solidFill>
                 <a:latin typeface="Inter"/>
               </a:rPr>
-              <a:t>Interpretable</a:t>
+              <a:t>Edge</a:t>
             </a:r>
           </a:p>
         </p:txBody>
@@ -7558,8 +8013,8 @@
         </p:nvSpPr>
         <p:spPr>
           <a:xfrm>
-            <a:off x="8847277" y="1481328"/>
-            <a:ext cx="2695194" cy="402336"/>
+            <a:off x="8783726" y="1444752"/>
+            <a:ext cx="2758744" cy="384048"/>
           </a:xfrm>
           <a:prstGeom prst="rect">
             <a:avLst/>
@@ -7581,7 +8036,7 @@
               </a:spcAft>
             </a:pPr>
             <a:r>
-              <a:rPr sz="1050" b="1">
+              <a:rPr sz="1000" b="1">
                 <a:solidFill>
                   <a:srgbClr val="0F172A"/>
                 </a:solidFill>
@@ -7600,8 +8055,8 @@
         </p:nvSpPr>
         <p:spPr>
           <a:xfrm>
-            <a:off x="566928" y="1883664"/>
-            <a:ext cx="11057839" cy="457200"/>
+            <a:off x="566928" y="1828800"/>
+            <a:ext cx="11057839" cy="402336"/>
           </a:xfrm>
           <a:prstGeom prst="rect">
             <a:avLst/>
@@ -7644,8 +8099,8 @@
         </p:nvSpPr>
         <p:spPr>
           <a:xfrm>
-            <a:off x="649224" y="1883664"/>
-            <a:ext cx="1805482" cy="457200"/>
+            <a:off x="649224" y="1828800"/>
+            <a:ext cx="1869033" cy="402336"/>
           </a:xfrm>
           <a:prstGeom prst="rect">
             <a:avLst/>
@@ -7667,7 +8122,7 @@
               </a:spcAft>
             </a:pPr>
             <a:r>
-              <a:rPr sz="1150" b="1">
+              <a:rPr sz="1100" b="1">
                 <a:solidFill>
                   <a:srgbClr val="0F172A"/>
                 </a:solidFill>
@@ -7686,8 +8141,8 @@
         </p:nvSpPr>
         <p:spPr>
           <a:xfrm>
-            <a:off x="2619298" y="1883664"/>
-            <a:ext cx="1106424" cy="457200"/>
+            <a:off x="2682849" y="1828800"/>
+            <a:ext cx="1169974" cy="402336"/>
           </a:xfrm>
           <a:prstGeom prst="rect">
             <a:avLst/>
@@ -7709,13 +8164,13 @@
               </a:spcAft>
             </a:pPr>
             <a:r>
-              <a:rPr sz="1150" b="1">
+              <a:rPr sz="1100" b="1">
                 <a:solidFill>
                   <a:srgbClr val="0E7490"/>
                 </a:solidFill>
                 <a:latin typeface="Inter"/>
               </a:rPr>
-              <a:t>98.55%</a:t>
+              <a:t>94.19%</a:t>
             </a:r>
           </a:p>
         </p:txBody>
@@ -7728,8 +8183,8 @@
         </p:nvSpPr>
         <p:spPr>
           <a:xfrm>
-            <a:off x="3890314" y="1883664"/>
-            <a:ext cx="1106424" cy="457200"/>
+            <a:off x="4017416" y="1828800"/>
+            <a:ext cx="1106424" cy="402336"/>
           </a:xfrm>
           <a:prstGeom prst="rect">
             <a:avLst/>
@@ -7751,13 +8206,13 @@
               </a:spcAft>
             </a:pPr>
             <a:r>
-              <a:rPr sz="1150" b="1">
-                <a:solidFill>
-                  <a:srgbClr val="0E7490"/>
-                </a:solidFill>
-                <a:latin typeface="Inter"/>
-              </a:rPr>
-              <a:t>0.85 ms</a:t>
+              <a:rPr sz="1100" b="0">
+                <a:solidFill>
+                  <a:srgbClr val="475569"/>
+                </a:solidFill>
+                <a:latin typeface="Inter"/>
+              </a:rPr>
+              <a:t>0.905</a:t>
             </a:r>
           </a:p>
         </p:txBody>
@@ -7770,8 +8225,8 @@
         </p:nvSpPr>
         <p:spPr>
           <a:xfrm>
-            <a:off x="5161330" y="1883664"/>
-            <a:ext cx="915771" cy="457200"/>
+            <a:off x="5288432" y="1828800"/>
+            <a:ext cx="1106424" cy="402336"/>
           </a:xfrm>
           <a:prstGeom prst="rect">
             <a:avLst/>
@@ -7793,13 +8248,13 @@
               </a:spcAft>
             </a:pPr>
             <a:r>
-              <a:rPr sz="1150" b="0">
-                <a:solidFill>
-                  <a:srgbClr val="0F172A"/>
-                </a:solidFill>
-                <a:latin typeface="Inter"/>
-              </a:rPr>
-              <a:t>~1.4 MB</a:t>
+              <a:rPr sz="1100" b="1">
+                <a:solidFill>
+                  <a:srgbClr val="0E7490"/>
+                </a:solidFill>
+                <a:latin typeface="Inter"/>
+              </a:rPr>
+              <a:t>0.462 ms</a:t>
             </a:r>
           </a:p>
         </p:txBody>
@@ -7812,8 +8267,8 @@
         </p:nvSpPr>
         <p:spPr>
           <a:xfrm>
-            <a:off x="6241694" y="1883664"/>
-            <a:ext cx="915771" cy="457200"/>
+            <a:off x="6559448" y="1828800"/>
+            <a:ext cx="1042873" cy="402336"/>
           </a:xfrm>
           <a:prstGeom prst="rect">
             <a:avLst/>
@@ -7835,13 +8290,13 @@
               </a:spcAft>
             </a:pPr>
             <a:r>
-              <a:rPr sz="1150" b="1">
-                <a:solidFill>
-                  <a:srgbClr val="0E7490"/>
-                </a:solidFill>
-                <a:latin typeface="Inter"/>
-              </a:rPr>
-              <a:t>Yes</a:t>
+              <a:rPr sz="1100" b="0">
+                <a:solidFill>
+                  <a:srgbClr val="475569"/>
+                </a:solidFill>
+                <a:latin typeface="Inter"/>
+              </a:rPr>
+              <a:t>1.40 MB</a:t>
             </a:r>
           </a:p>
         </p:txBody>
@@ -7854,8 +8309,8 @@
         </p:nvSpPr>
         <p:spPr>
           <a:xfrm>
-            <a:off x="7322058" y="1883664"/>
-            <a:ext cx="1360627" cy="457200"/>
+            <a:off x="7766913" y="1828800"/>
+            <a:ext cx="852220" cy="402336"/>
           </a:xfrm>
           <a:prstGeom prst="rect">
             <a:avLst/>
@@ -7877,7 +8332,7 @@
               </a:spcAft>
             </a:pPr>
             <a:r>
-              <a:rPr sz="1150" b="1">
+              <a:rPr sz="1100" b="0">
                 <a:solidFill>
                   <a:srgbClr val="0E7490"/>
                 </a:solidFill>
@@ -7896,8 +8351,8 @@
         </p:nvSpPr>
         <p:spPr>
           <a:xfrm>
-            <a:off x="8847277" y="1883664"/>
-            <a:ext cx="2695194" cy="457200"/>
+            <a:off x="8783726" y="1828800"/>
+            <a:ext cx="2758744" cy="402336"/>
           </a:xfrm>
           <a:prstGeom prst="rect">
             <a:avLst/>
@@ -7919,13 +8374,13 @@
               </a:spcAft>
             </a:pPr>
             <a:r>
-              <a:rPr sz="1150" b="1">
+              <a:rPr sz="1100" b="1">
                 <a:solidFill>
                   <a:srgbClr val="0E7490"/>
                 </a:solidFill>
                 <a:latin typeface="Inter"/>
               </a:rPr>
-              <a:t>Deployed</a:t>
+              <a:t>Deployed — 1 row, no buffer</a:t>
             </a:r>
           </a:p>
         </p:txBody>
@@ -7938,7 +8393,7 @@
         </p:nvSpPr>
         <p:spPr>
           <a:xfrm>
-            <a:off x="566928" y="2798064"/>
+            <a:off x="566928" y="2633472"/>
             <a:ext cx="11057839" cy="10972"/>
           </a:xfrm>
           <a:prstGeom prst="rect">
@@ -7980,8 +8435,8 @@
         </p:nvSpPr>
         <p:spPr>
           <a:xfrm>
-            <a:off x="649224" y="2340864"/>
-            <a:ext cx="1805482" cy="457200"/>
+            <a:off x="649224" y="2231136"/>
+            <a:ext cx="1869033" cy="402336"/>
           </a:xfrm>
           <a:prstGeom prst="rect">
             <a:avLst/>
@@ -8003,7 +8458,7 @@
               </a:spcAft>
             </a:pPr>
             <a:r>
-              <a:rPr sz="1150" b="0">
+              <a:rPr sz="1100" b="0">
                 <a:solidFill>
                   <a:srgbClr val="0F172A"/>
                 </a:solidFill>
@@ -8022,8 +8477,8 @@
         </p:nvSpPr>
         <p:spPr>
           <a:xfrm>
-            <a:off x="2619298" y="2340864"/>
-            <a:ext cx="1106424" cy="457200"/>
+            <a:off x="2682849" y="2231136"/>
+            <a:ext cx="1169974" cy="402336"/>
           </a:xfrm>
           <a:prstGeom prst="rect">
             <a:avLst/>
@@ -8045,13 +8500,13 @@
               </a:spcAft>
             </a:pPr>
             <a:r>
-              <a:rPr sz="1150" b="0">
-                <a:solidFill>
-                  <a:srgbClr val="475569"/>
-                </a:solidFill>
-                <a:latin typeface="Inter"/>
-              </a:rPr>
-              <a:t>—</a:t>
+              <a:rPr sz="1100" b="0">
+                <a:solidFill>
+                  <a:srgbClr val="0F172A"/>
+                </a:solidFill>
+                <a:latin typeface="Inter"/>
+              </a:rPr>
+              <a:t>95.11%</a:t>
             </a:r>
           </a:p>
         </p:txBody>
@@ -8064,8 +8519,8 @@
         </p:nvSpPr>
         <p:spPr>
           <a:xfrm>
-            <a:off x="3890314" y="2340864"/>
-            <a:ext cx="1106424" cy="457200"/>
+            <a:off x="4017416" y="2231136"/>
+            <a:ext cx="1106424" cy="402336"/>
           </a:xfrm>
           <a:prstGeom prst="rect">
             <a:avLst/>
@@ -8087,13 +8542,13 @@
               </a:spcAft>
             </a:pPr>
             <a:r>
-              <a:rPr sz="1150" b="0">
+              <a:rPr sz="1100" b="0">
                 <a:solidFill>
                   <a:srgbClr val="475569"/>
                 </a:solidFill>
                 <a:latin typeface="Inter"/>
               </a:rPr>
-              <a:t>—</a:t>
+              <a:t>0.918</a:t>
             </a:r>
           </a:p>
         </p:txBody>
@@ -8106,8 +8561,8 @@
         </p:nvSpPr>
         <p:spPr>
           <a:xfrm>
-            <a:off x="5161330" y="2340864"/>
-            <a:ext cx="915771" cy="457200"/>
+            <a:off x="5288432" y="2231136"/>
+            <a:ext cx="1106424" cy="402336"/>
           </a:xfrm>
           <a:prstGeom prst="rect">
             <a:avLst/>
@@ -8129,13 +8584,13 @@
               </a:spcAft>
             </a:pPr>
             <a:r>
-              <a:rPr sz="1150" b="0">
-                <a:solidFill>
-                  <a:srgbClr val="0F172A"/>
-                </a:solidFill>
-                <a:latin typeface="Inter"/>
-              </a:rPr>
-              <a:t>~1.6 MB</a:t>
+              <a:rPr sz="1100" b="0">
+                <a:solidFill>
+                  <a:srgbClr val="475569"/>
+                </a:solidFill>
+                <a:latin typeface="Inter"/>
+              </a:rPr>
+              <a:t>0.419 ms</a:t>
             </a:r>
           </a:p>
         </p:txBody>
@@ -8148,8 +8603,8 @@
         </p:nvSpPr>
         <p:spPr>
           <a:xfrm>
-            <a:off x="6241694" y="2340864"/>
-            <a:ext cx="915771" cy="457200"/>
+            <a:off x="6559448" y="2231136"/>
+            <a:ext cx="1042873" cy="402336"/>
           </a:xfrm>
           <a:prstGeom prst="rect">
             <a:avLst/>
@@ -8171,13 +8626,13 @@
               </a:spcAft>
             </a:pPr>
             <a:r>
-              <a:rPr sz="1150" b="0">
-                <a:solidFill>
-                  <a:srgbClr val="B45309"/>
-                </a:solidFill>
-                <a:latin typeface="Inter"/>
-              </a:rPr>
-              <a:t>Marginal</a:t>
+              <a:rPr sz="1100" b="0">
+                <a:solidFill>
+                  <a:srgbClr val="475569"/>
+                </a:solidFill>
+                <a:latin typeface="Inter"/>
+              </a:rPr>
+              <a:t>0.31 MB</a:t>
             </a:r>
           </a:p>
         </p:txBody>
@@ -8190,8 +8645,8 @@
         </p:nvSpPr>
         <p:spPr>
           <a:xfrm>
-            <a:off x="7322058" y="2340864"/>
-            <a:ext cx="1360627" cy="457200"/>
+            <a:off x="7766913" y="2231136"/>
+            <a:ext cx="852220" cy="402336"/>
           </a:xfrm>
           <a:prstGeom prst="rect">
             <a:avLst/>
@@ -8213,13 +8668,13 @@
               </a:spcAft>
             </a:pPr>
             <a:r>
-              <a:rPr sz="1150" b="0">
-                <a:solidFill>
-                  <a:srgbClr val="B91C1C"/>
-                </a:solidFill>
-                <a:latin typeface="Inter"/>
-              </a:rPr>
-              <a:t>No</a:t>
+              <a:rPr sz="1100" b="0">
+                <a:solidFill>
+                  <a:srgbClr val="B45309"/>
+                </a:solidFill>
+                <a:latin typeface="Inter"/>
+              </a:rPr>
+              <a:t>Warn</a:t>
             </a:r>
           </a:p>
         </p:txBody>
@@ -8232,8 +8687,8 @@
         </p:nvSpPr>
         <p:spPr>
           <a:xfrm>
-            <a:off x="8847277" y="2340864"/>
-            <a:ext cx="2695194" cy="457200"/>
+            <a:off x="8783726" y="2231136"/>
+            <a:ext cx="2758744" cy="402336"/>
           </a:xfrm>
           <a:prstGeom prst="rect">
             <a:avLst/>
@@ -8255,13 +8710,13 @@
               </a:spcAft>
             </a:pPr>
             <a:r>
-              <a:rPr sz="1150" b="0">
-                <a:solidFill>
-                  <a:srgbClr val="0F172A"/>
-                </a:solidFill>
-                <a:latin typeface="Inter"/>
-              </a:rPr>
-              <a:t>Needs sequence buffer</a:t>
+              <a:rPr sz="1100" b="0">
+                <a:solidFill>
+                  <a:srgbClr val="B45309"/>
+                </a:solidFill>
+                <a:latin typeface="Inter"/>
+              </a:rPr>
+              <a:t>Best accuracy; 60-row warm-up</a:t>
             </a:r>
           </a:p>
         </p:txBody>
@@ -8274,7 +8729,7 @@
         </p:nvSpPr>
         <p:spPr>
           <a:xfrm>
-            <a:off x="566928" y="3255264"/>
+            <a:off x="566928" y="3035808"/>
             <a:ext cx="11057839" cy="10972"/>
           </a:xfrm>
           <a:prstGeom prst="rect">
@@ -8316,8 +8771,8 @@
         </p:nvSpPr>
         <p:spPr>
           <a:xfrm>
-            <a:off x="649224" y="2798064"/>
-            <a:ext cx="1805482" cy="457200"/>
+            <a:off x="649224" y="2633472"/>
+            <a:ext cx="1869033" cy="402336"/>
           </a:xfrm>
           <a:prstGeom prst="rect">
             <a:avLst/>
@@ -8339,7 +8794,7 @@
               </a:spcAft>
             </a:pPr>
             <a:r>
-              <a:rPr sz="1150" b="0">
+              <a:rPr sz="1100" b="0">
                 <a:solidFill>
                   <a:srgbClr val="0F172A"/>
                 </a:solidFill>
@@ -8358,8 +8813,8 @@
         </p:nvSpPr>
         <p:spPr>
           <a:xfrm>
-            <a:off x="2619298" y="2798064"/>
-            <a:ext cx="1106424" cy="457200"/>
+            <a:off x="2682849" y="2633472"/>
+            <a:ext cx="1169974" cy="402336"/>
           </a:xfrm>
           <a:prstGeom prst="rect">
             <a:avLst/>
@@ -8381,13 +8836,13 @@
               </a:spcAft>
             </a:pPr>
             <a:r>
-              <a:rPr sz="1150" b="0">
-                <a:solidFill>
-                  <a:srgbClr val="475569"/>
-                </a:solidFill>
-                <a:latin typeface="Inter"/>
-              </a:rPr>
-              <a:t>—</a:t>
+              <a:rPr sz="1100" b="0">
+                <a:solidFill>
+                  <a:srgbClr val="0F172A"/>
+                </a:solidFill>
+                <a:latin typeface="Inter"/>
+              </a:rPr>
+              <a:t>87.03%</a:t>
             </a:r>
           </a:p>
         </p:txBody>
@@ -8400,8 +8855,8 @@
         </p:nvSpPr>
         <p:spPr>
           <a:xfrm>
-            <a:off x="3890314" y="2798064"/>
-            <a:ext cx="1106424" cy="457200"/>
+            <a:off x="4017416" y="2633472"/>
+            <a:ext cx="1106424" cy="402336"/>
           </a:xfrm>
           <a:prstGeom prst="rect">
             <a:avLst/>
@@ -8423,13 +8878,13 @@
               </a:spcAft>
             </a:pPr>
             <a:r>
-              <a:rPr sz="1150" b="0">
+              <a:rPr sz="1100" b="0">
                 <a:solidFill>
                   <a:srgbClr val="475569"/>
                 </a:solidFill>
                 <a:latin typeface="Inter"/>
               </a:rPr>
-              <a:t>—</a:t>
+              <a:t>0.776</a:t>
             </a:r>
           </a:p>
         </p:txBody>
@@ -8442,8 +8897,8 @@
         </p:nvSpPr>
         <p:spPr>
           <a:xfrm>
-            <a:off x="5161330" y="2798064"/>
-            <a:ext cx="915771" cy="457200"/>
+            <a:off x="5288432" y="2633472"/>
+            <a:ext cx="1106424" cy="402336"/>
           </a:xfrm>
           <a:prstGeom prst="rect">
             <a:avLst/>
@@ -8465,13 +8920,13 @@
               </a:spcAft>
             </a:pPr>
             <a:r>
-              <a:rPr sz="1150" b="0">
+              <a:rPr sz="1100" b="0">
                 <a:solidFill>
                   <a:srgbClr val="475569"/>
                 </a:solidFill>
                 <a:latin typeface="Inter"/>
               </a:rPr>
-              <a:t>—</a:t>
+              <a:t>0.532 ms</a:t>
             </a:r>
           </a:p>
         </p:txBody>
@@ -8484,8 +8939,8 @@
         </p:nvSpPr>
         <p:spPr>
           <a:xfrm>
-            <a:off x="6241694" y="2798064"/>
-            <a:ext cx="915771" cy="457200"/>
+            <a:off x="6559448" y="2633472"/>
+            <a:ext cx="1042873" cy="402336"/>
           </a:xfrm>
           <a:prstGeom prst="rect">
             <a:avLst/>
@@ -8507,13 +8962,13 @@
               </a:spcAft>
             </a:pPr>
             <a:r>
-              <a:rPr sz="1150" b="0">
-                <a:solidFill>
-                  <a:srgbClr val="B45309"/>
-                </a:solidFill>
-                <a:latin typeface="Inter"/>
-              </a:rPr>
-              <a:t>Marginal</a:t>
+              <a:rPr sz="1100" b="0">
+                <a:solidFill>
+                  <a:srgbClr val="475569"/>
+                </a:solidFill>
+                <a:latin typeface="Inter"/>
+              </a:rPr>
+              <a:t>0.28 MB</a:t>
             </a:r>
           </a:p>
         </p:txBody>
@@ -8526,8 +8981,8 @@
         </p:nvSpPr>
         <p:spPr>
           <a:xfrm>
-            <a:off x="7322058" y="2798064"/>
-            <a:ext cx="1360627" cy="457200"/>
+            <a:off x="7766913" y="2633472"/>
+            <a:ext cx="852220" cy="402336"/>
           </a:xfrm>
           <a:prstGeom prst="rect">
             <a:avLst/>
@@ -8549,13 +9004,13 @@
               </a:spcAft>
             </a:pPr>
             <a:r>
-              <a:rPr sz="1150" b="0">
-                <a:solidFill>
-                  <a:srgbClr val="B91C1C"/>
-                </a:solidFill>
-                <a:latin typeface="Inter"/>
-              </a:rPr>
-              <a:t>No</a:t>
+              <a:rPr sz="1100" b="0">
+                <a:solidFill>
+                  <a:srgbClr val="B45309"/>
+                </a:solidFill>
+                <a:latin typeface="Inter"/>
+              </a:rPr>
+              <a:t>Warn</a:t>
             </a:r>
           </a:p>
         </p:txBody>
@@ -8568,8 +9023,8 @@
         </p:nvSpPr>
         <p:spPr>
           <a:xfrm>
-            <a:off x="8847277" y="2798064"/>
-            <a:ext cx="2695194" cy="457200"/>
+            <a:off x="8783726" y="2633472"/>
+            <a:ext cx="2758744" cy="402336"/>
           </a:xfrm>
           <a:prstGeom prst="rect">
             <a:avLst/>
@@ -8591,13 +9046,13 @@
               </a:spcAft>
             </a:pPr>
             <a:r>
-              <a:rPr sz="1150" b="0">
-                <a:solidFill>
-                  <a:srgbClr val="0F172A"/>
-                </a:solidFill>
-                <a:latin typeface="Inter"/>
-              </a:rPr>
-              <a:t>Sequential, hard to batch</a:t>
+              <a:rPr sz="1100" b="0">
+                <a:solidFill>
+                  <a:srgbClr val="475569"/>
+                </a:solidFill>
+                <a:latin typeface="Inter"/>
+              </a:rPr>
+              <a:t>Sequential, weakest F1</a:t>
             </a:r>
           </a:p>
         </p:txBody>
@@ -8610,7 +9065,7 @@
         </p:nvSpPr>
         <p:spPr>
           <a:xfrm>
-            <a:off x="566928" y="3712464"/>
+            <a:off x="566928" y="3438144"/>
             <a:ext cx="11057839" cy="10972"/>
           </a:xfrm>
           <a:prstGeom prst="rect">
@@ -8652,8 +9107,8 @@
         </p:nvSpPr>
         <p:spPr>
           <a:xfrm>
-            <a:off x="649224" y="3255264"/>
-            <a:ext cx="1805482" cy="457200"/>
+            <a:off x="649224" y="3035808"/>
+            <a:ext cx="1869033" cy="402336"/>
           </a:xfrm>
           <a:prstGeom prst="rect">
             <a:avLst/>
@@ -8675,7 +9130,7 @@
               </a:spcAft>
             </a:pPr>
             <a:r>
-              <a:rPr sz="1150" b="0">
+              <a:rPr sz="1100" b="0">
                 <a:solidFill>
                   <a:srgbClr val="0F172A"/>
                 </a:solidFill>
@@ -8694,8 +9149,8 @@
         </p:nvSpPr>
         <p:spPr>
           <a:xfrm>
-            <a:off x="2619298" y="3255264"/>
-            <a:ext cx="1106424" cy="457200"/>
+            <a:off x="2682849" y="3035808"/>
+            <a:ext cx="1169974" cy="402336"/>
           </a:xfrm>
           <a:prstGeom prst="rect">
             <a:avLst/>
@@ -8717,13 +9172,13 @@
               </a:spcAft>
             </a:pPr>
             <a:r>
-              <a:rPr sz="1150" b="0">
-                <a:solidFill>
-                  <a:srgbClr val="475569"/>
-                </a:solidFill>
-                <a:latin typeface="Inter"/>
-              </a:rPr>
-              <a:t>—</a:t>
+              <a:rPr sz="1100" b="0">
+                <a:solidFill>
+                  <a:srgbClr val="0F172A"/>
+                </a:solidFill>
+                <a:latin typeface="Inter"/>
+              </a:rPr>
+              <a:t>89.37%</a:t>
             </a:r>
           </a:p>
         </p:txBody>
@@ -8736,8 +9191,8 @@
         </p:nvSpPr>
         <p:spPr>
           <a:xfrm>
-            <a:off x="3890314" y="3255264"/>
-            <a:ext cx="1106424" cy="457200"/>
+            <a:off x="4017416" y="3035808"/>
+            <a:ext cx="1106424" cy="402336"/>
           </a:xfrm>
           <a:prstGeom prst="rect">
             <a:avLst/>
@@ -8759,13 +9214,13 @@
               </a:spcAft>
             </a:pPr>
             <a:r>
-              <a:rPr sz="1150" b="0">
+              <a:rPr sz="1100" b="0">
                 <a:solidFill>
                   <a:srgbClr val="475569"/>
                 </a:solidFill>
                 <a:latin typeface="Inter"/>
               </a:rPr>
-              <a:t>—</a:t>
+              <a:t>0.824</a:t>
             </a:r>
           </a:p>
         </p:txBody>
@@ -8778,8 +9233,8 @@
         </p:nvSpPr>
         <p:spPr>
           <a:xfrm>
-            <a:off x="5161330" y="3255264"/>
-            <a:ext cx="915771" cy="457200"/>
+            <a:off x="5288432" y="3035808"/>
+            <a:ext cx="1106424" cy="402336"/>
           </a:xfrm>
           <a:prstGeom prst="rect">
             <a:avLst/>
@@ -8801,13 +9256,13 @@
               </a:spcAft>
             </a:pPr>
             <a:r>
-              <a:rPr sz="1150" b="0">
+              <a:rPr sz="1100" b="0">
                 <a:solidFill>
                   <a:srgbClr val="475569"/>
                 </a:solidFill>
                 <a:latin typeface="Inter"/>
               </a:rPr>
-              <a:t>—</a:t>
+              <a:t>33.770 ms</a:t>
             </a:r>
           </a:p>
         </p:txBody>
@@ -8820,8 +9275,8 @@
         </p:nvSpPr>
         <p:spPr>
           <a:xfrm>
-            <a:off x="6241694" y="3255264"/>
-            <a:ext cx="915771" cy="457200"/>
+            <a:off x="6559448" y="3035808"/>
+            <a:ext cx="1042873" cy="402336"/>
           </a:xfrm>
           <a:prstGeom prst="rect">
             <a:avLst/>
@@ -8843,13 +9298,13 @@
               </a:spcAft>
             </a:pPr>
             <a:r>
-              <a:rPr sz="1150" b="0">
-                <a:solidFill>
-                  <a:srgbClr val="0E7490"/>
-                </a:solidFill>
-                <a:latin typeface="Inter"/>
-              </a:rPr>
-              <a:t>Yes</a:t>
+              <a:rPr sz="1100" b="0">
+                <a:solidFill>
+                  <a:srgbClr val="475569"/>
+                </a:solidFill>
+                <a:latin typeface="Inter"/>
+              </a:rPr>
+              <a:t>176.41 MB</a:t>
             </a:r>
           </a:p>
         </p:txBody>
@@ -8862,8 +9317,8 @@
         </p:nvSpPr>
         <p:spPr>
           <a:xfrm>
-            <a:off x="7322058" y="3255264"/>
-            <a:ext cx="1360627" cy="457200"/>
+            <a:off x="7766913" y="3035808"/>
+            <a:ext cx="852220" cy="402336"/>
           </a:xfrm>
           <a:prstGeom prst="rect">
             <a:avLst/>
@@ -8885,13 +9340,13 @@
               </a:spcAft>
             </a:pPr>
             <a:r>
-              <a:rPr sz="1150" b="0">
-                <a:solidFill>
-                  <a:srgbClr val="0E7490"/>
-                </a:solidFill>
-                <a:latin typeface="Inter"/>
-              </a:rPr>
-              <a:t>Yes</a:t>
+              <a:rPr sz="1100" b="0">
+                <a:solidFill>
+                  <a:srgbClr val="B91C1C"/>
+                </a:solidFill>
+                <a:latin typeface="Inter"/>
+              </a:rPr>
+              <a:t>No</a:t>
             </a:r>
           </a:p>
         </p:txBody>
@@ -8904,8 +9359,8 @@
         </p:nvSpPr>
         <p:spPr>
           <a:xfrm>
-            <a:off x="8847277" y="3255264"/>
-            <a:ext cx="2695194" cy="457200"/>
+            <a:off x="8783726" y="3035808"/>
+            <a:ext cx="2758744" cy="402336"/>
           </a:xfrm>
           <a:prstGeom prst="rect">
             <a:avLst/>
@@ -8927,13 +9382,13 @@
               </a:spcAft>
             </a:pPr>
             <a:r>
-              <a:rPr sz="1150" b="0">
-                <a:solidFill>
-                  <a:srgbClr val="0F172A"/>
-                </a:solidFill>
-                <a:latin typeface="Inter"/>
-              </a:rPr>
-              <a:t>Larger for same accuracy</a:t>
+              <a:rPr sz="1100" b="0">
+                <a:solidFill>
+                  <a:srgbClr val="B91C1C"/>
+                </a:solidFill>
+                <a:latin typeface="Inter"/>
+              </a:rPr>
+              <a:t>176 MB, 73× the latency</a:t>
             </a:r>
           </a:p>
         </p:txBody>
@@ -8946,7 +9401,7 @@
         </p:nvSpPr>
         <p:spPr>
           <a:xfrm>
-            <a:off x="566928" y="4169664"/>
+            <a:off x="566928" y="3840480"/>
             <a:ext cx="11057839" cy="10972"/>
           </a:xfrm>
           <a:prstGeom prst="rect">
@@ -8988,8 +9443,8 @@
         </p:nvSpPr>
         <p:spPr>
           <a:xfrm>
-            <a:off x="649224" y="3712464"/>
-            <a:ext cx="1805482" cy="457200"/>
+            <a:off x="649224" y="3438144"/>
+            <a:ext cx="1869033" cy="402336"/>
           </a:xfrm>
           <a:prstGeom prst="rect">
             <a:avLst/>
@@ -9011,13 +9466,13 @@
               </a:spcAft>
             </a:pPr>
             <a:r>
-              <a:rPr sz="1150" b="0">
+              <a:rPr sz="1100" b="0">
                 <a:solidFill>
                   <a:srgbClr val="0F172A"/>
                 </a:solidFill>
                 <a:latin typeface="Inter"/>
               </a:rPr>
-              <a:t>SVM</a:t>
+              <a:t>SVM (RBF)</a:t>
             </a:r>
           </a:p>
         </p:txBody>
@@ -9030,8 +9485,8 @@
         </p:nvSpPr>
         <p:spPr>
           <a:xfrm>
-            <a:off x="2619298" y="3712464"/>
-            <a:ext cx="1106424" cy="457200"/>
+            <a:off x="2682849" y="3438144"/>
+            <a:ext cx="1169974" cy="402336"/>
           </a:xfrm>
           <a:prstGeom prst="rect">
             <a:avLst/>
@@ -9053,13 +9508,13 @@
               </a:spcAft>
             </a:pPr>
             <a:r>
-              <a:rPr sz="1150" b="0">
-                <a:solidFill>
-                  <a:srgbClr val="475569"/>
-                </a:solidFill>
-                <a:latin typeface="Inter"/>
-              </a:rPr>
-              <a:t>—</a:t>
+              <a:rPr sz="1100" b="0">
+                <a:solidFill>
+                  <a:srgbClr val="0F172A"/>
+                </a:solidFill>
+                <a:latin typeface="Inter"/>
+              </a:rPr>
+              <a:t>88.53%</a:t>
             </a:r>
           </a:p>
         </p:txBody>
@@ -9072,8 +9527,8 @@
         </p:nvSpPr>
         <p:spPr>
           <a:xfrm>
-            <a:off x="3890314" y="3712464"/>
-            <a:ext cx="1106424" cy="457200"/>
+            <a:off x="4017416" y="3438144"/>
+            <a:ext cx="1106424" cy="402336"/>
           </a:xfrm>
           <a:prstGeom prst="rect">
             <a:avLst/>
@@ -9095,13 +9550,13 @@
               </a:spcAft>
             </a:pPr>
             <a:r>
-              <a:rPr sz="1150" b="0">
+              <a:rPr sz="1100" b="0">
                 <a:solidFill>
                   <a:srgbClr val="475569"/>
                 </a:solidFill>
                 <a:latin typeface="Inter"/>
               </a:rPr>
-              <a:t>—</a:t>
+              <a:t>0.807</a:t>
             </a:r>
           </a:p>
         </p:txBody>
@@ -9114,8 +9569,8 @@
         </p:nvSpPr>
         <p:spPr>
           <a:xfrm>
-            <a:off x="5161330" y="3712464"/>
-            <a:ext cx="915771" cy="457200"/>
+            <a:off x="5288432" y="3438144"/>
+            <a:ext cx="1106424" cy="402336"/>
           </a:xfrm>
           <a:prstGeom prst="rect">
             <a:avLst/>
@@ -9137,13 +9592,13 @@
               </a:spcAft>
             </a:pPr>
             <a:r>
-              <a:rPr sz="1150" b="0">
+              <a:rPr sz="1100" b="0">
                 <a:solidFill>
                   <a:srgbClr val="475569"/>
                 </a:solidFill>
                 <a:latin typeface="Inter"/>
               </a:rPr>
-              <a:t>—</a:t>
+              <a:t>0.568 ms</a:t>
             </a:r>
           </a:p>
         </p:txBody>
@@ -9156,8 +9611,8 @@
         </p:nvSpPr>
         <p:spPr>
           <a:xfrm>
-            <a:off x="6241694" y="3712464"/>
-            <a:ext cx="915771" cy="457200"/>
+            <a:off x="6559448" y="3438144"/>
+            <a:ext cx="1042873" cy="402336"/>
           </a:xfrm>
           <a:prstGeom prst="rect">
             <a:avLst/>
@@ -9179,13 +9634,13 @@
               </a:spcAft>
             </a:pPr>
             <a:r>
-              <a:rPr sz="1150" b="0">
-                <a:solidFill>
-                  <a:srgbClr val="0E7490"/>
-                </a:solidFill>
-                <a:latin typeface="Inter"/>
-              </a:rPr>
-              <a:t>Yes</a:t>
+              <a:rPr sz="1100" b="0">
+                <a:solidFill>
+                  <a:srgbClr val="475569"/>
+                </a:solidFill>
+                <a:latin typeface="Inter"/>
+              </a:rPr>
+              <a:t>2.82 MB</a:t>
             </a:r>
           </a:p>
         </p:txBody>
@@ -9198,8 +9653,8 @@
         </p:nvSpPr>
         <p:spPr>
           <a:xfrm>
-            <a:off x="7322058" y="3712464"/>
-            <a:ext cx="1360627" cy="457200"/>
+            <a:off x="7766913" y="3438144"/>
+            <a:ext cx="852220" cy="402336"/>
           </a:xfrm>
           <a:prstGeom prst="rect">
             <a:avLst/>
@@ -9221,13 +9676,13 @@
               </a:spcAft>
             </a:pPr>
             <a:r>
-              <a:rPr sz="1150" b="0">
-                <a:solidFill>
-                  <a:srgbClr val="B45309"/>
-                </a:solidFill>
-                <a:latin typeface="Inter"/>
-              </a:rPr>
-              <a:t>Partly</a:t>
+              <a:rPr sz="1100" b="0">
+                <a:solidFill>
+                  <a:srgbClr val="0E7490"/>
+                </a:solidFill>
+                <a:latin typeface="Inter"/>
+              </a:rPr>
+              <a:t>Yes</a:t>
             </a:r>
           </a:p>
         </p:txBody>
@@ -9240,8 +9695,8 @@
         </p:nvSpPr>
         <p:spPr>
           <a:xfrm>
-            <a:off x="8847277" y="3712464"/>
-            <a:ext cx="2695194" cy="457200"/>
+            <a:off x="8783726" y="3438144"/>
+            <a:ext cx="2758744" cy="402336"/>
           </a:xfrm>
           <a:prstGeom prst="rect">
             <a:avLst/>
@@ -9263,13 +9718,13 @@
               </a:spcAft>
             </a:pPr>
             <a:r>
-              <a:rPr sz="1150" b="0">
-                <a:solidFill>
-                  <a:srgbClr val="0F172A"/>
-                </a:solidFill>
-                <a:latin typeface="Inter"/>
-              </a:rPr>
-              <a:t>Poor on 50-feature tabular</a:t>
+              <a:rPr sz="1100" b="0">
+                <a:solidFill>
+                  <a:srgbClr val="475569"/>
+                </a:solidFill>
+                <a:latin typeface="Inter"/>
+              </a:rPr>
+              <a:t>Would not scale past 20k rows</a:t>
             </a:r>
           </a:p>
         </p:txBody>
@@ -9282,7 +9737,7 @@
         </p:nvSpPr>
         <p:spPr>
           <a:xfrm>
-            <a:off x="566928" y="4626864"/>
+            <a:off x="566928" y="4242816"/>
             <a:ext cx="11057839" cy="10972"/>
           </a:xfrm>
           <a:prstGeom prst="rect">
@@ -9324,8 +9779,8 @@
         </p:nvSpPr>
         <p:spPr>
           <a:xfrm>
-            <a:off x="649224" y="4169664"/>
-            <a:ext cx="1805482" cy="457200"/>
+            <a:off x="649224" y="3840480"/>
+            <a:ext cx="1869033" cy="402336"/>
           </a:xfrm>
           <a:prstGeom prst="rect">
             <a:avLst/>
@@ -9347,7 +9802,7 @@
               </a:spcAft>
             </a:pPr>
             <a:r>
-              <a:rPr sz="1150" b="0">
+              <a:rPr sz="1100" b="0">
                 <a:solidFill>
                   <a:srgbClr val="0F172A"/>
                 </a:solidFill>
@@ -9366,8 +9821,8 @@
         </p:nvSpPr>
         <p:spPr>
           <a:xfrm>
-            <a:off x="2619298" y="4169664"/>
-            <a:ext cx="1106424" cy="457200"/>
+            <a:off x="2682849" y="3840480"/>
+            <a:ext cx="1169974" cy="402336"/>
           </a:xfrm>
           <a:prstGeom prst="rect">
             <a:avLst/>
@@ -9389,13 +9844,13 @@
               </a:spcAft>
             </a:pPr>
             <a:r>
-              <a:rPr sz="1150" b="0">
-                <a:solidFill>
-                  <a:srgbClr val="475569"/>
-                </a:solidFill>
-                <a:latin typeface="Inter"/>
-              </a:rPr>
-              <a:t>—</a:t>
+              <a:rPr sz="1100" b="0">
+                <a:solidFill>
+                  <a:srgbClr val="0F172A"/>
+                </a:solidFill>
+                <a:latin typeface="Inter"/>
+              </a:rPr>
+              <a:t>22.09%</a:t>
             </a:r>
           </a:p>
         </p:txBody>
@@ -9408,8 +9863,8 @@
         </p:nvSpPr>
         <p:spPr>
           <a:xfrm>
-            <a:off x="3890314" y="4169664"/>
-            <a:ext cx="1106424" cy="457200"/>
+            <a:off x="4017416" y="3840480"/>
+            <a:ext cx="1106424" cy="402336"/>
           </a:xfrm>
           <a:prstGeom prst="rect">
             <a:avLst/>
@@ -9431,13 +9886,13 @@
               </a:spcAft>
             </a:pPr>
             <a:r>
-              <a:rPr sz="1150" b="0">
+              <a:rPr sz="1100" b="0">
                 <a:solidFill>
                   <a:srgbClr val="475569"/>
                 </a:solidFill>
                 <a:latin typeface="Inter"/>
               </a:rPr>
-              <a:t>—</a:t>
+              <a:t>0.224</a:t>
             </a:r>
           </a:p>
         </p:txBody>
@@ -9450,8 +9905,8 @@
         </p:nvSpPr>
         <p:spPr>
           <a:xfrm>
-            <a:off x="5161330" y="4169664"/>
-            <a:ext cx="915771" cy="457200"/>
+            <a:off x="5288432" y="3840480"/>
+            <a:ext cx="1106424" cy="402336"/>
           </a:xfrm>
           <a:prstGeom prst="rect">
             <a:avLst/>
@@ -9473,13 +9928,13 @@
               </a:spcAft>
             </a:pPr>
             <a:r>
-              <a:rPr sz="1150" b="0">
-                <a:solidFill>
-                  <a:srgbClr val="0F172A"/>
-                </a:solidFill>
-                <a:latin typeface="Inter"/>
-              </a:rPr>
-              <a:t>trivial</a:t>
+              <a:rPr sz="1100" b="0">
+                <a:solidFill>
+                  <a:srgbClr val="475569"/>
+                </a:solidFill>
+                <a:latin typeface="Inter"/>
+              </a:rPr>
+              <a:t>5 µs</a:t>
             </a:r>
           </a:p>
         </p:txBody>
@@ -9492,8 +9947,8 @@
         </p:nvSpPr>
         <p:spPr>
           <a:xfrm>
-            <a:off x="6241694" y="4169664"/>
-            <a:ext cx="915771" cy="457200"/>
+            <a:off x="6559448" y="3840480"/>
+            <a:ext cx="1042873" cy="402336"/>
           </a:xfrm>
           <a:prstGeom prst="rect">
             <a:avLst/>
@@ -9515,13 +9970,13 @@
               </a:spcAft>
             </a:pPr>
             <a:r>
-              <a:rPr sz="1150" b="0">
-                <a:solidFill>
-                  <a:srgbClr val="0E7490"/>
-                </a:solidFill>
-                <a:latin typeface="Inter"/>
-              </a:rPr>
-              <a:t>Yes</a:t>
+              <a:rPr sz="1100" b="0">
+                <a:solidFill>
+                  <a:srgbClr val="475569"/>
+                </a:solidFill>
+                <a:latin typeface="Inter"/>
+              </a:rPr>
+              <a:t>~0 MB</a:t>
             </a:r>
           </a:p>
         </p:txBody>
@@ -9534,8 +9989,8 @@
         </p:nvSpPr>
         <p:spPr>
           <a:xfrm>
-            <a:off x="7322058" y="4169664"/>
-            <a:ext cx="1360627" cy="457200"/>
+            <a:off x="7766913" y="3840480"/>
+            <a:ext cx="852220" cy="402336"/>
           </a:xfrm>
           <a:prstGeom prst="rect">
             <a:avLst/>
@@ -9557,7 +10012,7 @@
               </a:spcAft>
             </a:pPr>
             <a:r>
-              <a:rPr sz="1150" b="0">
+              <a:rPr sz="1100" b="0">
                 <a:solidFill>
                   <a:srgbClr val="0E7490"/>
                 </a:solidFill>
@@ -9576,8 +10031,8 @@
         </p:nvSpPr>
         <p:spPr>
           <a:xfrm>
-            <a:off x="8847277" y="4169664"/>
-            <a:ext cx="2695194" cy="457200"/>
+            <a:off x="8783726" y="3840480"/>
+            <a:ext cx="2758744" cy="402336"/>
           </a:xfrm>
           <a:prstGeom prst="rect">
             <a:avLst/>
@@ -9599,104 +10054,20 @@
               </a:spcAft>
             </a:pPr>
             <a:r>
-              <a:rPr sz="1150" b="0">
+              <a:rPr sz="1100" b="0">
                 <a:solidFill>
                   <a:srgbClr val="B91C1C"/>
                 </a:solidFill>
                 <a:latin typeface="Inter"/>
               </a:rPr>
-              <a:t>Reacts, never predicts</a:t>
-            </a:r>
-          </a:p>
-        </p:txBody>
-      </p:sp>
-      <p:sp>
-        <p:nvSpPr>
-          <p:cNvPr id="63" name="TextBox 62"/>
-          <p:cNvSpPr txBox="1"/>
-          <p:nvPr/>
-        </p:nvSpPr>
-        <p:spPr>
-          <a:xfrm>
-            <a:off x="566928" y="4901184"/>
-            <a:ext cx="5577840" cy="310896"/>
-          </a:xfrm>
-          <a:prstGeom prst="rect">
-            <a:avLst/>
-          </a:prstGeom>
-          <a:noFill/>
-        </p:spPr>
-        <p:txBody>
-          <a:bodyPr wrap="square" anchor="t" lIns="0" rIns="0" tIns="0" bIns="0">
-            <a:spAutoFit/>
-          </a:bodyPr>
-          <a:lstStyle/>
-          <a:p>
-            <a:pPr algn="l">
-              <a:lnSpc>
-                <a:spcPct val="118000"/>
-              </a:lnSpc>
-              <a:spcAft>
-                <a:spcPts val="0"/>
-              </a:spcAft>
-            </a:pPr>
-            <a:r>
-              <a:rPr sz="1000" b="1">
-                <a:solidFill>
-                  <a:srgbClr val="0E7490"/>
-                </a:solidFill>
-                <a:latin typeface="Inter"/>
-              </a:rPr>
-              <a:t>WHAT DECIDED IT</a:t>
-            </a:r>
-          </a:p>
-        </p:txBody>
-      </p:sp>
-      <p:sp>
-        <p:nvSpPr>
-          <p:cNvPr id="64" name="TextBox 63"/>
-          <p:cNvSpPr txBox="1"/>
-          <p:nvPr/>
-        </p:nvSpPr>
-        <p:spPr>
-          <a:xfrm>
-            <a:off x="566928" y="5193792"/>
-            <a:ext cx="5577840" cy="822960"/>
-          </a:xfrm>
-          <a:prstGeom prst="rect">
-            <a:avLst/>
-          </a:prstGeom>
-          <a:noFill/>
-        </p:spPr>
-        <p:txBody>
-          <a:bodyPr wrap="square" anchor="t" lIns="0" rIns="0" tIns="0" bIns="0">
-            <a:spAutoFit/>
-          </a:bodyPr>
-          <a:lstStyle/>
-          <a:p>
-            <a:pPr algn="l">
-              <a:lnSpc>
-                <a:spcPct val="128000"/>
-              </a:lnSpc>
-              <a:spcAft>
-                <a:spcPts val="0"/>
-              </a:spcAft>
-            </a:pPr>
-            <a:r>
-              <a:rPr sz="1150" b="0">
-                <a:solidFill>
-                  <a:srgbClr val="475569"/>
-                </a:solidFill>
-                <a:latin typeface="Inter"/>
-              </a:rPr>
-              <a:t>Fifty engineered tabular features, a hard latency budget on the Pi and a reviewer who has to be able to ask why — gradient-boosted trees win all three. “—” means not measured here: we instrumented the model we shipped.</a:t>
+              <a:t>0% recall on Weak Cell</a:t>
             </a:r>
           </a:p>
         </p:txBody>
       </p:sp>
       <p:pic>
         <p:nvPicPr>
-          <p:cNvPr id="65" name="Picture 64" descr="fig_model_performance.png"/>
+          <p:cNvPr id="63" name="Picture 62" descr="fig_model_benchmark.png"/>
           <p:cNvPicPr>
             <a:picLocks noChangeAspect="1"/>
           </p:cNvPicPr>
@@ -9710,14 +10081,56 @@
         </p:blipFill>
         <p:spPr>
           <a:xfrm>
-            <a:off x="7875454" y="4773168"/>
-            <a:ext cx="2338666" cy="1389888"/>
+            <a:off x="4739618" y="4370832"/>
+            <a:ext cx="2712457" cy="1426463"/>
           </a:xfrm>
           <a:prstGeom prst="rect">
             <a:avLst/>
           </a:prstGeom>
         </p:spPr>
       </p:pic>
+      <p:sp>
+        <p:nvSpPr>
+          <p:cNvPr id="64" name="TextBox 63"/>
+          <p:cNvSpPr txBox="1"/>
+          <p:nvPr/>
+        </p:nvSpPr>
+        <p:spPr>
+          <a:xfrm>
+            <a:off x="566928" y="5888736"/>
+            <a:ext cx="11057839" cy="384048"/>
+          </a:xfrm>
+          <a:prstGeom prst="rect">
+            <a:avLst/>
+          </a:prstGeom>
+          <a:noFill/>
+        </p:spPr>
+        <p:txBody>
+          <a:bodyPr wrap="square" anchor="t" lIns="0" rIns="0" tIns="0" bIns="0">
+            <a:spAutoFit/>
+          </a:bodyPr>
+          <a:lstStyle/>
+          <a:p>
+            <a:pPr algn="l">
+              <a:lnSpc>
+                <a:spcPct val="124000"/>
+              </a:lnSpc>
+              <a:spcAft>
+                <a:spcPts val="0"/>
+              </a:spcAft>
+            </a:pPr>
+            <a:r>
+              <a:rPr sz="819" b="0">
+                <a:solidFill>
+                  <a:srgbClr val="475569"/>
+                </a:solidFill>
+                <a:latin typeface="Inter"/>
+              </a:rPr>
+              <a:t>All six trained and scored here on the identical 30,000-row held-out split with the same 51 features; latency is the median single-row prediction on a 4-core CPU, not a Pi 5. Sequence models additionally see a 60-row lookback. SVM trained on a stratified 20k subsample — full-data RBF did not converge in usable time, which is part of the verdict.</a:t>
+            </a:r>
+          </a:p>
+        </p:txBody>
+      </p:sp>
     </p:spTree>
   </p:cSld>
   <p:clrMapOvr>
@@ -9781,7 +10194,7 @@
                 </a:solidFill>
                 <a:latin typeface="Inter"/>
               </a:rPr>
-              <a:t>Three tiers, no single point of failure</a:t>
+              <a:t>Six classes, honest confidence, one gate</a:t>
             </a:r>
           </a:p>
         </p:txBody>
@@ -9962,8 +10375,8 @@
         </p:nvSpPr>
         <p:spPr>
           <a:xfrm>
-            <a:off x="566928" y="1517904"/>
-            <a:ext cx="5797296" cy="2834640"/>
+            <a:off x="566928" y="1499616"/>
+            <a:ext cx="2761488" cy="1874519"/>
           </a:xfrm>
           <a:prstGeom prst="rect">
             <a:avLst/>
@@ -9981,7 +10394,7 @@
                 <a:spcPct val="116000"/>
               </a:lnSpc>
               <a:spcAft>
-                <a:spcPts val="900"/>
+                <a:spcPts val="700"/>
               </a:spcAft>
               <a:buClr>
                 <a:srgbClr val="0E7490"/>
@@ -9991,13 +10404,13 @@
               <a:buChar char="●"/>
             </a:pPr>
             <a:r>
-              <a:rPr sz="1650">
+              <a:rPr sz="1350">
                 <a:solidFill>
                   <a:srgbClr val="0F172A"/>
                 </a:solidFill>
                 <a:latin typeface="Inter"/>
               </a:rPr>
-              <a:t>Tier 1 — JBD BMS senses eight cell taps and four NTCs.</a:t>
+              <a:t>Normal, Overvoltage, Overtemp clear 97% F1.</a:t>
             </a:r>
           </a:p>
           <a:p>
@@ -10006,7 +10419,7 @@
                 <a:spcPct val="116000"/>
               </a:lnSpc>
               <a:spcAft>
-                <a:spcPts val="900"/>
+                <a:spcPts val="700"/>
               </a:spcAft>
               <a:buClr>
                 <a:srgbClr val="0E7490"/>
@@ -10016,13 +10429,13 @@
               <a:buChar char="●"/>
             </a:pPr>
             <a:r>
-              <a:rPr sz="1650">
+              <a:rPr sz="1350">
                 <a:solidFill>
                   <a:srgbClr val="0F172A"/>
                 </a:solidFill>
                 <a:latin typeface="Inter"/>
               </a:rPr>
-              <a:t>Tier 2 — Pi 5 runs logger, XGBoost inference and dashboard.</a:t>
+              <a:t>Cell Imbalance recall 65% — the weak spot.</a:t>
             </a:r>
           </a:p>
           <a:p>
@@ -10031,7 +10444,7 @@
                 <a:spcPct val="116000"/>
               </a:lnSpc>
               <a:spcAft>
-                <a:spcPts val="900"/>
+                <a:spcPts val="700"/>
               </a:spcAft>
               <a:buClr>
                 <a:srgbClr val="0E7490"/>
@@ -10041,22 +10454,45 @@
               <a:buChar char="●"/>
             </a:pPr>
             <a:r>
-              <a:rPr sz="1650">
+              <a:rPr sz="1350">
                 <a:solidFill>
                   <a:srgbClr val="0F172A"/>
                 </a:solidFill>
                 <a:latin typeface="Inter"/>
               </a:rPr>
-              <a:t>Tier 3 — Arduino Uno R4 watches the Pi's heartbeat.</a:t>
-            </a:r>
-          </a:p>
+              <a:t>Misses land on Undervoltage, physically adjacent.</a:t>
+            </a:r>
+          </a:p>
+        </p:txBody>
+      </p:sp>
+      <p:sp>
+        <p:nvSpPr>
+          <p:cNvPr id="8" name="TextBox 7"/>
+          <p:cNvSpPr txBox="1"/>
+          <p:nvPr/>
+        </p:nvSpPr>
+        <p:spPr>
+          <a:xfrm>
+            <a:off x="3602736" y="1499616"/>
+            <a:ext cx="2761488" cy="1874519"/>
+          </a:xfrm>
+          <a:prstGeom prst="rect">
+            <a:avLst/>
+          </a:prstGeom>
+          <a:noFill/>
+        </p:spPr>
+        <p:txBody>
+          <a:bodyPr wrap="square" lIns="0" rIns="0" tIns="0" bIns="0">
+            <a:spAutoFit/>
+          </a:bodyPr>
+          <a:lstStyle/>
           <a:p>
             <a:pPr marL="274320" indent="-274320">
               <a:lnSpc>
                 <a:spcPct val="116000"/>
               </a:lnSpc>
               <a:spcAft>
-                <a:spcPts val="900"/>
+                <a:spcPts val="700"/>
               </a:spcAft>
               <a:buClr>
                 <a:srgbClr val="0E7490"/>
@@ -10066,13 +10502,13 @@
               <a:buChar char="●"/>
             </a:pPr>
             <a:r>
-              <a:rPr sz="1650">
+              <a:rPr sz="1350">
                 <a:solidFill>
                   <a:srgbClr val="0F172A"/>
                 </a:solidFill>
                 <a:latin typeface="Inter"/>
               </a:rPr>
-              <a:t>Missed heartbeat pulls the RUN pin and resets the Pi.</a:t>
+              <a:t>Below 0.50 the model abstains outright.</a:t>
             </a:r>
           </a:p>
           <a:p>
@@ -10081,7 +10517,7 @@
                 <a:spcPct val="116000"/>
               </a:lnSpc>
               <a:spcAft>
-                <a:spcPts val="900"/>
+                <a:spcPts val="700"/>
               </a:spcAft>
               <a:buClr>
                 <a:srgbClr val="0E7490"/>
@@ -10091,27 +10527,52 @@
               <a:buChar char="●"/>
             </a:pPr>
             <a:r>
-              <a:rPr sz="1650">
+              <a:rPr sz="1350">
                 <a:solidFill>
                   <a:srgbClr val="0F172A"/>
                 </a:solidFill>
                 <a:latin typeface="Inter"/>
               </a:rPr>
-              <a:t>Inference stays at the edge: no link, no safety gap.</a:t>
-            </a:r>
-          </a:p>
-        </p:txBody>
-      </p:sp>
-      <p:sp>
-        <p:nvSpPr>
-          <p:cNvPr id="8" name="Rectangle 7"/>
+              <a:t>0.50–0.85 warns; above 0.85 alerts.</a:t>
+            </a:r>
+          </a:p>
+          <a:p>
+            <a:pPr marL="274320" indent="-274320">
+              <a:lnSpc>
+                <a:spcPct val="116000"/>
+              </a:lnSpc>
+              <a:spcAft>
+                <a:spcPts val="700"/>
+              </a:spcAft>
+              <a:buClr>
+                <a:srgbClr val="0E7490"/>
+              </a:buClr>
+              <a:buSzPct val="62000"/>
+              <a:buFont typeface="Arial" pitchFamily="34" charset="0"/>
+              <a:buChar char="●"/>
+            </a:pPr>
+            <a:r>
+              <a:rPr sz="1350">
+                <a:solidFill>
+                  <a:srgbClr val="0F172A"/>
+                </a:solidFill>
+                <a:latin typeface="Inter"/>
+              </a:rPr>
+              <a:t>An IsolationForest gate runs before the classifier.</a:t>
+            </a:r>
+          </a:p>
+        </p:txBody>
+      </p:sp>
+      <p:sp>
+        <p:nvSpPr>
+          <p:cNvPr id="9" name="Rectangle 8"/>
           <p:cNvSpPr/>
           <p:nvPr/>
         </p:nvSpPr>
         <p:spPr>
           <a:xfrm>
-            <a:off x="566928" y="4718304"/>
-            <a:ext cx="5797296" cy="1188720"/>
+            <a:off x="566928" y="3566160"/>
+            <a:ext cx="1339595" cy="786384"/>
           </a:xfrm>
           <a:prstGeom prst="rect">
             <a:avLst/>
@@ -10148,14 +10609,14 @@
       </p:sp>
       <p:sp>
         <p:nvSpPr>
-          <p:cNvPr id="9" name="TextBox 8"/>
+          <p:cNvPr id="10" name="TextBox 9"/>
           <p:cNvSpPr txBox="1"/>
           <p:nvPr/>
         </p:nvSpPr>
         <p:spPr>
           <a:xfrm>
-            <a:off x="768096" y="4846320"/>
-            <a:ext cx="5394959" cy="237744"/>
+            <a:off x="566928" y="3657600"/>
+            <a:ext cx="1339595" cy="329184"/>
           </a:xfrm>
           <a:prstGeom prst="rect">
             <a:avLst/>
@@ -10168,7 +10629,7 @@
           </a:bodyPr>
           <a:lstStyle/>
           <a:p>
-            <a:pPr algn="l">
+            <a:pPr algn="ctr">
               <a:lnSpc>
                 <a:spcPct val="118000"/>
               </a:lnSpc>
@@ -10177,27 +10638,27 @@
               </a:spcAft>
             </a:pPr>
             <a:r>
-              <a:rPr sz="1000" b="1">
+              <a:rPr sz="1600" b="1">
                 <a:solidFill>
                   <a:srgbClr val="0E7490"/>
                 </a:solidFill>
                 <a:latin typeface="Inter"/>
               </a:rPr>
-              <a:t>ACCELERATION PATH</a:t>
-            </a:r>
-          </a:p>
-        </p:txBody>
-      </p:sp>
-      <p:sp>
-        <p:nvSpPr>
-          <p:cNvPr id="10" name="TextBox 9"/>
+              <a:t>0.913</a:t>
+            </a:r>
+          </a:p>
+        </p:txBody>
+      </p:sp>
+      <p:sp>
+        <p:nvSpPr>
+          <p:cNvPr id="11" name="TextBox 10"/>
           <p:cNvSpPr txBox="1"/>
           <p:nvPr/>
         </p:nvSpPr>
         <p:spPr>
           <a:xfrm>
-            <a:off x="768096" y="5120640"/>
-            <a:ext cx="5394959" cy="694944"/>
+            <a:off x="566928" y="4023360"/>
+            <a:ext cx="1339595" cy="256032"/>
           </a:xfrm>
           <a:prstGeom prst="rect">
             <a:avLst/>
@@ -10210,29 +10671,541 @@
           </a:bodyPr>
           <a:lstStyle/>
           <a:p>
+            <a:pPr algn="ctr">
+              <a:lnSpc>
+                <a:spcPct val="118000"/>
+              </a:lnSpc>
+              <a:spcAft>
+                <a:spcPts val="0"/>
+              </a:spcAft>
+            </a:pPr>
+            <a:r>
+              <a:rPr sz="900" b="0">
+                <a:solidFill>
+                  <a:srgbClr val="475569"/>
+                </a:solidFill>
+                <a:latin typeface="Inter"/>
+              </a:rPr>
+              <a:t>OOD AUROC</a:t>
+            </a:r>
+          </a:p>
+        </p:txBody>
+      </p:sp>
+      <p:sp>
+        <p:nvSpPr>
+          <p:cNvPr id="12" name="Rectangle 11"/>
+          <p:cNvSpPr/>
+          <p:nvPr/>
+        </p:nvSpPr>
+        <p:spPr>
+          <a:xfrm>
+            <a:off x="2052827" y="3566160"/>
+            <a:ext cx="1339595" cy="786384"/>
+          </a:xfrm>
+          <a:prstGeom prst="rect">
+            <a:avLst/>
+          </a:prstGeom>
+          <a:solidFill>
+            <a:srgbClr val="F1F5F9"/>
+          </a:solidFill>
+          <a:ln w="9525">
+            <a:solidFill>
+              <a:srgbClr val="CBD5E1"/>
+            </a:solidFill>
+          </a:ln>
+          <a:effectLst/>
+        </p:spPr>
+        <p:style>
+          <a:lnRef idx="1">
+            <a:schemeClr val="accent1"/>
+          </a:lnRef>
+          <a:fillRef idx="3">
+            <a:schemeClr val="accent1"/>
+          </a:fillRef>
+          <a:effectRef idx="2">
+            <a:schemeClr val="accent1"/>
+          </a:effectRef>
+          <a:fontRef idx="minor">
+            <a:schemeClr val="lt1"/>
+          </a:fontRef>
+        </p:style>
+        <p:txBody>
+          <a:bodyPr rtlCol="0" anchor="ctr"/>
+          <a:lstStyle/>
+          <a:p/>
+        </p:txBody>
+      </p:sp>
+      <p:sp>
+        <p:nvSpPr>
+          <p:cNvPr id="13" name="TextBox 12"/>
+          <p:cNvSpPr txBox="1"/>
+          <p:nvPr/>
+        </p:nvSpPr>
+        <p:spPr>
+          <a:xfrm>
+            <a:off x="2052827" y="3657600"/>
+            <a:ext cx="1339595" cy="329184"/>
+          </a:xfrm>
+          <a:prstGeom prst="rect">
+            <a:avLst/>
+          </a:prstGeom>
+          <a:noFill/>
+        </p:spPr>
+        <p:txBody>
+          <a:bodyPr wrap="square" anchor="t" lIns="0" rIns="0" tIns="0" bIns="0">
+            <a:spAutoFit/>
+          </a:bodyPr>
+          <a:lstStyle/>
+          <a:p>
+            <a:pPr algn="ctr">
+              <a:lnSpc>
+                <a:spcPct val="118000"/>
+              </a:lnSpc>
+              <a:spcAft>
+                <a:spcPts val="0"/>
+              </a:spcAft>
+            </a:pPr>
+            <a:r>
+              <a:rPr sz="1600" b="1">
+                <a:solidFill>
+                  <a:srgbClr val="0E7490"/>
+                </a:solidFill>
+                <a:latin typeface="Inter"/>
+              </a:rPr>
+              <a:t>100%</a:t>
+            </a:r>
+          </a:p>
+        </p:txBody>
+      </p:sp>
+      <p:sp>
+        <p:nvSpPr>
+          <p:cNvPr id="14" name="TextBox 13"/>
+          <p:cNvSpPr txBox="1"/>
+          <p:nvPr/>
+        </p:nvSpPr>
+        <p:spPr>
+          <a:xfrm>
+            <a:off x="2052827" y="4023360"/>
+            <a:ext cx="1339595" cy="256032"/>
+          </a:xfrm>
+          <a:prstGeom prst="rect">
+            <a:avLst/>
+          </a:prstGeom>
+          <a:noFill/>
+        </p:spPr>
+        <p:txBody>
+          <a:bodyPr wrap="square" anchor="t" lIns="0" rIns="0" tIns="0" bIns="0">
+            <a:spAutoFit/>
+          </a:bodyPr>
+          <a:lstStyle/>
+          <a:p>
+            <a:pPr algn="ctr">
+              <a:lnSpc>
+                <a:spcPct val="118000"/>
+              </a:lnSpc>
+              <a:spcAft>
+                <a:spcPts val="0"/>
+              </a:spcAft>
+            </a:pPr>
+            <a:r>
+              <a:rPr sz="900" b="0">
+                <a:solidFill>
+                  <a:srgbClr val="475569"/>
+                </a:solidFill>
+                <a:latin typeface="Inter"/>
+              </a:rPr>
+              <a:t>OOD precision</a:t>
+            </a:r>
+          </a:p>
+        </p:txBody>
+      </p:sp>
+      <p:sp>
+        <p:nvSpPr>
+          <p:cNvPr id="15" name="Rectangle 14"/>
+          <p:cNvSpPr/>
+          <p:nvPr/>
+        </p:nvSpPr>
+        <p:spPr>
+          <a:xfrm>
+            <a:off x="3538727" y="3566160"/>
+            <a:ext cx="1339595" cy="786384"/>
+          </a:xfrm>
+          <a:prstGeom prst="rect">
+            <a:avLst/>
+          </a:prstGeom>
+          <a:solidFill>
+            <a:srgbClr val="F1F5F9"/>
+          </a:solidFill>
+          <a:ln w="9525">
+            <a:solidFill>
+              <a:srgbClr val="CBD5E1"/>
+            </a:solidFill>
+          </a:ln>
+          <a:effectLst/>
+        </p:spPr>
+        <p:style>
+          <a:lnRef idx="1">
+            <a:schemeClr val="accent1"/>
+          </a:lnRef>
+          <a:fillRef idx="3">
+            <a:schemeClr val="accent1"/>
+          </a:fillRef>
+          <a:effectRef idx="2">
+            <a:schemeClr val="accent1"/>
+          </a:effectRef>
+          <a:fontRef idx="minor">
+            <a:schemeClr val="lt1"/>
+          </a:fontRef>
+        </p:style>
+        <p:txBody>
+          <a:bodyPr rtlCol="0" anchor="ctr"/>
+          <a:lstStyle/>
+          <a:p/>
+        </p:txBody>
+      </p:sp>
+      <p:sp>
+        <p:nvSpPr>
+          <p:cNvPr id="16" name="TextBox 15"/>
+          <p:cNvSpPr txBox="1"/>
+          <p:nvPr/>
+        </p:nvSpPr>
+        <p:spPr>
+          <a:xfrm>
+            <a:off x="3538727" y="3657600"/>
+            <a:ext cx="1339595" cy="329184"/>
+          </a:xfrm>
+          <a:prstGeom prst="rect">
+            <a:avLst/>
+          </a:prstGeom>
+          <a:noFill/>
+        </p:spPr>
+        <p:txBody>
+          <a:bodyPr wrap="square" anchor="t" lIns="0" rIns="0" tIns="0" bIns="0">
+            <a:spAutoFit/>
+          </a:bodyPr>
+          <a:lstStyle/>
+          <a:p>
+            <a:pPr algn="ctr">
+              <a:lnSpc>
+                <a:spcPct val="118000"/>
+              </a:lnSpc>
+              <a:spcAft>
+                <a:spcPts val="0"/>
+              </a:spcAft>
+            </a:pPr>
+            <a:r>
+              <a:rPr sz="1600" b="1">
+                <a:solidFill>
+                  <a:srgbClr val="0E7490"/>
+                </a:solidFill>
+                <a:latin typeface="Inter"/>
+              </a:rPr>
+              <a:t>0.0%</a:t>
+            </a:r>
+          </a:p>
+        </p:txBody>
+      </p:sp>
+      <p:sp>
+        <p:nvSpPr>
+          <p:cNvPr id="17" name="TextBox 16"/>
+          <p:cNvSpPr txBox="1"/>
+          <p:nvPr/>
+        </p:nvSpPr>
+        <p:spPr>
+          <a:xfrm>
+            <a:off x="3538727" y="4023360"/>
+            <a:ext cx="1339595" cy="256032"/>
+          </a:xfrm>
+          <a:prstGeom prst="rect">
+            <a:avLst/>
+          </a:prstGeom>
+          <a:noFill/>
+        </p:spPr>
+        <p:txBody>
+          <a:bodyPr wrap="square" anchor="t" lIns="0" rIns="0" tIns="0" bIns="0">
+            <a:spAutoFit/>
+          </a:bodyPr>
+          <a:lstStyle/>
+          <a:p>
+            <a:pPr algn="ctr">
+              <a:lnSpc>
+                <a:spcPct val="118000"/>
+              </a:lnSpc>
+              <a:spcAft>
+                <a:spcPts val="0"/>
+              </a:spcAft>
+            </a:pPr>
+            <a:r>
+              <a:rPr sz="900" b="0">
+                <a:solidFill>
+                  <a:srgbClr val="475569"/>
+                </a:solidFill>
+                <a:latin typeface="Inter"/>
+              </a:rPr>
+              <a:t>false positives</a:t>
+            </a:r>
+          </a:p>
+        </p:txBody>
+      </p:sp>
+      <p:sp>
+        <p:nvSpPr>
+          <p:cNvPr id="18" name="Rectangle 17"/>
+          <p:cNvSpPr/>
+          <p:nvPr/>
+        </p:nvSpPr>
+        <p:spPr>
+          <a:xfrm>
+            <a:off x="5024627" y="3566160"/>
+            <a:ext cx="1339595" cy="786384"/>
+          </a:xfrm>
+          <a:prstGeom prst="rect">
+            <a:avLst/>
+          </a:prstGeom>
+          <a:solidFill>
+            <a:srgbClr val="F1F5F9"/>
+          </a:solidFill>
+          <a:ln w="9525">
+            <a:solidFill>
+              <a:srgbClr val="CBD5E1"/>
+            </a:solidFill>
+          </a:ln>
+          <a:effectLst/>
+        </p:spPr>
+        <p:style>
+          <a:lnRef idx="1">
+            <a:schemeClr val="accent1"/>
+          </a:lnRef>
+          <a:fillRef idx="3">
+            <a:schemeClr val="accent1"/>
+          </a:fillRef>
+          <a:effectRef idx="2">
+            <a:schemeClr val="accent1"/>
+          </a:effectRef>
+          <a:fontRef idx="minor">
+            <a:schemeClr val="lt1"/>
+          </a:fontRef>
+        </p:style>
+        <p:txBody>
+          <a:bodyPr rtlCol="0" anchor="ctr"/>
+          <a:lstStyle/>
+          <a:p/>
+        </p:txBody>
+      </p:sp>
+      <p:sp>
+        <p:nvSpPr>
+          <p:cNvPr id="19" name="TextBox 18"/>
+          <p:cNvSpPr txBox="1"/>
+          <p:nvPr/>
+        </p:nvSpPr>
+        <p:spPr>
+          <a:xfrm>
+            <a:off x="5024627" y="3657600"/>
+            <a:ext cx="1339595" cy="329184"/>
+          </a:xfrm>
+          <a:prstGeom prst="rect">
+            <a:avLst/>
+          </a:prstGeom>
+          <a:noFill/>
+        </p:spPr>
+        <p:txBody>
+          <a:bodyPr wrap="square" anchor="t" lIns="0" rIns="0" tIns="0" bIns="0">
+            <a:spAutoFit/>
+          </a:bodyPr>
+          <a:lstStyle/>
+          <a:p>
+            <a:pPr algn="ctr">
+              <a:lnSpc>
+                <a:spcPct val="118000"/>
+              </a:lnSpc>
+              <a:spcAft>
+                <a:spcPts val="0"/>
+              </a:spcAft>
+            </a:pPr>
+            <a:r>
+              <a:rPr sz="1600" b="1">
+                <a:solidFill>
+                  <a:srgbClr val="B91C1C"/>
+                </a:solidFill>
+                <a:latin typeface="Inter"/>
+              </a:rPr>
+              <a:t>24.5%</a:t>
+            </a:r>
+          </a:p>
+        </p:txBody>
+      </p:sp>
+      <p:sp>
+        <p:nvSpPr>
+          <p:cNvPr id="20" name="TextBox 19"/>
+          <p:cNvSpPr txBox="1"/>
+          <p:nvPr/>
+        </p:nvSpPr>
+        <p:spPr>
+          <a:xfrm>
+            <a:off x="5024627" y="4023360"/>
+            <a:ext cx="1339595" cy="256032"/>
+          </a:xfrm>
+          <a:prstGeom prst="rect">
+            <a:avLst/>
+          </a:prstGeom>
+          <a:noFill/>
+        </p:spPr>
+        <p:txBody>
+          <a:bodyPr wrap="square" anchor="t" lIns="0" rIns="0" tIns="0" bIns="0">
+            <a:spAutoFit/>
+          </a:bodyPr>
+          <a:lstStyle/>
+          <a:p>
+            <a:pPr algn="ctr">
+              <a:lnSpc>
+                <a:spcPct val="118000"/>
+              </a:lnSpc>
+              <a:spcAft>
+                <a:spcPts val="0"/>
+              </a:spcAft>
+            </a:pPr>
+            <a:r>
+              <a:rPr sz="900" b="0">
+                <a:solidFill>
+                  <a:srgbClr val="475569"/>
+                </a:solidFill>
+                <a:latin typeface="Inter"/>
+              </a:rPr>
+              <a:t>OOD recall</a:t>
+            </a:r>
+          </a:p>
+        </p:txBody>
+      </p:sp>
+      <p:sp>
+        <p:nvSpPr>
+          <p:cNvPr id="21" name="Rectangle 20"/>
+          <p:cNvSpPr/>
+          <p:nvPr/>
+        </p:nvSpPr>
+        <p:spPr>
+          <a:xfrm>
+            <a:off x="566928" y="4535424"/>
+            <a:ext cx="5797296" cy="1517904"/>
+          </a:xfrm>
+          <a:prstGeom prst="rect">
+            <a:avLst/>
+          </a:prstGeom>
+          <a:solidFill>
+            <a:srgbClr val="F1F5F9"/>
+          </a:solidFill>
+          <a:ln w="9525">
+            <a:solidFill>
+              <a:srgbClr val="CBD5E1"/>
+            </a:solidFill>
+          </a:ln>
+          <a:effectLst/>
+        </p:spPr>
+        <p:style>
+          <a:lnRef idx="1">
+            <a:schemeClr val="accent1"/>
+          </a:lnRef>
+          <a:fillRef idx="3">
+            <a:schemeClr val="accent1"/>
+          </a:fillRef>
+          <a:effectRef idx="2">
+            <a:schemeClr val="accent1"/>
+          </a:effectRef>
+          <a:fontRef idx="minor">
+            <a:schemeClr val="lt1"/>
+          </a:fontRef>
+        </p:style>
+        <p:txBody>
+          <a:bodyPr rtlCol="0" anchor="ctr"/>
+          <a:lstStyle/>
+          <a:p/>
+        </p:txBody>
+      </p:sp>
+      <p:sp>
+        <p:nvSpPr>
+          <p:cNvPr id="22" name="TextBox 21"/>
+          <p:cNvSpPr txBox="1"/>
+          <p:nvPr/>
+        </p:nvSpPr>
+        <p:spPr>
+          <a:xfrm>
+            <a:off x="768096" y="4645152"/>
+            <a:ext cx="5394959" cy="219456"/>
+          </a:xfrm>
+          <a:prstGeom prst="rect">
+            <a:avLst/>
+          </a:prstGeom>
+          <a:noFill/>
+        </p:spPr>
+        <p:txBody>
+          <a:bodyPr wrap="square" anchor="t" lIns="0" rIns="0" tIns="0" bIns="0">
+            <a:spAutoFit/>
+          </a:bodyPr>
+          <a:lstStyle/>
+          <a:p>
             <a:pPr algn="l">
               <a:lnSpc>
-                <a:spcPct val="122000"/>
+                <a:spcPct val="118000"/>
               </a:lnSpc>
               <a:spcAft>
                 <a:spcPts val="0"/>
               </a:spcAft>
             </a:pPr>
             <a:r>
-              <a:rPr sz="1300" b="0">
+              <a:rPr sz="950" b="1">
+                <a:solidFill>
+                  <a:srgbClr val="B91C1C"/>
+                </a:solidFill>
+                <a:latin typeface="Inter"/>
+              </a:rPr>
+              <a:t>WE ARE NOT HIDING THIS</a:t>
+            </a:r>
+          </a:p>
+        </p:txBody>
+      </p:sp>
+      <p:sp>
+        <p:nvSpPr>
+          <p:cNvPr id="23" name="TextBox 22"/>
+          <p:cNvSpPr txBox="1"/>
+          <p:nvPr/>
+        </p:nvSpPr>
+        <p:spPr>
+          <a:xfrm>
+            <a:off x="768096" y="4901184"/>
+            <a:ext cx="5394959" cy="1078992"/>
+          </a:xfrm>
+          <a:prstGeom prst="rect">
+            <a:avLst/>
+          </a:prstGeom>
+          <a:noFill/>
+        </p:spPr>
+        <p:txBody>
+          <a:bodyPr wrap="square" anchor="t" lIns="0" rIns="0" tIns="0" bIns="0">
+            <a:spAutoFit/>
+          </a:bodyPr>
+          <a:lstStyle/>
+          <a:p>
+            <a:pPr algn="l">
+              <a:lnSpc>
+                <a:spcPct val="124000"/>
+              </a:lnSpc>
+              <a:spcAft>
+                <a:spcPts val="0"/>
+              </a:spcAft>
+            </a:pPr>
+            <a:r>
+              <a:rPr sz="1150" b="0">
                 <a:solidFill>
                   <a:srgbClr val="0F172A"/>
                 </a:solidFill>
                 <a:latin typeface="Inter"/>
               </a:rPr>
-              <a:t>Zynq-7000 SoC moves the same tree traversal into programmable logic, freeing the CPU for the dashboard and the BLE link.</a:t>
+              <a:t>28.7% of true Cell Imbalance samples are predicted Undervoltage — one cell drops, pack voltage follows. Separating them needs more real imbalance events, not more synthetic ones. A confident wrong answer is worse than an honest abstention.</a:t>
             </a:r>
           </a:p>
         </p:txBody>
       </p:sp>
       <p:pic>
         <p:nvPicPr>
-          <p:cNvPr id="11" name="Picture 10" descr="diag_hardware.png"/>
+          <p:cNvPr id="24" name="Picture 23" descr="fig_per_class_metrics.png"/>
           <p:cNvPicPr>
             <a:picLocks noChangeAspect="1"/>
           </p:cNvPicPr>
@@ -10246,61 +11219,17 @@
         </p:blipFill>
         <p:spPr>
           <a:xfrm>
-            <a:off x="6693408" y="1467953"/>
-            <a:ext cx="4931359" cy="2742516"/>
+            <a:off x="7791570" y="1444752"/>
+            <a:ext cx="2735034" cy="1920240"/>
           </a:xfrm>
           <a:prstGeom prst="rect">
             <a:avLst/>
           </a:prstGeom>
         </p:spPr>
       </p:pic>
-      <p:sp>
-        <p:nvSpPr>
-          <p:cNvPr id="12" name="Rectangle 11"/>
-          <p:cNvSpPr/>
-          <p:nvPr/>
-        </p:nvSpPr>
-        <p:spPr>
-          <a:xfrm>
-            <a:off x="7086990" y="4352544"/>
-            <a:ext cx="1587074" cy="1417320"/>
-          </a:xfrm>
-          <a:prstGeom prst="rect">
-            <a:avLst/>
-          </a:prstGeom>
-          <a:solidFill>
-            <a:srgbClr val="FFFFFF"/>
-          </a:solidFill>
-          <a:ln w="12700">
-            <a:solidFill>
-              <a:srgbClr val="CBD5E1"/>
-            </a:solidFill>
-          </a:ln>
-          <a:effectLst/>
-        </p:spPr>
-        <p:style>
-          <a:lnRef idx="1">
-            <a:schemeClr val="accent1"/>
-          </a:lnRef>
-          <a:fillRef idx="3">
-            <a:schemeClr val="accent1"/>
-          </a:fillRef>
-          <a:effectRef idx="2">
-            <a:schemeClr val="accent1"/>
-          </a:effectRef>
-          <a:fontRef idx="minor">
-            <a:schemeClr val="lt1"/>
-          </a:fontRef>
-        </p:style>
-        <p:txBody>
-          <a:bodyPr rtlCol="0" anchor="ctr"/>
-          <a:lstStyle/>
-          <a:p/>
-        </p:txBody>
-      </p:sp>
       <p:pic>
         <p:nvPicPr>
-          <p:cNvPr id="13" name="Picture 12" descr="p06_img1_x51.jpeg"/>
+          <p:cNvPr id="25" name="Picture 24" descr="fig_confusion_matrix.png"/>
           <p:cNvPicPr>
             <a:picLocks noChangeAspect="1"/>
           </p:cNvPicPr>
@@ -10314,61 +11243,17 @@
         </p:blipFill>
         <p:spPr>
           <a:xfrm>
-            <a:off x="7205862" y="4471416"/>
-            <a:ext cx="1349330" cy="1179576"/>
+            <a:off x="8363014" y="3419856"/>
+            <a:ext cx="1592146" cy="1417320"/>
           </a:xfrm>
           <a:prstGeom prst="rect">
             <a:avLst/>
           </a:prstGeom>
         </p:spPr>
       </p:pic>
-      <p:sp>
-        <p:nvSpPr>
-          <p:cNvPr id="14" name="Rectangle 13"/>
-          <p:cNvSpPr/>
-          <p:nvPr/>
-        </p:nvSpPr>
-        <p:spPr>
-          <a:xfrm>
-            <a:off x="9542320" y="4352544"/>
-            <a:ext cx="1790653" cy="1417320"/>
-          </a:xfrm>
-          <a:prstGeom prst="rect">
-            <a:avLst/>
-          </a:prstGeom>
-          <a:solidFill>
-            <a:srgbClr val="FFFFFF"/>
-          </a:solidFill>
-          <a:ln w="12700">
-            <a:solidFill>
-              <a:srgbClr val="CBD5E1"/>
-            </a:solidFill>
-          </a:ln>
-          <a:effectLst/>
-        </p:spPr>
-        <p:style>
-          <a:lnRef idx="1">
-            <a:schemeClr val="accent1"/>
-          </a:lnRef>
-          <a:fillRef idx="3">
-            <a:schemeClr val="accent1"/>
-          </a:fillRef>
-          <a:effectRef idx="2">
-            <a:schemeClr val="accent1"/>
-          </a:effectRef>
-          <a:fontRef idx="minor">
-            <a:schemeClr val="lt1"/>
-          </a:fontRef>
-        </p:style>
-        <p:txBody>
-          <a:bodyPr rtlCol="0" anchor="ctr"/>
-          <a:lstStyle/>
-          <a:p/>
-        </p:txBody>
-      </p:sp>
       <p:pic>
         <p:nvPicPr>
-          <p:cNvPr id="15" name="Picture 14" descr="p06_img2_x52.jpeg"/>
+          <p:cNvPr id="26" name="Picture 25" descr="diag_confidence_ladder.png"/>
           <p:cNvPicPr>
             <a:picLocks noChangeAspect="1"/>
           </p:cNvPicPr>
@@ -10382,98 +11267,14 @@
         </p:blipFill>
         <p:spPr>
           <a:xfrm>
-            <a:off x="9661192" y="4471416"/>
-            <a:ext cx="1552909" cy="1179576"/>
+            <a:off x="7461333" y="4919472"/>
+            <a:ext cx="3395508" cy="1325880"/>
           </a:xfrm>
           <a:prstGeom prst="rect">
             <a:avLst/>
           </a:prstGeom>
         </p:spPr>
       </p:pic>
-      <p:sp>
-        <p:nvSpPr>
-          <p:cNvPr id="16" name="TextBox 15"/>
-          <p:cNvSpPr txBox="1"/>
-          <p:nvPr/>
-        </p:nvSpPr>
-        <p:spPr>
-          <a:xfrm>
-            <a:off x="6693408" y="5797296"/>
-            <a:ext cx="2374239" cy="237744"/>
-          </a:xfrm>
-          <a:prstGeom prst="rect">
-            <a:avLst/>
-          </a:prstGeom>
-          <a:noFill/>
-        </p:spPr>
-        <p:txBody>
-          <a:bodyPr wrap="square" anchor="t" lIns="0" rIns="0" tIns="0" bIns="0">
-            <a:spAutoFit/>
-          </a:bodyPr>
-          <a:lstStyle/>
-          <a:p>
-            <a:pPr algn="ctr">
-              <a:lnSpc>
-                <a:spcPct val="118000"/>
-              </a:lnSpc>
-              <a:spcAft>
-                <a:spcPts val="0"/>
-              </a:spcAft>
-            </a:pPr>
-            <a:r>
-              <a:rPr sz="950" b="0">
-                <a:solidFill>
-                  <a:srgbClr val="475569"/>
-                </a:solidFill>
-                <a:latin typeface="Inter"/>
-              </a:rPr>
-              <a:t>Raspberry Pi 5</a:t>
-            </a:r>
-          </a:p>
-        </p:txBody>
-      </p:sp>
-      <p:sp>
-        <p:nvSpPr>
-          <p:cNvPr id="17" name="TextBox 16"/>
-          <p:cNvSpPr txBox="1"/>
-          <p:nvPr/>
-        </p:nvSpPr>
-        <p:spPr>
-          <a:xfrm>
-            <a:off x="9250527" y="5797296"/>
-            <a:ext cx="2374239" cy="237744"/>
-          </a:xfrm>
-          <a:prstGeom prst="rect">
-            <a:avLst/>
-          </a:prstGeom>
-          <a:noFill/>
-        </p:spPr>
-        <p:txBody>
-          <a:bodyPr wrap="square" anchor="t" lIns="0" rIns="0" tIns="0" bIns="0">
-            <a:spAutoFit/>
-          </a:bodyPr>
-          <a:lstStyle/>
-          <a:p>
-            <a:pPr algn="ctr">
-              <a:lnSpc>
-                <a:spcPct val="118000"/>
-              </a:lnSpc>
-              <a:spcAft>
-                <a:spcPts val="0"/>
-              </a:spcAft>
-            </a:pPr>
-            <a:r>
-              <a:rPr sz="950" b="0">
-                <a:solidFill>
-                  <a:srgbClr val="475569"/>
-                </a:solidFill>
-                <a:latin typeface="Inter"/>
-              </a:rPr>
-              <a:t>Arduino Uno R4 WiFi</a:t>
-            </a:r>
-          </a:p>
-        </p:txBody>
-      </p:sp>
     </p:spTree>
   </p:cSld>
   <p:clrMapOvr>
@@ -10537,7 +11338,7 @@
                 </a:solidFill>
                 <a:latin typeface="Inter"/>
               </a:rPr>
-              <a:t>The dashboard an operator actually reads</a:t>
+              <a:t>Three tiers at the edge, three surfaces in the browser</a:t>
             </a:r>
           </a:p>
         </p:txBody>
@@ -10718,8 +11519,8 @@
         </p:nvSpPr>
         <p:spPr>
           <a:xfrm>
-            <a:off x="566928" y="1517904"/>
-            <a:ext cx="5797296" cy="2834640"/>
+            <a:off x="566928" y="1499616"/>
+            <a:ext cx="2761488" cy="1920240"/>
           </a:xfrm>
           <a:prstGeom prst="rect">
             <a:avLst/>
@@ -10737,7 +11538,7 @@
                 <a:spcPct val="116000"/>
               </a:lnSpc>
               <a:spcAft>
-                <a:spcPts val="900"/>
+                <a:spcPts val="700"/>
               </a:spcAft>
               <a:buClr>
                 <a:srgbClr val="0E7490"/>
@@ -10747,13 +11548,13 @@
               <a:buChar char="●"/>
             </a:pPr>
             <a:r>
-              <a:rPr sz="1650">
+              <a:rPr sz="1350">
                 <a:solidFill>
                   <a:srgbClr val="0F172A"/>
                 </a:solidFill>
                 <a:latin typeface="Inter"/>
               </a:rPr>
-              <a:t>Flask on the Pi, exposed over a Cloudflare tunnel.</a:t>
+              <a:t>JBD BMS senses eight taps and four NTCs.</a:t>
             </a:r>
           </a:p>
           <a:p>
@@ -10762,7 +11563,7 @@
                 <a:spcPct val="116000"/>
               </a:lnSpc>
               <a:spcAft>
-                <a:spcPts val="900"/>
+                <a:spcPts val="700"/>
               </a:spcAft>
               <a:buClr>
                 <a:srgbClr val="0E7490"/>
@@ -10772,13 +11573,13 @@
               <a:buChar char="●"/>
             </a:pPr>
             <a:r>
-              <a:rPr sz="1650">
+              <a:rPr sz="1350">
                 <a:solidFill>
                   <a:srgbClr val="0F172A"/>
                 </a:solidFill>
                 <a:latin typeface="Inter"/>
               </a:rPr>
-              <a:t>Live per-cell voltages, pack current and four temperature zones.</a:t>
+              <a:t>Pi 5 runs logger, inference and dashboard.</a:t>
             </a:r>
           </a:p>
           <a:p>
@@ -10787,7 +11588,7 @@
                 <a:spcPct val="116000"/>
               </a:lnSpc>
               <a:spcAft>
-                <a:spcPts val="900"/>
+                <a:spcPts val="700"/>
               </a:spcAft>
               <a:buClr>
                 <a:srgbClr val="0E7490"/>
@@ -10797,22 +11598,45 @@
               <a:buChar char="●"/>
             </a:pPr>
             <a:r>
-              <a:rPr sz="1650">
+              <a:rPr sz="1350">
                 <a:solidFill>
                   <a:srgbClr val="0F172A"/>
                 </a:solidFill>
                 <a:latin typeface="Inter"/>
               </a:rPr>
-              <a:t>Charge and discharge ETA smoothed with an EMA filter.</a:t>
-            </a:r>
-          </a:p>
+              <a:t>Arduino R4 watches the Pi's heartbeat.</a:t>
+            </a:r>
+          </a:p>
+        </p:txBody>
+      </p:sp>
+      <p:sp>
+        <p:nvSpPr>
+          <p:cNvPr id="8" name="TextBox 7"/>
+          <p:cNvSpPr txBox="1"/>
+          <p:nvPr/>
+        </p:nvSpPr>
+        <p:spPr>
+          <a:xfrm>
+            <a:off x="3602736" y="1499616"/>
+            <a:ext cx="2761488" cy="1920240"/>
+          </a:xfrm>
+          <a:prstGeom prst="rect">
+            <a:avLst/>
+          </a:prstGeom>
+          <a:noFill/>
+        </p:spPr>
+        <p:txBody>
+          <a:bodyPr wrap="square" lIns="0" rIns="0" tIns="0" bIns="0">
+            <a:spAutoFit/>
+          </a:bodyPr>
+          <a:lstStyle/>
           <a:p>
             <a:pPr marL="274320" indent="-274320">
               <a:lnSpc>
                 <a:spcPct val="116000"/>
               </a:lnSpc>
               <a:spcAft>
-                <a:spcPts val="900"/>
+                <a:spcPts val="700"/>
               </a:spcAft>
               <a:buClr>
                 <a:srgbClr val="0E7490"/>
@@ -10822,13 +11646,13 @@
               <a:buChar char="●"/>
             </a:pPr>
             <a:r>
-              <a:rPr sz="1650">
+              <a:rPr sz="1350">
                 <a:solidFill>
                   <a:srgbClr val="0F172A"/>
                 </a:solidFill>
                 <a:latin typeface="Inter"/>
               </a:rPr>
-              <a:t>Driving context from current magnitude at T versus T-1.</a:t>
+              <a:t>Missed beat pulls RUN pin, resets the Pi.</a:t>
             </a:r>
           </a:p>
           <a:p>
@@ -10837,7 +11661,7 @@
                 <a:spcPct val="116000"/>
               </a:lnSpc>
               <a:spcAft>
-                <a:spcPts val="900"/>
+                <a:spcPts val="700"/>
               </a:spcAft>
               <a:buClr>
                 <a:srgbClr val="0E7490"/>
@@ -10847,55 +11671,38 @@
               <a:buChar char="●"/>
             </a:pPr>
             <a:r>
-              <a:rPr sz="1650">
+              <a:rPr sz="1350">
                 <a:solidFill>
                   <a:srgbClr val="0F172A"/>
                 </a:solidFill>
                 <a:latin typeface="Inter"/>
               </a:rPr>
-              <a:t>Alert history logs value, threshold, severity and resolution time.</a:t>
-            </a:r>
-          </a:p>
-        </p:txBody>
-      </p:sp>
-      <p:sp>
-        <p:nvSpPr>
-          <p:cNvPr id="8" name="TextBox 7"/>
-          <p:cNvSpPr txBox="1"/>
-          <p:nvPr/>
-        </p:nvSpPr>
-        <p:spPr>
-          <a:xfrm>
-            <a:off x="566928" y="4736592"/>
-            <a:ext cx="5797296" cy="256032"/>
-          </a:xfrm>
-          <a:prstGeom prst="rect">
-            <a:avLst/>
-          </a:prstGeom>
-          <a:noFill/>
-        </p:spPr>
-        <p:txBody>
-          <a:bodyPr wrap="square" anchor="t" lIns="0" rIns="0" tIns="0" bIns="0">
-            <a:spAutoFit/>
-          </a:bodyPr>
-          <a:lstStyle/>
-          <a:p>
-            <a:pPr algn="l">
-              <a:lnSpc>
-                <a:spcPct val="118000"/>
-              </a:lnSpc>
-              <a:spcAft>
-                <a:spcPts val="0"/>
-              </a:spcAft>
-            </a:pPr>
-            <a:r>
-              <a:rPr sz="1000" b="1">
-                <a:solidFill>
-                  <a:srgbClr val="0E7490"/>
-                </a:solidFill>
-                <a:latin typeface="Inter"/>
-              </a:rPr>
-              <a:t>FOUR-MODE DRIVING CONTEXT</a:t>
+              <a:t>Inference stays local: no link, no safety gap.</a:t>
+            </a:r>
+          </a:p>
+          <a:p>
+            <a:pPr marL="274320" indent="-274320">
+              <a:lnSpc>
+                <a:spcPct val="116000"/>
+              </a:lnSpc>
+              <a:spcAft>
+                <a:spcPts val="700"/>
+              </a:spcAft>
+              <a:buClr>
+                <a:srgbClr val="0E7490"/>
+              </a:buClr>
+              <a:buSzPct val="62000"/>
+              <a:buFont typeface="Arial" pitchFamily="34" charset="0"/>
+              <a:buChar char="●"/>
+            </a:pPr>
+            <a:r>
+              <a:rPr sz="1350">
+                <a:solidFill>
+                  <a:srgbClr val="0F172A"/>
+                </a:solidFill>
+                <a:latin typeface="Inter"/>
+              </a:rPr>
+              <a:t>Cloudflare tunnel opens no inbound port.</a:t>
             </a:r>
           </a:p>
         </p:txBody>
@@ -10908,18 +11715,18 @@
         </p:nvSpPr>
         <p:spPr>
           <a:xfrm>
-            <a:off x="566928" y="5047488"/>
-            <a:ext cx="1353312" cy="566928"/>
+            <a:off x="566928" y="3602736"/>
+            <a:ext cx="5797296" cy="1078992"/>
           </a:xfrm>
           <a:prstGeom prst="rect">
             <a:avLst/>
           </a:prstGeom>
           <a:solidFill>
-            <a:srgbClr val="FFFFFF"/>
+            <a:srgbClr val="F1F5F9"/>
           </a:solidFill>
-          <a:ln w="15875">
+          <a:ln w="9525">
             <a:solidFill>
-              <a:srgbClr val="475569"/>
+              <a:srgbClr val="CBD5E1"/>
             </a:solidFill>
           </a:ln>
           <a:effectLst/>
@@ -10952,308 +11759,8 @@
         </p:nvSpPr>
         <p:spPr>
           <a:xfrm>
-            <a:off x="566928" y="5047488"/>
-            <a:ext cx="1353312" cy="566928"/>
-          </a:xfrm>
-          <a:prstGeom prst="rect">
-            <a:avLst/>
-          </a:prstGeom>
-          <a:noFill/>
-        </p:spPr>
-        <p:txBody>
-          <a:bodyPr wrap="square" anchor="ctr" lIns="0" rIns="0" tIns="0" bIns="0">
-            <a:spAutoFit/>
-          </a:bodyPr>
-          <a:lstStyle/>
-          <a:p>
-            <a:pPr algn="ctr">
-              <a:lnSpc>
-                <a:spcPct val="118000"/>
-              </a:lnSpc>
-              <a:spcAft>
-                <a:spcPts val="0"/>
-              </a:spcAft>
-            </a:pPr>
-            <a:r>
-              <a:rPr sz="1400" b="1">
-                <a:solidFill>
-                  <a:srgbClr val="475569"/>
-                </a:solidFill>
-                <a:latin typeface="Inter"/>
-              </a:rPr>
-              <a:t>IDLE</a:t>
-            </a:r>
-          </a:p>
-        </p:txBody>
-      </p:sp>
-      <p:sp>
-        <p:nvSpPr>
-          <p:cNvPr id="11" name="Rectangle 10"/>
-          <p:cNvSpPr/>
-          <p:nvPr/>
-        </p:nvSpPr>
-        <p:spPr>
-          <a:xfrm>
-            <a:off x="2048256" y="5047488"/>
-            <a:ext cx="1353312" cy="566928"/>
-          </a:xfrm>
-          <a:prstGeom prst="rect">
-            <a:avLst/>
-          </a:prstGeom>
-          <a:solidFill>
-            <a:srgbClr val="FFFFFF"/>
-          </a:solidFill>
-          <a:ln w="15875">
-            <a:solidFill>
-              <a:srgbClr val="B91C1C"/>
-            </a:solidFill>
-          </a:ln>
-          <a:effectLst/>
-        </p:spPr>
-        <p:style>
-          <a:lnRef idx="1">
-            <a:schemeClr val="accent1"/>
-          </a:lnRef>
-          <a:fillRef idx="3">
-            <a:schemeClr val="accent1"/>
-          </a:fillRef>
-          <a:effectRef idx="2">
-            <a:schemeClr val="accent1"/>
-          </a:effectRef>
-          <a:fontRef idx="minor">
-            <a:schemeClr val="lt1"/>
-          </a:fontRef>
-        </p:style>
-        <p:txBody>
-          <a:bodyPr rtlCol="0" anchor="ctr"/>
-          <a:lstStyle/>
-          <a:p/>
-        </p:txBody>
-      </p:sp>
-      <p:sp>
-        <p:nvSpPr>
-          <p:cNvPr id="12" name="TextBox 11"/>
-          <p:cNvSpPr txBox="1"/>
-          <p:nvPr/>
-        </p:nvSpPr>
-        <p:spPr>
-          <a:xfrm>
-            <a:off x="2048256" y="5047488"/>
-            <a:ext cx="1353312" cy="566928"/>
-          </a:xfrm>
-          <a:prstGeom prst="rect">
-            <a:avLst/>
-          </a:prstGeom>
-          <a:noFill/>
-        </p:spPr>
-        <p:txBody>
-          <a:bodyPr wrap="square" anchor="ctr" lIns="0" rIns="0" tIns="0" bIns="0">
-            <a:spAutoFit/>
-          </a:bodyPr>
-          <a:lstStyle/>
-          <a:p>
-            <a:pPr algn="ctr">
-              <a:lnSpc>
-                <a:spcPct val="118000"/>
-              </a:lnSpc>
-              <a:spcAft>
-                <a:spcPts val="0"/>
-              </a:spcAft>
-            </a:pPr>
-            <a:r>
-              <a:rPr sz="1400" b="1">
-                <a:solidFill>
-                  <a:srgbClr val="B91C1C"/>
-                </a:solidFill>
-                <a:latin typeface="Inter"/>
-              </a:rPr>
-              <a:t>ACCEL</a:t>
-            </a:r>
-          </a:p>
-        </p:txBody>
-      </p:sp>
-      <p:sp>
-        <p:nvSpPr>
-          <p:cNvPr id="13" name="Rectangle 12"/>
-          <p:cNvSpPr/>
-          <p:nvPr/>
-        </p:nvSpPr>
-        <p:spPr>
-          <a:xfrm>
-            <a:off x="3529584" y="5047488"/>
-            <a:ext cx="1353312" cy="566928"/>
-          </a:xfrm>
-          <a:prstGeom prst="rect">
-            <a:avLst/>
-          </a:prstGeom>
-          <a:solidFill>
-            <a:srgbClr val="FFFFFF"/>
-          </a:solidFill>
-          <a:ln w="15875">
-            <a:solidFill>
-              <a:srgbClr val="0E7490"/>
-            </a:solidFill>
-          </a:ln>
-          <a:effectLst/>
-        </p:spPr>
-        <p:style>
-          <a:lnRef idx="1">
-            <a:schemeClr val="accent1"/>
-          </a:lnRef>
-          <a:fillRef idx="3">
-            <a:schemeClr val="accent1"/>
-          </a:fillRef>
-          <a:effectRef idx="2">
-            <a:schemeClr val="accent1"/>
-          </a:effectRef>
-          <a:fontRef idx="minor">
-            <a:schemeClr val="lt1"/>
-          </a:fontRef>
-        </p:style>
-        <p:txBody>
-          <a:bodyPr rtlCol="0" anchor="ctr"/>
-          <a:lstStyle/>
-          <a:p/>
-        </p:txBody>
-      </p:sp>
-      <p:sp>
-        <p:nvSpPr>
-          <p:cNvPr id="14" name="TextBox 13"/>
-          <p:cNvSpPr txBox="1"/>
-          <p:nvPr/>
-        </p:nvSpPr>
-        <p:spPr>
-          <a:xfrm>
-            <a:off x="3529584" y="5047488"/>
-            <a:ext cx="1353312" cy="566928"/>
-          </a:xfrm>
-          <a:prstGeom prst="rect">
-            <a:avLst/>
-          </a:prstGeom>
-          <a:noFill/>
-        </p:spPr>
-        <p:txBody>
-          <a:bodyPr wrap="square" anchor="ctr" lIns="0" rIns="0" tIns="0" bIns="0">
-            <a:spAutoFit/>
-          </a:bodyPr>
-          <a:lstStyle/>
-          <a:p>
-            <a:pPr algn="ctr">
-              <a:lnSpc>
-                <a:spcPct val="118000"/>
-              </a:lnSpc>
-              <a:spcAft>
-                <a:spcPts val="0"/>
-              </a:spcAft>
-            </a:pPr>
-            <a:r>
-              <a:rPr sz="1400" b="1">
-                <a:solidFill>
-                  <a:srgbClr val="0E7490"/>
-                </a:solidFill>
-                <a:latin typeface="Inter"/>
-              </a:rPr>
-              <a:t>CRUISE</a:t>
-            </a:r>
-          </a:p>
-        </p:txBody>
-      </p:sp>
-      <p:sp>
-        <p:nvSpPr>
-          <p:cNvPr id="15" name="Rectangle 14"/>
-          <p:cNvSpPr/>
-          <p:nvPr/>
-        </p:nvSpPr>
-        <p:spPr>
-          <a:xfrm>
-            <a:off x="5010912" y="5047488"/>
-            <a:ext cx="1353312" cy="566928"/>
-          </a:xfrm>
-          <a:prstGeom prst="rect">
-            <a:avLst/>
-          </a:prstGeom>
-          <a:solidFill>
-            <a:srgbClr val="FFFFFF"/>
-          </a:solidFill>
-          <a:ln w="15875">
-            <a:solidFill>
-              <a:srgbClr val="B45309"/>
-            </a:solidFill>
-          </a:ln>
-          <a:effectLst/>
-        </p:spPr>
-        <p:style>
-          <a:lnRef idx="1">
-            <a:schemeClr val="accent1"/>
-          </a:lnRef>
-          <a:fillRef idx="3">
-            <a:schemeClr val="accent1"/>
-          </a:fillRef>
-          <a:effectRef idx="2">
-            <a:schemeClr val="accent1"/>
-          </a:effectRef>
-          <a:fontRef idx="minor">
-            <a:schemeClr val="lt1"/>
-          </a:fontRef>
-        </p:style>
-        <p:txBody>
-          <a:bodyPr rtlCol="0" anchor="ctr"/>
-          <a:lstStyle/>
-          <a:p/>
-        </p:txBody>
-      </p:sp>
-      <p:sp>
-        <p:nvSpPr>
-          <p:cNvPr id="16" name="TextBox 15"/>
-          <p:cNvSpPr txBox="1"/>
-          <p:nvPr/>
-        </p:nvSpPr>
-        <p:spPr>
-          <a:xfrm>
-            <a:off x="5010912" y="5047488"/>
-            <a:ext cx="1353312" cy="566928"/>
-          </a:xfrm>
-          <a:prstGeom prst="rect">
-            <a:avLst/>
-          </a:prstGeom>
-          <a:noFill/>
-        </p:spPr>
-        <p:txBody>
-          <a:bodyPr wrap="square" anchor="ctr" lIns="0" rIns="0" tIns="0" bIns="0">
-            <a:spAutoFit/>
-          </a:bodyPr>
-          <a:lstStyle/>
-          <a:p>
-            <a:pPr algn="ctr">
-              <a:lnSpc>
-                <a:spcPct val="118000"/>
-              </a:lnSpc>
-              <a:spcAft>
-                <a:spcPts val="0"/>
-              </a:spcAft>
-            </a:pPr>
-            <a:r>
-              <a:rPr sz="1400" b="1">
-                <a:solidFill>
-                  <a:srgbClr val="B45309"/>
-                </a:solidFill>
-                <a:latin typeface="Inter"/>
-              </a:rPr>
-              <a:t>DECEL</a:t>
-            </a:r>
-          </a:p>
-        </p:txBody>
-      </p:sp>
-      <p:sp>
-        <p:nvSpPr>
-          <p:cNvPr id="17" name="TextBox 16"/>
-          <p:cNvSpPr txBox="1"/>
-          <p:nvPr/>
-        </p:nvSpPr>
-        <p:spPr>
-          <a:xfrm>
-            <a:off x="566928" y="5724144"/>
-            <a:ext cx="5797296" cy="274320"/>
+            <a:off x="768096" y="3712463"/>
+            <a:ext cx="5394959" cy="219456"/>
           </a:xfrm>
           <a:prstGeom prst="rect">
             <a:avLst/>
@@ -11275,27 +11782,69 @@
               </a:spcAft>
             </a:pPr>
             <a:r>
+              <a:rPr sz="950" b="1">
+                <a:solidFill>
+                  <a:srgbClr val="0E7490"/>
+                </a:solidFill>
+                <a:latin typeface="Inter"/>
+              </a:rPr>
+              <a:t>ACCELERATION PATH</a:t>
+            </a:r>
+          </a:p>
+        </p:txBody>
+      </p:sp>
+      <p:sp>
+        <p:nvSpPr>
+          <p:cNvPr id="11" name="TextBox 10"/>
+          <p:cNvSpPr txBox="1"/>
+          <p:nvPr/>
+        </p:nvSpPr>
+        <p:spPr>
+          <a:xfrm>
+            <a:off x="768096" y="3968496"/>
+            <a:ext cx="5394959" cy="640080"/>
+          </a:xfrm>
+          <a:prstGeom prst="rect">
+            <a:avLst/>
+          </a:prstGeom>
+          <a:noFill/>
+        </p:spPr>
+        <p:txBody>
+          <a:bodyPr wrap="square" anchor="t" lIns="0" rIns="0" tIns="0" bIns="0">
+            <a:spAutoFit/>
+          </a:bodyPr>
+          <a:lstStyle/>
+          <a:p>
+            <a:pPr algn="l">
+              <a:lnSpc>
+                <a:spcPct val="124000"/>
+              </a:lnSpc>
+              <a:spcAft>
+                <a:spcPts val="0"/>
+              </a:spcAft>
+            </a:pPr>
+            <a:r>
               <a:rPr sz="1150" b="0">
                 <a:solidFill>
-                  <a:srgbClr val="475569"/>
-                </a:solidFill>
-                <a:latin typeface="Inter"/>
-              </a:rPr>
-              <a:t>Thresholds follow the mode — a sag under ACCEL is not a sag at IDLE.</a:t>
-            </a:r>
-          </a:p>
-        </p:txBody>
-      </p:sp>
-      <p:sp>
-        <p:nvSpPr>
-          <p:cNvPr id="18" name="Rectangle 17"/>
+                  <a:srgbClr val="0F172A"/>
+                </a:solidFill>
+                <a:latin typeface="Inter"/>
+              </a:rPr>
+              <a:t>Zynq-7000 SoC moves the same tree traversal into programmable logic, freeing the CPU for the dashboard and the BLE link.</a:t>
+            </a:r>
+          </a:p>
+        </p:txBody>
+      </p:sp>
+      <p:sp>
+        <p:nvSpPr>
+          <p:cNvPr id="12" name="Rectangle 11"/>
           <p:cNvSpPr/>
           <p:nvPr/>
         </p:nvSpPr>
         <p:spPr>
           <a:xfrm>
-            <a:off x="6693408" y="1610461"/>
-            <a:ext cx="4931359" cy="2009444"/>
+            <a:off x="1403199" y="4809744"/>
+            <a:ext cx="1116377" cy="1005840"/>
           </a:xfrm>
           <a:prstGeom prst="rect">
             <a:avLst/>
@@ -11332,7 +11881,7 @@
       </p:sp>
       <p:pic>
         <p:nvPicPr>
-          <p:cNvPr id="19" name="Picture 18" descr="p07_img1_x61.jpeg"/>
+          <p:cNvPr id="13" name="Picture 12" descr="p06_img1_x51.jpeg"/>
           <p:cNvPicPr>
             <a:picLocks noChangeAspect="1"/>
           </p:cNvPicPr>
@@ -11346,8 +11895,8 @@
         </p:blipFill>
         <p:spPr>
           <a:xfrm>
-            <a:off x="6812280" y="1729333"/>
-            <a:ext cx="4693615" cy="1771700"/>
+            <a:off x="1522071" y="4928616"/>
+            <a:ext cx="878633" cy="768096"/>
           </a:xfrm>
           <a:prstGeom prst="rect">
             <a:avLst/>
@@ -11356,14 +11905,14 @@
       </p:pic>
       <p:sp>
         <p:nvSpPr>
-          <p:cNvPr id="20" name="Rectangle 19"/>
+          <p:cNvPr id="14" name="Rectangle 13"/>
           <p:cNvSpPr/>
           <p:nvPr/>
         </p:nvSpPr>
         <p:spPr>
           <a:xfrm>
-            <a:off x="6693408" y="3853669"/>
-            <a:ext cx="4931359" cy="1857285"/>
+            <a:off x="4345293" y="4809744"/>
+            <a:ext cx="1248941" cy="1005840"/>
           </a:xfrm>
           <a:prstGeom prst="rect">
             <a:avLst/>
@@ -11400,7 +11949,7 @@
       </p:sp>
       <p:pic>
         <p:nvPicPr>
-          <p:cNvPr id="21" name="Picture 20" descr="p08_img2_x68.png"/>
+          <p:cNvPr id="15" name="Picture 14" descr="p06_img2_x52.jpeg"/>
           <p:cNvPicPr>
             <a:picLocks noChangeAspect="1"/>
           </p:cNvPicPr>
@@ -11414,8 +11963,8 @@
         </p:blipFill>
         <p:spPr>
           <a:xfrm>
-            <a:off x="6812280" y="3972541"/>
-            <a:ext cx="4693615" cy="1619541"/>
+            <a:off x="4464165" y="4928616"/>
+            <a:ext cx="1011197" cy="768096"/>
           </a:xfrm>
           <a:prstGeom prst="rect">
             <a:avLst/>
@@ -11424,14 +11973,14 @@
       </p:pic>
       <p:sp>
         <p:nvSpPr>
-          <p:cNvPr id="22" name="TextBox 21"/>
+          <p:cNvPr id="16" name="TextBox 15"/>
           <p:cNvSpPr txBox="1"/>
           <p:nvPr/>
         </p:nvSpPr>
         <p:spPr>
           <a:xfrm>
-            <a:off x="6693408" y="5797296"/>
-            <a:ext cx="4931359" cy="237744"/>
+            <a:off x="566928" y="5843016"/>
+            <a:ext cx="2788920" cy="237744"/>
           </a:xfrm>
           <a:prstGeom prst="rect">
             <a:avLst/>
@@ -11459,11 +12008,101 @@
                 </a:solidFill>
                 <a:latin typeface="Inter"/>
               </a:rPr>
-              <a:t>Live sensing tiles (top) and the critical-alarm path (bottom)</a:t>
-            </a:r>
-          </a:p>
-        </p:txBody>
-      </p:sp>
+              <a:t>Raspberry Pi 5</a:t>
+            </a:r>
+          </a:p>
+        </p:txBody>
+      </p:sp>
+      <p:sp>
+        <p:nvSpPr>
+          <p:cNvPr id="17" name="TextBox 16"/>
+          <p:cNvSpPr txBox="1"/>
+          <p:nvPr/>
+        </p:nvSpPr>
+        <p:spPr>
+          <a:xfrm>
+            <a:off x="3575304" y="5843016"/>
+            <a:ext cx="2788920" cy="237744"/>
+          </a:xfrm>
+          <a:prstGeom prst="rect">
+            <a:avLst/>
+          </a:prstGeom>
+          <a:noFill/>
+        </p:spPr>
+        <p:txBody>
+          <a:bodyPr wrap="square" anchor="t" lIns="0" rIns="0" tIns="0" bIns="0">
+            <a:spAutoFit/>
+          </a:bodyPr>
+          <a:lstStyle/>
+          <a:p>
+            <a:pPr algn="ctr">
+              <a:lnSpc>
+                <a:spcPct val="118000"/>
+              </a:lnSpc>
+              <a:spcAft>
+                <a:spcPts val="0"/>
+              </a:spcAft>
+            </a:pPr>
+            <a:r>
+              <a:rPr sz="950" b="0">
+                <a:solidFill>
+                  <a:srgbClr val="475569"/>
+                </a:solidFill>
+                <a:latin typeface="Inter"/>
+              </a:rPr>
+              <a:t>Arduino Uno R4 WiFi</a:t>
+            </a:r>
+          </a:p>
+        </p:txBody>
+      </p:sp>
+      <p:pic>
+        <p:nvPicPr>
+          <p:cNvPr id="18" name="Picture 17" descr="diag_hardware.png"/>
+          <p:cNvPicPr>
+            <a:picLocks noChangeAspect="1"/>
+          </p:cNvPicPr>
+          <p:nvPr/>
+        </p:nvPicPr>
+        <p:blipFill>
+          <a:blip r:embed="rId4"/>
+          <a:stretch>
+            <a:fillRect/>
+          </a:stretch>
+        </p:blipFill>
+        <p:spPr>
+          <a:xfrm>
+            <a:off x="7144947" y="1481328"/>
+            <a:ext cx="4028280" cy="2240280"/>
+          </a:xfrm>
+          <a:prstGeom prst="rect">
+            <a:avLst/>
+          </a:prstGeom>
+        </p:spPr>
+      </p:pic>
+      <p:pic>
+        <p:nvPicPr>
+          <p:cNvPr id="19" name="Picture 18" descr="diag_system_flow.png"/>
+          <p:cNvPicPr>
+            <a:picLocks noChangeAspect="1"/>
+          </p:cNvPicPr>
+          <p:nvPr/>
+        </p:nvPicPr>
+        <p:blipFill>
+          <a:blip r:embed="rId5"/>
+          <a:stretch>
+            <a:fillRect/>
+          </a:stretch>
+        </p:blipFill>
+        <p:spPr>
+          <a:xfrm>
+            <a:off x="6693408" y="3947843"/>
+            <a:ext cx="4931359" cy="2080417"/>
+          </a:xfrm>
+          <a:prstGeom prst="rect">
+            <a:avLst/>
+          </a:prstGeom>
+        </p:spPr>
+      </p:pic>
     </p:spTree>
   </p:cSld>
   <p:clrMapOvr>
@@ -11527,7 +12166,7 @@
                 </a:solidFill>
                 <a:latin typeface="Inter"/>
               </a:rPr>
-              <a:t>Six classes, and the confidence to say “I don't know”</a:t>
+              <a:t>The platform an operator actually uses</a:t>
             </a:r>
           </a:p>
         </p:txBody>
@@ -11708,8 +12347,8 @@
         </p:nvSpPr>
         <p:spPr>
           <a:xfrm>
-            <a:off x="566928" y="1481328"/>
-            <a:ext cx="5797296" cy="256032"/>
+            <a:off x="566928" y="1499616"/>
+            <a:ext cx="2761488" cy="1920240"/>
           </a:xfrm>
           <a:prstGeom prst="rect">
             <a:avLst/>
@@ -11717,12 +12356,252 @@
           <a:noFill/>
         </p:spPr>
         <p:txBody>
-          <a:bodyPr wrap="square" anchor="t" lIns="0" rIns="0" tIns="0" bIns="0">
+          <a:bodyPr wrap="square" lIns="0" rIns="0" tIns="0" bIns="0">
             <a:spAutoFit/>
           </a:bodyPr>
           <a:lstStyle/>
           <a:p>
-            <a:pPr algn="l">
+            <a:pPr marL="274320" indent="-274320">
+              <a:lnSpc>
+                <a:spcPct val="116000"/>
+              </a:lnSpc>
+              <a:spcAft>
+                <a:spcPts val="700"/>
+              </a:spcAft>
+              <a:buClr>
+                <a:srgbClr val="0E7490"/>
+              </a:buClr>
+              <a:buSzPct val="62000"/>
+              <a:buFont typeface="Arial" pitchFamily="34" charset="0"/>
+              <a:buChar char="●"/>
+            </a:pPr>
+            <a:r>
+              <a:rPr sz="1350">
+                <a:solidFill>
+                  <a:srgbClr val="0F172A"/>
+                </a:solidFill>
+                <a:latin typeface="Inter"/>
+              </a:rPr>
+              <a:t>Flask on the Pi, live per-cell voltages.</a:t>
+            </a:r>
+          </a:p>
+          <a:p>
+            <a:pPr marL="274320" indent="-274320">
+              <a:lnSpc>
+                <a:spcPct val="116000"/>
+              </a:lnSpc>
+              <a:spcAft>
+                <a:spcPts val="700"/>
+              </a:spcAft>
+              <a:buClr>
+                <a:srgbClr val="0E7490"/>
+              </a:buClr>
+              <a:buSzPct val="62000"/>
+              <a:buFont typeface="Arial" pitchFamily="34" charset="0"/>
+              <a:buChar char="●"/>
+            </a:pPr>
+            <a:r>
+              <a:rPr sz="1350">
+                <a:solidFill>
+                  <a:srgbClr val="0F172A"/>
+                </a:solidFill>
+                <a:latin typeface="Inter"/>
+              </a:rPr>
+              <a:t>Pack current and four temperature zones.</a:t>
+            </a:r>
+          </a:p>
+          <a:p>
+            <a:pPr marL="274320" indent="-274320">
+              <a:lnSpc>
+                <a:spcPct val="116000"/>
+              </a:lnSpc>
+              <a:spcAft>
+                <a:spcPts val="700"/>
+              </a:spcAft>
+              <a:buClr>
+                <a:srgbClr val="0E7490"/>
+              </a:buClr>
+              <a:buSzPct val="62000"/>
+              <a:buFont typeface="Arial" pitchFamily="34" charset="0"/>
+              <a:buChar char="●"/>
+            </a:pPr>
+            <a:r>
+              <a:rPr sz="1350">
+                <a:solidFill>
+                  <a:srgbClr val="0F172A"/>
+                </a:solidFill>
+                <a:latin typeface="Inter"/>
+              </a:rPr>
+              <a:t>Charge/discharge ETA smoothed by EMA.</a:t>
+            </a:r>
+          </a:p>
+        </p:txBody>
+      </p:sp>
+      <p:sp>
+        <p:nvSpPr>
+          <p:cNvPr id="8" name="TextBox 7"/>
+          <p:cNvSpPr txBox="1"/>
+          <p:nvPr/>
+        </p:nvSpPr>
+        <p:spPr>
+          <a:xfrm>
+            <a:off x="3602736" y="1499616"/>
+            <a:ext cx="2761488" cy="1920240"/>
+          </a:xfrm>
+          <a:prstGeom prst="rect">
+            <a:avLst/>
+          </a:prstGeom>
+          <a:noFill/>
+        </p:spPr>
+        <p:txBody>
+          <a:bodyPr wrap="square" lIns="0" rIns="0" tIns="0" bIns="0">
+            <a:spAutoFit/>
+          </a:bodyPr>
+          <a:lstStyle/>
+          <a:p>
+            <a:pPr marL="274320" indent="-274320">
+              <a:lnSpc>
+                <a:spcPct val="116000"/>
+              </a:lnSpc>
+              <a:spcAft>
+                <a:spcPts val="700"/>
+              </a:spcAft>
+              <a:buClr>
+                <a:srgbClr val="0E7490"/>
+              </a:buClr>
+              <a:buSzPct val="62000"/>
+              <a:buFont typeface="Arial" pitchFamily="34" charset="0"/>
+              <a:buChar char="●"/>
+            </a:pPr>
+            <a:r>
+              <a:rPr sz="1350">
+                <a:solidFill>
+                  <a:srgbClr val="0F172A"/>
+                </a:solidFill>
+                <a:latin typeface="Inter"/>
+              </a:rPr>
+              <a:t>Four driving modes from |I(T)| vs |I(T-1)|.</a:t>
+            </a:r>
+          </a:p>
+          <a:p>
+            <a:pPr marL="274320" indent="-274320">
+              <a:lnSpc>
+                <a:spcPct val="116000"/>
+              </a:lnSpc>
+              <a:spcAft>
+                <a:spcPts val="700"/>
+              </a:spcAft>
+              <a:buClr>
+                <a:srgbClr val="0E7490"/>
+              </a:buClr>
+              <a:buSzPct val="62000"/>
+              <a:buFont typeface="Arial" pitchFamily="34" charset="0"/>
+              <a:buChar char="●"/>
+            </a:pPr>
+            <a:r>
+              <a:rPr sz="1350">
+                <a:solidFill>
+                  <a:srgbClr val="0F172A"/>
+                </a:solidFill>
+                <a:latin typeface="Inter"/>
+              </a:rPr>
+              <a:t>39 cycles compared against their own history.</a:t>
+            </a:r>
+          </a:p>
+          <a:p>
+            <a:pPr marL="274320" indent="-274320">
+              <a:lnSpc>
+                <a:spcPct val="116000"/>
+              </a:lnSpc>
+              <a:spcAft>
+                <a:spcPts val="700"/>
+              </a:spcAft>
+              <a:buClr>
+                <a:srgbClr val="0E7490"/>
+              </a:buClr>
+              <a:buSzPct val="62000"/>
+              <a:buFont typeface="Arial" pitchFamily="34" charset="0"/>
+              <a:buChar char="●"/>
+            </a:pPr>
+            <a:r>
+              <a:rPr sz="1350">
+                <a:solidFill>
+                  <a:srgbClr val="0F172A"/>
+                </a:solidFill>
+                <a:latin typeface="Inter"/>
+              </a:rPr>
+              <a:t>Alert log: value, threshold, severity, resolution.</a:t>
+            </a:r>
+          </a:p>
+        </p:txBody>
+      </p:sp>
+      <p:sp>
+        <p:nvSpPr>
+          <p:cNvPr id="9" name="Rectangle 8"/>
+          <p:cNvSpPr/>
+          <p:nvPr/>
+        </p:nvSpPr>
+        <p:spPr>
+          <a:xfrm>
+            <a:off x="566928" y="3584448"/>
+            <a:ext cx="1367028" cy="475488"/>
+          </a:xfrm>
+          <a:prstGeom prst="rect">
+            <a:avLst/>
+          </a:prstGeom>
+          <a:solidFill>
+            <a:srgbClr val="FFFFFF"/>
+          </a:solidFill>
+          <a:ln w="15240">
+            <a:solidFill>
+              <a:srgbClr val="475569"/>
+            </a:solidFill>
+          </a:ln>
+          <a:effectLst/>
+        </p:spPr>
+        <p:style>
+          <a:lnRef idx="1">
+            <a:schemeClr val="accent1"/>
+          </a:lnRef>
+          <a:fillRef idx="3">
+            <a:schemeClr val="accent1"/>
+          </a:fillRef>
+          <a:effectRef idx="2">
+            <a:schemeClr val="accent1"/>
+          </a:effectRef>
+          <a:fontRef idx="minor">
+            <a:schemeClr val="lt1"/>
+          </a:fontRef>
+        </p:style>
+        <p:txBody>
+          <a:bodyPr rtlCol="0" anchor="ctr"/>
+          <a:lstStyle/>
+          <a:p/>
+        </p:txBody>
+      </p:sp>
+      <p:sp>
+        <p:nvSpPr>
+          <p:cNvPr id="10" name="TextBox 9"/>
+          <p:cNvSpPr txBox="1"/>
+          <p:nvPr/>
+        </p:nvSpPr>
+        <p:spPr>
+          <a:xfrm>
+            <a:off x="566928" y="3584448"/>
+            <a:ext cx="1367028" cy="475488"/>
+          </a:xfrm>
+          <a:prstGeom prst="rect">
+            <a:avLst/>
+          </a:prstGeom>
+          <a:noFill/>
+        </p:spPr>
+        <p:txBody>
+          <a:bodyPr wrap="square" anchor="ctr" lIns="0" rIns="0" tIns="0" bIns="0">
+            <a:spAutoFit/>
+          </a:bodyPr>
+          <a:lstStyle/>
+          <a:p>
+            <a:pPr algn="ctr">
               <a:lnSpc>
                 <a:spcPct val="118000"/>
               </a:lnSpc>
@@ -11731,27 +12610,285 @@
               </a:spcAft>
             </a:pPr>
             <a:r>
-              <a:rPr sz="1000" b="1">
+              <a:rPr sz="1200" b="1">
+                <a:solidFill>
+                  <a:srgbClr val="475569"/>
+                </a:solidFill>
+                <a:latin typeface="Inter"/>
+              </a:rPr>
+              <a:t>IDLE</a:t>
+            </a:r>
+          </a:p>
+        </p:txBody>
+      </p:sp>
+      <p:sp>
+        <p:nvSpPr>
+          <p:cNvPr id="11" name="Rectangle 10"/>
+          <p:cNvSpPr/>
+          <p:nvPr/>
+        </p:nvSpPr>
+        <p:spPr>
+          <a:xfrm>
+            <a:off x="2043684" y="3584448"/>
+            <a:ext cx="1367028" cy="475488"/>
+          </a:xfrm>
+          <a:prstGeom prst="rect">
+            <a:avLst/>
+          </a:prstGeom>
+          <a:solidFill>
+            <a:srgbClr val="FFFFFF"/>
+          </a:solidFill>
+          <a:ln w="15240">
+            <a:solidFill>
+              <a:srgbClr val="B91C1C"/>
+            </a:solidFill>
+          </a:ln>
+          <a:effectLst/>
+        </p:spPr>
+        <p:style>
+          <a:lnRef idx="1">
+            <a:schemeClr val="accent1"/>
+          </a:lnRef>
+          <a:fillRef idx="3">
+            <a:schemeClr val="accent1"/>
+          </a:fillRef>
+          <a:effectRef idx="2">
+            <a:schemeClr val="accent1"/>
+          </a:effectRef>
+          <a:fontRef idx="minor">
+            <a:schemeClr val="lt1"/>
+          </a:fontRef>
+        </p:style>
+        <p:txBody>
+          <a:bodyPr rtlCol="0" anchor="ctr"/>
+          <a:lstStyle/>
+          <a:p/>
+        </p:txBody>
+      </p:sp>
+      <p:sp>
+        <p:nvSpPr>
+          <p:cNvPr id="12" name="TextBox 11"/>
+          <p:cNvSpPr txBox="1"/>
+          <p:nvPr/>
+        </p:nvSpPr>
+        <p:spPr>
+          <a:xfrm>
+            <a:off x="2043684" y="3584448"/>
+            <a:ext cx="1367028" cy="475488"/>
+          </a:xfrm>
+          <a:prstGeom prst="rect">
+            <a:avLst/>
+          </a:prstGeom>
+          <a:noFill/>
+        </p:spPr>
+        <p:txBody>
+          <a:bodyPr wrap="square" anchor="ctr" lIns="0" rIns="0" tIns="0" bIns="0">
+            <a:spAutoFit/>
+          </a:bodyPr>
+          <a:lstStyle/>
+          <a:p>
+            <a:pPr algn="ctr">
+              <a:lnSpc>
+                <a:spcPct val="118000"/>
+              </a:lnSpc>
+              <a:spcAft>
+                <a:spcPts val="0"/>
+              </a:spcAft>
+            </a:pPr>
+            <a:r>
+              <a:rPr sz="1200" b="1">
+                <a:solidFill>
+                  <a:srgbClr val="B91C1C"/>
+                </a:solidFill>
+                <a:latin typeface="Inter"/>
+              </a:rPr>
+              <a:t>ACCEL</a:t>
+            </a:r>
+          </a:p>
+        </p:txBody>
+      </p:sp>
+      <p:sp>
+        <p:nvSpPr>
+          <p:cNvPr id="13" name="Rectangle 12"/>
+          <p:cNvSpPr/>
+          <p:nvPr/>
+        </p:nvSpPr>
+        <p:spPr>
+          <a:xfrm>
+            <a:off x="3520439" y="3584448"/>
+            <a:ext cx="1367028" cy="475488"/>
+          </a:xfrm>
+          <a:prstGeom prst="rect">
+            <a:avLst/>
+          </a:prstGeom>
+          <a:solidFill>
+            <a:srgbClr val="FFFFFF"/>
+          </a:solidFill>
+          <a:ln w="15240">
+            <a:solidFill>
+              <a:srgbClr val="0E7490"/>
+            </a:solidFill>
+          </a:ln>
+          <a:effectLst/>
+        </p:spPr>
+        <p:style>
+          <a:lnRef idx="1">
+            <a:schemeClr val="accent1"/>
+          </a:lnRef>
+          <a:fillRef idx="3">
+            <a:schemeClr val="accent1"/>
+          </a:fillRef>
+          <a:effectRef idx="2">
+            <a:schemeClr val="accent1"/>
+          </a:effectRef>
+          <a:fontRef idx="minor">
+            <a:schemeClr val="lt1"/>
+          </a:fontRef>
+        </p:style>
+        <p:txBody>
+          <a:bodyPr rtlCol="0" anchor="ctr"/>
+          <a:lstStyle/>
+          <a:p/>
+        </p:txBody>
+      </p:sp>
+      <p:sp>
+        <p:nvSpPr>
+          <p:cNvPr id="14" name="TextBox 13"/>
+          <p:cNvSpPr txBox="1"/>
+          <p:nvPr/>
+        </p:nvSpPr>
+        <p:spPr>
+          <a:xfrm>
+            <a:off x="3520439" y="3584448"/>
+            <a:ext cx="1367028" cy="475488"/>
+          </a:xfrm>
+          <a:prstGeom prst="rect">
+            <a:avLst/>
+          </a:prstGeom>
+          <a:noFill/>
+        </p:spPr>
+        <p:txBody>
+          <a:bodyPr wrap="square" anchor="ctr" lIns="0" rIns="0" tIns="0" bIns="0">
+            <a:spAutoFit/>
+          </a:bodyPr>
+          <a:lstStyle/>
+          <a:p>
+            <a:pPr algn="ctr">
+              <a:lnSpc>
+                <a:spcPct val="118000"/>
+              </a:lnSpc>
+              <a:spcAft>
+                <a:spcPts val="0"/>
+              </a:spcAft>
+            </a:pPr>
+            <a:r>
+              <a:rPr sz="1200" b="1">
                 <a:solidFill>
                   <a:srgbClr val="0E7490"/>
                 </a:solidFill>
                 <a:latin typeface="Inter"/>
               </a:rPr>
-              <a:t>THE SIX FAULT CLASSES</a:t>
-            </a:r>
-          </a:p>
-        </p:txBody>
-      </p:sp>
-      <p:sp>
-        <p:nvSpPr>
-          <p:cNvPr id="8" name="Rectangle 7"/>
+              <a:t>CRUISE</a:t>
+            </a:r>
+          </a:p>
+        </p:txBody>
+      </p:sp>
+      <p:sp>
+        <p:nvSpPr>
+          <p:cNvPr id="15" name="Rectangle 14"/>
           <p:cNvSpPr/>
           <p:nvPr/>
         </p:nvSpPr>
         <p:spPr>
           <a:xfrm>
-            <a:off x="566928" y="1792224"/>
-            <a:ext cx="2825496" cy="420624"/>
+            <a:off x="4997195" y="3584448"/>
+            <a:ext cx="1367028" cy="475488"/>
+          </a:xfrm>
+          <a:prstGeom prst="rect">
+            <a:avLst/>
+          </a:prstGeom>
+          <a:solidFill>
+            <a:srgbClr val="FFFFFF"/>
+          </a:solidFill>
+          <a:ln w="15240">
+            <a:solidFill>
+              <a:srgbClr val="B45309"/>
+            </a:solidFill>
+          </a:ln>
+          <a:effectLst/>
+        </p:spPr>
+        <p:style>
+          <a:lnRef idx="1">
+            <a:schemeClr val="accent1"/>
+          </a:lnRef>
+          <a:fillRef idx="3">
+            <a:schemeClr val="accent1"/>
+          </a:fillRef>
+          <a:effectRef idx="2">
+            <a:schemeClr val="accent1"/>
+          </a:effectRef>
+          <a:fontRef idx="minor">
+            <a:schemeClr val="lt1"/>
+          </a:fontRef>
+        </p:style>
+        <p:txBody>
+          <a:bodyPr rtlCol="0" anchor="ctr"/>
+          <a:lstStyle/>
+          <a:p/>
+        </p:txBody>
+      </p:sp>
+      <p:sp>
+        <p:nvSpPr>
+          <p:cNvPr id="16" name="TextBox 15"/>
+          <p:cNvSpPr txBox="1"/>
+          <p:nvPr/>
+        </p:nvSpPr>
+        <p:spPr>
+          <a:xfrm>
+            <a:off x="4997195" y="3584448"/>
+            <a:ext cx="1367028" cy="475488"/>
+          </a:xfrm>
+          <a:prstGeom prst="rect">
+            <a:avLst/>
+          </a:prstGeom>
+          <a:noFill/>
+        </p:spPr>
+        <p:txBody>
+          <a:bodyPr wrap="square" anchor="ctr" lIns="0" rIns="0" tIns="0" bIns="0">
+            <a:spAutoFit/>
+          </a:bodyPr>
+          <a:lstStyle/>
+          <a:p>
+            <a:pPr algn="ctr">
+              <a:lnSpc>
+                <a:spcPct val="118000"/>
+              </a:lnSpc>
+              <a:spcAft>
+                <a:spcPts val="0"/>
+              </a:spcAft>
+            </a:pPr>
+            <a:r>
+              <a:rPr sz="1200" b="1">
+                <a:solidFill>
+                  <a:srgbClr val="B45309"/>
+                </a:solidFill>
+                <a:latin typeface="Inter"/>
+              </a:rPr>
+              <a:t>DECEL</a:t>
+            </a:r>
+          </a:p>
+        </p:txBody>
+      </p:sp>
+      <p:sp>
+        <p:nvSpPr>
+          <p:cNvPr id="17" name="Rectangle 16"/>
+          <p:cNvSpPr/>
+          <p:nvPr/>
+        </p:nvSpPr>
+        <p:spPr>
+          <a:xfrm>
+            <a:off x="566928" y="4224528"/>
+            <a:ext cx="5797296" cy="1828800"/>
           </a:xfrm>
           <a:prstGeom prst="rect">
             <a:avLst/>
@@ -11788,23 +12925,109 @@
       </p:sp>
       <p:sp>
         <p:nvSpPr>
-          <p:cNvPr id="9" name="Oval 8"/>
+          <p:cNvPr id="18" name="TextBox 17"/>
+          <p:cNvSpPr txBox="1"/>
+          <p:nvPr/>
+        </p:nvSpPr>
+        <p:spPr>
+          <a:xfrm>
+            <a:off x="768096" y="4334256"/>
+            <a:ext cx="5394959" cy="219456"/>
+          </a:xfrm>
+          <a:prstGeom prst="rect">
+            <a:avLst/>
+          </a:prstGeom>
+          <a:noFill/>
+        </p:spPr>
+        <p:txBody>
+          <a:bodyPr wrap="square" anchor="t" lIns="0" rIns="0" tIns="0" bIns="0">
+            <a:spAutoFit/>
+          </a:bodyPr>
+          <a:lstStyle/>
+          <a:p>
+            <a:pPr algn="l">
+              <a:lnSpc>
+                <a:spcPct val="118000"/>
+              </a:lnSpc>
+              <a:spcAft>
+                <a:spcPts val="0"/>
+              </a:spcAft>
+            </a:pPr>
+            <a:r>
+              <a:rPr sz="950" b="1">
+                <a:solidFill>
+                  <a:srgbClr val="0E7490"/>
+                </a:solidFill>
+                <a:latin typeface="Inter"/>
+              </a:rPr>
+              <a:t>CONTEXT IS A FEATURE</a:t>
+            </a:r>
+          </a:p>
+        </p:txBody>
+      </p:sp>
+      <p:sp>
+        <p:nvSpPr>
+          <p:cNvPr id="19" name="TextBox 18"/>
+          <p:cNvSpPr txBox="1"/>
+          <p:nvPr/>
+        </p:nvSpPr>
+        <p:spPr>
+          <a:xfrm>
+            <a:off x="768096" y="4590288"/>
+            <a:ext cx="5394959" cy="1371600"/>
+          </a:xfrm>
+          <a:prstGeom prst="rect">
+            <a:avLst/>
+          </a:prstGeom>
+          <a:noFill/>
+        </p:spPr>
+        <p:txBody>
+          <a:bodyPr wrap="square" anchor="t" lIns="0" rIns="0" tIns="0" bIns="0">
+            <a:spAutoFit/>
+          </a:bodyPr>
+          <a:lstStyle/>
+          <a:p>
+            <a:pPr algn="l">
+              <a:lnSpc>
+                <a:spcPct val="124000"/>
+              </a:lnSpc>
+              <a:spcAft>
+                <a:spcPts val="0"/>
+              </a:spcAft>
+            </a:pPr>
+            <a:r>
+              <a:rPr sz="1150" b="0">
+                <a:solidFill>
+                  <a:srgbClr val="0F172A"/>
+                </a:solidFill>
+                <a:latin typeface="Inter"/>
+              </a:rPr>
+              <a:t>A sag under ACCEL is normal; the same sag at IDLE is a fault, so thresholds follow the mode. The three mode flags carry 12.4% of the model's total gain and ntc_spread another 5.0% — nearly a fifth of the decision comes from context pack-level sensors cannot provide.</a:t>
+            </a:r>
+          </a:p>
+        </p:txBody>
+      </p:sp>
+      <p:sp>
+        <p:nvSpPr>
+          <p:cNvPr id="20" name="Rectangle 19"/>
           <p:cNvSpPr/>
           <p:nvPr/>
         </p:nvSpPr>
         <p:spPr>
           <a:xfrm>
-            <a:off x="713232" y="1952243"/>
-            <a:ext cx="100584" cy="100584"/>
-          </a:xfrm>
-          <a:prstGeom prst="ellipse">
+            <a:off x="7799494" y="1463040"/>
+            <a:ext cx="2719185" cy="1783079"/>
+          </a:xfrm>
+          <a:prstGeom prst="rect">
             <a:avLst/>
           </a:prstGeom>
           <a:solidFill>
-            <a:srgbClr val="0E7490"/>
+            <a:srgbClr val="FFFFFF"/>
           </a:solidFill>
-          <a:ln>
-            <a:noFill/>
+          <a:ln w="12700">
+            <a:solidFill>
+              <a:srgbClr val="CBD5E1"/>
+            </a:solidFill>
           </a:ln>
           <a:effectLst/>
         </p:spPr>
@@ -11828,814 +13051,9 @@
           <a:p/>
         </p:txBody>
       </p:sp>
-      <p:sp>
-        <p:nvSpPr>
-          <p:cNvPr id="10" name="TextBox 9"/>
-          <p:cNvSpPr txBox="1"/>
-          <p:nvPr/>
-        </p:nvSpPr>
-        <p:spPr>
-          <a:xfrm>
-            <a:off x="932688" y="1792224"/>
-            <a:ext cx="2368296" cy="420624"/>
-          </a:xfrm>
-          <a:prstGeom prst="rect">
-            <a:avLst/>
-          </a:prstGeom>
-          <a:noFill/>
-        </p:spPr>
-        <p:txBody>
-          <a:bodyPr wrap="square" anchor="ctr" lIns="0" rIns="0" tIns="0" bIns="0">
-            <a:spAutoFit/>
-          </a:bodyPr>
-          <a:lstStyle/>
-          <a:p>
-            <a:pPr algn="l">
-              <a:lnSpc>
-                <a:spcPct val="118000"/>
-              </a:lnSpc>
-              <a:spcAft>
-                <a:spcPts val="0"/>
-              </a:spcAft>
-            </a:pPr>
-            <a:r>
-              <a:rPr sz="1350" b="0">
-                <a:solidFill>
-                  <a:srgbClr val="0F172A"/>
-                </a:solidFill>
-                <a:latin typeface="Inter"/>
-              </a:rPr>
-              <a:t>Normal</a:t>
-            </a:r>
-          </a:p>
-        </p:txBody>
-      </p:sp>
-      <p:sp>
-        <p:nvSpPr>
-          <p:cNvPr id="11" name="Rectangle 10"/>
-          <p:cNvSpPr/>
-          <p:nvPr/>
-        </p:nvSpPr>
-        <p:spPr>
-          <a:xfrm>
-            <a:off x="3538728" y="1792224"/>
-            <a:ext cx="2825496" cy="420624"/>
-          </a:xfrm>
-          <a:prstGeom prst="rect">
-            <a:avLst/>
-          </a:prstGeom>
-          <a:solidFill>
-            <a:srgbClr val="F1F5F9"/>
-          </a:solidFill>
-          <a:ln w="9525">
-            <a:solidFill>
-              <a:srgbClr val="CBD5E1"/>
-            </a:solidFill>
-          </a:ln>
-          <a:effectLst/>
-        </p:spPr>
-        <p:style>
-          <a:lnRef idx="1">
-            <a:schemeClr val="accent1"/>
-          </a:lnRef>
-          <a:fillRef idx="3">
-            <a:schemeClr val="accent1"/>
-          </a:fillRef>
-          <a:effectRef idx="2">
-            <a:schemeClr val="accent1"/>
-          </a:effectRef>
-          <a:fontRef idx="minor">
-            <a:schemeClr val="lt1"/>
-          </a:fontRef>
-        </p:style>
-        <p:txBody>
-          <a:bodyPr rtlCol="0" anchor="ctr"/>
-          <a:lstStyle/>
-          <a:p/>
-        </p:txBody>
-      </p:sp>
-      <p:sp>
-        <p:nvSpPr>
-          <p:cNvPr id="12" name="Oval 11"/>
-          <p:cNvSpPr/>
-          <p:nvPr/>
-        </p:nvSpPr>
-        <p:spPr>
-          <a:xfrm>
-            <a:off x="3685032" y="1952243"/>
-            <a:ext cx="100584" cy="100584"/>
-          </a:xfrm>
-          <a:prstGeom prst="ellipse">
-            <a:avLst/>
-          </a:prstGeom>
-          <a:solidFill>
-            <a:srgbClr val="B91C1C"/>
-          </a:solidFill>
-          <a:ln>
-            <a:noFill/>
-          </a:ln>
-          <a:effectLst/>
-        </p:spPr>
-        <p:style>
-          <a:lnRef idx="1">
-            <a:schemeClr val="accent1"/>
-          </a:lnRef>
-          <a:fillRef idx="3">
-            <a:schemeClr val="accent1"/>
-          </a:fillRef>
-          <a:effectRef idx="2">
-            <a:schemeClr val="accent1"/>
-          </a:effectRef>
-          <a:fontRef idx="minor">
-            <a:schemeClr val="lt1"/>
-          </a:fontRef>
-        </p:style>
-        <p:txBody>
-          <a:bodyPr rtlCol="0" anchor="ctr"/>
-          <a:lstStyle/>
-          <a:p/>
-        </p:txBody>
-      </p:sp>
-      <p:sp>
-        <p:nvSpPr>
-          <p:cNvPr id="13" name="TextBox 12"/>
-          <p:cNvSpPr txBox="1"/>
-          <p:nvPr/>
-        </p:nvSpPr>
-        <p:spPr>
-          <a:xfrm>
-            <a:off x="3904488" y="1792224"/>
-            <a:ext cx="2368296" cy="420624"/>
-          </a:xfrm>
-          <a:prstGeom prst="rect">
-            <a:avLst/>
-          </a:prstGeom>
-          <a:noFill/>
-        </p:spPr>
-        <p:txBody>
-          <a:bodyPr wrap="square" anchor="ctr" lIns="0" rIns="0" tIns="0" bIns="0">
-            <a:spAutoFit/>
-          </a:bodyPr>
-          <a:lstStyle/>
-          <a:p>
-            <a:pPr algn="l">
-              <a:lnSpc>
-                <a:spcPct val="118000"/>
-              </a:lnSpc>
-              <a:spcAft>
-                <a:spcPts val="0"/>
-              </a:spcAft>
-            </a:pPr>
-            <a:r>
-              <a:rPr sz="1350" b="0">
-                <a:solidFill>
-                  <a:srgbClr val="0F172A"/>
-                </a:solidFill>
-                <a:latin typeface="Inter"/>
-              </a:rPr>
-              <a:t>Cell Imbalance</a:t>
-            </a:r>
-          </a:p>
-        </p:txBody>
-      </p:sp>
-      <p:sp>
-        <p:nvSpPr>
-          <p:cNvPr id="14" name="Rectangle 13"/>
-          <p:cNvSpPr/>
-          <p:nvPr/>
-        </p:nvSpPr>
-        <p:spPr>
-          <a:xfrm>
-            <a:off x="566928" y="2304288"/>
-            <a:ext cx="2825496" cy="420624"/>
-          </a:xfrm>
-          <a:prstGeom prst="rect">
-            <a:avLst/>
-          </a:prstGeom>
-          <a:solidFill>
-            <a:srgbClr val="F1F5F9"/>
-          </a:solidFill>
-          <a:ln w="9525">
-            <a:solidFill>
-              <a:srgbClr val="CBD5E1"/>
-            </a:solidFill>
-          </a:ln>
-          <a:effectLst/>
-        </p:spPr>
-        <p:style>
-          <a:lnRef idx="1">
-            <a:schemeClr val="accent1"/>
-          </a:lnRef>
-          <a:fillRef idx="3">
-            <a:schemeClr val="accent1"/>
-          </a:fillRef>
-          <a:effectRef idx="2">
-            <a:schemeClr val="accent1"/>
-          </a:effectRef>
-          <a:fontRef idx="minor">
-            <a:schemeClr val="lt1"/>
-          </a:fontRef>
-        </p:style>
-        <p:txBody>
-          <a:bodyPr rtlCol="0" anchor="ctr"/>
-          <a:lstStyle/>
-          <a:p/>
-        </p:txBody>
-      </p:sp>
-      <p:sp>
-        <p:nvSpPr>
-          <p:cNvPr id="15" name="Oval 14"/>
-          <p:cNvSpPr/>
-          <p:nvPr/>
-        </p:nvSpPr>
-        <p:spPr>
-          <a:xfrm>
-            <a:off x="713232" y="2464308"/>
-            <a:ext cx="100584" cy="100584"/>
-          </a:xfrm>
-          <a:prstGeom prst="ellipse">
-            <a:avLst/>
-          </a:prstGeom>
-          <a:solidFill>
-            <a:srgbClr val="B91C1C"/>
-          </a:solidFill>
-          <a:ln>
-            <a:noFill/>
-          </a:ln>
-          <a:effectLst/>
-        </p:spPr>
-        <p:style>
-          <a:lnRef idx="1">
-            <a:schemeClr val="accent1"/>
-          </a:lnRef>
-          <a:fillRef idx="3">
-            <a:schemeClr val="accent1"/>
-          </a:fillRef>
-          <a:effectRef idx="2">
-            <a:schemeClr val="accent1"/>
-          </a:effectRef>
-          <a:fontRef idx="minor">
-            <a:schemeClr val="lt1"/>
-          </a:fontRef>
-        </p:style>
-        <p:txBody>
-          <a:bodyPr rtlCol="0" anchor="ctr"/>
-          <a:lstStyle/>
-          <a:p/>
-        </p:txBody>
-      </p:sp>
-      <p:sp>
-        <p:nvSpPr>
-          <p:cNvPr id="16" name="TextBox 15"/>
-          <p:cNvSpPr txBox="1"/>
-          <p:nvPr/>
-        </p:nvSpPr>
-        <p:spPr>
-          <a:xfrm>
-            <a:off x="932688" y="2304288"/>
-            <a:ext cx="2368296" cy="420624"/>
-          </a:xfrm>
-          <a:prstGeom prst="rect">
-            <a:avLst/>
-          </a:prstGeom>
-          <a:noFill/>
-        </p:spPr>
-        <p:txBody>
-          <a:bodyPr wrap="square" anchor="ctr" lIns="0" rIns="0" tIns="0" bIns="0">
-            <a:spAutoFit/>
-          </a:bodyPr>
-          <a:lstStyle/>
-          <a:p>
-            <a:pPr algn="l">
-              <a:lnSpc>
-                <a:spcPct val="118000"/>
-              </a:lnSpc>
-              <a:spcAft>
-                <a:spcPts val="0"/>
-              </a:spcAft>
-            </a:pPr>
-            <a:r>
-              <a:rPr sz="1350" b="0">
-                <a:solidFill>
-                  <a:srgbClr val="0F172A"/>
-                </a:solidFill>
-                <a:latin typeface="Inter"/>
-              </a:rPr>
-              <a:t>Weak Cell</a:t>
-            </a:r>
-          </a:p>
-        </p:txBody>
-      </p:sp>
-      <p:sp>
-        <p:nvSpPr>
-          <p:cNvPr id="17" name="Rectangle 16"/>
-          <p:cNvSpPr/>
-          <p:nvPr/>
-        </p:nvSpPr>
-        <p:spPr>
-          <a:xfrm>
-            <a:off x="3538728" y="2304288"/>
-            <a:ext cx="2825496" cy="420624"/>
-          </a:xfrm>
-          <a:prstGeom prst="rect">
-            <a:avLst/>
-          </a:prstGeom>
-          <a:solidFill>
-            <a:srgbClr val="F1F5F9"/>
-          </a:solidFill>
-          <a:ln w="9525">
-            <a:solidFill>
-              <a:srgbClr val="CBD5E1"/>
-            </a:solidFill>
-          </a:ln>
-          <a:effectLst/>
-        </p:spPr>
-        <p:style>
-          <a:lnRef idx="1">
-            <a:schemeClr val="accent1"/>
-          </a:lnRef>
-          <a:fillRef idx="3">
-            <a:schemeClr val="accent1"/>
-          </a:fillRef>
-          <a:effectRef idx="2">
-            <a:schemeClr val="accent1"/>
-          </a:effectRef>
-          <a:fontRef idx="minor">
-            <a:schemeClr val="lt1"/>
-          </a:fontRef>
-        </p:style>
-        <p:txBody>
-          <a:bodyPr rtlCol="0" anchor="ctr"/>
-          <a:lstStyle/>
-          <a:p/>
-        </p:txBody>
-      </p:sp>
-      <p:sp>
-        <p:nvSpPr>
-          <p:cNvPr id="18" name="Oval 17"/>
-          <p:cNvSpPr/>
-          <p:nvPr/>
-        </p:nvSpPr>
-        <p:spPr>
-          <a:xfrm>
-            <a:off x="3685032" y="2464308"/>
-            <a:ext cx="100584" cy="100584"/>
-          </a:xfrm>
-          <a:prstGeom prst="ellipse">
-            <a:avLst/>
-          </a:prstGeom>
-          <a:solidFill>
-            <a:srgbClr val="B91C1C"/>
-          </a:solidFill>
-          <a:ln>
-            <a:noFill/>
-          </a:ln>
-          <a:effectLst/>
-        </p:spPr>
-        <p:style>
-          <a:lnRef idx="1">
-            <a:schemeClr val="accent1"/>
-          </a:lnRef>
-          <a:fillRef idx="3">
-            <a:schemeClr val="accent1"/>
-          </a:fillRef>
-          <a:effectRef idx="2">
-            <a:schemeClr val="accent1"/>
-          </a:effectRef>
-          <a:fontRef idx="minor">
-            <a:schemeClr val="lt1"/>
-          </a:fontRef>
-        </p:style>
-        <p:txBody>
-          <a:bodyPr rtlCol="0" anchor="ctr"/>
-          <a:lstStyle/>
-          <a:p/>
-        </p:txBody>
-      </p:sp>
-      <p:sp>
-        <p:nvSpPr>
-          <p:cNvPr id="19" name="TextBox 18"/>
-          <p:cNvSpPr txBox="1"/>
-          <p:nvPr/>
-        </p:nvSpPr>
-        <p:spPr>
-          <a:xfrm>
-            <a:off x="3904488" y="2304288"/>
-            <a:ext cx="2368296" cy="420624"/>
-          </a:xfrm>
-          <a:prstGeom prst="rect">
-            <a:avLst/>
-          </a:prstGeom>
-          <a:noFill/>
-        </p:spPr>
-        <p:txBody>
-          <a:bodyPr wrap="square" anchor="ctr" lIns="0" rIns="0" tIns="0" bIns="0">
-            <a:spAutoFit/>
-          </a:bodyPr>
-          <a:lstStyle/>
-          <a:p>
-            <a:pPr algn="l">
-              <a:lnSpc>
-                <a:spcPct val="118000"/>
-              </a:lnSpc>
-              <a:spcAft>
-                <a:spcPts val="0"/>
-              </a:spcAft>
-            </a:pPr>
-            <a:r>
-              <a:rPr sz="1350" b="0">
-                <a:solidFill>
-                  <a:srgbClr val="0F172A"/>
-                </a:solidFill>
-                <a:latin typeface="Inter"/>
-              </a:rPr>
-              <a:t>Overvoltage</a:t>
-            </a:r>
-          </a:p>
-        </p:txBody>
-      </p:sp>
-      <p:sp>
-        <p:nvSpPr>
-          <p:cNvPr id="20" name="Rectangle 19"/>
-          <p:cNvSpPr/>
-          <p:nvPr/>
-        </p:nvSpPr>
-        <p:spPr>
-          <a:xfrm>
-            <a:off x="566928" y="2816352"/>
-            <a:ext cx="2825496" cy="420624"/>
-          </a:xfrm>
-          <a:prstGeom prst="rect">
-            <a:avLst/>
-          </a:prstGeom>
-          <a:solidFill>
-            <a:srgbClr val="F1F5F9"/>
-          </a:solidFill>
-          <a:ln w="9525">
-            <a:solidFill>
-              <a:srgbClr val="CBD5E1"/>
-            </a:solidFill>
-          </a:ln>
-          <a:effectLst/>
-        </p:spPr>
-        <p:style>
-          <a:lnRef idx="1">
-            <a:schemeClr val="accent1"/>
-          </a:lnRef>
-          <a:fillRef idx="3">
-            <a:schemeClr val="accent1"/>
-          </a:fillRef>
-          <a:effectRef idx="2">
-            <a:schemeClr val="accent1"/>
-          </a:effectRef>
-          <a:fontRef idx="minor">
-            <a:schemeClr val="lt1"/>
-          </a:fontRef>
-        </p:style>
-        <p:txBody>
-          <a:bodyPr rtlCol="0" anchor="ctr"/>
-          <a:lstStyle/>
-          <a:p/>
-        </p:txBody>
-      </p:sp>
-      <p:sp>
-        <p:nvSpPr>
-          <p:cNvPr id="21" name="Oval 20"/>
-          <p:cNvSpPr/>
-          <p:nvPr/>
-        </p:nvSpPr>
-        <p:spPr>
-          <a:xfrm>
-            <a:off x="713232" y="2976372"/>
-            <a:ext cx="100584" cy="100584"/>
-          </a:xfrm>
-          <a:prstGeom prst="ellipse">
-            <a:avLst/>
-          </a:prstGeom>
-          <a:solidFill>
-            <a:srgbClr val="B91C1C"/>
-          </a:solidFill>
-          <a:ln>
-            <a:noFill/>
-          </a:ln>
-          <a:effectLst/>
-        </p:spPr>
-        <p:style>
-          <a:lnRef idx="1">
-            <a:schemeClr val="accent1"/>
-          </a:lnRef>
-          <a:fillRef idx="3">
-            <a:schemeClr val="accent1"/>
-          </a:fillRef>
-          <a:effectRef idx="2">
-            <a:schemeClr val="accent1"/>
-          </a:effectRef>
-          <a:fontRef idx="minor">
-            <a:schemeClr val="lt1"/>
-          </a:fontRef>
-        </p:style>
-        <p:txBody>
-          <a:bodyPr rtlCol="0" anchor="ctr"/>
-          <a:lstStyle/>
-          <a:p/>
-        </p:txBody>
-      </p:sp>
-      <p:sp>
-        <p:nvSpPr>
-          <p:cNvPr id="22" name="TextBox 21"/>
-          <p:cNvSpPr txBox="1"/>
-          <p:nvPr/>
-        </p:nvSpPr>
-        <p:spPr>
-          <a:xfrm>
-            <a:off x="932688" y="2816352"/>
-            <a:ext cx="2368296" cy="420624"/>
-          </a:xfrm>
-          <a:prstGeom prst="rect">
-            <a:avLst/>
-          </a:prstGeom>
-          <a:noFill/>
-        </p:spPr>
-        <p:txBody>
-          <a:bodyPr wrap="square" anchor="ctr" lIns="0" rIns="0" tIns="0" bIns="0">
-            <a:spAutoFit/>
-          </a:bodyPr>
-          <a:lstStyle/>
-          <a:p>
-            <a:pPr algn="l">
-              <a:lnSpc>
-                <a:spcPct val="118000"/>
-              </a:lnSpc>
-              <a:spcAft>
-                <a:spcPts val="0"/>
-              </a:spcAft>
-            </a:pPr>
-            <a:r>
-              <a:rPr sz="1350" b="0">
-                <a:solidFill>
-                  <a:srgbClr val="0F172A"/>
-                </a:solidFill>
-                <a:latin typeface="Inter"/>
-              </a:rPr>
-              <a:t>Undervoltage</a:t>
-            </a:r>
-          </a:p>
-        </p:txBody>
-      </p:sp>
-      <p:sp>
-        <p:nvSpPr>
-          <p:cNvPr id="23" name="Rectangle 22"/>
-          <p:cNvSpPr/>
-          <p:nvPr/>
-        </p:nvSpPr>
-        <p:spPr>
-          <a:xfrm>
-            <a:off x="3538728" y="2816352"/>
-            <a:ext cx="2825496" cy="420624"/>
-          </a:xfrm>
-          <a:prstGeom prst="rect">
-            <a:avLst/>
-          </a:prstGeom>
-          <a:solidFill>
-            <a:srgbClr val="F1F5F9"/>
-          </a:solidFill>
-          <a:ln w="9525">
-            <a:solidFill>
-              <a:srgbClr val="CBD5E1"/>
-            </a:solidFill>
-          </a:ln>
-          <a:effectLst/>
-        </p:spPr>
-        <p:style>
-          <a:lnRef idx="1">
-            <a:schemeClr val="accent1"/>
-          </a:lnRef>
-          <a:fillRef idx="3">
-            <a:schemeClr val="accent1"/>
-          </a:fillRef>
-          <a:effectRef idx="2">
-            <a:schemeClr val="accent1"/>
-          </a:effectRef>
-          <a:fontRef idx="minor">
-            <a:schemeClr val="lt1"/>
-          </a:fontRef>
-        </p:style>
-        <p:txBody>
-          <a:bodyPr rtlCol="0" anchor="ctr"/>
-          <a:lstStyle/>
-          <a:p/>
-        </p:txBody>
-      </p:sp>
-      <p:sp>
-        <p:nvSpPr>
-          <p:cNvPr id="24" name="Oval 23"/>
-          <p:cNvSpPr/>
-          <p:nvPr/>
-        </p:nvSpPr>
-        <p:spPr>
-          <a:xfrm>
-            <a:off x="3685032" y="2976372"/>
-            <a:ext cx="100584" cy="100584"/>
-          </a:xfrm>
-          <a:prstGeom prst="ellipse">
-            <a:avLst/>
-          </a:prstGeom>
-          <a:solidFill>
-            <a:srgbClr val="B91C1C"/>
-          </a:solidFill>
-          <a:ln>
-            <a:noFill/>
-          </a:ln>
-          <a:effectLst/>
-        </p:spPr>
-        <p:style>
-          <a:lnRef idx="1">
-            <a:schemeClr val="accent1"/>
-          </a:lnRef>
-          <a:fillRef idx="3">
-            <a:schemeClr val="accent1"/>
-          </a:fillRef>
-          <a:effectRef idx="2">
-            <a:schemeClr val="accent1"/>
-          </a:effectRef>
-          <a:fontRef idx="minor">
-            <a:schemeClr val="lt1"/>
-          </a:fontRef>
-        </p:style>
-        <p:txBody>
-          <a:bodyPr rtlCol="0" anchor="ctr"/>
-          <a:lstStyle/>
-          <a:p/>
-        </p:txBody>
-      </p:sp>
-      <p:sp>
-        <p:nvSpPr>
-          <p:cNvPr id="25" name="TextBox 24"/>
-          <p:cNvSpPr txBox="1"/>
-          <p:nvPr/>
-        </p:nvSpPr>
-        <p:spPr>
-          <a:xfrm>
-            <a:off x="3904488" y="2816352"/>
-            <a:ext cx="2368296" cy="420624"/>
-          </a:xfrm>
-          <a:prstGeom prst="rect">
-            <a:avLst/>
-          </a:prstGeom>
-          <a:noFill/>
-        </p:spPr>
-        <p:txBody>
-          <a:bodyPr wrap="square" anchor="ctr" lIns="0" rIns="0" tIns="0" bIns="0">
-            <a:spAutoFit/>
-          </a:bodyPr>
-          <a:lstStyle/>
-          <a:p>
-            <a:pPr algn="l">
-              <a:lnSpc>
-                <a:spcPct val="118000"/>
-              </a:lnSpc>
-              <a:spcAft>
-                <a:spcPts val="0"/>
-              </a:spcAft>
-            </a:pPr>
-            <a:r>
-              <a:rPr sz="1350" b="0">
-                <a:solidFill>
-                  <a:srgbClr val="0F172A"/>
-                </a:solidFill>
-                <a:latin typeface="Inter"/>
-              </a:rPr>
-              <a:t>Overtemperature</a:t>
-            </a:r>
-          </a:p>
-        </p:txBody>
-      </p:sp>
-      <p:sp>
-        <p:nvSpPr>
-          <p:cNvPr id="26" name="TextBox 25"/>
-          <p:cNvSpPr txBox="1"/>
-          <p:nvPr/>
-        </p:nvSpPr>
-        <p:spPr>
-          <a:xfrm>
-            <a:off x="566928" y="3364992"/>
-            <a:ext cx="5797296" cy="2103120"/>
-          </a:xfrm>
-          <a:prstGeom prst="rect">
-            <a:avLst/>
-          </a:prstGeom>
-          <a:noFill/>
-        </p:spPr>
-        <p:txBody>
-          <a:bodyPr wrap="square" lIns="0" rIns="0" tIns="0" bIns="0">
-            <a:spAutoFit/>
-          </a:bodyPr>
-          <a:lstStyle/>
-          <a:p>
-            <a:pPr marL="274320" indent="-274320">
-              <a:lnSpc>
-                <a:spcPct val="116000"/>
-              </a:lnSpc>
-              <a:spcAft>
-                <a:spcPts val="900"/>
-              </a:spcAft>
-              <a:buClr>
-                <a:srgbClr val="0E7490"/>
-              </a:buClr>
-              <a:buSzPct val="62000"/>
-              <a:buFont typeface="Arial" pitchFamily="34" charset="0"/>
-              <a:buChar char="●"/>
-            </a:pPr>
-            <a:r>
-              <a:rPr sz="1600">
-                <a:solidFill>
-                  <a:srgbClr val="0F172A"/>
-                </a:solidFill>
-                <a:latin typeface="Inter"/>
-              </a:rPr>
-              <a:t>Below 0.50 the model abstains — no alert is raised.</a:t>
-            </a:r>
-          </a:p>
-          <a:p>
-            <a:pPr marL="274320" indent="-274320">
-              <a:lnSpc>
-                <a:spcPct val="116000"/>
-              </a:lnSpc>
-              <a:spcAft>
-                <a:spcPts val="900"/>
-              </a:spcAft>
-              <a:buClr>
-                <a:srgbClr val="0E7490"/>
-              </a:buClr>
-              <a:buSzPct val="62000"/>
-              <a:buFont typeface="Arial" pitchFamily="34" charset="0"/>
-              <a:buChar char="●"/>
-            </a:pPr>
-            <a:r>
-              <a:rPr sz="1600">
-                <a:solidFill>
-                  <a:srgbClr val="0F172A"/>
-                </a:solidFill>
-                <a:latin typeface="Inter"/>
-              </a:rPr>
-              <a:t>0.50–0.85 raises a logged warning, non-blocking for the operator.</a:t>
-            </a:r>
-          </a:p>
-          <a:p>
-            <a:pPr marL="274320" indent="-274320">
-              <a:lnSpc>
-                <a:spcPct val="116000"/>
-              </a:lnSpc>
-              <a:spcAft>
-                <a:spcPts val="900"/>
-              </a:spcAft>
-              <a:buClr>
-                <a:srgbClr val="0E7490"/>
-              </a:buClr>
-              <a:buSzPct val="62000"/>
-              <a:buFont typeface="Arial" pitchFamily="34" charset="0"/>
-              <a:buChar char="●"/>
-            </a:pPr>
-            <a:r>
-              <a:rPr sz="1600">
-                <a:solidFill>
-                  <a:srgbClr val="0F172A"/>
-                </a:solidFill>
-                <a:latin typeface="Inter"/>
-              </a:rPr>
-              <a:t>Above 0.85 becomes an alert with a corrective action.</a:t>
-            </a:r>
-          </a:p>
-          <a:p>
-            <a:pPr marL="274320" indent="-274320">
-              <a:lnSpc>
-                <a:spcPct val="116000"/>
-              </a:lnSpc>
-              <a:spcAft>
-                <a:spcPts val="900"/>
-              </a:spcAft>
-              <a:buClr>
-                <a:srgbClr val="0E7490"/>
-              </a:buClr>
-              <a:buSzPct val="62000"/>
-              <a:buFont typeface="Arial" pitchFamily="34" charset="0"/>
-              <a:buChar char="●"/>
-            </a:pPr>
-            <a:r>
-              <a:rPr sz="1600">
-                <a:solidFill>
-                  <a:srgbClr val="0F172A"/>
-                </a:solidFill>
-                <a:latin typeface="Inter"/>
-              </a:rPr>
-              <a:t>A confident wrong answer is worse than an honest abstention.</a:t>
-            </a:r>
-          </a:p>
-        </p:txBody>
-      </p:sp>
       <p:pic>
         <p:nvPicPr>
-          <p:cNvPr id="27" name="Picture 26" descr="fig_confidence_bands.png"/>
+          <p:cNvPr id="21" name="Picture 20" descr="mock_landing.png"/>
           <p:cNvPicPr>
             <a:picLocks noChangeAspect="1"/>
           </p:cNvPicPr>
@@ -12649,17 +13067,61 @@
         </p:blipFill>
         <p:spPr>
           <a:xfrm>
-            <a:off x="7528794" y="1572768"/>
-            <a:ext cx="3260585" cy="1417320"/>
+            <a:off x="7918366" y="1581912"/>
+            <a:ext cx="2481441" cy="1545335"/>
           </a:xfrm>
           <a:prstGeom prst="rect">
             <a:avLst/>
           </a:prstGeom>
         </p:spPr>
       </p:pic>
+      <p:sp>
+        <p:nvSpPr>
+          <p:cNvPr id="22" name="Rectangle 21"/>
+          <p:cNvSpPr/>
+          <p:nvPr/>
+        </p:nvSpPr>
+        <p:spPr>
+          <a:xfrm>
+            <a:off x="7538301" y="3328416"/>
+            <a:ext cx="3241571" cy="1371600"/>
+          </a:xfrm>
+          <a:prstGeom prst="rect">
+            <a:avLst/>
+          </a:prstGeom>
+          <a:solidFill>
+            <a:srgbClr val="FFFFFF"/>
+          </a:solidFill>
+          <a:ln w="12700">
+            <a:solidFill>
+              <a:srgbClr val="CBD5E1"/>
+            </a:solidFill>
+          </a:ln>
+          <a:effectLst/>
+        </p:spPr>
+        <p:style>
+          <a:lnRef idx="1">
+            <a:schemeClr val="accent1"/>
+          </a:lnRef>
+          <a:fillRef idx="3">
+            <a:schemeClr val="accent1"/>
+          </a:fillRef>
+          <a:effectRef idx="2">
+            <a:schemeClr val="accent1"/>
+          </a:effectRef>
+          <a:fontRef idx="minor">
+            <a:schemeClr val="lt1"/>
+          </a:fontRef>
+        </p:style>
+        <p:txBody>
+          <a:bodyPr rtlCol="0" anchor="ctr"/>
+          <a:lstStyle/>
+          <a:p/>
+        </p:txBody>
+      </p:sp>
       <p:pic>
         <p:nvPicPr>
-          <p:cNvPr id="28" name="Picture 27" descr="fig_confusion_matrix.png"/>
+          <p:cNvPr id="23" name="Picture 22" descr="p07_img1_x61.jpeg"/>
           <p:cNvPicPr>
             <a:picLocks noChangeAspect="1"/>
           </p:cNvPicPr>
@@ -12673,8 +13135,32 @@
         </p:blipFill>
         <p:spPr>
           <a:xfrm>
-            <a:off x="7464221" y="3182112"/>
-            <a:ext cx="3389731" cy="3017520"/>
+            <a:off x="7657173" y="3447288"/>
+            <a:ext cx="3003827" cy="1133856"/>
+          </a:xfrm>
+          <a:prstGeom prst="rect">
+            <a:avLst/>
+          </a:prstGeom>
+        </p:spPr>
+      </p:pic>
+      <p:pic>
+        <p:nvPicPr>
+          <p:cNvPr id="24" name="Picture 23" descr="fig_cycle_history.png"/>
+          <p:cNvPicPr>
+            <a:picLocks noChangeAspect="1"/>
+          </p:cNvPicPr>
+          <p:nvPr/>
+        </p:nvPicPr>
+        <p:blipFill>
+          <a:blip r:embed="rId4"/>
+          <a:stretch>
+            <a:fillRect/>
+          </a:stretch>
+        </p:blipFill>
+        <p:spPr>
+          <a:xfrm>
+            <a:off x="7890175" y="4791456"/>
+            <a:ext cx="2537824" cy="1417320"/>
           </a:xfrm>
           <a:prstGeom prst="rect">
             <a:avLst/>
@@ -12925,8 +13411,8 @@
         </p:nvSpPr>
         <p:spPr>
           <a:xfrm>
-            <a:off x="566928" y="1481328"/>
-            <a:ext cx="5797296" cy="3035808"/>
+            <a:off x="566928" y="1499616"/>
+            <a:ext cx="2761488" cy="1874519"/>
           </a:xfrm>
           <a:prstGeom prst="rect">
             <a:avLst/>
@@ -12944,7 +13430,7 @@
                 <a:spcPct val="116000"/>
               </a:lnSpc>
               <a:spcAft>
-                <a:spcPts val="800"/>
+                <a:spcPts val="700"/>
               </a:spcAft>
               <a:buClr>
                 <a:srgbClr val="0E7490"/>
@@ -12954,13 +13440,13 @@
               <a:buChar char="●"/>
             </a:pPr>
             <a:r>
-              <a:rPr sz="1550">
+              <a:rPr sz="1350">
                 <a:solidFill>
                   <a:srgbClr val="0F172A"/>
                 </a:solidFill>
                 <a:latin typeface="Inter"/>
               </a:rPr>
-              <a:t>Upload a datasheet PDF; the parser reads the limits.</a:t>
+              <a:t>Upload a datasheet PDF; the parser reads limits.</a:t>
             </a:r>
           </a:p>
           <a:p>
@@ -12969,7 +13455,7 @@
                 <a:spcPct val="116000"/>
               </a:lnSpc>
               <a:spcAft>
-                <a:spcPts val="800"/>
+                <a:spcPts val="700"/>
               </a:spcAft>
               <a:buClr>
                 <a:srgbClr val="0E7490"/>
@@ -12979,13 +13465,13 @@
               <a:buChar char="●"/>
             </a:pPr>
             <a:r>
-              <a:rPr sz="1550">
+              <a:rPr sz="1350">
                 <a:solidFill>
                   <a:srgbClr val="0F172A"/>
                 </a:solidFill>
                 <a:latin typeface="Inter"/>
               </a:rPr>
-              <a:t>Extracts V_nom, V_max, V_min, capacity, current, thermal.</a:t>
+              <a:t>V_nom, V_max, V_min, capacity, current, thermal.</a:t>
             </a:r>
           </a:p>
           <a:p>
@@ -12994,7 +13480,7 @@
                 <a:spcPct val="116000"/>
               </a:lnSpc>
               <a:spcAft>
-                <a:spcPts val="800"/>
+                <a:spcPts val="700"/>
               </a:spcAft>
               <a:buClr>
                 <a:srgbClr val="0E7490"/>
@@ -13004,7 +13490,7 @@
               <a:buChar char="●"/>
             </a:pPr>
             <a:r>
-              <a:rPr sz="1550">
+              <a:rPr sz="1350">
                 <a:solidFill>
                   <a:srgbClr val="0F172A"/>
                 </a:solidFill>
@@ -13013,13 +13499,36 @@
               <a:t>Pack sizing derives S and P from the bus target.</a:t>
             </a:r>
           </a:p>
+        </p:txBody>
+      </p:sp>
+      <p:sp>
+        <p:nvSpPr>
+          <p:cNvPr id="8" name="TextBox 7"/>
+          <p:cNvSpPr txBox="1"/>
+          <p:nvPr/>
+        </p:nvSpPr>
+        <p:spPr>
+          <a:xfrm>
+            <a:off x="3602736" y="1499616"/>
+            <a:ext cx="2761488" cy="1874519"/>
+          </a:xfrm>
+          <a:prstGeom prst="rect">
+            <a:avLst/>
+          </a:prstGeom>
+          <a:noFill/>
+        </p:spPr>
+        <p:txBody>
+          <a:bodyPr wrap="square" lIns="0" rIns="0" tIns="0" bIns="0">
+            <a:spAutoFit/>
+          </a:bodyPr>
+          <a:lstStyle/>
           <a:p>
             <a:pPr marL="274320" indent="-274320">
               <a:lnSpc>
                 <a:spcPct val="116000"/>
               </a:lnSpc>
               <a:spcAft>
-                <a:spcPts val="800"/>
+                <a:spcPts val="700"/>
               </a:spcAft>
               <a:buClr>
                 <a:srgbClr val="0E7490"/>
@@ -13029,13 +13538,13 @@
               <a:buChar char="●"/>
             </a:pPr>
             <a:r>
-              <a:rPr sz="1550">
+              <a:rPr sz="1350">
                 <a:solidFill>
                   <a:srgbClr val="0F172A"/>
                 </a:solidFill>
                 <a:latin typeface="Inter"/>
               </a:rPr>
-              <a:t>Tiering: NMC reuse, NCA/LCO shift, LFP remap, LTO rescale.</a:t>
+              <a:t>NMC reuse → NCA/LCO shift → LFP remap → LTO rescale.</a:t>
             </a:r>
           </a:p>
           <a:p>
@@ -13044,7 +13553,7 @@
                 <a:spcPct val="116000"/>
               </a:lnSpc>
               <a:spcAft>
-                <a:spcPts val="800"/>
+                <a:spcPts val="700"/>
               </a:spcAft>
               <a:buClr>
                 <a:srgbClr val="0E7490"/>
@@ -13054,13 +13563,13 @@
               <a:buChar char="●"/>
             </a:pPr>
             <a:r>
-              <a:rPr sz="1550">
+              <a:rPr sz="1350">
                 <a:solidFill>
                   <a:srgbClr val="0F172A"/>
                 </a:solidFill>
                 <a:latin typeface="Inter"/>
               </a:rPr>
-              <a:t>Overvoltage warns 95%, critical 100%; overcurrent 90%.</a:t>
+              <a:t>Overvoltage warns 95%, critical 100%.</a:t>
             </a:r>
           </a:p>
           <a:p>
@@ -13069,7 +13578,7 @@
                 <a:spcPct val="116000"/>
               </a:lnSpc>
               <a:spcAft>
-                <a:spcPts val="800"/>
+                <a:spcPts val="700"/>
               </a:spcAft>
               <a:buClr>
                 <a:srgbClr val="0E7490"/>
@@ -13079,27 +13588,27 @@
               <a:buChar char="●"/>
             </a:pPr>
             <a:r>
-              <a:rPr sz="1550">
+              <a:rPr sz="1350">
                 <a:solidFill>
                   <a:srgbClr val="0F172A"/>
                 </a:solidFill>
                 <a:latin typeface="Inter"/>
               </a:rPr>
-              <a:t>active_profile.json and PostgreSQL sync live, no restart.</a:t>
-            </a:r>
-          </a:p>
-        </p:txBody>
-      </p:sp>
-      <p:sp>
-        <p:nvSpPr>
-          <p:cNvPr id="8" name="Rectangle 7"/>
+              <a:t>active_profile.json + PostgreSQL sync, no restart.</a:t>
+            </a:r>
+          </a:p>
+        </p:txBody>
+      </p:sp>
+      <p:sp>
+        <p:nvSpPr>
+          <p:cNvPr id="9" name="Rectangle 8"/>
           <p:cNvSpPr/>
           <p:nvPr/>
         </p:nvSpPr>
         <p:spPr>
           <a:xfrm>
-            <a:off x="566928" y="4882896"/>
-            <a:ext cx="5797296" cy="1060704"/>
+            <a:off x="566928" y="3547872"/>
+            <a:ext cx="5797296" cy="969264"/>
           </a:xfrm>
           <a:prstGeom prst="rect">
             <a:avLst/>
@@ -13136,14 +13645,14 @@
       </p:sp>
       <p:sp>
         <p:nvSpPr>
-          <p:cNvPr id="9" name="TextBox 8"/>
+          <p:cNvPr id="10" name="TextBox 9"/>
           <p:cNvSpPr txBox="1"/>
           <p:nvPr/>
         </p:nvSpPr>
         <p:spPr>
           <a:xfrm>
-            <a:off x="768096" y="4992624"/>
-            <a:ext cx="5394959" cy="237744"/>
+            <a:off x="768096" y="3648456"/>
+            <a:ext cx="5394959" cy="219456"/>
           </a:xfrm>
           <a:prstGeom prst="rect">
             <a:avLst/>
@@ -13165,7 +13674,7 @@
               </a:spcAft>
             </a:pPr>
             <a:r>
-              <a:rPr sz="1000" b="1">
+              <a:rPr sz="950" b="1">
                 <a:solidFill>
                   <a:srgbClr val="B45309"/>
                 </a:solidFill>
@@ -13178,14 +13687,14 @@
       </p:sp>
       <p:sp>
         <p:nvSpPr>
-          <p:cNvPr id="10" name="TextBox 9"/>
+          <p:cNvPr id="11" name="TextBox 10"/>
           <p:cNvSpPr txBox="1"/>
           <p:nvPr/>
         </p:nvSpPr>
         <p:spPr>
           <a:xfrm>
-            <a:off x="768096" y="5248656"/>
-            <a:ext cx="5394959" cy="603504"/>
+            <a:off x="768096" y="3895344"/>
+            <a:ext cx="5394959" cy="566928"/>
           </a:xfrm>
           <a:prstGeom prst="rect">
             <a:avLst/>
@@ -13200,27 +13709,489 @@
           <a:p>
             <a:pPr algn="l">
               <a:lnSpc>
-                <a:spcPct val="122000"/>
+                <a:spcPct val="124000"/>
               </a:lnSpc>
               <a:spcAft>
                 <a:spcPts val="0"/>
               </a:spcAft>
             </a:pPr>
             <a:r>
-              <a:rPr sz="1300" b="0">
+              <a:rPr sz="1150" b="0">
                 <a:solidFill>
                   <a:srgbClr val="0F172A"/>
                 </a:solidFill>
                 <a:latin typeface="Inter"/>
               </a:rPr>
               <a:t>Upload field telemetry from the new pack and retrain XGBoost from the dashboard — the adaptation loop closes without a developer.</a:t>
+            </a:r>
+          </a:p>
+        </p:txBody>
+      </p:sp>
+      <p:sp>
+        <p:nvSpPr>
+          <p:cNvPr id="12" name="TextBox 11"/>
+          <p:cNvSpPr txBox="1"/>
+          <p:nvPr/>
+        </p:nvSpPr>
+        <p:spPr>
+          <a:xfrm>
+            <a:off x="566928" y="4645152"/>
+            <a:ext cx="5797296" cy="219456"/>
+          </a:xfrm>
+          <a:prstGeom prst="rect">
+            <a:avLst/>
+          </a:prstGeom>
+          <a:noFill/>
+        </p:spPr>
+        <p:txBody>
+          <a:bodyPr wrap="square" anchor="t" lIns="0" rIns="0" tIns="0" bIns="0">
+            <a:spAutoFit/>
+          </a:bodyPr>
+          <a:lstStyle/>
+          <a:p>
+            <a:pPr algn="l">
+              <a:lnSpc>
+                <a:spcPct val="118000"/>
+              </a:lnSpc>
+              <a:spcAft>
+                <a:spcPts val="0"/>
+              </a:spcAft>
+            </a:pPr>
+            <a:r>
+              <a:rPr sz="950" b="1">
+                <a:solidFill>
+                  <a:srgbClr val="475569"/>
+                </a:solidFill>
+                <a:latin typeface="Inter"/>
+              </a:rPr>
+              <a:t>WHAT WE WOULD BUILD NEXT</a:t>
+            </a:r>
+          </a:p>
+        </p:txBody>
+      </p:sp>
+      <p:sp>
+        <p:nvSpPr>
+          <p:cNvPr id="13" name="Rectangle 12"/>
+          <p:cNvSpPr/>
+          <p:nvPr/>
+        </p:nvSpPr>
+        <p:spPr>
+          <a:xfrm>
+            <a:off x="566928" y="4919472"/>
+            <a:ext cx="54864" cy="201168"/>
+          </a:xfrm>
+          <a:prstGeom prst="rect">
+            <a:avLst/>
+          </a:prstGeom>
+          <a:solidFill>
+            <a:srgbClr val="B91C1C"/>
+          </a:solidFill>
+          <a:ln>
+            <a:noFill/>
+          </a:ln>
+          <a:effectLst/>
+        </p:spPr>
+        <p:style>
+          <a:lnRef idx="1">
+            <a:schemeClr val="accent1"/>
+          </a:lnRef>
+          <a:fillRef idx="3">
+            <a:schemeClr val="accent1"/>
+          </a:fillRef>
+          <a:effectRef idx="2">
+            <a:schemeClr val="accent1"/>
+          </a:effectRef>
+          <a:fontRef idx="minor">
+            <a:schemeClr val="lt1"/>
+          </a:fontRef>
+        </p:style>
+        <p:txBody>
+          <a:bodyPr rtlCol="0" anchor="ctr"/>
+          <a:lstStyle/>
+          <a:p/>
+        </p:txBody>
+      </p:sp>
+      <p:sp>
+        <p:nvSpPr>
+          <p:cNvPr id="14" name="TextBox 13"/>
+          <p:cNvSpPr txBox="1"/>
+          <p:nvPr/>
+        </p:nvSpPr>
+        <p:spPr>
+          <a:xfrm>
+            <a:off x="768096" y="4901184"/>
+            <a:ext cx="5596128" cy="237744"/>
+          </a:xfrm>
+          <a:prstGeom prst="rect">
+            <a:avLst/>
+          </a:prstGeom>
+          <a:noFill/>
+        </p:spPr>
+        <p:txBody>
+          <a:bodyPr wrap="square" anchor="t" lIns="0" rIns="0" tIns="0" bIns="0">
+            <a:spAutoFit/>
+          </a:bodyPr>
+          <a:lstStyle/>
+          <a:p>
+            <a:pPr algn="l">
+              <a:lnSpc>
+                <a:spcPct val="118000"/>
+              </a:lnSpc>
+              <a:spcAft>
+                <a:spcPts val="0"/>
+              </a:spcAft>
+            </a:pPr>
+            <a:r>
+              <a:rPr sz="1150" b="0">
+                <a:solidFill>
+                  <a:srgbClr val="0F172A"/>
+                </a:solidFill>
+                <a:latin typeface="Inter"/>
+              </a:rPr>
+              <a:t>Close the Cell Imbalance gap</a:t>
+            </a:r>
+          </a:p>
+        </p:txBody>
+      </p:sp>
+      <p:sp>
+        <p:nvSpPr>
+          <p:cNvPr id="15" name="Rectangle 14"/>
+          <p:cNvSpPr/>
+          <p:nvPr/>
+        </p:nvSpPr>
+        <p:spPr>
+          <a:xfrm>
+            <a:off x="566928" y="5166360"/>
+            <a:ext cx="54864" cy="201168"/>
+          </a:xfrm>
+          <a:prstGeom prst="rect">
+            <a:avLst/>
+          </a:prstGeom>
+          <a:solidFill>
+            <a:srgbClr val="B45309"/>
+          </a:solidFill>
+          <a:ln>
+            <a:noFill/>
+          </a:ln>
+          <a:effectLst/>
+        </p:spPr>
+        <p:style>
+          <a:lnRef idx="1">
+            <a:schemeClr val="accent1"/>
+          </a:lnRef>
+          <a:fillRef idx="3">
+            <a:schemeClr val="accent1"/>
+          </a:fillRef>
+          <a:effectRef idx="2">
+            <a:schemeClr val="accent1"/>
+          </a:effectRef>
+          <a:fontRef idx="minor">
+            <a:schemeClr val="lt1"/>
+          </a:fontRef>
+        </p:style>
+        <p:txBody>
+          <a:bodyPr rtlCol="0" anchor="ctr"/>
+          <a:lstStyle/>
+          <a:p/>
+        </p:txBody>
+      </p:sp>
+      <p:sp>
+        <p:nvSpPr>
+          <p:cNvPr id="16" name="TextBox 15"/>
+          <p:cNvSpPr txBox="1"/>
+          <p:nvPr/>
+        </p:nvSpPr>
+        <p:spPr>
+          <a:xfrm>
+            <a:off x="768096" y="5148072"/>
+            <a:ext cx="5596128" cy="237744"/>
+          </a:xfrm>
+          <a:prstGeom prst="rect">
+            <a:avLst/>
+          </a:prstGeom>
+          <a:noFill/>
+        </p:spPr>
+        <p:txBody>
+          <a:bodyPr wrap="square" anchor="t" lIns="0" rIns="0" tIns="0" bIns="0">
+            <a:spAutoFit/>
+          </a:bodyPr>
+          <a:lstStyle/>
+          <a:p>
+            <a:pPr algn="l">
+              <a:lnSpc>
+                <a:spcPct val="118000"/>
+              </a:lnSpc>
+              <a:spcAft>
+                <a:spcPts val="0"/>
+              </a:spcAft>
+            </a:pPr>
+            <a:r>
+              <a:rPr sz="1150" b="0">
+                <a:solidFill>
+                  <a:srgbClr val="0F172A"/>
+                </a:solidFill>
+                <a:latin typeface="Inter"/>
+              </a:rPr>
+              <a:t>Lift OOD recall above 24.5%</a:t>
+            </a:r>
+          </a:p>
+        </p:txBody>
+      </p:sp>
+      <p:sp>
+        <p:nvSpPr>
+          <p:cNvPr id="17" name="Rectangle 16"/>
+          <p:cNvSpPr/>
+          <p:nvPr/>
+        </p:nvSpPr>
+        <p:spPr>
+          <a:xfrm>
+            <a:off x="566928" y="5413248"/>
+            <a:ext cx="54864" cy="201168"/>
+          </a:xfrm>
+          <a:prstGeom prst="rect">
+            <a:avLst/>
+          </a:prstGeom>
+          <a:solidFill>
+            <a:srgbClr val="0E7490"/>
+          </a:solidFill>
+          <a:ln>
+            <a:noFill/>
+          </a:ln>
+          <a:effectLst/>
+        </p:spPr>
+        <p:style>
+          <a:lnRef idx="1">
+            <a:schemeClr val="accent1"/>
+          </a:lnRef>
+          <a:fillRef idx="3">
+            <a:schemeClr val="accent1"/>
+          </a:fillRef>
+          <a:effectRef idx="2">
+            <a:schemeClr val="accent1"/>
+          </a:effectRef>
+          <a:fontRef idx="minor">
+            <a:schemeClr val="lt1"/>
+          </a:fontRef>
+        </p:style>
+        <p:txBody>
+          <a:bodyPr rtlCol="0" anchor="ctr"/>
+          <a:lstStyle/>
+          <a:p/>
+        </p:txBody>
+      </p:sp>
+      <p:sp>
+        <p:nvSpPr>
+          <p:cNvPr id="18" name="TextBox 17"/>
+          <p:cNvSpPr txBox="1"/>
+          <p:nvPr/>
+        </p:nvSpPr>
+        <p:spPr>
+          <a:xfrm>
+            <a:off x="768096" y="5394960"/>
+            <a:ext cx="5596128" cy="237744"/>
+          </a:xfrm>
+          <a:prstGeom prst="rect">
+            <a:avLst/>
+          </a:prstGeom>
+          <a:noFill/>
+        </p:spPr>
+        <p:txBody>
+          <a:bodyPr wrap="square" anchor="t" lIns="0" rIns="0" tIns="0" bIns="0">
+            <a:spAutoFit/>
+          </a:bodyPr>
+          <a:lstStyle/>
+          <a:p>
+            <a:pPr algn="l">
+              <a:lnSpc>
+                <a:spcPct val="118000"/>
+              </a:lnSpc>
+              <a:spcAft>
+                <a:spcPts val="0"/>
+              </a:spcAft>
+            </a:pPr>
+            <a:r>
+              <a:rPr sz="1150" b="0">
+                <a:solidFill>
+                  <a:srgbClr val="0F172A"/>
+                </a:solidFill>
+                <a:latin typeface="Inter"/>
+              </a:rPr>
+              <a:t>Move inference onto the Zynq-7000</a:t>
+            </a:r>
+          </a:p>
+        </p:txBody>
+      </p:sp>
+      <p:sp>
+        <p:nvSpPr>
+          <p:cNvPr id="19" name="Rectangle 18"/>
+          <p:cNvSpPr/>
+          <p:nvPr/>
+        </p:nvSpPr>
+        <p:spPr>
+          <a:xfrm>
+            <a:off x="566928" y="5660136"/>
+            <a:ext cx="54864" cy="201168"/>
+          </a:xfrm>
+          <a:prstGeom prst="rect">
+            <a:avLst/>
+          </a:prstGeom>
+          <a:solidFill>
+            <a:srgbClr val="0E7490"/>
+          </a:solidFill>
+          <a:ln>
+            <a:noFill/>
+          </a:ln>
+          <a:effectLst/>
+        </p:spPr>
+        <p:style>
+          <a:lnRef idx="1">
+            <a:schemeClr val="accent1"/>
+          </a:lnRef>
+          <a:fillRef idx="3">
+            <a:schemeClr val="accent1"/>
+          </a:fillRef>
+          <a:effectRef idx="2">
+            <a:schemeClr val="accent1"/>
+          </a:effectRef>
+          <a:fontRef idx="minor">
+            <a:schemeClr val="lt1"/>
+          </a:fontRef>
+        </p:style>
+        <p:txBody>
+          <a:bodyPr rtlCol="0" anchor="ctr"/>
+          <a:lstStyle/>
+          <a:p/>
+        </p:txBody>
+      </p:sp>
+      <p:sp>
+        <p:nvSpPr>
+          <p:cNvPr id="20" name="TextBox 19"/>
+          <p:cNvSpPr txBox="1"/>
+          <p:nvPr/>
+        </p:nvSpPr>
+        <p:spPr>
+          <a:xfrm>
+            <a:off x="768096" y="5641848"/>
+            <a:ext cx="5596128" cy="237744"/>
+          </a:xfrm>
+          <a:prstGeom prst="rect">
+            <a:avLst/>
+          </a:prstGeom>
+          <a:noFill/>
+        </p:spPr>
+        <p:txBody>
+          <a:bodyPr wrap="square" anchor="t" lIns="0" rIns="0" tIns="0" bIns="0">
+            <a:spAutoFit/>
+          </a:bodyPr>
+          <a:lstStyle/>
+          <a:p>
+            <a:pPr algn="l">
+              <a:lnSpc>
+                <a:spcPct val="118000"/>
+              </a:lnSpc>
+              <a:spcAft>
+                <a:spcPts val="0"/>
+              </a:spcAft>
+            </a:pPr>
+            <a:r>
+              <a:rPr sz="1150" b="0">
+                <a:solidFill>
+                  <a:srgbClr val="0F172A"/>
+                </a:solidFill>
+                <a:latin typeface="Inter"/>
+              </a:rPr>
+              <a:t>Characterise LFP on a real bench</a:t>
+            </a:r>
+          </a:p>
+        </p:txBody>
+      </p:sp>
+      <p:sp>
+        <p:nvSpPr>
+          <p:cNvPr id="21" name="Rectangle 20"/>
+          <p:cNvSpPr/>
+          <p:nvPr/>
+        </p:nvSpPr>
+        <p:spPr>
+          <a:xfrm>
+            <a:off x="566928" y="5907023"/>
+            <a:ext cx="54864" cy="201168"/>
+          </a:xfrm>
+          <a:prstGeom prst="rect">
+            <a:avLst/>
+          </a:prstGeom>
+          <a:solidFill>
+            <a:srgbClr val="0E7490"/>
+          </a:solidFill>
+          <a:ln>
+            <a:noFill/>
+          </a:ln>
+          <a:effectLst/>
+        </p:spPr>
+        <p:style>
+          <a:lnRef idx="1">
+            <a:schemeClr val="accent1"/>
+          </a:lnRef>
+          <a:fillRef idx="3">
+            <a:schemeClr val="accent1"/>
+          </a:fillRef>
+          <a:effectRef idx="2">
+            <a:schemeClr val="accent1"/>
+          </a:effectRef>
+          <a:fontRef idx="minor">
+            <a:schemeClr val="lt1"/>
+          </a:fontRef>
+        </p:style>
+        <p:txBody>
+          <a:bodyPr rtlCol="0" anchor="ctr"/>
+          <a:lstStyle/>
+          <a:p/>
+        </p:txBody>
+      </p:sp>
+      <p:sp>
+        <p:nvSpPr>
+          <p:cNvPr id="22" name="TextBox 21"/>
+          <p:cNvSpPr txBox="1"/>
+          <p:nvPr/>
+        </p:nvSpPr>
+        <p:spPr>
+          <a:xfrm>
+            <a:off x="768096" y="5888736"/>
+            <a:ext cx="5596128" cy="237744"/>
+          </a:xfrm>
+          <a:prstGeom prst="rect">
+            <a:avLst/>
+          </a:prstGeom>
+          <a:noFill/>
+        </p:spPr>
+        <p:txBody>
+          <a:bodyPr wrap="square" anchor="t" lIns="0" rIns="0" tIns="0" bIns="0">
+            <a:spAutoFit/>
+          </a:bodyPr>
+          <a:lstStyle/>
+          <a:p>
+            <a:pPr algn="l">
+              <a:lnSpc>
+                <a:spcPct val="118000"/>
+              </a:lnSpc>
+              <a:spcAft>
+                <a:spcPts val="0"/>
+              </a:spcAft>
+            </a:pPr>
+            <a:r>
+              <a:rPr sz="1150" b="0">
+                <a:solidFill>
+                  <a:srgbClr val="0F172A"/>
+                </a:solidFill>
+                <a:latin typeface="Inter"/>
+              </a:rPr>
+              <a:t>SOH and remaining useful life from dV/dt</a:t>
             </a:r>
           </a:p>
         </p:txBody>
       </p:sp>
       <p:pic>
         <p:nvPicPr>
-          <p:cNvPr id="11" name="Picture 10" descr="diag_configurator.png"/>
+          <p:cNvPr id="23" name="Picture 22" descr="diag_configurator.png"/>
           <p:cNvPicPr>
             <a:picLocks noChangeAspect="1"/>
           </p:cNvPicPr>
@@ -13234,8 +14205,8 @@
         </p:blipFill>
         <p:spPr>
           <a:xfrm>
-            <a:off x="6693408" y="2052450"/>
-            <a:ext cx="2212848" cy="2935978"/>
+            <a:off x="6693408" y="2027827"/>
+            <a:ext cx="2139696" cy="2838921"/>
           </a:xfrm>
           <a:prstGeom prst="rect">
             <a:avLst/>
@@ -13244,7 +14215,7 @@
       </p:pic>
       <p:pic>
         <p:nvPicPr>
-          <p:cNvPr id="12" name="Picture 11" descr="fig_ocv_soc.png"/>
+          <p:cNvPr id="24" name="Picture 23" descr="fig_ocv_soc.png"/>
           <p:cNvPicPr>
             <a:picLocks noChangeAspect="1"/>
           </p:cNvPicPr>
@@ -13258,8 +14229,8 @@
         </p:blipFill>
         <p:spPr>
           <a:xfrm>
-            <a:off x="9089136" y="2173200"/>
-            <a:ext cx="2535631" cy="2493310"/>
+            <a:off x="8997696" y="1959079"/>
+            <a:ext cx="2627071" cy="2583224"/>
           </a:xfrm>
           <a:prstGeom prst="rect">
             <a:avLst/>
@@ -13268,14 +14239,14 @@
       </p:pic>
       <p:sp>
         <p:nvSpPr>
-          <p:cNvPr id="13" name="TextBox 12"/>
+          <p:cNvPr id="25" name="TextBox 24"/>
           <p:cNvSpPr txBox="1"/>
           <p:nvPr/>
         </p:nvSpPr>
         <p:spPr>
           <a:xfrm>
-            <a:off x="9089136" y="5303520"/>
-            <a:ext cx="2535631" cy="237744"/>
+            <a:off x="8997696" y="4773168"/>
+            <a:ext cx="2627071" cy="237744"/>
           </a:xfrm>
           <a:prstGeom prst="rect">
             <a:avLst/>
@@ -13303,7 +14274,7 @@
                 </a:solidFill>
                 <a:latin typeface="Inter"/>
               </a:rPr>
-              <a:t>Why LFP needs a remap, not a constant offset</a:t>
+              <a:t>Why LFP needs a remap, not an offset</a:t>
             </a:r>
           </a:p>
         </p:txBody>

--- a/AI_PBMS_8Slide.pptx
+++ b/AI_PBMS_8Slide.pptx
@@ -819,57 +819,57 @@
           </a:p>
           <a:p>
             <a:r>
-              <a:t>split and measured them. The Transformer is actually the most accurate at 95.11</a:t>
-            </a:r>
-          </a:p>
-          <a:p>
-            <a:r>
-              <a:t>percent, a point ahead of XGBoost. We still shipped XGBoost, and here is the</a:t>
-            </a:r>
-          </a:p>
-          <a:p>
-            <a:r>
-              <a:t>honest reason: the Transformer needs a sixty-row lookback, which at one hertz</a:t>
-            </a:r>
-          </a:p>
-          <a:p>
-            <a:r>
-              <a:t>means a full minute of buffered data before it can say anything, plus a torch</a:t>
-            </a:r>
-          </a:p>
-          <a:p>
-            <a:r>
-              <a:t>runtime on the Pi and no feature attribution an engineer can interrogate.</a:t>
-            </a:r>
-          </a:p>
-          <a:p>
-            <a:r>
-              <a:t>XGBoost predicts from a single row, instantly, and tells you which features</a:t>
-            </a:r>
-          </a:p>
-          <a:p>
-            <a:r>
-              <a:t>drove it. Random Forest is 176 megabytes and seventy-three times slower for</a:t>
-            </a:r>
-          </a:p>
-          <a:p>
-            <a:r>
-              <a:t>worse accuracy. And look at the bottom row: a conventional rule-based BMS scores</a:t>
-            </a:r>
-          </a:p>
-          <a:p>
-            <a:r>
-              <a:t>twenty-two percent — because cell one's chronic gap puts eighty-four percent of</a:t>
-            </a:r>
-          </a:p>
-          <a:p>
-            <a:r>
-              <a:t>healthy rows over the imbalance threshold, so it false-alarms constantly and</a:t>
-            </a:r>
-          </a:p>
-          <a:p>
-            <a:r>
-              <a:t>still never detects a weak cell.</a:t>
+              <a:t>split and measured them. Two rows matter. The bottom one: a conventional</a:t>
+            </a:r>
+          </a:p>
+          <a:p>
+            <a:r>
+              <a:t>rule-based BMS scores twenty-two percent, because cell one’s chronic gap puts</a:t>
+            </a:r>
+          </a:p>
+          <a:p>
+            <a:r>
+              <a:t>eighty-four percent of healthy rows over the imbalance threshold. It false-alarms</a:t>
+            </a:r>
+          </a:p>
+          <a:p>
+            <a:r>
+              <a:t>constantly and never detects a weak cell at all. And the second row: the</a:t>
+            </a:r>
+          </a:p>
+          <a:p>
+            <a:r>
+              <a:t>Transformer edges us by under a point — but only because it is fed a sixty-row</a:t>
+            </a:r>
+          </a:p>
+          <a:p>
+            <a:r>
+              <a:t>window, sixty times the input per prediction. On our hardware that window is</a:t>
+            </a:r>
+          </a:p>
+          <a:p>
+            <a:r>
+              <a:t>disqualifying. At one hertz it is blind for a full minute after every restart,</a:t>
+            </a:r>
+          </a:p>
+          <a:p>
+            <a:r>
+              <a:t>its positional encoding pins the input at exactly sixty rows, torch is five times</a:t>
+            </a:r>
+          </a:p>
+          <a:p>
+            <a:r>
+              <a:t>the runtime footprint of xgboost on the Pi, and it gives no per-feature</a:t>
+            </a:r>
+          </a:p>
+          <a:p>
+            <a:r>
+              <a:t>attribution an engineer can audit. XGBoost predicts from a single row, instantly,</a:t>
+            </a:r>
+          </a:p>
+          <a:p>
+            <a:r>
+              <a:t>explains itself, and retrains from the browser. That is why it ships.</a:t>
             </a:r>
           </a:p>
         </p:txBody>
@@ -7536,7 +7536,7 @@
                 </a:solidFill>
                 <a:latin typeface="Inter"/>
               </a:rPr>
-              <a:t>We benchmarked all six on the same split</a:t>
+              <a:t>We benchmarked all six — XGBoost still ships</a:t>
             </a:r>
           </a:p>
         </p:txBody>
@@ -8716,7 +8716,7 @@
                 </a:solidFill>
                 <a:latin typeface="Inter"/>
               </a:rPr>
-              <a:t>Best accuracy; 60-row warm-up</a:t>
+              <a:t>Edges accuracy; 60-row buffer</a:t>
             </a:r>
           </a:p>
         </p:txBody>
@@ -10067,7 +10067,7 @@
       </p:sp>
       <p:pic>
         <p:nvPicPr>
-          <p:cNvPr id="63" name="Picture 62" descr="fig_model_benchmark.png"/>
+          <p:cNvPr id="63" name="Picture 62" descr="fig_deployment_tradeoff.png"/>
           <p:cNvPicPr>
             <a:picLocks noChangeAspect="1"/>
           </p:cNvPicPr>
@@ -10081,8 +10081,8 @@
         </p:blipFill>
         <p:spPr>
           <a:xfrm>
-            <a:off x="4739618" y="4370832"/>
-            <a:ext cx="2712457" cy="1426463"/>
+            <a:off x="4092368" y="4334256"/>
+            <a:ext cx="4006958" cy="1463040"/>
           </a:xfrm>
           <a:prstGeom prst="rect">
             <a:avLst/>
@@ -10097,8 +10097,8 @@
         </p:nvSpPr>
         <p:spPr>
           <a:xfrm>
-            <a:off x="566928" y="5888736"/>
-            <a:ext cx="11057839" cy="384048"/>
+            <a:off x="566928" y="5870448"/>
+            <a:ext cx="11057839" cy="402336"/>
           </a:xfrm>
           <a:prstGeom prst="rect">
             <a:avLst/>
@@ -10120,13 +10120,13 @@
               </a:spcAft>
             </a:pPr>
             <a:r>
-              <a:rPr sz="819" b="0">
+              <a:rPr sz="800" b="0">
                 <a:solidFill>
                   <a:srgbClr val="475569"/>
                 </a:solidFill>
                 <a:latin typeface="Inter"/>
               </a:rPr>
-              <a:t>All six trained and scored here on the identical 30,000-row held-out split with the same 51 features; latency is the median single-row prediction on a 4-core CPU, not a Pi 5. Sequence models additionally see a 60-row lookback. SVM trained on a stratified 20k subsample — full-data RBF did not converge in usable time, which is part of the verdict.</a:t>
+              <a:t>All six trained and scored on the identical 30,000-row held-out split with the same 51 features; latency is the median single-row prediction on a 4-core CPU, not a Pi 5. The Transformer additionally receives a 60-row lookback window — 60× the input per prediction — which is where its 0.92-point accuracy edge comes from, and also why it cannot run on our hardware. SVM trained on a stratified 20k subsample: full-data RBF did not converge.</a:t>
             </a:r>
           </a:p>
         </p:txBody>

--- a/AI_PBMS_8Slide.pptx
+++ b/AI_PBMS_8Slide.pptx
@@ -13,6 +13,7 @@
     <p:sldId id="261" r:id="rId13"/>
     <p:sldId id="262" r:id="rId14"/>
     <p:sldId id="263" r:id="rId15"/>
+    <p:sldId id="264" r:id="rId16"/>
   </p:sldIdLst>
   <p:sldSz cx="12191695" cy="6858000" type="screen4x3"/>
   <p:notesSz cx="6858000" cy="9144000"/>
@@ -1285,6 +1286,116 @@
           <a:p>
             <a:r>
               <a:t>health. Thank you — happy to take questions.</a:t>
+            </a:r>
+          </a:p>
+        </p:txBody>
+      </p:sp>
+      <p:sp>
+        <p:nvSpPr>
+          <p:cNvPr id="4" name="Slide Number Placeholder 3"/>
+          <p:cNvSpPr>
+            <a:spLocks noGrp="1"/>
+          </p:cNvSpPr>
+          <p:nvPr>
+            <p:ph type="sldNum" idx="5" sz="quarter"/>
+          </p:nvPr>
+        </p:nvSpPr>
+        <p:spPr/>
+      </p:sp>
+    </p:spTree>
+  </p:cSld>
+  <p:clrMapOvr>
+    <a:masterClrMapping/>
+  </p:clrMapOvr>
+</p:notes>
+</file>
+
+<file path=ppt/notesSlides/notesSlide9.xml><?xml version="1.0" encoding="utf-8"?>
+<p:notes xmlns:a="http://schemas.openxmlformats.org/drawingml/2006/main" xmlns:p="http://schemas.openxmlformats.org/presentationml/2006/main" xmlns:r="http://schemas.openxmlformats.org/officeDocument/2006/relationships">
+  <p:cSld>
+    <p:spTree>
+      <p:nvGrpSpPr>
+        <p:cNvPr id="1" name=""/>
+        <p:cNvGrpSpPr/>
+        <p:nvPr/>
+      </p:nvGrpSpPr>
+      <p:grpSpPr>
+        <a:xfrm>
+          <a:off x="0" y="0"/>
+          <a:ext cx="0" cy="0"/>
+          <a:chOff x="0" y="0"/>
+          <a:chExt cx="0" cy="0"/>
+        </a:xfrm>
+      </p:grpSpPr>
+      <p:sp>
+        <p:nvSpPr>
+          <p:cNvPr id="2" name="Slide Image Placeholder 1"/>
+          <p:cNvSpPr>
+            <a:spLocks noGrp="1"/>
+          </p:cNvSpPr>
+          <p:nvPr>
+            <p:ph type="sldImg" idx="2"/>
+          </p:nvPr>
+        </p:nvSpPr>
+        <p:spPr/>
+      </p:sp>
+      <p:sp>
+        <p:nvSpPr>
+          <p:cNvPr id="3" name="Notes Placeholder 2"/>
+          <p:cNvSpPr>
+            <a:spLocks noGrp="1"/>
+          </p:cNvSpPr>
+          <p:nvPr>
+            <p:ph type="body" idx="3" sz="quarter"/>
+          </p:nvPr>
+        </p:nvSpPr>
+        <p:spPr/>
+        <p:txBody>
+          <a:bodyPr/>
+          <a:lstStyle/>
+          <a:p>
+            <a:r>
+              <a:t>Five papers shaped the approach. The first four are the state-of-the-art we</a:t>
+            </a:r>
+          </a:p>
+          <a:p>
+            <a:r>
+              <a:t>benchmarked our thinking against for state-of-charge and remaining-useful-life</a:t>
+            </a:r>
+          </a:p>
+          <a:p>
+            <a:r>
+              <a:t>prediction — bimodal image encoding, single-cycle charging features, multidomain</a:t>
+            </a:r>
+          </a:p>
+          <a:p>
+            <a:r>
+              <a:t>features with CatBoost, and the CNN-BiLSTM-BiGRU attention stack. The fifth,</a:t>
+            </a:r>
+          </a:p>
+          <a:p>
+            <a:r>
+              <a:t>Yang, Xu and Peng in Electronics, is where our confidence-scoring and fault</a:t>
+            </a:r>
+          </a:p>
+          <a:p>
+            <a:r>
+              <a:t>grading framework comes from — that is the source of the three-tier abstain,</a:t>
+            </a:r>
+          </a:p>
+          <a:p>
+            <a:r>
+              <a:t>warn, alert structure on slide five. On the right are the primary sources: the</a:t>
+            </a:r>
+          </a:p>
+          <a:p>
+            <a:r>
+              <a:t>manufacturer datasheets the threshold matrix is parsed from, and the JBD</a:t>
+            </a:r>
+          </a:p>
+          <a:p>
+            <a:r>
+              <a:t>protocol spec the logger was written against. Happy to take questions.</a:t>
             </a:r>
           </a:p>
         </p:txBody>
@@ -14275,6 +14386,2358 @@
                 <a:latin typeface="Inter"/>
               </a:rPr>
               <a:t>Why LFP needs a remap, not an offset</a:t>
+            </a:r>
+          </a:p>
+        </p:txBody>
+      </p:sp>
+    </p:spTree>
+  </p:cSld>
+  <p:clrMapOvr>
+    <a:masterClrMapping/>
+  </p:clrMapOvr>
+</p:sld>
+</file>
+
+<file path=ppt/slides/slide9.xml><?xml version="1.0" encoding="utf-8"?>
+<p:sld xmlns:a="http://schemas.openxmlformats.org/drawingml/2006/main" xmlns:p="http://schemas.openxmlformats.org/presentationml/2006/main" xmlns:r="http://schemas.openxmlformats.org/officeDocument/2006/relationships">
+  <p:cSld>
+    <p:bg>
+      <p:bgPr>
+        <a:solidFill>
+          <a:srgbClr val="FFFFFF"/>
+        </a:solidFill>
+        <a:effectLst/>
+      </p:bgPr>
+    </p:bg>
+    <p:spTree>
+      <p:nvGrpSpPr>
+        <p:cNvPr id="1" name=""/>
+        <p:cNvGrpSpPr/>
+        <p:nvPr/>
+      </p:nvGrpSpPr>
+      <p:grpSpPr/>
+      <p:sp>
+        <p:nvSpPr>
+          <p:cNvPr id="2" name="TextBox 1"/>
+          <p:cNvSpPr txBox="1"/>
+          <p:nvPr/>
+        </p:nvSpPr>
+        <p:spPr>
+          <a:xfrm>
+            <a:off x="566928" y="365760"/>
+            <a:ext cx="11057839" cy="713232"/>
+          </a:xfrm>
+          <a:prstGeom prst="rect">
+            <a:avLst/>
+          </a:prstGeom>
+          <a:noFill/>
+        </p:spPr>
+        <p:txBody>
+          <a:bodyPr wrap="square" anchor="t" lIns="0" rIns="0" tIns="0" bIns="0">
+            <a:spAutoFit/>
+          </a:bodyPr>
+          <a:lstStyle/>
+          <a:p>
+            <a:pPr algn="l">
+              <a:lnSpc>
+                <a:spcPct val="102000"/>
+              </a:lnSpc>
+              <a:spcAft>
+                <a:spcPts val="0"/>
+              </a:spcAft>
+            </a:pPr>
+            <a:r>
+              <a:rPr sz="3300" b="1">
+                <a:solidFill>
+                  <a:srgbClr val="0F172A"/>
+                </a:solidFill>
+                <a:latin typeface="Inter"/>
+              </a:rPr>
+              <a:t>References</a:t>
+            </a:r>
+          </a:p>
+        </p:txBody>
+      </p:sp>
+      <p:sp>
+        <p:nvSpPr>
+          <p:cNvPr id="3" name="Rectangle 2"/>
+          <p:cNvSpPr/>
+          <p:nvPr/>
+        </p:nvSpPr>
+        <p:spPr>
+          <a:xfrm>
+            <a:off x="566928" y="1152144"/>
+            <a:ext cx="1965960" cy="32004"/>
+          </a:xfrm>
+          <a:prstGeom prst="rect">
+            <a:avLst/>
+          </a:prstGeom>
+          <a:solidFill>
+            <a:srgbClr val="0E7490"/>
+          </a:solidFill>
+          <a:ln>
+            <a:noFill/>
+          </a:ln>
+          <a:effectLst/>
+        </p:spPr>
+        <p:style>
+          <a:lnRef idx="1">
+            <a:schemeClr val="accent1"/>
+          </a:lnRef>
+          <a:fillRef idx="3">
+            <a:schemeClr val="accent1"/>
+          </a:fillRef>
+          <a:effectRef idx="2">
+            <a:schemeClr val="accent1"/>
+          </a:effectRef>
+          <a:fontRef idx="minor">
+            <a:schemeClr val="lt1"/>
+          </a:fontRef>
+        </p:style>
+        <p:txBody>
+          <a:bodyPr rtlCol="0" anchor="ctr"/>
+          <a:lstStyle/>
+          <a:p/>
+        </p:txBody>
+      </p:sp>
+      <p:sp>
+        <p:nvSpPr>
+          <p:cNvPr id="4" name="Rectangle 3"/>
+          <p:cNvSpPr/>
+          <p:nvPr/>
+        </p:nvSpPr>
+        <p:spPr>
+          <a:xfrm>
+            <a:off x="2532888" y="1152144"/>
+            <a:ext cx="9091879" cy="32004"/>
+          </a:xfrm>
+          <a:prstGeom prst="rect">
+            <a:avLst/>
+          </a:prstGeom>
+          <a:solidFill>
+            <a:srgbClr val="CBD5E1"/>
+          </a:solidFill>
+          <a:ln>
+            <a:noFill/>
+          </a:ln>
+          <a:effectLst/>
+        </p:spPr>
+        <p:style>
+          <a:lnRef idx="1">
+            <a:schemeClr val="accent1"/>
+          </a:lnRef>
+          <a:fillRef idx="3">
+            <a:schemeClr val="accent1"/>
+          </a:fillRef>
+          <a:effectRef idx="2">
+            <a:schemeClr val="accent1"/>
+          </a:effectRef>
+          <a:fontRef idx="minor">
+            <a:schemeClr val="lt1"/>
+          </a:fontRef>
+        </p:style>
+        <p:txBody>
+          <a:bodyPr rtlCol="0" anchor="ctr"/>
+          <a:lstStyle/>
+          <a:p/>
+        </p:txBody>
+      </p:sp>
+      <p:sp>
+        <p:nvSpPr>
+          <p:cNvPr id="5" name="TextBox 4"/>
+          <p:cNvSpPr txBox="1"/>
+          <p:nvPr/>
+        </p:nvSpPr>
+        <p:spPr>
+          <a:xfrm>
+            <a:off x="566928" y="6400800"/>
+            <a:ext cx="4572000" cy="237744"/>
+          </a:xfrm>
+          <a:prstGeom prst="rect">
+            <a:avLst/>
+          </a:prstGeom>
+          <a:noFill/>
+        </p:spPr>
+        <p:txBody>
+          <a:bodyPr wrap="square" anchor="t" lIns="0" rIns="0" tIns="0" bIns="0">
+            <a:spAutoFit/>
+          </a:bodyPr>
+          <a:lstStyle/>
+          <a:p>
+            <a:pPr algn="l">
+              <a:lnSpc>
+                <a:spcPct val="118000"/>
+              </a:lnSpc>
+              <a:spcAft>
+                <a:spcPts val="0"/>
+              </a:spcAft>
+            </a:pPr>
+            <a:r>
+              <a:rPr sz="950" b="0">
+                <a:solidFill>
+                  <a:srgbClr val="475569"/>
+                </a:solidFill>
+                <a:latin typeface="Inter"/>
+              </a:rPr>
+              <a:t>AI-PBMS  ·  Team ANS_4X</a:t>
+            </a:r>
+          </a:p>
+        </p:txBody>
+      </p:sp>
+      <p:sp>
+        <p:nvSpPr>
+          <p:cNvPr id="6" name="TextBox 5"/>
+          <p:cNvSpPr txBox="1"/>
+          <p:nvPr/>
+        </p:nvSpPr>
+        <p:spPr>
+          <a:xfrm>
+            <a:off x="10527487" y="6400800"/>
+            <a:ext cx="1097280" cy="237744"/>
+          </a:xfrm>
+          <a:prstGeom prst="rect">
+            <a:avLst/>
+          </a:prstGeom>
+          <a:noFill/>
+        </p:spPr>
+        <p:txBody>
+          <a:bodyPr wrap="square" anchor="t" lIns="0" rIns="0" tIns="0" bIns="0">
+            <a:spAutoFit/>
+          </a:bodyPr>
+          <a:lstStyle/>
+          <a:p>
+            <a:pPr algn="r">
+              <a:lnSpc>
+                <a:spcPct val="118000"/>
+              </a:lnSpc>
+              <a:spcAft>
+                <a:spcPts val="0"/>
+              </a:spcAft>
+            </a:pPr>
+            <a:r>
+              <a:rPr sz="1050" b="0">
+                <a:solidFill>
+                  <a:srgbClr val="475569"/>
+                </a:solidFill>
+                <a:latin typeface="Inter"/>
+              </a:rPr>
+              <a:t>9</a:t>
+            </a:r>
+          </a:p>
+        </p:txBody>
+      </p:sp>
+      <p:sp>
+        <p:nvSpPr>
+          <p:cNvPr id="7" name="TextBox 6"/>
+          <p:cNvSpPr txBox="1"/>
+          <p:nvPr/>
+        </p:nvSpPr>
+        <p:spPr>
+          <a:xfrm>
+            <a:off x="566928" y="1444752"/>
+            <a:ext cx="5797296" cy="219456"/>
+          </a:xfrm>
+          <a:prstGeom prst="rect">
+            <a:avLst/>
+          </a:prstGeom>
+          <a:noFill/>
+        </p:spPr>
+        <p:txBody>
+          <a:bodyPr wrap="square" anchor="t" lIns="0" rIns="0" tIns="0" bIns="0">
+            <a:spAutoFit/>
+          </a:bodyPr>
+          <a:lstStyle/>
+          <a:p>
+            <a:pPr algn="l">
+              <a:lnSpc>
+                <a:spcPct val="118000"/>
+              </a:lnSpc>
+              <a:spcAft>
+                <a:spcPts val="0"/>
+              </a:spcAft>
+            </a:pPr>
+            <a:r>
+              <a:rPr sz="950" b="1">
+                <a:solidFill>
+                  <a:srgbClr val="0E7490"/>
+                </a:solidFill>
+                <a:latin typeface="Inter"/>
+              </a:rPr>
+              <a:t>LITERATURE — SOC, RUL AND FAULT GRADING</a:t>
+            </a:r>
+          </a:p>
+        </p:txBody>
+      </p:sp>
+      <p:sp>
+        <p:nvSpPr>
+          <p:cNvPr id="8" name="Rectangle 7"/>
+          <p:cNvSpPr/>
+          <p:nvPr/>
+        </p:nvSpPr>
+        <p:spPr>
+          <a:xfrm>
+            <a:off x="566928" y="1769363"/>
+            <a:ext cx="237744" cy="237744"/>
+          </a:xfrm>
+          <a:prstGeom prst="rect">
+            <a:avLst/>
+          </a:prstGeom>
+          <a:solidFill>
+            <a:srgbClr val="F1F5F9"/>
+          </a:solidFill>
+          <a:ln w="7620">
+            <a:solidFill>
+              <a:srgbClr val="CBD5E1"/>
+            </a:solidFill>
+          </a:ln>
+          <a:effectLst/>
+        </p:spPr>
+        <p:style>
+          <a:lnRef idx="1">
+            <a:schemeClr val="accent1"/>
+          </a:lnRef>
+          <a:fillRef idx="3">
+            <a:schemeClr val="accent1"/>
+          </a:fillRef>
+          <a:effectRef idx="2">
+            <a:schemeClr val="accent1"/>
+          </a:effectRef>
+          <a:fontRef idx="minor">
+            <a:schemeClr val="lt1"/>
+          </a:fontRef>
+        </p:style>
+        <p:txBody>
+          <a:bodyPr rtlCol="0" anchor="ctr"/>
+          <a:lstStyle/>
+          <a:p/>
+        </p:txBody>
+      </p:sp>
+      <p:sp>
+        <p:nvSpPr>
+          <p:cNvPr id="9" name="TextBox 8"/>
+          <p:cNvSpPr txBox="1"/>
+          <p:nvPr/>
+        </p:nvSpPr>
+        <p:spPr>
+          <a:xfrm>
+            <a:off x="566928" y="1769363"/>
+            <a:ext cx="237744" cy="237744"/>
+          </a:xfrm>
+          <a:prstGeom prst="rect">
+            <a:avLst/>
+          </a:prstGeom>
+          <a:noFill/>
+        </p:spPr>
+        <p:txBody>
+          <a:bodyPr wrap="square" anchor="ctr" lIns="0" rIns="0" tIns="0" bIns="0">
+            <a:spAutoFit/>
+          </a:bodyPr>
+          <a:lstStyle/>
+          <a:p>
+            <a:pPr algn="ctr">
+              <a:lnSpc>
+                <a:spcPct val="118000"/>
+              </a:lnSpc>
+              <a:spcAft>
+                <a:spcPts val="0"/>
+              </a:spcAft>
+            </a:pPr>
+            <a:r>
+              <a:rPr sz="1000" b="1">
+                <a:solidFill>
+                  <a:srgbClr val="0E7490"/>
+                </a:solidFill>
+                <a:latin typeface="Inter"/>
+              </a:rPr>
+              <a:t>1</a:t>
+            </a:r>
+          </a:p>
+        </p:txBody>
+      </p:sp>
+      <p:sp>
+        <p:nvSpPr>
+          <p:cNvPr id="10" name="TextBox 9"/>
+          <p:cNvSpPr txBox="1"/>
+          <p:nvPr/>
+        </p:nvSpPr>
+        <p:spPr>
+          <a:xfrm>
+            <a:off x="932688" y="1755648"/>
+            <a:ext cx="5431536" cy="274320"/>
+          </a:xfrm>
+          <a:prstGeom prst="rect">
+            <a:avLst/>
+          </a:prstGeom>
+          <a:noFill/>
+        </p:spPr>
+        <p:txBody>
+          <a:bodyPr wrap="square" anchor="t" lIns="0" rIns="0" tIns="0" bIns="0">
+            <a:spAutoFit/>
+          </a:bodyPr>
+          <a:lstStyle/>
+          <a:p>
+            <a:pPr algn="l">
+              <a:lnSpc>
+                <a:spcPct val="122000"/>
+              </a:lnSpc>
+              <a:spcAft>
+                <a:spcPts val="0"/>
+              </a:spcAft>
+            </a:pPr>
+            <a:r>
+              <a:rPr sz="1150" b="0">
+                <a:solidFill>
+                  <a:srgbClr val="0F172A"/>
+                </a:solidFill>
+                <a:latin typeface="Inter"/>
+              </a:rPr>
+              <a:t>Bimodal images + BFRN</a:t>
+            </a:r>
+          </a:p>
+        </p:txBody>
+      </p:sp>
+      <p:sp>
+        <p:nvSpPr>
+          <p:cNvPr id="11" name="TextBox 10"/>
+          <p:cNvSpPr txBox="1"/>
+          <p:nvPr/>
+        </p:nvSpPr>
+        <p:spPr>
+          <a:xfrm>
+            <a:off x="932688" y="2011680"/>
+            <a:ext cx="5431536" cy="201168"/>
+          </a:xfrm>
+          <a:prstGeom prst="rect">
+            <a:avLst/>
+          </a:prstGeom>
+          <a:noFill/>
+        </p:spPr>
+        <p:txBody>
+          <a:bodyPr wrap="square" anchor="t" lIns="0" rIns="0" tIns="0" bIns="0">
+            <a:spAutoFit/>
+          </a:bodyPr>
+          <a:lstStyle/>
+          <a:p>
+            <a:pPr algn="l">
+              <a:lnSpc>
+                <a:spcPct val="118000"/>
+              </a:lnSpc>
+              <a:spcAft>
+                <a:spcPts val="0"/>
+              </a:spcAft>
+            </a:pPr>
+            <a:r>
+              <a:rPr sz="900" b="0">
+                <a:solidFill>
+                  <a:srgbClr val="475569"/>
+                </a:solidFill>
+                <a:latin typeface="Inter"/>
+              </a:rPr>
+              <a:t>Energy, 2024  ·  doi.org/10.1016/j.energy.2024.131700</a:t>
+            </a:r>
+          </a:p>
+        </p:txBody>
+      </p:sp>
+      <p:sp>
+        <p:nvSpPr>
+          <p:cNvPr id="12" name="Rectangle 11"/>
+          <p:cNvSpPr/>
+          <p:nvPr/>
+        </p:nvSpPr>
+        <p:spPr>
+          <a:xfrm>
+            <a:off x="566928" y="2391156"/>
+            <a:ext cx="237744" cy="237744"/>
+          </a:xfrm>
+          <a:prstGeom prst="rect">
+            <a:avLst/>
+          </a:prstGeom>
+          <a:solidFill>
+            <a:srgbClr val="F1F5F9"/>
+          </a:solidFill>
+          <a:ln w="7620">
+            <a:solidFill>
+              <a:srgbClr val="CBD5E1"/>
+            </a:solidFill>
+          </a:ln>
+          <a:effectLst/>
+        </p:spPr>
+        <p:style>
+          <a:lnRef idx="1">
+            <a:schemeClr val="accent1"/>
+          </a:lnRef>
+          <a:fillRef idx="3">
+            <a:schemeClr val="accent1"/>
+          </a:fillRef>
+          <a:effectRef idx="2">
+            <a:schemeClr val="accent1"/>
+          </a:effectRef>
+          <a:fontRef idx="minor">
+            <a:schemeClr val="lt1"/>
+          </a:fontRef>
+        </p:style>
+        <p:txBody>
+          <a:bodyPr rtlCol="0" anchor="ctr"/>
+          <a:lstStyle/>
+          <a:p/>
+        </p:txBody>
+      </p:sp>
+      <p:sp>
+        <p:nvSpPr>
+          <p:cNvPr id="13" name="TextBox 12"/>
+          <p:cNvSpPr txBox="1"/>
+          <p:nvPr/>
+        </p:nvSpPr>
+        <p:spPr>
+          <a:xfrm>
+            <a:off x="566928" y="2391156"/>
+            <a:ext cx="237744" cy="237744"/>
+          </a:xfrm>
+          <a:prstGeom prst="rect">
+            <a:avLst/>
+          </a:prstGeom>
+          <a:noFill/>
+        </p:spPr>
+        <p:txBody>
+          <a:bodyPr wrap="square" anchor="ctr" lIns="0" rIns="0" tIns="0" bIns="0">
+            <a:spAutoFit/>
+          </a:bodyPr>
+          <a:lstStyle/>
+          <a:p>
+            <a:pPr algn="ctr">
+              <a:lnSpc>
+                <a:spcPct val="118000"/>
+              </a:lnSpc>
+              <a:spcAft>
+                <a:spcPts val="0"/>
+              </a:spcAft>
+            </a:pPr>
+            <a:r>
+              <a:rPr sz="1000" b="1">
+                <a:solidFill>
+                  <a:srgbClr val="0E7490"/>
+                </a:solidFill>
+                <a:latin typeface="Inter"/>
+              </a:rPr>
+              <a:t>2</a:t>
+            </a:r>
+          </a:p>
+        </p:txBody>
+      </p:sp>
+      <p:sp>
+        <p:nvSpPr>
+          <p:cNvPr id="14" name="TextBox 13"/>
+          <p:cNvSpPr txBox="1"/>
+          <p:nvPr/>
+        </p:nvSpPr>
+        <p:spPr>
+          <a:xfrm>
+            <a:off x="932688" y="2377439"/>
+            <a:ext cx="5431536" cy="274320"/>
+          </a:xfrm>
+          <a:prstGeom prst="rect">
+            <a:avLst/>
+          </a:prstGeom>
+          <a:noFill/>
+        </p:spPr>
+        <p:txBody>
+          <a:bodyPr wrap="square" anchor="t" lIns="0" rIns="0" tIns="0" bIns="0">
+            <a:spAutoFit/>
+          </a:bodyPr>
+          <a:lstStyle/>
+          <a:p>
+            <a:pPr algn="l">
+              <a:lnSpc>
+                <a:spcPct val="122000"/>
+              </a:lnSpc>
+              <a:spcAft>
+                <a:spcPts val="0"/>
+              </a:spcAft>
+            </a:pPr>
+            <a:r>
+              <a:rPr sz="1150" b="0">
+                <a:solidFill>
+                  <a:srgbClr val="0F172A"/>
+                </a:solidFill>
+                <a:latin typeface="Inter"/>
+              </a:rPr>
+              <a:t>Single-cycle charging</a:t>
+            </a:r>
+          </a:p>
+        </p:txBody>
+      </p:sp>
+      <p:sp>
+        <p:nvSpPr>
+          <p:cNvPr id="15" name="TextBox 14"/>
+          <p:cNvSpPr txBox="1"/>
+          <p:nvPr/>
+        </p:nvSpPr>
+        <p:spPr>
+          <a:xfrm>
+            <a:off x="932688" y="2633472"/>
+            <a:ext cx="5431536" cy="201168"/>
+          </a:xfrm>
+          <a:prstGeom prst="rect">
+            <a:avLst/>
+          </a:prstGeom>
+          <a:noFill/>
+        </p:spPr>
+        <p:txBody>
+          <a:bodyPr wrap="square" anchor="t" lIns="0" rIns="0" tIns="0" bIns="0">
+            <a:spAutoFit/>
+          </a:bodyPr>
+          <a:lstStyle/>
+          <a:p>
+            <a:pPr algn="l">
+              <a:lnSpc>
+                <a:spcPct val="118000"/>
+              </a:lnSpc>
+              <a:spcAft>
+                <a:spcPts val="0"/>
+              </a:spcAft>
+            </a:pPr>
+            <a:r>
+              <a:rPr sz="900" b="0">
+                <a:solidFill>
+                  <a:srgbClr val="475569"/>
+                </a:solidFill>
+                <a:latin typeface="Inter"/>
+              </a:rPr>
+              <a:t>Energy, 2025  ·  doi.org/10.1016/j.energy.2025.138351</a:t>
+            </a:r>
+          </a:p>
+        </p:txBody>
+      </p:sp>
+      <p:sp>
+        <p:nvSpPr>
+          <p:cNvPr id="16" name="Rectangle 15"/>
+          <p:cNvSpPr/>
+          <p:nvPr/>
+        </p:nvSpPr>
+        <p:spPr>
+          <a:xfrm>
+            <a:off x="566928" y="3012947"/>
+            <a:ext cx="237744" cy="237744"/>
+          </a:xfrm>
+          <a:prstGeom prst="rect">
+            <a:avLst/>
+          </a:prstGeom>
+          <a:solidFill>
+            <a:srgbClr val="F1F5F9"/>
+          </a:solidFill>
+          <a:ln w="7620">
+            <a:solidFill>
+              <a:srgbClr val="CBD5E1"/>
+            </a:solidFill>
+          </a:ln>
+          <a:effectLst/>
+        </p:spPr>
+        <p:style>
+          <a:lnRef idx="1">
+            <a:schemeClr val="accent1"/>
+          </a:lnRef>
+          <a:fillRef idx="3">
+            <a:schemeClr val="accent1"/>
+          </a:fillRef>
+          <a:effectRef idx="2">
+            <a:schemeClr val="accent1"/>
+          </a:effectRef>
+          <a:fontRef idx="minor">
+            <a:schemeClr val="lt1"/>
+          </a:fontRef>
+        </p:style>
+        <p:txBody>
+          <a:bodyPr rtlCol="0" anchor="ctr"/>
+          <a:lstStyle/>
+          <a:p/>
+        </p:txBody>
+      </p:sp>
+      <p:sp>
+        <p:nvSpPr>
+          <p:cNvPr id="17" name="TextBox 16"/>
+          <p:cNvSpPr txBox="1"/>
+          <p:nvPr/>
+        </p:nvSpPr>
+        <p:spPr>
+          <a:xfrm>
+            <a:off x="566928" y="3012947"/>
+            <a:ext cx="237744" cy="237744"/>
+          </a:xfrm>
+          <a:prstGeom prst="rect">
+            <a:avLst/>
+          </a:prstGeom>
+          <a:noFill/>
+        </p:spPr>
+        <p:txBody>
+          <a:bodyPr wrap="square" anchor="ctr" lIns="0" rIns="0" tIns="0" bIns="0">
+            <a:spAutoFit/>
+          </a:bodyPr>
+          <a:lstStyle/>
+          <a:p>
+            <a:pPr algn="ctr">
+              <a:lnSpc>
+                <a:spcPct val="118000"/>
+              </a:lnSpc>
+              <a:spcAft>
+                <a:spcPts val="0"/>
+              </a:spcAft>
+            </a:pPr>
+            <a:r>
+              <a:rPr sz="1000" b="1">
+                <a:solidFill>
+                  <a:srgbClr val="0E7490"/>
+                </a:solidFill>
+                <a:latin typeface="Inter"/>
+              </a:rPr>
+              <a:t>3</a:t>
+            </a:r>
+          </a:p>
+        </p:txBody>
+      </p:sp>
+      <p:sp>
+        <p:nvSpPr>
+          <p:cNvPr id="18" name="TextBox 17"/>
+          <p:cNvSpPr txBox="1"/>
+          <p:nvPr/>
+        </p:nvSpPr>
+        <p:spPr>
+          <a:xfrm>
+            <a:off x="932688" y="2999231"/>
+            <a:ext cx="5431536" cy="274320"/>
+          </a:xfrm>
+          <a:prstGeom prst="rect">
+            <a:avLst/>
+          </a:prstGeom>
+          <a:noFill/>
+        </p:spPr>
+        <p:txBody>
+          <a:bodyPr wrap="square" anchor="t" lIns="0" rIns="0" tIns="0" bIns="0">
+            <a:spAutoFit/>
+          </a:bodyPr>
+          <a:lstStyle/>
+          <a:p>
+            <a:pPr algn="l">
+              <a:lnSpc>
+                <a:spcPct val="122000"/>
+              </a:lnSpc>
+              <a:spcAft>
+                <a:spcPts val="0"/>
+              </a:spcAft>
+            </a:pPr>
+            <a:r>
+              <a:rPr sz="1150" b="0">
+                <a:solidFill>
+                  <a:srgbClr val="0F172A"/>
+                </a:solidFill>
+                <a:latin typeface="Inter"/>
+              </a:rPr>
+              <a:t>Multidomain features + CatBoost</a:t>
+            </a:r>
+          </a:p>
+        </p:txBody>
+      </p:sp>
+      <p:sp>
+        <p:nvSpPr>
+          <p:cNvPr id="19" name="TextBox 18"/>
+          <p:cNvSpPr txBox="1"/>
+          <p:nvPr/>
+        </p:nvSpPr>
+        <p:spPr>
+          <a:xfrm>
+            <a:off x="932688" y="3255263"/>
+            <a:ext cx="5431536" cy="201168"/>
+          </a:xfrm>
+          <a:prstGeom prst="rect">
+            <a:avLst/>
+          </a:prstGeom>
+          <a:noFill/>
+        </p:spPr>
+        <p:txBody>
+          <a:bodyPr wrap="square" anchor="t" lIns="0" rIns="0" tIns="0" bIns="0">
+            <a:spAutoFit/>
+          </a:bodyPr>
+          <a:lstStyle/>
+          <a:p>
+            <a:pPr algn="l">
+              <a:lnSpc>
+                <a:spcPct val="118000"/>
+              </a:lnSpc>
+              <a:spcAft>
+                <a:spcPts val="0"/>
+              </a:spcAft>
+            </a:pPr>
+            <a:r>
+              <a:rPr sz="900" b="0">
+                <a:solidFill>
+                  <a:srgbClr val="475569"/>
+                </a:solidFill>
+                <a:latin typeface="Inter"/>
+              </a:rPr>
+              <a:t>Energy Science &amp; Engineering, 2023  ·  doi.org/10.1002/ese3.1506</a:t>
+            </a:r>
+          </a:p>
+        </p:txBody>
+      </p:sp>
+      <p:sp>
+        <p:nvSpPr>
+          <p:cNvPr id="20" name="Rectangle 19"/>
+          <p:cNvSpPr/>
+          <p:nvPr/>
+        </p:nvSpPr>
+        <p:spPr>
+          <a:xfrm>
+            <a:off x="566928" y="3634739"/>
+            <a:ext cx="237744" cy="237744"/>
+          </a:xfrm>
+          <a:prstGeom prst="rect">
+            <a:avLst/>
+          </a:prstGeom>
+          <a:solidFill>
+            <a:srgbClr val="F1F5F9"/>
+          </a:solidFill>
+          <a:ln w="7620">
+            <a:solidFill>
+              <a:srgbClr val="CBD5E1"/>
+            </a:solidFill>
+          </a:ln>
+          <a:effectLst/>
+        </p:spPr>
+        <p:style>
+          <a:lnRef idx="1">
+            <a:schemeClr val="accent1"/>
+          </a:lnRef>
+          <a:fillRef idx="3">
+            <a:schemeClr val="accent1"/>
+          </a:fillRef>
+          <a:effectRef idx="2">
+            <a:schemeClr val="accent1"/>
+          </a:effectRef>
+          <a:fontRef idx="minor">
+            <a:schemeClr val="lt1"/>
+          </a:fontRef>
+        </p:style>
+        <p:txBody>
+          <a:bodyPr rtlCol="0" anchor="ctr"/>
+          <a:lstStyle/>
+          <a:p/>
+        </p:txBody>
+      </p:sp>
+      <p:sp>
+        <p:nvSpPr>
+          <p:cNvPr id="21" name="TextBox 20"/>
+          <p:cNvSpPr txBox="1"/>
+          <p:nvPr/>
+        </p:nvSpPr>
+        <p:spPr>
+          <a:xfrm>
+            <a:off x="566928" y="3634739"/>
+            <a:ext cx="237744" cy="237744"/>
+          </a:xfrm>
+          <a:prstGeom prst="rect">
+            <a:avLst/>
+          </a:prstGeom>
+          <a:noFill/>
+        </p:spPr>
+        <p:txBody>
+          <a:bodyPr wrap="square" anchor="ctr" lIns="0" rIns="0" tIns="0" bIns="0">
+            <a:spAutoFit/>
+          </a:bodyPr>
+          <a:lstStyle/>
+          <a:p>
+            <a:pPr algn="ctr">
+              <a:lnSpc>
+                <a:spcPct val="118000"/>
+              </a:lnSpc>
+              <a:spcAft>
+                <a:spcPts val="0"/>
+              </a:spcAft>
+            </a:pPr>
+            <a:r>
+              <a:rPr sz="1000" b="1">
+                <a:solidFill>
+                  <a:srgbClr val="0E7490"/>
+                </a:solidFill>
+                <a:latin typeface="Inter"/>
+              </a:rPr>
+              <a:t>4</a:t>
+            </a:r>
+          </a:p>
+        </p:txBody>
+      </p:sp>
+      <p:sp>
+        <p:nvSpPr>
+          <p:cNvPr id="22" name="TextBox 21"/>
+          <p:cNvSpPr txBox="1"/>
+          <p:nvPr/>
+        </p:nvSpPr>
+        <p:spPr>
+          <a:xfrm>
+            <a:off x="932688" y="3621023"/>
+            <a:ext cx="5431536" cy="274320"/>
+          </a:xfrm>
+          <a:prstGeom prst="rect">
+            <a:avLst/>
+          </a:prstGeom>
+          <a:noFill/>
+        </p:spPr>
+        <p:txBody>
+          <a:bodyPr wrap="square" anchor="t" lIns="0" rIns="0" tIns="0" bIns="0">
+            <a:spAutoFit/>
+          </a:bodyPr>
+          <a:lstStyle/>
+          <a:p>
+            <a:pPr algn="l">
+              <a:lnSpc>
+                <a:spcPct val="122000"/>
+              </a:lnSpc>
+              <a:spcAft>
+                <a:spcPts val="0"/>
+              </a:spcAft>
+            </a:pPr>
+            <a:r>
+              <a:rPr sz="1150" b="0">
+                <a:solidFill>
+                  <a:srgbClr val="0F172A"/>
+                </a:solidFill>
+                <a:latin typeface="Inter"/>
+              </a:rPr>
+              <a:t>CNN-BiLSTM-BiGRU with attention</a:t>
+            </a:r>
+          </a:p>
+        </p:txBody>
+      </p:sp>
+      <p:sp>
+        <p:nvSpPr>
+          <p:cNvPr id="23" name="TextBox 22"/>
+          <p:cNvSpPr txBox="1"/>
+          <p:nvPr/>
+        </p:nvSpPr>
+        <p:spPr>
+          <a:xfrm>
+            <a:off x="932688" y="3877055"/>
+            <a:ext cx="5431536" cy="201168"/>
+          </a:xfrm>
+          <a:prstGeom prst="rect">
+            <a:avLst/>
+          </a:prstGeom>
+          <a:noFill/>
+        </p:spPr>
+        <p:txBody>
+          <a:bodyPr wrap="square" anchor="t" lIns="0" rIns="0" tIns="0" bIns="0">
+            <a:spAutoFit/>
+          </a:bodyPr>
+          <a:lstStyle/>
+          <a:p>
+            <a:pPr algn="l">
+              <a:lnSpc>
+                <a:spcPct val="118000"/>
+              </a:lnSpc>
+              <a:spcAft>
+                <a:spcPts val="0"/>
+              </a:spcAft>
+            </a:pPr>
+            <a:r>
+              <a:rPr sz="900" b="0">
+                <a:solidFill>
+                  <a:srgbClr val="475569"/>
+                </a:solidFill>
+                <a:latin typeface="Inter"/>
+              </a:rPr>
+              <a:t>Journal of Energy Storage, 2024  ·  doi.org/10.1016/j.est.2024.113074</a:t>
+            </a:r>
+          </a:p>
+        </p:txBody>
+      </p:sp>
+      <p:sp>
+        <p:nvSpPr>
+          <p:cNvPr id="24" name="Rectangle 23"/>
+          <p:cNvSpPr/>
+          <p:nvPr/>
+        </p:nvSpPr>
+        <p:spPr>
+          <a:xfrm>
+            <a:off x="566928" y="4256531"/>
+            <a:ext cx="237744" cy="237744"/>
+          </a:xfrm>
+          <a:prstGeom prst="rect">
+            <a:avLst/>
+          </a:prstGeom>
+          <a:solidFill>
+            <a:srgbClr val="F1F5F9"/>
+          </a:solidFill>
+          <a:ln w="7620">
+            <a:solidFill>
+              <a:srgbClr val="CBD5E1"/>
+            </a:solidFill>
+          </a:ln>
+          <a:effectLst/>
+        </p:spPr>
+        <p:style>
+          <a:lnRef idx="1">
+            <a:schemeClr val="accent1"/>
+          </a:lnRef>
+          <a:fillRef idx="3">
+            <a:schemeClr val="accent1"/>
+          </a:fillRef>
+          <a:effectRef idx="2">
+            <a:schemeClr val="accent1"/>
+          </a:effectRef>
+          <a:fontRef idx="minor">
+            <a:schemeClr val="lt1"/>
+          </a:fontRef>
+        </p:style>
+        <p:txBody>
+          <a:bodyPr rtlCol="0" anchor="ctr"/>
+          <a:lstStyle/>
+          <a:p/>
+        </p:txBody>
+      </p:sp>
+      <p:sp>
+        <p:nvSpPr>
+          <p:cNvPr id="25" name="TextBox 24"/>
+          <p:cNvSpPr txBox="1"/>
+          <p:nvPr/>
+        </p:nvSpPr>
+        <p:spPr>
+          <a:xfrm>
+            <a:off x="566928" y="4256531"/>
+            <a:ext cx="237744" cy="237744"/>
+          </a:xfrm>
+          <a:prstGeom prst="rect">
+            <a:avLst/>
+          </a:prstGeom>
+          <a:noFill/>
+        </p:spPr>
+        <p:txBody>
+          <a:bodyPr wrap="square" anchor="ctr" lIns="0" rIns="0" tIns="0" bIns="0">
+            <a:spAutoFit/>
+          </a:bodyPr>
+          <a:lstStyle/>
+          <a:p>
+            <a:pPr algn="ctr">
+              <a:lnSpc>
+                <a:spcPct val="118000"/>
+              </a:lnSpc>
+              <a:spcAft>
+                <a:spcPts val="0"/>
+              </a:spcAft>
+            </a:pPr>
+            <a:r>
+              <a:rPr sz="1000" b="1">
+                <a:solidFill>
+                  <a:srgbClr val="0E7490"/>
+                </a:solidFill>
+                <a:latin typeface="Inter"/>
+              </a:rPr>
+              <a:t>5</a:t>
+            </a:r>
+          </a:p>
+        </p:txBody>
+      </p:sp>
+      <p:sp>
+        <p:nvSpPr>
+          <p:cNvPr id="26" name="TextBox 25"/>
+          <p:cNvSpPr txBox="1"/>
+          <p:nvPr/>
+        </p:nvSpPr>
+        <p:spPr>
+          <a:xfrm>
+            <a:off x="932688" y="4242815"/>
+            <a:ext cx="5431536" cy="493776"/>
+          </a:xfrm>
+          <a:prstGeom prst="rect">
+            <a:avLst/>
+          </a:prstGeom>
+          <a:noFill/>
+        </p:spPr>
+        <p:txBody>
+          <a:bodyPr wrap="square" anchor="t" lIns="0" rIns="0" tIns="0" bIns="0">
+            <a:spAutoFit/>
+          </a:bodyPr>
+          <a:lstStyle/>
+          <a:p>
+            <a:pPr algn="l">
+              <a:lnSpc>
+                <a:spcPct val="122000"/>
+              </a:lnSpc>
+              <a:spcAft>
+                <a:spcPts val="0"/>
+              </a:spcAft>
+            </a:pPr>
+            <a:r>
+              <a:rPr sz="1150" b="0">
+                <a:solidFill>
+                  <a:srgbClr val="0F172A"/>
+                </a:solidFill>
+                <a:latin typeface="Inter"/>
+              </a:rPr>
+              <a:t>Yang, S., Xu, B., Peng, H. — “Isolation and Grading of Faults in
+Battery Packs Based on Machine Learning Methods”</a:t>
+            </a:r>
+          </a:p>
+        </p:txBody>
+      </p:sp>
+      <p:sp>
+        <p:nvSpPr>
+          <p:cNvPr id="27" name="TextBox 26"/>
+          <p:cNvSpPr txBox="1"/>
+          <p:nvPr/>
+        </p:nvSpPr>
+        <p:spPr>
+          <a:xfrm>
+            <a:off x="932688" y="4718303"/>
+            <a:ext cx="5431536" cy="201168"/>
+          </a:xfrm>
+          <a:prstGeom prst="rect">
+            <a:avLst/>
+          </a:prstGeom>
+          <a:noFill/>
+        </p:spPr>
+        <p:txBody>
+          <a:bodyPr wrap="square" anchor="t" lIns="0" rIns="0" tIns="0" bIns="0">
+            <a:spAutoFit/>
+          </a:bodyPr>
+          <a:lstStyle/>
+          <a:p>
+            <a:pPr algn="l">
+              <a:lnSpc>
+                <a:spcPct val="118000"/>
+              </a:lnSpc>
+              <a:spcAft>
+                <a:spcPts val="0"/>
+              </a:spcAft>
+            </a:pPr>
+            <a:r>
+              <a:rPr sz="900" b="0">
+                <a:solidFill>
+                  <a:srgbClr val="475569"/>
+                </a:solidFill>
+                <a:latin typeface="Inter"/>
+              </a:rPr>
+              <a:t>Electronics, 11(9), 1494, 2022  ·  mdpi.com/2079-9292/11/9/1494</a:t>
+            </a:r>
+          </a:p>
+        </p:txBody>
+      </p:sp>
+      <p:sp>
+        <p:nvSpPr>
+          <p:cNvPr id="28" name="Rectangle 27"/>
+          <p:cNvSpPr/>
+          <p:nvPr/>
+        </p:nvSpPr>
+        <p:spPr>
+          <a:xfrm>
+            <a:off x="6693408" y="1444752"/>
+            <a:ext cx="4931359" cy="2139696"/>
+          </a:xfrm>
+          <a:prstGeom prst="rect">
+            <a:avLst/>
+          </a:prstGeom>
+          <a:solidFill>
+            <a:srgbClr val="F1F5F9"/>
+          </a:solidFill>
+          <a:ln w="9525">
+            <a:solidFill>
+              <a:srgbClr val="CBD5E1"/>
+            </a:solidFill>
+          </a:ln>
+          <a:effectLst/>
+        </p:spPr>
+        <p:style>
+          <a:lnRef idx="1">
+            <a:schemeClr val="accent1"/>
+          </a:lnRef>
+          <a:fillRef idx="3">
+            <a:schemeClr val="accent1"/>
+          </a:fillRef>
+          <a:effectRef idx="2">
+            <a:schemeClr val="accent1"/>
+          </a:effectRef>
+          <a:fontRef idx="minor">
+            <a:schemeClr val="lt1"/>
+          </a:fontRef>
+        </p:style>
+        <p:txBody>
+          <a:bodyPr rtlCol="0" anchor="ctr"/>
+          <a:lstStyle/>
+          <a:p/>
+        </p:txBody>
+      </p:sp>
+      <p:sp>
+        <p:nvSpPr>
+          <p:cNvPr id="29" name="TextBox 28"/>
+          <p:cNvSpPr txBox="1"/>
+          <p:nvPr/>
+        </p:nvSpPr>
+        <p:spPr>
+          <a:xfrm>
+            <a:off x="6894576" y="1572768"/>
+            <a:ext cx="4529023" cy="219456"/>
+          </a:xfrm>
+          <a:prstGeom prst="rect">
+            <a:avLst/>
+          </a:prstGeom>
+          <a:noFill/>
+        </p:spPr>
+        <p:txBody>
+          <a:bodyPr wrap="square" anchor="t" lIns="0" rIns="0" tIns="0" bIns="0">
+            <a:spAutoFit/>
+          </a:bodyPr>
+          <a:lstStyle/>
+          <a:p>
+            <a:pPr algn="l">
+              <a:lnSpc>
+                <a:spcPct val="118000"/>
+              </a:lnSpc>
+              <a:spcAft>
+                <a:spcPts val="0"/>
+              </a:spcAft>
+            </a:pPr>
+            <a:r>
+              <a:rPr sz="950" b="1">
+                <a:solidFill>
+                  <a:srgbClr val="0E7490"/>
+                </a:solidFill>
+                <a:latin typeface="Inter"/>
+              </a:rPr>
+              <a:t>PRIMARY SOURCES — MANUFACTURER DATASHEETS</a:t>
+            </a:r>
+          </a:p>
+        </p:txBody>
+      </p:sp>
+      <p:sp>
+        <p:nvSpPr>
+          <p:cNvPr id="30" name="Oval 29"/>
+          <p:cNvSpPr/>
+          <p:nvPr/>
+        </p:nvSpPr>
+        <p:spPr>
+          <a:xfrm>
+            <a:off x="6912864" y="1947672"/>
+            <a:ext cx="82296" cy="82296"/>
+          </a:xfrm>
+          <a:prstGeom prst="ellipse">
+            <a:avLst/>
+          </a:prstGeom>
+          <a:solidFill>
+            <a:srgbClr val="0E7490"/>
+          </a:solidFill>
+          <a:ln>
+            <a:noFill/>
+          </a:ln>
+          <a:effectLst/>
+        </p:spPr>
+        <p:style>
+          <a:lnRef idx="1">
+            <a:schemeClr val="accent1"/>
+          </a:lnRef>
+          <a:fillRef idx="3">
+            <a:schemeClr val="accent1"/>
+          </a:fillRef>
+          <a:effectRef idx="2">
+            <a:schemeClr val="accent1"/>
+          </a:effectRef>
+          <a:fontRef idx="minor">
+            <a:schemeClr val="lt1"/>
+          </a:fontRef>
+        </p:style>
+        <p:txBody>
+          <a:bodyPr rtlCol="0" anchor="ctr"/>
+          <a:lstStyle/>
+          <a:p/>
+        </p:txBody>
+      </p:sp>
+      <p:sp>
+        <p:nvSpPr>
+          <p:cNvPr id="31" name="TextBox 30"/>
+          <p:cNvSpPr txBox="1"/>
+          <p:nvPr/>
+        </p:nvSpPr>
+        <p:spPr>
+          <a:xfrm>
+            <a:off x="7114032" y="1865376"/>
+            <a:ext cx="2788920" cy="237744"/>
+          </a:xfrm>
+          <a:prstGeom prst="rect">
+            <a:avLst/>
+          </a:prstGeom>
+          <a:noFill/>
+        </p:spPr>
+        <p:txBody>
+          <a:bodyPr wrap="square" anchor="t" lIns="0" rIns="0" tIns="0" bIns="0">
+            <a:spAutoFit/>
+          </a:bodyPr>
+          <a:lstStyle/>
+          <a:p>
+            <a:pPr algn="l">
+              <a:lnSpc>
+                <a:spcPct val="118000"/>
+              </a:lnSpc>
+              <a:spcAft>
+                <a:spcPts val="0"/>
+              </a:spcAft>
+            </a:pPr>
+            <a:r>
+              <a:rPr sz="1050" b="0">
+                <a:solidFill>
+                  <a:srgbClr val="0F172A"/>
+                </a:solidFill>
+                <a:latin typeface="Inter"/>
+              </a:rPr>
+              <a:t>LG Energy Solution INR21700-M50</a:t>
+            </a:r>
+          </a:p>
+        </p:txBody>
+      </p:sp>
+      <p:sp>
+        <p:nvSpPr>
+          <p:cNvPr id="32" name="TextBox 31"/>
+          <p:cNvSpPr txBox="1"/>
+          <p:nvPr/>
+        </p:nvSpPr>
+        <p:spPr>
+          <a:xfrm>
+            <a:off x="9893808" y="1874519"/>
+            <a:ext cx="1529791" cy="219456"/>
+          </a:xfrm>
+          <a:prstGeom prst="rect">
+            <a:avLst/>
+          </a:prstGeom>
+          <a:noFill/>
+        </p:spPr>
+        <p:txBody>
+          <a:bodyPr wrap="square" anchor="t" lIns="0" rIns="0" tIns="0" bIns="0">
+            <a:spAutoFit/>
+          </a:bodyPr>
+          <a:lstStyle/>
+          <a:p>
+            <a:pPr algn="l">
+              <a:lnSpc>
+                <a:spcPct val="118000"/>
+              </a:lnSpc>
+              <a:spcAft>
+                <a:spcPts val="0"/>
+              </a:spcAft>
+            </a:pPr>
+            <a:r>
+              <a:rPr sz="900" b="0">
+                <a:solidFill>
+                  <a:srgbClr val="475569"/>
+                </a:solidFill>
+                <a:latin typeface="Inter"/>
+              </a:rPr>
+              <a:t>cell used in the 8S2P pack</a:t>
+            </a:r>
+          </a:p>
+        </p:txBody>
+      </p:sp>
+      <p:sp>
+        <p:nvSpPr>
+          <p:cNvPr id="33" name="Oval 32"/>
+          <p:cNvSpPr/>
+          <p:nvPr/>
+        </p:nvSpPr>
+        <p:spPr>
+          <a:xfrm>
+            <a:off x="6912864" y="2295144"/>
+            <a:ext cx="82296" cy="82296"/>
+          </a:xfrm>
+          <a:prstGeom prst="ellipse">
+            <a:avLst/>
+          </a:prstGeom>
+          <a:solidFill>
+            <a:srgbClr val="0E7490"/>
+          </a:solidFill>
+          <a:ln>
+            <a:noFill/>
+          </a:ln>
+          <a:effectLst/>
+        </p:spPr>
+        <p:style>
+          <a:lnRef idx="1">
+            <a:schemeClr val="accent1"/>
+          </a:lnRef>
+          <a:fillRef idx="3">
+            <a:schemeClr val="accent1"/>
+          </a:fillRef>
+          <a:effectRef idx="2">
+            <a:schemeClr val="accent1"/>
+          </a:effectRef>
+          <a:fontRef idx="minor">
+            <a:schemeClr val="lt1"/>
+          </a:fontRef>
+        </p:style>
+        <p:txBody>
+          <a:bodyPr rtlCol="0" anchor="ctr"/>
+          <a:lstStyle/>
+          <a:p/>
+        </p:txBody>
+      </p:sp>
+      <p:sp>
+        <p:nvSpPr>
+          <p:cNvPr id="34" name="TextBox 33"/>
+          <p:cNvSpPr txBox="1"/>
+          <p:nvPr/>
+        </p:nvSpPr>
+        <p:spPr>
+          <a:xfrm>
+            <a:off x="7114032" y="2212848"/>
+            <a:ext cx="2788920" cy="237744"/>
+          </a:xfrm>
+          <a:prstGeom prst="rect">
+            <a:avLst/>
+          </a:prstGeom>
+          <a:noFill/>
+        </p:spPr>
+        <p:txBody>
+          <a:bodyPr wrap="square" anchor="t" lIns="0" rIns="0" tIns="0" bIns="0">
+            <a:spAutoFit/>
+          </a:bodyPr>
+          <a:lstStyle/>
+          <a:p>
+            <a:pPr algn="l">
+              <a:lnSpc>
+                <a:spcPct val="118000"/>
+              </a:lnSpc>
+              <a:spcAft>
+                <a:spcPts val="0"/>
+              </a:spcAft>
+            </a:pPr>
+            <a:r>
+              <a:rPr sz="1050" b="0">
+                <a:solidFill>
+                  <a:srgbClr val="0F172A"/>
+                </a:solidFill>
+                <a:latin typeface="Inter"/>
+              </a:rPr>
+              <a:t>DMEGC INR21700-45E</a:t>
+            </a:r>
+          </a:p>
+        </p:txBody>
+      </p:sp>
+      <p:sp>
+        <p:nvSpPr>
+          <p:cNvPr id="35" name="TextBox 34"/>
+          <p:cNvSpPr txBox="1"/>
+          <p:nvPr/>
+        </p:nvSpPr>
+        <p:spPr>
+          <a:xfrm>
+            <a:off x="9893808" y="2221991"/>
+            <a:ext cx="1529791" cy="219456"/>
+          </a:xfrm>
+          <a:prstGeom prst="rect">
+            <a:avLst/>
+          </a:prstGeom>
+          <a:noFill/>
+        </p:spPr>
+        <p:txBody>
+          <a:bodyPr wrap="square" anchor="t" lIns="0" rIns="0" tIns="0" bIns="0">
+            <a:spAutoFit/>
+          </a:bodyPr>
+          <a:lstStyle/>
+          <a:p>
+            <a:pPr algn="l">
+              <a:lnSpc>
+                <a:spcPct val="118000"/>
+              </a:lnSpc>
+              <a:spcAft>
+                <a:spcPts val="0"/>
+              </a:spcAft>
+            </a:pPr>
+            <a:r>
+              <a:rPr sz="900" b="0">
+                <a:solidFill>
+                  <a:srgbClr val="475569"/>
+                </a:solidFill>
+                <a:latin typeface="Inter"/>
+              </a:rPr>
+              <a:t>alternate NMC cell, parsed</a:t>
+            </a:r>
+          </a:p>
+        </p:txBody>
+      </p:sp>
+      <p:sp>
+        <p:nvSpPr>
+          <p:cNvPr id="36" name="Oval 35"/>
+          <p:cNvSpPr/>
+          <p:nvPr/>
+        </p:nvSpPr>
+        <p:spPr>
+          <a:xfrm>
+            <a:off x="6912864" y="2642615"/>
+            <a:ext cx="82296" cy="82296"/>
+          </a:xfrm>
+          <a:prstGeom prst="ellipse">
+            <a:avLst/>
+          </a:prstGeom>
+          <a:solidFill>
+            <a:srgbClr val="0E7490"/>
+          </a:solidFill>
+          <a:ln>
+            <a:noFill/>
+          </a:ln>
+          <a:effectLst/>
+        </p:spPr>
+        <p:style>
+          <a:lnRef idx="1">
+            <a:schemeClr val="accent1"/>
+          </a:lnRef>
+          <a:fillRef idx="3">
+            <a:schemeClr val="accent1"/>
+          </a:fillRef>
+          <a:effectRef idx="2">
+            <a:schemeClr val="accent1"/>
+          </a:effectRef>
+          <a:fontRef idx="minor">
+            <a:schemeClr val="lt1"/>
+          </a:fontRef>
+        </p:style>
+        <p:txBody>
+          <a:bodyPr rtlCol="0" anchor="ctr"/>
+          <a:lstStyle/>
+          <a:p/>
+        </p:txBody>
+      </p:sp>
+      <p:sp>
+        <p:nvSpPr>
+          <p:cNvPr id="37" name="TextBox 36"/>
+          <p:cNvSpPr txBox="1"/>
+          <p:nvPr/>
+        </p:nvSpPr>
+        <p:spPr>
+          <a:xfrm>
+            <a:off x="7114032" y="2560320"/>
+            <a:ext cx="2788920" cy="237744"/>
+          </a:xfrm>
+          <a:prstGeom prst="rect">
+            <a:avLst/>
+          </a:prstGeom>
+          <a:noFill/>
+        </p:spPr>
+        <p:txBody>
+          <a:bodyPr wrap="square" anchor="t" lIns="0" rIns="0" tIns="0" bIns="0">
+            <a:spAutoFit/>
+          </a:bodyPr>
+          <a:lstStyle/>
+          <a:p>
+            <a:pPr algn="l">
+              <a:lnSpc>
+                <a:spcPct val="118000"/>
+              </a:lnSpc>
+              <a:spcAft>
+                <a:spcPts val="0"/>
+              </a:spcAft>
+            </a:pPr>
+            <a:r>
+              <a:rPr sz="1050" b="0">
+                <a:solidFill>
+                  <a:srgbClr val="0F172A"/>
+                </a:solidFill>
+                <a:latin typeface="Inter"/>
+              </a:rPr>
+              <a:t>Panasonic NCR18650B</a:t>
+            </a:r>
+          </a:p>
+        </p:txBody>
+      </p:sp>
+      <p:sp>
+        <p:nvSpPr>
+          <p:cNvPr id="38" name="TextBox 37"/>
+          <p:cNvSpPr txBox="1"/>
+          <p:nvPr/>
+        </p:nvSpPr>
+        <p:spPr>
+          <a:xfrm>
+            <a:off x="9893808" y="2569463"/>
+            <a:ext cx="1529791" cy="219456"/>
+          </a:xfrm>
+          <a:prstGeom prst="rect">
+            <a:avLst/>
+          </a:prstGeom>
+          <a:noFill/>
+        </p:spPr>
+        <p:txBody>
+          <a:bodyPr wrap="square" anchor="t" lIns="0" rIns="0" tIns="0" bIns="0">
+            <a:spAutoFit/>
+          </a:bodyPr>
+          <a:lstStyle/>
+          <a:p>
+            <a:pPr algn="l">
+              <a:lnSpc>
+                <a:spcPct val="118000"/>
+              </a:lnSpc>
+              <a:spcAft>
+                <a:spcPts val="0"/>
+              </a:spcAft>
+            </a:pPr>
+            <a:r>
+              <a:rPr sz="900" b="0">
+                <a:solidFill>
+                  <a:srgbClr val="475569"/>
+                </a:solidFill>
+                <a:latin typeface="Inter"/>
+              </a:rPr>
+              <a:t>NCA tier reference</a:t>
+            </a:r>
+          </a:p>
+        </p:txBody>
+      </p:sp>
+      <p:sp>
+        <p:nvSpPr>
+          <p:cNvPr id="39" name="Oval 38"/>
+          <p:cNvSpPr/>
+          <p:nvPr/>
+        </p:nvSpPr>
+        <p:spPr>
+          <a:xfrm>
+            <a:off x="6912864" y="2990087"/>
+            <a:ext cx="82296" cy="82296"/>
+          </a:xfrm>
+          <a:prstGeom prst="ellipse">
+            <a:avLst/>
+          </a:prstGeom>
+          <a:solidFill>
+            <a:srgbClr val="0E7490"/>
+          </a:solidFill>
+          <a:ln>
+            <a:noFill/>
+          </a:ln>
+          <a:effectLst/>
+        </p:spPr>
+        <p:style>
+          <a:lnRef idx="1">
+            <a:schemeClr val="accent1"/>
+          </a:lnRef>
+          <a:fillRef idx="3">
+            <a:schemeClr val="accent1"/>
+          </a:fillRef>
+          <a:effectRef idx="2">
+            <a:schemeClr val="accent1"/>
+          </a:effectRef>
+          <a:fontRef idx="minor">
+            <a:schemeClr val="lt1"/>
+          </a:fontRef>
+        </p:style>
+        <p:txBody>
+          <a:bodyPr rtlCol="0" anchor="ctr"/>
+          <a:lstStyle/>
+          <a:p/>
+        </p:txBody>
+      </p:sp>
+      <p:sp>
+        <p:nvSpPr>
+          <p:cNvPr id="40" name="TextBox 39"/>
+          <p:cNvSpPr txBox="1"/>
+          <p:nvPr/>
+        </p:nvSpPr>
+        <p:spPr>
+          <a:xfrm>
+            <a:off x="7114032" y="2907791"/>
+            <a:ext cx="2788920" cy="237744"/>
+          </a:xfrm>
+          <a:prstGeom prst="rect">
+            <a:avLst/>
+          </a:prstGeom>
+          <a:noFill/>
+        </p:spPr>
+        <p:txBody>
+          <a:bodyPr wrap="square" anchor="t" lIns="0" rIns="0" tIns="0" bIns="0">
+            <a:spAutoFit/>
+          </a:bodyPr>
+          <a:lstStyle/>
+          <a:p>
+            <a:pPr algn="l">
+              <a:lnSpc>
+                <a:spcPct val="118000"/>
+              </a:lnSpc>
+              <a:spcAft>
+                <a:spcPts val="0"/>
+              </a:spcAft>
+            </a:pPr>
+            <a:r>
+              <a:rPr sz="1050" b="0">
+                <a:solidFill>
+                  <a:srgbClr val="0F172A"/>
+                </a:solidFill>
+                <a:latin typeface="Inter"/>
+              </a:rPr>
+              <a:t>P3 3232 LFP 26650</a:t>
+            </a:r>
+          </a:p>
+        </p:txBody>
+      </p:sp>
+      <p:sp>
+        <p:nvSpPr>
+          <p:cNvPr id="41" name="TextBox 40"/>
+          <p:cNvSpPr txBox="1"/>
+          <p:nvPr/>
+        </p:nvSpPr>
+        <p:spPr>
+          <a:xfrm>
+            <a:off x="9893808" y="2916935"/>
+            <a:ext cx="1529791" cy="219456"/>
+          </a:xfrm>
+          <a:prstGeom prst="rect">
+            <a:avLst/>
+          </a:prstGeom>
+          <a:noFill/>
+        </p:spPr>
+        <p:txBody>
+          <a:bodyPr wrap="square" anchor="t" lIns="0" rIns="0" tIns="0" bIns="0">
+            <a:spAutoFit/>
+          </a:bodyPr>
+          <a:lstStyle/>
+          <a:p>
+            <a:pPr algn="l">
+              <a:lnSpc>
+                <a:spcPct val="118000"/>
+              </a:lnSpc>
+              <a:spcAft>
+                <a:spcPts val="0"/>
+              </a:spcAft>
+            </a:pPr>
+            <a:r>
+              <a:rPr sz="900" b="0">
+                <a:solidFill>
+                  <a:srgbClr val="475569"/>
+                </a:solidFill>
+                <a:latin typeface="Inter"/>
+              </a:rPr>
+              <a:t>LFP tier reference</a:t>
+            </a:r>
+          </a:p>
+        </p:txBody>
+      </p:sp>
+      <p:sp>
+        <p:nvSpPr>
+          <p:cNvPr id="42" name="Oval 41"/>
+          <p:cNvSpPr/>
+          <p:nvPr/>
+        </p:nvSpPr>
+        <p:spPr>
+          <a:xfrm>
+            <a:off x="6912864" y="3337559"/>
+            <a:ext cx="82296" cy="82296"/>
+          </a:xfrm>
+          <a:prstGeom prst="ellipse">
+            <a:avLst/>
+          </a:prstGeom>
+          <a:solidFill>
+            <a:srgbClr val="0E7490"/>
+          </a:solidFill>
+          <a:ln>
+            <a:noFill/>
+          </a:ln>
+          <a:effectLst/>
+        </p:spPr>
+        <p:style>
+          <a:lnRef idx="1">
+            <a:schemeClr val="accent1"/>
+          </a:lnRef>
+          <a:fillRef idx="3">
+            <a:schemeClr val="accent1"/>
+          </a:fillRef>
+          <a:effectRef idx="2">
+            <a:schemeClr val="accent1"/>
+          </a:effectRef>
+          <a:fontRef idx="minor">
+            <a:schemeClr val="lt1"/>
+          </a:fontRef>
+        </p:style>
+        <p:txBody>
+          <a:bodyPr rtlCol="0" anchor="ctr"/>
+          <a:lstStyle/>
+          <a:p/>
+        </p:txBody>
+      </p:sp>
+      <p:sp>
+        <p:nvSpPr>
+          <p:cNvPr id="43" name="TextBox 42"/>
+          <p:cNvSpPr txBox="1"/>
+          <p:nvPr/>
+        </p:nvSpPr>
+        <p:spPr>
+          <a:xfrm>
+            <a:off x="7114032" y="3255263"/>
+            <a:ext cx="2788920" cy="237744"/>
+          </a:xfrm>
+          <a:prstGeom prst="rect">
+            <a:avLst/>
+          </a:prstGeom>
+          <a:noFill/>
+        </p:spPr>
+        <p:txBody>
+          <a:bodyPr wrap="square" anchor="t" lIns="0" rIns="0" tIns="0" bIns="0">
+            <a:spAutoFit/>
+          </a:bodyPr>
+          <a:lstStyle/>
+          <a:p>
+            <a:pPr algn="l">
+              <a:lnSpc>
+                <a:spcPct val="118000"/>
+              </a:lnSpc>
+              <a:spcAft>
+                <a:spcPts val="0"/>
+              </a:spcAft>
+            </a:pPr>
+            <a:r>
+              <a:rPr sz="1050" b="0">
+                <a:solidFill>
+                  <a:srgbClr val="0F172A"/>
+                </a:solidFill>
+                <a:latin typeface="Inter"/>
+              </a:rPr>
+              <a:t>JBD SP24S007 V1.1</a:t>
+            </a:r>
+          </a:p>
+        </p:txBody>
+      </p:sp>
+      <p:sp>
+        <p:nvSpPr>
+          <p:cNvPr id="44" name="TextBox 43"/>
+          <p:cNvSpPr txBox="1"/>
+          <p:nvPr/>
+        </p:nvSpPr>
+        <p:spPr>
+          <a:xfrm>
+            <a:off x="9893808" y="3264407"/>
+            <a:ext cx="1529791" cy="219456"/>
+          </a:xfrm>
+          <a:prstGeom prst="rect">
+            <a:avLst/>
+          </a:prstGeom>
+          <a:noFill/>
+        </p:spPr>
+        <p:txBody>
+          <a:bodyPr wrap="square" anchor="t" lIns="0" rIns="0" tIns="0" bIns="0">
+            <a:spAutoFit/>
+          </a:bodyPr>
+          <a:lstStyle/>
+          <a:p>
+            <a:pPr algn="l">
+              <a:lnSpc>
+                <a:spcPct val="118000"/>
+              </a:lnSpc>
+              <a:spcAft>
+                <a:spcPts val="0"/>
+              </a:spcAft>
+            </a:pPr>
+            <a:r>
+              <a:rPr sz="900" b="0">
+                <a:solidFill>
+                  <a:srgbClr val="475569"/>
+                </a:solidFill>
+                <a:latin typeface="Inter"/>
+              </a:rPr>
+              <a:t>BMS protocol + registers</a:t>
+            </a:r>
+          </a:p>
+        </p:txBody>
+      </p:sp>
+      <p:sp>
+        <p:nvSpPr>
+          <p:cNvPr id="45" name="Rectangle 44"/>
+          <p:cNvSpPr/>
+          <p:nvPr/>
+        </p:nvSpPr>
+        <p:spPr>
+          <a:xfrm>
+            <a:off x="6693408" y="3730752"/>
+            <a:ext cx="4931359" cy="1883664"/>
+          </a:xfrm>
+          <a:prstGeom prst="rect">
+            <a:avLst/>
+          </a:prstGeom>
+          <a:solidFill>
+            <a:srgbClr val="F1F5F9"/>
+          </a:solidFill>
+          <a:ln w="9525">
+            <a:solidFill>
+              <a:srgbClr val="CBD5E1"/>
+            </a:solidFill>
+          </a:ln>
+          <a:effectLst/>
+        </p:spPr>
+        <p:style>
+          <a:lnRef idx="1">
+            <a:schemeClr val="accent1"/>
+          </a:lnRef>
+          <a:fillRef idx="3">
+            <a:schemeClr val="accent1"/>
+          </a:fillRef>
+          <a:effectRef idx="2">
+            <a:schemeClr val="accent1"/>
+          </a:effectRef>
+          <a:fontRef idx="minor">
+            <a:schemeClr val="lt1"/>
+          </a:fontRef>
+        </p:style>
+        <p:txBody>
+          <a:bodyPr rtlCol="0" anchor="ctr"/>
+          <a:lstStyle/>
+          <a:p/>
+        </p:txBody>
+      </p:sp>
+      <p:sp>
+        <p:nvSpPr>
+          <p:cNvPr id="46" name="TextBox 45"/>
+          <p:cNvSpPr txBox="1"/>
+          <p:nvPr/>
+        </p:nvSpPr>
+        <p:spPr>
+          <a:xfrm>
+            <a:off x="6894576" y="3858768"/>
+            <a:ext cx="4529023" cy="219456"/>
+          </a:xfrm>
+          <a:prstGeom prst="rect">
+            <a:avLst/>
+          </a:prstGeom>
+          <a:noFill/>
+        </p:spPr>
+        <p:txBody>
+          <a:bodyPr wrap="square" anchor="t" lIns="0" rIns="0" tIns="0" bIns="0">
+            <a:spAutoFit/>
+          </a:bodyPr>
+          <a:lstStyle/>
+          <a:p>
+            <a:pPr algn="l">
+              <a:lnSpc>
+                <a:spcPct val="118000"/>
+              </a:lnSpc>
+              <a:spcAft>
+                <a:spcPts val="0"/>
+              </a:spcAft>
+            </a:pPr>
+            <a:r>
+              <a:rPr sz="950" b="1">
+                <a:solidFill>
+                  <a:srgbClr val="B45309"/>
+                </a:solidFill>
+                <a:latin typeface="Inter"/>
+              </a:rPr>
+              <a:t>METHODS</a:t>
+            </a:r>
+          </a:p>
+        </p:txBody>
+      </p:sp>
+      <p:sp>
+        <p:nvSpPr>
+          <p:cNvPr id="47" name="TextBox 46"/>
+          <p:cNvSpPr txBox="1"/>
+          <p:nvPr/>
+        </p:nvSpPr>
+        <p:spPr>
+          <a:xfrm>
+            <a:off x="6912864" y="4151376"/>
+            <a:ext cx="4492447" cy="201168"/>
+          </a:xfrm>
+          <a:prstGeom prst="rect">
+            <a:avLst/>
+          </a:prstGeom>
+          <a:noFill/>
+        </p:spPr>
+        <p:txBody>
+          <a:bodyPr wrap="square" anchor="t" lIns="0" rIns="0" tIns="0" bIns="0">
+            <a:spAutoFit/>
+          </a:bodyPr>
+          <a:lstStyle/>
+          <a:p>
+            <a:pPr algn="l">
+              <a:lnSpc>
+                <a:spcPct val="118000"/>
+              </a:lnSpc>
+              <a:spcAft>
+                <a:spcPts val="0"/>
+              </a:spcAft>
+            </a:pPr>
+            <a:r>
+              <a:rPr sz="1050" b="1">
+                <a:solidFill>
+                  <a:srgbClr val="0F172A"/>
+                </a:solidFill>
+                <a:latin typeface="Inter"/>
+              </a:rPr>
+              <a:t>Chen, T. &amp; Guestrin, C.</a:t>
+            </a:r>
+          </a:p>
+        </p:txBody>
+      </p:sp>
+      <p:sp>
+        <p:nvSpPr>
+          <p:cNvPr id="48" name="TextBox 47"/>
+          <p:cNvSpPr txBox="1"/>
+          <p:nvPr/>
+        </p:nvSpPr>
+        <p:spPr>
+          <a:xfrm>
+            <a:off x="6912864" y="4325112"/>
+            <a:ext cx="4492447" cy="201168"/>
+          </a:xfrm>
+          <a:prstGeom prst="rect">
+            <a:avLst/>
+          </a:prstGeom>
+          <a:noFill/>
+        </p:spPr>
+        <p:txBody>
+          <a:bodyPr wrap="square" anchor="t" lIns="0" rIns="0" tIns="0" bIns="0">
+            <a:spAutoFit/>
+          </a:bodyPr>
+          <a:lstStyle/>
+          <a:p>
+            <a:pPr algn="l">
+              <a:lnSpc>
+                <a:spcPct val="118000"/>
+              </a:lnSpc>
+              <a:spcAft>
+                <a:spcPts val="0"/>
+              </a:spcAft>
+            </a:pPr>
+            <a:r>
+              <a:rPr sz="900" b="0">
+                <a:solidFill>
+                  <a:srgbClr val="475569"/>
+                </a:solidFill>
+                <a:latin typeface="Inter"/>
+              </a:rPr>
+              <a:t>“XGBoost: A Scalable Tree Boosting System”, KDD 2016</a:t>
+            </a:r>
+          </a:p>
+        </p:txBody>
+      </p:sp>
+      <p:sp>
+        <p:nvSpPr>
+          <p:cNvPr id="49" name="TextBox 48"/>
+          <p:cNvSpPr txBox="1"/>
+          <p:nvPr/>
+        </p:nvSpPr>
+        <p:spPr>
+          <a:xfrm>
+            <a:off x="6912864" y="4517136"/>
+            <a:ext cx="4492447" cy="201168"/>
+          </a:xfrm>
+          <a:prstGeom prst="rect">
+            <a:avLst/>
+          </a:prstGeom>
+          <a:noFill/>
+        </p:spPr>
+        <p:txBody>
+          <a:bodyPr wrap="square" anchor="t" lIns="0" rIns="0" tIns="0" bIns="0">
+            <a:spAutoFit/>
+          </a:bodyPr>
+          <a:lstStyle/>
+          <a:p>
+            <a:pPr algn="l">
+              <a:lnSpc>
+                <a:spcPct val="118000"/>
+              </a:lnSpc>
+              <a:spcAft>
+                <a:spcPts val="0"/>
+              </a:spcAft>
+            </a:pPr>
+            <a:r>
+              <a:rPr sz="1050" b="1">
+                <a:solidFill>
+                  <a:srgbClr val="0F172A"/>
+                </a:solidFill>
+                <a:latin typeface="Inter"/>
+              </a:rPr>
+              <a:t>Liu, F. T., Ting, K. M. &amp; Zhou, Z.-H.</a:t>
+            </a:r>
+          </a:p>
+        </p:txBody>
+      </p:sp>
+      <p:sp>
+        <p:nvSpPr>
+          <p:cNvPr id="50" name="TextBox 49"/>
+          <p:cNvSpPr txBox="1"/>
+          <p:nvPr/>
+        </p:nvSpPr>
+        <p:spPr>
+          <a:xfrm>
+            <a:off x="6912864" y="4690872"/>
+            <a:ext cx="4492447" cy="201168"/>
+          </a:xfrm>
+          <a:prstGeom prst="rect">
+            <a:avLst/>
+          </a:prstGeom>
+          <a:noFill/>
+        </p:spPr>
+        <p:txBody>
+          <a:bodyPr wrap="square" anchor="t" lIns="0" rIns="0" tIns="0" bIns="0">
+            <a:spAutoFit/>
+          </a:bodyPr>
+          <a:lstStyle/>
+          <a:p>
+            <a:pPr algn="l">
+              <a:lnSpc>
+                <a:spcPct val="118000"/>
+              </a:lnSpc>
+              <a:spcAft>
+                <a:spcPts val="0"/>
+              </a:spcAft>
+            </a:pPr>
+            <a:r>
+              <a:rPr sz="900" b="0">
+                <a:solidFill>
+                  <a:srgbClr val="475569"/>
+                </a:solidFill>
+                <a:latin typeface="Inter"/>
+              </a:rPr>
+              <a:t>“Isolation Forest”, ICDM 2008</a:t>
+            </a:r>
+          </a:p>
+        </p:txBody>
+      </p:sp>
+      <p:sp>
+        <p:nvSpPr>
+          <p:cNvPr id="51" name="TextBox 50"/>
+          <p:cNvSpPr txBox="1"/>
+          <p:nvPr/>
+        </p:nvSpPr>
+        <p:spPr>
+          <a:xfrm>
+            <a:off x="6912864" y="4882896"/>
+            <a:ext cx="4492447" cy="201168"/>
+          </a:xfrm>
+          <a:prstGeom prst="rect">
+            <a:avLst/>
+          </a:prstGeom>
+          <a:noFill/>
+        </p:spPr>
+        <p:txBody>
+          <a:bodyPr wrap="square" anchor="t" lIns="0" rIns="0" tIns="0" bIns="0">
+            <a:spAutoFit/>
+          </a:bodyPr>
+          <a:lstStyle/>
+          <a:p>
+            <a:pPr algn="l">
+              <a:lnSpc>
+                <a:spcPct val="118000"/>
+              </a:lnSpc>
+              <a:spcAft>
+                <a:spcPts val="0"/>
+              </a:spcAft>
+            </a:pPr>
+            <a:r>
+              <a:rPr sz="1050" b="1">
+                <a:solidFill>
+                  <a:srgbClr val="0F172A"/>
+                </a:solidFill>
+                <a:latin typeface="Inter"/>
+              </a:rPr>
+              <a:t>Vaswani, A. et al.</a:t>
+            </a:r>
+          </a:p>
+        </p:txBody>
+      </p:sp>
+      <p:sp>
+        <p:nvSpPr>
+          <p:cNvPr id="52" name="TextBox 51"/>
+          <p:cNvSpPr txBox="1"/>
+          <p:nvPr/>
+        </p:nvSpPr>
+        <p:spPr>
+          <a:xfrm>
+            <a:off x="6912864" y="5056632"/>
+            <a:ext cx="4492447" cy="201168"/>
+          </a:xfrm>
+          <a:prstGeom prst="rect">
+            <a:avLst/>
+          </a:prstGeom>
+          <a:noFill/>
+        </p:spPr>
+        <p:txBody>
+          <a:bodyPr wrap="square" anchor="t" lIns="0" rIns="0" tIns="0" bIns="0">
+            <a:spAutoFit/>
+          </a:bodyPr>
+          <a:lstStyle/>
+          <a:p>
+            <a:pPr algn="l">
+              <a:lnSpc>
+                <a:spcPct val="118000"/>
+              </a:lnSpc>
+              <a:spcAft>
+                <a:spcPts val="0"/>
+              </a:spcAft>
+            </a:pPr>
+            <a:r>
+              <a:rPr sz="900" b="0">
+                <a:solidFill>
+                  <a:srgbClr val="475569"/>
+                </a:solidFill>
+                <a:latin typeface="Inter"/>
+              </a:rPr>
+              <a:t>“Attention Is All You Need”, NeurIPS 2017</a:t>
+            </a:r>
+          </a:p>
+        </p:txBody>
+      </p:sp>
+      <p:sp>
+        <p:nvSpPr>
+          <p:cNvPr id="53" name="TextBox 52"/>
+          <p:cNvSpPr txBox="1"/>
+          <p:nvPr/>
+        </p:nvSpPr>
+        <p:spPr>
+          <a:xfrm>
+            <a:off x="6912864" y="5248656"/>
+            <a:ext cx="4492447" cy="201168"/>
+          </a:xfrm>
+          <a:prstGeom prst="rect">
+            <a:avLst/>
+          </a:prstGeom>
+          <a:noFill/>
+        </p:spPr>
+        <p:txBody>
+          <a:bodyPr wrap="square" anchor="t" lIns="0" rIns="0" tIns="0" bIns="0">
+            <a:spAutoFit/>
+          </a:bodyPr>
+          <a:lstStyle/>
+          <a:p>
+            <a:pPr algn="l">
+              <a:lnSpc>
+                <a:spcPct val="118000"/>
+              </a:lnSpc>
+              <a:spcAft>
+                <a:spcPts val="0"/>
+              </a:spcAft>
+            </a:pPr>
+            <a:r>
+              <a:rPr sz="1050" b="1">
+                <a:solidFill>
+                  <a:srgbClr val="0F172A"/>
+                </a:solidFill>
+                <a:latin typeface="Inter"/>
+              </a:rPr>
+              <a:t>Pedregosa, F. et al.</a:t>
+            </a:r>
+          </a:p>
+        </p:txBody>
+      </p:sp>
+      <p:sp>
+        <p:nvSpPr>
+          <p:cNvPr id="54" name="TextBox 53"/>
+          <p:cNvSpPr txBox="1"/>
+          <p:nvPr/>
+        </p:nvSpPr>
+        <p:spPr>
+          <a:xfrm>
+            <a:off x="6912864" y="5422392"/>
+            <a:ext cx="4492447" cy="201168"/>
+          </a:xfrm>
+          <a:prstGeom prst="rect">
+            <a:avLst/>
+          </a:prstGeom>
+          <a:noFill/>
+        </p:spPr>
+        <p:txBody>
+          <a:bodyPr wrap="square" anchor="t" lIns="0" rIns="0" tIns="0" bIns="0">
+            <a:spAutoFit/>
+          </a:bodyPr>
+          <a:lstStyle/>
+          <a:p>
+            <a:pPr algn="l">
+              <a:lnSpc>
+                <a:spcPct val="118000"/>
+              </a:lnSpc>
+              <a:spcAft>
+                <a:spcPts val="0"/>
+              </a:spcAft>
+            </a:pPr>
+            <a:r>
+              <a:rPr sz="900" b="0">
+                <a:solidFill>
+                  <a:srgbClr val="475569"/>
+                </a:solidFill>
+                <a:latin typeface="Inter"/>
+              </a:rPr>
+              <a:t>“Scikit-learn: Machine Learning in Python”, JMLR 12, 2011</a:t>
+            </a:r>
+          </a:p>
+        </p:txBody>
+      </p:sp>
+      <p:sp>
+        <p:nvSpPr>
+          <p:cNvPr id="55" name="TextBox 54"/>
+          <p:cNvSpPr txBox="1"/>
+          <p:nvPr/>
+        </p:nvSpPr>
+        <p:spPr>
+          <a:xfrm>
+            <a:off x="6693408" y="5760720"/>
+            <a:ext cx="4931359" cy="219456"/>
+          </a:xfrm>
+          <a:prstGeom prst="rect">
+            <a:avLst/>
+          </a:prstGeom>
+          <a:noFill/>
+        </p:spPr>
+        <p:txBody>
+          <a:bodyPr wrap="square" anchor="t" lIns="0" rIns="0" tIns="0" bIns="0">
+            <a:spAutoFit/>
+          </a:bodyPr>
+          <a:lstStyle/>
+          <a:p>
+            <a:pPr algn="l">
+              <a:lnSpc>
+                <a:spcPct val="118000"/>
+              </a:lnSpc>
+              <a:spcAft>
+                <a:spcPts val="0"/>
+              </a:spcAft>
+            </a:pPr>
+            <a:r>
+              <a:rPr sz="950" b="1">
+                <a:solidFill>
+                  <a:srgbClr val="475569"/>
+                </a:solidFill>
+                <a:latin typeface="Inter"/>
+              </a:rPr>
+              <a:t>STACK</a:t>
+            </a:r>
+          </a:p>
+        </p:txBody>
+      </p:sp>
+      <p:sp>
+        <p:nvSpPr>
+          <p:cNvPr id="56" name="TextBox 55"/>
+          <p:cNvSpPr txBox="1"/>
+          <p:nvPr/>
+        </p:nvSpPr>
+        <p:spPr>
+          <a:xfrm>
+            <a:off x="6693408" y="5998464"/>
+            <a:ext cx="4931359" cy="475488"/>
+          </a:xfrm>
+          <a:prstGeom prst="rect">
+            <a:avLst/>
+          </a:prstGeom>
+          <a:noFill/>
+        </p:spPr>
+        <p:txBody>
+          <a:bodyPr wrap="square" anchor="t" lIns="0" rIns="0" tIns="0" bIns="0">
+            <a:spAutoFit/>
+          </a:bodyPr>
+          <a:lstStyle/>
+          <a:p>
+            <a:pPr algn="l">
+              <a:lnSpc>
+                <a:spcPct val="132000"/>
+              </a:lnSpc>
+              <a:spcAft>
+                <a:spcPts val="0"/>
+              </a:spcAft>
+            </a:pPr>
+            <a:r>
+              <a:rPr sz="900" b="0">
+                <a:solidFill>
+                  <a:srgbClr val="475569"/>
+                </a:solidFill>
+                <a:latin typeface="Inter"/>
+              </a:rPr>
+              <a:t>xgboost 3.2.0  ·  scikit-learn 1.9.1  ·  torch 2.14.0  ·  numpy 2.4.6
+bleak  ·  Flask  ·  PostgreSQL  ·  Cloudflare Tunnel  ·  MATLAB / Simulink</a:t>
             </a:r>
           </a:p>
         </p:txBody>

--- a/AI_PBMS_8Slide.pptx
+++ b/AI_PBMS_8Slide.pptx
@@ -840,37 +840,52 @@
           </a:p>
           <a:p>
             <a:r>
-              <a:t>Transformer edges us by under a point — but only because it is fed a sixty-row</a:t>
-            </a:r>
-          </a:p>
-          <a:p>
-            <a:r>
-              <a:t>window, sixty times the input per prediction. On our hardware that window is</a:t>
-            </a:r>
-          </a:p>
-          <a:p>
-            <a:r>
-              <a:t>disqualifying. At one hertz it is blind for a full minute after every restart,</a:t>
-            </a:r>
-          </a:p>
-          <a:p>
-            <a:r>
-              <a:t>its positional encoding pins the input at exactly sixty rows, torch is five times</a:t>
-            </a:r>
-          </a:p>
-          <a:p>
-            <a:r>
-              <a:t>the runtime footprint of xgboost on the Pi, and it gives no per-feature</a:t>
-            </a:r>
-          </a:p>
-          <a:p>
-            <a:r>
-              <a:t>attribution an engineer can audit. XGBoost predicts from a single row, instantly,</a:t>
-            </a:r>
-          </a:p>
-          <a:p>
-            <a:r>
-              <a:t>explains itself, and retrains from the browser. That is why it ships.</a:t>
+              <a:t>Transformer edges us by under a point — but look at what it costs. Both models</a:t>
+            </a:r>
+          </a:p>
+          <a:p>
+            <a:r>
+              <a:t>sit behind the same sixty-row buffer in our pipeline. The difference is that</a:t>
+            </a:r>
+          </a:p>
+          <a:p>
+            <a:r>
+              <a:t>XGBoost only eats the last row of it, and its deepest feature is a ten-sample</a:t>
+            </a:r>
+          </a:p>
+          <a:p>
+            <a:r>
+              <a:t>rolling window, so that sixty is a constant we chose and could shorten to ten</a:t>
+            </a:r>
+          </a:p>
+          <a:p>
+            <a:r>
+              <a:t>tomorrow. The Transformer eats all sixty, and its positional encoding fixes that</a:t>
+            </a:r>
+          </a:p>
+          <a:p>
+            <a:r>
+              <a:t>length inside the weights — you cannot shorten it without retraining. On top of</a:t>
+            </a:r>
+          </a:p>
+          <a:p>
+            <a:r>
+              <a:t>that, torch is five times the runtime footprint of xgboost on the Pi, it gives no</a:t>
+            </a:r>
+          </a:p>
+          <a:p>
+            <a:r>
+              <a:t>per-feature attribution an engineer can audit, and it cannot be retrained from</a:t>
+            </a:r>
+          </a:p>
+          <a:p>
+            <a:r>
+              <a:t>the browser the way our configurator retrains XGBoost today. That is why it</a:t>
+            </a:r>
+          </a:p>
+          <a:p>
+            <a:r>
+              <a:t>ships.</a:t>
             </a:r>
           </a:p>
         </p:txBody>
@@ -8491,7 +8506,7 @@
                 </a:solidFill>
                 <a:latin typeface="Inter"/>
               </a:rPr>
-              <a:t>Deployed — 1 row, no buffer</a:t>
+              <a:t>Deployed — 1-row input, 10-row context</a:t>
             </a:r>
           </a:p>
         </p:txBody>
@@ -8827,7 +8842,7 @@
                 </a:solidFill>
                 <a:latin typeface="Inter"/>
               </a:rPr>
-              <a:t>Edges accuracy; 60-row buffer</a:t>
+              <a:t>+0.92% acc; 60 rows locked in</a:t>
             </a:r>
           </a:p>
         </p:txBody>
@@ -10192,8 +10207,8 @@
         </p:blipFill>
         <p:spPr>
           <a:xfrm>
-            <a:off x="4092368" y="4334256"/>
-            <a:ext cx="4006958" cy="1463040"/>
+            <a:off x="4107213" y="4334256"/>
+            <a:ext cx="3977268" cy="1463040"/>
           </a:xfrm>
           <a:prstGeom prst="rect">
             <a:avLst/>
@@ -10237,7 +10252,7 @@
                 </a:solidFill>
                 <a:latin typeface="Inter"/>
               </a:rPr>
-              <a:t>All six trained and scored on the identical 30,000-row held-out split with the same 51 features; latency is the median single-row prediction on a 4-core CPU, not a Pi 5. The Transformer additionally receives a 60-row lookback window — 60× the input per prediction — which is where its 0.92-point accuracy edge comes from, and also why it cannot run on our hardware. SVM trained on a stratified 20k subsample: full-data RBF did not converge.</a:t>
+              <a:t>All six trained and scored on the identical 30,000-row held-out split with the same 51 features; latency is the median single-row prediction on a 4-core CPU, not a Pi 5. Both models sit behind the same 60-row pipeline buffer, but XGBoost consumes only the last row and its deepest feature is a 10-sample rolling window, so that 60 is a constant we chose; the Transformer consumes all 60 and its positional encoding fixes the length in the weights. SVM trained on a stratified 20k subsample: full-data RBF did not converge.</a:t>
             </a:r>
           </a:p>
         </p:txBody>

--- a/AI_PBMS_8Slide.pptx
+++ b/AI_PBMS_8Slide.pptx
@@ -1065,7 +1065,7 @@
           </a:p>
           <a:p>
             <a:r>
-              <a:t>the logger and the inference and the dashboard, and an Arduino on its own power</a:t>
+              <a:t>the logger and the inference, and an Arduino on its own power</a:t>
             </a:r>
           </a:p>
           <a:p>
@@ -1085,12 +1085,17 @@
           </a:p>
           <a:p>
             <a:r>
-              <a:t>data path — edge, service, interface — with everything published through a</a:t>
-            </a:r>
-          </a:p>
-          <a:p>
-            <a:r>
-              <a:t>Cloudflare tunnel so we never open an inbound port on the Pi.</a:t>
+              <a:t>data path. Inference happens on the Pi; the dashboard is a Flask service</a:t>
+            </a:r>
+          </a:p>
+          <a:p>
+            <a:r>
+              <a:t>deployed on Railway, and the Pi pushes results up to it. Because the Pi only ever</a:t>
+            </a:r>
+          </a:p>
+          <a:p>
+            <a:r>
+              <a:t>dials out, we never open an inbound port on the pack itself.</a:t>
             </a:r>
           </a:p>
         </p:txBody>
@@ -1160,7 +1165,12 @@
           <a:lstStyle/>
           <a:p>
             <a:r>
-              <a:t>The platform is Flask on the Pi behind a Cloudflare tunnel. It is</a:t>
+              <a:t>The Pi runs the classifier locally and pushes results to a Flask</a:t>
+            </a:r>
+          </a:p>
+          <a:p>
+            <a:r>
+              <a:t>dashboard deployed on Railway, which is what you open in a browser. It is</a:t>
             </a:r>
           </a:p>
           <a:p>
@@ -11705,7 +11715,7 @@
                 </a:solidFill>
                 <a:latin typeface="Inter"/>
               </a:rPr>
-              <a:t>Pi 5 runs logger, inference and dashboard.</a:t>
+              <a:t>Pi 5 runs the logger and XGBoost inference.</a:t>
             </a:r>
           </a:p>
           <a:p>
@@ -11828,7 +11838,7 @@
                 </a:solidFill>
                 <a:latin typeface="Inter"/>
               </a:rPr>
-              <a:t>Cloudflare tunnel opens no inbound port.</a:t>
+              <a:t>Pi dials out to Railway — no inbound port.</a:t>
             </a:r>
           </a:p>
         </p:txBody>
@@ -11956,7 +11966,7 @@
                 </a:solidFill>
                 <a:latin typeface="Inter"/>
               </a:rPr>
-              <a:t>Zynq-7000 SoC moves the same tree traversal into programmable logic, freeing the CPU for the dashboard and the BLE link.</a:t>
+              <a:t>Zynq-7000 SoC moves the same tree traversal into programmable logic, freeing the CPU for the logger and the BLE link.</a:t>
             </a:r>
           </a:p>
         </p:txBody>
@@ -12508,7 +12518,7 @@
                 </a:solidFill>
                 <a:latin typeface="Inter"/>
               </a:rPr>
-              <a:t>Flask on the Pi, live per-cell voltages.</a:t>
+              <a:t>Flask dashboard on Railway, live per-cell voltages.</a:t>
             </a:r>
           </a:p>
           <a:p>
@@ -16752,7 +16762,7 @@
                 <a:latin typeface="Inter"/>
               </a:rPr>
               <a:t>xgboost 3.2.0  ·  scikit-learn 1.9.1  ·  torch 2.14.0  ·  numpy 2.4.6
-bleak  ·  Flask  ·  PostgreSQL  ·  Cloudflare Tunnel  ·  MATLAB / Simulink</a:t>
+bleak  ·  Flask  ·  PostgreSQL  ·  Railway  ·  MATLAB / Simulink</a:t>
             </a:r>
           </a:p>
         </p:txBody>

--- a/AI_PBMS_8Slide.pptx
+++ b/AI_PBMS_8Slide.pptx
@@ -14,6 +14,7 @@
     <p:sldId id="262" r:id="rId14"/>
     <p:sldId id="263" r:id="rId15"/>
     <p:sldId id="264" r:id="rId16"/>
+    <p:sldId id="265" r:id="rId17"/>
   </p:sldIdLst>
   <p:sldSz cx="12191695" cy="6858000" type="screen4x3"/>
   <p:notesSz cx="6858000" cy="9144000"/>
@@ -565,6 +566,116 @@
 </p:notes>
 </file>
 
+<file path=ppt/notesSlides/notesSlide10.xml><?xml version="1.0" encoding="utf-8"?>
+<p:notes xmlns:a="http://schemas.openxmlformats.org/drawingml/2006/main" xmlns:p="http://schemas.openxmlformats.org/presentationml/2006/main" xmlns:r="http://schemas.openxmlformats.org/officeDocument/2006/relationships">
+  <p:cSld>
+    <p:spTree>
+      <p:nvGrpSpPr>
+        <p:cNvPr id="1" name=""/>
+        <p:cNvGrpSpPr/>
+        <p:nvPr/>
+      </p:nvGrpSpPr>
+      <p:grpSpPr>
+        <a:xfrm>
+          <a:off x="0" y="0"/>
+          <a:ext cx="0" cy="0"/>
+          <a:chOff x="0" y="0"/>
+          <a:chExt cx="0" cy="0"/>
+        </a:xfrm>
+      </p:grpSpPr>
+      <p:sp>
+        <p:nvSpPr>
+          <p:cNvPr id="2" name="Slide Image Placeholder 1"/>
+          <p:cNvSpPr>
+            <a:spLocks noGrp="1"/>
+          </p:cNvSpPr>
+          <p:nvPr>
+            <p:ph type="sldImg" idx="2"/>
+          </p:nvPr>
+        </p:nvSpPr>
+        <p:spPr/>
+      </p:sp>
+      <p:sp>
+        <p:nvSpPr>
+          <p:cNvPr id="3" name="Notes Placeholder 2"/>
+          <p:cNvSpPr>
+            <a:spLocks noGrp="1"/>
+          </p:cNvSpPr>
+          <p:nvPr>
+            <p:ph type="body" idx="3" sz="quarter"/>
+          </p:nvPr>
+        </p:nvSpPr>
+        <p:spPr/>
+        <p:txBody>
+          <a:bodyPr/>
+          <a:lstStyle/>
+          <a:p>
+            <a:r>
+              <a:t>Five papers shaped the approach. The first four are the state-of-the-art we</a:t>
+            </a:r>
+          </a:p>
+          <a:p>
+            <a:r>
+              <a:t>benchmarked our thinking against for state-of-charge and remaining-useful-life</a:t>
+            </a:r>
+          </a:p>
+          <a:p>
+            <a:r>
+              <a:t>prediction — bimodal image encoding, single-cycle charging features, multidomain</a:t>
+            </a:r>
+          </a:p>
+          <a:p>
+            <a:r>
+              <a:t>features with CatBoost, and the CNN-BiLSTM-BiGRU attention stack. The fifth,</a:t>
+            </a:r>
+          </a:p>
+          <a:p>
+            <a:r>
+              <a:t>Yang, Xu and Peng in Electronics, is where our confidence-scoring and fault</a:t>
+            </a:r>
+          </a:p>
+          <a:p>
+            <a:r>
+              <a:t>grading framework comes from — that is the source of the three-tier abstain,</a:t>
+            </a:r>
+          </a:p>
+          <a:p>
+            <a:r>
+              <a:t>warn, alert structure on slide five. On the right are the primary sources: the</a:t>
+            </a:r>
+          </a:p>
+          <a:p>
+            <a:r>
+              <a:t>manufacturer datasheets the threshold matrix is parsed from, and the JBD</a:t>
+            </a:r>
+          </a:p>
+          <a:p>
+            <a:r>
+              <a:t>protocol spec the logger was written against. Happy to take questions.</a:t>
+            </a:r>
+          </a:p>
+        </p:txBody>
+      </p:sp>
+      <p:sp>
+        <p:nvSpPr>
+          <p:cNvPr id="4" name="Slide Number Placeholder 3"/>
+          <p:cNvSpPr>
+            <a:spLocks noGrp="1"/>
+          </p:cNvSpPr>
+          <p:nvPr>
+            <p:ph type="sldNum" idx="5" sz="quarter"/>
+          </p:nvPr>
+        </p:nvSpPr>
+        <p:spPr/>
+      </p:sp>
+    </p:spTree>
+  </p:cSld>
+  <p:clrMapOvr>
+    <a:masterClrMapping/>
+  </p:clrMapOvr>
+</p:notes>
+</file>
+
 <file path=ppt/notesSlides/notesSlide2.xml><?xml version="1.0" encoding="utf-8"?>
 <p:notes xmlns:a="http://schemas.openxmlformats.org/drawingml/2006/main" xmlns:p="http://schemas.openxmlformats.org/presentationml/2006/main" xmlns:r="http://schemas.openxmlformats.org/officeDocument/2006/relationships">
   <p:cSld>
@@ -1060,42 +1171,72 @@
           <a:lstStyle/>
           <a:p>
             <a:r>
-              <a:t>Three tiers, each doing what the others cannot. The BMS senses, the Pi 5 runs</a:t>
-            </a:r>
-          </a:p>
-          <a:p>
-            <a:r>
-              <a:t>the logger and the inference, and an Arduino on its own power</a:t>
-            </a:r>
-          </a:p>
-          <a:p>
-            <a:r>
-              <a:t>rail watches for a heartbeat — if it stops, it pulls the Pi's RUN pin and forces</a:t>
-            </a:r>
-          </a:p>
-          <a:p>
-            <a:r>
-              <a:t>a reset. Inference sits at the edge deliberately: push it to a server and every</a:t>
-            </a:r>
-          </a:p>
-          <a:p>
-            <a:r>
-              <a:t>network hiccup becomes an unmonitored window. The lower diagram is the whole</a:t>
-            </a:r>
-          </a:p>
-          <a:p>
-            <a:r>
-              <a:t>data path. Inference happens on the Pi; the dashboard is a Flask service</a:t>
-            </a:r>
-          </a:p>
-          <a:p>
-            <a:r>
-              <a:t>deployed on Railway, and the Pi pushes results up to it. Because the Pi only ever</a:t>
-            </a:r>
-          </a:p>
-          <a:p>
-            <a:r>
-              <a:t>dials out, we never open an inbound port on the pack itself.</a:t>
+              <a:t>This is the whole fault path on one slide. Five stages. Acquisition: the BMS</a:t>
+            </a:r>
+          </a:p>
+          <a:p>
+            <a:r>
+              <a:t>senses, BLE carries it at one hertz, and we reject any row that is NaN or all</a:t>
+            </a:r>
+          </a:p>
+          <a:p>
+            <a:r>
+              <a:t>zeros before it reaches the model. Context: we resolve the operating mode first,</a:t>
+            </a:r>
+          </a:p>
+          <a:p>
+            <a:r>
+              <a:t>because a voltage sag under acceleration is normal and the same sag at idle is a</a:t>
+            </a:r>
+          </a:p>
+          <a:p>
+            <a:r>
+              <a:t>fault — the mode flags are twelve percent of the model's gain. Detection: the</a:t>
+            </a:r>
+          </a:p>
+          <a:p>
+            <a:r>
+              <a:t>IsolationForest gate runs before the classifier, so an unfamiliar window is</a:t>
+            </a:r>
+          </a:p>
+          <a:p>
+            <a:r>
+              <a:t>escalated rather than forced into one of six labels. Risk: the class probability</a:t>
+            </a:r>
+          </a:p>
+          <a:p>
+            <a:r>
+              <a:t>is multiplied by a physical severity derived from how far past the datasheet</a:t>
+            </a:r>
+          </a:p>
+          <a:p>
+            <a:r>
+              <a:t>warning limit we are, raised further if the fault persists. Action: corrective</a:t>
+            </a:r>
+          </a:p>
+          <a:p>
+            <a:r>
+              <a:t>instruction, logged alert, and comparison against the cycle history. And</a:t>
+            </a:r>
+          </a:p>
+          <a:p>
+            <a:r>
+              <a:t>underneath all of it, the lane that does not depend on any of this — the JBD</a:t>
+            </a:r>
+          </a:p>
+          <a:p>
+            <a:r>
+              <a:t>protection logic switching the MOSFETs at the pack, and the Arduino watchdog that</a:t>
+            </a:r>
+          </a:p>
+          <a:p>
+            <a:r>
+              <a:t>resets the Pi. If every line of our software failed, that lane still opens the</a:t>
+            </a:r>
+          </a:p>
+          <a:p>
+            <a:r>
+              <a:t>contactor.</a:t>
             </a:r>
           </a:p>
         </p:txBody>
@@ -1165,47 +1306,42 @@
           <a:lstStyle/>
           <a:p>
             <a:r>
-              <a:t>The Pi runs the classifier locally and pushes results to a Flask</a:t>
-            </a:r>
-          </a:p>
-          <a:p>
-            <a:r>
-              <a:t>dashboard deployed on Railway, which is what you open in a browser. It is</a:t>
-            </a:r>
-          </a:p>
-          <a:p>
-            <a:r>
-              <a:t>operator-facing: live per-cell voltages, pack current with direction, four</a:t>
-            </a:r>
-          </a:p>
-          <a:p>
-            <a:r>
-              <a:t>thermal zones, and an ETA smoothed with an EMA so it does not jitter. The piece</a:t>
-            </a:r>
-          </a:p>
-          <a:p>
-            <a:r>
-              <a:t>worth calling out is driving context — four modes derived from the change in</a:t>
-            </a:r>
-          </a:p>
-          <a:p>
-            <a:r>
-              <a:t>current magnitude, because a voltage sag under hard acceleration is normal and</a:t>
-            </a:r>
-          </a:p>
-          <a:p>
-            <a:r>
-              <a:t>the same sag at idle is a fault. And the cycle engine compares each live cycle</a:t>
-            </a:r>
-          </a:p>
-          <a:p>
-            <a:r>
-              <a:t>against the average of all thirty-nine before it, so degradation shows up before</a:t>
-            </a:r>
-          </a:p>
-          <a:p>
-            <a:r>
-              <a:t>any absolute threshold is breached.</a:t>
+              <a:t>Three tiers, each doing what the others cannot. The BMS senses, the Pi 5 runs</a:t>
+            </a:r>
+          </a:p>
+          <a:p>
+            <a:r>
+              <a:t>the logger and the inference, and an Arduino on its own power</a:t>
+            </a:r>
+          </a:p>
+          <a:p>
+            <a:r>
+              <a:t>rail watches for a heartbeat — if it stops, it pulls the Pi's RUN pin and forces</a:t>
+            </a:r>
+          </a:p>
+          <a:p>
+            <a:r>
+              <a:t>a reset. Inference sits at the edge deliberately: push it to a server and every</a:t>
+            </a:r>
+          </a:p>
+          <a:p>
+            <a:r>
+              <a:t>network hiccup becomes an unmonitored window. The lower diagram is the whole</a:t>
+            </a:r>
+          </a:p>
+          <a:p>
+            <a:r>
+              <a:t>data path. Inference happens on the Pi; the dashboard is a Flask service</a:t>
+            </a:r>
+          </a:p>
+          <a:p>
+            <a:r>
+              <a:t>deployed on Railway, and the Pi pushes results up to it. Because the Pi only ever</a:t>
+            </a:r>
+          </a:p>
+          <a:p>
+            <a:r>
+              <a:t>dials out, we never open an inbound port on the pack itself.</a:t>
             </a:r>
           </a:p>
         </p:txBody>
@@ -1275,42 +1411,47 @@
           <a:lstStyle/>
           <a:p>
             <a:r>
-              <a:t>The last piece is what makes this reusable. Upload the manufacturer datasheet,</a:t>
-            </a:r>
-          </a:p>
-          <a:p>
-            <a:r>
-              <a:t>the parser pulls chemistry and every limit, pack sizing derives the series and</a:t>
-            </a:r>
-          </a:p>
-          <a:p>
-            <a:r>
-              <a:t>parallel counts, and the chemistry gets tiered: NMC is direct reuse, NCA and LCO</a:t>
-            </a:r>
-          </a:p>
-          <a:p>
-            <a:r>
-              <a:t>share the ceiling so they only shift, LFP needs a genuine remap to 2.50 to 3.65</a:t>
-            </a:r>
-          </a:p>
-          <a:p>
-            <a:r>
-              <a:t>volts because of that flat OCV curve, and LTO needs everything rescaled. And you</a:t>
-            </a:r>
-          </a:p>
-          <a:p>
-            <a:r>
-              <a:t>can retrain on your own field telemetry from the browser. What is not finished:</a:t>
-            </a:r>
-          </a:p>
-          <a:p>
-            <a:r>
-              <a:t>imbalance recall, OOD recall, the Zynq path, a real LFP bench, and state of</a:t>
-            </a:r>
-          </a:p>
-          <a:p>
-            <a:r>
-              <a:t>health. Thank you — happy to take questions.</a:t>
+              <a:t>The Pi runs the classifier locally and pushes results to a Flask</a:t>
+            </a:r>
+          </a:p>
+          <a:p>
+            <a:r>
+              <a:t>dashboard deployed on Railway, which is what you open in a browser. It is</a:t>
+            </a:r>
+          </a:p>
+          <a:p>
+            <a:r>
+              <a:t>operator-facing: live per-cell voltages, pack current with direction, four</a:t>
+            </a:r>
+          </a:p>
+          <a:p>
+            <a:r>
+              <a:t>thermal zones, and an ETA smoothed with an EMA so it does not jitter. The piece</a:t>
+            </a:r>
+          </a:p>
+          <a:p>
+            <a:r>
+              <a:t>worth calling out is driving context — four modes derived from the change in</a:t>
+            </a:r>
+          </a:p>
+          <a:p>
+            <a:r>
+              <a:t>current magnitude, because a voltage sag under hard acceleration is normal and</a:t>
+            </a:r>
+          </a:p>
+          <a:p>
+            <a:r>
+              <a:t>the same sag at idle is a fault. And the cycle engine compares each live cycle</a:t>
+            </a:r>
+          </a:p>
+          <a:p>
+            <a:r>
+              <a:t>against the average of all thirty-nine before it, so degradation shows up before</a:t>
+            </a:r>
+          </a:p>
+          <a:p>
+            <a:r>
+              <a:t>any absolute threshold is breached.</a:t>
             </a:r>
           </a:p>
         </p:txBody>
@@ -1380,47 +1521,42 @@
           <a:lstStyle/>
           <a:p>
             <a:r>
-              <a:t>Five papers shaped the approach. The first four are the state-of-the-art we</a:t>
-            </a:r>
-          </a:p>
-          <a:p>
-            <a:r>
-              <a:t>benchmarked our thinking against for state-of-charge and remaining-useful-life</a:t>
-            </a:r>
-          </a:p>
-          <a:p>
-            <a:r>
-              <a:t>prediction — bimodal image encoding, single-cycle charging features, multidomain</a:t>
-            </a:r>
-          </a:p>
-          <a:p>
-            <a:r>
-              <a:t>features with CatBoost, and the CNN-BiLSTM-BiGRU attention stack. The fifth,</a:t>
-            </a:r>
-          </a:p>
-          <a:p>
-            <a:r>
-              <a:t>Yang, Xu and Peng in Electronics, is where our confidence-scoring and fault</a:t>
-            </a:r>
-          </a:p>
-          <a:p>
-            <a:r>
-              <a:t>grading framework comes from — that is the source of the three-tier abstain,</a:t>
-            </a:r>
-          </a:p>
-          <a:p>
-            <a:r>
-              <a:t>warn, alert structure on slide five. On the right are the primary sources: the</a:t>
-            </a:r>
-          </a:p>
-          <a:p>
-            <a:r>
-              <a:t>manufacturer datasheets the threshold matrix is parsed from, and the JBD</a:t>
-            </a:r>
-          </a:p>
-          <a:p>
-            <a:r>
-              <a:t>protocol spec the logger was written against. Happy to take questions.</a:t>
+              <a:t>The last piece is what makes this reusable. Upload the manufacturer datasheet,</a:t>
+            </a:r>
+          </a:p>
+          <a:p>
+            <a:r>
+              <a:t>the parser pulls chemistry and every limit, pack sizing derives the series and</a:t>
+            </a:r>
+          </a:p>
+          <a:p>
+            <a:r>
+              <a:t>parallel counts, and the chemistry gets tiered: NMC is direct reuse, NCA and LCO</a:t>
+            </a:r>
+          </a:p>
+          <a:p>
+            <a:r>
+              <a:t>share the ceiling so they only shift, LFP needs a genuine remap to 2.50 to 3.65</a:t>
+            </a:r>
+          </a:p>
+          <a:p>
+            <a:r>
+              <a:t>volts because of that flat OCV curve, and LTO needs everything rescaled. And you</a:t>
+            </a:r>
+          </a:p>
+          <a:p>
+            <a:r>
+              <a:t>can retrain on your own field telemetry from the browser. What is not finished:</a:t>
+            </a:r>
+          </a:p>
+          <a:p>
+            <a:r>
+              <a:t>imbalance recall, OOD recall, the Zynq path, a real LFP bench, and state of</a:t>
+            </a:r>
+          </a:p>
+          <a:p>
+            <a:r>
+              <a:t>health. Thank you — happy to take questions.</a:t>
             </a:r>
           </a:p>
         </p:txBody>
@@ -5549,6 +5685,2358 @@
 </p:sld>
 </file>
 
+<file path=ppt/slides/slide10.xml><?xml version="1.0" encoding="utf-8"?>
+<p:sld xmlns:a="http://schemas.openxmlformats.org/drawingml/2006/main" xmlns:p="http://schemas.openxmlformats.org/presentationml/2006/main" xmlns:r="http://schemas.openxmlformats.org/officeDocument/2006/relationships">
+  <p:cSld>
+    <p:bg>
+      <p:bgPr>
+        <a:solidFill>
+          <a:srgbClr val="FFFFFF"/>
+        </a:solidFill>
+        <a:effectLst/>
+      </p:bgPr>
+    </p:bg>
+    <p:spTree>
+      <p:nvGrpSpPr>
+        <p:cNvPr id="1" name=""/>
+        <p:cNvGrpSpPr/>
+        <p:nvPr/>
+      </p:nvGrpSpPr>
+      <p:grpSpPr/>
+      <p:sp>
+        <p:nvSpPr>
+          <p:cNvPr id="2" name="TextBox 1"/>
+          <p:cNvSpPr txBox="1"/>
+          <p:nvPr/>
+        </p:nvSpPr>
+        <p:spPr>
+          <a:xfrm>
+            <a:off x="566928" y="365760"/>
+            <a:ext cx="11057839" cy="713232"/>
+          </a:xfrm>
+          <a:prstGeom prst="rect">
+            <a:avLst/>
+          </a:prstGeom>
+          <a:noFill/>
+        </p:spPr>
+        <p:txBody>
+          <a:bodyPr wrap="square" anchor="t" lIns="0" rIns="0" tIns="0" bIns="0">
+            <a:spAutoFit/>
+          </a:bodyPr>
+          <a:lstStyle/>
+          <a:p>
+            <a:pPr algn="l">
+              <a:lnSpc>
+                <a:spcPct val="102000"/>
+              </a:lnSpc>
+              <a:spcAft>
+                <a:spcPts val="0"/>
+              </a:spcAft>
+            </a:pPr>
+            <a:r>
+              <a:rPr sz="3300" b="1">
+                <a:solidFill>
+                  <a:srgbClr val="0F172A"/>
+                </a:solidFill>
+                <a:latin typeface="Inter"/>
+              </a:rPr>
+              <a:t>References</a:t>
+            </a:r>
+          </a:p>
+        </p:txBody>
+      </p:sp>
+      <p:sp>
+        <p:nvSpPr>
+          <p:cNvPr id="3" name="Rectangle 2"/>
+          <p:cNvSpPr/>
+          <p:nvPr/>
+        </p:nvSpPr>
+        <p:spPr>
+          <a:xfrm>
+            <a:off x="566928" y="1152144"/>
+            <a:ext cx="1965960" cy="32004"/>
+          </a:xfrm>
+          <a:prstGeom prst="rect">
+            <a:avLst/>
+          </a:prstGeom>
+          <a:solidFill>
+            <a:srgbClr val="0E7490"/>
+          </a:solidFill>
+          <a:ln>
+            <a:noFill/>
+          </a:ln>
+          <a:effectLst/>
+        </p:spPr>
+        <p:style>
+          <a:lnRef idx="1">
+            <a:schemeClr val="accent1"/>
+          </a:lnRef>
+          <a:fillRef idx="3">
+            <a:schemeClr val="accent1"/>
+          </a:fillRef>
+          <a:effectRef idx="2">
+            <a:schemeClr val="accent1"/>
+          </a:effectRef>
+          <a:fontRef idx="minor">
+            <a:schemeClr val="lt1"/>
+          </a:fontRef>
+        </p:style>
+        <p:txBody>
+          <a:bodyPr rtlCol="0" anchor="ctr"/>
+          <a:lstStyle/>
+          <a:p/>
+        </p:txBody>
+      </p:sp>
+      <p:sp>
+        <p:nvSpPr>
+          <p:cNvPr id="4" name="Rectangle 3"/>
+          <p:cNvSpPr/>
+          <p:nvPr/>
+        </p:nvSpPr>
+        <p:spPr>
+          <a:xfrm>
+            <a:off x="2532888" y="1152144"/>
+            <a:ext cx="9091879" cy="32004"/>
+          </a:xfrm>
+          <a:prstGeom prst="rect">
+            <a:avLst/>
+          </a:prstGeom>
+          <a:solidFill>
+            <a:srgbClr val="CBD5E1"/>
+          </a:solidFill>
+          <a:ln>
+            <a:noFill/>
+          </a:ln>
+          <a:effectLst/>
+        </p:spPr>
+        <p:style>
+          <a:lnRef idx="1">
+            <a:schemeClr val="accent1"/>
+          </a:lnRef>
+          <a:fillRef idx="3">
+            <a:schemeClr val="accent1"/>
+          </a:fillRef>
+          <a:effectRef idx="2">
+            <a:schemeClr val="accent1"/>
+          </a:effectRef>
+          <a:fontRef idx="minor">
+            <a:schemeClr val="lt1"/>
+          </a:fontRef>
+        </p:style>
+        <p:txBody>
+          <a:bodyPr rtlCol="0" anchor="ctr"/>
+          <a:lstStyle/>
+          <a:p/>
+        </p:txBody>
+      </p:sp>
+      <p:sp>
+        <p:nvSpPr>
+          <p:cNvPr id="5" name="TextBox 4"/>
+          <p:cNvSpPr txBox="1"/>
+          <p:nvPr/>
+        </p:nvSpPr>
+        <p:spPr>
+          <a:xfrm>
+            <a:off x="566928" y="6400800"/>
+            <a:ext cx="4572000" cy="237744"/>
+          </a:xfrm>
+          <a:prstGeom prst="rect">
+            <a:avLst/>
+          </a:prstGeom>
+          <a:noFill/>
+        </p:spPr>
+        <p:txBody>
+          <a:bodyPr wrap="square" anchor="t" lIns="0" rIns="0" tIns="0" bIns="0">
+            <a:spAutoFit/>
+          </a:bodyPr>
+          <a:lstStyle/>
+          <a:p>
+            <a:pPr algn="l">
+              <a:lnSpc>
+                <a:spcPct val="118000"/>
+              </a:lnSpc>
+              <a:spcAft>
+                <a:spcPts val="0"/>
+              </a:spcAft>
+            </a:pPr>
+            <a:r>
+              <a:rPr sz="950" b="0">
+                <a:solidFill>
+                  <a:srgbClr val="475569"/>
+                </a:solidFill>
+                <a:latin typeface="Inter"/>
+              </a:rPr>
+              <a:t>AI-PBMS  ·  Team ANS_4X</a:t>
+            </a:r>
+          </a:p>
+        </p:txBody>
+      </p:sp>
+      <p:sp>
+        <p:nvSpPr>
+          <p:cNvPr id="6" name="TextBox 5"/>
+          <p:cNvSpPr txBox="1"/>
+          <p:nvPr/>
+        </p:nvSpPr>
+        <p:spPr>
+          <a:xfrm>
+            <a:off x="10527487" y="6400800"/>
+            <a:ext cx="1097280" cy="237744"/>
+          </a:xfrm>
+          <a:prstGeom prst="rect">
+            <a:avLst/>
+          </a:prstGeom>
+          <a:noFill/>
+        </p:spPr>
+        <p:txBody>
+          <a:bodyPr wrap="square" anchor="t" lIns="0" rIns="0" tIns="0" bIns="0">
+            <a:spAutoFit/>
+          </a:bodyPr>
+          <a:lstStyle/>
+          <a:p>
+            <a:pPr algn="r">
+              <a:lnSpc>
+                <a:spcPct val="118000"/>
+              </a:lnSpc>
+              <a:spcAft>
+                <a:spcPts val="0"/>
+              </a:spcAft>
+            </a:pPr>
+            <a:r>
+              <a:rPr sz="1050" b="0">
+                <a:solidFill>
+                  <a:srgbClr val="475569"/>
+                </a:solidFill>
+                <a:latin typeface="Inter"/>
+              </a:rPr>
+              <a:t>10</a:t>
+            </a:r>
+          </a:p>
+        </p:txBody>
+      </p:sp>
+      <p:sp>
+        <p:nvSpPr>
+          <p:cNvPr id="7" name="TextBox 6"/>
+          <p:cNvSpPr txBox="1"/>
+          <p:nvPr/>
+        </p:nvSpPr>
+        <p:spPr>
+          <a:xfrm>
+            <a:off x="566928" y="1444752"/>
+            <a:ext cx="5797296" cy="219456"/>
+          </a:xfrm>
+          <a:prstGeom prst="rect">
+            <a:avLst/>
+          </a:prstGeom>
+          <a:noFill/>
+        </p:spPr>
+        <p:txBody>
+          <a:bodyPr wrap="square" anchor="t" lIns="0" rIns="0" tIns="0" bIns="0">
+            <a:spAutoFit/>
+          </a:bodyPr>
+          <a:lstStyle/>
+          <a:p>
+            <a:pPr algn="l">
+              <a:lnSpc>
+                <a:spcPct val="118000"/>
+              </a:lnSpc>
+              <a:spcAft>
+                <a:spcPts val="0"/>
+              </a:spcAft>
+            </a:pPr>
+            <a:r>
+              <a:rPr sz="950" b="1">
+                <a:solidFill>
+                  <a:srgbClr val="0E7490"/>
+                </a:solidFill>
+                <a:latin typeface="Inter"/>
+              </a:rPr>
+              <a:t>LITERATURE — SOC, RUL AND FAULT GRADING</a:t>
+            </a:r>
+          </a:p>
+        </p:txBody>
+      </p:sp>
+      <p:sp>
+        <p:nvSpPr>
+          <p:cNvPr id="8" name="Rectangle 7"/>
+          <p:cNvSpPr/>
+          <p:nvPr/>
+        </p:nvSpPr>
+        <p:spPr>
+          <a:xfrm>
+            <a:off x="566928" y="1769363"/>
+            <a:ext cx="237744" cy="237744"/>
+          </a:xfrm>
+          <a:prstGeom prst="rect">
+            <a:avLst/>
+          </a:prstGeom>
+          <a:solidFill>
+            <a:srgbClr val="F1F5F9"/>
+          </a:solidFill>
+          <a:ln w="7620">
+            <a:solidFill>
+              <a:srgbClr val="CBD5E1"/>
+            </a:solidFill>
+          </a:ln>
+          <a:effectLst/>
+        </p:spPr>
+        <p:style>
+          <a:lnRef idx="1">
+            <a:schemeClr val="accent1"/>
+          </a:lnRef>
+          <a:fillRef idx="3">
+            <a:schemeClr val="accent1"/>
+          </a:fillRef>
+          <a:effectRef idx="2">
+            <a:schemeClr val="accent1"/>
+          </a:effectRef>
+          <a:fontRef idx="minor">
+            <a:schemeClr val="lt1"/>
+          </a:fontRef>
+        </p:style>
+        <p:txBody>
+          <a:bodyPr rtlCol="0" anchor="ctr"/>
+          <a:lstStyle/>
+          <a:p/>
+        </p:txBody>
+      </p:sp>
+      <p:sp>
+        <p:nvSpPr>
+          <p:cNvPr id="9" name="TextBox 8"/>
+          <p:cNvSpPr txBox="1"/>
+          <p:nvPr/>
+        </p:nvSpPr>
+        <p:spPr>
+          <a:xfrm>
+            <a:off x="566928" y="1769363"/>
+            <a:ext cx="237744" cy="237744"/>
+          </a:xfrm>
+          <a:prstGeom prst="rect">
+            <a:avLst/>
+          </a:prstGeom>
+          <a:noFill/>
+        </p:spPr>
+        <p:txBody>
+          <a:bodyPr wrap="square" anchor="ctr" lIns="0" rIns="0" tIns="0" bIns="0">
+            <a:spAutoFit/>
+          </a:bodyPr>
+          <a:lstStyle/>
+          <a:p>
+            <a:pPr algn="ctr">
+              <a:lnSpc>
+                <a:spcPct val="118000"/>
+              </a:lnSpc>
+              <a:spcAft>
+                <a:spcPts val="0"/>
+              </a:spcAft>
+            </a:pPr>
+            <a:r>
+              <a:rPr sz="1000" b="1">
+                <a:solidFill>
+                  <a:srgbClr val="0E7490"/>
+                </a:solidFill>
+                <a:latin typeface="Inter"/>
+              </a:rPr>
+              <a:t>1</a:t>
+            </a:r>
+          </a:p>
+        </p:txBody>
+      </p:sp>
+      <p:sp>
+        <p:nvSpPr>
+          <p:cNvPr id="10" name="TextBox 9"/>
+          <p:cNvSpPr txBox="1"/>
+          <p:nvPr/>
+        </p:nvSpPr>
+        <p:spPr>
+          <a:xfrm>
+            <a:off x="932688" y="1755648"/>
+            <a:ext cx="5431536" cy="274320"/>
+          </a:xfrm>
+          <a:prstGeom prst="rect">
+            <a:avLst/>
+          </a:prstGeom>
+          <a:noFill/>
+        </p:spPr>
+        <p:txBody>
+          <a:bodyPr wrap="square" anchor="t" lIns="0" rIns="0" tIns="0" bIns="0">
+            <a:spAutoFit/>
+          </a:bodyPr>
+          <a:lstStyle/>
+          <a:p>
+            <a:pPr algn="l">
+              <a:lnSpc>
+                <a:spcPct val="122000"/>
+              </a:lnSpc>
+              <a:spcAft>
+                <a:spcPts val="0"/>
+              </a:spcAft>
+            </a:pPr>
+            <a:r>
+              <a:rPr sz="1150" b="0">
+                <a:solidFill>
+                  <a:srgbClr val="0F172A"/>
+                </a:solidFill>
+                <a:latin typeface="Inter"/>
+              </a:rPr>
+              <a:t>Bimodal images + BFRN</a:t>
+            </a:r>
+          </a:p>
+        </p:txBody>
+      </p:sp>
+      <p:sp>
+        <p:nvSpPr>
+          <p:cNvPr id="11" name="TextBox 10"/>
+          <p:cNvSpPr txBox="1"/>
+          <p:nvPr/>
+        </p:nvSpPr>
+        <p:spPr>
+          <a:xfrm>
+            <a:off x="932688" y="2011680"/>
+            <a:ext cx="5431536" cy="201168"/>
+          </a:xfrm>
+          <a:prstGeom prst="rect">
+            <a:avLst/>
+          </a:prstGeom>
+          <a:noFill/>
+        </p:spPr>
+        <p:txBody>
+          <a:bodyPr wrap="square" anchor="t" lIns="0" rIns="0" tIns="0" bIns="0">
+            <a:spAutoFit/>
+          </a:bodyPr>
+          <a:lstStyle/>
+          <a:p>
+            <a:pPr algn="l">
+              <a:lnSpc>
+                <a:spcPct val="118000"/>
+              </a:lnSpc>
+              <a:spcAft>
+                <a:spcPts val="0"/>
+              </a:spcAft>
+            </a:pPr>
+            <a:r>
+              <a:rPr sz="900" b="0">
+                <a:solidFill>
+                  <a:srgbClr val="475569"/>
+                </a:solidFill>
+                <a:latin typeface="Inter"/>
+              </a:rPr>
+              <a:t>Energy, 2024  ·  doi.org/10.1016/j.energy.2024.131700</a:t>
+            </a:r>
+          </a:p>
+        </p:txBody>
+      </p:sp>
+      <p:sp>
+        <p:nvSpPr>
+          <p:cNvPr id="12" name="Rectangle 11"/>
+          <p:cNvSpPr/>
+          <p:nvPr/>
+        </p:nvSpPr>
+        <p:spPr>
+          <a:xfrm>
+            <a:off x="566928" y="2391156"/>
+            <a:ext cx="237744" cy="237744"/>
+          </a:xfrm>
+          <a:prstGeom prst="rect">
+            <a:avLst/>
+          </a:prstGeom>
+          <a:solidFill>
+            <a:srgbClr val="F1F5F9"/>
+          </a:solidFill>
+          <a:ln w="7620">
+            <a:solidFill>
+              <a:srgbClr val="CBD5E1"/>
+            </a:solidFill>
+          </a:ln>
+          <a:effectLst/>
+        </p:spPr>
+        <p:style>
+          <a:lnRef idx="1">
+            <a:schemeClr val="accent1"/>
+          </a:lnRef>
+          <a:fillRef idx="3">
+            <a:schemeClr val="accent1"/>
+          </a:fillRef>
+          <a:effectRef idx="2">
+            <a:schemeClr val="accent1"/>
+          </a:effectRef>
+          <a:fontRef idx="minor">
+            <a:schemeClr val="lt1"/>
+          </a:fontRef>
+        </p:style>
+        <p:txBody>
+          <a:bodyPr rtlCol="0" anchor="ctr"/>
+          <a:lstStyle/>
+          <a:p/>
+        </p:txBody>
+      </p:sp>
+      <p:sp>
+        <p:nvSpPr>
+          <p:cNvPr id="13" name="TextBox 12"/>
+          <p:cNvSpPr txBox="1"/>
+          <p:nvPr/>
+        </p:nvSpPr>
+        <p:spPr>
+          <a:xfrm>
+            <a:off x="566928" y="2391156"/>
+            <a:ext cx="237744" cy="237744"/>
+          </a:xfrm>
+          <a:prstGeom prst="rect">
+            <a:avLst/>
+          </a:prstGeom>
+          <a:noFill/>
+        </p:spPr>
+        <p:txBody>
+          <a:bodyPr wrap="square" anchor="ctr" lIns="0" rIns="0" tIns="0" bIns="0">
+            <a:spAutoFit/>
+          </a:bodyPr>
+          <a:lstStyle/>
+          <a:p>
+            <a:pPr algn="ctr">
+              <a:lnSpc>
+                <a:spcPct val="118000"/>
+              </a:lnSpc>
+              <a:spcAft>
+                <a:spcPts val="0"/>
+              </a:spcAft>
+            </a:pPr>
+            <a:r>
+              <a:rPr sz="1000" b="1">
+                <a:solidFill>
+                  <a:srgbClr val="0E7490"/>
+                </a:solidFill>
+                <a:latin typeface="Inter"/>
+              </a:rPr>
+              <a:t>2</a:t>
+            </a:r>
+          </a:p>
+        </p:txBody>
+      </p:sp>
+      <p:sp>
+        <p:nvSpPr>
+          <p:cNvPr id="14" name="TextBox 13"/>
+          <p:cNvSpPr txBox="1"/>
+          <p:nvPr/>
+        </p:nvSpPr>
+        <p:spPr>
+          <a:xfrm>
+            <a:off x="932688" y="2377439"/>
+            <a:ext cx="5431536" cy="274320"/>
+          </a:xfrm>
+          <a:prstGeom prst="rect">
+            <a:avLst/>
+          </a:prstGeom>
+          <a:noFill/>
+        </p:spPr>
+        <p:txBody>
+          <a:bodyPr wrap="square" anchor="t" lIns="0" rIns="0" tIns="0" bIns="0">
+            <a:spAutoFit/>
+          </a:bodyPr>
+          <a:lstStyle/>
+          <a:p>
+            <a:pPr algn="l">
+              <a:lnSpc>
+                <a:spcPct val="122000"/>
+              </a:lnSpc>
+              <a:spcAft>
+                <a:spcPts val="0"/>
+              </a:spcAft>
+            </a:pPr>
+            <a:r>
+              <a:rPr sz="1150" b="0">
+                <a:solidFill>
+                  <a:srgbClr val="0F172A"/>
+                </a:solidFill>
+                <a:latin typeface="Inter"/>
+              </a:rPr>
+              <a:t>Single-cycle charging</a:t>
+            </a:r>
+          </a:p>
+        </p:txBody>
+      </p:sp>
+      <p:sp>
+        <p:nvSpPr>
+          <p:cNvPr id="15" name="TextBox 14"/>
+          <p:cNvSpPr txBox="1"/>
+          <p:nvPr/>
+        </p:nvSpPr>
+        <p:spPr>
+          <a:xfrm>
+            <a:off x="932688" y="2633472"/>
+            <a:ext cx="5431536" cy="201168"/>
+          </a:xfrm>
+          <a:prstGeom prst="rect">
+            <a:avLst/>
+          </a:prstGeom>
+          <a:noFill/>
+        </p:spPr>
+        <p:txBody>
+          <a:bodyPr wrap="square" anchor="t" lIns="0" rIns="0" tIns="0" bIns="0">
+            <a:spAutoFit/>
+          </a:bodyPr>
+          <a:lstStyle/>
+          <a:p>
+            <a:pPr algn="l">
+              <a:lnSpc>
+                <a:spcPct val="118000"/>
+              </a:lnSpc>
+              <a:spcAft>
+                <a:spcPts val="0"/>
+              </a:spcAft>
+            </a:pPr>
+            <a:r>
+              <a:rPr sz="900" b="0">
+                <a:solidFill>
+                  <a:srgbClr val="475569"/>
+                </a:solidFill>
+                <a:latin typeface="Inter"/>
+              </a:rPr>
+              <a:t>Energy, 2025  ·  doi.org/10.1016/j.energy.2025.138351</a:t>
+            </a:r>
+          </a:p>
+        </p:txBody>
+      </p:sp>
+      <p:sp>
+        <p:nvSpPr>
+          <p:cNvPr id="16" name="Rectangle 15"/>
+          <p:cNvSpPr/>
+          <p:nvPr/>
+        </p:nvSpPr>
+        <p:spPr>
+          <a:xfrm>
+            <a:off x="566928" y="3012947"/>
+            <a:ext cx="237744" cy="237744"/>
+          </a:xfrm>
+          <a:prstGeom prst="rect">
+            <a:avLst/>
+          </a:prstGeom>
+          <a:solidFill>
+            <a:srgbClr val="F1F5F9"/>
+          </a:solidFill>
+          <a:ln w="7620">
+            <a:solidFill>
+              <a:srgbClr val="CBD5E1"/>
+            </a:solidFill>
+          </a:ln>
+          <a:effectLst/>
+        </p:spPr>
+        <p:style>
+          <a:lnRef idx="1">
+            <a:schemeClr val="accent1"/>
+          </a:lnRef>
+          <a:fillRef idx="3">
+            <a:schemeClr val="accent1"/>
+          </a:fillRef>
+          <a:effectRef idx="2">
+            <a:schemeClr val="accent1"/>
+          </a:effectRef>
+          <a:fontRef idx="minor">
+            <a:schemeClr val="lt1"/>
+          </a:fontRef>
+        </p:style>
+        <p:txBody>
+          <a:bodyPr rtlCol="0" anchor="ctr"/>
+          <a:lstStyle/>
+          <a:p/>
+        </p:txBody>
+      </p:sp>
+      <p:sp>
+        <p:nvSpPr>
+          <p:cNvPr id="17" name="TextBox 16"/>
+          <p:cNvSpPr txBox="1"/>
+          <p:nvPr/>
+        </p:nvSpPr>
+        <p:spPr>
+          <a:xfrm>
+            <a:off x="566928" y="3012947"/>
+            <a:ext cx="237744" cy="237744"/>
+          </a:xfrm>
+          <a:prstGeom prst="rect">
+            <a:avLst/>
+          </a:prstGeom>
+          <a:noFill/>
+        </p:spPr>
+        <p:txBody>
+          <a:bodyPr wrap="square" anchor="ctr" lIns="0" rIns="0" tIns="0" bIns="0">
+            <a:spAutoFit/>
+          </a:bodyPr>
+          <a:lstStyle/>
+          <a:p>
+            <a:pPr algn="ctr">
+              <a:lnSpc>
+                <a:spcPct val="118000"/>
+              </a:lnSpc>
+              <a:spcAft>
+                <a:spcPts val="0"/>
+              </a:spcAft>
+            </a:pPr>
+            <a:r>
+              <a:rPr sz="1000" b="1">
+                <a:solidFill>
+                  <a:srgbClr val="0E7490"/>
+                </a:solidFill>
+                <a:latin typeface="Inter"/>
+              </a:rPr>
+              <a:t>3</a:t>
+            </a:r>
+          </a:p>
+        </p:txBody>
+      </p:sp>
+      <p:sp>
+        <p:nvSpPr>
+          <p:cNvPr id="18" name="TextBox 17"/>
+          <p:cNvSpPr txBox="1"/>
+          <p:nvPr/>
+        </p:nvSpPr>
+        <p:spPr>
+          <a:xfrm>
+            <a:off x="932688" y="2999231"/>
+            <a:ext cx="5431536" cy="274320"/>
+          </a:xfrm>
+          <a:prstGeom prst="rect">
+            <a:avLst/>
+          </a:prstGeom>
+          <a:noFill/>
+        </p:spPr>
+        <p:txBody>
+          <a:bodyPr wrap="square" anchor="t" lIns="0" rIns="0" tIns="0" bIns="0">
+            <a:spAutoFit/>
+          </a:bodyPr>
+          <a:lstStyle/>
+          <a:p>
+            <a:pPr algn="l">
+              <a:lnSpc>
+                <a:spcPct val="122000"/>
+              </a:lnSpc>
+              <a:spcAft>
+                <a:spcPts val="0"/>
+              </a:spcAft>
+            </a:pPr>
+            <a:r>
+              <a:rPr sz="1150" b="0">
+                <a:solidFill>
+                  <a:srgbClr val="0F172A"/>
+                </a:solidFill>
+                <a:latin typeface="Inter"/>
+              </a:rPr>
+              <a:t>Multidomain features + CatBoost</a:t>
+            </a:r>
+          </a:p>
+        </p:txBody>
+      </p:sp>
+      <p:sp>
+        <p:nvSpPr>
+          <p:cNvPr id="19" name="TextBox 18"/>
+          <p:cNvSpPr txBox="1"/>
+          <p:nvPr/>
+        </p:nvSpPr>
+        <p:spPr>
+          <a:xfrm>
+            <a:off x="932688" y="3255263"/>
+            <a:ext cx="5431536" cy="201168"/>
+          </a:xfrm>
+          <a:prstGeom prst="rect">
+            <a:avLst/>
+          </a:prstGeom>
+          <a:noFill/>
+        </p:spPr>
+        <p:txBody>
+          <a:bodyPr wrap="square" anchor="t" lIns="0" rIns="0" tIns="0" bIns="0">
+            <a:spAutoFit/>
+          </a:bodyPr>
+          <a:lstStyle/>
+          <a:p>
+            <a:pPr algn="l">
+              <a:lnSpc>
+                <a:spcPct val="118000"/>
+              </a:lnSpc>
+              <a:spcAft>
+                <a:spcPts val="0"/>
+              </a:spcAft>
+            </a:pPr>
+            <a:r>
+              <a:rPr sz="900" b="0">
+                <a:solidFill>
+                  <a:srgbClr val="475569"/>
+                </a:solidFill>
+                <a:latin typeface="Inter"/>
+              </a:rPr>
+              <a:t>Energy Science &amp; Engineering, 2023  ·  doi.org/10.1002/ese3.1506</a:t>
+            </a:r>
+          </a:p>
+        </p:txBody>
+      </p:sp>
+      <p:sp>
+        <p:nvSpPr>
+          <p:cNvPr id="20" name="Rectangle 19"/>
+          <p:cNvSpPr/>
+          <p:nvPr/>
+        </p:nvSpPr>
+        <p:spPr>
+          <a:xfrm>
+            <a:off x="566928" y="3634739"/>
+            <a:ext cx="237744" cy="237744"/>
+          </a:xfrm>
+          <a:prstGeom prst="rect">
+            <a:avLst/>
+          </a:prstGeom>
+          <a:solidFill>
+            <a:srgbClr val="F1F5F9"/>
+          </a:solidFill>
+          <a:ln w="7620">
+            <a:solidFill>
+              <a:srgbClr val="CBD5E1"/>
+            </a:solidFill>
+          </a:ln>
+          <a:effectLst/>
+        </p:spPr>
+        <p:style>
+          <a:lnRef idx="1">
+            <a:schemeClr val="accent1"/>
+          </a:lnRef>
+          <a:fillRef idx="3">
+            <a:schemeClr val="accent1"/>
+          </a:fillRef>
+          <a:effectRef idx="2">
+            <a:schemeClr val="accent1"/>
+          </a:effectRef>
+          <a:fontRef idx="minor">
+            <a:schemeClr val="lt1"/>
+          </a:fontRef>
+        </p:style>
+        <p:txBody>
+          <a:bodyPr rtlCol="0" anchor="ctr"/>
+          <a:lstStyle/>
+          <a:p/>
+        </p:txBody>
+      </p:sp>
+      <p:sp>
+        <p:nvSpPr>
+          <p:cNvPr id="21" name="TextBox 20"/>
+          <p:cNvSpPr txBox="1"/>
+          <p:nvPr/>
+        </p:nvSpPr>
+        <p:spPr>
+          <a:xfrm>
+            <a:off x="566928" y="3634739"/>
+            <a:ext cx="237744" cy="237744"/>
+          </a:xfrm>
+          <a:prstGeom prst="rect">
+            <a:avLst/>
+          </a:prstGeom>
+          <a:noFill/>
+        </p:spPr>
+        <p:txBody>
+          <a:bodyPr wrap="square" anchor="ctr" lIns="0" rIns="0" tIns="0" bIns="0">
+            <a:spAutoFit/>
+          </a:bodyPr>
+          <a:lstStyle/>
+          <a:p>
+            <a:pPr algn="ctr">
+              <a:lnSpc>
+                <a:spcPct val="118000"/>
+              </a:lnSpc>
+              <a:spcAft>
+                <a:spcPts val="0"/>
+              </a:spcAft>
+            </a:pPr>
+            <a:r>
+              <a:rPr sz="1000" b="1">
+                <a:solidFill>
+                  <a:srgbClr val="0E7490"/>
+                </a:solidFill>
+                <a:latin typeface="Inter"/>
+              </a:rPr>
+              <a:t>4</a:t>
+            </a:r>
+          </a:p>
+        </p:txBody>
+      </p:sp>
+      <p:sp>
+        <p:nvSpPr>
+          <p:cNvPr id="22" name="TextBox 21"/>
+          <p:cNvSpPr txBox="1"/>
+          <p:nvPr/>
+        </p:nvSpPr>
+        <p:spPr>
+          <a:xfrm>
+            <a:off x="932688" y="3621023"/>
+            <a:ext cx="5431536" cy="274320"/>
+          </a:xfrm>
+          <a:prstGeom prst="rect">
+            <a:avLst/>
+          </a:prstGeom>
+          <a:noFill/>
+        </p:spPr>
+        <p:txBody>
+          <a:bodyPr wrap="square" anchor="t" lIns="0" rIns="0" tIns="0" bIns="0">
+            <a:spAutoFit/>
+          </a:bodyPr>
+          <a:lstStyle/>
+          <a:p>
+            <a:pPr algn="l">
+              <a:lnSpc>
+                <a:spcPct val="122000"/>
+              </a:lnSpc>
+              <a:spcAft>
+                <a:spcPts val="0"/>
+              </a:spcAft>
+            </a:pPr>
+            <a:r>
+              <a:rPr sz="1150" b="0">
+                <a:solidFill>
+                  <a:srgbClr val="0F172A"/>
+                </a:solidFill>
+                <a:latin typeface="Inter"/>
+              </a:rPr>
+              <a:t>CNN-BiLSTM-BiGRU with attention</a:t>
+            </a:r>
+          </a:p>
+        </p:txBody>
+      </p:sp>
+      <p:sp>
+        <p:nvSpPr>
+          <p:cNvPr id="23" name="TextBox 22"/>
+          <p:cNvSpPr txBox="1"/>
+          <p:nvPr/>
+        </p:nvSpPr>
+        <p:spPr>
+          <a:xfrm>
+            <a:off x="932688" y="3877055"/>
+            <a:ext cx="5431536" cy="201168"/>
+          </a:xfrm>
+          <a:prstGeom prst="rect">
+            <a:avLst/>
+          </a:prstGeom>
+          <a:noFill/>
+        </p:spPr>
+        <p:txBody>
+          <a:bodyPr wrap="square" anchor="t" lIns="0" rIns="0" tIns="0" bIns="0">
+            <a:spAutoFit/>
+          </a:bodyPr>
+          <a:lstStyle/>
+          <a:p>
+            <a:pPr algn="l">
+              <a:lnSpc>
+                <a:spcPct val="118000"/>
+              </a:lnSpc>
+              <a:spcAft>
+                <a:spcPts val="0"/>
+              </a:spcAft>
+            </a:pPr>
+            <a:r>
+              <a:rPr sz="900" b="0">
+                <a:solidFill>
+                  <a:srgbClr val="475569"/>
+                </a:solidFill>
+                <a:latin typeface="Inter"/>
+              </a:rPr>
+              <a:t>Journal of Energy Storage, 2024  ·  doi.org/10.1016/j.est.2024.113074</a:t>
+            </a:r>
+          </a:p>
+        </p:txBody>
+      </p:sp>
+      <p:sp>
+        <p:nvSpPr>
+          <p:cNvPr id="24" name="Rectangle 23"/>
+          <p:cNvSpPr/>
+          <p:nvPr/>
+        </p:nvSpPr>
+        <p:spPr>
+          <a:xfrm>
+            <a:off x="566928" y="4256531"/>
+            <a:ext cx="237744" cy="237744"/>
+          </a:xfrm>
+          <a:prstGeom prst="rect">
+            <a:avLst/>
+          </a:prstGeom>
+          <a:solidFill>
+            <a:srgbClr val="F1F5F9"/>
+          </a:solidFill>
+          <a:ln w="7620">
+            <a:solidFill>
+              <a:srgbClr val="CBD5E1"/>
+            </a:solidFill>
+          </a:ln>
+          <a:effectLst/>
+        </p:spPr>
+        <p:style>
+          <a:lnRef idx="1">
+            <a:schemeClr val="accent1"/>
+          </a:lnRef>
+          <a:fillRef idx="3">
+            <a:schemeClr val="accent1"/>
+          </a:fillRef>
+          <a:effectRef idx="2">
+            <a:schemeClr val="accent1"/>
+          </a:effectRef>
+          <a:fontRef idx="minor">
+            <a:schemeClr val="lt1"/>
+          </a:fontRef>
+        </p:style>
+        <p:txBody>
+          <a:bodyPr rtlCol="0" anchor="ctr"/>
+          <a:lstStyle/>
+          <a:p/>
+        </p:txBody>
+      </p:sp>
+      <p:sp>
+        <p:nvSpPr>
+          <p:cNvPr id="25" name="TextBox 24"/>
+          <p:cNvSpPr txBox="1"/>
+          <p:nvPr/>
+        </p:nvSpPr>
+        <p:spPr>
+          <a:xfrm>
+            <a:off x="566928" y="4256531"/>
+            <a:ext cx="237744" cy="237744"/>
+          </a:xfrm>
+          <a:prstGeom prst="rect">
+            <a:avLst/>
+          </a:prstGeom>
+          <a:noFill/>
+        </p:spPr>
+        <p:txBody>
+          <a:bodyPr wrap="square" anchor="ctr" lIns="0" rIns="0" tIns="0" bIns="0">
+            <a:spAutoFit/>
+          </a:bodyPr>
+          <a:lstStyle/>
+          <a:p>
+            <a:pPr algn="ctr">
+              <a:lnSpc>
+                <a:spcPct val="118000"/>
+              </a:lnSpc>
+              <a:spcAft>
+                <a:spcPts val="0"/>
+              </a:spcAft>
+            </a:pPr>
+            <a:r>
+              <a:rPr sz="1000" b="1">
+                <a:solidFill>
+                  <a:srgbClr val="0E7490"/>
+                </a:solidFill>
+                <a:latin typeface="Inter"/>
+              </a:rPr>
+              <a:t>5</a:t>
+            </a:r>
+          </a:p>
+        </p:txBody>
+      </p:sp>
+      <p:sp>
+        <p:nvSpPr>
+          <p:cNvPr id="26" name="TextBox 25"/>
+          <p:cNvSpPr txBox="1"/>
+          <p:nvPr/>
+        </p:nvSpPr>
+        <p:spPr>
+          <a:xfrm>
+            <a:off x="932688" y="4242815"/>
+            <a:ext cx="5431536" cy="493776"/>
+          </a:xfrm>
+          <a:prstGeom prst="rect">
+            <a:avLst/>
+          </a:prstGeom>
+          <a:noFill/>
+        </p:spPr>
+        <p:txBody>
+          <a:bodyPr wrap="square" anchor="t" lIns="0" rIns="0" tIns="0" bIns="0">
+            <a:spAutoFit/>
+          </a:bodyPr>
+          <a:lstStyle/>
+          <a:p>
+            <a:pPr algn="l">
+              <a:lnSpc>
+                <a:spcPct val="122000"/>
+              </a:lnSpc>
+              <a:spcAft>
+                <a:spcPts val="0"/>
+              </a:spcAft>
+            </a:pPr>
+            <a:r>
+              <a:rPr sz="1150" b="0">
+                <a:solidFill>
+                  <a:srgbClr val="0F172A"/>
+                </a:solidFill>
+                <a:latin typeface="Inter"/>
+              </a:rPr>
+              <a:t>Yang, S., Xu, B., Peng, H. — “Isolation and Grading of Faults in
+Battery Packs Based on Machine Learning Methods”</a:t>
+            </a:r>
+          </a:p>
+        </p:txBody>
+      </p:sp>
+      <p:sp>
+        <p:nvSpPr>
+          <p:cNvPr id="27" name="TextBox 26"/>
+          <p:cNvSpPr txBox="1"/>
+          <p:nvPr/>
+        </p:nvSpPr>
+        <p:spPr>
+          <a:xfrm>
+            <a:off x="932688" y="4718303"/>
+            <a:ext cx="5431536" cy="201168"/>
+          </a:xfrm>
+          <a:prstGeom prst="rect">
+            <a:avLst/>
+          </a:prstGeom>
+          <a:noFill/>
+        </p:spPr>
+        <p:txBody>
+          <a:bodyPr wrap="square" anchor="t" lIns="0" rIns="0" tIns="0" bIns="0">
+            <a:spAutoFit/>
+          </a:bodyPr>
+          <a:lstStyle/>
+          <a:p>
+            <a:pPr algn="l">
+              <a:lnSpc>
+                <a:spcPct val="118000"/>
+              </a:lnSpc>
+              <a:spcAft>
+                <a:spcPts val="0"/>
+              </a:spcAft>
+            </a:pPr>
+            <a:r>
+              <a:rPr sz="900" b="0">
+                <a:solidFill>
+                  <a:srgbClr val="475569"/>
+                </a:solidFill>
+                <a:latin typeface="Inter"/>
+              </a:rPr>
+              <a:t>Electronics, 11(9), 1494, 2022  ·  mdpi.com/2079-9292/11/9/1494</a:t>
+            </a:r>
+          </a:p>
+        </p:txBody>
+      </p:sp>
+      <p:sp>
+        <p:nvSpPr>
+          <p:cNvPr id="28" name="Rectangle 27"/>
+          <p:cNvSpPr/>
+          <p:nvPr/>
+        </p:nvSpPr>
+        <p:spPr>
+          <a:xfrm>
+            <a:off x="6693408" y="1444752"/>
+            <a:ext cx="4931359" cy="2139696"/>
+          </a:xfrm>
+          <a:prstGeom prst="rect">
+            <a:avLst/>
+          </a:prstGeom>
+          <a:solidFill>
+            <a:srgbClr val="F1F5F9"/>
+          </a:solidFill>
+          <a:ln w="9525">
+            <a:solidFill>
+              <a:srgbClr val="CBD5E1"/>
+            </a:solidFill>
+          </a:ln>
+          <a:effectLst/>
+        </p:spPr>
+        <p:style>
+          <a:lnRef idx="1">
+            <a:schemeClr val="accent1"/>
+          </a:lnRef>
+          <a:fillRef idx="3">
+            <a:schemeClr val="accent1"/>
+          </a:fillRef>
+          <a:effectRef idx="2">
+            <a:schemeClr val="accent1"/>
+          </a:effectRef>
+          <a:fontRef idx="minor">
+            <a:schemeClr val="lt1"/>
+          </a:fontRef>
+        </p:style>
+        <p:txBody>
+          <a:bodyPr rtlCol="0" anchor="ctr"/>
+          <a:lstStyle/>
+          <a:p/>
+        </p:txBody>
+      </p:sp>
+      <p:sp>
+        <p:nvSpPr>
+          <p:cNvPr id="29" name="TextBox 28"/>
+          <p:cNvSpPr txBox="1"/>
+          <p:nvPr/>
+        </p:nvSpPr>
+        <p:spPr>
+          <a:xfrm>
+            <a:off x="6894576" y="1572768"/>
+            <a:ext cx="4529023" cy="219456"/>
+          </a:xfrm>
+          <a:prstGeom prst="rect">
+            <a:avLst/>
+          </a:prstGeom>
+          <a:noFill/>
+        </p:spPr>
+        <p:txBody>
+          <a:bodyPr wrap="square" anchor="t" lIns="0" rIns="0" tIns="0" bIns="0">
+            <a:spAutoFit/>
+          </a:bodyPr>
+          <a:lstStyle/>
+          <a:p>
+            <a:pPr algn="l">
+              <a:lnSpc>
+                <a:spcPct val="118000"/>
+              </a:lnSpc>
+              <a:spcAft>
+                <a:spcPts val="0"/>
+              </a:spcAft>
+            </a:pPr>
+            <a:r>
+              <a:rPr sz="950" b="1">
+                <a:solidFill>
+                  <a:srgbClr val="0E7490"/>
+                </a:solidFill>
+                <a:latin typeface="Inter"/>
+              </a:rPr>
+              <a:t>PRIMARY SOURCES — MANUFACTURER DATASHEETS</a:t>
+            </a:r>
+          </a:p>
+        </p:txBody>
+      </p:sp>
+      <p:sp>
+        <p:nvSpPr>
+          <p:cNvPr id="30" name="Oval 29"/>
+          <p:cNvSpPr/>
+          <p:nvPr/>
+        </p:nvSpPr>
+        <p:spPr>
+          <a:xfrm>
+            <a:off x="6912864" y="1947672"/>
+            <a:ext cx="82296" cy="82296"/>
+          </a:xfrm>
+          <a:prstGeom prst="ellipse">
+            <a:avLst/>
+          </a:prstGeom>
+          <a:solidFill>
+            <a:srgbClr val="0E7490"/>
+          </a:solidFill>
+          <a:ln>
+            <a:noFill/>
+          </a:ln>
+          <a:effectLst/>
+        </p:spPr>
+        <p:style>
+          <a:lnRef idx="1">
+            <a:schemeClr val="accent1"/>
+          </a:lnRef>
+          <a:fillRef idx="3">
+            <a:schemeClr val="accent1"/>
+          </a:fillRef>
+          <a:effectRef idx="2">
+            <a:schemeClr val="accent1"/>
+          </a:effectRef>
+          <a:fontRef idx="minor">
+            <a:schemeClr val="lt1"/>
+          </a:fontRef>
+        </p:style>
+        <p:txBody>
+          <a:bodyPr rtlCol="0" anchor="ctr"/>
+          <a:lstStyle/>
+          <a:p/>
+        </p:txBody>
+      </p:sp>
+      <p:sp>
+        <p:nvSpPr>
+          <p:cNvPr id="31" name="TextBox 30"/>
+          <p:cNvSpPr txBox="1"/>
+          <p:nvPr/>
+        </p:nvSpPr>
+        <p:spPr>
+          <a:xfrm>
+            <a:off x="7114032" y="1865376"/>
+            <a:ext cx="2788920" cy="237744"/>
+          </a:xfrm>
+          <a:prstGeom prst="rect">
+            <a:avLst/>
+          </a:prstGeom>
+          <a:noFill/>
+        </p:spPr>
+        <p:txBody>
+          <a:bodyPr wrap="square" anchor="t" lIns="0" rIns="0" tIns="0" bIns="0">
+            <a:spAutoFit/>
+          </a:bodyPr>
+          <a:lstStyle/>
+          <a:p>
+            <a:pPr algn="l">
+              <a:lnSpc>
+                <a:spcPct val="118000"/>
+              </a:lnSpc>
+              <a:spcAft>
+                <a:spcPts val="0"/>
+              </a:spcAft>
+            </a:pPr>
+            <a:r>
+              <a:rPr sz="1050" b="0">
+                <a:solidFill>
+                  <a:srgbClr val="0F172A"/>
+                </a:solidFill>
+                <a:latin typeface="Inter"/>
+              </a:rPr>
+              <a:t>LG Energy Solution INR21700-M50</a:t>
+            </a:r>
+          </a:p>
+        </p:txBody>
+      </p:sp>
+      <p:sp>
+        <p:nvSpPr>
+          <p:cNvPr id="32" name="TextBox 31"/>
+          <p:cNvSpPr txBox="1"/>
+          <p:nvPr/>
+        </p:nvSpPr>
+        <p:spPr>
+          <a:xfrm>
+            <a:off x="9893808" y="1874519"/>
+            <a:ext cx="1529791" cy="219456"/>
+          </a:xfrm>
+          <a:prstGeom prst="rect">
+            <a:avLst/>
+          </a:prstGeom>
+          <a:noFill/>
+        </p:spPr>
+        <p:txBody>
+          <a:bodyPr wrap="square" anchor="t" lIns="0" rIns="0" tIns="0" bIns="0">
+            <a:spAutoFit/>
+          </a:bodyPr>
+          <a:lstStyle/>
+          <a:p>
+            <a:pPr algn="l">
+              <a:lnSpc>
+                <a:spcPct val="118000"/>
+              </a:lnSpc>
+              <a:spcAft>
+                <a:spcPts val="0"/>
+              </a:spcAft>
+            </a:pPr>
+            <a:r>
+              <a:rPr sz="900" b="0">
+                <a:solidFill>
+                  <a:srgbClr val="475569"/>
+                </a:solidFill>
+                <a:latin typeface="Inter"/>
+              </a:rPr>
+              <a:t>cell used in the 8S2P pack</a:t>
+            </a:r>
+          </a:p>
+        </p:txBody>
+      </p:sp>
+      <p:sp>
+        <p:nvSpPr>
+          <p:cNvPr id="33" name="Oval 32"/>
+          <p:cNvSpPr/>
+          <p:nvPr/>
+        </p:nvSpPr>
+        <p:spPr>
+          <a:xfrm>
+            <a:off x="6912864" y="2295144"/>
+            <a:ext cx="82296" cy="82296"/>
+          </a:xfrm>
+          <a:prstGeom prst="ellipse">
+            <a:avLst/>
+          </a:prstGeom>
+          <a:solidFill>
+            <a:srgbClr val="0E7490"/>
+          </a:solidFill>
+          <a:ln>
+            <a:noFill/>
+          </a:ln>
+          <a:effectLst/>
+        </p:spPr>
+        <p:style>
+          <a:lnRef idx="1">
+            <a:schemeClr val="accent1"/>
+          </a:lnRef>
+          <a:fillRef idx="3">
+            <a:schemeClr val="accent1"/>
+          </a:fillRef>
+          <a:effectRef idx="2">
+            <a:schemeClr val="accent1"/>
+          </a:effectRef>
+          <a:fontRef idx="minor">
+            <a:schemeClr val="lt1"/>
+          </a:fontRef>
+        </p:style>
+        <p:txBody>
+          <a:bodyPr rtlCol="0" anchor="ctr"/>
+          <a:lstStyle/>
+          <a:p/>
+        </p:txBody>
+      </p:sp>
+      <p:sp>
+        <p:nvSpPr>
+          <p:cNvPr id="34" name="TextBox 33"/>
+          <p:cNvSpPr txBox="1"/>
+          <p:nvPr/>
+        </p:nvSpPr>
+        <p:spPr>
+          <a:xfrm>
+            <a:off x="7114032" y="2212848"/>
+            <a:ext cx="2788920" cy="237744"/>
+          </a:xfrm>
+          <a:prstGeom prst="rect">
+            <a:avLst/>
+          </a:prstGeom>
+          <a:noFill/>
+        </p:spPr>
+        <p:txBody>
+          <a:bodyPr wrap="square" anchor="t" lIns="0" rIns="0" tIns="0" bIns="0">
+            <a:spAutoFit/>
+          </a:bodyPr>
+          <a:lstStyle/>
+          <a:p>
+            <a:pPr algn="l">
+              <a:lnSpc>
+                <a:spcPct val="118000"/>
+              </a:lnSpc>
+              <a:spcAft>
+                <a:spcPts val="0"/>
+              </a:spcAft>
+            </a:pPr>
+            <a:r>
+              <a:rPr sz="1050" b="0">
+                <a:solidFill>
+                  <a:srgbClr val="0F172A"/>
+                </a:solidFill>
+                <a:latin typeface="Inter"/>
+              </a:rPr>
+              <a:t>DMEGC INR21700-45E</a:t>
+            </a:r>
+          </a:p>
+        </p:txBody>
+      </p:sp>
+      <p:sp>
+        <p:nvSpPr>
+          <p:cNvPr id="35" name="TextBox 34"/>
+          <p:cNvSpPr txBox="1"/>
+          <p:nvPr/>
+        </p:nvSpPr>
+        <p:spPr>
+          <a:xfrm>
+            <a:off x="9893808" y="2221991"/>
+            <a:ext cx="1529791" cy="219456"/>
+          </a:xfrm>
+          <a:prstGeom prst="rect">
+            <a:avLst/>
+          </a:prstGeom>
+          <a:noFill/>
+        </p:spPr>
+        <p:txBody>
+          <a:bodyPr wrap="square" anchor="t" lIns="0" rIns="0" tIns="0" bIns="0">
+            <a:spAutoFit/>
+          </a:bodyPr>
+          <a:lstStyle/>
+          <a:p>
+            <a:pPr algn="l">
+              <a:lnSpc>
+                <a:spcPct val="118000"/>
+              </a:lnSpc>
+              <a:spcAft>
+                <a:spcPts val="0"/>
+              </a:spcAft>
+            </a:pPr>
+            <a:r>
+              <a:rPr sz="900" b="0">
+                <a:solidFill>
+                  <a:srgbClr val="475569"/>
+                </a:solidFill>
+                <a:latin typeface="Inter"/>
+              </a:rPr>
+              <a:t>alternate NMC cell, parsed</a:t>
+            </a:r>
+          </a:p>
+        </p:txBody>
+      </p:sp>
+      <p:sp>
+        <p:nvSpPr>
+          <p:cNvPr id="36" name="Oval 35"/>
+          <p:cNvSpPr/>
+          <p:nvPr/>
+        </p:nvSpPr>
+        <p:spPr>
+          <a:xfrm>
+            <a:off x="6912864" y="2642615"/>
+            <a:ext cx="82296" cy="82296"/>
+          </a:xfrm>
+          <a:prstGeom prst="ellipse">
+            <a:avLst/>
+          </a:prstGeom>
+          <a:solidFill>
+            <a:srgbClr val="0E7490"/>
+          </a:solidFill>
+          <a:ln>
+            <a:noFill/>
+          </a:ln>
+          <a:effectLst/>
+        </p:spPr>
+        <p:style>
+          <a:lnRef idx="1">
+            <a:schemeClr val="accent1"/>
+          </a:lnRef>
+          <a:fillRef idx="3">
+            <a:schemeClr val="accent1"/>
+          </a:fillRef>
+          <a:effectRef idx="2">
+            <a:schemeClr val="accent1"/>
+          </a:effectRef>
+          <a:fontRef idx="minor">
+            <a:schemeClr val="lt1"/>
+          </a:fontRef>
+        </p:style>
+        <p:txBody>
+          <a:bodyPr rtlCol="0" anchor="ctr"/>
+          <a:lstStyle/>
+          <a:p/>
+        </p:txBody>
+      </p:sp>
+      <p:sp>
+        <p:nvSpPr>
+          <p:cNvPr id="37" name="TextBox 36"/>
+          <p:cNvSpPr txBox="1"/>
+          <p:nvPr/>
+        </p:nvSpPr>
+        <p:spPr>
+          <a:xfrm>
+            <a:off x="7114032" y="2560320"/>
+            <a:ext cx="2788920" cy="237744"/>
+          </a:xfrm>
+          <a:prstGeom prst="rect">
+            <a:avLst/>
+          </a:prstGeom>
+          <a:noFill/>
+        </p:spPr>
+        <p:txBody>
+          <a:bodyPr wrap="square" anchor="t" lIns="0" rIns="0" tIns="0" bIns="0">
+            <a:spAutoFit/>
+          </a:bodyPr>
+          <a:lstStyle/>
+          <a:p>
+            <a:pPr algn="l">
+              <a:lnSpc>
+                <a:spcPct val="118000"/>
+              </a:lnSpc>
+              <a:spcAft>
+                <a:spcPts val="0"/>
+              </a:spcAft>
+            </a:pPr>
+            <a:r>
+              <a:rPr sz="1050" b="0">
+                <a:solidFill>
+                  <a:srgbClr val="0F172A"/>
+                </a:solidFill>
+                <a:latin typeface="Inter"/>
+              </a:rPr>
+              <a:t>Panasonic NCR18650B</a:t>
+            </a:r>
+          </a:p>
+        </p:txBody>
+      </p:sp>
+      <p:sp>
+        <p:nvSpPr>
+          <p:cNvPr id="38" name="TextBox 37"/>
+          <p:cNvSpPr txBox="1"/>
+          <p:nvPr/>
+        </p:nvSpPr>
+        <p:spPr>
+          <a:xfrm>
+            <a:off x="9893808" y="2569463"/>
+            <a:ext cx="1529791" cy="219456"/>
+          </a:xfrm>
+          <a:prstGeom prst="rect">
+            <a:avLst/>
+          </a:prstGeom>
+          <a:noFill/>
+        </p:spPr>
+        <p:txBody>
+          <a:bodyPr wrap="square" anchor="t" lIns="0" rIns="0" tIns="0" bIns="0">
+            <a:spAutoFit/>
+          </a:bodyPr>
+          <a:lstStyle/>
+          <a:p>
+            <a:pPr algn="l">
+              <a:lnSpc>
+                <a:spcPct val="118000"/>
+              </a:lnSpc>
+              <a:spcAft>
+                <a:spcPts val="0"/>
+              </a:spcAft>
+            </a:pPr>
+            <a:r>
+              <a:rPr sz="900" b="0">
+                <a:solidFill>
+                  <a:srgbClr val="475569"/>
+                </a:solidFill>
+                <a:latin typeface="Inter"/>
+              </a:rPr>
+              <a:t>NCA tier reference</a:t>
+            </a:r>
+          </a:p>
+        </p:txBody>
+      </p:sp>
+      <p:sp>
+        <p:nvSpPr>
+          <p:cNvPr id="39" name="Oval 38"/>
+          <p:cNvSpPr/>
+          <p:nvPr/>
+        </p:nvSpPr>
+        <p:spPr>
+          <a:xfrm>
+            <a:off x="6912864" y="2990087"/>
+            <a:ext cx="82296" cy="82296"/>
+          </a:xfrm>
+          <a:prstGeom prst="ellipse">
+            <a:avLst/>
+          </a:prstGeom>
+          <a:solidFill>
+            <a:srgbClr val="0E7490"/>
+          </a:solidFill>
+          <a:ln>
+            <a:noFill/>
+          </a:ln>
+          <a:effectLst/>
+        </p:spPr>
+        <p:style>
+          <a:lnRef idx="1">
+            <a:schemeClr val="accent1"/>
+          </a:lnRef>
+          <a:fillRef idx="3">
+            <a:schemeClr val="accent1"/>
+          </a:fillRef>
+          <a:effectRef idx="2">
+            <a:schemeClr val="accent1"/>
+          </a:effectRef>
+          <a:fontRef idx="minor">
+            <a:schemeClr val="lt1"/>
+          </a:fontRef>
+        </p:style>
+        <p:txBody>
+          <a:bodyPr rtlCol="0" anchor="ctr"/>
+          <a:lstStyle/>
+          <a:p/>
+        </p:txBody>
+      </p:sp>
+      <p:sp>
+        <p:nvSpPr>
+          <p:cNvPr id="40" name="TextBox 39"/>
+          <p:cNvSpPr txBox="1"/>
+          <p:nvPr/>
+        </p:nvSpPr>
+        <p:spPr>
+          <a:xfrm>
+            <a:off x="7114032" y="2907791"/>
+            <a:ext cx="2788920" cy="237744"/>
+          </a:xfrm>
+          <a:prstGeom prst="rect">
+            <a:avLst/>
+          </a:prstGeom>
+          <a:noFill/>
+        </p:spPr>
+        <p:txBody>
+          <a:bodyPr wrap="square" anchor="t" lIns="0" rIns="0" tIns="0" bIns="0">
+            <a:spAutoFit/>
+          </a:bodyPr>
+          <a:lstStyle/>
+          <a:p>
+            <a:pPr algn="l">
+              <a:lnSpc>
+                <a:spcPct val="118000"/>
+              </a:lnSpc>
+              <a:spcAft>
+                <a:spcPts val="0"/>
+              </a:spcAft>
+            </a:pPr>
+            <a:r>
+              <a:rPr sz="1050" b="0">
+                <a:solidFill>
+                  <a:srgbClr val="0F172A"/>
+                </a:solidFill>
+                <a:latin typeface="Inter"/>
+              </a:rPr>
+              <a:t>P3 3232 LFP 26650</a:t>
+            </a:r>
+          </a:p>
+        </p:txBody>
+      </p:sp>
+      <p:sp>
+        <p:nvSpPr>
+          <p:cNvPr id="41" name="TextBox 40"/>
+          <p:cNvSpPr txBox="1"/>
+          <p:nvPr/>
+        </p:nvSpPr>
+        <p:spPr>
+          <a:xfrm>
+            <a:off x="9893808" y="2916935"/>
+            <a:ext cx="1529791" cy="219456"/>
+          </a:xfrm>
+          <a:prstGeom prst="rect">
+            <a:avLst/>
+          </a:prstGeom>
+          <a:noFill/>
+        </p:spPr>
+        <p:txBody>
+          <a:bodyPr wrap="square" anchor="t" lIns="0" rIns="0" tIns="0" bIns="0">
+            <a:spAutoFit/>
+          </a:bodyPr>
+          <a:lstStyle/>
+          <a:p>
+            <a:pPr algn="l">
+              <a:lnSpc>
+                <a:spcPct val="118000"/>
+              </a:lnSpc>
+              <a:spcAft>
+                <a:spcPts val="0"/>
+              </a:spcAft>
+            </a:pPr>
+            <a:r>
+              <a:rPr sz="900" b="0">
+                <a:solidFill>
+                  <a:srgbClr val="475569"/>
+                </a:solidFill>
+                <a:latin typeface="Inter"/>
+              </a:rPr>
+              <a:t>LFP tier reference</a:t>
+            </a:r>
+          </a:p>
+        </p:txBody>
+      </p:sp>
+      <p:sp>
+        <p:nvSpPr>
+          <p:cNvPr id="42" name="Oval 41"/>
+          <p:cNvSpPr/>
+          <p:nvPr/>
+        </p:nvSpPr>
+        <p:spPr>
+          <a:xfrm>
+            <a:off x="6912864" y="3337559"/>
+            <a:ext cx="82296" cy="82296"/>
+          </a:xfrm>
+          <a:prstGeom prst="ellipse">
+            <a:avLst/>
+          </a:prstGeom>
+          <a:solidFill>
+            <a:srgbClr val="0E7490"/>
+          </a:solidFill>
+          <a:ln>
+            <a:noFill/>
+          </a:ln>
+          <a:effectLst/>
+        </p:spPr>
+        <p:style>
+          <a:lnRef idx="1">
+            <a:schemeClr val="accent1"/>
+          </a:lnRef>
+          <a:fillRef idx="3">
+            <a:schemeClr val="accent1"/>
+          </a:fillRef>
+          <a:effectRef idx="2">
+            <a:schemeClr val="accent1"/>
+          </a:effectRef>
+          <a:fontRef idx="minor">
+            <a:schemeClr val="lt1"/>
+          </a:fontRef>
+        </p:style>
+        <p:txBody>
+          <a:bodyPr rtlCol="0" anchor="ctr"/>
+          <a:lstStyle/>
+          <a:p/>
+        </p:txBody>
+      </p:sp>
+      <p:sp>
+        <p:nvSpPr>
+          <p:cNvPr id="43" name="TextBox 42"/>
+          <p:cNvSpPr txBox="1"/>
+          <p:nvPr/>
+        </p:nvSpPr>
+        <p:spPr>
+          <a:xfrm>
+            <a:off x="7114032" y="3255263"/>
+            <a:ext cx="2788920" cy="237744"/>
+          </a:xfrm>
+          <a:prstGeom prst="rect">
+            <a:avLst/>
+          </a:prstGeom>
+          <a:noFill/>
+        </p:spPr>
+        <p:txBody>
+          <a:bodyPr wrap="square" anchor="t" lIns="0" rIns="0" tIns="0" bIns="0">
+            <a:spAutoFit/>
+          </a:bodyPr>
+          <a:lstStyle/>
+          <a:p>
+            <a:pPr algn="l">
+              <a:lnSpc>
+                <a:spcPct val="118000"/>
+              </a:lnSpc>
+              <a:spcAft>
+                <a:spcPts val="0"/>
+              </a:spcAft>
+            </a:pPr>
+            <a:r>
+              <a:rPr sz="1050" b="0">
+                <a:solidFill>
+                  <a:srgbClr val="0F172A"/>
+                </a:solidFill>
+                <a:latin typeface="Inter"/>
+              </a:rPr>
+              <a:t>JBD SP24S007 V1.1</a:t>
+            </a:r>
+          </a:p>
+        </p:txBody>
+      </p:sp>
+      <p:sp>
+        <p:nvSpPr>
+          <p:cNvPr id="44" name="TextBox 43"/>
+          <p:cNvSpPr txBox="1"/>
+          <p:nvPr/>
+        </p:nvSpPr>
+        <p:spPr>
+          <a:xfrm>
+            <a:off x="9893808" y="3264407"/>
+            <a:ext cx="1529791" cy="219456"/>
+          </a:xfrm>
+          <a:prstGeom prst="rect">
+            <a:avLst/>
+          </a:prstGeom>
+          <a:noFill/>
+        </p:spPr>
+        <p:txBody>
+          <a:bodyPr wrap="square" anchor="t" lIns="0" rIns="0" tIns="0" bIns="0">
+            <a:spAutoFit/>
+          </a:bodyPr>
+          <a:lstStyle/>
+          <a:p>
+            <a:pPr algn="l">
+              <a:lnSpc>
+                <a:spcPct val="118000"/>
+              </a:lnSpc>
+              <a:spcAft>
+                <a:spcPts val="0"/>
+              </a:spcAft>
+            </a:pPr>
+            <a:r>
+              <a:rPr sz="900" b="0">
+                <a:solidFill>
+                  <a:srgbClr val="475569"/>
+                </a:solidFill>
+                <a:latin typeface="Inter"/>
+              </a:rPr>
+              <a:t>BMS protocol + registers</a:t>
+            </a:r>
+          </a:p>
+        </p:txBody>
+      </p:sp>
+      <p:sp>
+        <p:nvSpPr>
+          <p:cNvPr id="45" name="Rectangle 44"/>
+          <p:cNvSpPr/>
+          <p:nvPr/>
+        </p:nvSpPr>
+        <p:spPr>
+          <a:xfrm>
+            <a:off x="6693408" y="3730752"/>
+            <a:ext cx="4931359" cy="1883664"/>
+          </a:xfrm>
+          <a:prstGeom prst="rect">
+            <a:avLst/>
+          </a:prstGeom>
+          <a:solidFill>
+            <a:srgbClr val="F1F5F9"/>
+          </a:solidFill>
+          <a:ln w="9525">
+            <a:solidFill>
+              <a:srgbClr val="CBD5E1"/>
+            </a:solidFill>
+          </a:ln>
+          <a:effectLst/>
+        </p:spPr>
+        <p:style>
+          <a:lnRef idx="1">
+            <a:schemeClr val="accent1"/>
+          </a:lnRef>
+          <a:fillRef idx="3">
+            <a:schemeClr val="accent1"/>
+          </a:fillRef>
+          <a:effectRef idx="2">
+            <a:schemeClr val="accent1"/>
+          </a:effectRef>
+          <a:fontRef idx="minor">
+            <a:schemeClr val="lt1"/>
+          </a:fontRef>
+        </p:style>
+        <p:txBody>
+          <a:bodyPr rtlCol="0" anchor="ctr"/>
+          <a:lstStyle/>
+          <a:p/>
+        </p:txBody>
+      </p:sp>
+      <p:sp>
+        <p:nvSpPr>
+          <p:cNvPr id="46" name="TextBox 45"/>
+          <p:cNvSpPr txBox="1"/>
+          <p:nvPr/>
+        </p:nvSpPr>
+        <p:spPr>
+          <a:xfrm>
+            <a:off x="6894576" y="3858768"/>
+            <a:ext cx="4529023" cy="219456"/>
+          </a:xfrm>
+          <a:prstGeom prst="rect">
+            <a:avLst/>
+          </a:prstGeom>
+          <a:noFill/>
+        </p:spPr>
+        <p:txBody>
+          <a:bodyPr wrap="square" anchor="t" lIns="0" rIns="0" tIns="0" bIns="0">
+            <a:spAutoFit/>
+          </a:bodyPr>
+          <a:lstStyle/>
+          <a:p>
+            <a:pPr algn="l">
+              <a:lnSpc>
+                <a:spcPct val="118000"/>
+              </a:lnSpc>
+              <a:spcAft>
+                <a:spcPts val="0"/>
+              </a:spcAft>
+            </a:pPr>
+            <a:r>
+              <a:rPr sz="950" b="1">
+                <a:solidFill>
+                  <a:srgbClr val="B45309"/>
+                </a:solidFill>
+                <a:latin typeface="Inter"/>
+              </a:rPr>
+              <a:t>METHODS</a:t>
+            </a:r>
+          </a:p>
+        </p:txBody>
+      </p:sp>
+      <p:sp>
+        <p:nvSpPr>
+          <p:cNvPr id="47" name="TextBox 46"/>
+          <p:cNvSpPr txBox="1"/>
+          <p:nvPr/>
+        </p:nvSpPr>
+        <p:spPr>
+          <a:xfrm>
+            <a:off x="6912864" y="4151376"/>
+            <a:ext cx="4492447" cy="201168"/>
+          </a:xfrm>
+          <a:prstGeom prst="rect">
+            <a:avLst/>
+          </a:prstGeom>
+          <a:noFill/>
+        </p:spPr>
+        <p:txBody>
+          <a:bodyPr wrap="square" anchor="t" lIns="0" rIns="0" tIns="0" bIns="0">
+            <a:spAutoFit/>
+          </a:bodyPr>
+          <a:lstStyle/>
+          <a:p>
+            <a:pPr algn="l">
+              <a:lnSpc>
+                <a:spcPct val="118000"/>
+              </a:lnSpc>
+              <a:spcAft>
+                <a:spcPts val="0"/>
+              </a:spcAft>
+            </a:pPr>
+            <a:r>
+              <a:rPr sz="1050" b="1">
+                <a:solidFill>
+                  <a:srgbClr val="0F172A"/>
+                </a:solidFill>
+                <a:latin typeface="Inter"/>
+              </a:rPr>
+              <a:t>Chen, T. &amp; Guestrin, C.</a:t>
+            </a:r>
+          </a:p>
+        </p:txBody>
+      </p:sp>
+      <p:sp>
+        <p:nvSpPr>
+          <p:cNvPr id="48" name="TextBox 47"/>
+          <p:cNvSpPr txBox="1"/>
+          <p:nvPr/>
+        </p:nvSpPr>
+        <p:spPr>
+          <a:xfrm>
+            <a:off x="6912864" y="4325112"/>
+            <a:ext cx="4492447" cy="201168"/>
+          </a:xfrm>
+          <a:prstGeom prst="rect">
+            <a:avLst/>
+          </a:prstGeom>
+          <a:noFill/>
+        </p:spPr>
+        <p:txBody>
+          <a:bodyPr wrap="square" anchor="t" lIns="0" rIns="0" tIns="0" bIns="0">
+            <a:spAutoFit/>
+          </a:bodyPr>
+          <a:lstStyle/>
+          <a:p>
+            <a:pPr algn="l">
+              <a:lnSpc>
+                <a:spcPct val="118000"/>
+              </a:lnSpc>
+              <a:spcAft>
+                <a:spcPts val="0"/>
+              </a:spcAft>
+            </a:pPr>
+            <a:r>
+              <a:rPr sz="900" b="0">
+                <a:solidFill>
+                  <a:srgbClr val="475569"/>
+                </a:solidFill>
+                <a:latin typeface="Inter"/>
+              </a:rPr>
+              <a:t>“XGBoost: A Scalable Tree Boosting System”, KDD 2016</a:t>
+            </a:r>
+          </a:p>
+        </p:txBody>
+      </p:sp>
+      <p:sp>
+        <p:nvSpPr>
+          <p:cNvPr id="49" name="TextBox 48"/>
+          <p:cNvSpPr txBox="1"/>
+          <p:nvPr/>
+        </p:nvSpPr>
+        <p:spPr>
+          <a:xfrm>
+            <a:off x="6912864" y="4517136"/>
+            <a:ext cx="4492447" cy="201168"/>
+          </a:xfrm>
+          <a:prstGeom prst="rect">
+            <a:avLst/>
+          </a:prstGeom>
+          <a:noFill/>
+        </p:spPr>
+        <p:txBody>
+          <a:bodyPr wrap="square" anchor="t" lIns="0" rIns="0" tIns="0" bIns="0">
+            <a:spAutoFit/>
+          </a:bodyPr>
+          <a:lstStyle/>
+          <a:p>
+            <a:pPr algn="l">
+              <a:lnSpc>
+                <a:spcPct val="118000"/>
+              </a:lnSpc>
+              <a:spcAft>
+                <a:spcPts val="0"/>
+              </a:spcAft>
+            </a:pPr>
+            <a:r>
+              <a:rPr sz="1050" b="1">
+                <a:solidFill>
+                  <a:srgbClr val="0F172A"/>
+                </a:solidFill>
+                <a:latin typeface="Inter"/>
+              </a:rPr>
+              <a:t>Liu, F. T., Ting, K. M. &amp; Zhou, Z.-H.</a:t>
+            </a:r>
+          </a:p>
+        </p:txBody>
+      </p:sp>
+      <p:sp>
+        <p:nvSpPr>
+          <p:cNvPr id="50" name="TextBox 49"/>
+          <p:cNvSpPr txBox="1"/>
+          <p:nvPr/>
+        </p:nvSpPr>
+        <p:spPr>
+          <a:xfrm>
+            <a:off x="6912864" y="4690872"/>
+            <a:ext cx="4492447" cy="201168"/>
+          </a:xfrm>
+          <a:prstGeom prst="rect">
+            <a:avLst/>
+          </a:prstGeom>
+          <a:noFill/>
+        </p:spPr>
+        <p:txBody>
+          <a:bodyPr wrap="square" anchor="t" lIns="0" rIns="0" tIns="0" bIns="0">
+            <a:spAutoFit/>
+          </a:bodyPr>
+          <a:lstStyle/>
+          <a:p>
+            <a:pPr algn="l">
+              <a:lnSpc>
+                <a:spcPct val="118000"/>
+              </a:lnSpc>
+              <a:spcAft>
+                <a:spcPts val="0"/>
+              </a:spcAft>
+            </a:pPr>
+            <a:r>
+              <a:rPr sz="900" b="0">
+                <a:solidFill>
+                  <a:srgbClr val="475569"/>
+                </a:solidFill>
+                <a:latin typeface="Inter"/>
+              </a:rPr>
+              <a:t>“Isolation Forest”, ICDM 2008</a:t>
+            </a:r>
+          </a:p>
+        </p:txBody>
+      </p:sp>
+      <p:sp>
+        <p:nvSpPr>
+          <p:cNvPr id="51" name="TextBox 50"/>
+          <p:cNvSpPr txBox="1"/>
+          <p:nvPr/>
+        </p:nvSpPr>
+        <p:spPr>
+          <a:xfrm>
+            <a:off x="6912864" y="4882896"/>
+            <a:ext cx="4492447" cy="201168"/>
+          </a:xfrm>
+          <a:prstGeom prst="rect">
+            <a:avLst/>
+          </a:prstGeom>
+          <a:noFill/>
+        </p:spPr>
+        <p:txBody>
+          <a:bodyPr wrap="square" anchor="t" lIns="0" rIns="0" tIns="0" bIns="0">
+            <a:spAutoFit/>
+          </a:bodyPr>
+          <a:lstStyle/>
+          <a:p>
+            <a:pPr algn="l">
+              <a:lnSpc>
+                <a:spcPct val="118000"/>
+              </a:lnSpc>
+              <a:spcAft>
+                <a:spcPts val="0"/>
+              </a:spcAft>
+            </a:pPr>
+            <a:r>
+              <a:rPr sz="1050" b="1">
+                <a:solidFill>
+                  <a:srgbClr val="0F172A"/>
+                </a:solidFill>
+                <a:latin typeface="Inter"/>
+              </a:rPr>
+              <a:t>Vaswani, A. et al.</a:t>
+            </a:r>
+          </a:p>
+        </p:txBody>
+      </p:sp>
+      <p:sp>
+        <p:nvSpPr>
+          <p:cNvPr id="52" name="TextBox 51"/>
+          <p:cNvSpPr txBox="1"/>
+          <p:nvPr/>
+        </p:nvSpPr>
+        <p:spPr>
+          <a:xfrm>
+            <a:off x="6912864" y="5056632"/>
+            <a:ext cx="4492447" cy="201168"/>
+          </a:xfrm>
+          <a:prstGeom prst="rect">
+            <a:avLst/>
+          </a:prstGeom>
+          <a:noFill/>
+        </p:spPr>
+        <p:txBody>
+          <a:bodyPr wrap="square" anchor="t" lIns="0" rIns="0" tIns="0" bIns="0">
+            <a:spAutoFit/>
+          </a:bodyPr>
+          <a:lstStyle/>
+          <a:p>
+            <a:pPr algn="l">
+              <a:lnSpc>
+                <a:spcPct val="118000"/>
+              </a:lnSpc>
+              <a:spcAft>
+                <a:spcPts val="0"/>
+              </a:spcAft>
+            </a:pPr>
+            <a:r>
+              <a:rPr sz="900" b="0">
+                <a:solidFill>
+                  <a:srgbClr val="475569"/>
+                </a:solidFill>
+                <a:latin typeface="Inter"/>
+              </a:rPr>
+              <a:t>“Attention Is All You Need”, NeurIPS 2017</a:t>
+            </a:r>
+          </a:p>
+        </p:txBody>
+      </p:sp>
+      <p:sp>
+        <p:nvSpPr>
+          <p:cNvPr id="53" name="TextBox 52"/>
+          <p:cNvSpPr txBox="1"/>
+          <p:nvPr/>
+        </p:nvSpPr>
+        <p:spPr>
+          <a:xfrm>
+            <a:off x="6912864" y="5248656"/>
+            <a:ext cx="4492447" cy="201168"/>
+          </a:xfrm>
+          <a:prstGeom prst="rect">
+            <a:avLst/>
+          </a:prstGeom>
+          <a:noFill/>
+        </p:spPr>
+        <p:txBody>
+          <a:bodyPr wrap="square" anchor="t" lIns="0" rIns="0" tIns="0" bIns="0">
+            <a:spAutoFit/>
+          </a:bodyPr>
+          <a:lstStyle/>
+          <a:p>
+            <a:pPr algn="l">
+              <a:lnSpc>
+                <a:spcPct val="118000"/>
+              </a:lnSpc>
+              <a:spcAft>
+                <a:spcPts val="0"/>
+              </a:spcAft>
+            </a:pPr>
+            <a:r>
+              <a:rPr sz="1050" b="1">
+                <a:solidFill>
+                  <a:srgbClr val="0F172A"/>
+                </a:solidFill>
+                <a:latin typeface="Inter"/>
+              </a:rPr>
+              <a:t>Pedregosa, F. et al.</a:t>
+            </a:r>
+          </a:p>
+        </p:txBody>
+      </p:sp>
+      <p:sp>
+        <p:nvSpPr>
+          <p:cNvPr id="54" name="TextBox 53"/>
+          <p:cNvSpPr txBox="1"/>
+          <p:nvPr/>
+        </p:nvSpPr>
+        <p:spPr>
+          <a:xfrm>
+            <a:off x="6912864" y="5422392"/>
+            <a:ext cx="4492447" cy="201168"/>
+          </a:xfrm>
+          <a:prstGeom prst="rect">
+            <a:avLst/>
+          </a:prstGeom>
+          <a:noFill/>
+        </p:spPr>
+        <p:txBody>
+          <a:bodyPr wrap="square" anchor="t" lIns="0" rIns="0" tIns="0" bIns="0">
+            <a:spAutoFit/>
+          </a:bodyPr>
+          <a:lstStyle/>
+          <a:p>
+            <a:pPr algn="l">
+              <a:lnSpc>
+                <a:spcPct val="118000"/>
+              </a:lnSpc>
+              <a:spcAft>
+                <a:spcPts val="0"/>
+              </a:spcAft>
+            </a:pPr>
+            <a:r>
+              <a:rPr sz="900" b="0">
+                <a:solidFill>
+                  <a:srgbClr val="475569"/>
+                </a:solidFill>
+                <a:latin typeface="Inter"/>
+              </a:rPr>
+              <a:t>“Scikit-learn: Machine Learning in Python”, JMLR 12, 2011</a:t>
+            </a:r>
+          </a:p>
+        </p:txBody>
+      </p:sp>
+      <p:sp>
+        <p:nvSpPr>
+          <p:cNvPr id="55" name="TextBox 54"/>
+          <p:cNvSpPr txBox="1"/>
+          <p:nvPr/>
+        </p:nvSpPr>
+        <p:spPr>
+          <a:xfrm>
+            <a:off x="6693408" y="5760720"/>
+            <a:ext cx="4931359" cy="219456"/>
+          </a:xfrm>
+          <a:prstGeom prst="rect">
+            <a:avLst/>
+          </a:prstGeom>
+          <a:noFill/>
+        </p:spPr>
+        <p:txBody>
+          <a:bodyPr wrap="square" anchor="t" lIns="0" rIns="0" tIns="0" bIns="0">
+            <a:spAutoFit/>
+          </a:bodyPr>
+          <a:lstStyle/>
+          <a:p>
+            <a:pPr algn="l">
+              <a:lnSpc>
+                <a:spcPct val="118000"/>
+              </a:lnSpc>
+              <a:spcAft>
+                <a:spcPts val="0"/>
+              </a:spcAft>
+            </a:pPr>
+            <a:r>
+              <a:rPr sz="950" b="1">
+                <a:solidFill>
+                  <a:srgbClr val="475569"/>
+                </a:solidFill>
+                <a:latin typeface="Inter"/>
+              </a:rPr>
+              <a:t>STACK</a:t>
+            </a:r>
+          </a:p>
+        </p:txBody>
+      </p:sp>
+      <p:sp>
+        <p:nvSpPr>
+          <p:cNvPr id="56" name="TextBox 55"/>
+          <p:cNvSpPr txBox="1"/>
+          <p:nvPr/>
+        </p:nvSpPr>
+        <p:spPr>
+          <a:xfrm>
+            <a:off x="6693408" y="5998464"/>
+            <a:ext cx="4931359" cy="475488"/>
+          </a:xfrm>
+          <a:prstGeom prst="rect">
+            <a:avLst/>
+          </a:prstGeom>
+          <a:noFill/>
+        </p:spPr>
+        <p:txBody>
+          <a:bodyPr wrap="square" anchor="t" lIns="0" rIns="0" tIns="0" bIns="0">
+            <a:spAutoFit/>
+          </a:bodyPr>
+          <a:lstStyle/>
+          <a:p>
+            <a:pPr algn="l">
+              <a:lnSpc>
+                <a:spcPct val="132000"/>
+              </a:lnSpc>
+              <a:spcAft>
+                <a:spcPts val="0"/>
+              </a:spcAft>
+            </a:pPr>
+            <a:r>
+              <a:rPr sz="900" b="0">
+                <a:solidFill>
+                  <a:srgbClr val="475569"/>
+                </a:solidFill>
+                <a:latin typeface="Inter"/>
+              </a:rPr>
+              <a:t>xgboost 3.2.0  ·  scikit-learn 1.9.1  ·  torch 2.14.0  ·  numpy 2.4.6
+bleak  ·  Flask  ·  PostgreSQL  ·  Railway  ·  MATLAB / Simulink</a:t>
+            </a:r>
+          </a:p>
+        </p:txBody>
+      </p:sp>
+    </p:spTree>
+  </p:cSld>
+  <p:clrMapOvr>
+    <a:masterClrMapping/>
+  </p:clrMapOvr>
+</p:sld>
+</file>
+
 <file path=ppt/slides/slide2.xml><?xml version="1.0" encoding="utf-8"?>
 <p:sld xmlns:a="http://schemas.openxmlformats.org/drawingml/2006/main" xmlns:p="http://schemas.openxmlformats.org/presentationml/2006/main" xmlns:r="http://schemas.openxmlformats.org/officeDocument/2006/relationships">
   <p:cSld>
@@ -11474,7 +13962,7 @@
                 </a:solidFill>
                 <a:latin typeface="Inter"/>
               </a:rPr>
-              <a:t>Three tiers at the edge, three surfaces in the browser</a:t>
+              <a:t>Fault detection, end to end</a:t>
             </a:r>
           </a:p>
         </p:txBody>
@@ -11647,212 +14135,40 @@
           </a:p>
         </p:txBody>
       </p:sp>
-      <p:sp>
-        <p:nvSpPr>
-          <p:cNvPr id="7" name="TextBox 6"/>
-          <p:cNvSpPr txBox="1"/>
-          <p:nvPr/>
-        </p:nvSpPr>
-        <p:spPr>
-          <a:xfrm>
-            <a:off x="566928" y="1499616"/>
-            <a:ext cx="2761488" cy="1920240"/>
-          </a:xfrm>
-          <a:prstGeom prst="rect">
-            <a:avLst/>
-          </a:prstGeom>
-          <a:noFill/>
-        </p:spPr>
-        <p:txBody>
-          <a:bodyPr wrap="square" lIns="0" rIns="0" tIns="0" bIns="0">
-            <a:spAutoFit/>
-          </a:bodyPr>
-          <a:lstStyle/>
-          <a:p>
-            <a:pPr marL="274320" indent="-274320">
-              <a:lnSpc>
-                <a:spcPct val="116000"/>
-              </a:lnSpc>
-              <a:spcAft>
-                <a:spcPts val="700"/>
-              </a:spcAft>
-              <a:buClr>
-                <a:srgbClr val="0E7490"/>
-              </a:buClr>
-              <a:buSzPct val="62000"/>
-              <a:buFont typeface="Arial" pitchFamily="34" charset="0"/>
-              <a:buChar char="●"/>
-            </a:pPr>
-            <a:r>
-              <a:rPr sz="1350">
-                <a:solidFill>
-                  <a:srgbClr val="0F172A"/>
-                </a:solidFill>
-                <a:latin typeface="Inter"/>
-              </a:rPr>
-              <a:t>JBD BMS senses eight taps and four NTCs.</a:t>
-            </a:r>
-          </a:p>
-          <a:p>
-            <a:pPr marL="274320" indent="-274320">
-              <a:lnSpc>
-                <a:spcPct val="116000"/>
-              </a:lnSpc>
-              <a:spcAft>
-                <a:spcPts val="700"/>
-              </a:spcAft>
-              <a:buClr>
-                <a:srgbClr val="0E7490"/>
-              </a:buClr>
-              <a:buSzPct val="62000"/>
-              <a:buFont typeface="Arial" pitchFamily="34" charset="0"/>
-              <a:buChar char="●"/>
-            </a:pPr>
-            <a:r>
-              <a:rPr sz="1350">
-                <a:solidFill>
-                  <a:srgbClr val="0F172A"/>
-                </a:solidFill>
-                <a:latin typeface="Inter"/>
-              </a:rPr>
-              <a:t>Pi 5 runs the logger and XGBoost inference.</a:t>
-            </a:r>
-          </a:p>
-          <a:p>
-            <a:pPr marL="274320" indent="-274320">
-              <a:lnSpc>
-                <a:spcPct val="116000"/>
-              </a:lnSpc>
-              <a:spcAft>
-                <a:spcPts val="700"/>
-              </a:spcAft>
-              <a:buClr>
-                <a:srgbClr val="0E7490"/>
-              </a:buClr>
-              <a:buSzPct val="62000"/>
-              <a:buFont typeface="Arial" pitchFamily="34" charset="0"/>
-              <a:buChar char="●"/>
-            </a:pPr>
-            <a:r>
-              <a:rPr sz="1350">
-                <a:solidFill>
-                  <a:srgbClr val="0F172A"/>
-                </a:solidFill>
-                <a:latin typeface="Inter"/>
-              </a:rPr>
-              <a:t>Arduino R4 watches the Pi's heartbeat.</a:t>
-            </a:r>
-          </a:p>
-        </p:txBody>
-      </p:sp>
-      <p:sp>
-        <p:nvSpPr>
-          <p:cNvPr id="8" name="TextBox 7"/>
-          <p:cNvSpPr txBox="1"/>
-          <p:nvPr/>
-        </p:nvSpPr>
-        <p:spPr>
-          <a:xfrm>
-            <a:off x="3602736" y="1499616"/>
-            <a:ext cx="2761488" cy="1920240"/>
-          </a:xfrm>
-          <a:prstGeom prst="rect">
-            <a:avLst/>
-          </a:prstGeom>
-          <a:noFill/>
-        </p:spPr>
-        <p:txBody>
-          <a:bodyPr wrap="square" lIns="0" rIns="0" tIns="0" bIns="0">
-            <a:spAutoFit/>
-          </a:bodyPr>
-          <a:lstStyle/>
-          <a:p>
-            <a:pPr marL="274320" indent="-274320">
-              <a:lnSpc>
-                <a:spcPct val="116000"/>
-              </a:lnSpc>
-              <a:spcAft>
-                <a:spcPts val="700"/>
-              </a:spcAft>
-              <a:buClr>
-                <a:srgbClr val="0E7490"/>
-              </a:buClr>
-              <a:buSzPct val="62000"/>
-              <a:buFont typeface="Arial" pitchFamily="34" charset="0"/>
-              <a:buChar char="●"/>
-            </a:pPr>
-            <a:r>
-              <a:rPr sz="1350">
-                <a:solidFill>
-                  <a:srgbClr val="0F172A"/>
-                </a:solidFill>
-                <a:latin typeface="Inter"/>
-              </a:rPr>
-              <a:t>Missed beat pulls RUN pin, resets the Pi.</a:t>
-            </a:r>
-          </a:p>
-          <a:p>
-            <a:pPr marL="274320" indent="-274320">
-              <a:lnSpc>
-                <a:spcPct val="116000"/>
-              </a:lnSpc>
-              <a:spcAft>
-                <a:spcPts val="700"/>
-              </a:spcAft>
-              <a:buClr>
-                <a:srgbClr val="0E7490"/>
-              </a:buClr>
-              <a:buSzPct val="62000"/>
-              <a:buFont typeface="Arial" pitchFamily="34" charset="0"/>
-              <a:buChar char="●"/>
-            </a:pPr>
-            <a:r>
-              <a:rPr sz="1350">
-                <a:solidFill>
-                  <a:srgbClr val="0F172A"/>
-                </a:solidFill>
-                <a:latin typeface="Inter"/>
-              </a:rPr>
-              <a:t>Inference stays local: no link, no safety gap.</a:t>
-            </a:r>
-          </a:p>
-          <a:p>
-            <a:pPr marL="274320" indent="-274320">
-              <a:lnSpc>
-                <a:spcPct val="116000"/>
-              </a:lnSpc>
-              <a:spcAft>
-                <a:spcPts val="700"/>
-              </a:spcAft>
-              <a:buClr>
-                <a:srgbClr val="0E7490"/>
-              </a:buClr>
-              <a:buSzPct val="62000"/>
-              <a:buFont typeface="Arial" pitchFamily="34" charset="0"/>
-              <a:buChar char="●"/>
-            </a:pPr>
-            <a:r>
-              <a:rPr sz="1350">
-                <a:solidFill>
-                  <a:srgbClr val="0F172A"/>
-                </a:solidFill>
-                <a:latin typeface="Inter"/>
-              </a:rPr>
-              <a:t>Pi dials out to Railway — no inbound port.</a:t>
-            </a:r>
-          </a:p>
-        </p:txBody>
-      </p:sp>
-      <p:sp>
-        <p:nvSpPr>
-          <p:cNvPr id="9" name="Rectangle 8"/>
+      <p:pic>
+        <p:nvPicPr>
+          <p:cNvPr id="7" name="Picture 6" descr="diag_fault_flow.png"/>
+          <p:cNvPicPr>
+            <a:picLocks noChangeAspect="1"/>
+          </p:cNvPicPr>
+          <p:nvPr/>
+        </p:nvPicPr>
+        <p:blipFill>
+          <a:blip r:embed="rId2"/>
+          <a:stretch>
+            <a:fillRect/>
+          </a:stretch>
+        </p:blipFill>
+        <p:spPr>
+          <a:xfrm>
+            <a:off x="2404340" y="1353312"/>
+            <a:ext cx="7383013" cy="3913632"/>
+          </a:xfrm>
+          <a:prstGeom prst="rect">
+            <a:avLst/>
+          </a:prstGeom>
+        </p:spPr>
+      </p:pic>
+      <p:sp>
+        <p:nvSpPr>
+          <p:cNvPr id="8" name="Rectangle 7"/>
           <p:cNvSpPr/>
           <p:nvPr/>
         </p:nvSpPr>
         <p:spPr>
           <a:xfrm>
-            <a:off x="566928" y="3602736"/>
-            <a:ext cx="5797296" cy="1078992"/>
+            <a:off x="566928" y="5321808"/>
+            <a:ext cx="3539642" cy="1005840"/>
           </a:xfrm>
           <a:prstGeom prst="rect">
             <a:avLst/>
@@ -11889,14 +14205,56 @@
       </p:sp>
       <p:sp>
         <p:nvSpPr>
+          <p:cNvPr id="9" name="Rectangle 8"/>
+          <p:cNvSpPr/>
+          <p:nvPr/>
+        </p:nvSpPr>
+        <p:spPr>
+          <a:xfrm>
+            <a:off x="566928" y="5321808"/>
+            <a:ext cx="3539642" cy="50292"/>
+          </a:xfrm>
+          <a:prstGeom prst="rect">
+            <a:avLst/>
+          </a:prstGeom>
+          <a:solidFill>
+            <a:srgbClr val="0E7490"/>
+          </a:solidFill>
+          <a:ln>
+            <a:noFill/>
+          </a:ln>
+          <a:effectLst/>
+        </p:spPr>
+        <p:style>
+          <a:lnRef idx="1">
+            <a:schemeClr val="accent1"/>
+          </a:lnRef>
+          <a:fillRef idx="3">
+            <a:schemeClr val="accent1"/>
+          </a:fillRef>
+          <a:effectRef idx="2">
+            <a:schemeClr val="accent1"/>
+          </a:effectRef>
+          <a:fontRef idx="minor">
+            <a:schemeClr val="lt1"/>
+          </a:fontRef>
+        </p:style>
+        <p:txBody>
+          <a:bodyPr rtlCol="0" anchor="ctr"/>
+          <a:lstStyle/>
+          <a:p/>
+        </p:txBody>
+      </p:sp>
+      <p:sp>
+        <p:nvSpPr>
           <p:cNvPr id="10" name="TextBox 9"/>
           <p:cNvSpPr txBox="1"/>
           <p:nvPr/>
         </p:nvSpPr>
         <p:spPr>
           <a:xfrm>
-            <a:off x="768096" y="3712463"/>
-            <a:ext cx="5394959" cy="219456"/>
+            <a:off x="749808" y="5449824"/>
+            <a:ext cx="3173882" cy="201168"/>
           </a:xfrm>
           <a:prstGeom prst="rect">
             <a:avLst/>
@@ -11918,13 +14276,13 @@
               </a:spcAft>
             </a:pPr>
             <a:r>
-              <a:rPr sz="950" b="1">
+              <a:rPr sz="900" b="1">
                 <a:solidFill>
                   <a:srgbClr val="0E7490"/>
                 </a:solidFill>
                 <a:latin typeface="Inter"/>
               </a:rPr>
-              <a:t>ACCELERATION PATH</a:t>
+              <a:t>FIVE STAGES</a:t>
             </a:r>
           </a:p>
         </p:txBody>
@@ -11937,8 +14295,8 @@
         </p:nvSpPr>
         <p:spPr>
           <a:xfrm>
-            <a:off x="768096" y="3968496"/>
-            <a:ext cx="5394959" cy="640080"/>
+            <a:off x="749808" y="5687568"/>
+            <a:ext cx="3173882" cy="585216"/>
           </a:xfrm>
           <a:prstGeom prst="rect">
             <a:avLst/>
@@ -11953,20 +14311,20 @@
           <a:p>
             <a:pPr algn="l">
               <a:lnSpc>
-                <a:spcPct val="124000"/>
+                <a:spcPct val="122000"/>
               </a:lnSpc>
               <a:spcAft>
                 <a:spcPts val="0"/>
               </a:spcAft>
             </a:pPr>
             <a:r>
-              <a:rPr sz="1150" b="0">
+              <a:rPr sz="950" b="0">
                 <a:solidFill>
                   <a:srgbClr val="0F172A"/>
                 </a:solidFill>
                 <a:latin typeface="Inter"/>
               </a:rPr>
-              <a:t>Zynq-7000 SoC moves the same tree traversal into programmable logic, freeing the CPU for the logger and the BLE link.</a:t>
+              <a:t>Acquire → establish context → detect → score risk → act. Every block maps to a module in the repository.</a:t>
             </a:r>
           </a:p>
         </p:txBody>
@@ -11979,16 +14337,16 @@
         </p:nvSpPr>
         <p:spPr>
           <a:xfrm>
-            <a:off x="1403199" y="4809744"/>
-            <a:ext cx="1116377" cy="1005840"/>
+            <a:off x="4326026" y="5321808"/>
+            <a:ext cx="3539642" cy="1005840"/>
           </a:xfrm>
           <a:prstGeom prst="rect">
             <a:avLst/>
           </a:prstGeom>
           <a:solidFill>
-            <a:srgbClr val="FFFFFF"/>
+            <a:srgbClr val="F1F5F9"/>
           </a:solidFill>
-          <a:ln w="12700">
+          <a:ln w="9525">
             <a:solidFill>
               <a:srgbClr val="CBD5E1"/>
             </a:solidFill>
@@ -12015,48 +14373,150 @@
           <a:p/>
         </p:txBody>
       </p:sp>
-      <p:pic>
-        <p:nvPicPr>
-          <p:cNvPr id="13" name="Picture 12" descr="p06_img1_x51.jpeg"/>
-          <p:cNvPicPr>
-            <a:picLocks noChangeAspect="1"/>
-          </p:cNvPicPr>
-          <p:nvPr/>
-        </p:nvPicPr>
-        <p:blipFill>
-          <a:blip r:embed="rId2"/>
-          <a:stretch>
-            <a:fillRect/>
-          </a:stretch>
-        </p:blipFill>
-        <p:spPr>
-          <a:xfrm>
-            <a:off x="1522071" y="4928616"/>
-            <a:ext cx="878633" cy="768096"/>
-          </a:xfrm>
-          <a:prstGeom prst="rect">
-            <a:avLst/>
-          </a:prstGeom>
-        </p:spPr>
-      </p:pic>
-      <p:sp>
-        <p:nvSpPr>
-          <p:cNvPr id="14" name="Rectangle 13"/>
+      <p:sp>
+        <p:nvSpPr>
+          <p:cNvPr id="13" name="Rectangle 12"/>
           <p:cNvSpPr/>
           <p:nvPr/>
         </p:nvSpPr>
         <p:spPr>
           <a:xfrm>
-            <a:off x="4345293" y="4809744"/>
-            <a:ext cx="1248941" cy="1005840"/>
+            <a:off x="4326026" y="5321808"/>
+            <a:ext cx="3539642" cy="50292"/>
           </a:xfrm>
           <a:prstGeom prst="rect">
             <a:avLst/>
           </a:prstGeom>
           <a:solidFill>
-            <a:srgbClr val="FFFFFF"/>
+            <a:srgbClr val="B45309"/>
           </a:solidFill>
-          <a:ln w="12700">
+          <a:ln>
+            <a:noFill/>
+          </a:ln>
+          <a:effectLst/>
+        </p:spPr>
+        <p:style>
+          <a:lnRef idx="1">
+            <a:schemeClr val="accent1"/>
+          </a:lnRef>
+          <a:fillRef idx="3">
+            <a:schemeClr val="accent1"/>
+          </a:fillRef>
+          <a:effectRef idx="2">
+            <a:schemeClr val="accent1"/>
+          </a:effectRef>
+          <a:fontRef idx="minor">
+            <a:schemeClr val="lt1"/>
+          </a:fontRef>
+        </p:style>
+        <p:txBody>
+          <a:bodyPr rtlCol="0" anchor="ctr"/>
+          <a:lstStyle/>
+          <a:p/>
+        </p:txBody>
+      </p:sp>
+      <p:sp>
+        <p:nvSpPr>
+          <p:cNvPr id="14" name="TextBox 13"/>
+          <p:cNvSpPr txBox="1"/>
+          <p:nvPr/>
+        </p:nvSpPr>
+        <p:spPr>
+          <a:xfrm>
+            <a:off x="4508906" y="5449824"/>
+            <a:ext cx="3173882" cy="201168"/>
+          </a:xfrm>
+          <a:prstGeom prst="rect">
+            <a:avLst/>
+          </a:prstGeom>
+          <a:noFill/>
+        </p:spPr>
+        <p:txBody>
+          <a:bodyPr wrap="square" anchor="t" lIns="0" rIns="0" tIns="0" bIns="0">
+            <a:spAutoFit/>
+          </a:bodyPr>
+          <a:lstStyle/>
+          <a:p>
+            <a:pPr algn="l">
+              <a:lnSpc>
+                <a:spcPct val="118000"/>
+              </a:lnSpc>
+              <a:spcAft>
+                <a:spcPts val="0"/>
+              </a:spcAft>
+            </a:pPr>
+            <a:r>
+              <a:rPr sz="900" b="1">
+                <a:solidFill>
+                  <a:srgbClr val="B45309"/>
+                </a:solidFill>
+                <a:latin typeface="Inter"/>
+              </a:rPr>
+              <a:t>MODE FIRST</a:t>
+            </a:r>
+          </a:p>
+        </p:txBody>
+      </p:sp>
+      <p:sp>
+        <p:nvSpPr>
+          <p:cNvPr id="15" name="TextBox 14"/>
+          <p:cNvSpPr txBox="1"/>
+          <p:nvPr/>
+        </p:nvSpPr>
+        <p:spPr>
+          <a:xfrm>
+            <a:off x="4508906" y="5687568"/>
+            <a:ext cx="3173882" cy="585216"/>
+          </a:xfrm>
+          <a:prstGeom prst="rect">
+            <a:avLst/>
+          </a:prstGeom>
+          <a:noFill/>
+        </p:spPr>
+        <p:txBody>
+          <a:bodyPr wrap="square" anchor="t" lIns="0" rIns="0" tIns="0" bIns="0">
+            <a:spAutoFit/>
+          </a:bodyPr>
+          <a:lstStyle/>
+          <a:p>
+            <a:pPr algn="l">
+              <a:lnSpc>
+                <a:spcPct val="122000"/>
+              </a:lnSpc>
+              <a:spcAft>
+                <a:spcPts val="0"/>
+              </a:spcAft>
+            </a:pPr>
+            <a:r>
+              <a:rPr sz="950" b="0">
+                <a:solidFill>
+                  <a:srgbClr val="0F172A"/>
+                </a:solidFill>
+                <a:latin typeface="Inter"/>
+              </a:rPr>
+              <a:t>Context is resolved before detection, because the same voltage sag means different things in ACCEL and IDLE.</a:t>
+            </a:r>
+          </a:p>
+        </p:txBody>
+      </p:sp>
+      <p:sp>
+        <p:nvSpPr>
+          <p:cNvPr id="16" name="Rectangle 15"/>
+          <p:cNvSpPr/>
+          <p:nvPr/>
+        </p:nvSpPr>
+        <p:spPr>
+          <a:xfrm>
+            <a:off x="8085124" y="5321808"/>
+            <a:ext cx="3539642" cy="1005840"/>
+          </a:xfrm>
+          <a:prstGeom prst="rect">
+            <a:avLst/>
+          </a:prstGeom>
+          <a:solidFill>
+            <a:srgbClr val="F1F5F9"/>
+          </a:solidFill>
+          <a:ln w="9525">
             <a:solidFill>
               <a:srgbClr val="CBD5E1"/>
             </a:solidFill>
@@ -12083,40 +14543,58 @@
           <a:p/>
         </p:txBody>
       </p:sp>
-      <p:pic>
-        <p:nvPicPr>
-          <p:cNvPr id="15" name="Picture 14" descr="p06_img2_x52.jpeg"/>
-          <p:cNvPicPr>
-            <a:picLocks noChangeAspect="1"/>
-          </p:cNvPicPr>
-          <p:nvPr/>
-        </p:nvPicPr>
-        <p:blipFill>
-          <a:blip r:embed="rId3"/>
-          <a:stretch>
-            <a:fillRect/>
-          </a:stretch>
-        </p:blipFill>
-        <p:spPr>
-          <a:xfrm>
-            <a:off x="4464165" y="4928616"/>
-            <a:ext cx="1011197" cy="768096"/>
-          </a:xfrm>
-          <a:prstGeom prst="rect">
-            <a:avLst/>
-          </a:prstGeom>
-        </p:spPr>
-      </p:pic>
-      <p:sp>
-        <p:nvSpPr>
-          <p:cNvPr id="16" name="TextBox 15"/>
-          <p:cNvSpPr txBox="1"/>
-          <p:nvPr/>
-        </p:nvSpPr>
-        <p:spPr>
-          <a:xfrm>
-            <a:off x="566928" y="5843016"/>
-            <a:ext cx="2788920" cy="237744"/>
+      <p:sp>
+        <p:nvSpPr>
+          <p:cNvPr id="17" name="Rectangle 16"/>
+          <p:cNvSpPr/>
+          <p:nvPr/>
+        </p:nvSpPr>
+        <p:spPr>
+          <a:xfrm>
+            <a:off x="8085124" y="5321808"/>
+            <a:ext cx="3539642" cy="50292"/>
+          </a:xfrm>
+          <a:prstGeom prst="rect">
+            <a:avLst/>
+          </a:prstGeom>
+          <a:solidFill>
+            <a:srgbClr val="B91C1C"/>
+          </a:solidFill>
+          <a:ln>
+            <a:noFill/>
+          </a:ln>
+          <a:effectLst/>
+        </p:spPr>
+        <p:style>
+          <a:lnRef idx="1">
+            <a:schemeClr val="accent1"/>
+          </a:lnRef>
+          <a:fillRef idx="3">
+            <a:schemeClr val="accent1"/>
+          </a:fillRef>
+          <a:effectRef idx="2">
+            <a:schemeClr val="accent1"/>
+          </a:effectRef>
+          <a:fontRef idx="minor">
+            <a:schemeClr val="lt1"/>
+          </a:fontRef>
+        </p:style>
+        <p:txBody>
+          <a:bodyPr rtlCol="0" anchor="ctr"/>
+          <a:lstStyle/>
+          <a:p/>
+        </p:txBody>
+      </p:sp>
+      <p:sp>
+        <p:nvSpPr>
+          <p:cNvPr id="18" name="TextBox 17"/>
+          <p:cNvSpPr txBox="1"/>
+          <p:nvPr/>
+        </p:nvSpPr>
+        <p:spPr>
+          <a:xfrm>
+            <a:off x="8268004" y="5449824"/>
+            <a:ext cx="3173882" cy="201168"/>
           </a:xfrm>
           <a:prstGeom prst="rect">
             <a:avLst/>
@@ -12129,7 +14607,7 @@
           </a:bodyPr>
           <a:lstStyle/>
           <a:p>
-            <a:pPr algn="ctr">
+            <a:pPr algn="l">
               <a:lnSpc>
                 <a:spcPct val="118000"/>
               </a:lnSpc>
@@ -12138,107 +14616,59 @@
               </a:spcAft>
             </a:pPr>
             <a:r>
+              <a:rPr sz="900" b="1">
+                <a:solidFill>
+                  <a:srgbClr val="B91C1C"/>
+                </a:solidFill>
+                <a:latin typeface="Inter"/>
+              </a:rPr>
+              <a:t>TWO PATHS</a:t>
+            </a:r>
+          </a:p>
+        </p:txBody>
+      </p:sp>
+      <p:sp>
+        <p:nvSpPr>
+          <p:cNvPr id="19" name="TextBox 18"/>
+          <p:cNvSpPr txBox="1"/>
+          <p:nvPr/>
+        </p:nvSpPr>
+        <p:spPr>
+          <a:xfrm>
+            <a:off x="8268004" y="5687568"/>
+            <a:ext cx="3173882" cy="585216"/>
+          </a:xfrm>
+          <a:prstGeom prst="rect">
+            <a:avLst/>
+          </a:prstGeom>
+          <a:noFill/>
+        </p:spPr>
+        <p:txBody>
+          <a:bodyPr wrap="square" anchor="t" lIns="0" rIns="0" tIns="0" bIns="0">
+            <a:spAutoFit/>
+          </a:bodyPr>
+          <a:lstStyle/>
+          <a:p>
+            <a:pPr algn="l">
+              <a:lnSpc>
+                <a:spcPct val="122000"/>
+              </a:lnSpc>
+              <a:spcAft>
+                <a:spcPts val="0"/>
+              </a:spcAft>
+            </a:pPr>
+            <a:r>
               <a:rPr sz="950" b="0">
                 <a:solidFill>
-                  <a:srgbClr val="475569"/>
-                </a:solidFill>
-                <a:latin typeface="Inter"/>
-              </a:rPr>
-              <a:t>Raspberry Pi 5</a:t>
-            </a:r>
-          </a:p>
-        </p:txBody>
-      </p:sp>
-      <p:sp>
-        <p:nvSpPr>
-          <p:cNvPr id="17" name="TextBox 16"/>
-          <p:cNvSpPr txBox="1"/>
-          <p:nvPr/>
-        </p:nvSpPr>
-        <p:spPr>
-          <a:xfrm>
-            <a:off x="3575304" y="5843016"/>
-            <a:ext cx="2788920" cy="237744"/>
-          </a:xfrm>
-          <a:prstGeom prst="rect">
-            <a:avLst/>
-          </a:prstGeom>
-          <a:noFill/>
-        </p:spPr>
-        <p:txBody>
-          <a:bodyPr wrap="square" anchor="t" lIns="0" rIns="0" tIns="0" bIns="0">
-            <a:spAutoFit/>
-          </a:bodyPr>
-          <a:lstStyle/>
-          <a:p>
-            <a:pPr algn="ctr">
-              <a:lnSpc>
-                <a:spcPct val="118000"/>
-              </a:lnSpc>
-              <a:spcAft>
-                <a:spcPts val="0"/>
-              </a:spcAft>
-            </a:pPr>
-            <a:r>
-              <a:rPr sz="950" b="0">
-                <a:solidFill>
-                  <a:srgbClr val="475569"/>
-                </a:solidFill>
-                <a:latin typeface="Inter"/>
-              </a:rPr>
-              <a:t>Arduino Uno R4 WiFi</a:t>
-            </a:r>
-          </a:p>
-        </p:txBody>
-      </p:sp>
-      <p:pic>
-        <p:nvPicPr>
-          <p:cNvPr id="18" name="Picture 17" descr="diag_hardware.png"/>
-          <p:cNvPicPr>
-            <a:picLocks noChangeAspect="1"/>
-          </p:cNvPicPr>
-          <p:nvPr/>
-        </p:nvPicPr>
-        <p:blipFill>
-          <a:blip r:embed="rId4"/>
-          <a:stretch>
-            <a:fillRect/>
-          </a:stretch>
-        </p:blipFill>
-        <p:spPr>
-          <a:xfrm>
-            <a:off x="7144947" y="1481328"/>
-            <a:ext cx="4028280" cy="2240280"/>
-          </a:xfrm>
-          <a:prstGeom prst="rect">
-            <a:avLst/>
-          </a:prstGeom>
-        </p:spPr>
-      </p:pic>
-      <p:pic>
-        <p:nvPicPr>
-          <p:cNvPr id="19" name="Picture 18" descr="diag_system_flow.png"/>
-          <p:cNvPicPr>
-            <a:picLocks noChangeAspect="1"/>
-          </p:cNvPicPr>
-          <p:nvPr/>
-        </p:nvPicPr>
-        <p:blipFill>
-          <a:blip r:embed="rId5"/>
-          <a:stretch>
-            <a:fillRect/>
-          </a:stretch>
-        </p:blipFill>
-        <p:spPr>
-          <a:xfrm>
-            <a:off x="6693408" y="3947843"/>
-            <a:ext cx="4931359" cy="2080417"/>
-          </a:xfrm>
-          <a:prstGeom prst="rect">
-            <a:avLst/>
-          </a:prstGeom>
-        </p:spPr>
-      </p:pic>
+                  <a:srgbClr val="0F172A"/>
+                </a:solidFill>
+                <a:latin typeface="Inter"/>
+              </a:rPr>
+              <a:t>The ML lane can abstain or be wrong. The hardware lane cannot — it runs at the pack, with no software in it.</a:t>
+            </a:r>
+          </a:p>
+        </p:txBody>
+      </p:sp>
     </p:spTree>
   </p:cSld>
   <p:clrMapOvr>
@@ -12302,7 +14732,7 @@
                 </a:solidFill>
                 <a:latin typeface="Inter"/>
               </a:rPr>
-              <a:t>The platform an operator actually uses</a:t>
+              <a:t>Three tiers at the edge, three surfaces in the browser</a:t>
             </a:r>
           </a:p>
         </p:txBody>
@@ -12518,7 +14948,7 @@
                 </a:solidFill>
                 <a:latin typeface="Inter"/>
               </a:rPr>
-              <a:t>Flask dashboard on Railway, live per-cell voltages.</a:t>
+              <a:t>JBD BMS senses eight taps and four NTCs.</a:t>
             </a:r>
           </a:p>
           <a:p>
@@ -12543,7 +14973,7 @@
                 </a:solidFill>
                 <a:latin typeface="Inter"/>
               </a:rPr>
-              <a:t>Pack current and four temperature zones.</a:t>
+              <a:t>Pi 5 runs the logger and XGBoost inference.</a:t>
             </a:r>
           </a:p>
           <a:p>
@@ -12568,7 +14998,7 @@
                 </a:solidFill>
                 <a:latin typeface="Inter"/>
               </a:rPr>
-              <a:t>Charge/discharge ETA smoothed by EMA.</a:t>
+              <a:t>Arduino R4 watches the Pi's heartbeat.</a:t>
             </a:r>
           </a:p>
         </p:txBody>
@@ -12616,7 +15046,7 @@
                 </a:solidFill>
                 <a:latin typeface="Inter"/>
               </a:rPr>
-              <a:t>Four driving modes from |I(T)| vs |I(T-1)|.</a:t>
+              <a:t>Missed beat pulls RUN pin, resets the Pi.</a:t>
             </a:r>
           </a:p>
           <a:p>
@@ -12641,7 +15071,7 @@
                 </a:solidFill>
                 <a:latin typeface="Inter"/>
               </a:rPr>
-              <a:t>39 cycles compared against their own history.</a:t>
+              <a:t>Inference stays local: no link, no safety gap.</a:t>
             </a:r>
           </a:p>
           <a:p>
@@ -12666,7 +15096,7 @@
                 </a:solidFill>
                 <a:latin typeface="Inter"/>
               </a:rPr>
-              <a:t>Alert log: value, threshold, severity, resolution.</a:t>
+              <a:t>Pi dials out to Railway — no inbound port.</a:t>
             </a:r>
           </a:p>
         </p:txBody>
@@ -12679,352 +15109,8 @@
         </p:nvSpPr>
         <p:spPr>
           <a:xfrm>
-            <a:off x="566928" y="3584448"/>
-            <a:ext cx="1367028" cy="475488"/>
-          </a:xfrm>
-          <a:prstGeom prst="rect">
-            <a:avLst/>
-          </a:prstGeom>
-          <a:solidFill>
-            <a:srgbClr val="FFFFFF"/>
-          </a:solidFill>
-          <a:ln w="15240">
-            <a:solidFill>
-              <a:srgbClr val="475569"/>
-            </a:solidFill>
-          </a:ln>
-          <a:effectLst/>
-        </p:spPr>
-        <p:style>
-          <a:lnRef idx="1">
-            <a:schemeClr val="accent1"/>
-          </a:lnRef>
-          <a:fillRef idx="3">
-            <a:schemeClr val="accent1"/>
-          </a:fillRef>
-          <a:effectRef idx="2">
-            <a:schemeClr val="accent1"/>
-          </a:effectRef>
-          <a:fontRef idx="minor">
-            <a:schemeClr val="lt1"/>
-          </a:fontRef>
-        </p:style>
-        <p:txBody>
-          <a:bodyPr rtlCol="0" anchor="ctr"/>
-          <a:lstStyle/>
-          <a:p/>
-        </p:txBody>
-      </p:sp>
-      <p:sp>
-        <p:nvSpPr>
-          <p:cNvPr id="10" name="TextBox 9"/>
-          <p:cNvSpPr txBox="1"/>
-          <p:nvPr/>
-        </p:nvSpPr>
-        <p:spPr>
-          <a:xfrm>
-            <a:off x="566928" y="3584448"/>
-            <a:ext cx="1367028" cy="475488"/>
-          </a:xfrm>
-          <a:prstGeom prst="rect">
-            <a:avLst/>
-          </a:prstGeom>
-          <a:noFill/>
-        </p:spPr>
-        <p:txBody>
-          <a:bodyPr wrap="square" anchor="ctr" lIns="0" rIns="0" tIns="0" bIns="0">
-            <a:spAutoFit/>
-          </a:bodyPr>
-          <a:lstStyle/>
-          <a:p>
-            <a:pPr algn="ctr">
-              <a:lnSpc>
-                <a:spcPct val="118000"/>
-              </a:lnSpc>
-              <a:spcAft>
-                <a:spcPts val="0"/>
-              </a:spcAft>
-            </a:pPr>
-            <a:r>
-              <a:rPr sz="1200" b="1">
-                <a:solidFill>
-                  <a:srgbClr val="475569"/>
-                </a:solidFill>
-                <a:latin typeface="Inter"/>
-              </a:rPr>
-              <a:t>IDLE</a:t>
-            </a:r>
-          </a:p>
-        </p:txBody>
-      </p:sp>
-      <p:sp>
-        <p:nvSpPr>
-          <p:cNvPr id="11" name="Rectangle 10"/>
-          <p:cNvSpPr/>
-          <p:nvPr/>
-        </p:nvSpPr>
-        <p:spPr>
-          <a:xfrm>
-            <a:off x="2043684" y="3584448"/>
-            <a:ext cx="1367028" cy="475488"/>
-          </a:xfrm>
-          <a:prstGeom prst="rect">
-            <a:avLst/>
-          </a:prstGeom>
-          <a:solidFill>
-            <a:srgbClr val="FFFFFF"/>
-          </a:solidFill>
-          <a:ln w="15240">
-            <a:solidFill>
-              <a:srgbClr val="B91C1C"/>
-            </a:solidFill>
-          </a:ln>
-          <a:effectLst/>
-        </p:spPr>
-        <p:style>
-          <a:lnRef idx="1">
-            <a:schemeClr val="accent1"/>
-          </a:lnRef>
-          <a:fillRef idx="3">
-            <a:schemeClr val="accent1"/>
-          </a:fillRef>
-          <a:effectRef idx="2">
-            <a:schemeClr val="accent1"/>
-          </a:effectRef>
-          <a:fontRef idx="minor">
-            <a:schemeClr val="lt1"/>
-          </a:fontRef>
-        </p:style>
-        <p:txBody>
-          <a:bodyPr rtlCol="0" anchor="ctr"/>
-          <a:lstStyle/>
-          <a:p/>
-        </p:txBody>
-      </p:sp>
-      <p:sp>
-        <p:nvSpPr>
-          <p:cNvPr id="12" name="TextBox 11"/>
-          <p:cNvSpPr txBox="1"/>
-          <p:nvPr/>
-        </p:nvSpPr>
-        <p:spPr>
-          <a:xfrm>
-            <a:off x="2043684" y="3584448"/>
-            <a:ext cx="1367028" cy="475488"/>
-          </a:xfrm>
-          <a:prstGeom prst="rect">
-            <a:avLst/>
-          </a:prstGeom>
-          <a:noFill/>
-        </p:spPr>
-        <p:txBody>
-          <a:bodyPr wrap="square" anchor="ctr" lIns="0" rIns="0" tIns="0" bIns="0">
-            <a:spAutoFit/>
-          </a:bodyPr>
-          <a:lstStyle/>
-          <a:p>
-            <a:pPr algn="ctr">
-              <a:lnSpc>
-                <a:spcPct val="118000"/>
-              </a:lnSpc>
-              <a:spcAft>
-                <a:spcPts val="0"/>
-              </a:spcAft>
-            </a:pPr>
-            <a:r>
-              <a:rPr sz="1200" b="1">
-                <a:solidFill>
-                  <a:srgbClr val="B91C1C"/>
-                </a:solidFill>
-                <a:latin typeface="Inter"/>
-              </a:rPr>
-              <a:t>ACCEL</a:t>
-            </a:r>
-          </a:p>
-        </p:txBody>
-      </p:sp>
-      <p:sp>
-        <p:nvSpPr>
-          <p:cNvPr id="13" name="Rectangle 12"/>
-          <p:cNvSpPr/>
-          <p:nvPr/>
-        </p:nvSpPr>
-        <p:spPr>
-          <a:xfrm>
-            <a:off x="3520439" y="3584448"/>
-            <a:ext cx="1367028" cy="475488"/>
-          </a:xfrm>
-          <a:prstGeom prst="rect">
-            <a:avLst/>
-          </a:prstGeom>
-          <a:solidFill>
-            <a:srgbClr val="FFFFFF"/>
-          </a:solidFill>
-          <a:ln w="15240">
-            <a:solidFill>
-              <a:srgbClr val="0E7490"/>
-            </a:solidFill>
-          </a:ln>
-          <a:effectLst/>
-        </p:spPr>
-        <p:style>
-          <a:lnRef idx="1">
-            <a:schemeClr val="accent1"/>
-          </a:lnRef>
-          <a:fillRef idx="3">
-            <a:schemeClr val="accent1"/>
-          </a:fillRef>
-          <a:effectRef idx="2">
-            <a:schemeClr val="accent1"/>
-          </a:effectRef>
-          <a:fontRef idx="minor">
-            <a:schemeClr val="lt1"/>
-          </a:fontRef>
-        </p:style>
-        <p:txBody>
-          <a:bodyPr rtlCol="0" anchor="ctr"/>
-          <a:lstStyle/>
-          <a:p/>
-        </p:txBody>
-      </p:sp>
-      <p:sp>
-        <p:nvSpPr>
-          <p:cNvPr id="14" name="TextBox 13"/>
-          <p:cNvSpPr txBox="1"/>
-          <p:nvPr/>
-        </p:nvSpPr>
-        <p:spPr>
-          <a:xfrm>
-            <a:off x="3520439" y="3584448"/>
-            <a:ext cx="1367028" cy="475488"/>
-          </a:xfrm>
-          <a:prstGeom prst="rect">
-            <a:avLst/>
-          </a:prstGeom>
-          <a:noFill/>
-        </p:spPr>
-        <p:txBody>
-          <a:bodyPr wrap="square" anchor="ctr" lIns="0" rIns="0" tIns="0" bIns="0">
-            <a:spAutoFit/>
-          </a:bodyPr>
-          <a:lstStyle/>
-          <a:p>
-            <a:pPr algn="ctr">
-              <a:lnSpc>
-                <a:spcPct val="118000"/>
-              </a:lnSpc>
-              <a:spcAft>
-                <a:spcPts val="0"/>
-              </a:spcAft>
-            </a:pPr>
-            <a:r>
-              <a:rPr sz="1200" b="1">
-                <a:solidFill>
-                  <a:srgbClr val="0E7490"/>
-                </a:solidFill>
-                <a:latin typeface="Inter"/>
-              </a:rPr>
-              <a:t>CRUISE</a:t>
-            </a:r>
-          </a:p>
-        </p:txBody>
-      </p:sp>
-      <p:sp>
-        <p:nvSpPr>
-          <p:cNvPr id="15" name="Rectangle 14"/>
-          <p:cNvSpPr/>
-          <p:nvPr/>
-        </p:nvSpPr>
-        <p:spPr>
-          <a:xfrm>
-            <a:off x="4997195" y="3584448"/>
-            <a:ext cx="1367028" cy="475488"/>
-          </a:xfrm>
-          <a:prstGeom prst="rect">
-            <a:avLst/>
-          </a:prstGeom>
-          <a:solidFill>
-            <a:srgbClr val="FFFFFF"/>
-          </a:solidFill>
-          <a:ln w="15240">
-            <a:solidFill>
-              <a:srgbClr val="B45309"/>
-            </a:solidFill>
-          </a:ln>
-          <a:effectLst/>
-        </p:spPr>
-        <p:style>
-          <a:lnRef idx="1">
-            <a:schemeClr val="accent1"/>
-          </a:lnRef>
-          <a:fillRef idx="3">
-            <a:schemeClr val="accent1"/>
-          </a:fillRef>
-          <a:effectRef idx="2">
-            <a:schemeClr val="accent1"/>
-          </a:effectRef>
-          <a:fontRef idx="minor">
-            <a:schemeClr val="lt1"/>
-          </a:fontRef>
-        </p:style>
-        <p:txBody>
-          <a:bodyPr rtlCol="0" anchor="ctr"/>
-          <a:lstStyle/>
-          <a:p/>
-        </p:txBody>
-      </p:sp>
-      <p:sp>
-        <p:nvSpPr>
-          <p:cNvPr id="16" name="TextBox 15"/>
-          <p:cNvSpPr txBox="1"/>
-          <p:nvPr/>
-        </p:nvSpPr>
-        <p:spPr>
-          <a:xfrm>
-            <a:off x="4997195" y="3584448"/>
-            <a:ext cx="1367028" cy="475488"/>
-          </a:xfrm>
-          <a:prstGeom prst="rect">
-            <a:avLst/>
-          </a:prstGeom>
-          <a:noFill/>
-        </p:spPr>
-        <p:txBody>
-          <a:bodyPr wrap="square" anchor="ctr" lIns="0" rIns="0" tIns="0" bIns="0">
-            <a:spAutoFit/>
-          </a:bodyPr>
-          <a:lstStyle/>
-          <a:p>
-            <a:pPr algn="ctr">
-              <a:lnSpc>
-                <a:spcPct val="118000"/>
-              </a:lnSpc>
-              <a:spcAft>
-                <a:spcPts val="0"/>
-              </a:spcAft>
-            </a:pPr>
-            <a:r>
-              <a:rPr sz="1200" b="1">
-                <a:solidFill>
-                  <a:srgbClr val="B45309"/>
-                </a:solidFill>
-                <a:latin typeface="Inter"/>
-              </a:rPr>
-              <a:t>DECEL</a:t>
-            </a:r>
-          </a:p>
-        </p:txBody>
-      </p:sp>
-      <p:sp>
-        <p:nvSpPr>
-          <p:cNvPr id="17" name="Rectangle 16"/>
-          <p:cNvSpPr/>
-          <p:nvPr/>
-        </p:nvSpPr>
-        <p:spPr>
-          <a:xfrm>
-            <a:off x="566928" y="4224528"/>
-            <a:ext cx="5797296" cy="1828800"/>
+            <a:off x="566928" y="3602736"/>
+            <a:ext cx="5797296" cy="1078992"/>
           </a:xfrm>
           <a:prstGeom prst="rect">
             <a:avLst/>
@@ -13061,13 +15147,13 @@
       </p:sp>
       <p:sp>
         <p:nvSpPr>
-          <p:cNvPr id="18" name="TextBox 17"/>
-          <p:cNvSpPr txBox="1"/>
-          <p:nvPr/>
-        </p:nvSpPr>
-        <p:spPr>
-          <a:xfrm>
-            <a:off x="768096" y="4334256"/>
+          <p:cNvPr id="10" name="TextBox 9"/>
+          <p:cNvSpPr txBox="1"/>
+          <p:nvPr/>
+        </p:nvSpPr>
+        <p:spPr>
+          <a:xfrm>
+            <a:off x="768096" y="3712463"/>
             <a:ext cx="5394959" cy="219456"/>
           </a:xfrm>
           <a:prstGeom prst="rect">
@@ -13096,21 +15182,21 @@
                 </a:solidFill>
                 <a:latin typeface="Inter"/>
               </a:rPr>
-              <a:t>CONTEXT IS A FEATURE</a:t>
-            </a:r>
-          </a:p>
-        </p:txBody>
-      </p:sp>
-      <p:sp>
-        <p:nvSpPr>
-          <p:cNvPr id="19" name="TextBox 18"/>
-          <p:cNvSpPr txBox="1"/>
-          <p:nvPr/>
-        </p:nvSpPr>
-        <p:spPr>
-          <a:xfrm>
-            <a:off x="768096" y="4590288"/>
-            <a:ext cx="5394959" cy="1371600"/>
+              <a:t>ACCELERATION PATH</a:t>
+            </a:r>
+          </a:p>
+        </p:txBody>
+      </p:sp>
+      <p:sp>
+        <p:nvSpPr>
+          <p:cNvPr id="11" name="TextBox 10"/>
+          <p:cNvSpPr txBox="1"/>
+          <p:nvPr/>
+        </p:nvSpPr>
+        <p:spPr>
+          <a:xfrm>
+            <a:off x="768096" y="3968496"/>
+            <a:ext cx="5394959" cy="640080"/>
           </a:xfrm>
           <a:prstGeom prst="rect">
             <a:avLst/>
@@ -13138,21 +15224,21 @@
                 </a:solidFill>
                 <a:latin typeface="Inter"/>
               </a:rPr>
-              <a:t>A sag under ACCEL is normal; the same sag at IDLE is a fault, so thresholds follow the mode. The three mode flags carry 12.4% of the model's total gain and ntc_spread another 5.0% — nearly a fifth of the decision comes from context pack-level sensors cannot provide.</a:t>
-            </a:r>
-          </a:p>
-        </p:txBody>
-      </p:sp>
-      <p:sp>
-        <p:nvSpPr>
-          <p:cNvPr id="20" name="Rectangle 19"/>
+              <a:t>Zynq-7000 SoC moves the same tree traversal into programmable logic, freeing the CPU for the logger and the BLE link.</a:t>
+            </a:r>
+          </a:p>
+        </p:txBody>
+      </p:sp>
+      <p:sp>
+        <p:nvSpPr>
+          <p:cNvPr id="12" name="Rectangle 11"/>
           <p:cNvSpPr/>
           <p:nvPr/>
         </p:nvSpPr>
         <p:spPr>
           <a:xfrm>
-            <a:off x="7799494" y="1463040"/>
-            <a:ext cx="2719185" cy="1783079"/>
+            <a:off x="1403199" y="4809744"/>
+            <a:ext cx="1116377" cy="1005840"/>
           </a:xfrm>
           <a:prstGeom prst="rect">
             <a:avLst/>
@@ -13189,7 +15275,7 @@
       </p:sp>
       <p:pic>
         <p:nvPicPr>
-          <p:cNvPr id="21" name="Picture 20" descr="mock_landing.png"/>
+          <p:cNvPr id="13" name="Picture 12" descr="p06_img1_x51.jpeg"/>
           <p:cNvPicPr>
             <a:picLocks noChangeAspect="1"/>
           </p:cNvPicPr>
@@ -13203,8 +15289,8 @@
         </p:blipFill>
         <p:spPr>
           <a:xfrm>
-            <a:off x="7918366" y="1581912"/>
-            <a:ext cx="2481441" cy="1545335"/>
+            <a:off x="1522071" y="4928616"/>
+            <a:ext cx="878633" cy="768096"/>
           </a:xfrm>
           <a:prstGeom prst="rect">
             <a:avLst/>
@@ -13213,14 +15299,14 @@
       </p:pic>
       <p:sp>
         <p:nvSpPr>
-          <p:cNvPr id="22" name="Rectangle 21"/>
+          <p:cNvPr id="14" name="Rectangle 13"/>
           <p:cNvSpPr/>
           <p:nvPr/>
         </p:nvSpPr>
         <p:spPr>
           <a:xfrm>
-            <a:off x="7538301" y="3328416"/>
-            <a:ext cx="3241571" cy="1371600"/>
+            <a:off x="4345293" y="4809744"/>
+            <a:ext cx="1248941" cy="1005840"/>
           </a:xfrm>
           <a:prstGeom prst="rect">
             <a:avLst/>
@@ -13257,7 +15343,7 @@
       </p:sp>
       <p:pic>
         <p:nvPicPr>
-          <p:cNvPr id="23" name="Picture 22" descr="p07_img1_x61.jpeg"/>
+          <p:cNvPr id="15" name="Picture 14" descr="p06_img2_x52.jpeg"/>
           <p:cNvPicPr>
             <a:picLocks noChangeAspect="1"/>
           </p:cNvPicPr>
@@ -13271,17 +15357,101 @@
         </p:blipFill>
         <p:spPr>
           <a:xfrm>
-            <a:off x="7657173" y="3447288"/>
-            <a:ext cx="3003827" cy="1133856"/>
+            <a:off x="4464165" y="4928616"/>
+            <a:ext cx="1011197" cy="768096"/>
           </a:xfrm>
           <a:prstGeom prst="rect">
             <a:avLst/>
           </a:prstGeom>
         </p:spPr>
       </p:pic>
+      <p:sp>
+        <p:nvSpPr>
+          <p:cNvPr id="16" name="TextBox 15"/>
+          <p:cNvSpPr txBox="1"/>
+          <p:nvPr/>
+        </p:nvSpPr>
+        <p:spPr>
+          <a:xfrm>
+            <a:off x="566928" y="5843016"/>
+            <a:ext cx="2788920" cy="237744"/>
+          </a:xfrm>
+          <a:prstGeom prst="rect">
+            <a:avLst/>
+          </a:prstGeom>
+          <a:noFill/>
+        </p:spPr>
+        <p:txBody>
+          <a:bodyPr wrap="square" anchor="t" lIns="0" rIns="0" tIns="0" bIns="0">
+            <a:spAutoFit/>
+          </a:bodyPr>
+          <a:lstStyle/>
+          <a:p>
+            <a:pPr algn="ctr">
+              <a:lnSpc>
+                <a:spcPct val="118000"/>
+              </a:lnSpc>
+              <a:spcAft>
+                <a:spcPts val="0"/>
+              </a:spcAft>
+            </a:pPr>
+            <a:r>
+              <a:rPr sz="950" b="0">
+                <a:solidFill>
+                  <a:srgbClr val="475569"/>
+                </a:solidFill>
+                <a:latin typeface="Inter"/>
+              </a:rPr>
+              <a:t>Raspberry Pi 5</a:t>
+            </a:r>
+          </a:p>
+        </p:txBody>
+      </p:sp>
+      <p:sp>
+        <p:nvSpPr>
+          <p:cNvPr id="17" name="TextBox 16"/>
+          <p:cNvSpPr txBox="1"/>
+          <p:nvPr/>
+        </p:nvSpPr>
+        <p:spPr>
+          <a:xfrm>
+            <a:off x="3575304" y="5843016"/>
+            <a:ext cx="2788920" cy="237744"/>
+          </a:xfrm>
+          <a:prstGeom prst="rect">
+            <a:avLst/>
+          </a:prstGeom>
+          <a:noFill/>
+        </p:spPr>
+        <p:txBody>
+          <a:bodyPr wrap="square" anchor="t" lIns="0" rIns="0" tIns="0" bIns="0">
+            <a:spAutoFit/>
+          </a:bodyPr>
+          <a:lstStyle/>
+          <a:p>
+            <a:pPr algn="ctr">
+              <a:lnSpc>
+                <a:spcPct val="118000"/>
+              </a:lnSpc>
+              <a:spcAft>
+                <a:spcPts val="0"/>
+              </a:spcAft>
+            </a:pPr>
+            <a:r>
+              <a:rPr sz="950" b="0">
+                <a:solidFill>
+                  <a:srgbClr val="475569"/>
+                </a:solidFill>
+                <a:latin typeface="Inter"/>
+              </a:rPr>
+              <a:t>Arduino Uno R4 WiFi</a:t>
+            </a:r>
+          </a:p>
+        </p:txBody>
+      </p:sp>
       <p:pic>
         <p:nvPicPr>
-          <p:cNvPr id="24" name="Picture 23" descr="fig_cycle_history.png"/>
+          <p:cNvPr id="18" name="Picture 17" descr="diag_hardware.png"/>
           <p:cNvPicPr>
             <a:picLocks noChangeAspect="1"/>
           </p:cNvPicPr>
@@ -13295,8 +15465,32 @@
         </p:blipFill>
         <p:spPr>
           <a:xfrm>
-            <a:off x="7890175" y="4791456"/>
-            <a:ext cx="2537824" cy="1417320"/>
+            <a:off x="7144947" y="1481328"/>
+            <a:ext cx="4028280" cy="2240280"/>
+          </a:xfrm>
+          <a:prstGeom prst="rect">
+            <a:avLst/>
+          </a:prstGeom>
+        </p:spPr>
+      </p:pic>
+      <p:pic>
+        <p:nvPicPr>
+          <p:cNvPr id="19" name="Picture 18" descr="diag_system_flow.png"/>
+          <p:cNvPicPr>
+            <a:picLocks noChangeAspect="1"/>
+          </p:cNvPicPr>
+          <p:nvPr/>
+        </p:nvPicPr>
+        <p:blipFill>
+          <a:blip r:embed="rId5"/>
+          <a:stretch>
+            <a:fillRect/>
+          </a:stretch>
+        </p:blipFill>
+        <p:spPr>
+          <a:xfrm>
+            <a:off x="6693408" y="3947843"/>
+            <a:ext cx="4931359" cy="2080417"/>
           </a:xfrm>
           <a:prstGeom prst="rect">
             <a:avLst/>
@@ -13366,7 +15560,7 @@
                 </a:solidFill>
                 <a:latin typeface="Inter"/>
               </a:rPr>
-              <a:t>Swap the chemistry, not the codebase</a:t>
+              <a:t>The platform an operator actually uses</a:t>
             </a:r>
           </a:p>
         </p:txBody>
@@ -13548,7 +15742,7 @@
         <p:spPr>
           <a:xfrm>
             <a:off x="566928" y="1499616"/>
-            <a:ext cx="2761488" cy="1874519"/>
+            <a:ext cx="2761488" cy="1920240"/>
           </a:xfrm>
           <a:prstGeom prst="rect">
             <a:avLst/>
@@ -13582,7 +15776,7 @@
                 </a:solidFill>
                 <a:latin typeface="Inter"/>
               </a:rPr>
-              <a:t>Upload a datasheet PDF; the parser reads limits.</a:t>
+              <a:t>Flask dashboard on Railway, live per-cell voltages.</a:t>
             </a:r>
           </a:p>
           <a:p>
@@ -13607,7 +15801,7 @@
                 </a:solidFill>
                 <a:latin typeface="Inter"/>
               </a:rPr>
-              <a:t>V_nom, V_max, V_min, capacity, current, thermal.</a:t>
+              <a:t>Pack current and four temperature zones.</a:t>
             </a:r>
           </a:p>
           <a:p>
@@ -13632,7 +15826,7 @@
                 </a:solidFill>
                 <a:latin typeface="Inter"/>
               </a:rPr>
-              <a:t>Pack sizing derives S and P from the bus target.</a:t>
+              <a:t>Charge/discharge ETA smoothed by EMA.</a:t>
             </a:r>
           </a:p>
         </p:txBody>
@@ -13646,7 +15840,7 @@
         <p:spPr>
           <a:xfrm>
             <a:off x="3602736" y="1499616"/>
-            <a:ext cx="2761488" cy="1874519"/>
+            <a:ext cx="2761488" cy="1920240"/>
           </a:xfrm>
           <a:prstGeom prst="rect">
             <a:avLst/>
@@ -13680,7 +15874,7 @@
                 </a:solidFill>
                 <a:latin typeface="Inter"/>
               </a:rPr>
-              <a:t>NMC reuse → NCA/LCO shift → LFP remap → LTO rescale.</a:t>
+              <a:t>Four driving modes from |I(T)| vs |I(T-1)|.</a:t>
             </a:r>
           </a:p>
           <a:p>
@@ -13705,7 +15899,7 @@
                 </a:solidFill>
                 <a:latin typeface="Inter"/>
               </a:rPr>
-              <a:t>Overvoltage warns 95%, critical 100%.</a:t>
+              <a:t>39 cycles compared against their own history.</a:t>
             </a:r>
           </a:p>
           <a:p>
@@ -13730,7 +15924,7 @@
                 </a:solidFill>
                 <a:latin typeface="Inter"/>
               </a:rPr>
-              <a:t>active_profile.json + PostgreSQL sync, no restart.</a:t>
+              <a:t>Alert log: value, threshold, severity, resolution.</a:t>
             </a:r>
           </a:p>
         </p:txBody>
@@ -13743,8 +15937,352 @@
         </p:nvSpPr>
         <p:spPr>
           <a:xfrm>
-            <a:off x="566928" y="3547872"/>
-            <a:ext cx="5797296" cy="969264"/>
+            <a:off x="566928" y="3584448"/>
+            <a:ext cx="1367028" cy="475488"/>
+          </a:xfrm>
+          <a:prstGeom prst="rect">
+            <a:avLst/>
+          </a:prstGeom>
+          <a:solidFill>
+            <a:srgbClr val="FFFFFF"/>
+          </a:solidFill>
+          <a:ln w="15240">
+            <a:solidFill>
+              <a:srgbClr val="475569"/>
+            </a:solidFill>
+          </a:ln>
+          <a:effectLst/>
+        </p:spPr>
+        <p:style>
+          <a:lnRef idx="1">
+            <a:schemeClr val="accent1"/>
+          </a:lnRef>
+          <a:fillRef idx="3">
+            <a:schemeClr val="accent1"/>
+          </a:fillRef>
+          <a:effectRef idx="2">
+            <a:schemeClr val="accent1"/>
+          </a:effectRef>
+          <a:fontRef idx="minor">
+            <a:schemeClr val="lt1"/>
+          </a:fontRef>
+        </p:style>
+        <p:txBody>
+          <a:bodyPr rtlCol="0" anchor="ctr"/>
+          <a:lstStyle/>
+          <a:p/>
+        </p:txBody>
+      </p:sp>
+      <p:sp>
+        <p:nvSpPr>
+          <p:cNvPr id="10" name="TextBox 9"/>
+          <p:cNvSpPr txBox="1"/>
+          <p:nvPr/>
+        </p:nvSpPr>
+        <p:spPr>
+          <a:xfrm>
+            <a:off x="566928" y="3584448"/>
+            <a:ext cx="1367028" cy="475488"/>
+          </a:xfrm>
+          <a:prstGeom prst="rect">
+            <a:avLst/>
+          </a:prstGeom>
+          <a:noFill/>
+        </p:spPr>
+        <p:txBody>
+          <a:bodyPr wrap="square" anchor="ctr" lIns="0" rIns="0" tIns="0" bIns="0">
+            <a:spAutoFit/>
+          </a:bodyPr>
+          <a:lstStyle/>
+          <a:p>
+            <a:pPr algn="ctr">
+              <a:lnSpc>
+                <a:spcPct val="118000"/>
+              </a:lnSpc>
+              <a:spcAft>
+                <a:spcPts val="0"/>
+              </a:spcAft>
+            </a:pPr>
+            <a:r>
+              <a:rPr sz="1200" b="1">
+                <a:solidFill>
+                  <a:srgbClr val="475569"/>
+                </a:solidFill>
+                <a:latin typeface="Inter"/>
+              </a:rPr>
+              <a:t>IDLE</a:t>
+            </a:r>
+          </a:p>
+        </p:txBody>
+      </p:sp>
+      <p:sp>
+        <p:nvSpPr>
+          <p:cNvPr id="11" name="Rectangle 10"/>
+          <p:cNvSpPr/>
+          <p:nvPr/>
+        </p:nvSpPr>
+        <p:spPr>
+          <a:xfrm>
+            <a:off x="2043684" y="3584448"/>
+            <a:ext cx="1367028" cy="475488"/>
+          </a:xfrm>
+          <a:prstGeom prst="rect">
+            <a:avLst/>
+          </a:prstGeom>
+          <a:solidFill>
+            <a:srgbClr val="FFFFFF"/>
+          </a:solidFill>
+          <a:ln w="15240">
+            <a:solidFill>
+              <a:srgbClr val="B91C1C"/>
+            </a:solidFill>
+          </a:ln>
+          <a:effectLst/>
+        </p:spPr>
+        <p:style>
+          <a:lnRef idx="1">
+            <a:schemeClr val="accent1"/>
+          </a:lnRef>
+          <a:fillRef idx="3">
+            <a:schemeClr val="accent1"/>
+          </a:fillRef>
+          <a:effectRef idx="2">
+            <a:schemeClr val="accent1"/>
+          </a:effectRef>
+          <a:fontRef idx="minor">
+            <a:schemeClr val="lt1"/>
+          </a:fontRef>
+        </p:style>
+        <p:txBody>
+          <a:bodyPr rtlCol="0" anchor="ctr"/>
+          <a:lstStyle/>
+          <a:p/>
+        </p:txBody>
+      </p:sp>
+      <p:sp>
+        <p:nvSpPr>
+          <p:cNvPr id="12" name="TextBox 11"/>
+          <p:cNvSpPr txBox="1"/>
+          <p:nvPr/>
+        </p:nvSpPr>
+        <p:spPr>
+          <a:xfrm>
+            <a:off x="2043684" y="3584448"/>
+            <a:ext cx="1367028" cy="475488"/>
+          </a:xfrm>
+          <a:prstGeom prst="rect">
+            <a:avLst/>
+          </a:prstGeom>
+          <a:noFill/>
+        </p:spPr>
+        <p:txBody>
+          <a:bodyPr wrap="square" anchor="ctr" lIns="0" rIns="0" tIns="0" bIns="0">
+            <a:spAutoFit/>
+          </a:bodyPr>
+          <a:lstStyle/>
+          <a:p>
+            <a:pPr algn="ctr">
+              <a:lnSpc>
+                <a:spcPct val="118000"/>
+              </a:lnSpc>
+              <a:spcAft>
+                <a:spcPts val="0"/>
+              </a:spcAft>
+            </a:pPr>
+            <a:r>
+              <a:rPr sz="1200" b="1">
+                <a:solidFill>
+                  <a:srgbClr val="B91C1C"/>
+                </a:solidFill>
+                <a:latin typeface="Inter"/>
+              </a:rPr>
+              <a:t>ACCEL</a:t>
+            </a:r>
+          </a:p>
+        </p:txBody>
+      </p:sp>
+      <p:sp>
+        <p:nvSpPr>
+          <p:cNvPr id="13" name="Rectangle 12"/>
+          <p:cNvSpPr/>
+          <p:nvPr/>
+        </p:nvSpPr>
+        <p:spPr>
+          <a:xfrm>
+            <a:off x="3520439" y="3584448"/>
+            <a:ext cx="1367028" cy="475488"/>
+          </a:xfrm>
+          <a:prstGeom prst="rect">
+            <a:avLst/>
+          </a:prstGeom>
+          <a:solidFill>
+            <a:srgbClr val="FFFFFF"/>
+          </a:solidFill>
+          <a:ln w="15240">
+            <a:solidFill>
+              <a:srgbClr val="0E7490"/>
+            </a:solidFill>
+          </a:ln>
+          <a:effectLst/>
+        </p:spPr>
+        <p:style>
+          <a:lnRef idx="1">
+            <a:schemeClr val="accent1"/>
+          </a:lnRef>
+          <a:fillRef idx="3">
+            <a:schemeClr val="accent1"/>
+          </a:fillRef>
+          <a:effectRef idx="2">
+            <a:schemeClr val="accent1"/>
+          </a:effectRef>
+          <a:fontRef idx="minor">
+            <a:schemeClr val="lt1"/>
+          </a:fontRef>
+        </p:style>
+        <p:txBody>
+          <a:bodyPr rtlCol="0" anchor="ctr"/>
+          <a:lstStyle/>
+          <a:p/>
+        </p:txBody>
+      </p:sp>
+      <p:sp>
+        <p:nvSpPr>
+          <p:cNvPr id="14" name="TextBox 13"/>
+          <p:cNvSpPr txBox="1"/>
+          <p:nvPr/>
+        </p:nvSpPr>
+        <p:spPr>
+          <a:xfrm>
+            <a:off x="3520439" y="3584448"/>
+            <a:ext cx="1367028" cy="475488"/>
+          </a:xfrm>
+          <a:prstGeom prst="rect">
+            <a:avLst/>
+          </a:prstGeom>
+          <a:noFill/>
+        </p:spPr>
+        <p:txBody>
+          <a:bodyPr wrap="square" anchor="ctr" lIns="0" rIns="0" tIns="0" bIns="0">
+            <a:spAutoFit/>
+          </a:bodyPr>
+          <a:lstStyle/>
+          <a:p>
+            <a:pPr algn="ctr">
+              <a:lnSpc>
+                <a:spcPct val="118000"/>
+              </a:lnSpc>
+              <a:spcAft>
+                <a:spcPts val="0"/>
+              </a:spcAft>
+            </a:pPr>
+            <a:r>
+              <a:rPr sz="1200" b="1">
+                <a:solidFill>
+                  <a:srgbClr val="0E7490"/>
+                </a:solidFill>
+                <a:latin typeface="Inter"/>
+              </a:rPr>
+              <a:t>CRUISE</a:t>
+            </a:r>
+          </a:p>
+        </p:txBody>
+      </p:sp>
+      <p:sp>
+        <p:nvSpPr>
+          <p:cNvPr id="15" name="Rectangle 14"/>
+          <p:cNvSpPr/>
+          <p:nvPr/>
+        </p:nvSpPr>
+        <p:spPr>
+          <a:xfrm>
+            <a:off x="4997195" y="3584448"/>
+            <a:ext cx="1367028" cy="475488"/>
+          </a:xfrm>
+          <a:prstGeom prst="rect">
+            <a:avLst/>
+          </a:prstGeom>
+          <a:solidFill>
+            <a:srgbClr val="FFFFFF"/>
+          </a:solidFill>
+          <a:ln w="15240">
+            <a:solidFill>
+              <a:srgbClr val="B45309"/>
+            </a:solidFill>
+          </a:ln>
+          <a:effectLst/>
+        </p:spPr>
+        <p:style>
+          <a:lnRef idx="1">
+            <a:schemeClr val="accent1"/>
+          </a:lnRef>
+          <a:fillRef idx="3">
+            <a:schemeClr val="accent1"/>
+          </a:fillRef>
+          <a:effectRef idx="2">
+            <a:schemeClr val="accent1"/>
+          </a:effectRef>
+          <a:fontRef idx="minor">
+            <a:schemeClr val="lt1"/>
+          </a:fontRef>
+        </p:style>
+        <p:txBody>
+          <a:bodyPr rtlCol="0" anchor="ctr"/>
+          <a:lstStyle/>
+          <a:p/>
+        </p:txBody>
+      </p:sp>
+      <p:sp>
+        <p:nvSpPr>
+          <p:cNvPr id="16" name="TextBox 15"/>
+          <p:cNvSpPr txBox="1"/>
+          <p:nvPr/>
+        </p:nvSpPr>
+        <p:spPr>
+          <a:xfrm>
+            <a:off x="4997195" y="3584448"/>
+            <a:ext cx="1367028" cy="475488"/>
+          </a:xfrm>
+          <a:prstGeom prst="rect">
+            <a:avLst/>
+          </a:prstGeom>
+          <a:noFill/>
+        </p:spPr>
+        <p:txBody>
+          <a:bodyPr wrap="square" anchor="ctr" lIns="0" rIns="0" tIns="0" bIns="0">
+            <a:spAutoFit/>
+          </a:bodyPr>
+          <a:lstStyle/>
+          <a:p>
+            <a:pPr algn="ctr">
+              <a:lnSpc>
+                <a:spcPct val="118000"/>
+              </a:lnSpc>
+              <a:spcAft>
+                <a:spcPts val="0"/>
+              </a:spcAft>
+            </a:pPr>
+            <a:r>
+              <a:rPr sz="1200" b="1">
+                <a:solidFill>
+                  <a:srgbClr val="B45309"/>
+                </a:solidFill>
+                <a:latin typeface="Inter"/>
+              </a:rPr>
+              <a:t>DECEL</a:t>
+            </a:r>
+          </a:p>
+        </p:txBody>
+      </p:sp>
+      <p:sp>
+        <p:nvSpPr>
+          <p:cNvPr id="17" name="Rectangle 16"/>
+          <p:cNvSpPr/>
+          <p:nvPr/>
+        </p:nvSpPr>
+        <p:spPr>
+          <a:xfrm>
+            <a:off x="566928" y="4224528"/>
+            <a:ext cx="5797296" cy="1828800"/>
           </a:xfrm>
           <a:prstGeom prst="rect">
             <a:avLst/>
@@ -13781,13 +16319,13 @@
       </p:sp>
       <p:sp>
         <p:nvSpPr>
-          <p:cNvPr id="10" name="TextBox 9"/>
-          <p:cNvSpPr txBox="1"/>
-          <p:nvPr/>
-        </p:nvSpPr>
-        <p:spPr>
-          <a:xfrm>
-            <a:off x="768096" y="3648456"/>
+          <p:cNvPr id="18" name="TextBox 17"/>
+          <p:cNvSpPr txBox="1"/>
+          <p:nvPr/>
+        </p:nvSpPr>
+        <p:spPr>
+          <a:xfrm>
+            <a:off x="768096" y="4334256"/>
             <a:ext cx="5394959" cy="219456"/>
           </a:xfrm>
           <a:prstGeom prst="rect">
@@ -13812,25 +16350,25 @@
             <a:r>
               <a:rPr sz="950" b="1">
                 <a:solidFill>
-                  <a:srgbClr val="B45309"/>
-                </a:solidFill>
-                <a:latin typeface="Inter"/>
-              </a:rPr>
-              <a:t>IN-BROWSER RETRAINING</a:t>
-            </a:r>
-          </a:p>
-        </p:txBody>
-      </p:sp>
-      <p:sp>
-        <p:nvSpPr>
-          <p:cNvPr id="11" name="TextBox 10"/>
-          <p:cNvSpPr txBox="1"/>
-          <p:nvPr/>
-        </p:nvSpPr>
-        <p:spPr>
-          <a:xfrm>
-            <a:off x="768096" y="3895344"/>
-            <a:ext cx="5394959" cy="566928"/>
+                  <a:srgbClr val="0E7490"/>
+                </a:solidFill>
+                <a:latin typeface="Inter"/>
+              </a:rPr>
+              <a:t>CONTEXT IS A FEATURE</a:t>
+            </a:r>
+          </a:p>
+        </p:txBody>
+      </p:sp>
+      <p:sp>
+        <p:nvSpPr>
+          <p:cNvPr id="19" name="TextBox 18"/>
+          <p:cNvSpPr txBox="1"/>
+          <p:nvPr/>
+        </p:nvSpPr>
+        <p:spPr>
+          <a:xfrm>
+            <a:off x="768096" y="4590288"/>
+            <a:ext cx="5394959" cy="1371600"/>
           </a:xfrm>
           <a:prstGeom prst="rect">
             <a:avLst/>
@@ -13858,72 +16396,32 @@
                 </a:solidFill>
                 <a:latin typeface="Inter"/>
               </a:rPr>
-              <a:t>Upload field telemetry from the new pack and retrain XGBoost from the dashboard — the adaptation loop closes without a developer.</a:t>
-            </a:r>
-          </a:p>
-        </p:txBody>
-      </p:sp>
-      <p:sp>
-        <p:nvSpPr>
-          <p:cNvPr id="12" name="TextBox 11"/>
-          <p:cNvSpPr txBox="1"/>
-          <p:nvPr/>
-        </p:nvSpPr>
-        <p:spPr>
-          <a:xfrm>
-            <a:off x="566928" y="4645152"/>
-            <a:ext cx="5797296" cy="219456"/>
-          </a:xfrm>
-          <a:prstGeom prst="rect">
-            <a:avLst/>
-          </a:prstGeom>
-          <a:noFill/>
-        </p:spPr>
-        <p:txBody>
-          <a:bodyPr wrap="square" anchor="t" lIns="0" rIns="0" tIns="0" bIns="0">
-            <a:spAutoFit/>
-          </a:bodyPr>
-          <a:lstStyle/>
-          <a:p>
-            <a:pPr algn="l">
-              <a:lnSpc>
-                <a:spcPct val="118000"/>
-              </a:lnSpc>
-              <a:spcAft>
-                <a:spcPts val="0"/>
-              </a:spcAft>
-            </a:pPr>
-            <a:r>
-              <a:rPr sz="950" b="1">
-                <a:solidFill>
-                  <a:srgbClr val="475569"/>
-                </a:solidFill>
-                <a:latin typeface="Inter"/>
-              </a:rPr>
-              <a:t>WHAT WE WOULD BUILD NEXT</a:t>
-            </a:r>
-          </a:p>
-        </p:txBody>
-      </p:sp>
-      <p:sp>
-        <p:nvSpPr>
-          <p:cNvPr id="13" name="Rectangle 12"/>
+              <a:t>A sag under ACCEL is normal; the same sag at IDLE is a fault, so thresholds follow the mode. The three mode flags carry 12.4% of the model's total gain and ntc_spread another 5.0% — nearly a fifth of the decision comes from context pack-level sensors cannot provide.</a:t>
+            </a:r>
+          </a:p>
+        </p:txBody>
+      </p:sp>
+      <p:sp>
+        <p:nvSpPr>
+          <p:cNvPr id="20" name="Rectangle 19"/>
           <p:cNvSpPr/>
           <p:nvPr/>
         </p:nvSpPr>
         <p:spPr>
           <a:xfrm>
-            <a:off x="566928" y="4919472"/>
-            <a:ext cx="54864" cy="201168"/>
+            <a:off x="7799494" y="1463040"/>
+            <a:ext cx="2719185" cy="1783079"/>
           </a:xfrm>
           <a:prstGeom prst="rect">
             <a:avLst/>
           </a:prstGeom>
           <a:solidFill>
-            <a:srgbClr val="B91C1C"/>
+            <a:srgbClr val="FFFFFF"/>
           </a:solidFill>
-          <a:ln>
-            <a:noFill/>
+          <a:ln w="12700">
+            <a:solidFill>
+              <a:srgbClr val="CBD5E1"/>
+            </a:solidFill>
           </a:ln>
           <a:effectLst/>
         </p:spPr>
@@ -13947,387 +16445,9 @@
           <a:p/>
         </p:txBody>
       </p:sp>
-      <p:sp>
-        <p:nvSpPr>
-          <p:cNvPr id="14" name="TextBox 13"/>
-          <p:cNvSpPr txBox="1"/>
-          <p:nvPr/>
-        </p:nvSpPr>
-        <p:spPr>
-          <a:xfrm>
-            <a:off x="768096" y="4901184"/>
-            <a:ext cx="5596128" cy="237744"/>
-          </a:xfrm>
-          <a:prstGeom prst="rect">
-            <a:avLst/>
-          </a:prstGeom>
-          <a:noFill/>
-        </p:spPr>
-        <p:txBody>
-          <a:bodyPr wrap="square" anchor="t" lIns="0" rIns="0" tIns="0" bIns="0">
-            <a:spAutoFit/>
-          </a:bodyPr>
-          <a:lstStyle/>
-          <a:p>
-            <a:pPr algn="l">
-              <a:lnSpc>
-                <a:spcPct val="118000"/>
-              </a:lnSpc>
-              <a:spcAft>
-                <a:spcPts val="0"/>
-              </a:spcAft>
-            </a:pPr>
-            <a:r>
-              <a:rPr sz="1150" b="0">
-                <a:solidFill>
-                  <a:srgbClr val="0F172A"/>
-                </a:solidFill>
-                <a:latin typeface="Inter"/>
-              </a:rPr>
-              <a:t>Close the Cell Imbalance gap</a:t>
-            </a:r>
-          </a:p>
-        </p:txBody>
-      </p:sp>
-      <p:sp>
-        <p:nvSpPr>
-          <p:cNvPr id="15" name="Rectangle 14"/>
-          <p:cNvSpPr/>
-          <p:nvPr/>
-        </p:nvSpPr>
-        <p:spPr>
-          <a:xfrm>
-            <a:off x="566928" y="5166360"/>
-            <a:ext cx="54864" cy="201168"/>
-          </a:xfrm>
-          <a:prstGeom prst="rect">
-            <a:avLst/>
-          </a:prstGeom>
-          <a:solidFill>
-            <a:srgbClr val="B45309"/>
-          </a:solidFill>
-          <a:ln>
-            <a:noFill/>
-          </a:ln>
-          <a:effectLst/>
-        </p:spPr>
-        <p:style>
-          <a:lnRef idx="1">
-            <a:schemeClr val="accent1"/>
-          </a:lnRef>
-          <a:fillRef idx="3">
-            <a:schemeClr val="accent1"/>
-          </a:fillRef>
-          <a:effectRef idx="2">
-            <a:schemeClr val="accent1"/>
-          </a:effectRef>
-          <a:fontRef idx="minor">
-            <a:schemeClr val="lt1"/>
-          </a:fontRef>
-        </p:style>
-        <p:txBody>
-          <a:bodyPr rtlCol="0" anchor="ctr"/>
-          <a:lstStyle/>
-          <a:p/>
-        </p:txBody>
-      </p:sp>
-      <p:sp>
-        <p:nvSpPr>
-          <p:cNvPr id="16" name="TextBox 15"/>
-          <p:cNvSpPr txBox="1"/>
-          <p:nvPr/>
-        </p:nvSpPr>
-        <p:spPr>
-          <a:xfrm>
-            <a:off x="768096" y="5148072"/>
-            <a:ext cx="5596128" cy="237744"/>
-          </a:xfrm>
-          <a:prstGeom prst="rect">
-            <a:avLst/>
-          </a:prstGeom>
-          <a:noFill/>
-        </p:spPr>
-        <p:txBody>
-          <a:bodyPr wrap="square" anchor="t" lIns="0" rIns="0" tIns="0" bIns="0">
-            <a:spAutoFit/>
-          </a:bodyPr>
-          <a:lstStyle/>
-          <a:p>
-            <a:pPr algn="l">
-              <a:lnSpc>
-                <a:spcPct val="118000"/>
-              </a:lnSpc>
-              <a:spcAft>
-                <a:spcPts val="0"/>
-              </a:spcAft>
-            </a:pPr>
-            <a:r>
-              <a:rPr sz="1150" b="0">
-                <a:solidFill>
-                  <a:srgbClr val="0F172A"/>
-                </a:solidFill>
-                <a:latin typeface="Inter"/>
-              </a:rPr>
-              <a:t>Lift OOD recall above 24.5%</a:t>
-            </a:r>
-          </a:p>
-        </p:txBody>
-      </p:sp>
-      <p:sp>
-        <p:nvSpPr>
-          <p:cNvPr id="17" name="Rectangle 16"/>
-          <p:cNvSpPr/>
-          <p:nvPr/>
-        </p:nvSpPr>
-        <p:spPr>
-          <a:xfrm>
-            <a:off x="566928" y="5413248"/>
-            <a:ext cx="54864" cy="201168"/>
-          </a:xfrm>
-          <a:prstGeom prst="rect">
-            <a:avLst/>
-          </a:prstGeom>
-          <a:solidFill>
-            <a:srgbClr val="0E7490"/>
-          </a:solidFill>
-          <a:ln>
-            <a:noFill/>
-          </a:ln>
-          <a:effectLst/>
-        </p:spPr>
-        <p:style>
-          <a:lnRef idx="1">
-            <a:schemeClr val="accent1"/>
-          </a:lnRef>
-          <a:fillRef idx="3">
-            <a:schemeClr val="accent1"/>
-          </a:fillRef>
-          <a:effectRef idx="2">
-            <a:schemeClr val="accent1"/>
-          </a:effectRef>
-          <a:fontRef idx="minor">
-            <a:schemeClr val="lt1"/>
-          </a:fontRef>
-        </p:style>
-        <p:txBody>
-          <a:bodyPr rtlCol="0" anchor="ctr"/>
-          <a:lstStyle/>
-          <a:p/>
-        </p:txBody>
-      </p:sp>
-      <p:sp>
-        <p:nvSpPr>
-          <p:cNvPr id="18" name="TextBox 17"/>
-          <p:cNvSpPr txBox="1"/>
-          <p:nvPr/>
-        </p:nvSpPr>
-        <p:spPr>
-          <a:xfrm>
-            <a:off x="768096" y="5394960"/>
-            <a:ext cx="5596128" cy="237744"/>
-          </a:xfrm>
-          <a:prstGeom prst="rect">
-            <a:avLst/>
-          </a:prstGeom>
-          <a:noFill/>
-        </p:spPr>
-        <p:txBody>
-          <a:bodyPr wrap="square" anchor="t" lIns="0" rIns="0" tIns="0" bIns="0">
-            <a:spAutoFit/>
-          </a:bodyPr>
-          <a:lstStyle/>
-          <a:p>
-            <a:pPr algn="l">
-              <a:lnSpc>
-                <a:spcPct val="118000"/>
-              </a:lnSpc>
-              <a:spcAft>
-                <a:spcPts val="0"/>
-              </a:spcAft>
-            </a:pPr>
-            <a:r>
-              <a:rPr sz="1150" b="0">
-                <a:solidFill>
-                  <a:srgbClr val="0F172A"/>
-                </a:solidFill>
-                <a:latin typeface="Inter"/>
-              </a:rPr>
-              <a:t>Move inference onto the Zynq-7000</a:t>
-            </a:r>
-          </a:p>
-        </p:txBody>
-      </p:sp>
-      <p:sp>
-        <p:nvSpPr>
-          <p:cNvPr id="19" name="Rectangle 18"/>
-          <p:cNvSpPr/>
-          <p:nvPr/>
-        </p:nvSpPr>
-        <p:spPr>
-          <a:xfrm>
-            <a:off x="566928" y="5660136"/>
-            <a:ext cx="54864" cy="201168"/>
-          </a:xfrm>
-          <a:prstGeom prst="rect">
-            <a:avLst/>
-          </a:prstGeom>
-          <a:solidFill>
-            <a:srgbClr val="0E7490"/>
-          </a:solidFill>
-          <a:ln>
-            <a:noFill/>
-          </a:ln>
-          <a:effectLst/>
-        </p:spPr>
-        <p:style>
-          <a:lnRef idx="1">
-            <a:schemeClr val="accent1"/>
-          </a:lnRef>
-          <a:fillRef idx="3">
-            <a:schemeClr val="accent1"/>
-          </a:fillRef>
-          <a:effectRef idx="2">
-            <a:schemeClr val="accent1"/>
-          </a:effectRef>
-          <a:fontRef idx="minor">
-            <a:schemeClr val="lt1"/>
-          </a:fontRef>
-        </p:style>
-        <p:txBody>
-          <a:bodyPr rtlCol="0" anchor="ctr"/>
-          <a:lstStyle/>
-          <a:p/>
-        </p:txBody>
-      </p:sp>
-      <p:sp>
-        <p:nvSpPr>
-          <p:cNvPr id="20" name="TextBox 19"/>
-          <p:cNvSpPr txBox="1"/>
-          <p:nvPr/>
-        </p:nvSpPr>
-        <p:spPr>
-          <a:xfrm>
-            <a:off x="768096" y="5641848"/>
-            <a:ext cx="5596128" cy="237744"/>
-          </a:xfrm>
-          <a:prstGeom prst="rect">
-            <a:avLst/>
-          </a:prstGeom>
-          <a:noFill/>
-        </p:spPr>
-        <p:txBody>
-          <a:bodyPr wrap="square" anchor="t" lIns="0" rIns="0" tIns="0" bIns="0">
-            <a:spAutoFit/>
-          </a:bodyPr>
-          <a:lstStyle/>
-          <a:p>
-            <a:pPr algn="l">
-              <a:lnSpc>
-                <a:spcPct val="118000"/>
-              </a:lnSpc>
-              <a:spcAft>
-                <a:spcPts val="0"/>
-              </a:spcAft>
-            </a:pPr>
-            <a:r>
-              <a:rPr sz="1150" b="0">
-                <a:solidFill>
-                  <a:srgbClr val="0F172A"/>
-                </a:solidFill>
-                <a:latin typeface="Inter"/>
-              </a:rPr>
-              <a:t>Characterise LFP on a real bench</a:t>
-            </a:r>
-          </a:p>
-        </p:txBody>
-      </p:sp>
-      <p:sp>
-        <p:nvSpPr>
-          <p:cNvPr id="21" name="Rectangle 20"/>
-          <p:cNvSpPr/>
-          <p:nvPr/>
-        </p:nvSpPr>
-        <p:spPr>
-          <a:xfrm>
-            <a:off x="566928" y="5907023"/>
-            <a:ext cx="54864" cy="201168"/>
-          </a:xfrm>
-          <a:prstGeom prst="rect">
-            <a:avLst/>
-          </a:prstGeom>
-          <a:solidFill>
-            <a:srgbClr val="0E7490"/>
-          </a:solidFill>
-          <a:ln>
-            <a:noFill/>
-          </a:ln>
-          <a:effectLst/>
-        </p:spPr>
-        <p:style>
-          <a:lnRef idx="1">
-            <a:schemeClr val="accent1"/>
-          </a:lnRef>
-          <a:fillRef idx="3">
-            <a:schemeClr val="accent1"/>
-          </a:fillRef>
-          <a:effectRef idx="2">
-            <a:schemeClr val="accent1"/>
-          </a:effectRef>
-          <a:fontRef idx="minor">
-            <a:schemeClr val="lt1"/>
-          </a:fontRef>
-        </p:style>
-        <p:txBody>
-          <a:bodyPr rtlCol="0" anchor="ctr"/>
-          <a:lstStyle/>
-          <a:p/>
-        </p:txBody>
-      </p:sp>
-      <p:sp>
-        <p:nvSpPr>
-          <p:cNvPr id="22" name="TextBox 21"/>
-          <p:cNvSpPr txBox="1"/>
-          <p:nvPr/>
-        </p:nvSpPr>
-        <p:spPr>
-          <a:xfrm>
-            <a:off x="768096" y="5888736"/>
-            <a:ext cx="5596128" cy="237744"/>
-          </a:xfrm>
-          <a:prstGeom prst="rect">
-            <a:avLst/>
-          </a:prstGeom>
-          <a:noFill/>
-        </p:spPr>
-        <p:txBody>
-          <a:bodyPr wrap="square" anchor="t" lIns="0" rIns="0" tIns="0" bIns="0">
-            <a:spAutoFit/>
-          </a:bodyPr>
-          <a:lstStyle/>
-          <a:p>
-            <a:pPr algn="l">
-              <a:lnSpc>
-                <a:spcPct val="118000"/>
-              </a:lnSpc>
-              <a:spcAft>
-                <a:spcPts val="0"/>
-              </a:spcAft>
-            </a:pPr>
-            <a:r>
-              <a:rPr sz="1150" b="0">
-                <a:solidFill>
-                  <a:srgbClr val="0F172A"/>
-                </a:solidFill>
-                <a:latin typeface="Inter"/>
-              </a:rPr>
-              <a:t>SOH and remaining useful life from dV/dt</a:t>
-            </a:r>
-          </a:p>
-        </p:txBody>
-      </p:sp>
       <p:pic>
         <p:nvPicPr>
-          <p:cNvPr id="23" name="Picture 22" descr="diag_configurator.png"/>
+          <p:cNvPr id="21" name="Picture 20" descr="mock_landing.png"/>
           <p:cNvPicPr>
             <a:picLocks noChangeAspect="1"/>
           </p:cNvPicPr>
@@ -14341,17 +16461,61 @@
         </p:blipFill>
         <p:spPr>
           <a:xfrm>
-            <a:off x="6693408" y="2027827"/>
-            <a:ext cx="2139696" cy="2838921"/>
+            <a:off x="7918366" y="1581912"/>
+            <a:ext cx="2481441" cy="1545335"/>
           </a:xfrm>
           <a:prstGeom prst="rect">
             <a:avLst/>
           </a:prstGeom>
         </p:spPr>
       </p:pic>
+      <p:sp>
+        <p:nvSpPr>
+          <p:cNvPr id="22" name="Rectangle 21"/>
+          <p:cNvSpPr/>
+          <p:nvPr/>
+        </p:nvSpPr>
+        <p:spPr>
+          <a:xfrm>
+            <a:off x="7538301" y="3328416"/>
+            <a:ext cx="3241571" cy="1371600"/>
+          </a:xfrm>
+          <a:prstGeom prst="rect">
+            <a:avLst/>
+          </a:prstGeom>
+          <a:solidFill>
+            <a:srgbClr val="FFFFFF"/>
+          </a:solidFill>
+          <a:ln w="12700">
+            <a:solidFill>
+              <a:srgbClr val="CBD5E1"/>
+            </a:solidFill>
+          </a:ln>
+          <a:effectLst/>
+        </p:spPr>
+        <p:style>
+          <a:lnRef idx="1">
+            <a:schemeClr val="accent1"/>
+          </a:lnRef>
+          <a:fillRef idx="3">
+            <a:schemeClr val="accent1"/>
+          </a:fillRef>
+          <a:effectRef idx="2">
+            <a:schemeClr val="accent1"/>
+          </a:effectRef>
+          <a:fontRef idx="minor">
+            <a:schemeClr val="lt1"/>
+          </a:fontRef>
+        </p:style>
+        <p:txBody>
+          <a:bodyPr rtlCol="0" anchor="ctr"/>
+          <a:lstStyle/>
+          <a:p/>
+        </p:txBody>
+      </p:sp>
       <p:pic>
         <p:nvPicPr>
-          <p:cNvPr id="24" name="Picture 23" descr="fig_ocv_soc.png"/>
+          <p:cNvPr id="23" name="Picture 22" descr="p07_img1_x61.jpeg"/>
           <p:cNvPicPr>
             <a:picLocks noChangeAspect="1"/>
           </p:cNvPicPr>
@@ -14365,56 +16529,38 @@
         </p:blipFill>
         <p:spPr>
           <a:xfrm>
-            <a:off x="8997696" y="1959079"/>
-            <a:ext cx="2627071" cy="2583224"/>
+            <a:off x="7657173" y="3447288"/>
+            <a:ext cx="3003827" cy="1133856"/>
           </a:xfrm>
           <a:prstGeom prst="rect">
             <a:avLst/>
           </a:prstGeom>
         </p:spPr>
       </p:pic>
-      <p:sp>
-        <p:nvSpPr>
-          <p:cNvPr id="25" name="TextBox 24"/>
-          <p:cNvSpPr txBox="1"/>
-          <p:nvPr/>
-        </p:nvSpPr>
-        <p:spPr>
-          <a:xfrm>
-            <a:off x="8997696" y="4773168"/>
-            <a:ext cx="2627071" cy="237744"/>
-          </a:xfrm>
-          <a:prstGeom prst="rect">
-            <a:avLst/>
-          </a:prstGeom>
-          <a:noFill/>
-        </p:spPr>
-        <p:txBody>
-          <a:bodyPr wrap="square" anchor="t" lIns="0" rIns="0" tIns="0" bIns="0">
-            <a:spAutoFit/>
-          </a:bodyPr>
-          <a:lstStyle/>
-          <a:p>
-            <a:pPr algn="ctr">
-              <a:lnSpc>
-                <a:spcPct val="118000"/>
-              </a:lnSpc>
-              <a:spcAft>
-                <a:spcPts val="0"/>
-              </a:spcAft>
-            </a:pPr>
-            <a:r>
-              <a:rPr sz="950" b="0">
-                <a:solidFill>
-                  <a:srgbClr val="475569"/>
-                </a:solidFill>
-                <a:latin typeface="Inter"/>
-              </a:rPr>
-              <a:t>Why LFP needs a remap, not an offset</a:t>
-            </a:r>
-          </a:p>
-        </p:txBody>
-      </p:sp>
+      <p:pic>
+        <p:nvPicPr>
+          <p:cNvPr id="24" name="Picture 23" descr="fig_cycle_history.png"/>
+          <p:cNvPicPr>
+            <a:picLocks noChangeAspect="1"/>
+          </p:cNvPicPr>
+          <p:nvPr/>
+        </p:nvPicPr>
+        <p:blipFill>
+          <a:blip r:embed="rId4"/>
+          <a:stretch>
+            <a:fillRect/>
+          </a:stretch>
+        </p:blipFill>
+        <p:spPr>
+          <a:xfrm>
+            <a:off x="7890175" y="4791456"/>
+            <a:ext cx="2537824" cy="1417320"/>
+          </a:xfrm>
+          <a:prstGeom prst="rect">
+            <a:avLst/>
+          </a:prstGeom>
+        </p:spPr>
+      </p:pic>
     </p:spTree>
   </p:cSld>
   <p:clrMapOvr>
@@ -14478,7 +16624,7 @@
                 </a:solidFill>
                 <a:latin typeface="Inter"/>
               </a:rPr>
-              <a:t>References</a:t>
+              <a:t>Swap the chemistry, not the codebase</a:t>
             </a:r>
           </a:p>
         </p:txBody>
@@ -14659,901 +16805,204 @@
         </p:nvSpPr>
         <p:spPr>
           <a:xfrm>
-            <a:off x="566928" y="1444752"/>
-            <a:ext cx="5797296" cy="219456"/>
-          </a:xfrm>
-          <a:prstGeom prst="rect">
-            <a:avLst/>
-          </a:prstGeom>
-          <a:noFill/>
-        </p:spPr>
-        <p:txBody>
-          <a:bodyPr wrap="square" anchor="t" lIns="0" rIns="0" tIns="0" bIns="0">
-            <a:spAutoFit/>
-          </a:bodyPr>
-          <a:lstStyle/>
-          <a:p>
-            <a:pPr algn="l">
-              <a:lnSpc>
-                <a:spcPct val="118000"/>
-              </a:lnSpc>
-              <a:spcAft>
-                <a:spcPts val="0"/>
-              </a:spcAft>
-            </a:pPr>
-            <a:r>
-              <a:rPr sz="950" b="1">
-                <a:solidFill>
-                  <a:srgbClr val="0E7490"/>
-                </a:solidFill>
-                <a:latin typeface="Inter"/>
-              </a:rPr>
-              <a:t>LITERATURE — SOC, RUL AND FAULT GRADING</a:t>
-            </a:r>
-          </a:p>
-        </p:txBody>
-      </p:sp>
-      <p:sp>
-        <p:nvSpPr>
-          <p:cNvPr id="8" name="Rectangle 7"/>
+            <a:off x="566928" y="1499616"/>
+            <a:ext cx="2761488" cy="1874519"/>
+          </a:xfrm>
+          <a:prstGeom prst="rect">
+            <a:avLst/>
+          </a:prstGeom>
+          <a:noFill/>
+        </p:spPr>
+        <p:txBody>
+          <a:bodyPr wrap="square" lIns="0" rIns="0" tIns="0" bIns="0">
+            <a:spAutoFit/>
+          </a:bodyPr>
+          <a:lstStyle/>
+          <a:p>
+            <a:pPr marL="274320" indent="-274320">
+              <a:lnSpc>
+                <a:spcPct val="116000"/>
+              </a:lnSpc>
+              <a:spcAft>
+                <a:spcPts val="700"/>
+              </a:spcAft>
+              <a:buClr>
+                <a:srgbClr val="0E7490"/>
+              </a:buClr>
+              <a:buSzPct val="62000"/>
+              <a:buFont typeface="Arial" pitchFamily="34" charset="0"/>
+              <a:buChar char="●"/>
+            </a:pPr>
+            <a:r>
+              <a:rPr sz="1350">
+                <a:solidFill>
+                  <a:srgbClr val="0F172A"/>
+                </a:solidFill>
+                <a:latin typeface="Inter"/>
+              </a:rPr>
+              <a:t>Upload a datasheet PDF; the parser reads limits.</a:t>
+            </a:r>
+          </a:p>
+          <a:p>
+            <a:pPr marL="274320" indent="-274320">
+              <a:lnSpc>
+                <a:spcPct val="116000"/>
+              </a:lnSpc>
+              <a:spcAft>
+                <a:spcPts val="700"/>
+              </a:spcAft>
+              <a:buClr>
+                <a:srgbClr val="0E7490"/>
+              </a:buClr>
+              <a:buSzPct val="62000"/>
+              <a:buFont typeface="Arial" pitchFamily="34" charset="0"/>
+              <a:buChar char="●"/>
+            </a:pPr>
+            <a:r>
+              <a:rPr sz="1350">
+                <a:solidFill>
+                  <a:srgbClr val="0F172A"/>
+                </a:solidFill>
+                <a:latin typeface="Inter"/>
+              </a:rPr>
+              <a:t>V_nom, V_max, V_min, capacity, current, thermal.</a:t>
+            </a:r>
+          </a:p>
+          <a:p>
+            <a:pPr marL="274320" indent="-274320">
+              <a:lnSpc>
+                <a:spcPct val="116000"/>
+              </a:lnSpc>
+              <a:spcAft>
+                <a:spcPts val="700"/>
+              </a:spcAft>
+              <a:buClr>
+                <a:srgbClr val="0E7490"/>
+              </a:buClr>
+              <a:buSzPct val="62000"/>
+              <a:buFont typeface="Arial" pitchFamily="34" charset="0"/>
+              <a:buChar char="●"/>
+            </a:pPr>
+            <a:r>
+              <a:rPr sz="1350">
+                <a:solidFill>
+                  <a:srgbClr val="0F172A"/>
+                </a:solidFill>
+                <a:latin typeface="Inter"/>
+              </a:rPr>
+              <a:t>Pack sizing derives S and P from the bus target.</a:t>
+            </a:r>
+          </a:p>
+        </p:txBody>
+      </p:sp>
+      <p:sp>
+        <p:nvSpPr>
+          <p:cNvPr id="8" name="TextBox 7"/>
+          <p:cNvSpPr txBox="1"/>
+          <p:nvPr/>
+        </p:nvSpPr>
+        <p:spPr>
+          <a:xfrm>
+            <a:off x="3602736" y="1499616"/>
+            <a:ext cx="2761488" cy="1874519"/>
+          </a:xfrm>
+          <a:prstGeom prst="rect">
+            <a:avLst/>
+          </a:prstGeom>
+          <a:noFill/>
+        </p:spPr>
+        <p:txBody>
+          <a:bodyPr wrap="square" lIns="0" rIns="0" tIns="0" bIns="0">
+            <a:spAutoFit/>
+          </a:bodyPr>
+          <a:lstStyle/>
+          <a:p>
+            <a:pPr marL="274320" indent="-274320">
+              <a:lnSpc>
+                <a:spcPct val="116000"/>
+              </a:lnSpc>
+              <a:spcAft>
+                <a:spcPts val="700"/>
+              </a:spcAft>
+              <a:buClr>
+                <a:srgbClr val="0E7490"/>
+              </a:buClr>
+              <a:buSzPct val="62000"/>
+              <a:buFont typeface="Arial" pitchFamily="34" charset="0"/>
+              <a:buChar char="●"/>
+            </a:pPr>
+            <a:r>
+              <a:rPr sz="1350">
+                <a:solidFill>
+                  <a:srgbClr val="0F172A"/>
+                </a:solidFill>
+                <a:latin typeface="Inter"/>
+              </a:rPr>
+              <a:t>NMC reuse → NCA/LCO shift → LFP remap → LTO rescale.</a:t>
+            </a:r>
+          </a:p>
+          <a:p>
+            <a:pPr marL="274320" indent="-274320">
+              <a:lnSpc>
+                <a:spcPct val="116000"/>
+              </a:lnSpc>
+              <a:spcAft>
+                <a:spcPts val="700"/>
+              </a:spcAft>
+              <a:buClr>
+                <a:srgbClr val="0E7490"/>
+              </a:buClr>
+              <a:buSzPct val="62000"/>
+              <a:buFont typeface="Arial" pitchFamily="34" charset="0"/>
+              <a:buChar char="●"/>
+            </a:pPr>
+            <a:r>
+              <a:rPr sz="1350">
+                <a:solidFill>
+                  <a:srgbClr val="0F172A"/>
+                </a:solidFill>
+                <a:latin typeface="Inter"/>
+              </a:rPr>
+              <a:t>Overvoltage warns 95%, critical 100%.</a:t>
+            </a:r>
+          </a:p>
+          <a:p>
+            <a:pPr marL="274320" indent="-274320">
+              <a:lnSpc>
+                <a:spcPct val="116000"/>
+              </a:lnSpc>
+              <a:spcAft>
+                <a:spcPts val="700"/>
+              </a:spcAft>
+              <a:buClr>
+                <a:srgbClr val="0E7490"/>
+              </a:buClr>
+              <a:buSzPct val="62000"/>
+              <a:buFont typeface="Arial" pitchFamily="34" charset="0"/>
+              <a:buChar char="●"/>
+            </a:pPr>
+            <a:r>
+              <a:rPr sz="1350">
+                <a:solidFill>
+                  <a:srgbClr val="0F172A"/>
+                </a:solidFill>
+                <a:latin typeface="Inter"/>
+              </a:rPr>
+              <a:t>active_profile.json + PostgreSQL sync, no restart.</a:t>
+            </a:r>
+          </a:p>
+        </p:txBody>
+      </p:sp>
+      <p:sp>
+        <p:nvSpPr>
+          <p:cNvPr id="9" name="Rectangle 8"/>
           <p:cNvSpPr/>
           <p:nvPr/>
         </p:nvSpPr>
         <p:spPr>
           <a:xfrm>
-            <a:off x="566928" y="1769363"/>
-            <a:ext cx="237744" cy="237744"/>
-          </a:xfrm>
-          <a:prstGeom prst="rect">
-            <a:avLst/>
-          </a:prstGeom>
-          <a:solidFill>
-            <a:srgbClr val="F1F5F9"/>
-          </a:solidFill>
-          <a:ln w="7620">
-            <a:solidFill>
-              <a:srgbClr val="CBD5E1"/>
-            </a:solidFill>
-          </a:ln>
-          <a:effectLst/>
-        </p:spPr>
-        <p:style>
-          <a:lnRef idx="1">
-            <a:schemeClr val="accent1"/>
-          </a:lnRef>
-          <a:fillRef idx="3">
-            <a:schemeClr val="accent1"/>
-          </a:fillRef>
-          <a:effectRef idx="2">
-            <a:schemeClr val="accent1"/>
-          </a:effectRef>
-          <a:fontRef idx="minor">
-            <a:schemeClr val="lt1"/>
-          </a:fontRef>
-        </p:style>
-        <p:txBody>
-          <a:bodyPr rtlCol="0" anchor="ctr"/>
-          <a:lstStyle/>
-          <a:p/>
-        </p:txBody>
-      </p:sp>
-      <p:sp>
-        <p:nvSpPr>
-          <p:cNvPr id="9" name="TextBox 8"/>
-          <p:cNvSpPr txBox="1"/>
-          <p:nvPr/>
-        </p:nvSpPr>
-        <p:spPr>
-          <a:xfrm>
-            <a:off x="566928" y="1769363"/>
-            <a:ext cx="237744" cy="237744"/>
-          </a:xfrm>
-          <a:prstGeom prst="rect">
-            <a:avLst/>
-          </a:prstGeom>
-          <a:noFill/>
-        </p:spPr>
-        <p:txBody>
-          <a:bodyPr wrap="square" anchor="ctr" lIns="0" rIns="0" tIns="0" bIns="0">
-            <a:spAutoFit/>
-          </a:bodyPr>
-          <a:lstStyle/>
-          <a:p>
-            <a:pPr algn="ctr">
-              <a:lnSpc>
-                <a:spcPct val="118000"/>
-              </a:lnSpc>
-              <a:spcAft>
-                <a:spcPts val="0"/>
-              </a:spcAft>
-            </a:pPr>
-            <a:r>
-              <a:rPr sz="1000" b="1">
-                <a:solidFill>
-                  <a:srgbClr val="0E7490"/>
-                </a:solidFill>
-                <a:latin typeface="Inter"/>
-              </a:rPr>
-              <a:t>1</a:t>
-            </a:r>
-          </a:p>
-        </p:txBody>
-      </p:sp>
-      <p:sp>
-        <p:nvSpPr>
-          <p:cNvPr id="10" name="TextBox 9"/>
-          <p:cNvSpPr txBox="1"/>
-          <p:nvPr/>
-        </p:nvSpPr>
-        <p:spPr>
-          <a:xfrm>
-            <a:off x="932688" y="1755648"/>
-            <a:ext cx="5431536" cy="274320"/>
-          </a:xfrm>
-          <a:prstGeom prst="rect">
-            <a:avLst/>
-          </a:prstGeom>
-          <a:noFill/>
-        </p:spPr>
-        <p:txBody>
-          <a:bodyPr wrap="square" anchor="t" lIns="0" rIns="0" tIns="0" bIns="0">
-            <a:spAutoFit/>
-          </a:bodyPr>
-          <a:lstStyle/>
-          <a:p>
-            <a:pPr algn="l">
-              <a:lnSpc>
-                <a:spcPct val="122000"/>
-              </a:lnSpc>
-              <a:spcAft>
-                <a:spcPts val="0"/>
-              </a:spcAft>
-            </a:pPr>
-            <a:r>
-              <a:rPr sz="1150" b="0">
-                <a:solidFill>
-                  <a:srgbClr val="0F172A"/>
-                </a:solidFill>
-                <a:latin typeface="Inter"/>
-              </a:rPr>
-              <a:t>Bimodal images + BFRN</a:t>
-            </a:r>
-          </a:p>
-        </p:txBody>
-      </p:sp>
-      <p:sp>
-        <p:nvSpPr>
-          <p:cNvPr id="11" name="TextBox 10"/>
-          <p:cNvSpPr txBox="1"/>
-          <p:nvPr/>
-        </p:nvSpPr>
-        <p:spPr>
-          <a:xfrm>
-            <a:off x="932688" y="2011680"/>
-            <a:ext cx="5431536" cy="201168"/>
-          </a:xfrm>
-          <a:prstGeom prst="rect">
-            <a:avLst/>
-          </a:prstGeom>
-          <a:noFill/>
-        </p:spPr>
-        <p:txBody>
-          <a:bodyPr wrap="square" anchor="t" lIns="0" rIns="0" tIns="0" bIns="0">
-            <a:spAutoFit/>
-          </a:bodyPr>
-          <a:lstStyle/>
-          <a:p>
-            <a:pPr algn="l">
-              <a:lnSpc>
-                <a:spcPct val="118000"/>
-              </a:lnSpc>
-              <a:spcAft>
-                <a:spcPts val="0"/>
-              </a:spcAft>
-            </a:pPr>
-            <a:r>
-              <a:rPr sz="900" b="0">
-                <a:solidFill>
-                  <a:srgbClr val="475569"/>
-                </a:solidFill>
-                <a:latin typeface="Inter"/>
-              </a:rPr>
-              <a:t>Energy, 2024  ·  doi.org/10.1016/j.energy.2024.131700</a:t>
-            </a:r>
-          </a:p>
-        </p:txBody>
-      </p:sp>
-      <p:sp>
-        <p:nvSpPr>
-          <p:cNvPr id="12" name="Rectangle 11"/>
-          <p:cNvSpPr/>
-          <p:nvPr/>
-        </p:nvSpPr>
-        <p:spPr>
-          <a:xfrm>
-            <a:off x="566928" y="2391156"/>
-            <a:ext cx="237744" cy="237744"/>
-          </a:xfrm>
-          <a:prstGeom prst="rect">
-            <a:avLst/>
-          </a:prstGeom>
-          <a:solidFill>
-            <a:srgbClr val="F1F5F9"/>
-          </a:solidFill>
-          <a:ln w="7620">
-            <a:solidFill>
-              <a:srgbClr val="CBD5E1"/>
-            </a:solidFill>
-          </a:ln>
-          <a:effectLst/>
-        </p:spPr>
-        <p:style>
-          <a:lnRef idx="1">
-            <a:schemeClr val="accent1"/>
-          </a:lnRef>
-          <a:fillRef idx="3">
-            <a:schemeClr val="accent1"/>
-          </a:fillRef>
-          <a:effectRef idx="2">
-            <a:schemeClr val="accent1"/>
-          </a:effectRef>
-          <a:fontRef idx="minor">
-            <a:schemeClr val="lt1"/>
-          </a:fontRef>
-        </p:style>
-        <p:txBody>
-          <a:bodyPr rtlCol="0" anchor="ctr"/>
-          <a:lstStyle/>
-          <a:p/>
-        </p:txBody>
-      </p:sp>
-      <p:sp>
-        <p:nvSpPr>
-          <p:cNvPr id="13" name="TextBox 12"/>
-          <p:cNvSpPr txBox="1"/>
-          <p:nvPr/>
-        </p:nvSpPr>
-        <p:spPr>
-          <a:xfrm>
-            <a:off x="566928" y="2391156"/>
-            <a:ext cx="237744" cy="237744"/>
-          </a:xfrm>
-          <a:prstGeom prst="rect">
-            <a:avLst/>
-          </a:prstGeom>
-          <a:noFill/>
-        </p:spPr>
-        <p:txBody>
-          <a:bodyPr wrap="square" anchor="ctr" lIns="0" rIns="0" tIns="0" bIns="0">
-            <a:spAutoFit/>
-          </a:bodyPr>
-          <a:lstStyle/>
-          <a:p>
-            <a:pPr algn="ctr">
-              <a:lnSpc>
-                <a:spcPct val="118000"/>
-              </a:lnSpc>
-              <a:spcAft>
-                <a:spcPts val="0"/>
-              </a:spcAft>
-            </a:pPr>
-            <a:r>
-              <a:rPr sz="1000" b="1">
-                <a:solidFill>
-                  <a:srgbClr val="0E7490"/>
-                </a:solidFill>
-                <a:latin typeface="Inter"/>
-              </a:rPr>
-              <a:t>2</a:t>
-            </a:r>
-          </a:p>
-        </p:txBody>
-      </p:sp>
-      <p:sp>
-        <p:nvSpPr>
-          <p:cNvPr id="14" name="TextBox 13"/>
-          <p:cNvSpPr txBox="1"/>
-          <p:nvPr/>
-        </p:nvSpPr>
-        <p:spPr>
-          <a:xfrm>
-            <a:off x="932688" y="2377439"/>
-            <a:ext cx="5431536" cy="274320"/>
-          </a:xfrm>
-          <a:prstGeom prst="rect">
-            <a:avLst/>
-          </a:prstGeom>
-          <a:noFill/>
-        </p:spPr>
-        <p:txBody>
-          <a:bodyPr wrap="square" anchor="t" lIns="0" rIns="0" tIns="0" bIns="0">
-            <a:spAutoFit/>
-          </a:bodyPr>
-          <a:lstStyle/>
-          <a:p>
-            <a:pPr algn="l">
-              <a:lnSpc>
-                <a:spcPct val="122000"/>
-              </a:lnSpc>
-              <a:spcAft>
-                <a:spcPts val="0"/>
-              </a:spcAft>
-            </a:pPr>
-            <a:r>
-              <a:rPr sz="1150" b="0">
-                <a:solidFill>
-                  <a:srgbClr val="0F172A"/>
-                </a:solidFill>
-                <a:latin typeface="Inter"/>
-              </a:rPr>
-              <a:t>Single-cycle charging</a:t>
-            </a:r>
-          </a:p>
-        </p:txBody>
-      </p:sp>
-      <p:sp>
-        <p:nvSpPr>
-          <p:cNvPr id="15" name="TextBox 14"/>
-          <p:cNvSpPr txBox="1"/>
-          <p:nvPr/>
-        </p:nvSpPr>
-        <p:spPr>
-          <a:xfrm>
-            <a:off x="932688" y="2633472"/>
-            <a:ext cx="5431536" cy="201168"/>
-          </a:xfrm>
-          <a:prstGeom prst="rect">
-            <a:avLst/>
-          </a:prstGeom>
-          <a:noFill/>
-        </p:spPr>
-        <p:txBody>
-          <a:bodyPr wrap="square" anchor="t" lIns="0" rIns="0" tIns="0" bIns="0">
-            <a:spAutoFit/>
-          </a:bodyPr>
-          <a:lstStyle/>
-          <a:p>
-            <a:pPr algn="l">
-              <a:lnSpc>
-                <a:spcPct val="118000"/>
-              </a:lnSpc>
-              <a:spcAft>
-                <a:spcPts val="0"/>
-              </a:spcAft>
-            </a:pPr>
-            <a:r>
-              <a:rPr sz="900" b="0">
-                <a:solidFill>
-                  <a:srgbClr val="475569"/>
-                </a:solidFill>
-                <a:latin typeface="Inter"/>
-              </a:rPr>
-              <a:t>Energy, 2025  ·  doi.org/10.1016/j.energy.2025.138351</a:t>
-            </a:r>
-          </a:p>
-        </p:txBody>
-      </p:sp>
-      <p:sp>
-        <p:nvSpPr>
-          <p:cNvPr id="16" name="Rectangle 15"/>
-          <p:cNvSpPr/>
-          <p:nvPr/>
-        </p:nvSpPr>
-        <p:spPr>
-          <a:xfrm>
-            <a:off x="566928" y="3012947"/>
-            <a:ext cx="237744" cy="237744"/>
-          </a:xfrm>
-          <a:prstGeom prst="rect">
-            <a:avLst/>
-          </a:prstGeom>
-          <a:solidFill>
-            <a:srgbClr val="F1F5F9"/>
-          </a:solidFill>
-          <a:ln w="7620">
-            <a:solidFill>
-              <a:srgbClr val="CBD5E1"/>
-            </a:solidFill>
-          </a:ln>
-          <a:effectLst/>
-        </p:spPr>
-        <p:style>
-          <a:lnRef idx="1">
-            <a:schemeClr val="accent1"/>
-          </a:lnRef>
-          <a:fillRef idx="3">
-            <a:schemeClr val="accent1"/>
-          </a:fillRef>
-          <a:effectRef idx="2">
-            <a:schemeClr val="accent1"/>
-          </a:effectRef>
-          <a:fontRef idx="minor">
-            <a:schemeClr val="lt1"/>
-          </a:fontRef>
-        </p:style>
-        <p:txBody>
-          <a:bodyPr rtlCol="0" anchor="ctr"/>
-          <a:lstStyle/>
-          <a:p/>
-        </p:txBody>
-      </p:sp>
-      <p:sp>
-        <p:nvSpPr>
-          <p:cNvPr id="17" name="TextBox 16"/>
-          <p:cNvSpPr txBox="1"/>
-          <p:nvPr/>
-        </p:nvSpPr>
-        <p:spPr>
-          <a:xfrm>
-            <a:off x="566928" y="3012947"/>
-            <a:ext cx="237744" cy="237744"/>
-          </a:xfrm>
-          <a:prstGeom prst="rect">
-            <a:avLst/>
-          </a:prstGeom>
-          <a:noFill/>
-        </p:spPr>
-        <p:txBody>
-          <a:bodyPr wrap="square" anchor="ctr" lIns="0" rIns="0" tIns="0" bIns="0">
-            <a:spAutoFit/>
-          </a:bodyPr>
-          <a:lstStyle/>
-          <a:p>
-            <a:pPr algn="ctr">
-              <a:lnSpc>
-                <a:spcPct val="118000"/>
-              </a:lnSpc>
-              <a:spcAft>
-                <a:spcPts val="0"/>
-              </a:spcAft>
-            </a:pPr>
-            <a:r>
-              <a:rPr sz="1000" b="1">
-                <a:solidFill>
-                  <a:srgbClr val="0E7490"/>
-                </a:solidFill>
-                <a:latin typeface="Inter"/>
-              </a:rPr>
-              <a:t>3</a:t>
-            </a:r>
-          </a:p>
-        </p:txBody>
-      </p:sp>
-      <p:sp>
-        <p:nvSpPr>
-          <p:cNvPr id="18" name="TextBox 17"/>
-          <p:cNvSpPr txBox="1"/>
-          <p:nvPr/>
-        </p:nvSpPr>
-        <p:spPr>
-          <a:xfrm>
-            <a:off x="932688" y="2999231"/>
-            <a:ext cx="5431536" cy="274320"/>
-          </a:xfrm>
-          <a:prstGeom prst="rect">
-            <a:avLst/>
-          </a:prstGeom>
-          <a:noFill/>
-        </p:spPr>
-        <p:txBody>
-          <a:bodyPr wrap="square" anchor="t" lIns="0" rIns="0" tIns="0" bIns="0">
-            <a:spAutoFit/>
-          </a:bodyPr>
-          <a:lstStyle/>
-          <a:p>
-            <a:pPr algn="l">
-              <a:lnSpc>
-                <a:spcPct val="122000"/>
-              </a:lnSpc>
-              <a:spcAft>
-                <a:spcPts val="0"/>
-              </a:spcAft>
-            </a:pPr>
-            <a:r>
-              <a:rPr sz="1150" b="0">
-                <a:solidFill>
-                  <a:srgbClr val="0F172A"/>
-                </a:solidFill>
-                <a:latin typeface="Inter"/>
-              </a:rPr>
-              <a:t>Multidomain features + CatBoost</a:t>
-            </a:r>
-          </a:p>
-        </p:txBody>
-      </p:sp>
-      <p:sp>
-        <p:nvSpPr>
-          <p:cNvPr id="19" name="TextBox 18"/>
-          <p:cNvSpPr txBox="1"/>
-          <p:nvPr/>
-        </p:nvSpPr>
-        <p:spPr>
-          <a:xfrm>
-            <a:off x="932688" y="3255263"/>
-            <a:ext cx="5431536" cy="201168"/>
-          </a:xfrm>
-          <a:prstGeom prst="rect">
-            <a:avLst/>
-          </a:prstGeom>
-          <a:noFill/>
-        </p:spPr>
-        <p:txBody>
-          <a:bodyPr wrap="square" anchor="t" lIns="0" rIns="0" tIns="0" bIns="0">
-            <a:spAutoFit/>
-          </a:bodyPr>
-          <a:lstStyle/>
-          <a:p>
-            <a:pPr algn="l">
-              <a:lnSpc>
-                <a:spcPct val="118000"/>
-              </a:lnSpc>
-              <a:spcAft>
-                <a:spcPts val="0"/>
-              </a:spcAft>
-            </a:pPr>
-            <a:r>
-              <a:rPr sz="900" b="0">
-                <a:solidFill>
-                  <a:srgbClr val="475569"/>
-                </a:solidFill>
-                <a:latin typeface="Inter"/>
-              </a:rPr>
-              <a:t>Energy Science &amp; Engineering, 2023  ·  doi.org/10.1002/ese3.1506</a:t>
-            </a:r>
-          </a:p>
-        </p:txBody>
-      </p:sp>
-      <p:sp>
-        <p:nvSpPr>
-          <p:cNvPr id="20" name="Rectangle 19"/>
-          <p:cNvSpPr/>
-          <p:nvPr/>
-        </p:nvSpPr>
-        <p:spPr>
-          <a:xfrm>
-            <a:off x="566928" y="3634739"/>
-            <a:ext cx="237744" cy="237744"/>
-          </a:xfrm>
-          <a:prstGeom prst="rect">
-            <a:avLst/>
-          </a:prstGeom>
-          <a:solidFill>
-            <a:srgbClr val="F1F5F9"/>
-          </a:solidFill>
-          <a:ln w="7620">
-            <a:solidFill>
-              <a:srgbClr val="CBD5E1"/>
-            </a:solidFill>
-          </a:ln>
-          <a:effectLst/>
-        </p:spPr>
-        <p:style>
-          <a:lnRef idx="1">
-            <a:schemeClr val="accent1"/>
-          </a:lnRef>
-          <a:fillRef idx="3">
-            <a:schemeClr val="accent1"/>
-          </a:fillRef>
-          <a:effectRef idx="2">
-            <a:schemeClr val="accent1"/>
-          </a:effectRef>
-          <a:fontRef idx="minor">
-            <a:schemeClr val="lt1"/>
-          </a:fontRef>
-        </p:style>
-        <p:txBody>
-          <a:bodyPr rtlCol="0" anchor="ctr"/>
-          <a:lstStyle/>
-          <a:p/>
-        </p:txBody>
-      </p:sp>
-      <p:sp>
-        <p:nvSpPr>
-          <p:cNvPr id="21" name="TextBox 20"/>
-          <p:cNvSpPr txBox="1"/>
-          <p:nvPr/>
-        </p:nvSpPr>
-        <p:spPr>
-          <a:xfrm>
-            <a:off x="566928" y="3634739"/>
-            <a:ext cx="237744" cy="237744"/>
-          </a:xfrm>
-          <a:prstGeom prst="rect">
-            <a:avLst/>
-          </a:prstGeom>
-          <a:noFill/>
-        </p:spPr>
-        <p:txBody>
-          <a:bodyPr wrap="square" anchor="ctr" lIns="0" rIns="0" tIns="0" bIns="0">
-            <a:spAutoFit/>
-          </a:bodyPr>
-          <a:lstStyle/>
-          <a:p>
-            <a:pPr algn="ctr">
-              <a:lnSpc>
-                <a:spcPct val="118000"/>
-              </a:lnSpc>
-              <a:spcAft>
-                <a:spcPts val="0"/>
-              </a:spcAft>
-            </a:pPr>
-            <a:r>
-              <a:rPr sz="1000" b="1">
-                <a:solidFill>
-                  <a:srgbClr val="0E7490"/>
-                </a:solidFill>
-                <a:latin typeface="Inter"/>
-              </a:rPr>
-              <a:t>4</a:t>
-            </a:r>
-          </a:p>
-        </p:txBody>
-      </p:sp>
-      <p:sp>
-        <p:nvSpPr>
-          <p:cNvPr id="22" name="TextBox 21"/>
-          <p:cNvSpPr txBox="1"/>
-          <p:nvPr/>
-        </p:nvSpPr>
-        <p:spPr>
-          <a:xfrm>
-            <a:off x="932688" y="3621023"/>
-            <a:ext cx="5431536" cy="274320"/>
-          </a:xfrm>
-          <a:prstGeom prst="rect">
-            <a:avLst/>
-          </a:prstGeom>
-          <a:noFill/>
-        </p:spPr>
-        <p:txBody>
-          <a:bodyPr wrap="square" anchor="t" lIns="0" rIns="0" tIns="0" bIns="0">
-            <a:spAutoFit/>
-          </a:bodyPr>
-          <a:lstStyle/>
-          <a:p>
-            <a:pPr algn="l">
-              <a:lnSpc>
-                <a:spcPct val="122000"/>
-              </a:lnSpc>
-              <a:spcAft>
-                <a:spcPts val="0"/>
-              </a:spcAft>
-            </a:pPr>
-            <a:r>
-              <a:rPr sz="1150" b="0">
-                <a:solidFill>
-                  <a:srgbClr val="0F172A"/>
-                </a:solidFill>
-                <a:latin typeface="Inter"/>
-              </a:rPr>
-              <a:t>CNN-BiLSTM-BiGRU with attention</a:t>
-            </a:r>
-          </a:p>
-        </p:txBody>
-      </p:sp>
-      <p:sp>
-        <p:nvSpPr>
-          <p:cNvPr id="23" name="TextBox 22"/>
-          <p:cNvSpPr txBox="1"/>
-          <p:nvPr/>
-        </p:nvSpPr>
-        <p:spPr>
-          <a:xfrm>
-            <a:off x="932688" y="3877055"/>
-            <a:ext cx="5431536" cy="201168"/>
-          </a:xfrm>
-          <a:prstGeom prst="rect">
-            <a:avLst/>
-          </a:prstGeom>
-          <a:noFill/>
-        </p:spPr>
-        <p:txBody>
-          <a:bodyPr wrap="square" anchor="t" lIns="0" rIns="0" tIns="0" bIns="0">
-            <a:spAutoFit/>
-          </a:bodyPr>
-          <a:lstStyle/>
-          <a:p>
-            <a:pPr algn="l">
-              <a:lnSpc>
-                <a:spcPct val="118000"/>
-              </a:lnSpc>
-              <a:spcAft>
-                <a:spcPts val="0"/>
-              </a:spcAft>
-            </a:pPr>
-            <a:r>
-              <a:rPr sz="900" b="0">
-                <a:solidFill>
-                  <a:srgbClr val="475569"/>
-                </a:solidFill>
-                <a:latin typeface="Inter"/>
-              </a:rPr>
-              <a:t>Journal of Energy Storage, 2024  ·  doi.org/10.1016/j.est.2024.113074</a:t>
-            </a:r>
-          </a:p>
-        </p:txBody>
-      </p:sp>
-      <p:sp>
-        <p:nvSpPr>
-          <p:cNvPr id="24" name="Rectangle 23"/>
-          <p:cNvSpPr/>
-          <p:nvPr/>
-        </p:nvSpPr>
-        <p:spPr>
-          <a:xfrm>
-            <a:off x="566928" y="4256531"/>
-            <a:ext cx="237744" cy="237744"/>
-          </a:xfrm>
-          <a:prstGeom prst="rect">
-            <a:avLst/>
-          </a:prstGeom>
-          <a:solidFill>
-            <a:srgbClr val="F1F5F9"/>
-          </a:solidFill>
-          <a:ln w="7620">
-            <a:solidFill>
-              <a:srgbClr val="CBD5E1"/>
-            </a:solidFill>
-          </a:ln>
-          <a:effectLst/>
-        </p:spPr>
-        <p:style>
-          <a:lnRef idx="1">
-            <a:schemeClr val="accent1"/>
-          </a:lnRef>
-          <a:fillRef idx="3">
-            <a:schemeClr val="accent1"/>
-          </a:fillRef>
-          <a:effectRef idx="2">
-            <a:schemeClr val="accent1"/>
-          </a:effectRef>
-          <a:fontRef idx="minor">
-            <a:schemeClr val="lt1"/>
-          </a:fontRef>
-        </p:style>
-        <p:txBody>
-          <a:bodyPr rtlCol="0" anchor="ctr"/>
-          <a:lstStyle/>
-          <a:p/>
-        </p:txBody>
-      </p:sp>
-      <p:sp>
-        <p:nvSpPr>
-          <p:cNvPr id="25" name="TextBox 24"/>
-          <p:cNvSpPr txBox="1"/>
-          <p:nvPr/>
-        </p:nvSpPr>
-        <p:spPr>
-          <a:xfrm>
-            <a:off x="566928" y="4256531"/>
-            <a:ext cx="237744" cy="237744"/>
-          </a:xfrm>
-          <a:prstGeom prst="rect">
-            <a:avLst/>
-          </a:prstGeom>
-          <a:noFill/>
-        </p:spPr>
-        <p:txBody>
-          <a:bodyPr wrap="square" anchor="ctr" lIns="0" rIns="0" tIns="0" bIns="0">
-            <a:spAutoFit/>
-          </a:bodyPr>
-          <a:lstStyle/>
-          <a:p>
-            <a:pPr algn="ctr">
-              <a:lnSpc>
-                <a:spcPct val="118000"/>
-              </a:lnSpc>
-              <a:spcAft>
-                <a:spcPts val="0"/>
-              </a:spcAft>
-            </a:pPr>
-            <a:r>
-              <a:rPr sz="1000" b="1">
-                <a:solidFill>
-                  <a:srgbClr val="0E7490"/>
-                </a:solidFill>
-                <a:latin typeface="Inter"/>
-              </a:rPr>
-              <a:t>5</a:t>
-            </a:r>
-          </a:p>
-        </p:txBody>
-      </p:sp>
-      <p:sp>
-        <p:nvSpPr>
-          <p:cNvPr id="26" name="TextBox 25"/>
-          <p:cNvSpPr txBox="1"/>
-          <p:nvPr/>
-        </p:nvSpPr>
-        <p:spPr>
-          <a:xfrm>
-            <a:off x="932688" y="4242815"/>
-            <a:ext cx="5431536" cy="493776"/>
-          </a:xfrm>
-          <a:prstGeom prst="rect">
-            <a:avLst/>
-          </a:prstGeom>
-          <a:noFill/>
-        </p:spPr>
-        <p:txBody>
-          <a:bodyPr wrap="square" anchor="t" lIns="0" rIns="0" tIns="0" bIns="0">
-            <a:spAutoFit/>
-          </a:bodyPr>
-          <a:lstStyle/>
-          <a:p>
-            <a:pPr algn="l">
-              <a:lnSpc>
-                <a:spcPct val="122000"/>
-              </a:lnSpc>
-              <a:spcAft>
-                <a:spcPts val="0"/>
-              </a:spcAft>
-            </a:pPr>
-            <a:r>
-              <a:rPr sz="1150" b="0">
-                <a:solidFill>
-                  <a:srgbClr val="0F172A"/>
-                </a:solidFill>
-                <a:latin typeface="Inter"/>
-              </a:rPr>
-              <a:t>Yang, S., Xu, B., Peng, H. — “Isolation and Grading of Faults in
-Battery Packs Based on Machine Learning Methods”</a:t>
-            </a:r>
-          </a:p>
-        </p:txBody>
-      </p:sp>
-      <p:sp>
-        <p:nvSpPr>
-          <p:cNvPr id="27" name="TextBox 26"/>
-          <p:cNvSpPr txBox="1"/>
-          <p:nvPr/>
-        </p:nvSpPr>
-        <p:spPr>
-          <a:xfrm>
-            <a:off x="932688" y="4718303"/>
-            <a:ext cx="5431536" cy="201168"/>
-          </a:xfrm>
-          <a:prstGeom prst="rect">
-            <a:avLst/>
-          </a:prstGeom>
-          <a:noFill/>
-        </p:spPr>
-        <p:txBody>
-          <a:bodyPr wrap="square" anchor="t" lIns="0" rIns="0" tIns="0" bIns="0">
-            <a:spAutoFit/>
-          </a:bodyPr>
-          <a:lstStyle/>
-          <a:p>
-            <a:pPr algn="l">
-              <a:lnSpc>
-                <a:spcPct val="118000"/>
-              </a:lnSpc>
-              <a:spcAft>
-                <a:spcPts val="0"/>
-              </a:spcAft>
-            </a:pPr>
-            <a:r>
-              <a:rPr sz="900" b="0">
-                <a:solidFill>
-                  <a:srgbClr val="475569"/>
-                </a:solidFill>
-                <a:latin typeface="Inter"/>
-              </a:rPr>
-              <a:t>Electronics, 11(9), 1494, 2022  ·  mdpi.com/2079-9292/11/9/1494</a:t>
-            </a:r>
-          </a:p>
-        </p:txBody>
-      </p:sp>
-      <p:sp>
-        <p:nvSpPr>
-          <p:cNvPr id="28" name="Rectangle 27"/>
-          <p:cNvSpPr/>
-          <p:nvPr/>
-        </p:nvSpPr>
-        <p:spPr>
-          <a:xfrm>
-            <a:off x="6693408" y="1444752"/>
-            <a:ext cx="4931359" cy="2139696"/>
+            <a:off x="566928" y="3547872"/>
+            <a:ext cx="5797296" cy="969264"/>
           </a:xfrm>
           <a:prstGeom prst="rect">
             <a:avLst/>
@@ -15590,14 +17039,14 @@
       </p:sp>
       <p:sp>
         <p:nvSpPr>
-          <p:cNvPr id="29" name="TextBox 28"/>
-          <p:cNvSpPr txBox="1"/>
-          <p:nvPr/>
-        </p:nvSpPr>
-        <p:spPr>
-          <a:xfrm>
-            <a:off x="6894576" y="1572768"/>
-            <a:ext cx="4529023" cy="219456"/>
+          <p:cNvPr id="10" name="TextBox 9"/>
+          <p:cNvSpPr txBox="1"/>
+          <p:nvPr/>
+        </p:nvSpPr>
+        <p:spPr>
+          <a:xfrm>
+            <a:off x="768096" y="3648456"/>
+            <a:ext cx="5394959" cy="219456"/>
           </a:xfrm>
           <a:prstGeom prst="rect">
             <a:avLst/>
@@ -15621,27 +17070,279 @@
             <a:r>
               <a:rPr sz="950" b="1">
                 <a:solidFill>
-                  <a:srgbClr val="0E7490"/>
-                </a:solidFill>
-                <a:latin typeface="Inter"/>
-              </a:rPr>
-              <a:t>PRIMARY SOURCES — MANUFACTURER DATASHEETS</a:t>
-            </a:r>
-          </a:p>
-        </p:txBody>
-      </p:sp>
-      <p:sp>
-        <p:nvSpPr>
-          <p:cNvPr id="30" name="Oval 29"/>
+                  <a:srgbClr val="B45309"/>
+                </a:solidFill>
+                <a:latin typeface="Inter"/>
+              </a:rPr>
+              <a:t>IN-BROWSER RETRAINING</a:t>
+            </a:r>
+          </a:p>
+        </p:txBody>
+      </p:sp>
+      <p:sp>
+        <p:nvSpPr>
+          <p:cNvPr id="11" name="TextBox 10"/>
+          <p:cNvSpPr txBox="1"/>
+          <p:nvPr/>
+        </p:nvSpPr>
+        <p:spPr>
+          <a:xfrm>
+            <a:off x="768096" y="3895344"/>
+            <a:ext cx="5394959" cy="566928"/>
+          </a:xfrm>
+          <a:prstGeom prst="rect">
+            <a:avLst/>
+          </a:prstGeom>
+          <a:noFill/>
+        </p:spPr>
+        <p:txBody>
+          <a:bodyPr wrap="square" anchor="t" lIns="0" rIns="0" tIns="0" bIns="0">
+            <a:spAutoFit/>
+          </a:bodyPr>
+          <a:lstStyle/>
+          <a:p>
+            <a:pPr algn="l">
+              <a:lnSpc>
+                <a:spcPct val="124000"/>
+              </a:lnSpc>
+              <a:spcAft>
+                <a:spcPts val="0"/>
+              </a:spcAft>
+            </a:pPr>
+            <a:r>
+              <a:rPr sz="1150" b="0">
+                <a:solidFill>
+                  <a:srgbClr val="0F172A"/>
+                </a:solidFill>
+                <a:latin typeface="Inter"/>
+              </a:rPr>
+              <a:t>Upload field telemetry from the new pack and retrain XGBoost from the dashboard — the adaptation loop closes without a developer.</a:t>
+            </a:r>
+          </a:p>
+        </p:txBody>
+      </p:sp>
+      <p:sp>
+        <p:nvSpPr>
+          <p:cNvPr id="12" name="TextBox 11"/>
+          <p:cNvSpPr txBox="1"/>
+          <p:nvPr/>
+        </p:nvSpPr>
+        <p:spPr>
+          <a:xfrm>
+            <a:off x="566928" y="4645152"/>
+            <a:ext cx="5797296" cy="219456"/>
+          </a:xfrm>
+          <a:prstGeom prst="rect">
+            <a:avLst/>
+          </a:prstGeom>
+          <a:noFill/>
+        </p:spPr>
+        <p:txBody>
+          <a:bodyPr wrap="square" anchor="t" lIns="0" rIns="0" tIns="0" bIns="0">
+            <a:spAutoFit/>
+          </a:bodyPr>
+          <a:lstStyle/>
+          <a:p>
+            <a:pPr algn="l">
+              <a:lnSpc>
+                <a:spcPct val="118000"/>
+              </a:lnSpc>
+              <a:spcAft>
+                <a:spcPts val="0"/>
+              </a:spcAft>
+            </a:pPr>
+            <a:r>
+              <a:rPr sz="950" b="1">
+                <a:solidFill>
+                  <a:srgbClr val="475569"/>
+                </a:solidFill>
+                <a:latin typeface="Inter"/>
+              </a:rPr>
+              <a:t>WHAT WE WOULD BUILD NEXT</a:t>
+            </a:r>
+          </a:p>
+        </p:txBody>
+      </p:sp>
+      <p:sp>
+        <p:nvSpPr>
+          <p:cNvPr id="13" name="Rectangle 12"/>
           <p:cNvSpPr/>
           <p:nvPr/>
         </p:nvSpPr>
         <p:spPr>
           <a:xfrm>
-            <a:off x="6912864" y="1947672"/>
-            <a:ext cx="82296" cy="82296"/>
-          </a:xfrm>
-          <a:prstGeom prst="ellipse">
+            <a:off x="566928" y="4919472"/>
+            <a:ext cx="54864" cy="201168"/>
+          </a:xfrm>
+          <a:prstGeom prst="rect">
+            <a:avLst/>
+          </a:prstGeom>
+          <a:solidFill>
+            <a:srgbClr val="B91C1C"/>
+          </a:solidFill>
+          <a:ln>
+            <a:noFill/>
+          </a:ln>
+          <a:effectLst/>
+        </p:spPr>
+        <p:style>
+          <a:lnRef idx="1">
+            <a:schemeClr val="accent1"/>
+          </a:lnRef>
+          <a:fillRef idx="3">
+            <a:schemeClr val="accent1"/>
+          </a:fillRef>
+          <a:effectRef idx="2">
+            <a:schemeClr val="accent1"/>
+          </a:effectRef>
+          <a:fontRef idx="minor">
+            <a:schemeClr val="lt1"/>
+          </a:fontRef>
+        </p:style>
+        <p:txBody>
+          <a:bodyPr rtlCol="0" anchor="ctr"/>
+          <a:lstStyle/>
+          <a:p/>
+        </p:txBody>
+      </p:sp>
+      <p:sp>
+        <p:nvSpPr>
+          <p:cNvPr id="14" name="TextBox 13"/>
+          <p:cNvSpPr txBox="1"/>
+          <p:nvPr/>
+        </p:nvSpPr>
+        <p:spPr>
+          <a:xfrm>
+            <a:off x="768096" y="4901184"/>
+            <a:ext cx="5596128" cy="237744"/>
+          </a:xfrm>
+          <a:prstGeom prst="rect">
+            <a:avLst/>
+          </a:prstGeom>
+          <a:noFill/>
+        </p:spPr>
+        <p:txBody>
+          <a:bodyPr wrap="square" anchor="t" lIns="0" rIns="0" tIns="0" bIns="0">
+            <a:spAutoFit/>
+          </a:bodyPr>
+          <a:lstStyle/>
+          <a:p>
+            <a:pPr algn="l">
+              <a:lnSpc>
+                <a:spcPct val="118000"/>
+              </a:lnSpc>
+              <a:spcAft>
+                <a:spcPts val="0"/>
+              </a:spcAft>
+            </a:pPr>
+            <a:r>
+              <a:rPr sz="1150" b="0">
+                <a:solidFill>
+                  <a:srgbClr val="0F172A"/>
+                </a:solidFill>
+                <a:latin typeface="Inter"/>
+              </a:rPr>
+              <a:t>Close the Cell Imbalance gap</a:t>
+            </a:r>
+          </a:p>
+        </p:txBody>
+      </p:sp>
+      <p:sp>
+        <p:nvSpPr>
+          <p:cNvPr id="15" name="Rectangle 14"/>
+          <p:cNvSpPr/>
+          <p:nvPr/>
+        </p:nvSpPr>
+        <p:spPr>
+          <a:xfrm>
+            <a:off x="566928" y="5166360"/>
+            <a:ext cx="54864" cy="201168"/>
+          </a:xfrm>
+          <a:prstGeom prst="rect">
+            <a:avLst/>
+          </a:prstGeom>
+          <a:solidFill>
+            <a:srgbClr val="B45309"/>
+          </a:solidFill>
+          <a:ln>
+            <a:noFill/>
+          </a:ln>
+          <a:effectLst/>
+        </p:spPr>
+        <p:style>
+          <a:lnRef idx="1">
+            <a:schemeClr val="accent1"/>
+          </a:lnRef>
+          <a:fillRef idx="3">
+            <a:schemeClr val="accent1"/>
+          </a:fillRef>
+          <a:effectRef idx="2">
+            <a:schemeClr val="accent1"/>
+          </a:effectRef>
+          <a:fontRef idx="minor">
+            <a:schemeClr val="lt1"/>
+          </a:fontRef>
+        </p:style>
+        <p:txBody>
+          <a:bodyPr rtlCol="0" anchor="ctr"/>
+          <a:lstStyle/>
+          <a:p/>
+        </p:txBody>
+      </p:sp>
+      <p:sp>
+        <p:nvSpPr>
+          <p:cNvPr id="16" name="TextBox 15"/>
+          <p:cNvSpPr txBox="1"/>
+          <p:nvPr/>
+        </p:nvSpPr>
+        <p:spPr>
+          <a:xfrm>
+            <a:off x="768096" y="5148072"/>
+            <a:ext cx="5596128" cy="237744"/>
+          </a:xfrm>
+          <a:prstGeom prst="rect">
+            <a:avLst/>
+          </a:prstGeom>
+          <a:noFill/>
+        </p:spPr>
+        <p:txBody>
+          <a:bodyPr wrap="square" anchor="t" lIns="0" rIns="0" tIns="0" bIns="0">
+            <a:spAutoFit/>
+          </a:bodyPr>
+          <a:lstStyle/>
+          <a:p>
+            <a:pPr algn="l">
+              <a:lnSpc>
+                <a:spcPct val="118000"/>
+              </a:lnSpc>
+              <a:spcAft>
+                <a:spcPts val="0"/>
+              </a:spcAft>
+            </a:pPr>
+            <a:r>
+              <a:rPr sz="1150" b="0">
+                <a:solidFill>
+                  <a:srgbClr val="0F172A"/>
+                </a:solidFill>
+                <a:latin typeface="Inter"/>
+              </a:rPr>
+              <a:t>Lift OOD recall above 24.5%</a:t>
+            </a:r>
+          </a:p>
+        </p:txBody>
+      </p:sp>
+      <p:sp>
+        <p:nvSpPr>
+          <p:cNvPr id="17" name="Rectangle 16"/>
+          <p:cNvSpPr/>
+          <p:nvPr/>
+        </p:nvSpPr>
+        <p:spPr>
+          <a:xfrm>
+            <a:off x="566928" y="5413248"/>
+            <a:ext cx="54864" cy="201168"/>
+          </a:xfrm>
+          <a:prstGeom prst="rect">
             <a:avLst/>
           </a:prstGeom>
           <a:solidFill>
@@ -15674,14 +17375,14 @@
       </p:sp>
       <p:sp>
         <p:nvSpPr>
-          <p:cNvPr id="31" name="TextBox 30"/>
-          <p:cNvSpPr txBox="1"/>
-          <p:nvPr/>
-        </p:nvSpPr>
-        <p:spPr>
-          <a:xfrm>
-            <a:off x="7114032" y="1865376"/>
-            <a:ext cx="2788920" cy="237744"/>
+          <p:cNvPr id="18" name="TextBox 17"/>
+          <p:cNvSpPr txBox="1"/>
+          <p:nvPr/>
+        </p:nvSpPr>
+        <p:spPr>
+          <a:xfrm>
+            <a:off x="768096" y="5394960"/>
+            <a:ext cx="5596128" cy="237744"/>
           </a:xfrm>
           <a:prstGeom prst="rect">
             <a:avLst/>
@@ -15703,71 +17404,29 @@
               </a:spcAft>
             </a:pPr>
             <a:r>
-              <a:rPr sz="1050" b="0">
+              <a:rPr sz="1150" b="0">
                 <a:solidFill>
                   <a:srgbClr val="0F172A"/>
                 </a:solidFill>
                 <a:latin typeface="Inter"/>
               </a:rPr>
-              <a:t>LG Energy Solution INR21700-M50</a:t>
-            </a:r>
-          </a:p>
-        </p:txBody>
-      </p:sp>
-      <p:sp>
-        <p:nvSpPr>
-          <p:cNvPr id="32" name="TextBox 31"/>
-          <p:cNvSpPr txBox="1"/>
-          <p:nvPr/>
-        </p:nvSpPr>
-        <p:spPr>
-          <a:xfrm>
-            <a:off x="9893808" y="1874519"/>
-            <a:ext cx="1529791" cy="219456"/>
-          </a:xfrm>
-          <a:prstGeom prst="rect">
-            <a:avLst/>
-          </a:prstGeom>
-          <a:noFill/>
-        </p:spPr>
-        <p:txBody>
-          <a:bodyPr wrap="square" anchor="t" lIns="0" rIns="0" tIns="0" bIns="0">
-            <a:spAutoFit/>
-          </a:bodyPr>
-          <a:lstStyle/>
-          <a:p>
-            <a:pPr algn="l">
-              <a:lnSpc>
-                <a:spcPct val="118000"/>
-              </a:lnSpc>
-              <a:spcAft>
-                <a:spcPts val="0"/>
-              </a:spcAft>
-            </a:pPr>
-            <a:r>
-              <a:rPr sz="900" b="0">
-                <a:solidFill>
-                  <a:srgbClr val="475569"/>
-                </a:solidFill>
-                <a:latin typeface="Inter"/>
-              </a:rPr>
-              <a:t>cell used in the 8S2P pack</a:t>
-            </a:r>
-          </a:p>
-        </p:txBody>
-      </p:sp>
-      <p:sp>
-        <p:nvSpPr>
-          <p:cNvPr id="33" name="Oval 32"/>
+              <a:t>Move inference onto the Zynq-7000</a:t>
+            </a:r>
+          </a:p>
+        </p:txBody>
+      </p:sp>
+      <p:sp>
+        <p:nvSpPr>
+          <p:cNvPr id="19" name="Rectangle 18"/>
           <p:cNvSpPr/>
           <p:nvPr/>
         </p:nvSpPr>
         <p:spPr>
           <a:xfrm>
-            <a:off x="6912864" y="2295144"/>
-            <a:ext cx="82296" cy="82296"/>
-          </a:xfrm>
-          <a:prstGeom prst="ellipse">
+            <a:off x="566928" y="5660136"/>
+            <a:ext cx="54864" cy="201168"/>
+          </a:xfrm>
+          <a:prstGeom prst="rect">
             <a:avLst/>
           </a:prstGeom>
           <a:solidFill>
@@ -15800,14 +17459,14 @@
       </p:sp>
       <p:sp>
         <p:nvSpPr>
-          <p:cNvPr id="34" name="TextBox 33"/>
-          <p:cNvSpPr txBox="1"/>
-          <p:nvPr/>
-        </p:nvSpPr>
-        <p:spPr>
-          <a:xfrm>
-            <a:off x="7114032" y="2212848"/>
-            <a:ext cx="2788920" cy="237744"/>
+          <p:cNvPr id="20" name="TextBox 19"/>
+          <p:cNvSpPr txBox="1"/>
+          <p:nvPr/>
+        </p:nvSpPr>
+        <p:spPr>
+          <a:xfrm>
+            <a:off x="768096" y="5641848"/>
+            <a:ext cx="5596128" cy="237744"/>
           </a:xfrm>
           <a:prstGeom prst="rect">
             <a:avLst/>
@@ -15829,71 +17488,29 @@
               </a:spcAft>
             </a:pPr>
             <a:r>
-              <a:rPr sz="1050" b="0">
+              <a:rPr sz="1150" b="0">
                 <a:solidFill>
                   <a:srgbClr val="0F172A"/>
                 </a:solidFill>
                 <a:latin typeface="Inter"/>
               </a:rPr>
-              <a:t>DMEGC INR21700-45E</a:t>
-            </a:r>
-          </a:p>
-        </p:txBody>
-      </p:sp>
-      <p:sp>
-        <p:nvSpPr>
-          <p:cNvPr id="35" name="TextBox 34"/>
-          <p:cNvSpPr txBox="1"/>
-          <p:nvPr/>
-        </p:nvSpPr>
-        <p:spPr>
-          <a:xfrm>
-            <a:off x="9893808" y="2221991"/>
-            <a:ext cx="1529791" cy="219456"/>
-          </a:xfrm>
-          <a:prstGeom prst="rect">
-            <a:avLst/>
-          </a:prstGeom>
-          <a:noFill/>
-        </p:spPr>
-        <p:txBody>
-          <a:bodyPr wrap="square" anchor="t" lIns="0" rIns="0" tIns="0" bIns="0">
-            <a:spAutoFit/>
-          </a:bodyPr>
-          <a:lstStyle/>
-          <a:p>
-            <a:pPr algn="l">
-              <a:lnSpc>
-                <a:spcPct val="118000"/>
-              </a:lnSpc>
-              <a:spcAft>
-                <a:spcPts val="0"/>
-              </a:spcAft>
-            </a:pPr>
-            <a:r>
-              <a:rPr sz="900" b="0">
-                <a:solidFill>
-                  <a:srgbClr val="475569"/>
-                </a:solidFill>
-                <a:latin typeface="Inter"/>
-              </a:rPr>
-              <a:t>alternate NMC cell, parsed</a:t>
-            </a:r>
-          </a:p>
-        </p:txBody>
-      </p:sp>
-      <p:sp>
-        <p:nvSpPr>
-          <p:cNvPr id="36" name="Oval 35"/>
+              <a:t>Characterise LFP on a real bench</a:t>
+            </a:r>
+          </a:p>
+        </p:txBody>
+      </p:sp>
+      <p:sp>
+        <p:nvSpPr>
+          <p:cNvPr id="21" name="Rectangle 20"/>
           <p:cNvSpPr/>
           <p:nvPr/>
         </p:nvSpPr>
         <p:spPr>
           <a:xfrm>
-            <a:off x="6912864" y="2642615"/>
-            <a:ext cx="82296" cy="82296"/>
-          </a:xfrm>
-          <a:prstGeom prst="ellipse">
+            <a:off x="566928" y="5907023"/>
+            <a:ext cx="54864" cy="201168"/>
+          </a:xfrm>
+          <a:prstGeom prst="rect">
             <a:avLst/>
           </a:prstGeom>
           <a:solidFill>
@@ -15926,14 +17543,14 @@
       </p:sp>
       <p:sp>
         <p:nvSpPr>
-          <p:cNvPr id="37" name="TextBox 36"/>
-          <p:cNvSpPr txBox="1"/>
-          <p:nvPr/>
-        </p:nvSpPr>
-        <p:spPr>
-          <a:xfrm>
-            <a:off x="7114032" y="2560320"/>
-            <a:ext cx="2788920" cy="237744"/>
+          <p:cNvPr id="22" name="TextBox 21"/>
+          <p:cNvSpPr txBox="1"/>
+          <p:nvPr/>
+        </p:nvSpPr>
+        <p:spPr>
+          <a:xfrm>
+            <a:off x="768096" y="5888736"/>
+            <a:ext cx="5596128" cy="237744"/>
           </a:xfrm>
           <a:prstGeom prst="rect">
             <a:avLst/>
@@ -15955,27 +17572,75 @@
               </a:spcAft>
             </a:pPr>
             <a:r>
-              <a:rPr sz="1050" b="0">
+              <a:rPr sz="1150" b="0">
                 <a:solidFill>
                   <a:srgbClr val="0F172A"/>
                 </a:solidFill>
                 <a:latin typeface="Inter"/>
               </a:rPr>
-              <a:t>Panasonic NCR18650B</a:t>
-            </a:r>
-          </a:p>
-        </p:txBody>
-      </p:sp>
-      <p:sp>
-        <p:nvSpPr>
-          <p:cNvPr id="38" name="TextBox 37"/>
-          <p:cNvSpPr txBox="1"/>
-          <p:nvPr/>
-        </p:nvSpPr>
-        <p:spPr>
-          <a:xfrm>
-            <a:off x="9893808" y="2569463"/>
-            <a:ext cx="1529791" cy="219456"/>
+              <a:t>SOH and remaining useful life from dV/dt</a:t>
+            </a:r>
+          </a:p>
+        </p:txBody>
+      </p:sp>
+      <p:pic>
+        <p:nvPicPr>
+          <p:cNvPr id="23" name="Picture 22" descr="diag_configurator.png"/>
+          <p:cNvPicPr>
+            <a:picLocks noChangeAspect="1"/>
+          </p:cNvPicPr>
+          <p:nvPr/>
+        </p:nvPicPr>
+        <p:blipFill>
+          <a:blip r:embed="rId2"/>
+          <a:stretch>
+            <a:fillRect/>
+          </a:stretch>
+        </p:blipFill>
+        <p:spPr>
+          <a:xfrm>
+            <a:off x="6693408" y="2027827"/>
+            <a:ext cx="2139696" cy="2838921"/>
+          </a:xfrm>
+          <a:prstGeom prst="rect">
+            <a:avLst/>
+          </a:prstGeom>
+        </p:spPr>
+      </p:pic>
+      <p:pic>
+        <p:nvPicPr>
+          <p:cNvPr id="24" name="Picture 23" descr="fig_ocv_soc.png"/>
+          <p:cNvPicPr>
+            <a:picLocks noChangeAspect="1"/>
+          </p:cNvPicPr>
+          <p:nvPr/>
+        </p:nvPicPr>
+        <p:blipFill>
+          <a:blip r:embed="rId3"/>
+          <a:stretch>
+            <a:fillRect/>
+          </a:stretch>
+        </p:blipFill>
+        <p:spPr>
+          <a:xfrm>
+            <a:off x="8997696" y="1959079"/>
+            <a:ext cx="2627071" cy="2583224"/>
+          </a:xfrm>
+          <a:prstGeom prst="rect">
+            <a:avLst/>
+          </a:prstGeom>
+        </p:spPr>
+      </p:pic>
+      <p:sp>
+        <p:nvSpPr>
+          <p:cNvPr id="25" name="TextBox 24"/>
+          <p:cNvSpPr txBox="1"/>
+          <p:nvPr/>
+        </p:nvSpPr>
+        <p:spPr>
+          <a:xfrm>
+            <a:off x="8997696" y="4773168"/>
+            <a:ext cx="2627071" cy="237744"/>
           </a:xfrm>
           <a:prstGeom prst="rect">
             <a:avLst/>
@@ -15988,7 +17653,7 @@
           </a:bodyPr>
           <a:lstStyle/>
           <a:p>
-            <a:pPr algn="l">
+            <a:pPr algn="ctr">
               <a:lnSpc>
                 <a:spcPct val="118000"/>
               </a:lnSpc>
@@ -15997,772 +17662,13 @@
               </a:spcAft>
             </a:pPr>
             <a:r>
-              <a:rPr sz="900" b="0">
+              <a:rPr sz="950" b="0">
                 <a:solidFill>
                   <a:srgbClr val="475569"/>
                 </a:solidFill>
                 <a:latin typeface="Inter"/>
               </a:rPr>
-              <a:t>NCA tier reference</a:t>
-            </a:r>
-          </a:p>
-        </p:txBody>
-      </p:sp>
-      <p:sp>
-        <p:nvSpPr>
-          <p:cNvPr id="39" name="Oval 38"/>
-          <p:cNvSpPr/>
-          <p:nvPr/>
-        </p:nvSpPr>
-        <p:spPr>
-          <a:xfrm>
-            <a:off x="6912864" y="2990087"/>
-            <a:ext cx="82296" cy="82296"/>
-          </a:xfrm>
-          <a:prstGeom prst="ellipse">
-            <a:avLst/>
-          </a:prstGeom>
-          <a:solidFill>
-            <a:srgbClr val="0E7490"/>
-          </a:solidFill>
-          <a:ln>
-            <a:noFill/>
-          </a:ln>
-          <a:effectLst/>
-        </p:spPr>
-        <p:style>
-          <a:lnRef idx="1">
-            <a:schemeClr val="accent1"/>
-          </a:lnRef>
-          <a:fillRef idx="3">
-            <a:schemeClr val="accent1"/>
-          </a:fillRef>
-          <a:effectRef idx="2">
-            <a:schemeClr val="accent1"/>
-          </a:effectRef>
-          <a:fontRef idx="minor">
-            <a:schemeClr val="lt1"/>
-          </a:fontRef>
-        </p:style>
-        <p:txBody>
-          <a:bodyPr rtlCol="0" anchor="ctr"/>
-          <a:lstStyle/>
-          <a:p/>
-        </p:txBody>
-      </p:sp>
-      <p:sp>
-        <p:nvSpPr>
-          <p:cNvPr id="40" name="TextBox 39"/>
-          <p:cNvSpPr txBox="1"/>
-          <p:nvPr/>
-        </p:nvSpPr>
-        <p:spPr>
-          <a:xfrm>
-            <a:off x="7114032" y="2907791"/>
-            <a:ext cx="2788920" cy="237744"/>
-          </a:xfrm>
-          <a:prstGeom prst="rect">
-            <a:avLst/>
-          </a:prstGeom>
-          <a:noFill/>
-        </p:spPr>
-        <p:txBody>
-          <a:bodyPr wrap="square" anchor="t" lIns="0" rIns="0" tIns="0" bIns="0">
-            <a:spAutoFit/>
-          </a:bodyPr>
-          <a:lstStyle/>
-          <a:p>
-            <a:pPr algn="l">
-              <a:lnSpc>
-                <a:spcPct val="118000"/>
-              </a:lnSpc>
-              <a:spcAft>
-                <a:spcPts val="0"/>
-              </a:spcAft>
-            </a:pPr>
-            <a:r>
-              <a:rPr sz="1050" b="0">
-                <a:solidFill>
-                  <a:srgbClr val="0F172A"/>
-                </a:solidFill>
-                <a:latin typeface="Inter"/>
-              </a:rPr>
-              <a:t>P3 3232 LFP 26650</a:t>
-            </a:r>
-          </a:p>
-        </p:txBody>
-      </p:sp>
-      <p:sp>
-        <p:nvSpPr>
-          <p:cNvPr id="41" name="TextBox 40"/>
-          <p:cNvSpPr txBox="1"/>
-          <p:nvPr/>
-        </p:nvSpPr>
-        <p:spPr>
-          <a:xfrm>
-            <a:off x="9893808" y="2916935"/>
-            <a:ext cx="1529791" cy="219456"/>
-          </a:xfrm>
-          <a:prstGeom prst="rect">
-            <a:avLst/>
-          </a:prstGeom>
-          <a:noFill/>
-        </p:spPr>
-        <p:txBody>
-          <a:bodyPr wrap="square" anchor="t" lIns="0" rIns="0" tIns="0" bIns="0">
-            <a:spAutoFit/>
-          </a:bodyPr>
-          <a:lstStyle/>
-          <a:p>
-            <a:pPr algn="l">
-              <a:lnSpc>
-                <a:spcPct val="118000"/>
-              </a:lnSpc>
-              <a:spcAft>
-                <a:spcPts val="0"/>
-              </a:spcAft>
-            </a:pPr>
-            <a:r>
-              <a:rPr sz="900" b="0">
-                <a:solidFill>
-                  <a:srgbClr val="475569"/>
-                </a:solidFill>
-                <a:latin typeface="Inter"/>
-              </a:rPr>
-              <a:t>LFP tier reference</a:t>
-            </a:r>
-          </a:p>
-        </p:txBody>
-      </p:sp>
-      <p:sp>
-        <p:nvSpPr>
-          <p:cNvPr id="42" name="Oval 41"/>
-          <p:cNvSpPr/>
-          <p:nvPr/>
-        </p:nvSpPr>
-        <p:spPr>
-          <a:xfrm>
-            <a:off x="6912864" y="3337559"/>
-            <a:ext cx="82296" cy="82296"/>
-          </a:xfrm>
-          <a:prstGeom prst="ellipse">
-            <a:avLst/>
-          </a:prstGeom>
-          <a:solidFill>
-            <a:srgbClr val="0E7490"/>
-          </a:solidFill>
-          <a:ln>
-            <a:noFill/>
-          </a:ln>
-          <a:effectLst/>
-        </p:spPr>
-        <p:style>
-          <a:lnRef idx="1">
-            <a:schemeClr val="accent1"/>
-          </a:lnRef>
-          <a:fillRef idx="3">
-            <a:schemeClr val="accent1"/>
-          </a:fillRef>
-          <a:effectRef idx="2">
-            <a:schemeClr val="accent1"/>
-          </a:effectRef>
-          <a:fontRef idx="minor">
-            <a:schemeClr val="lt1"/>
-          </a:fontRef>
-        </p:style>
-        <p:txBody>
-          <a:bodyPr rtlCol="0" anchor="ctr"/>
-          <a:lstStyle/>
-          <a:p/>
-        </p:txBody>
-      </p:sp>
-      <p:sp>
-        <p:nvSpPr>
-          <p:cNvPr id="43" name="TextBox 42"/>
-          <p:cNvSpPr txBox="1"/>
-          <p:nvPr/>
-        </p:nvSpPr>
-        <p:spPr>
-          <a:xfrm>
-            <a:off x="7114032" y="3255263"/>
-            <a:ext cx="2788920" cy="237744"/>
-          </a:xfrm>
-          <a:prstGeom prst="rect">
-            <a:avLst/>
-          </a:prstGeom>
-          <a:noFill/>
-        </p:spPr>
-        <p:txBody>
-          <a:bodyPr wrap="square" anchor="t" lIns="0" rIns="0" tIns="0" bIns="0">
-            <a:spAutoFit/>
-          </a:bodyPr>
-          <a:lstStyle/>
-          <a:p>
-            <a:pPr algn="l">
-              <a:lnSpc>
-                <a:spcPct val="118000"/>
-              </a:lnSpc>
-              <a:spcAft>
-                <a:spcPts val="0"/>
-              </a:spcAft>
-            </a:pPr>
-            <a:r>
-              <a:rPr sz="1050" b="0">
-                <a:solidFill>
-                  <a:srgbClr val="0F172A"/>
-                </a:solidFill>
-                <a:latin typeface="Inter"/>
-              </a:rPr>
-              <a:t>JBD SP24S007 V1.1</a:t>
-            </a:r>
-          </a:p>
-        </p:txBody>
-      </p:sp>
-      <p:sp>
-        <p:nvSpPr>
-          <p:cNvPr id="44" name="TextBox 43"/>
-          <p:cNvSpPr txBox="1"/>
-          <p:nvPr/>
-        </p:nvSpPr>
-        <p:spPr>
-          <a:xfrm>
-            <a:off x="9893808" y="3264407"/>
-            <a:ext cx="1529791" cy="219456"/>
-          </a:xfrm>
-          <a:prstGeom prst="rect">
-            <a:avLst/>
-          </a:prstGeom>
-          <a:noFill/>
-        </p:spPr>
-        <p:txBody>
-          <a:bodyPr wrap="square" anchor="t" lIns="0" rIns="0" tIns="0" bIns="0">
-            <a:spAutoFit/>
-          </a:bodyPr>
-          <a:lstStyle/>
-          <a:p>
-            <a:pPr algn="l">
-              <a:lnSpc>
-                <a:spcPct val="118000"/>
-              </a:lnSpc>
-              <a:spcAft>
-                <a:spcPts val="0"/>
-              </a:spcAft>
-            </a:pPr>
-            <a:r>
-              <a:rPr sz="900" b="0">
-                <a:solidFill>
-                  <a:srgbClr val="475569"/>
-                </a:solidFill>
-                <a:latin typeface="Inter"/>
-              </a:rPr>
-              <a:t>BMS protocol + registers</a:t>
-            </a:r>
-          </a:p>
-        </p:txBody>
-      </p:sp>
-      <p:sp>
-        <p:nvSpPr>
-          <p:cNvPr id="45" name="Rectangle 44"/>
-          <p:cNvSpPr/>
-          <p:nvPr/>
-        </p:nvSpPr>
-        <p:spPr>
-          <a:xfrm>
-            <a:off x="6693408" y="3730752"/>
-            <a:ext cx="4931359" cy="1883664"/>
-          </a:xfrm>
-          <a:prstGeom prst="rect">
-            <a:avLst/>
-          </a:prstGeom>
-          <a:solidFill>
-            <a:srgbClr val="F1F5F9"/>
-          </a:solidFill>
-          <a:ln w="9525">
-            <a:solidFill>
-              <a:srgbClr val="CBD5E1"/>
-            </a:solidFill>
-          </a:ln>
-          <a:effectLst/>
-        </p:spPr>
-        <p:style>
-          <a:lnRef idx="1">
-            <a:schemeClr val="accent1"/>
-          </a:lnRef>
-          <a:fillRef idx="3">
-            <a:schemeClr val="accent1"/>
-          </a:fillRef>
-          <a:effectRef idx="2">
-            <a:schemeClr val="accent1"/>
-          </a:effectRef>
-          <a:fontRef idx="minor">
-            <a:schemeClr val="lt1"/>
-          </a:fontRef>
-        </p:style>
-        <p:txBody>
-          <a:bodyPr rtlCol="0" anchor="ctr"/>
-          <a:lstStyle/>
-          <a:p/>
-        </p:txBody>
-      </p:sp>
-      <p:sp>
-        <p:nvSpPr>
-          <p:cNvPr id="46" name="TextBox 45"/>
-          <p:cNvSpPr txBox="1"/>
-          <p:nvPr/>
-        </p:nvSpPr>
-        <p:spPr>
-          <a:xfrm>
-            <a:off x="6894576" y="3858768"/>
-            <a:ext cx="4529023" cy="219456"/>
-          </a:xfrm>
-          <a:prstGeom prst="rect">
-            <a:avLst/>
-          </a:prstGeom>
-          <a:noFill/>
-        </p:spPr>
-        <p:txBody>
-          <a:bodyPr wrap="square" anchor="t" lIns="0" rIns="0" tIns="0" bIns="0">
-            <a:spAutoFit/>
-          </a:bodyPr>
-          <a:lstStyle/>
-          <a:p>
-            <a:pPr algn="l">
-              <a:lnSpc>
-                <a:spcPct val="118000"/>
-              </a:lnSpc>
-              <a:spcAft>
-                <a:spcPts val="0"/>
-              </a:spcAft>
-            </a:pPr>
-            <a:r>
-              <a:rPr sz="950" b="1">
-                <a:solidFill>
-                  <a:srgbClr val="B45309"/>
-                </a:solidFill>
-                <a:latin typeface="Inter"/>
-              </a:rPr>
-              <a:t>METHODS</a:t>
-            </a:r>
-          </a:p>
-        </p:txBody>
-      </p:sp>
-      <p:sp>
-        <p:nvSpPr>
-          <p:cNvPr id="47" name="TextBox 46"/>
-          <p:cNvSpPr txBox="1"/>
-          <p:nvPr/>
-        </p:nvSpPr>
-        <p:spPr>
-          <a:xfrm>
-            <a:off x="6912864" y="4151376"/>
-            <a:ext cx="4492447" cy="201168"/>
-          </a:xfrm>
-          <a:prstGeom prst="rect">
-            <a:avLst/>
-          </a:prstGeom>
-          <a:noFill/>
-        </p:spPr>
-        <p:txBody>
-          <a:bodyPr wrap="square" anchor="t" lIns="0" rIns="0" tIns="0" bIns="0">
-            <a:spAutoFit/>
-          </a:bodyPr>
-          <a:lstStyle/>
-          <a:p>
-            <a:pPr algn="l">
-              <a:lnSpc>
-                <a:spcPct val="118000"/>
-              </a:lnSpc>
-              <a:spcAft>
-                <a:spcPts val="0"/>
-              </a:spcAft>
-            </a:pPr>
-            <a:r>
-              <a:rPr sz="1050" b="1">
-                <a:solidFill>
-                  <a:srgbClr val="0F172A"/>
-                </a:solidFill>
-                <a:latin typeface="Inter"/>
-              </a:rPr>
-              <a:t>Chen, T. &amp; Guestrin, C.</a:t>
-            </a:r>
-          </a:p>
-        </p:txBody>
-      </p:sp>
-      <p:sp>
-        <p:nvSpPr>
-          <p:cNvPr id="48" name="TextBox 47"/>
-          <p:cNvSpPr txBox="1"/>
-          <p:nvPr/>
-        </p:nvSpPr>
-        <p:spPr>
-          <a:xfrm>
-            <a:off x="6912864" y="4325112"/>
-            <a:ext cx="4492447" cy="201168"/>
-          </a:xfrm>
-          <a:prstGeom prst="rect">
-            <a:avLst/>
-          </a:prstGeom>
-          <a:noFill/>
-        </p:spPr>
-        <p:txBody>
-          <a:bodyPr wrap="square" anchor="t" lIns="0" rIns="0" tIns="0" bIns="0">
-            <a:spAutoFit/>
-          </a:bodyPr>
-          <a:lstStyle/>
-          <a:p>
-            <a:pPr algn="l">
-              <a:lnSpc>
-                <a:spcPct val="118000"/>
-              </a:lnSpc>
-              <a:spcAft>
-                <a:spcPts val="0"/>
-              </a:spcAft>
-            </a:pPr>
-            <a:r>
-              <a:rPr sz="900" b="0">
-                <a:solidFill>
-                  <a:srgbClr val="475569"/>
-                </a:solidFill>
-                <a:latin typeface="Inter"/>
-              </a:rPr>
-              <a:t>“XGBoost: A Scalable Tree Boosting System”, KDD 2016</a:t>
-            </a:r>
-          </a:p>
-        </p:txBody>
-      </p:sp>
-      <p:sp>
-        <p:nvSpPr>
-          <p:cNvPr id="49" name="TextBox 48"/>
-          <p:cNvSpPr txBox="1"/>
-          <p:nvPr/>
-        </p:nvSpPr>
-        <p:spPr>
-          <a:xfrm>
-            <a:off x="6912864" y="4517136"/>
-            <a:ext cx="4492447" cy="201168"/>
-          </a:xfrm>
-          <a:prstGeom prst="rect">
-            <a:avLst/>
-          </a:prstGeom>
-          <a:noFill/>
-        </p:spPr>
-        <p:txBody>
-          <a:bodyPr wrap="square" anchor="t" lIns="0" rIns="0" tIns="0" bIns="0">
-            <a:spAutoFit/>
-          </a:bodyPr>
-          <a:lstStyle/>
-          <a:p>
-            <a:pPr algn="l">
-              <a:lnSpc>
-                <a:spcPct val="118000"/>
-              </a:lnSpc>
-              <a:spcAft>
-                <a:spcPts val="0"/>
-              </a:spcAft>
-            </a:pPr>
-            <a:r>
-              <a:rPr sz="1050" b="1">
-                <a:solidFill>
-                  <a:srgbClr val="0F172A"/>
-                </a:solidFill>
-                <a:latin typeface="Inter"/>
-              </a:rPr>
-              <a:t>Liu, F. T., Ting, K. M. &amp; Zhou, Z.-H.</a:t>
-            </a:r>
-          </a:p>
-        </p:txBody>
-      </p:sp>
-      <p:sp>
-        <p:nvSpPr>
-          <p:cNvPr id="50" name="TextBox 49"/>
-          <p:cNvSpPr txBox="1"/>
-          <p:nvPr/>
-        </p:nvSpPr>
-        <p:spPr>
-          <a:xfrm>
-            <a:off x="6912864" y="4690872"/>
-            <a:ext cx="4492447" cy="201168"/>
-          </a:xfrm>
-          <a:prstGeom prst="rect">
-            <a:avLst/>
-          </a:prstGeom>
-          <a:noFill/>
-        </p:spPr>
-        <p:txBody>
-          <a:bodyPr wrap="square" anchor="t" lIns="0" rIns="0" tIns="0" bIns="0">
-            <a:spAutoFit/>
-          </a:bodyPr>
-          <a:lstStyle/>
-          <a:p>
-            <a:pPr algn="l">
-              <a:lnSpc>
-                <a:spcPct val="118000"/>
-              </a:lnSpc>
-              <a:spcAft>
-                <a:spcPts val="0"/>
-              </a:spcAft>
-            </a:pPr>
-            <a:r>
-              <a:rPr sz="900" b="0">
-                <a:solidFill>
-                  <a:srgbClr val="475569"/>
-                </a:solidFill>
-                <a:latin typeface="Inter"/>
-              </a:rPr>
-              <a:t>“Isolation Forest”, ICDM 2008</a:t>
-            </a:r>
-          </a:p>
-        </p:txBody>
-      </p:sp>
-      <p:sp>
-        <p:nvSpPr>
-          <p:cNvPr id="51" name="TextBox 50"/>
-          <p:cNvSpPr txBox="1"/>
-          <p:nvPr/>
-        </p:nvSpPr>
-        <p:spPr>
-          <a:xfrm>
-            <a:off x="6912864" y="4882896"/>
-            <a:ext cx="4492447" cy="201168"/>
-          </a:xfrm>
-          <a:prstGeom prst="rect">
-            <a:avLst/>
-          </a:prstGeom>
-          <a:noFill/>
-        </p:spPr>
-        <p:txBody>
-          <a:bodyPr wrap="square" anchor="t" lIns="0" rIns="0" tIns="0" bIns="0">
-            <a:spAutoFit/>
-          </a:bodyPr>
-          <a:lstStyle/>
-          <a:p>
-            <a:pPr algn="l">
-              <a:lnSpc>
-                <a:spcPct val="118000"/>
-              </a:lnSpc>
-              <a:spcAft>
-                <a:spcPts val="0"/>
-              </a:spcAft>
-            </a:pPr>
-            <a:r>
-              <a:rPr sz="1050" b="1">
-                <a:solidFill>
-                  <a:srgbClr val="0F172A"/>
-                </a:solidFill>
-                <a:latin typeface="Inter"/>
-              </a:rPr>
-              <a:t>Vaswani, A. et al.</a:t>
-            </a:r>
-          </a:p>
-        </p:txBody>
-      </p:sp>
-      <p:sp>
-        <p:nvSpPr>
-          <p:cNvPr id="52" name="TextBox 51"/>
-          <p:cNvSpPr txBox="1"/>
-          <p:nvPr/>
-        </p:nvSpPr>
-        <p:spPr>
-          <a:xfrm>
-            <a:off x="6912864" y="5056632"/>
-            <a:ext cx="4492447" cy="201168"/>
-          </a:xfrm>
-          <a:prstGeom prst="rect">
-            <a:avLst/>
-          </a:prstGeom>
-          <a:noFill/>
-        </p:spPr>
-        <p:txBody>
-          <a:bodyPr wrap="square" anchor="t" lIns="0" rIns="0" tIns="0" bIns="0">
-            <a:spAutoFit/>
-          </a:bodyPr>
-          <a:lstStyle/>
-          <a:p>
-            <a:pPr algn="l">
-              <a:lnSpc>
-                <a:spcPct val="118000"/>
-              </a:lnSpc>
-              <a:spcAft>
-                <a:spcPts val="0"/>
-              </a:spcAft>
-            </a:pPr>
-            <a:r>
-              <a:rPr sz="900" b="0">
-                <a:solidFill>
-                  <a:srgbClr val="475569"/>
-                </a:solidFill>
-                <a:latin typeface="Inter"/>
-              </a:rPr>
-              <a:t>“Attention Is All You Need”, NeurIPS 2017</a:t>
-            </a:r>
-          </a:p>
-        </p:txBody>
-      </p:sp>
-      <p:sp>
-        <p:nvSpPr>
-          <p:cNvPr id="53" name="TextBox 52"/>
-          <p:cNvSpPr txBox="1"/>
-          <p:nvPr/>
-        </p:nvSpPr>
-        <p:spPr>
-          <a:xfrm>
-            <a:off x="6912864" y="5248656"/>
-            <a:ext cx="4492447" cy="201168"/>
-          </a:xfrm>
-          <a:prstGeom prst="rect">
-            <a:avLst/>
-          </a:prstGeom>
-          <a:noFill/>
-        </p:spPr>
-        <p:txBody>
-          <a:bodyPr wrap="square" anchor="t" lIns="0" rIns="0" tIns="0" bIns="0">
-            <a:spAutoFit/>
-          </a:bodyPr>
-          <a:lstStyle/>
-          <a:p>
-            <a:pPr algn="l">
-              <a:lnSpc>
-                <a:spcPct val="118000"/>
-              </a:lnSpc>
-              <a:spcAft>
-                <a:spcPts val="0"/>
-              </a:spcAft>
-            </a:pPr>
-            <a:r>
-              <a:rPr sz="1050" b="1">
-                <a:solidFill>
-                  <a:srgbClr val="0F172A"/>
-                </a:solidFill>
-                <a:latin typeface="Inter"/>
-              </a:rPr>
-              <a:t>Pedregosa, F. et al.</a:t>
-            </a:r>
-          </a:p>
-        </p:txBody>
-      </p:sp>
-      <p:sp>
-        <p:nvSpPr>
-          <p:cNvPr id="54" name="TextBox 53"/>
-          <p:cNvSpPr txBox="1"/>
-          <p:nvPr/>
-        </p:nvSpPr>
-        <p:spPr>
-          <a:xfrm>
-            <a:off x="6912864" y="5422392"/>
-            <a:ext cx="4492447" cy="201168"/>
-          </a:xfrm>
-          <a:prstGeom prst="rect">
-            <a:avLst/>
-          </a:prstGeom>
-          <a:noFill/>
-        </p:spPr>
-        <p:txBody>
-          <a:bodyPr wrap="square" anchor="t" lIns="0" rIns="0" tIns="0" bIns="0">
-            <a:spAutoFit/>
-          </a:bodyPr>
-          <a:lstStyle/>
-          <a:p>
-            <a:pPr algn="l">
-              <a:lnSpc>
-                <a:spcPct val="118000"/>
-              </a:lnSpc>
-              <a:spcAft>
-                <a:spcPts val="0"/>
-              </a:spcAft>
-            </a:pPr>
-            <a:r>
-              <a:rPr sz="900" b="0">
-                <a:solidFill>
-                  <a:srgbClr val="475569"/>
-                </a:solidFill>
-                <a:latin typeface="Inter"/>
-              </a:rPr>
-              <a:t>“Scikit-learn: Machine Learning in Python”, JMLR 12, 2011</a:t>
-            </a:r>
-          </a:p>
-        </p:txBody>
-      </p:sp>
-      <p:sp>
-        <p:nvSpPr>
-          <p:cNvPr id="55" name="TextBox 54"/>
-          <p:cNvSpPr txBox="1"/>
-          <p:nvPr/>
-        </p:nvSpPr>
-        <p:spPr>
-          <a:xfrm>
-            <a:off x="6693408" y="5760720"/>
-            <a:ext cx="4931359" cy="219456"/>
-          </a:xfrm>
-          <a:prstGeom prst="rect">
-            <a:avLst/>
-          </a:prstGeom>
-          <a:noFill/>
-        </p:spPr>
-        <p:txBody>
-          <a:bodyPr wrap="square" anchor="t" lIns="0" rIns="0" tIns="0" bIns="0">
-            <a:spAutoFit/>
-          </a:bodyPr>
-          <a:lstStyle/>
-          <a:p>
-            <a:pPr algn="l">
-              <a:lnSpc>
-                <a:spcPct val="118000"/>
-              </a:lnSpc>
-              <a:spcAft>
-                <a:spcPts val="0"/>
-              </a:spcAft>
-            </a:pPr>
-            <a:r>
-              <a:rPr sz="950" b="1">
-                <a:solidFill>
-                  <a:srgbClr val="475569"/>
-                </a:solidFill>
-                <a:latin typeface="Inter"/>
-              </a:rPr>
-              <a:t>STACK</a:t>
-            </a:r>
-          </a:p>
-        </p:txBody>
-      </p:sp>
-      <p:sp>
-        <p:nvSpPr>
-          <p:cNvPr id="56" name="TextBox 55"/>
-          <p:cNvSpPr txBox="1"/>
-          <p:nvPr/>
-        </p:nvSpPr>
-        <p:spPr>
-          <a:xfrm>
-            <a:off x="6693408" y="5998464"/>
-            <a:ext cx="4931359" cy="475488"/>
-          </a:xfrm>
-          <a:prstGeom prst="rect">
-            <a:avLst/>
-          </a:prstGeom>
-          <a:noFill/>
-        </p:spPr>
-        <p:txBody>
-          <a:bodyPr wrap="square" anchor="t" lIns="0" rIns="0" tIns="0" bIns="0">
-            <a:spAutoFit/>
-          </a:bodyPr>
-          <a:lstStyle/>
-          <a:p>
-            <a:pPr algn="l">
-              <a:lnSpc>
-                <a:spcPct val="132000"/>
-              </a:lnSpc>
-              <a:spcAft>
-                <a:spcPts val="0"/>
-              </a:spcAft>
-            </a:pPr>
-            <a:r>
-              <a:rPr sz="900" b="0">
-                <a:solidFill>
-                  <a:srgbClr val="475569"/>
-                </a:solidFill>
-                <a:latin typeface="Inter"/>
-              </a:rPr>
-              <a:t>xgboost 3.2.0  ·  scikit-learn 1.9.1  ·  torch 2.14.0  ·  numpy 2.4.6
-bleak  ·  Flask  ·  PostgreSQL  ·  Railway  ·  MATLAB / Simulink</a:t>
+              <a:t>Why LFP needs a remap, not an offset</a:t>
             </a:r>
           </a:p>
         </p:txBody>

--- a/AI_PBMS_8Slide.pptx
+++ b/AI_PBMS_8Slide.pptx
@@ -15,6 +15,7 @@
     <p:sldId id="263" r:id="rId15"/>
     <p:sldId id="264" r:id="rId16"/>
     <p:sldId id="265" r:id="rId17"/>
+    <p:sldId id="266" r:id="rId18"/>
   </p:sldIdLst>
   <p:sldSz cx="12191695" cy="6858000" type="screen4x3"/>
   <p:notesSz cx="6858000" cy="9144000"/>
@@ -511,37 +512,57 @@
           <a:lstStyle/>
           <a:p>
             <a:r>
-              <a:t>Every public battery dataset reports pack-level voltage and current, which is</a:t>
-            </a:r>
-          </a:p>
-          <a:p>
-            <a:r>
-              <a:t>useless to us: imbalance and weak-cell faults only show in the spread between</a:t>
-            </a:r>
-          </a:p>
-          <a:p>
-            <a:r>
-              <a:t>individual cells. So we built the dataset — an 8S2P NMC pack, a JBD BMS on all</a:t>
-            </a:r>
-          </a:p>
-          <a:p>
-            <a:r>
-              <a:t>eight taps, roughly fifty cycles and 155,000 rows. The chart bottom right is</a:t>
-            </a:r>
-          </a:p>
-          <a:p>
-            <a:r>
-              <a:t>what a hundred hours bought us: seven cells tracking together, and cell one</a:t>
-            </a:r>
-          </a:p>
-          <a:p>
-            <a:r>
-              <a:t>sitting 289 millivolts below them for the entire discharge. That one defect</a:t>
-            </a:r>
-          </a:p>
-          <a:p>
-            <a:r>
-              <a:t>shaped everything that follows.</a:t>
+              <a:t>Start with the problem, not with us. A battery management system reports one</a:t>
+            </a:r>
+          </a:p>
+          <a:p>
+            <a:r>
+              <a:t>voltage for the whole string. That is the number a technician sees, and it looks</a:t>
+            </a:r>
+          </a:p>
+          <a:p>
+            <a:r>
+              <a:t>fine right up until a cell takes the pack down. The battery is thirty to forty</a:t>
+            </a:r>
+          </a:p>
+          <a:p>
+            <a:r>
+              <a:t>percent of what the vehicle costs, and in a series string one weak cell caps all</a:t>
+            </a:r>
+          </a:p>
+          <a:p>
+            <a:r>
+              <a:t>sixteen — so a single failing cell can retire an otherwise healthy pack. Today</a:t>
+            </a:r>
+          </a:p>
+          <a:p>
+            <a:r>
+              <a:t>the operator gets pack voltage, current and a fault light. They cannot tell you</a:t>
+            </a:r>
+          </a:p>
+          <a:p>
+            <a:r>
+              <a:t>which cell, how far gone it is, or how long they have. We could not buy data at</a:t>
+            </a:r>
+          </a:p>
+          <a:p>
+            <a:r>
+              <a:t>that resolution, so we built it: fifty cycles, a hundred hours, a hundred and</a:t>
+            </a:r>
+          </a:p>
+          <a:p>
+            <a:r>
+              <a:t>fifty-five thousand rows off a physical 8S2P pack. And the first thing it showed</a:t>
+            </a:r>
+          </a:p>
+          <a:p>
+            <a:r>
+              <a:t>us is on the right — cell one, two hundred and eighty-nine millivolts below its</a:t>
+            </a:r>
+          </a:p>
+          <a:p>
+            <a:r>
+              <a:t>neighbours, every single cycle, completely invisible to the pack-level reading.</a:t>
             </a:r>
           </a:p>
         </p:txBody>
@@ -611,6 +632,136 @@
           <a:lstStyle/>
           <a:p>
             <a:r>
+              <a:t>Cost first. The unit we built is a Raspberry Pi, an Arduino, a JBD BMS and the</a:t>
+            </a:r>
+          </a:p>
+          <a:p>
+            <a:r>
+              <a:t>cells — a retrofit box that sits alongside a pack already in service, with no</a:t>
+            </a:r>
+          </a:p>
+          <a:p>
+            <a:r>
+              <a:t>redesign and no recertification. At volume the same logic moves onto a Zynq on</a:t>
+            </a:r>
+          </a:p>
+          <a:p>
+            <a:r>
+              <a:t>the BMS board itself and the per-unit cost drops. Who pays: the fleet operator,</a:t>
+            </a:r>
+          </a:p>
+          <a:p>
+            <a:r>
+              <a:t>because catching one weak cell early avoids replacing an otherwise healthy pack;</a:t>
+            </a:r>
+          </a:p>
+          <a:p>
+            <a:r>
+              <a:t>and the OEM, because the same signal cuts warranty claims. Now the table on the</a:t>
+            </a:r>
+          </a:p>
+          <a:p>
+            <a:r>
+              <a:t>right, and I want to be precise about this. Orion, Nuvation and the JBD-class</a:t>
+            </a:r>
+          </a:p>
+          <a:p>
+            <a:r>
+              <a:t>boards all do per-cell sensing — we are not claiming otherwise. What none of</a:t>
+            </a:r>
+          </a:p>
+          <a:p>
+            <a:r>
+              <a:t>them does is classify what kind of fault it is, tell you how confident it is, or</a:t>
+            </a:r>
+          </a:p>
+          <a:p>
+            <a:r>
+              <a:t>let you point it at a different chemistry by uploading a datasheet. They protect</a:t>
+            </a:r>
+          </a:p>
+          <a:p>
+            <a:r>
+              <a:t>the pack after a threshold breaks. We tell a technician which cell, what is wrong</a:t>
+            </a:r>
+          </a:p>
+          <a:p>
+            <a:r>
+              <a:t>with it, and how sure we are — and we abstain when we are not sure. That is the</a:t>
+            </a:r>
+          </a:p>
+          <a:p>
+            <a:r>
+              <a:t>axis we compete on.</a:t>
+            </a:r>
+          </a:p>
+        </p:txBody>
+      </p:sp>
+      <p:sp>
+        <p:nvSpPr>
+          <p:cNvPr id="4" name="Slide Number Placeholder 3"/>
+          <p:cNvSpPr>
+            <a:spLocks noGrp="1"/>
+          </p:cNvSpPr>
+          <p:nvPr>
+            <p:ph type="sldNum" idx="5" sz="quarter"/>
+          </p:nvPr>
+        </p:nvSpPr>
+        <p:spPr/>
+      </p:sp>
+    </p:spTree>
+  </p:cSld>
+  <p:clrMapOvr>
+    <a:masterClrMapping/>
+  </p:clrMapOvr>
+</p:notes>
+</file>
+
+<file path=ppt/notesSlides/notesSlide11.xml><?xml version="1.0" encoding="utf-8"?>
+<p:notes xmlns:a="http://schemas.openxmlformats.org/drawingml/2006/main" xmlns:p="http://schemas.openxmlformats.org/presentationml/2006/main" xmlns:r="http://schemas.openxmlformats.org/officeDocument/2006/relationships">
+  <p:cSld>
+    <p:spTree>
+      <p:nvGrpSpPr>
+        <p:cNvPr id="1" name=""/>
+        <p:cNvGrpSpPr/>
+        <p:nvPr/>
+      </p:nvGrpSpPr>
+      <p:grpSpPr>
+        <a:xfrm>
+          <a:off x="0" y="0"/>
+          <a:ext cx="0" cy="0"/>
+          <a:chOff x="0" y="0"/>
+          <a:chExt cx="0" cy="0"/>
+        </a:xfrm>
+      </p:grpSpPr>
+      <p:sp>
+        <p:nvSpPr>
+          <p:cNvPr id="2" name="Slide Image Placeholder 1"/>
+          <p:cNvSpPr>
+            <a:spLocks noGrp="1"/>
+          </p:cNvSpPr>
+          <p:nvPr>
+            <p:ph type="sldImg" idx="2"/>
+          </p:nvPr>
+        </p:nvSpPr>
+        <p:spPr/>
+      </p:sp>
+      <p:sp>
+        <p:nvSpPr>
+          <p:cNvPr id="3" name="Notes Placeholder 2"/>
+          <p:cNvSpPr>
+            <a:spLocks noGrp="1"/>
+          </p:cNvSpPr>
+          <p:nvPr>
+            <p:ph type="body" idx="3" sz="quarter"/>
+          </p:nvPr>
+        </p:nvSpPr>
+        <p:spPr/>
+        <p:txBody>
+          <a:bodyPr/>
+          <a:lstStyle/>
+          <a:p>
+            <a:r>
               <a:t>Five papers shaped the approach. The first four are the state-of-the-art we</a:t>
             </a:r>
           </a:p>
@@ -1236,7 +1387,27 @@
           </a:p>
           <a:p>
             <a:r>
-              <a:t>contactor.</a:t>
+              <a:t>contactor. And the honest caveat, bottom right: this model has seen one physical</a:t>
+            </a:r>
+          </a:p>
+          <a:p>
+            <a:r>
+              <a:t>pack with one chronic defect, so generalisation to other packs is unproven. The</a:t>
+            </a:r>
+          </a:p>
+          <a:p>
+            <a:r>
+              <a:t>datasheet configurator and the in-browser retraining loop are how an operator</a:t>
+            </a:r>
+          </a:p>
+          <a:p>
+            <a:r>
+              <a:t>adapts it to their own pack, and their telemetry stays in their own</a:t>
+            </a:r>
+          </a:p>
+          <a:p>
+            <a:r>
+              <a:t>instance — we never pool it.</a:t>
             </a:r>
           </a:p>
         </p:txBody>
@@ -4649,7 +4820,7 @@
                 </a:solidFill>
                 <a:latin typeface="Inter"/>
               </a:rPr>
-              <a:t>We could not buy this dataset, so we built it</a:t>
+              <a:t>One weak cell is invisible to a pack-level BMS</a:t>
             </a:r>
           </a:p>
         </p:txBody>
@@ -4824,137 +4995,14 @@
       </p:sp>
       <p:sp>
         <p:nvSpPr>
-          <p:cNvPr id="8" name="TextBox 7"/>
-          <p:cNvSpPr txBox="1"/>
-          <p:nvPr/>
-        </p:nvSpPr>
-        <p:spPr>
-          <a:xfrm>
-            <a:off x="566928" y="1664208"/>
-            <a:ext cx="5797296" cy="2148840"/>
-          </a:xfrm>
-          <a:prstGeom prst="rect">
-            <a:avLst/>
-          </a:prstGeom>
-          <a:noFill/>
-        </p:spPr>
-        <p:txBody>
-          <a:bodyPr wrap="square" lIns="0" rIns="0" tIns="0" bIns="0">
-            <a:spAutoFit/>
-          </a:bodyPr>
-          <a:lstStyle/>
-          <a:p>
-            <a:pPr marL="274320" indent="-274320">
-              <a:lnSpc>
-                <a:spcPct val="116000"/>
-              </a:lnSpc>
-              <a:spcAft>
-                <a:spcPts val="900"/>
-              </a:spcAft>
-              <a:buClr>
-                <a:srgbClr val="0E7490"/>
-              </a:buClr>
-              <a:buSzPct val="62000"/>
-              <a:buFont typeface="Arial" pitchFamily="34" charset="0"/>
-              <a:buChar char="●"/>
-            </a:pPr>
-            <a:r>
-              <a:rPr sz="1500">
-                <a:solidFill>
-                  <a:srgbClr val="0F172A"/>
-                </a:solidFill>
-                <a:latin typeface="Inter"/>
-              </a:rPr>
-              <a:t>Public BMS datasets hide per-cell voltages behind pack totals.</a:t>
-            </a:r>
-          </a:p>
-          <a:p>
-            <a:pPr marL="274320" indent="-274320">
-              <a:lnSpc>
-                <a:spcPct val="116000"/>
-              </a:lnSpc>
-              <a:spcAft>
-                <a:spcPts val="900"/>
-              </a:spcAft>
-              <a:buClr>
-                <a:srgbClr val="0E7490"/>
-              </a:buClr>
-              <a:buSzPct val="62000"/>
-              <a:buFont typeface="Arial" pitchFamily="34" charset="0"/>
-              <a:buChar char="●"/>
-            </a:pPr>
-            <a:r>
-              <a:rPr sz="1500">
-                <a:solidFill>
-                  <a:srgbClr val="0F172A"/>
-                </a:solidFill>
-                <a:latin typeface="Inter"/>
-              </a:rPr>
-              <a:t>Imbalance and weak-cell faults are invisible at pack level.</a:t>
-            </a:r>
-          </a:p>
-          <a:p>
-            <a:pPr marL="274320" indent="-274320">
-              <a:lnSpc>
-                <a:spcPct val="116000"/>
-              </a:lnSpc>
-              <a:spcAft>
-                <a:spcPts val="900"/>
-              </a:spcAft>
-              <a:buClr>
-                <a:srgbClr val="0E7490"/>
-              </a:buClr>
-              <a:buSzPct val="62000"/>
-              <a:buFont typeface="Arial" pitchFamily="34" charset="0"/>
-              <a:buChar char="●"/>
-            </a:pPr>
-            <a:r>
-              <a:rPr sz="1500">
-                <a:solidFill>
-                  <a:srgbClr val="0F172A"/>
-                </a:solidFill>
-                <a:latin typeface="Inter"/>
-              </a:rPr>
-              <a:t>So we instrumented a physical 8S2P NMC pack end to end.</a:t>
-            </a:r>
-          </a:p>
-          <a:p>
-            <a:pPr marL="274320" indent="-274320">
-              <a:lnSpc>
-                <a:spcPct val="116000"/>
-              </a:lnSpc>
-              <a:spcAft>
-                <a:spcPts val="900"/>
-              </a:spcAft>
-              <a:buClr>
-                <a:srgbClr val="0E7490"/>
-              </a:buClr>
-              <a:buSzPct val="62000"/>
-              <a:buFont typeface="Arial" pitchFamily="34" charset="0"/>
-              <a:buChar char="●"/>
-            </a:pPr>
-            <a:r>
-              <a:rPr sz="1500">
-                <a:solidFill>
-                  <a:srgbClr val="0F172A"/>
-                </a:solidFill>
-                <a:latin typeface="Inter"/>
-              </a:rPr>
-              <a:t>Programmable supply charges; electronic load drives discharge.</a:t>
-            </a:r>
-          </a:p>
-        </p:txBody>
-      </p:sp>
-      <p:sp>
-        <p:nvSpPr>
-          <p:cNvPr id="9" name="Rectangle 8"/>
+          <p:cNvPr id="8" name="Rectangle 7"/>
           <p:cNvSpPr/>
           <p:nvPr/>
         </p:nvSpPr>
         <p:spPr>
           <a:xfrm>
-            <a:off x="566928" y="3913632"/>
-            <a:ext cx="1339595" cy="786384"/>
+            <a:off x="566928" y="1481328"/>
+            <a:ext cx="11057839" cy="1097280"/>
           </a:xfrm>
           <a:prstGeom prst="rect">
             <a:avLst/>
@@ -4991,14 +5039,56 @@
       </p:sp>
       <p:sp>
         <p:nvSpPr>
+          <p:cNvPr id="9" name="TextBox 8"/>
+          <p:cNvSpPr txBox="1"/>
+          <p:nvPr/>
+        </p:nvSpPr>
+        <p:spPr>
+          <a:xfrm>
+            <a:off x="768096" y="1572768"/>
+            <a:ext cx="3657600" cy="219456"/>
+          </a:xfrm>
+          <a:prstGeom prst="rect">
+            <a:avLst/>
+          </a:prstGeom>
+          <a:noFill/>
+        </p:spPr>
+        <p:txBody>
+          <a:bodyPr wrap="square" anchor="t" lIns="0" rIns="0" tIns="0" bIns="0">
+            <a:spAutoFit/>
+          </a:bodyPr>
+          <a:lstStyle/>
+          <a:p>
+            <a:pPr algn="l">
+              <a:lnSpc>
+                <a:spcPct val="118000"/>
+              </a:lnSpc>
+              <a:spcAft>
+                <a:spcPts val="0"/>
+              </a:spcAft>
+            </a:pPr>
+            <a:r>
+              <a:rPr sz="950" b="1">
+                <a:solidFill>
+                  <a:srgbClr val="B91C1C"/>
+                </a:solidFill>
+                <a:latin typeface="Inter"/>
+              </a:rPr>
+              <a:t>THE PROBLEM</a:t>
+            </a:r>
+          </a:p>
+        </p:txBody>
+      </p:sp>
+      <p:sp>
+        <p:nvSpPr>
           <p:cNvPr id="10" name="TextBox 9"/>
           <p:cNvSpPr txBox="1"/>
           <p:nvPr/>
         </p:nvSpPr>
         <p:spPr>
           <a:xfrm>
-            <a:off x="566928" y="4005072"/>
-            <a:ext cx="1339595" cy="329184"/>
+            <a:off x="768096" y="1810512"/>
+            <a:ext cx="5532120" cy="694944"/>
           </a:xfrm>
           <a:prstGeom prst="rect">
             <a:avLst/>
@@ -5011,6 +5101,92 @@
           </a:bodyPr>
           <a:lstStyle/>
           <a:p>
+            <a:pPr algn="l">
+              <a:lnSpc>
+                <a:spcPct val="124000"/>
+              </a:lnSpc>
+              <a:spcAft>
+                <a:spcPts val="0"/>
+              </a:spcAft>
+            </a:pPr>
+            <a:r>
+              <a:rPr sz="1150" b="0">
+                <a:solidFill>
+                  <a:srgbClr val="0F172A"/>
+                </a:solidFill>
+                <a:latin typeface="Inter"/>
+              </a:rPr>
+              <a:t>A pack BMS reports one voltage for the whole string. A single degrading cell stays hidden until it forces a shutdown — or an early pack replacement.</a:t>
+            </a:r>
+          </a:p>
+        </p:txBody>
+      </p:sp>
+      <p:sp>
+        <p:nvSpPr>
+          <p:cNvPr id="11" name="Rectangle 10"/>
+          <p:cNvSpPr/>
+          <p:nvPr/>
+        </p:nvSpPr>
+        <p:spPr>
+          <a:xfrm>
+            <a:off x="6266383" y="1609344"/>
+            <a:ext cx="1627632" cy="859536"/>
+          </a:xfrm>
+          <a:prstGeom prst="rect">
+            <a:avLst/>
+          </a:prstGeom>
+          <a:solidFill>
+            <a:srgbClr val="FFFFFF"/>
+          </a:solidFill>
+          <a:ln w="13970">
+            <a:solidFill>
+              <a:srgbClr val="B91C1C"/>
+            </a:solidFill>
+          </a:ln>
+          <a:effectLst/>
+        </p:spPr>
+        <p:style>
+          <a:lnRef idx="1">
+            <a:schemeClr val="accent1"/>
+          </a:lnRef>
+          <a:fillRef idx="3">
+            <a:schemeClr val="accent1"/>
+          </a:fillRef>
+          <a:effectRef idx="2">
+            <a:schemeClr val="accent1"/>
+          </a:effectRef>
+          <a:fontRef idx="minor">
+            <a:schemeClr val="lt1"/>
+          </a:fontRef>
+        </p:style>
+        <p:txBody>
+          <a:bodyPr rtlCol="0" anchor="ctr"/>
+          <a:lstStyle/>
+          <a:p/>
+        </p:txBody>
+      </p:sp>
+      <p:sp>
+        <p:nvSpPr>
+          <p:cNvPr id="12" name="TextBox 11"/>
+          <p:cNvSpPr txBox="1"/>
+          <p:nvPr/>
+        </p:nvSpPr>
+        <p:spPr>
+          <a:xfrm>
+            <a:off x="6266383" y="1664208"/>
+            <a:ext cx="1627632" cy="274320"/>
+          </a:xfrm>
+          <a:prstGeom prst="rect">
+            <a:avLst/>
+          </a:prstGeom>
+          <a:noFill/>
+        </p:spPr>
+        <p:txBody>
+          <a:bodyPr wrap="square" anchor="t" lIns="0" rIns="0" tIns="0" bIns="0">
+            <a:spAutoFit/>
+          </a:bodyPr>
+          <a:lstStyle/>
+          <a:p>
             <a:pPr algn="ctr">
               <a:lnSpc>
                 <a:spcPct val="118000"/>
@@ -5020,27 +5196,197 @@
               </a:spcAft>
             </a:pPr>
             <a:r>
-              <a:rPr sz="1600" b="1">
+              <a:rPr sz="1500" b="1">
+                <a:solidFill>
+                  <a:srgbClr val="B91C1C"/>
+                </a:solidFill>
+                <a:latin typeface="Inter"/>
+              </a:rPr>
+              <a:t>30–40%</a:t>
+            </a:r>
+          </a:p>
+        </p:txBody>
+      </p:sp>
+      <p:sp>
+        <p:nvSpPr>
+          <p:cNvPr id="13" name="TextBox 12"/>
+          <p:cNvSpPr txBox="1"/>
+          <p:nvPr/>
+        </p:nvSpPr>
+        <p:spPr>
+          <a:xfrm>
+            <a:off x="6339535" y="1965960"/>
+            <a:ext cx="1481328" cy="256032"/>
+          </a:xfrm>
+          <a:prstGeom prst="rect">
+            <a:avLst/>
+          </a:prstGeom>
+          <a:noFill/>
+        </p:spPr>
+        <p:txBody>
+          <a:bodyPr wrap="square" anchor="t" lIns="0" rIns="0" tIns="0" bIns="0">
+            <a:spAutoFit/>
+          </a:bodyPr>
+          <a:lstStyle/>
+          <a:p>
+            <a:pPr algn="ctr">
+              <a:lnSpc>
+                <a:spcPct val="118000"/>
+              </a:lnSpc>
+              <a:spcAft>
+                <a:spcPts val="0"/>
+              </a:spcAft>
+            </a:pPr>
+            <a:r>
+              <a:rPr sz="760" b="0">
+                <a:solidFill>
+                  <a:srgbClr val="475569"/>
+                </a:solidFill>
+                <a:latin typeface="Inter"/>
+              </a:rPr>
+              <a:t>of EV cost is the battery pack</a:t>
+            </a:r>
+          </a:p>
+        </p:txBody>
+      </p:sp>
+      <p:sp>
+        <p:nvSpPr>
+          <p:cNvPr id="14" name="TextBox 13"/>
+          <p:cNvSpPr txBox="1"/>
+          <p:nvPr/>
+        </p:nvSpPr>
+        <p:spPr>
+          <a:xfrm>
+            <a:off x="6339535" y="2231136"/>
+            <a:ext cx="1481328" cy="182880"/>
+          </a:xfrm>
+          <a:prstGeom prst="rect">
+            <a:avLst/>
+          </a:prstGeom>
+          <a:noFill/>
+        </p:spPr>
+        <p:txBody>
+          <a:bodyPr wrap="square" anchor="t" lIns="0" rIns="0" tIns="0" bIns="0">
+            <a:spAutoFit/>
+          </a:bodyPr>
+          <a:lstStyle/>
+          <a:p>
+            <a:pPr algn="ctr">
+              <a:lnSpc>
+                <a:spcPct val="118000"/>
+              </a:lnSpc>
+              <a:spcAft>
+                <a:spcPts val="0"/>
+              </a:spcAft>
+            </a:pPr>
+            <a:r>
+              <a:rPr sz="680" b="0">
+                <a:solidFill>
+                  <a:srgbClr val="B91C1C"/>
+                </a:solidFill>
+                <a:latin typeface="Inter"/>
+              </a:rPr>
+              <a:t>[VERIFY — source?]</a:t>
+            </a:r>
+          </a:p>
+        </p:txBody>
+      </p:sp>
+      <p:sp>
+        <p:nvSpPr>
+          <p:cNvPr id="15" name="Rectangle 14"/>
+          <p:cNvSpPr/>
+          <p:nvPr/>
+        </p:nvSpPr>
+        <p:spPr>
+          <a:xfrm>
+            <a:off x="8040319" y="1609344"/>
+            <a:ext cx="1627632" cy="859536"/>
+          </a:xfrm>
+          <a:prstGeom prst="rect">
+            <a:avLst/>
+          </a:prstGeom>
+          <a:solidFill>
+            <a:srgbClr val="FFFFFF"/>
+          </a:solidFill>
+          <a:ln w="13970">
+            <a:solidFill>
+              <a:srgbClr val="0E7490"/>
+            </a:solidFill>
+          </a:ln>
+          <a:effectLst/>
+        </p:spPr>
+        <p:style>
+          <a:lnRef idx="1">
+            <a:schemeClr val="accent1"/>
+          </a:lnRef>
+          <a:fillRef idx="3">
+            <a:schemeClr val="accent1"/>
+          </a:fillRef>
+          <a:effectRef idx="2">
+            <a:schemeClr val="accent1"/>
+          </a:effectRef>
+          <a:fontRef idx="minor">
+            <a:schemeClr val="lt1"/>
+          </a:fontRef>
+        </p:style>
+        <p:txBody>
+          <a:bodyPr rtlCol="0" anchor="ctr"/>
+          <a:lstStyle/>
+          <a:p/>
+        </p:txBody>
+      </p:sp>
+      <p:sp>
+        <p:nvSpPr>
+          <p:cNvPr id="16" name="TextBox 15"/>
+          <p:cNvSpPr txBox="1"/>
+          <p:nvPr/>
+        </p:nvSpPr>
+        <p:spPr>
+          <a:xfrm>
+            <a:off x="8040319" y="1664208"/>
+            <a:ext cx="1627632" cy="274320"/>
+          </a:xfrm>
+          <a:prstGeom prst="rect">
+            <a:avLst/>
+          </a:prstGeom>
+          <a:noFill/>
+        </p:spPr>
+        <p:txBody>
+          <a:bodyPr wrap="square" anchor="t" lIns="0" rIns="0" tIns="0" bIns="0">
+            <a:spAutoFit/>
+          </a:bodyPr>
+          <a:lstStyle/>
+          <a:p>
+            <a:pPr algn="ctr">
+              <a:lnSpc>
+                <a:spcPct val="118000"/>
+              </a:lnSpc>
+              <a:spcAft>
+                <a:spcPts val="0"/>
+              </a:spcAft>
+            </a:pPr>
+            <a:r>
+              <a:rPr sz="1500" b="1">
                 <a:solidFill>
                   <a:srgbClr val="0E7490"/>
                 </a:solidFill>
                 <a:latin typeface="Inter"/>
               </a:rPr>
-              <a:t>~50</a:t>
-            </a:r>
-          </a:p>
-        </p:txBody>
-      </p:sp>
-      <p:sp>
-        <p:nvSpPr>
-          <p:cNvPr id="11" name="TextBox 10"/>
-          <p:cNvSpPr txBox="1"/>
-          <p:nvPr/>
-        </p:nvSpPr>
-        <p:spPr>
-          <a:xfrm>
-            <a:off x="566928" y="4370832"/>
-            <a:ext cx="1339595" cy="256032"/>
+              <a:t>1 of 16</a:t>
+            </a:r>
+          </a:p>
+        </p:txBody>
+      </p:sp>
+      <p:sp>
+        <p:nvSpPr>
+          <p:cNvPr id="17" name="TextBox 16"/>
+          <p:cNvSpPr txBox="1"/>
+          <p:nvPr/>
+        </p:nvSpPr>
+        <p:spPr>
+          <a:xfrm>
+            <a:off x="8113471" y="1965960"/>
+            <a:ext cx="1481328" cy="256032"/>
           </a:xfrm>
           <a:prstGeom prst="rect">
             <a:avLst/>
@@ -5062,27 +5408,379 @@
               </a:spcAft>
             </a:pPr>
             <a:r>
-              <a:rPr sz="900" b="0">
+              <a:rPr sz="760" b="0">
                 <a:solidFill>
                   <a:srgbClr val="475569"/>
                 </a:solidFill>
                 <a:latin typeface="Inter"/>
               </a:rPr>
-              <a:t>cycles</a:t>
-            </a:r>
-          </a:p>
-        </p:txBody>
-      </p:sp>
-      <p:sp>
-        <p:nvSpPr>
-          <p:cNvPr id="12" name="Rectangle 11"/>
+              <a:t>a weak cell caps the whole string</a:t>
+            </a:r>
+          </a:p>
+        </p:txBody>
+      </p:sp>
+      <p:sp>
+        <p:nvSpPr>
+          <p:cNvPr id="18" name="TextBox 17"/>
+          <p:cNvSpPr txBox="1"/>
+          <p:nvPr/>
+        </p:nvSpPr>
+        <p:spPr>
+          <a:xfrm>
+            <a:off x="8113471" y="2231136"/>
+            <a:ext cx="1481328" cy="182880"/>
+          </a:xfrm>
+          <a:prstGeom prst="rect">
+            <a:avLst/>
+          </a:prstGeom>
+          <a:noFill/>
+        </p:spPr>
+        <p:txBody>
+          <a:bodyPr wrap="square" anchor="t" lIns="0" rIns="0" tIns="0" bIns="0">
+            <a:spAutoFit/>
+          </a:bodyPr>
+          <a:lstStyle/>
+          <a:p>
+            <a:pPr algn="ctr">
+              <a:lnSpc>
+                <a:spcPct val="118000"/>
+              </a:lnSpc>
+              <a:spcAft>
+                <a:spcPts val="0"/>
+              </a:spcAft>
+            </a:pPr>
+            <a:r>
+              <a:rPr sz="680" b="0">
+                <a:solidFill>
+                  <a:srgbClr val="475569"/>
+                </a:solidFill>
+                <a:latin typeface="Inter"/>
+              </a:rPr>
+              <a:t>derived from our 8S2P</a:t>
+            </a:r>
+          </a:p>
+        </p:txBody>
+      </p:sp>
+      <p:sp>
+        <p:nvSpPr>
+          <p:cNvPr id="19" name="Rectangle 18"/>
           <p:cNvSpPr/>
           <p:nvPr/>
         </p:nvSpPr>
         <p:spPr>
           <a:xfrm>
-            <a:off x="2052827" y="3913632"/>
-            <a:ext cx="1339595" cy="786384"/>
+            <a:off x="9814255" y="1609344"/>
+            <a:ext cx="1627632" cy="859536"/>
+          </a:xfrm>
+          <a:prstGeom prst="rect">
+            <a:avLst/>
+          </a:prstGeom>
+          <a:solidFill>
+            <a:srgbClr val="FFFFFF"/>
+          </a:solidFill>
+          <a:ln w="13970">
+            <a:solidFill>
+              <a:srgbClr val="B91C1C"/>
+            </a:solidFill>
+          </a:ln>
+          <a:effectLst/>
+        </p:spPr>
+        <p:style>
+          <a:lnRef idx="1">
+            <a:schemeClr val="accent1"/>
+          </a:lnRef>
+          <a:fillRef idx="3">
+            <a:schemeClr val="accent1"/>
+          </a:fillRef>
+          <a:effectRef idx="2">
+            <a:schemeClr val="accent1"/>
+          </a:effectRef>
+          <a:fontRef idx="minor">
+            <a:schemeClr val="lt1"/>
+          </a:fontRef>
+        </p:style>
+        <p:txBody>
+          <a:bodyPr rtlCol="0" anchor="ctr"/>
+          <a:lstStyle/>
+          <a:p/>
+        </p:txBody>
+      </p:sp>
+      <p:sp>
+        <p:nvSpPr>
+          <p:cNvPr id="20" name="TextBox 19"/>
+          <p:cNvSpPr txBox="1"/>
+          <p:nvPr/>
+        </p:nvSpPr>
+        <p:spPr>
+          <a:xfrm>
+            <a:off x="9814255" y="1664208"/>
+            <a:ext cx="1627632" cy="274320"/>
+          </a:xfrm>
+          <a:prstGeom prst="rect">
+            <a:avLst/>
+          </a:prstGeom>
+          <a:noFill/>
+        </p:spPr>
+        <p:txBody>
+          <a:bodyPr wrap="square" anchor="t" lIns="0" rIns="0" tIns="0" bIns="0">
+            <a:spAutoFit/>
+          </a:bodyPr>
+          <a:lstStyle/>
+          <a:p>
+            <a:pPr algn="ctr">
+              <a:lnSpc>
+                <a:spcPct val="118000"/>
+              </a:lnSpc>
+              <a:spcAft>
+                <a:spcPts val="0"/>
+              </a:spcAft>
+            </a:pPr>
+            <a:r>
+              <a:rPr sz="1500" b="1">
+                <a:solidFill>
+                  <a:srgbClr val="B91C1C"/>
+                </a:solidFill>
+                <a:latin typeface="Inter"/>
+              </a:rPr>
+              <a:t>[FILL]</a:t>
+            </a:r>
+          </a:p>
+        </p:txBody>
+      </p:sp>
+      <p:sp>
+        <p:nvSpPr>
+          <p:cNvPr id="21" name="TextBox 20"/>
+          <p:cNvSpPr txBox="1"/>
+          <p:nvPr/>
+        </p:nvSpPr>
+        <p:spPr>
+          <a:xfrm>
+            <a:off x="9887407" y="1965960"/>
+            <a:ext cx="1481328" cy="256032"/>
+          </a:xfrm>
+          <a:prstGeom prst="rect">
+            <a:avLst/>
+          </a:prstGeom>
+          <a:noFill/>
+        </p:spPr>
+        <p:txBody>
+          <a:bodyPr wrap="square" anchor="t" lIns="0" rIns="0" tIns="0" bIns="0">
+            <a:spAutoFit/>
+          </a:bodyPr>
+          <a:lstStyle/>
+          <a:p>
+            <a:pPr algn="ctr">
+              <a:lnSpc>
+                <a:spcPct val="118000"/>
+              </a:lnSpc>
+              <a:spcAft>
+                <a:spcPts val="0"/>
+              </a:spcAft>
+            </a:pPr>
+            <a:r>
+              <a:rPr sz="760" b="0">
+                <a:solidFill>
+                  <a:srgbClr val="475569"/>
+                </a:solidFill>
+                <a:latin typeface="Inter"/>
+              </a:rPr>
+              <a:t>India EV registrations, latest FY</a:t>
+            </a:r>
+          </a:p>
+        </p:txBody>
+      </p:sp>
+      <p:sp>
+        <p:nvSpPr>
+          <p:cNvPr id="22" name="TextBox 21"/>
+          <p:cNvSpPr txBox="1"/>
+          <p:nvPr/>
+        </p:nvSpPr>
+        <p:spPr>
+          <a:xfrm>
+            <a:off x="9887407" y="2231136"/>
+            <a:ext cx="1481328" cy="182880"/>
+          </a:xfrm>
+          <a:prstGeom prst="rect">
+            <a:avLst/>
+          </a:prstGeom>
+          <a:noFill/>
+        </p:spPr>
+        <p:txBody>
+          <a:bodyPr wrap="square" anchor="t" lIns="0" rIns="0" tIns="0" bIns="0">
+            <a:spAutoFit/>
+          </a:bodyPr>
+          <a:lstStyle/>
+          <a:p>
+            <a:pPr algn="ctr">
+              <a:lnSpc>
+                <a:spcPct val="118000"/>
+              </a:lnSpc>
+              <a:spcAft>
+                <a:spcPts val="0"/>
+              </a:spcAft>
+            </a:pPr>
+            <a:r>
+              <a:rPr sz="680" b="0">
+                <a:solidFill>
+                  <a:srgbClr val="B91C1C"/>
+                </a:solidFill>
+                <a:latin typeface="Inter"/>
+              </a:rPr>
+              <a:t>[VERIFY — source?]</a:t>
+            </a:r>
+          </a:p>
+        </p:txBody>
+      </p:sp>
+      <p:sp>
+        <p:nvSpPr>
+          <p:cNvPr id="23" name="TextBox 22"/>
+          <p:cNvSpPr txBox="1"/>
+          <p:nvPr/>
+        </p:nvSpPr>
+        <p:spPr>
+          <a:xfrm>
+            <a:off x="566928" y="2706624"/>
+            <a:ext cx="5797296" cy="219456"/>
+          </a:xfrm>
+          <a:prstGeom prst="rect">
+            <a:avLst/>
+          </a:prstGeom>
+          <a:noFill/>
+        </p:spPr>
+        <p:txBody>
+          <a:bodyPr wrap="square" anchor="t" lIns="0" rIns="0" tIns="0" bIns="0">
+            <a:spAutoFit/>
+          </a:bodyPr>
+          <a:lstStyle/>
+          <a:p>
+            <a:pPr algn="l">
+              <a:lnSpc>
+                <a:spcPct val="118000"/>
+              </a:lnSpc>
+              <a:spcAft>
+                <a:spcPts val="0"/>
+              </a:spcAft>
+            </a:pPr>
+            <a:r>
+              <a:rPr sz="950" b="1">
+                <a:solidFill>
+                  <a:srgbClr val="0E7490"/>
+                </a:solidFill>
+                <a:latin typeface="Inter"/>
+              </a:rPr>
+              <a:t>WHO OPERATES THIS, AND WHAT THEY HAVE TODAY</a:t>
+            </a:r>
+          </a:p>
+        </p:txBody>
+      </p:sp>
+      <p:sp>
+        <p:nvSpPr>
+          <p:cNvPr id="24" name="TextBox 23"/>
+          <p:cNvSpPr txBox="1"/>
+          <p:nvPr/>
+        </p:nvSpPr>
+        <p:spPr>
+          <a:xfrm>
+            <a:off x="566928" y="2980944"/>
+            <a:ext cx="5797296" cy="1554480"/>
+          </a:xfrm>
+          <a:prstGeom prst="rect">
+            <a:avLst/>
+          </a:prstGeom>
+          <a:noFill/>
+        </p:spPr>
+        <p:txBody>
+          <a:bodyPr wrap="square" lIns="0" rIns="0" tIns="0" bIns="0">
+            <a:spAutoFit/>
+          </a:bodyPr>
+          <a:lstStyle/>
+          <a:p>
+            <a:pPr marL="274320" indent="-274320">
+              <a:lnSpc>
+                <a:spcPct val="116000"/>
+              </a:lnSpc>
+              <a:spcAft>
+                <a:spcPts val="600"/>
+              </a:spcAft>
+              <a:buClr>
+                <a:srgbClr val="0E7490"/>
+              </a:buClr>
+              <a:buSzPct val="62000"/>
+              <a:buFont typeface="Arial" pitchFamily="34" charset="0"/>
+              <a:buChar char="●"/>
+            </a:pPr>
+            <a:r>
+              <a:rPr sz="1300">
+                <a:solidFill>
+                  <a:srgbClr val="0F172A"/>
+                </a:solidFill>
+                <a:latin typeface="Inter"/>
+              </a:rPr>
+              <a:t>[EVIDENCE: operator role — fleet technician? depot? OEM service?]</a:t>
+            </a:r>
+          </a:p>
+          <a:p>
+            <a:pPr marL="274320" indent="-274320">
+              <a:lnSpc>
+                <a:spcPct val="116000"/>
+              </a:lnSpc>
+              <a:spcAft>
+                <a:spcPts val="600"/>
+              </a:spcAft>
+              <a:buClr>
+                <a:srgbClr val="0E7490"/>
+              </a:buClr>
+              <a:buSzPct val="62000"/>
+              <a:buFont typeface="Arial" pitchFamily="34" charset="0"/>
+              <a:buChar char="●"/>
+            </a:pPr>
+            <a:r>
+              <a:rPr sz="1300">
+                <a:solidFill>
+                  <a:srgbClr val="0F172A"/>
+                </a:solidFill>
+                <a:latin typeface="Inter"/>
+              </a:rPr>
+              <a:t>Today they see pack voltage, current, and a fault LED.</a:t>
+            </a:r>
+          </a:p>
+          <a:p>
+            <a:pPr marL="274320" indent="-274320">
+              <a:lnSpc>
+                <a:spcPct val="116000"/>
+              </a:lnSpc>
+              <a:spcAft>
+                <a:spcPts val="600"/>
+              </a:spcAft>
+              <a:buClr>
+                <a:srgbClr val="0E7490"/>
+              </a:buClr>
+              <a:buSzPct val="62000"/>
+              <a:buFont typeface="Arial" pitchFamily="34" charset="0"/>
+              <a:buChar char="●"/>
+            </a:pPr>
+            <a:r>
+              <a:rPr sz="1300">
+                <a:solidFill>
+                  <a:srgbClr val="0F172A"/>
+                </a:solidFill>
+                <a:latin typeface="Inter"/>
+              </a:rPr>
+              <a:t>They cannot see which cell, how degraded, or how soon.</a:t>
+            </a:r>
+          </a:p>
+        </p:txBody>
+      </p:sp>
+      <p:sp>
+        <p:nvSpPr>
+          <p:cNvPr id="25" name="Rectangle 24"/>
+          <p:cNvSpPr/>
+          <p:nvPr/>
+        </p:nvSpPr>
+        <p:spPr>
+          <a:xfrm>
+            <a:off x="566928" y="4315968"/>
+            <a:ext cx="5797296" cy="1426464"/>
           </a:xfrm>
           <a:prstGeom prst="rect">
             <a:avLst/>
@@ -5119,14 +5817,14 @@
       </p:sp>
       <p:sp>
         <p:nvSpPr>
-          <p:cNvPr id="13" name="TextBox 12"/>
-          <p:cNvSpPr txBox="1"/>
-          <p:nvPr/>
-        </p:nvSpPr>
-        <p:spPr>
-          <a:xfrm>
-            <a:off x="2052827" y="4005072"/>
-            <a:ext cx="1339595" cy="329184"/>
+          <p:cNvPr id="26" name="TextBox 25"/>
+          <p:cNvSpPr txBox="1"/>
+          <p:nvPr/>
+        </p:nvSpPr>
+        <p:spPr>
+          <a:xfrm>
+            <a:off x="768096" y="4425696"/>
+            <a:ext cx="5394959" cy="219456"/>
           </a:xfrm>
           <a:prstGeom prst="rect">
             <a:avLst/>
@@ -5139,7 +5837,7 @@
           </a:bodyPr>
           <a:lstStyle/>
           <a:p>
-            <a:pPr algn="ctr">
+            <a:pPr algn="l">
               <a:lnSpc>
                 <a:spcPct val="118000"/>
               </a:lnSpc>
@@ -5148,27 +5846,27 @@
               </a:spcAft>
             </a:pPr>
             <a:r>
-              <a:rPr sz="1600" b="1">
-                <a:solidFill>
-                  <a:srgbClr val="0E7490"/>
-                </a:solidFill>
-                <a:latin typeface="Inter"/>
-              </a:rPr>
-              <a:t>~3 hrs</a:t>
-            </a:r>
-          </a:p>
-        </p:txBody>
-      </p:sp>
-      <p:sp>
-        <p:nvSpPr>
-          <p:cNvPr id="14" name="TextBox 13"/>
-          <p:cNvSpPr txBox="1"/>
-          <p:nvPr/>
-        </p:nvSpPr>
-        <p:spPr>
-          <a:xfrm>
-            <a:off x="2052827" y="4370832"/>
-            <a:ext cx="1339595" cy="256032"/>
+              <a:rPr sz="950" b="1">
+                <a:solidFill>
+                  <a:srgbClr val="B45309"/>
+                </a:solidFill>
+                <a:latin typeface="Inter"/>
+              </a:rPr>
+              <a:t>FIELD EVIDENCE TO INSERT</a:t>
+            </a:r>
+          </a:p>
+        </p:txBody>
+      </p:sp>
+      <p:sp>
+        <p:nvSpPr>
+          <p:cNvPr id="27" name="TextBox 26"/>
+          <p:cNvSpPr txBox="1"/>
+          <p:nvPr/>
+        </p:nvSpPr>
+        <p:spPr>
+          <a:xfrm>
+            <a:off x="768096" y="4681728"/>
+            <a:ext cx="5394959" cy="950976"/>
           </a:xfrm>
           <a:prstGeom prst="rect">
             <a:avLst/>
@@ -5181,457 +5879,30 @@
           </a:bodyPr>
           <a:lstStyle/>
           <a:p>
-            <a:pPr algn="ctr">
-              <a:lnSpc>
-                <a:spcPct val="118000"/>
-              </a:lnSpc>
-              <a:spcAft>
-                <a:spcPts val="0"/>
-              </a:spcAft>
-            </a:pPr>
-            <a:r>
-              <a:rPr sz="900" b="0">
-                <a:solidFill>
-                  <a:srgbClr val="475569"/>
-                </a:solidFill>
-                <a:latin typeface="Inter"/>
-              </a:rPr>
-              <a:t>each</a:t>
-            </a:r>
-          </a:p>
-        </p:txBody>
-      </p:sp>
-      <p:sp>
-        <p:nvSpPr>
-          <p:cNvPr id="15" name="Rectangle 14"/>
-          <p:cNvSpPr/>
-          <p:nvPr/>
-        </p:nvSpPr>
-        <p:spPr>
-          <a:xfrm>
-            <a:off x="3538727" y="3913632"/>
-            <a:ext cx="1339595" cy="786384"/>
-          </a:xfrm>
-          <a:prstGeom prst="rect">
-            <a:avLst/>
-          </a:prstGeom>
-          <a:solidFill>
-            <a:srgbClr val="F1F5F9"/>
-          </a:solidFill>
-          <a:ln w="9525">
-            <a:solidFill>
-              <a:srgbClr val="CBD5E1"/>
-            </a:solidFill>
-          </a:ln>
-          <a:effectLst/>
-        </p:spPr>
-        <p:style>
-          <a:lnRef idx="1">
-            <a:schemeClr val="accent1"/>
-          </a:lnRef>
-          <a:fillRef idx="3">
-            <a:schemeClr val="accent1"/>
-          </a:fillRef>
-          <a:effectRef idx="2">
-            <a:schemeClr val="accent1"/>
-          </a:effectRef>
-          <a:fontRef idx="minor">
-            <a:schemeClr val="lt1"/>
-          </a:fontRef>
-        </p:style>
-        <p:txBody>
-          <a:bodyPr rtlCol="0" anchor="ctr"/>
-          <a:lstStyle/>
-          <a:p/>
-        </p:txBody>
-      </p:sp>
-      <p:sp>
-        <p:nvSpPr>
-          <p:cNvPr id="16" name="TextBox 15"/>
-          <p:cNvSpPr txBox="1"/>
-          <p:nvPr/>
-        </p:nvSpPr>
-        <p:spPr>
-          <a:xfrm>
-            <a:off x="3538727" y="4005072"/>
-            <a:ext cx="1339595" cy="329184"/>
-          </a:xfrm>
-          <a:prstGeom prst="rect">
-            <a:avLst/>
-          </a:prstGeom>
-          <a:noFill/>
-        </p:spPr>
-        <p:txBody>
-          <a:bodyPr wrap="square" anchor="t" lIns="0" rIns="0" tIns="0" bIns="0">
-            <a:spAutoFit/>
-          </a:bodyPr>
-          <a:lstStyle/>
-          <a:p>
-            <a:pPr algn="ctr">
-              <a:lnSpc>
-                <a:spcPct val="118000"/>
-              </a:lnSpc>
-              <a:spcAft>
-                <a:spcPts val="0"/>
-              </a:spcAft>
-            </a:pPr>
-            <a:r>
-              <a:rPr sz="1600" b="1">
-                <a:solidFill>
-                  <a:srgbClr val="0E7490"/>
-                </a:solidFill>
-                <a:latin typeface="Inter"/>
-              </a:rPr>
-              <a:t>&gt;100 hrs</a:t>
-            </a:r>
-          </a:p>
-        </p:txBody>
-      </p:sp>
-      <p:sp>
-        <p:nvSpPr>
-          <p:cNvPr id="17" name="TextBox 16"/>
-          <p:cNvSpPr txBox="1"/>
-          <p:nvPr/>
-        </p:nvSpPr>
-        <p:spPr>
-          <a:xfrm>
-            <a:off x="3538727" y="4370832"/>
-            <a:ext cx="1339595" cy="256032"/>
-          </a:xfrm>
-          <a:prstGeom prst="rect">
-            <a:avLst/>
-          </a:prstGeom>
-          <a:noFill/>
-        </p:spPr>
-        <p:txBody>
-          <a:bodyPr wrap="square" anchor="t" lIns="0" rIns="0" tIns="0" bIns="0">
-            <a:spAutoFit/>
-          </a:bodyPr>
-          <a:lstStyle/>
-          <a:p>
-            <a:pPr algn="ctr">
-              <a:lnSpc>
-                <a:spcPct val="118000"/>
-              </a:lnSpc>
-              <a:spcAft>
-                <a:spcPts val="0"/>
-              </a:spcAft>
-            </a:pPr>
-            <a:r>
-              <a:rPr sz="900" b="0">
-                <a:solidFill>
-                  <a:srgbClr val="475569"/>
-                </a:solidFill>
-                <a:latin typeface="Inter"/>
-              </a:rPr>
-              <a:t>logged</a:t>
-            </a:r>
-          </a:p>
-        </p:txBody>
-      </p:sp>
-      <p:sp>
-        <p:nvSpPr>
-          <p:cNvPr id="18" name="Rectangle 17"/>
-          <p:cNvSpPr/>
-          <p:nvPr/>
-        </p:nvSpPr>
-        <p:spPr>
-          <a:xfrm>
-            <a:off x="5024627" y="3913632"/>
-            <a:ext cx="1339595" cy="786384"/>
-          </a:xfrm>
-          <a:prstGeom prst="rect">
-            <a:avLst/>
-          </a:prstGeom>
-          <a:solidFill>
-            <a:srgbClr val="F1F5F9"/>
-          </a:solidFill>
-          <a:ln w="9525">
-            <a:solidFill>
-              <a:srgbClr val="CBD5E1"/>
-            </a:solidFill>
-          </a:ln>
-          <a:effectLst/>
-        </p:spPr>
-        <p:style>
-          <a:lnRef idx="1">
-            <a:schemeClr val="accent1"/>
-          </a:lnRef>
-          <a:fillRef idx="3">
-            <a:schemeClr val="accent1"/>
-          </a:fillRef>
-          <a:effectRef idx="2">
-            <a:schemeClr val="accent1"/>
-          </a:effectRef>
-          <a:fontRef idx="minor">
-            <a:schemeClr val="lt1"/>
-          </a:fontRef>
-        </p:style>
-        <p:txBody>
-          <a:bodyPr rtlCol="0" anchor="ctr"/>
-          <a:lstStyle/>
-          <a:p/>
-        </p:txBody>
-      </p:sp>
-      <p:sp>
-        <p:nvSpPr>
-          <p:cNvPr id="19" name="TextBox 18"/>
-          <p:cNvSpPr txBox="1"/>
-          <p:nvPr/>
-        </p:nvSpPr>
-        <p:spPr>
-          <a:xfrm>
-            <a:off x="5024627" y="4005072"/>
-            <a:ext cx="1339595" cy="329184"/>
-          </a:xfrm>
-          <a:prstGeom prst="rect">
-            <a:avLst/>
-          </a:prstGeom>
-          <a:noFill/>
-        </p:spPr>
-        <p:txBody>
-          <a:bodyPr wrap="square" anchor="t" lIns="0" rIns="0" tIns="0" bIns="0">
-            <a:spAutoFit/>
-          </a:bodyPr>
-          <a:lstStyle/>
-          <a:p>
-            <a:pPr algn="ctr">
-              <a:lnSpc>
-                <a:spcPct val="118000"/>
-              </a:lnSpc>
-              <a:spcAft>
-                <a:spcPts val="0"/>
-              </a:spcAft>
-            </a:pPr>
-            <a:r>
-              <a:rPr sz="1600" b="1">
-                <a:solidFill>
-                  <a:srgbClr val="B91C1C"/>
-                </a:solidFill>
-                <a:latin typeface="Inter"/>
-              </a:rPr>
-              <a:t>~155,000</a:t>
-            </a:r>
-          </a:p>
-        </p:txBody>
-      </p:sp>
-      <p:sp>
-        <p:nvSpPr>
-          <p:cNvPr id="20" name="TextBox 19"/>
-          <p:cNvSpPr txBox="1"/>
-          <p:nvPr/>
-        </p:nvSpPr>
-        <p:spPr>
-          <a:xfrm>
-            <a:off x="5024627" y="4370832"/>
-            <a:ext cx="1339595" cy="256032"/>
-          </a:xfrm>
-          <a:prstGeom prst="rect">
-            <a:avLst/>
-          </a:prstGeom>
-          <a:noFill/>
-        </p:spPr>
-        <p:txBody>
-          <a:bodyPr wrap="square" anchor="t" lIns="0" rIns="0" tIns="0" bIns="0">
-            <a:spAutoFit/>
-          </a:bodyPr>
-          <a:lstStyle/>
-          <a:p>
-            <a:pPr algn="ctr">
-              <a:lnSpc>
-                <a:spcPct val="118000"/>
-              </a:lnSpc>
-              <a:spcAft>
-                <a:spcPts val="0"/>
-              </a:spcAft>
-            </a:pPr>
-            <a:r>
-              <a:rPr sz="900" b="0">
-                <a:solidFill>
-                  <a:srgbClr val="475569"/>
-                </a:solidFill>
-                <a:latin typeface="Inter"/>
-              </a:rPr>
-              <a:t>rows</a:t>
-            </a:r>
-          </a:p>
-        </p:txBody>
-      </p:sp>
-      <p:sp>
-        <p:nvSpPr>
-          <p:cNvPr id="21" name="Rectangle 20"/>
-          <p:cNvSpPr/>
-          <p:nvPr/>
-        </p:nvSpPr>
-        <p:spPr>
-          <a:xfrm>
-            <a:off x="566928" y="4882896"/>
-            <a:ext cx="5797296" cy="1188720"/>
-          </a:xfrm>
-          <a:prstGeom prst="rect">
-            <a:avLst/>
-          </a:prstGeom>
-          <a:solidFill>
-            <a:srgbClr val="F1F5F9"/>
-          </a:solidFill>
-          <a:ln w="9525">
-            <a:solidFill>
-              <a:srgbClr val="CBD5E1"/>
-            </a:solidFill>
-          </a:ln>
-          <a:effectLst/>
-        </p:spPr>
-        <p:style>
-          <a:lnRef idx="1">
-            <a:schemeClr val="accent1"/>
-          </a:lnRef>
-          <a:fillRef idx="3">
-            <a:schemeClr val="accent1"/>
-          </a:fillRef>
-          <a:effectRef idx="2">
-            <a:schemeClr val="accent1"/>
-          </a:effectRef>
-          <a:fontRef idx="minor">
-            <a:schemeClr val="lt1"/>
-          </a:fontRef>
-        </p:style>
-        <p:txBody>
-          <a:bodyPr rtlCol="0" anchor="ctr"/>
-          <a:lstStyle/>
-          <a:p/>
-        </p:txBody>
-      </p:sp>
-      <p:sp>
-        <p:nvSpPr>
-          <p:cNvPr id="22" name="TextBox 21"/>
-          <p:cNvSpPr txBox="1"/>
-          <p:nvPr/>
-        </p:nvSpPr>
-        <p:spPr>
-          <a:xfrm>
-            <a:off x="768096" y="4992624"/>
-            <a:ext cx="5394959" cy="219456"/>
-          </a:xfrm>
-          <a:prstGeom prst="rect">
-            <a:avLst/>
-          </a:prstGeom>
-          <a:noFill/>
-        </p:spPr>
-        <p:txBody>
-          <a:bodyPr wrap="square" anchor="t" lIns="0" rIns="0" tIns="0" bIns="0">
-            <a:spAutoFit/>
-          </a:bodyPr>
-          <a:lstStyle/>
-          <a:p>
             <a:pPr algn="l">
               <a:lnSpc>
-                <a:spcPct val="118000"/>
-              </a:lnSpc>
-              <a:spcAft>
-                <a:spcPts val="0"/>
-              </a:spcAft>
-            </a:pPr>
-            <a:r>
-              <a:rPr sz="950" b="1">
-                <a:solidFill>
-                  <a:srgbClr val="B91C1C"/>
-                </a:solidFill>
-                <a:latin typeface="Inter"/>
-              </a:rPr>
-              <a:t>WHAT THE DATA SHOWED</a:t>
-            </a:r>
-          </a:p>
-        </p:txBody>
-      </p:sp>
-      <p:sp>
-        <p:nvSpPr>
-          <p:cNvPr id="23" name="TextBox 22"/>
-          <p:cNvSpPr txBox="1"/>
-          <p:nvPr/>
-        </p:nvSpPr>
-        <p:spPr>
-          <a:xfrm>
-            <a:off x="768096" y="5248656"/>
-            <a:ext cx="5394959" cy="731520"/>
-          </a:xfrm>
-          <a:prstGeom prst="rect">
-            <a:avLst/>
-          </a:prstGeom>
-          <a:noFill/>
-        </p:spPr>
-        <p:txBody>
-          <a:bodyPr wrap="square" anchor="t" lIns="0" rIns="0" tIns="0" bIns="0">
-            <a:spAutoFit/>
-          </a:bodyPr>
-          <a:lstStyle/>
-          <a:p>
-            <a:pPr algn="l">
-              <a:lnSpc>
-                <a:spcPct val="126000"/>
-              </a:lnSpc>
-              <a:spcAft>
-                <a:spcPts val="0"/>
-              </a:spcAft>
-            </a:pPr>
-            <a:r>
-              <a:rPr sz="1200" b="0">
+                <a:spcPct val="142000"/>
+              </a:lnSpc>
+              <a:spcAft>
+                <a:spcPts val="0"/>
+              </a:spcAft>
+            </a:pPr>
+            <a:r>
+              <a:rPr sz="1150" b="0">
                 <a:solidFill>
                   <a:srgbClr val="0F172A"/>
                 </a:solidFill>
                 <a:latin typeface="Inter"/>
               </a:rPr>
-              <a:t>Cell 1 runs 289 mV below its neighbours in every cycle. A pack-level voltmeter reads 30.5 V and calls this healthy.</a:t>
-            </a:r>
-          </a:p>
-        </p:txBody>
-      </p:sp>
-      <p:sp>
-        <p:nvSpPr>
-          <p:cNvPr id="24" name="Rectangle 23"/>
-          <p:cNvSpPr/>
-          <p:nvPr/>
-        </p:nvSpPr>
-        <p:spPr>
-          <a:xfrm>
-            <a:off x="8111210" y="1554480"/>
-            <a:ext cx="2095754" cy="1627632"/>
-          </a:xfrm>
-          <a:prstGeom prst="rect">
-            <a:avLst/>
-          </a:prstGeom>
-          <a:solidFill>
-            <a:srgbClr val="FFFFFF"/>
-          </a:solidFill>
-          <a:ln w="12700">
-            <a:solidFill>
-              <a:srgbClr val="CBD5E1"/>
-            </a:solidFill>
-          </a:ln>
-          <a:effectLst/>
-        </p:spPr>
-        <p:style>
-          <a:lnRef idx="1">
-            <a:schemeClr val="accent1"/>
-          </a:lnRef>
-          <a:fillRef idx="3">
-            <a:schemeClr val="accent1"/>
-          </a:fillRef>
-          <a:effectRef idx="2">
-            <a:schemeClr val="accent1"/>
-          </a:effectRef>
-          <a:fontRef idx="minor">
-            <a:schemeClr val="lt1"/>
-          </a:fontRef>
-        </p:style>
-        <p:txBody>
-          <a:bodyPr rtlCol="0" anchor="ctr"/>
-          <a:lstStyle/>
-          <a:p/>
+              <a:t>[EVIDENCE: fleet operator interview — what they said]
+[EVIDENCE: time or cost to diagnose one pack today]</a:t>
+            </a:r>
+          </a:p>
         </p:txBody>
       </p:sp>
       <p:pic>
         <p:nvPicPr>
-          <p:cNvPr id="25" name="Picture 24" descr="p03_img1_x38.jpeg"/>
+          <p:cNvPr id="28" name="Picture 27" descr="fig_cell_traces.png"/>
           <p:cNvPicPr>
             <a:picLocks noChangeAspect="1"/>
           </p:cNvPicPr>
@@ -5645,38 +5916,610 @@
         </p:blipFill>
         <p:spPr>
           <a:xfrm>
-            <a:off x="8230082" y="1673352"/>
-            <a:ext cx="1858010" cy="1389888"/>
+            <a:off x="7562967" y="2651760"/>
+            <a:ext cx="3192240" cy="2267712"/>
           </a:xfrm>
           <a:prstGeom prst="rect">
             <a:avLst/>
           </a:prstGeom>
         </p:spPr>
       </p:pic>
-      <p:pic>
-        <p:nvPicPr>
-          <p:cNvPr id="26" name="Picture 25" descr="fig_cell_traces.png"/>
-          <p:cNvPicPr>
-            <a:picLocks noChangeAspect="1"/>
-          </p:cNvPicPr>
-          <p:nvPr/>
-        </p:nvPicPr>
-        <p:blipFill>
-          <a:blip r:embed="rId3"/>
-          <a:stretch>
-            <a:fillRect/>
-          </a:stretch>
-        </p:blipFill>
-        <p:spPr>
-          <a:xfrm>
-            <a:off x="7163937" y="3310128"/>
-            <a:ext cx="3990300" cy="2834640"/>
-          </a:xfrm>
-          <a:prstGeom prst="rect">
-            <a:avLst/>
-          </a:prstGeom>
-        </p:spPr>
-      </p:pic>
+      <p:sp>
+        <p:nvSpPr>
+          <p:cNvPr id="29" name="TextBox 28"/>
+          <p:cNvSpPr txBox="1"/>
+          <p:nvPr/>
+        </p:nvSpPr>
+        <p:spPr>
+          <a:xfrm>
+            <a:off x="6693408" y="4992624"/>
+            <a:ext cx="4931359" cy="237744"/>
+          </a:xfrm>
+          <a:prstGeom prst="rect">
+            <a:avLst/>
+          </a:prstGeom>
+          <a:noFill/>
+        </p:spPr>
+        <p:txBody>
+          <a:bodyPr wrap="square" anchor="t" lIns="0" rIns="0" tIns="0" bIns="0">
+            <a:spAutoFit/>
+          </a:bodyPr>
+          <a:lstStyle/>
+          <a:p>
+            <a:pPr algn="ctr">
+              <a:lnSpc>
+                <a:spcPct val="118000"/>
+              </a:lnSpc>
+              <a:spcAft>
+                <a:spcPts val="0"/>
+              </a:spcAft>
+            </a:pPr>
+            <a:r>
+              <a:rPr sz="950" b="0">
+                <a:solidFill>
+                  <a:srgbClr val="475569"/>
+                </a:solidFill>
+                <a:latin typeface="Inter"/>
+              </a:rPr>
+              <a:t>289 mV below its neighbours, every cycle — invisible at pack level</a:t>
+            </a:r>
+          </a:p>
+        </p:txBody>
+      </p:sp>
+      <p:sp>
+        <p:nvSpPr>
+          <p:cNvPr id="30" name="TextBox 29"/>
+          <p:cNvSpPr txBox="1"/>
+          <p:nvPr/>
+        </p:nvSpPr>
+        <p:spPr>
+          <a:xfrm>
+            <a:off x="6693408" y="5285232"/>
+            <a:ext cx="4931359" cy="219456"/>
+          </a:xfrm>
+          <a:prstGeom prst="rect">
+            <a:avLst/>
+          </a:prstGeom>
+          <a:noFill/>
+        </p:spPr>
+        <p:txBody>
+          <a:bodyPr wrap="square" anchor="t" lIns="0" rIns="0" tIns="0" bIns="0">
+            <a:spAutoFit/>
+          </a:bodyPr>
+          <a:lstStyle/>
+          <a:p>
+            <a:pPr algn="l">
+              <a:lnSpc>
+                <a:spcPct val="118000"/>
+              </a:lnSpc>
+              <a:spcAft>
+                <a:spcPts val="0"/>
+              </a:spcAft>
+            </a:pPr>
+            <a:r>
+              <a:rPr sz="950" b="1">
+                <a:solidFill>
+                  <a:srgbClr val="0E7490"/>
+                </a:solidFill>
+                <a:latin typeface="Inter"/>
+              </a:rPr>
+              <a:t>SO WE BUILT THE DATASET OURSELVES</a:t>
+            </a:r>
+          </a:p>
+        </p:txBody>
+      </p:sp>
+      <p:sp>
+        <p:nvSpPr>
+          <p:cNvPr id="31" name="Rectangle 30"/>
+          <p:cNvSpPr/>
+          <p:nvPr/>
+        </p:nvSpPr>
+        <p:spPr>
+          <a:xfrm>
+            <a:off x="6693408" y="5541264"/>
+            <a:ext cx="1164259" cy="530352"/>
+          </a:xfrm>
+          <a:prstGeom prst="rect">
+            <a:avLst/>
+          </a:prstGeom>
+          <a:solidFill>
+            <a:srgbClr val="F1F5F9"/>
+          </a:solidFill>
+          <a:ln w="8890">
+            <a:solidFill>
+              <a:srgbClr val="CBD5E1"/>
+            </a:solidFill>
+          </a:ln>
+          <a:effectLst/>
+        </p:spPr>
+        <p:style>
+          <a:lnRef idx="1">
+            <a:schemeClr val="accent1"/>
+          </a:lnRef>
+          <a:fillRef idx="3">
+            <a:schemeClr val="accent1"/>
+          </a:fillRef>
+          <a:effectRef idx="2">
+            <a:schemeClr val="accent1"/>
+          </a:effectRef>
+          <a:fontRef idx="minor">
+            <a:schemeClr val="lt1"/>
+          </a:fontRef>
+        </p:style>
+        <p:txBody>
+          <a:bodyPr rtlCol="0" anchor="ctr"/>
+          <a:lstStyle/>
+          <a:p/>
+        </p:txBody>
+      </p:sp>
+      <p:sp>
+        <p:nvSpPr>
+          <p:cNvPr id="32" name="TextBox 31"/>
+          <p:cNvSpPr txBox="1"/>
+          <p:nvPr/>
+        </p:nvSpPr>
+        <p:spPr>
+          <a:xfrm>
+            <a:off x="6693408" y="5577840"/>
+            <a:ext cx="1164259" cy="237744"/>
+          </a:xfrm>
+          <a:prstGeom prst="rect">
+            <a:avLst/>
+          </a:prstGeom>
+          <a:noFill/>
+        </p:spPr>
+        <p:txBody>
+          <a:bodyPr wrap="square" anchor="t" lIns="0" rIns="0" tIns="0" bIns="0">
+            <a:spAutoFit/>
+          </a:bodyPr>
+          <a:lstStyle/>
+          <a:p>
+            <a:pPr algn="ctr">
+              <a:lnSpc>
+                <a:spcPct val="118000"/>
+              </a:lnSpc>
+              <a:spcAft>
+                <a:spcPts val="0"/>
+              </a:spcAft>
+            </a:pPr>
+            <a:r>
+              <a:rPr sz="1150" b="1">
+                <a:solidFill>
+                  <a:srgbClr val="0E7490"/>
+                </a:solidFill>
+                <a:latin typeface="Inter"/>
+              </a:rPr>
+              <a:t>~50</a:t>
+            </a:r>
+          </a:p>
+        </p:txBody>
+      </p:sp>
+      <p:sp>
+        <p:nvSpPr>
+          <p:cNvPr id="33" name="TextBox 32"/>
+          <p:cNvSpPr txBox="1"/>
+          <p:nvPr/>
+        </p:nvSpPr>
+        <p:spPr>
+          <a:xfrm>
+            <a:off x="6693408" y="5833872"/>
+            <a:ext cx="1164259" cy="201168"/>
+          </a:xfrm>
+          <a:prstGeom prst="rect">
+            <a:avLst/>
+          </a:prstGeom>
+          <a:noFill/>
+        </p:spPr>
+        <p:txBody>
+          <a:bodyPr wrap="square" anchor="t" lIns="0" rIns="0" tIns="0" bIns="0">
+            <a:spAutoFit/>
+          </a:bodyPr>
+          <a:lstStyle/>
+          <a:p>
+            <a:pPr algn="ctr">
+              <a:lnSpc>
+                <a:spcPct val="118000"/>
+              </a:lnSpc>
+              <a:spcAft>
+                <a:spcPts val="0"/>
+              </a:spcAft>
+            </a:pPr>
+            <a:r>
+              <a:rPr sz="760" b="0">
+                <a:solidFill>
+                  <a:srgbClr val="475569"/>
+                </a:solidFill>
+                <a:latin typeface="Inter"/>
+              </a:rPr>
+              <a:t>cycles</a:t>
+            </a:r>
+          </a:p>
+        </p:txBody>
+      </p:sp>
+      <p:sp>
+        <p:nvSpPr>
+          <p:cNvPr id="34" name="Rectangle 33"/>
+          <p:cNvSpPr/>
+          <p:nvPr/>
+        </p:nvSpPr>
+        <p:spPr>
+          <a:xfrm>
+            <a:off x="7949107" y="5541264"/>
+            <a:ext cx="1164259" cy="530352"/>
+          </a:xfrm>
+          <a:prstGeom prst="rect">
+            <a:avLst/>
+          </a:prstGeom>
+          <a:solidFill>
+            <a:srgbClr val="F1F5F9"/>
+          </a:solidFill>
+          <a:ln w="8890">
+            <a:solidFill>
+              <a:srgbClr val="CBD5E1"/>
+            </a:solidFill>
+          </a:ln>
+          <a:effectLst/>
+        </p:spPr>
+        <p:style>
+          <a:lnRef idx="1">
+            <a:schemeClr val="accent1"/>
+          </a:lnRef>
+          <a:fillRef idx="3">
+            <a:schemeClr val="accent1"/>
+          </a:fillRef>
+          <a:effectRef idx="2">
+            <a:schemeClr val="accent1"/>
+          </a:effectRef>
+          <a:fontRef idx="minor">
+            <a:schemeClr val="lt1"/>
+          </a:fontRef>
+        </p:style>
+        <p:txBody>
+          <a:bodyPr rtlCol="0" anchor="ctr"/>
+          <a:lstStyle/>
+          <a:p/>
+        </p:txBody>
+      </p:sp>
+      <p:sp>
+        <p:nvSpPr>
+          <p:cNvPr id="35" name="TextBox 34"/>
+          <p:cNvSpPr txBox="1"/>
+          <p:nvPr/>
+        </p:nvSpPr>
+        <p:spPr>
+          <a:xfrm>
+            <a:off x="7949107" y="5577840"/>
+            <a:ext cx="1164259" cy="237744"/>
+          </a:xfrm>
+          <a:prstGeom prst="rect">
+            <a:avLst/>
+          </a:prstGeom>
+          <a:noFill/>
+        </p:spPr>
+        <p:txBody>
+          <a:bodyPr wrap="square" anchor="t" lIns="0" rIns="0" tIns="0" bIns="0">
+            <a:spAutoFit/>
+          </a:bodyPr>
+          <a:lstStyle/>
+          <a:p>
+            <a:pPr algn="ctr">
+              <a:lnSpc>
+                <a:spcPct val="118000"/>
+              </a:lnSpc>
+              <a:spcAft>
+                <a:spcPts val="0"/>
+              </a:spcAft>
+            </a:pPr>
+            <a:r>
+              <a:rPr sz="1150" b="1">
+                <a:solidFill>
+                  <a:srgbClr val="0E7490"/>
+                </a:solidFill>
+                <a:latin typeface="Inter"/>
+              </a:rPr>
+              <a:t>~3 hrs</a:t>
+            </a:r>
+          </a:p>
+        </p:txBody>
+      </p:sp>
+      <p:sp>
+        <p:nvSpPr>
+          <p:cNvPr id="36" name="TextBox 35"/>
+          <p:cNvSpPr txBox="1"/>
+          <p:nvPr/>
+        </p:nvSpPr>
+        <p:spPr>
+          <a:xfrm>
+            <a:off x="7949107" y="5833872"/>
+            <a:ext cx="1164259" cy="201168"/>
+          </a:xfrm>
+          <a:prstGeom prst="rect">
+            <a:avLst/>
+          </a:prstGeom>
+          <a:noFill/>
+        </p:spPr>
+        <p:txBody>
+          <a:bodyPr wrap="square" anchor="t" lIns="0" rIns="0" tIns="0" bIns="0">
+            <a:spAutoFit/>
+          </a:bodyPr>
+          <a:lstStyle/>
+          <a:p>
+            <a:pPr algn="ctr">
+              <a:lnSpc>
+                <a:spcPct val="118000"/>
+              </a:lnSpc>
+              <a:spcAft>
+                <a:spcPts val="0"/>
+              </a:spcAft>
+            </a:pPr>
+            <a:r>
+              <a:rPr sz="760" b="0">
+                <a:solidFill>
+                  <a:srgbClr val="475569"/>
+                </a:solidFill>
+                <a:latin typeface="Inter"/>
+              </a:rPr>
+              <a:t>each</a:t>
+            </a:r>
+          </a:p>
+        </p:txBody>
+      </p:sp>
+      <p:sp>
+        <p:nvSpPr>
+          <p:cNvPr id="37" name="Rectangle 36"/>
+          <p:cNvSpPr/>
+          <p:nvPr/>
+        </p:nvSpPr>
+        <p:spPr>
+          <a:xfrm>
+            <a:off x="9204807" y="5541264"/>
+            <a:ext cx="1164259" cy="530352"/>
+          </a:xfrm>
+          <a:prstGeom prst="rect">
+            <a:avLst/>
+          </a:prstGeom>
+          <a:solidFill>
+            <a:srgbClr val="F1F5F9"/>
+          </a:solidFill>
+          <a:ln w="8890">
+            <a:solidFill>
+              <a:srgbClr val="CBD5E1"/>
+            </a:solidFill>
+          </a:ln>
+          <a:effectLst/>
+        </p:spPr>
+        <p:style>
+          <a:lnRef idx="1">
+            <a:schemeClr val="accent1"/>
+          </a:lnRef>
+          <a:fillRef idx="3">
+            <a:schemeClr val="accent1"/>
+          </a:fillRef>
+          <a:effectRef idx="2">
+            <a:schemeClr val="accent1"/>
+          </a:effectRef>
+          <a:fontRef idx="minor">
+            <a:schemeClr val="lt1"/>
+          </a:fontRef>
+        </p:style>
+        <p:txBody>
+          <a:bodyPr rtlCol="0" anchor="ctr"/>
+          <a:lstStyle/>
+          <a:p/>
+        </p:txBody>
+      </p:sp>
+      <p:sp>
+        <p:nvSpPr>
+          <p:cNvPr id="38" name="TextBox 37"/>
+          <p:cNvSpPr txBox="1"/>
+          <p:nvPr/>
+        </p:nvSpPr>
+        <p:spPr>
+          <a:xfrm>
+            <a:off x="9204807" y="5577840"/>
+            <a:ext cx="1164259" cy="237744"/>
+          </a:xfrm>
+          <a:prstGeom prst="rect">
+            <a:avLst/>
+          </a:prstGeom>
+          <a:noFill/>
+        </p:spPr>
+        <p:txBody>
+          <a:bodyPr wrap="square" anchor="t" lIns="0" rIns="0" tIns="0" bIns="0">
+            <a:spAutoFit/>
+          </a:bodyPr>
+          <a:lstStyle/>
+          <a:p>
+            <a:pPr algn="ctr">
+              <a:lnSpc>
+                <a:spcPct val="118000"/>
+              </a:lnSpc>
+              <a:spcAft>
+                <a:spcPts val="0"/>
+              </a:spcAft>
+            </a:pPr>
+            <a:r>
+              <a:rPr sz="1150" b="1">
+                <a:solidFill>
+                  <a:srgbClr val="0E7490"/>
+                </a:solidFill>
+                <a:latin typeface="Inter"/>
+              </a:rPr>
+              <a:t>&gt;100 hrs</a:t>
+            </a:r>
+          </a:p>
+        </p:txBody>
+      </p:sp>
+      <p:sp>
+        <p:nvSpPr>
+          <p:cNvPr id="39" name="TextBox 38"/>
+          <p:cNvSpPr txBox="1"/>
+          <p:nvPr/>
+        </p:nvSpPr>
+        <p:spPr>
+          <a:xfrm>
+            <a:off x="9204807" y="5833872"/>
+            <a:ext cx="1164259" cy="201168"/>
+          </a:xfrm>
+          <a:prstGeom prst="rect">
+            <a:avLst/>
+          </a:prstGeom>
+          <a:noFill/>
+        </p:spPr>
+        <p:txBody>
+          <a:bodyPr wrap="square" anchor="t" lIns="0" rIns="0" tIns="0" bIns="0">
+            <a:spAutoFit/>
+          </a:bodyPr>
+          <a:lstStyle/>
+          <a:p>
+            <a:pPr algn="ctr">
+              <a:lnSpc>
+                <a:spcPct val="118000"/>
+              </a:lnSpc>
+              <a:spcAft>
+                <a:spcPts val="0"/>
+              </a:spcAft>
+            </a:pPr>
+            <a:r>
+              <a:rPr sz="760" b="0">
+                <a:solidFill>
+                  <a:srgbClr val="475569"/>
+                </a:solidFill>
+                <a:latin typeface="Inter"/>
+              </a:rPr>
+              <a:t>logged</a:t>
+            </a:r>
+          </a:p>
+        </p:txBody>
+      </p:sp>
+      <p:sp>
+        <p:nvSpPr>
+          <p:cNvPr id="40" name="Rectangle 39"/>
+          <p:cNvSpPr/>
+          <p:nvPr/>
+        </p:nvSpPr>
+        <p:spPr>
+          <a:xfrm>
+            <a:off x="10460507" y="5541264"/>
+            <a:ext cx="1164259" cy="530352"/>
+          </a:xfrm>
+          <a:prstGeom prst="rect">
+            <a:avLst/>
+          </a:prstGeom>
+          <a:solidFill>
+            <a:srgbClr val="F1F5F9"/>
+          </a:solidFill>
+          <a:ln w="8890">
+            <a:solidFill>
+              <a:srgbClr val="CBD5E1"/>
+            </a:solidFill>
+          </a:ln>
+          <a:effectLst/>
+        </p:spPr>
+        <p:style>
+          <a:lnRef idx="1">
+            <a:schemeClr val="accent1"/>
+          </a:lnRef>
+          <a:fillRef idx="3">
+            <a:schemeClr val="accent1"/>
+          </a:fillRef>
+          <a:effectRef idx="2">
+            <a:schemeClr val="accent1"/>
+          </a:effectRef>
+          <a:fontRef idx="minor">
+            <a:schemeClr val="lt1"/>
+          </a:fontRef>
+        </p:style>
+        <p:txBody>
+          <a:bodyPr rtlCol="0" anchor="ctr"/>
+          <a:lstStyle/>
+          <a:p/>
+        </p:txBody>
+      </p:sp>
+      <p:sp>
+        <p:nvSpPr>
+          <p:cNvPr id="41" name="TextBox 40"/>
+          <p:cNvSpPr txBox="1"/>
+          <p:nvPr/>
+        </p:nvSpPr>
+        <p:spPr>
+          <a:xfrm>
+            <a:off x="10460507" y="5577840"/>
+            <a:ext cx="1164259" cy="237744"/>
+          </a:xfrm>
+          <a:prstGeom prst="rect">
+            <a:avLst/>
+          </a:prstGeom>
+          <a:noFill/>
+        </p:spPr>
+        <p:txBody>
+          <a:bodyPr wrap="square" anchor="t" lIns="0" rIns="0" tIns="0" bIns="0">
+            <a:spAutoFit/>
+          </a:bodyPr>
+          <a:lstStyle/>
+          <a:p>
+            <a:pPr algn="ctr">
+              <a:lnSpc>
+                <a:spcPct val="118000"/>
+              </a:lnSpc>
+              <a:spcAft>
+                <a:spcPts val="0"/>
+              </a:spcAft>
+            </a:pPr>
+            <a:r>
+              <a:rPr sz="1150" b="1">
+                <a:solidFill>
+                  <a:srgbClr val="B91C1C"/>
+                </a:solidFill>
+                <a:latin typeface="Inter"/>
+              </a:rPr>
+              <a:t>~155,000</a:t>
+            </a:r>
+          </a:p>
+        </p:txBody>
+      </p:sp>
+      <p:sp>
+        <p:nvSpPr>
+          <p:cNvPr id="42" name="TextBox 41"/>
+          <p:cNvSpPr txBox="1"/>
+          <p:nvPr/>
+        </p:nvSpPr>
+        <p:spPr>
+          <a:xfrm>
+            <a:off x="10460507" y="5833872"/>
+            <a:ext cx="1164259" cy="201168"/>
+          </a:xfrm>
+          <a:prstGeom prst="rect">
+            <a:avLst/>
+          </a:prstGeom>
+          <a:noFill/>
+        </p:spPr>
+        <p:txBody>
+          <a:bodyPr wrap="square" anchor="t" lIns="0" rIns="0" tIns="0" bIns="0">
+            <a:spAutoFit/>
+          </a:bodyPr>
+          <a:lstStyle/>
+          <a:p>
+            <a:pPr algn="ctr">
+              <a:lnSpc>
+                <a:spcPct val="118000"/>
+              </a:lnSpc>
+              <a:spcAft>
+                <a:spcPts val="0"/>
+              </a:spcAft>
+            </a:pPr>
+            <a:r>
+              <a:rPr sz="760" b="0">
+                <a:solidFill>
+                  <a:srgbClr val="475569"/>
+                </a:solidFill>
+                <a:latin typeface="Inter"/>
+              </a:rPr>
+              <a:t>rows</a:t>
+            </a:r>
+          </a:p>
+        </p:txBody>
+      </p:sp>
     </p:spTree>
   </p:cSld>
   <p:clrMapOvr>
@@ -5740,7 +6583,7 @@
                 </a:solidFill>
                 <a:latin typeface="Inter"/>
               </a:rPr>
-              <a:t>References</a:t>
+              <a:t>What it costs, who pays, and why they switch</a:t>
             </a:r>
           </a:p>
         </p:txBody>
@@ -5909,6 +6752,2907 @@
                 <a:latin typeface="Inter"/>
               </a:rPr>
               <a:t>10</a:t>
+            </a:r>
+          </a:p>
+        </p:txBody>
+      </p:sp>
+      <p:sp>
+        <p:nvSpPr>
+          <p:cNvPr id="7" name="TextBox 6"/>
+          <p:cNvSpPr txBox="1"/>
+          <p:nvPr/>
+        </p:nvSpPr>
+        <p:spPr>
+          <a:xfrm>
+            <a:off x="566928" y="1444752"/>
+            <a:ext cx="5797296" cy="219456"/>
+          </a:xfrm>
+          <a:prstGeom prst="rect">
+            <a:avLst/>
+          </a:prstGeom>
+          <a:noFill/>
+        </p:spPr>
+        <p:txBody>
+          <a:bodyPr wrap="square" anchor="t" lIns="0" rIns="0" tIns="0" bIns="0">
+            <a:spAutoFit/>
+          </a:bodyPr>
+          <a:lstStyle/>
+          <a:p>
+            <a:pPr algn="l">
+              <a:lnSpc>
+                <a:spcPct val="118000"/>
+              </a:lnSpc>
+              <a:spcAft>
+                <a:spcPts val="0"/>
+              </a:spcAft>
+            </a:pPr>
+            <a:r>
+              <a:rPr sz="950" b="1">
+                <a:solidFill>
+                  <a:srgbClr val="0E7490"/>
+                </a:solidFill>
+                <a:latin typeface="Inter"/>
+              </a:rPr>
+              <a:t>BOM — THE UNIT WE BUILT</a:t>
+            </a:r>
+          </a:p>
+        </p:txBody>
+      </p:sp>
+      <p:sp>
+        <p:nvSpPr>
+          <p:cNvPr id="8" name="TextBox 7"/>
+          <p:cNvSpPr txBox="1"/>
+          <p:nvPr/>
+        </p:nvSpPr>
+        <p:spPr>
+          <a:xfrm>
+            <a:off x="603504" y="1719072"/>
+            <a:ext cx="4242816" cy="219456"/>
+          </a:xfrm>
+          <a:prstGeom prst="rect">
+            <a:avLst/>
+          </a:prstGeom>
+          <a:noFill/>
+        </p:spPr>
+        <p:txBody>
+          <a:bodyPr wrap="square" anchor="t" lIns="0" rIns="0" tIns="0" bIns="0">
+            <a:spAutoFit/>
+          </a:bodyPr>
+          <a:lstStyle/>
+          <a:p>
+            <a:pPr algn="l">
+              <a:lnSpc>
+                <a:spcPct val="118000"/>
+              </a:lnSpc>
+              <a:spcAft>
+                <a:spcPts val="0"/>
+              </a:spcAft>
+            </a:pPr>
+            <a:r>
+              <a:rPr sz="1100" b="0">
+                <a:solidFill>
+                  <a:srgbClr val="0F172A"/>
+                </a:solidFill>
+                <a:latin typeface="Inter"/>
+              </a:rPr>
+              <a:t>Raspberry Pi 5 (8 GB) + cooler</a:t>
+            </a:r>
+          </a:p>
+        </p:txBody>
+      </p:sp>
+      <p:sp>
+        <p:nvSpPr>
+          <p:cNvPr id="9" name="TextBox 8"/>
+          <p:cNvSpPr txBox="1"/>
+          <p:nvPr/>
+        </p:nvSpPr>
+        <p:spPr>
+          <a:xfrm>
+            <a:off x="4846320" y="1719072"/>
+            <a:ext cx="1481328" cy="219456"/>
+          </a:xfrm>
+          <a:prstGeom prst="rect">
+            <a:avLst/>
+          </a:prstGeom>
+          <a:noFill/>
+        </p:spPr>
+        <p:txBody>
+          <a:bodyPr wrap="square" anchor="t" lIns="0" rIns="0" tIns="0" bIns="0">
+            <a:spAutoFit/>
+          </a:bodyPr>
+          <a:lstStyle/>
+          <a:p>
+            <a:pPr algn="r">
+              <a:lnSpc>
+                <a:spcPct val="118000"/>
+              </a:lnSpc>
+              <a:spcAft>
+                <a:spcPts val="0"/>
+              </a:spcAft>
+            </a:pPr>
+            <a:r>
+              <a:rPr sz="1100" b="1">
+                <a:solidFill>
+                  <a:srgbClr val="B45309"/>
+                </a:solidFill>
+                <a:latin typeface="Inter"/>
+              </a:rPr>
+              <a:t>[FILL: ₹...]</a:t>
+            </a:r>
+          </a:p>
+        </p:txBody>
+      </p:sp>
+      <p:sp>
+        <p:nvSpPr>
+          <p:cNvPr id="10" name="Rectangle 9"/>
+          <p:cNvSpPr/>
+          <p:nvPr/>
+        </p:nvSpPr>
+        <p:spPr>
+          <a:xfrm>
+            <a:off x="566928" y="1956816"/>
+            <a:ext cx="5797296" cy="7315"/>
+          </a:xfrm>
+          <a:prstGeom prst="rect">
+            <a:avLst/>
+          </a:prstGeom>
+          <a:solidFill>
+            <a:srgbClr val="CBD5E1"/>
+          </a:solidFill>
+          <a:ln>
+            <a:noFill/>
+          </a:ln>
+          <a:effectLst/>
+        </p:spPr>
+        <p:style>
+          <a:lnRef idx="1">
+            <a:schemeClr val="accent1"/>
+          </a:lnRef>
+          <a:fillRef idx="3">
+            <a:schemeClr val="accent1"/>
+          </a:fillRef>
+          <a:effectRef idx="2">
+            <a:schemeClr val="accent1"/>
+          </a:effectRef>
+          <a:fontRef idx="minor">
+            <a:schemeClr val="lt1"/>
+          </a:fontRef>
+        </p:style>
+        <p:txBody>
+          <a:bodyPr rtlCol="0" anchor="ctr"/>
+          <a:lstStyle/>
+          <a:p/>
+        </p:txBody>
+      </p:sp>
+      <p:sp>
+        <p:nvSpPr>
+          <p:cNvPr id="11" name="TextBox 10"/>
+          <p:cNvSpPr txBox="1"/>
+          <p:nvPr/>
+        </p:nvSpPr>
+        <p:spPr>
+          <a:xfrm>
+            <a:off x="603504" y="2029968"/>
+            <a:ext cx="4242816" cy="219456"/>
+          </a:xfrm>
+          <a:prstGeom prst="rect">
+            <a:avLst/>
+          </a:prstGeom>
+          <a:noFill/>
+        </p:spPr>
+        <p:txBody>
+          <a:bodyPr wrap="square" anchor="t" lIns="0" rIns="0" tIns="0" bIns="0">
+            <a:spAutoFit/>
+          </a:bodyPr>
+          <a:lstStyle/>
+          <a:p>
+            <a:pPr algn="l">
+              <a:lnSpc>
+                <a:spcPct val="118000"/>
+              </a:lnSpc>
+              <a:spcAft>
+                <a:spcPts val="0"/>
+              </a:spcAft>
+            </a:pPr>
+            <a:r>
+              <a:rPr sz="1100" b="0">
+                <a:solidFill>
+                  <a:srgbClr val="0F172A"/>
+                </a:solidFill>
+                <a:latin typeface="Inter"/>
+              </a:rPr>
+              <a:t>Arduino Uno R4 WiFi watchdog</a:t>
+            </a:r>
+          </a:p>
+        </p:txBody>
+      </p:sp>
+      <p:sp>
+        <p:nvSpPr>
+          <p:cNvPr id="12" name="TextBox 11"/>
+          <p:cNvSpPr txBox="1"/>
+          <p:nvPr/>
+        </p:nvSpPr>
+        <p:spPr>
+          <a:xfrm>
+            <a:off x="4846320" y="2029968"/>
+            <a:ext cx="1481328" cy="219456"/>
+          </a:xfrm>
+          <a:prstGeom prst="rect">
+            <a:avLst/>
+          </a:prstGeom>
+          <a:noFill/>
+        </p:spPr>
+        <p:txBody>
+          <a:bodyPr wrap="square" anchor="t" lIns="0" rIns="0" tIns="0" bIns="0">
+            <a:spAutoFit/>
+          </a:bodyPr>
+          <a:lstStyle/>
+          <a:p>
+            <a:pPr algn="r">
+              <a:lnSpc>
+                <a:spcPct val="118000"/>
+              </a:lnSpc>
+              <a:spcAft>
+                <a:spcPts val="0"/>
+              </a:spcAft>
+            </a:pPr>
+            <a:r>
+              <a:rPr sz="1100" b="1">
+                <a:solidFill>
+                  <a:srgbClr val="B45309"/>
+                </a:solidFill>
+                <a:latin typeface="Inter"/>
+              </a:rPr>
+              <a:t>[FILL: ₹...]</a:t>
+            </a:r>
+          </a:p>
+        </p:txBody>
+      </p:sp>
+      <p:sp>
+        <p:nvSpPr>
+          <p:cNvPr id="13" name="Rectangle 12"/>
+          <p:cNvSpPr/>
+          <p:nvPr/>
+        </p:nvSpPr>
+        <p:spPr>
+          <a:xfrm>
+            <a:off x="566928" y="2267712"/>
+            <a:ext cx="5797296" cy="7315"/>
+          </a:xfrm>
+          <a:prstGeom prst="rect">
+            <a:avLst/>
+          </a:prstGeom>
+          <a:solidFill>
+            <a:srgbClr val="CBD5E1"/>
+          </a:solidFill>
+          <a:ln>
+            <a:noFill/>
+          </a:ln>
+          <a:effectLst/>
+        </p:spPr>
+        <p:style>
+          <a:lnRef idx="1">
+            <a:schemeClr val="accent1"/>
+          </a:lnRef>
+          <a:fillRef idx="3">
+            <a:schemeClr val="accent1"/>
+          </a:fillRef>
+          <a:effectRef idx="2">
+            <a:schemeClr val="accent1"/>
+          </a:effectRef>
+          <a:fontRef idx="minor">
+            <a:schemeClr val="lt1"/>
+          </a:fontRef>
+        </p:style>
+        <p:txBody>
+          <a:bodyPr rtlCol="0" anchor="ctr"/>
+          <a:lstStyle/>
+          <a:p/>
+        </p:txBody>
+      </p:sp>
+      <p:sp>
+        <p:nvSpPr>
+          <p:cNvPr id="14" name="TextBox 13"/>
+          <p:cNvSpPr txBox="1"/>
+          <p:nvPr/>
+        </p:nvSpPr>
+        <p:spPr>
+          <a:xfrm>
+            <a:off x="603504" y="2340864"/>
+            <a:ext cx="4242816" cy="219456"/>
+          </a:xfrm>
+          <a:prstGeom prst="rect">
+            <a:avLst/>
+          </a:prstGeom>
+          <a:noFill/>
+        </p:spPr>
+        <p:txBody>
+          <a:bodyPr wrap="square" anchor="t" lIns="0" rIns="0" tIns="0" bIns="0">
+            <a:spAutoFit/>
+          </a:bodyPr>
+          <a:lstStyle/>
+          <a:p>
+            <a:pPr algn="l">
+              <a:lnSpc>
+                <a:spcPct val="118000"/>
+              </a:lnSpc>
+              <a:spcAft>
+                <a:spcPts val="0"/>
+              </a:spcAft>
+            </a:pPr>
+            <a:r>
+              <a:rPr sz="1100" b="0">
+                <a:solidFill>
+                  <a:srgbClr val="0F172A"/>
+                </a:solidFill>
+                <a:latin typeface="Inter"/>
+              </a:rPr>
+              <a:t>JBD SP24S007 BMS, 8S</a:t>
+            </a:r>
+          </a:p>
+        </p:txBody>
+      </p:sp>
+      <p:sp>
+        <p:nvSpPr>
+          <p:cNvPr id="15" name="TextBox 14"/>
+          <p:cNvSpPr txBox="1"/>
+          <p:nvPr/>
+        </p:nvSpPr>
+        <p:spPr>
+          <a:xfrm>
+            <a:off x="4846320" y="2340864"/>
+            <a:ext cx="1481328" cy="219456"/>
+          </a:xfrm>
+          <a:prstGeom prst="rect">
+            <a:avLst/>
+          </a:prstGeom>
+          <a:noFill/>
+        </p:spPr>
+        <p:txBody>
+          <a:bodyPr wrap="square" anchor="t" lIns="0" rIns="0" tIns="0" bIns="0">
+            <a:spAutoFit/>
+          </a:bodyPr>
+          <a:lstStyle/>
+          <a:p>
+            <a:pPr algn="r">
+              <a:lnSpc>
+                <a:spcPct val="118000"/>
+              </a:lnSpc>
+              <a:spcAft>
+                <a:spcPts val="0"/>
+              </a:spcAft>
+            </a:pPr>
+            <a:r>
+              <a:rPr sz="1100" b="1">
+                <a:solidFill>
+                  <a:srgbClr val="B45309"/>
+                </a:solidFill>
+                <a:latin typeface="Inter"/>
+              </a:rPr>
+              <a:t>[FILL: ₹...]</a:t>
+            </a:r>
+          </a:p>
+        </p:txBody>
+      </p:sp>
+      <p:sp>
+        <p:nvSpPr>
+          <p:cNvPr id="16" name="Rectangle 15"/>
+          <p:cNvSpPr/>
+          <p:nvPr/>
+        </p:nvSpPr>
+        <p:spPr>
+          <a:xfrm>
+            <a:off x="566928" y="2578608"/>
+            <a:ext cx="5797296" cy="7315"/>
+          </a:xfrm>
+          <a:prstGeom prst="rect">
+            <a:avLst/>
+          </a:prstGeom>
+          <a:solidFill>
+            <a:srgbClr val="CBD5E1"/>
+          </a:solidFill>
+          <a:ln>
+            <a:noFill/>
+          </a:ln>
+          <a:effectLst/>
+        </p:spPr>
+        <p:style>
+          <a:lnRef idx="1">
+            <a:schemeClr val="accent1"/>
+          </a:lnRef>
+          <a:fillRef idx="3">
+            <a:schemeClr val="accent1"/>
+          </a:fillRef>
+          <a:effectRef idx="2">
+            <a:schemeClr val="accent1"/>
+          </a:effectRef>
+          <a:fontRef idx="minor">
+            <a:schemeClr val="lt1"/>
+          </a:fontRef>
+        </p:style>
+        <p:txBody>
+          <a:bodyPr rtlCol="0" anchor="ctr"/>
+          <a:lstStyle/>
+          <a:p/>
+        </p:txBody>
+      </p:sp>
+      <p:sp>
+        <p:nvSpPr>
+          <p:cNvPr id="17" name="TextBox 16"/>
+          <p:cNvSpPr txBox="1"/>
+          <p:nvPr/>
+        </p:nvSpPr>
+        <p:spPr>
+          <a:xfrm>
+            <a:off x="603504" y="2651760"/>
+            <a:ext cx="4242816" cy="219456"/>
+          </a:xfrm>
+          <a:prstGeom prst="rect">
+            <a:avLst/>
+          </a:prstGeom>
+          <a:noFill/>
+        </p:spPr>
+        <p:txBody>
+          <a:bodyPr wrap="square" anchor="t" lIns="0" rIns="0" tIns="0" bIns="0">
+            <a:spAutoFit/>
+          </a:bodyPr>
+          <a:lstStyle/>
+          <a:p>
+            <a:pPr algn="l">
+              <a:lnSpc>
+                <a:spcPct val="118000"/>
+              </a:lnSpc>
+              <a:spcAft>
+                <a:spcPts val="0"/>
+              </a:spcAft>
+            </a:pPr>
+            <a:r>
+              <a:rPr sz="1100" b="0">
+                <a:solidFill>
+                  <a:srgbClr val="0F172A"/>
+                </a:solidFill>
+                <a:latin typeface="Inter"/>
+              </a:rPr>
+              <a:t>16 × LG INR21700-M50 cells</a:t>
+            </a:r>
+          </a:p>
+        </p:txBody>
+      </p:sp>
+      <p:sp>
+        <p:nvSpPr>
+          <p:cNvPr id="18" name="TextBox 17"/>
+          <p:cNvSpPr txBox="1"/>
+          <p:nvPr/>
+        </p:nvSpPr>
+        <p:spPr>
+          <a:xfrm>
+            <a:off x="4846320" y="2651760"/>
+            <a:ext cx="1481328" cy="219456"/>
+          </a:xfrm>
+          <a:prstGeom prst="rect">
+            <a:avLst/>
+          </a:prstGeom>
+          <a:noFill/>
+        </p:spPr>
+        <p:txBody>
+          <a:bodyPr wrap="square" anchor="t" lIns="0" rIns="0" tIns="0" bIns="0">
+            <a:spAutoFit/>
+          </a:bodyPr>
+          <a:lstStyle/>
+          <a:p>
+            <a:pPr algn="r">
+              <a:lnSpc>
+                <a:spcPct val="118000"/>
+              </a:lnSpc>
+              <a:spcAft>
+                <a:spcPts val="0"/>
+              </a:spcAft>
+            </a:pPr>
+            <a:r>
+              <a:rPr sz="1100" b="1">
+                <a:solidFill>
+                  <a:srgbClr val="B45309"/>
+                </a:solidFill>
+                <a:latin typeface="Inter"/>
+              </a:rPr>
+              <a:t>[FILL: ₹...]</a:t>
+            </a:r>
+          </a:p>
+        </p:txBody>
+      </p:sp>
+      <p:sp>
+        <p:nvSpPr>
+          <p:cNvPr id="19" name="Rectangle 18"/>
+          <p:cNvSpPr/>
+          <p:nvPr/>
+        </p:nvSpPr>
+        <p:spPr>
+          <a:xfrm>
+            <a:off x="566928" y="2889504"/>
+            <a:ext cx="5797296" cy="7315"/>
+          </a:xfrm>
+          <a:prstGeom prst="rect">
+            <a:avLst/>
+          </a:prstGeom>
+          <a:solidFill>
+            <a:srgbClr val="CBD5E1"/>
+          </a:solidFill>
+          <a:ln>
+            <a:noFill/>
+          </a:ln>
+          <a:effectLst/>
+        </p:spPr>
+        <p:style>
+          <a:lnRef idx="1">
+            <a:schemeClr val="accent1"/>
+          </a:lnRef>
+          <a:fillRef idx="3">
+            <a:schemeClr val="accent1"/>
+          </a:fillRef>
+          <a:effectRef idx="2">
+            <a:schemeClr val="accent1"/>
+          </a:effectRef>
+          <a:fontRef idx="minor">
+            <a:schemeClr val="lt1"/>
+          </a:fontRef>
+        </p:style>
+        <p:txBody>
+          <a:bodyPr rtlCol="0" anchor="ctr"/>
+          <a:lstStyle/>
+          <a:p/>
+        </p:txBody>
+      </p:sp>
+      <p:sp>
+        <p:nvSpPr>
+          <p:cNvPr id="20" name="TextBox 19"/>
+          <p:cNvSpPr txBox="1"/>
+          <p:nvPr/>
+        </p:nvSpPr>
+        <p:spPr>
+          <a:xfrm>
+            <a:off x="603504" y="2962656"/>
+            <a:ext cx="4242816" cy="219456"/>
+          </a:xfrm>
+          <a:prstGeom prst="rect">
+            <a:avLst/>
+          </a:prstGeom>
+          <a:noFill/>
+        </p:spPr>
+        <p:txBody>
+          <a:bodyPr wrap="square" anchor="t" lIns="0" rIns="0" tIns="0" bIns="0">
+            <a:spAutoFit/>
+          </a:bodyPr>
+          <a:lstStyle/>
+          <a:p>
+            <a:pPr algn="l">
+              <a:lnSpc>
+                <a:spcPct val="118000"/>
+              </a:lnSpc>
+              <a:spcAft>
+                <a:spcPts val="0"/>
+              </a:spcAft>
+            </a:pPr>
+            <a:r>
+              <a:rPr sz="1100" b="0">
+                <a:solidFill>
+                  <a:srgbClr val="0F172A"/>
+                </a:solidFill>
+                <a:latin typeface="Inter"/>
+              </a:rPr>
+              <a:t>Harness, NTCs, enclosure</a:t>
+            </a:r>
+          </a:p>
+        </p:txBody>
+      </p:sp>
+      <p:sp>
+        <p:nvSpPr>
+          <p:cNvPr id="21" name="TextBox 20"/>
+          <p:cNvSpPr txBox="1"/>
+          <p:nvPr/>
+        </p:nvSpPr>
+        <p:spPr>
+          <a:xfrm>
+            <a:off x="4846320" y="2962656"/>
+            <a:ext cx="1481328" cy="219456"/>
+          </a:xfrm>
+          <a:prstGeom prst="rect">
+            <a:avLst/>
+          </a:prstGeom>
+          <a:noFill/>
+        </p:spPr>
+        <p:txBody>
+          <a:bodyPr wrap="square" anchor="t" lIns="0" rIns="0" tIns="0" bIns="0">
+            <a:spAutoFit/>
+          </a:bodyPr>
+          <a:lstStyle/>
+          <a:p>
+            <a:pPr algn="r">
+              <a:lnSpc>
+                <a:spcPct val="118000"/>
+              </a:lnSpc>
+              <a:spcAft>
+                <a:spcPts val="0"/>
+              </a:spcAft>
+            </a:pPr>
+            <a:r>
+              <a:rPr sz="1100" b="1">
+                <a:solidFill>
+                  <a:srgbClr val="B45309"/>
+                </a:solidFill>
+                <a:latin typeface="Inter"/>
+              </a:rPr>
+              <a:t>[FILL: ₹...]</a:t>
+            </a:r>
+          </a:p>
+        </p:txBody>
+      </p:sp>
+      <p:sp>
+        <p:nvSpPr>
+          <p:cNvPr id="22" name="Rectangle 21"/>
+          <p:cNvSpPr/>
+          <p:nvPr/>
+        </p:nvSpPr>
+        <p:spPr>
+          <a:xfrm>
+            <a:off x="566928" y="3200400"/>
+            <a:ext cx="5797296" cy="7315"/>
+          </a:xfrm>
+          <a:prstGeom prst="rect">
+            <a:avLst/>
+          </a:prstGeom>
+          <a:solidFill>
+            <a:srgbClr val="CBD5E1"/>
+          </a:solidFill>
+          <a:ln>
+            <a:noFill/>
+          </a:ln>
+          <a:effectLst/>
+        </p:spPr>
+        <p:style>
+          <a:lnRef idx="1">
+            <a:schemeClr val="accent1"/>
+          </a:lnRef>
+          <a:fillRef idx="3">
+            <a:schemeClr val="accent1"/>
+          </a:fillRef>
+          <a:effectRef idx="2">
+            <a:schemeClr val="accent1"/>
+          </a:effectRef>
+          <a:fontRef idx="minor">
+            <a:schemeClr val="lt1"/>
+          </a:fontRef>
+        </p:style>
+        <p:txBody>
+          <a:bodyPr rtlCol="0" anchor="ctr"/>
+          <a:lstStyle/>
+          <a:p/>
+        </p:txBody>
+      </p:sp>
+      <p:sp>
+        <p:nvSpPr>
+          <p:cNvPr id="23" name="Rectangle 22"/>
+          <p:cNvSpPr/>
+          <p:nvPr/>
+        </p:nvSpPr>
+        <p:spPr>
+          <a:xfrm>
+            <a:off x="566928" y="3291839"/>
+            <a:ext cx="5797296" cy="365760"/>
+          </a:xfrm>
+          <a:prstGeom prst="rect">
+            <a:avLst/>
+          </a:prstGeom>
+          <a:solidFill>
+            <a:srgbClr val="F1F5F9"/>
+          </a:solidFill>
+          <a:ln w="9525">
+            <a:solidFill>
+              <a:srgbClr val="CBD5E1"/>
+            </a:solidFill>
+          </a:ln>
+          <a:effectLst/>
+        </p:spPr>
+        <p:style>
+          <a:lnRef idx="1">
+            <a:schemeClr val="accent1"/>
+          </a:lnRef>
+          <a:fillRef idx="3">
+            <a:schemeClr val="accent1"/>
+          </a:fillRef>
+          <a:effectRef idx="2">
+            <a:schemeClr val="accent1"/>
+          </a:effectRef>
+          <a:fontRef idx="minor">
+            <a:schemeClr val="lt1"/>
+          </a:fontRef>
+        </p:style>
+        <p:txBody>
+          <a:bodyPr rtlCol="0" anchor="ctr"/>
+          <a:lstStyle/>
+          <a:p/>
+        </p:txBody>
+      </p:sp>
+      <p:sp>
+        <p:nvSpPr>
+          <p:cNvPr id="24" name="TextBox 23"/>
+          <p:cNvSpPr txBox="1"/>
+          <p:nvPr/>
+        </p:nvSpPr>
+        <p:spPr>
+          <a:xfrm>
+            <a:off x="603504" y="3355847"/>
+            <a:ext cx="4242816" cy="237744"/>
+          </a:xfrm>
+          <a:prstGeom prst="rect">
+            <a:avLst/>
+          </a:prstGeom>
+          <a:noFill/>
+        </p:spPr>
+        <p:txBody>
+          <a:bodyPr wrap="square" anchor="t" lIns="0" rIns="0" tIns="0" bIns="0">
+            <a:spAutoFit/>
+          </a:bodyPr>
+          <a:lstStyle/>
+          <a:p>
+            <a:pPr algn="l">
+              <a:lnSpc>
+                <a:spcPct val="118000"/>
+              </a:lnSpc>
+              <a:spcAft>
+                <a:spcPts val="0"/>
+              </a:spcAft>
+            </a:pPr>
+            <a:r>
+              <a:rPr sz="1100" b="1">
+                <a:solidFill>
+                  <a:srgbClr val="0F172A"/>
+                </a:solidFill>
+                <a:latin typeface="Inter"/>
+              </a:rPr>
+              <a:t>Total, one retrofit unit</a:t>
+            </a:r>
+          </a:p>
+        </p:txBody>
+      </p:sp>
+      <p:sp>
+        <p:nvSpPr>
+          <p:cNvPr id="25" name="TextBox 24"/>
+          <p:cNvSpPr txBox="1"/>
+          <p:nvPr/>
+        </p:nvSpPr>
+        <p:spPr>
+          <a:xfrm>
+            <a:off x="4846320" y="3355847"/>
+            <a:ext cx="1481328" cy="237744"/>
+          </a:xfrm>
+          <a:prstGeom prst="rect">
+            <a:avLst/>
+          </a:prstGeom>
+          <a:noFill/>
+        </p:spPr>
+        <p:txBody>
+          <a:bodyPr wrap="square" anchor="t" lIns="0" rIns="0" tIns="0" bIns="0">
+            <a:spAutoFit/>
+          </a:bodyPr>
+          <a:lstStyle/>
+          <a:p>
+            <a:pPr algn="r">
+              <a:lnSpc>
+                <a:spcPct val="118000"/>
+              </a:lnSpc>
+              <a:spcAft>
+                <a:spcPts val="0"/>
+              </a:spcAft>
+            </a:pPr>
+            <a:r>
+              <a:rPr sz="1100" b="1">
+                <a:solidFill>
+                  <a:srgbClr val="B91C1C"/>
+                </a:solidFill>
+                <a:latin typeface="Inter"/>
+              </a:rPr>
+              <a:t>[FILL: ₹...]</a:t>
+            </a:r>
+          </a:p>
+        </p:txBody>
+      </p:sp>
+      <p:sp>
+        <p:nvSpPr>
+          <p:cNvPr id="26" name="TextBox 25"/>
+          <p:cNvSpPr txBox="1"/>
+          <p:nvPr/>
+        </p:nvSpPr>
+        <p:spPr>
+          <a:xfrm>
+            <a:off x="566928" y="3968496"/>
+            <a:ext cx="5797296" cy="219456"/>
+          </a:xfrm>
+          <a:prstGeom prst="rect">
+            <a:avLst/>
+          </a:prstGeom>
+          <a:noFill/>
+        </p:spPr>
+        <p:txBody>
+          <a:bodyPr wrap="square" anchor="t" lIns="0" rIns="0" tIns="0" bIns="0">
+            <a:spAutoFit/>
+          </a:bodyPr>
+          <a:lstStyle/>
+          <a:p>
+            <a:pPr algn="l">
+              <a:lnSpc>
+                <a:spcPct val="118000"/>
+              </a:lnSpc>
+              <a:spcAft>
+                <a:spcPts val="0"/>
+              </a:spcAft>
+            </a:pPr>
+            <a:r>
+              <a:rPr sz="950" b="1">
+                <a:solidFill>
+                  <a:srgbClr val="0E7490"/>
+                </a:solidFill>
+                <a:latin typeface="Inter"/>
+              </a:rPr>
+              <a:t>TWO ROUTES IN</a:t>
+            </a:r>
+          </a:p>
+        </p:txBody>
+      </p:sp>
+      <p:sp>
+        <p:nvSpPr>
+          <p:cNvPr id="27" name="Rectangle 26"/>
+          <p:cNvSpPr/>
+          <p:nvPr/>
+        </p:nvSpPr>
+        <p:spPr>
+          <a:xfrm>
+            <a:off x="566928" y="4224528"/>
+            <a:ext cx="2807208" cy="932688"/>
+          </a:xfrm>
+          <a:prstGeom prst="rect">
+            <a:avLst/>
+          </a:prstGeom>
+          <a:solidFill>
+            <a:srgbClr val="FFFFFF"/>
+          </a:solidFill>
+          <a:ln w="15240">
+            <a:solidFill>
+              <a:srgbClr val="0E7490"/>
+            </a:solidFill>
+          </a:ln>
+          <a:effectLst/>
+        </p:spPr>
+        <p:style>
+          <a:lnRef idx="1">
+            <a:schemeClr val="accent1"/>
+          </a:lnRef>
+          <a:fillRef idx="3">
+            <a:schemeClr val="accent1"/>
+          </a:fillRef>
+          <a:effectRef idx="2">
+            <a:schemeClr val="accent1"/>
+          </a:effectRef>
+          <a:fontRef idx="minor">
+            <a:schemeClr val="lt1"/>
+          </a:fontRef>
+        </p:style>
+        <p:txBody>
+          <a:bodyPr rtlCol="0" anchor="ctr"/>
+          <a:lstStyle/>
+          <a:p/>
+        </p:txBody>
+      </p:sp>
+      <p:sp>
+        <p:nvSpPr>
+          <p:cNvPr id="28" name="TextBox 27"/>
+          <p:cNvSpPr txBox="1"/>
+          <p:nvPr/>
+        </p:nvSpPr>
+        <p:spPr>
+          <a:xfrm>
+            <a:off x="713232" y="4315968"/>
+            <a:ext cx="2514600" cy="219456"/>
+          </a:xfrm>
+          <a:prstGeom prst="rect">
+            <a:avLst/>
+          </a:prstGeom>
+          <a:noFill/>
+        </p:spPr>
+        <p:txBody>
+          <a:bodyPr wrap="square" anchor="t" lIns="0" rIns="0" tIns="0" bIns="0">
+            <a:spAutoFit/>
+          </a:bodyPr>
+          <a:lstStyle/>
+          <a:p>
+            <a:pPr algn="l">
+              <a:lnSpc>
+                <a:spcPct val="118000"/>
+              </a:lnSpc>
+              <a:spcAft>
+                <a:spcPts val="0"/>
+              </a:spcAft>
+            </a:pPr>
+            <a:r>
+              <a:rPr sz="950" b="1">
+                <a:solidFill>
+                  <a:srgbClr val="0E7490"/>
+                </a:solidFill>
+                <a:latin typeface="Inter"/>
+              </a:rPr>
+              <a:t>RETROFIT</a:t>
+            </a:r>
+          </a:p>
+        </p:txBody>
+      </p:sp>
+      <p:sp>
+        <p:nvSpPr>
+          <p:cNvPr id="29" name="TextBox 28"/>
+          <p:cNvSpPr txBox="1"/>
+          <p:nvPr/>
+        </p:nvSpPr>
+        <p:spPr>
+          <a:xfrm>
+            <a:off x="713232" y="4553712"/>
+            <a:ext cx="2514600" cy="548640"/>
+          </a:xfrm>
+          <a:prstGeom prst="rect">
+            <a:avLst/>
+          </a:prstGeom>
+          <a:noFill/>
+        </p:spPr>
+        <p:txBody>
+          <a:bodyPr wrap="square" anchor="t" lIns="0" rIns="0" tIns="0" bIns="0">
+            <a:spAutoFit/>
+          </a:bodyPr>
+          <a:lstStyle/>
+          <a:p>
+            <a:pPr algn="l">
+              <a:lnSpc>
+                <a:spcPct val="122000"/>
+              </a:lnSpc>
+              <a:spcAft>
+                <a:spcPts val="0"/>
+              </a:spcAft>
+            </a:pPr>
+            <a:r>
+              <a:rPr sz="950" b="0">
+                <a:solidFill>
+                  <a:srgbClr val="0F172A"/>
+                </a:solidFill>
+                <a:latin typeface="Inter"/>
+              </a:rPr>
+              <a:t>Pi 5 alongside the BMS already in the pack.
+No redesign, no recertification.</a:t>
+            </a:r>
+          </a:p>
+        </p:txBody>
+      </p:sp>
+      <p:sp>
+        <p:nvSpPr>
+          <p:cNvPr id="30" name="Rectangle 29"/>
+          <p:cNvSpPr/>
+          <p:nvPr/>
+        </p:nvSpPr>
+        <p:spPr>
+          <a:xfrm>
+            <a:off x="3557016" y="4224528"/>
+            <a:ext cx="2807208" cy="932688"/>
+          </a:xfrm>
+          <a:prstGeom prst="rect">
+            <a:avLst/>
+          </a:prstGeom>
+          <a:solidFill>
+            <a:srgbClr val="FFFFFF"/>
+          </a:solidFill>
+          <a:ln w="15240">
+            <a:solidFill>
+              <a:srgbClr val="B45309"/>
+            </a:solidFill>
+          </a:ln>
+          <a:effectLst/>
+        </p:spPr>
+        <p:style>
+          <a:lnRef idx="1">
+            <a:schemeClr val="accent1"/>
+          </a:lnRef>
+          <a:fillRef idx="3">
+            <a:schemeClr val="accent1"/>
+          </a:fillRef>
+          <a:effectRef idx="2">
+            <a:schemeClr val="accent1"/>
+          </a:effectRef>
+          <a:fontRef idx="minor">
+            <a:schemeClr val="lt1"/>
+          </a:fontRef>
+        </p:style>
+        <p:txBody>
+          <a:bodyPr rtlCol="0" anchor="ctr"/>
+          <a:lstStyle/>
+          <a:p/>
+        </p:txBody>
+      </p:sp>
+      <p:sp>
+        <p:nvSpPr>
+          <p:cNvPr id="31" name="TextBox 30"/>
+          <p:cNvSpPr txBox="1"/>
+          <p:nvPr/>
+        </p:nvSpPr>
+        <p:spPr>
+          <a:xfrm>
+            <a:off x="3703320" y="4315968"/>
+            <a:ext cx="2514600" cy="219456"/>
+          </a:xfrm>
+          <a:prstGeom prst="rect">
+            <a:avLst/>
+          </a:prstGeom>
+          <a:noFill/>
+        </p:spPr>
+        <p:txBody>
+          <a:bodyPr wrap="square" anchor="t" lIns="0" rIns="0" tIns="0" bIns="0">
+            <a:spAutoFit/>
+          </a:bodyPr>
+          <a:lstStyle/>
+          <a:p>
+            <a:pPr algn="l">
+              <a:lnSpc>
+                <a:spcPct val="118000"/>
+              </a:lnSpc>
+              <a:spcAft>
+                <a:spcPts val="0"/>
+              </a:spcAft>
+            </a:pPr>
+            <a:r>
+              <a:rPr sz="950" b="1">
+                <a:solidFill>
+                  <a:srgbClr val="B45309"/>
+                </a:solidFill>
+                <a:latin typeface="Inter"/>
+              </a:rPr>
+              <a:t>OEM INTEGRATION</a:t>
+            </a:r>
+          </a:p>
+        </p:txBody>
+      </p:sp>
+      <p:sp>
+        <p:nvSpPr>
+          <p:cNvPr id="32" name="TextBox 31"/>
+          <p:cNvSpPr txBox="1"/>
+          <p:nvPr/>
+        </p:nvSpPr>
+        <p:spPr>
+          <a:xfrm>
+            <a:off x="3703320" y="4553712"/>
+            <a:ext cx="2514600" cy="548640"/>
+          </a:xfrm>
+          <a:prstGeom prst="rect">
+            <a:avLst/>
+          </a:prstGeom>
+          <a:noFill/>
+        </p:spPr>
+        <p:txBody>
+          <a:bodyPr wrap="square" anchor="t" lIns="0" rIns="0" tIns="0" bIns="0">
+            <a:spAutoFit/>
+          </a:bodyPr>
+          <a:lstStyle/>
+          <a:p>
+            <a:pPr algn="l">
+              <a:lnSpc>
+                <a:spcPct val="122000"/>
+              </a:lnSpc>
+              <a:spcAft>
+                <a:spcPts val="0"/>
+              </a:spcAft>
+            </a:pPr>
+            <a:r>
+              <a:rPr sz="950" b="0">
+                <a:solidFill>
+                  <a:srgbClr val="0F172A"/>
+                </a:solidFill>
+                <a:latin typeface="Inter"/>
+              </a:rPr>
+              <a:t>Zynq-7000 on the BMS board itself.
+Per-unit cost falls at volume.</a:t>
+            </a:r>
+          </a:p>
+        </p:txBody>
+      </p:sp>
+      <p:sp>
+        <p:nvSpPr>
+          <p:cNvPr id="33" name="TextBox 32"/>
+          <p:cNvSpPr txBox="1"/>
+          <p:nvPr/>
+        </p:nvSpPr>
+        <p:spPr>
+          <a:xfrm>
+            <a:off x="566928" y="5321808"/>
+            <a:ext cx="5797296" cy="219456"/>
+          </a:xfrm>
+          <a:prstGeom prst="rect">
+            <a:avLst/>
+          </a:prstGeom>
+          <a:noFill/>
+        </p:spPr>
+        <p:txBody>
+          <a:bodyPr wrap="square" anchor="t" lIns="0" rIns="0" tIns="0" bIns="0">
+            <a:spAutoFit/>
+          </a:bodyPr>
+          <a:lstStyle/>
+          <a:p>
+            <a:pPr algn="l">
+              <a:lnSpc>
+                <a:spcPct val="118000"/>
+              </a:lnSpc>
+              <a:spcAft>
+                <a:spcPts val="0"/>
+              </a:spcAft>
+            </a:pPr>
+            <a:r>
+              <a:rPr sz="950" b="1">
+                <a:solidFill>
+                  <a:srgbClr val="B91C1C"/>
+                </a:solidFill>
+                <a:latin typeface="Inter"/>
+              </a:rPr>
+              <a:t>WHO PAYS</a:t>
+            </a:r>
+          </a:p>
+        </p:txBody>
+      </p:sp>
+      <p:sp>
+        <p:nvSpPr>
+          <p:cNvPr id="34" name="TextBox 33"/>
+          <p:cNvSpPr txBox="1"/>
+          <p:nvPr/>
+        </p:nvSpPr>
+        <p:spPr>
+          <a:xfrm>
+            <a:off x="566928" y="5577840"/>
+            <a:ext cx="5797296" cy="566928"/>
+          </a:xfrm>
+          <a:prstGeom prst="rect">
+            <a:avLst/>
+          </a:prstGeom>
+          <a:noFill/>
+        </p:spPr>
+        <p:txBody>
+          <a:bodyPr wrap="square" anchor="t" lIns="0" rIns="0" tIns="0" bIns="0">
+            <a:spAutoFit/>
+          </a:bodyPr>
+          <a:lstStyle/>
+          <a:p>
+            <a:pPr algn="l">
+              <a:lnSpc>
+                <a:spcPct val="140000"/>
+              </a:lnSpc>
+              <a:spcAft>
+                <a:spcPts val="0"/>
+              </a:spcAft>
+            </a:pPr>
+            <a:r>
+              <a:rPr sz="1050" b="0">
+                <a:solidFill>
+                  <a:srgbClr val="0F172A"/>
+                </a:solidFill>
+                <a:latin typeface="Inter"/>
+              </a:rPr>
+              <a:t>Fleet operator — avoids an early pack replacement  [FILL: ₹ per pack]
+OEM — fewer warranty claims per 1,000 packs  [FILL: ₹ or % exposure]</a:t>
+            </a:r>
+          </a:p>
+        </p:txBody>
+      </p:sp>
+      <p:sp>
+        <p:nvSpPr>
+          <p:cNvPr id="35" name="TextBox 34"/>
+          <p:cNvSpPr txBox="1"/>
+          <p:nvPr/>
+        </p:nvSpPr>
+        <p:spPr>
+          <a:xfrm>
+            <a:off x="6693408" y="1444752"/>
+            <a:ext cx="4931359" cy="219456"/>
+          </a:xfrm>
+          <a:prstGeom prst="rect">
+            <a:avLst/>
+          </a:prstGeom>
+          <a:noFill/>
+        </p:spPr>
+        <p:txBody>
+          <a:bodyPr wrap="square" anchor="t" lIns="0" rIns="0" tIns="0" bIns="0">
+            <a:spAutoFit/>
+          </a:bodyPr>
+          <a:lstStyle/>
+          <a:p>
+            <a:pPr algn="l">
+              <a:lnSpc>
+                <a:spcPct val="118000"/>
+              </a:lnSpc>
+              <a:spcAft>
+                <a:spcPts val="0"/>
+              </a:spcAft>
+            </a:pPr>
+            <a:r>
+              <a:rPr sz="950" b="1">
+                <a:solidFill>
+                  <a:srgbClr val="0E7490"/>
+                </a:solidFill>
+                <a:latin typeface="Inter"/>
+              </a:rPr>
+              <a:t>WHERE WE ARE DIFFERENT</a:t>
+            </a:r>
+          </a:p>
+        </p:txBody>
+      </p:sp>
+      <p:sp>
+        <p:nvSpPr>
+          <p:cNvPr id="36" name="Rectangle 35"/>
+          <p:cNvSpPr/>
+          <p:nvPr/>
+        </p:nvSpPr>
+        <p:spPr>
+          <a:xfrm>
+            <a:off x="6693408" y="1719072"/>
+            <a:ext cx="4931359" cy="566928"/>
+          </a:xfrm>
+          <a:prstGeom prst="rect">
+            <a:avLst/>
+          </a:prstGeom>
+          <a:solidFill>
+            <a:srgbClr val="F1F5F9"/>
+          </a:solidFill>
+          <a:ln w="9525">
+            <a:solidFill>
+              <a:srgbClr val="CBD5E1"/>
+            </a:solidFill>
+          </a:ln>
+          <a:effectLst/>
+        </p:spPr>
+        <p:style>
+          <a:lnRef idx="1">
+            <a:schemeClr val="accent1"/>
+          </a:lnRef>
+          <a:fillRef idx="3">
+            <a:schemeClr val="accent1"/>
+          </a:fillRef>
+          <a:effectRef idx="2">
+            <a:schemeClr val="accent1"/>
+          </a:effectRef>
+          <a:fontRef idx="minor">
+            <a:schemeClr val="lt1"/>
+          </a:fontRef>
+        </p:style>
+        <p:txBody>
+          <a:bodyPr rtlCol="0" anchor="ctr"/>
+          <a:lstStyle/>
+          <a:p/>
+        </p:txBody>
+      </p:sp>
+      <p:sp>
+        <p:nvSpPr>
+          <p:cNvPr id="37" name="TextBox 36"/>
+          <p:cNvSpPr txBox="1"/>
+          <p:nvPr/>
+        </p:nvSpPr>
+        <p:spPr>
+          <a:xfrm>
+            <a:off x="6775704" y="1719072"/>
+            <a:ext cx="1120047" cy="566928"/>
+          </a:xfrm>
+          <a:prstGeom prst="rect">
+            <a:avLst/>
+          </a:prstGeom>
+          <a:noFill/>
+        </p:spPr>
+        <p:txBody>
+          <a:bodyPr wrap="square" anchor="ctr" lIns="0" rIns="0" tIns="0" bIns="0">
+            <a:spAutoFit/>
+          </a:bodyPr>
+          <a:lstStyle/>
+          <a:p>
+            <a:pPr algn="l">
+              <a:lnSpc>
+                <a:spcPct val="118000"/>
+              </a:lnSpc>
+              <a:spcAft>
+                <a:spcPts val="0"/>
+              </a:spcAft>
+            </a:pPr>
+            <a:r>
+              <a:rPr sz="800" b="1">
+                <a:solidFill>
+                  <a:srgbClr val="0F172A"/>
+                </a:solidFill>
+                <a:latin typeface="Inter"/>
+              </a:rPr>
+              <a:t/>
+            </a:r>
+          </a:p>
+        </p:txBody>
+      </p:sp>
+      <p:sp>
+        <p:nvSpPr>
+          <p:cNvPr id="38" name="TextBox 37"/>
+          <p:cNvSpPr txBox="1"/>
+          <p:nvPr/>
+        </p:nvSpPr>
+        <p:spPr>
+          <a:xfrm>
+            <a:off x="8060343" y="1719072"/>
+            <a:ext cx="622767" cy="566928"/>
+          </a:xfrm>
+          <a:prstGeom prst="rect">
+            <a:avLst/>
+          </a:prstGeom>
+          <a:noFill/>
+        </p:spPr>
+        <p:txBody>
+          <a:bodyPr wrap="square" anchor="ctr" lIns="0" rIns="0" tIns="0" bIns="0">
+            <a:spAutoFit/>
+          </a:bodyPr>
+          <a:lstStyle/>
+          <a:p>
+            <a:pPr algn="ctr">
+              <a:lnSpc>
+                <a:spcPct val="118000"/>
+              </a:lnSpc>
+              <a:spcAft>
+                <a:spcPts val="0"/>
+              </a:spcAft>
+            </a:pPr>
+            <a:r>
+              <a:rPr sz="800" b="1">
+                <a:solidFill>
+                  <a:srgbClr val="0F172A"/>
+                </a:solidFill>
+                <a:latin typeface="Inter"/>
+              </a:rPr>
+              <a:t>Per-cell
+sensing</a:t>
+            </a:r>
+          </a:p>
+        </p:txBody>
+      </p:sp>
+      <p:sp>
+        <p:nvSpPr>
+          <p:cNvPr id="39" name="TextBox 38"/>
+          <p:cNvSpPr txBox="1"/>
+          <p:nvPr/>
+        </p:nvSpPr>
+        <p:spPr>
+          <a:xfrm>
+            <a:off x="8847703" y="1719072"/>
+            <a:ext cx="788527" cy="566928"/>
+          </a:xfrm>
+          <a:prstGeom prst="rect">
+            <a:avLst/>
+          </a:prstGeom>
+          <a:noFill/>
+        </p:spPr>
+        <p:txBody>
+          <a:bodyPr wrap="square" anchor="ctr" lIns="0" rIns="0" tIns="0" bIns="0">
+            <a:spAutoFit/>
+          </a:bodyPr>
+          <a:lstStyle/>
+          <a:p>
+            <a:pPr algn="ctr">
+              <a:lnSpc>
+                <a:spcPct val="118000"/>
+              </a:lnSpc>
+              <a:spcAft>
+                <a:spcPts val="0"/>
+              </a:spcAft>
+            </a:pPr>
+            <a:r>
+              <a:rPr sz="800" b="1">
+                <a:solidFill>
+                  <a:srgbClr val="0F172A"/>
+                </a:solidFill>
+                <a:latin typeface="Inter"/>
+              </a:rPr>
+              <a:t>Learned
+fault classes</a:t>
+            </a:r>
+          </a:p>
+        </p:txBody>
+      </p:sp>
+      <p:sp>
+        <p:nvSpPr>
+          <p:cNvPr id="40" name="TextBox 39"/>
+          <p:cNvSpPr txBox="1"/>
+          <p:nvPr/>
+        </p:nvSpPr>
+        <p:spPr>
+          <a:xfrm>
+            <a:off x="9800823" y="1719072"/>
+            <a:ext cx="747087" cy="566928"/>
+          </a:xfrm>
+          <a:prstGeom prst="rect">
+            <a:avLst/>
+          </a:prstGeom>
+          <a:noFill/>
+        </p:spPr>
+        <p:txBody>
+          <a:bodyPr wrap="square" anchor="ctr" lIns="0" rIns="0" tIns="0" bIns="0">
+            <a:spAutoFit/>
+          </a:bodyPr>
+          <a:lstStyle/>
+          <a:p>
+            <a:pPr algn="ctr">
+              <a:lnSpc>
+                <a:spcPct val="118000"/>
+              </a:lnSpc>
+              <a:spcAft>
+                <a:spcPts val="0"/>
+              </a:spcAft>
+            </a:pPr>
+            <a:r>
+              <a:rPr sz="800" b="1">
+                <a:solidFill>
+                  <a:srgbClr val="0F172A"/>
+                </a:solidFill>
+                <a:latin typeface="Inter"/>
+              </a:rPr>
+              <a:t>Abstains
+when unsure</a:t>
+            </a:r>
+          </a:p>
+        </p:txBody>
+      </p:sp>
+      <p:sp>
+        <p:nvSpPr>
+          <p:cNvPr id="41" name="TextBox 40"/>
+          <p:cNvSpPr txBox="1"/>
+          <p:nvPr/>
+        </p:nvSpPr>
+        <p:spPr>
+          <a:xfrm>
+            <a:off x="10712503" y="1719072"/>
+            <a:ext cx="829967" cy="566928"/>
+          </a:xfrm>
+          <a:prstGeom prst="rect">
+            <a:avLst/>
+          </a:prstGeom>
+          <a:noFill/>
+        </p:spPr>
+        <p:txBody>
+          <a:bodyPr wrap="square" anchor="ctr" lIns="0" rIns="0" tIns="0" bIns="0">
+            <a:spAutoFit/>
+          </a:bodyPr>
+          <a:lstStyle/>
+          <a:p>
+            <a:pPr algn="ctr">
+              <a:lnSpc>
+                <a:spcPct val="118000"/>
+              </a:lnSpc>
+              <a:spcAft>
+                <a:spcPts val="0"/>
+              </a:spcAft>
+            </a:pPr>
+            <a:r>
+              <a:rPr sz="800" b="1">
+                <a:solidFill>
+                  <a:srgbClr val="0F172A"/>
+                </a:solidFill>
+                <a:latin typeface="Inter"/>
+              </a:rPr>
+              <a:t>Datasheet
+reconfig</a:t>
+            </a:r>
+          </a:p>
+        </p:txBody>
+      </p:sp>
+      <p:sp>
+        <p:nvSpPr>
+          <p:cNvPr id="42" name="Rectangle 41"/>
+          <p:cNvSpPr/>
+          <p:nvPr/>
+        </p:nvSpPr>
+        <p:spPr>
+          <a:xfrm>
+            <a:off x="6693408" y="2743200"/>
+            <a:ext cx="4931359" cy="10972"/>
+          </a:xfrm>
+          <a:prstGeom prst="rect">
+            <a:avLst/>
+          </a:prstGeom>
+          <a:solidFill>
+            <a:srgbClr val="CBD5E1"/>
+          </a:solidFill>
+          <a:ln>
+            <a:noFill/>
+          </a:ln>
+          <a:effectLst/>
+        </p:spPr>
+        <p:style>
+          <a:lnRef idx="1">
+            <a:schemeClr val="accent1"/>
+          </a:lnRef>
+          <a:fillRef idx="3">
+            <a:schemeClr val="accent1"/>
+          </a:fillRef>
+          <a:effectRef idx="2">
+            <a:schemeClr val="accent1"/>
+          </a:effectRef>
+          <a:fontRef idx="minor">
+            <a:schemeClr val="lt1"/>
+          </a:fontRef>
+        </p:style>
+        <p:txBody>
+          <a:bodyPr rtlCol="0" anchor="ctr"/>
+          <a:lstStyle/>
+          <a:p/>
+        </p:txBody>
+      </p:sp>
+      <p:sp>
+        <p:nvSpPr>
+          <p:cNvPr id="43" name="TextBox 42"/>
+          <p:cNvSpPr txBox="1"/>
+          <p:nvPr/>
+        </p:nvSpPr>
+        <p:spPr>
+          <a:xfrm>
+            <a:off x="6775704" y="2286000"/>
+            <a:ext cx="1120047" cy="457200"/>
+          </a:xfrm>
+          <a:prstGeom prst="rect">
+            <a:avLst/>
+          </a:prstGeom>
+          <a:noFill/>
+        </p:spPr>
+        <p:txBody>
+          <a:bodyPr wrap="square" anchor="ctr" lIns="0" rIns="0" tIns="0" bIns="0">
+            <a:spAutoFit/>
+          </a:bodyPr>
+          <a:lstStyle/>
+          <a:p>
+            <a:pPr algn="l">
+              <a:lnSpc>
+                <a:spcPct val="118000"/>
+              </a:lnSpc>
+              <a:spcAft>
+                <a:spcPts val="0"/>
+              </a:spcAft>
+            </a:pPr>
+            <a:r>
+              <a:rPr sz="950" b="0">
+                <a:solidFill>
+                  <a:srgbClr val="0F172A"/>
+                </a:solidFill>
+                <a:latin typeface="Inter"/>
+              </a:rPr>
+              <a:t>Orion BMS</a:t>
+            </a:r>
+          </a:p>
+        </p:txBody>
+      </p:sp>
+      <p:sp>
+        <p:nvSpPr>
+          <p:cNvPr id="44" name="TextBox 43"/>
+          <p:cNvSpPr txBox="1"/>
+          <p:nvPr/>
+        </p:nvSpPr>
+        <p:spPr>
+          <a:xfrm>
+            <a:off x="8060343" y="2286000"/>
+            <a:ext cx="622767" cy="457200"/>
+          </a:xfrm>
+          <a:prstGeom prst="rect">
+            <a:avLst/>
+          </a:prstGeom>
+          <a:noFill/>
+        </p:spPr>
+        <p:txBody>
+          <a:bodyPr wrap="square" anchor="ctr" lIns="0" rIns="0" tIns="0" bIns="0">
+            <a:spAutoFit/>
+          </a:bodyPr>
+          <a:lstStyle/>
+          <a:p>
+            <a:pPr algn="ctr">
+              <a:lnSpc>
+                <a:spcPct val="118000"/>
+              </a:lnSpc>
+              <a:spcAft>
+                <a:spcPts val="0"/>
+              </a:spcAft>
+            </a:pPr>
+            <a:r>
+              <a:rPr sz="950" b="0">
+                <a:solidFill>
+                  <a:srgbClr val="475569"/>
+                </a:solidFill>
+                <a:latin typeface="Inter"/>
+              </a:rPr>
+              <a:t>✓</a:t>
+            </a:r>
+          </a:p>
+        </p:txBody>
+      </p:sp>
+      <p:sp>
+        <p:nvSpPr>
+          <p:cNvPr id="45" name="TextBox 44"/>
+          <p:cNvSpPr txBox="1"/>
+          <p:nvPr/>
+        </p:nvSpPr>
+        <p:spPr>
+          <a:xfrm>
+            <a:off x="8847703" y="2286000"/>
+            <a:ext cx="788527" cy="457200"/>
+          </a:xfrm>
+          <a:prstGeom prst="rect">
+            <a:avLst/>
+          </a:prstGeom>
+          <a:noFill/>
+        </p:spPr>
+        <p:txBody>
+          <a:bodyPr wrap="square" anchor="ctr" lIns="0" rIns="0" tIns="0" bIns="0">
+            <a:spAutoFit/>
+          </a:bodyPr>
+          <a:lstStyle/>
+          <a:p>
+            <a:pPr algn="ctr">
+              <a:lnSpc>
+                <a:spcPct val="118000"/>
+              </a:lnSpc>
+              <a:spcAft>
+                <a:spcPts val="0"/>
+              </a:spcAft>
+            </a:pPr>
+            <a:r>
+              <a:rPr sz="950" b="0">
+                <a:solidFill>
+                  <a:srgbClr val="475569"/>
+                </a:solidFill>
+                <a:latin typeface="Inter"/>
+              </a:rPr>
+              <a:t>—</a:t>
+            </a:r>
+          </a:p>
+        </p:txBody>
+      </p:sp>
+      <p:sp>
+        <p:nvSpPr>
+          <p:cNvPr id="46" name="TextBox 45"/>
+          <p:cNvSpPr txBox="1"/>
+          <p:nvPr/>
+        </p:nvSpPr>
+        <p:spPr>
+          <a:xfrm>
+            <a:off x="9800823" y="2286000"/>
+            <a:ext cx="747087" cy="457200"/>
+          </a:xfrm>
+          <a:prstGeom prst="rect">
+            <a:avLst/>
+          </a:prstGeom>
+          <a:noFill/>
+        </p:spPr>
+        <p:txBody>
+          <a:bodyPr wrap="square" anchor="ctr" lIns="0" rIns="0" tIns="0" bIns="0">
+            <a:spAutoFit/>
+          </a:bodyPr>
+          <a:lstStyle/>
+          <a:p>
+            <a:pPr algn="ctr">
+              <a:lnSpc>
+                <a:spcPct val="118000"/>
+              </a:lnSpc>
+              <a:spcAft>
+                <a:spcPts val="0"/>
+              </a:spcAft>
+            </a:pPr>
+            <a:r>
+              <a:rPr sz="950" b="0">
+                <a:solidFill>
+                  <a:srgbClr val="475569"/>
+                </a:solidFill>
+                <a:latin typeface="Inter"/>
+              </a:rPr>
+              <a:t>—</a:t>
+            </a:r>
+          </a:p>
+        </p:txBody>
+      </p:sp>
+      <p:sp>
+        <p:nvSpPr>
+          <p:cNvPr id="47" name="TextBox 46"/>
+          <p:cNvSpPr txBox="1"/>
+          <p:nvPr/>
+        </p:nvSpPr>
+        <p:spPr>
+          <a:xfrm>
+            <a:off x="10712503" y="2286000"/>
+            <a:ext cx="829967" cy="457200"/>
+          </a:xfrm>
+          <a:prstGeom prst="rect">
+            <a:avLst/>
+          </a:prstGeom>
+          <a:noFill/>
+        </p:spPr>
+        <p:txBody>
+          <a:bodyPr wrap="square" anchor="ctr" lIns="0" rIns="0" tIns="0" bIns="0">
+            <a:spAutoFit/>
+          </a:bodyPr>
+          <a:lstStyle/>
+          <a:p>
+            <a:pPr algn="ctr">
+              <a:lnSpc>
+                <a:spcPct val="118000"/>
+              </a:lnSpc>
+              <a:spcAft>
+                <a:spcPts val="0"/>
+              </a:spcAft>
+            </a:pPr>
+            <a:r>
+              <a:rPr sz="950" b="0">
+                <a:solidFill>
+                  <a:srgbClr val="475569"/>
+                </a:solidFill>
+                <a:latin typeface="Inter"/>
+              </a:rPr>
+              <a:t>✓</a:t>
+            </a:r>
+          </a:p>
+        </p:txBody>
+      </p:sp>
+      <p:sp>
+        <p:nvSpPr>
+          <p:cNvPr id="48" name="Rectangle 47"/>
+          <p:cNvSpPr/>
+          <p:nvPr/>
+        </p:nvSpPr>
+        <p:spPr>
+          <a:xfrm>
+            <a:off x="6693408" y="3200400"/>
+            <a:ext cx="4931359" cy="10972"/>
+          </a:xfrm>
+          <a:prstGeom prst="rect">
+            <a:avLst/>
+          </a:prstGeom>
+          <a:solidFill>
+            <a:srgbClr val="CBD5E1"/>
+          </a:solidFill>
+          <a:ln>
+            <a:noFill/>
+          </a:ln>
+          <a:effectLst/>
+        </p:spPr>
+        <p:style>
+          <a:lnRef idx="1">
+            <a:schemeClr val="accent1"/>
+          </a:lnRef>
+          <a:fillRef idx="3">
+            <a:schemeClr val="accent1"/>
+          </a:fillRef>
+          <a:effectRef idx="2">
+            <a:schemeClr val="accent1"/>
+          </a:effectRef>
+          <a:fontRef idx="minor">
+            <a:schemeClr val="lt1"/>
+          </a:fontRef>
+        </p:style>
+        <p:txBody>
+          <a:bodyPr rtlCol="0" anchor="ctr"/>
+          <a:lstStyle/>
+          <a:p/>
+        </p:txBody>
+      </p:sp>
+      <p:sp>
+        <p:nvSpPr>
+          <p:cNvPr id="49" name="TextBox 48"/>
+          <p:cNvSpPr txBox="1"/>
+          <p:nvPr/>
+        </p:nvSpPr>
+        <p:spPr>
+          <a:xfrm>
+            <a:off x="6775704" y="2743200"/>
+            <a:ext cx="1120047" cy="457200"/>
+          </a:xfrm>
+          <a:prstGeom prst="rect">
+            <a:avLst/>
+          </a:prstGeom>
+          <a:noFill/>
+        </p:spPr>
+        <p:txBody>
+          <a:bodyPr wrap="square" anchor="ctr" lIns="0" rIns="0" tIns="0" bIns="0">
+            <a:spAutoFit/>
+          </a:bodyPr>
+          <a:lstStyle/>
+          <a:p>
+            <a:pPr algn="l">
+              <a:lnSpc>
+                <a:spcPct val="118000"/>
+              </a:lnSpc>
+              <a:spcAft>
+                <a:spcPts val="0"/>
+              </a:spcAft>
+            </a:pPr>
+            <a:r>
+              <a:rPr sz="950" b="0">
+                <a:solidFill>
+                  <a:srgbClr val="0F172A"/>
+                </a:solidFill>
+                <a:latin typeface="Inter"/>
+              </a:rPr>
+              <a:t>Nuvation BMS</a:t>
+            </a:r>
+          </a:p>
+        </p:txBody>
+      </p:sp>
+      <p:sp>
+        <p:nvSpPr>
+          <p:cNvPr id="50" name="TextBox 49"/>
+          <p:cNvSpPr txBox="1"/>
+          <p:nvPr/>
+        </p:nvSpPr>
+        <p:spPr>
+          <a:xfrm>
+            <a:off x="8060343" y="2743200"/>
+            <a:ext cx="622767" cy="457200"/>
+          </a:xfrm>
+          <a:prstGeom prst="rect">
+            <a:avLst/>
+          </a:prstGeom>
+          <a:noFill/>
+        </p:spPr>
+        <p:txBody>
+          <a:bodyPr wrap="square" anchor="ctr" lIns="0" rIns="0" tIns="0" bIns="0">
+            <a:spAutoFit/>
+          </a:bodyPr>
+          <a:lstStyle/>
+          <a:p>
+            <a:pPr algn="ctr">
+              <a:lnSpc>
+                <a:spcPct val="118000"/>
+              </a:lnSpc>
+              <a:spcAft>
+                <a:spcPts val="0"/>
+              </a:spcAft>
+            </a:pPr>
+            <a:r>
+              <a:rPr sz="950" b="0">
+                <a:solidFill>
+                  <a:srgbClr val="475569"/>
+                </a:solidFill>
+                <a:latin typeface="Inter"/>
+              </a:rPr>
+              <a:t>✓</a:t>
+            </a:r>
+          </a:p>
+        </p:txBody>
+      </p:sp>
+      <p:sp>
+        <p:nvSpPr>
+          <p:cNvPr id="51" name="TextBox 50"/>
+          <p:cNvSpPr txBox="1"/>
+          <p:nvPr/>
+        </p:nvSpPr>
+        <p:spPr>
+          <a:xfrm>
+            <a:off x="8847703" y="2743200"/>
+            <a:ext cx="788527" cy="457200"/>
+          </a:xfrm>
+          <a:prstGeom prst="rect">
+            <a:avLst/>
+          </a:prstGeom>
+          <a:noFill/>
+        </p:spPr>
+        <p:txBody>
+          <a:bodyPr wrap="square" anchor="ctr" lIns="0" rIns="0" tIns="0" bIns="0">
+            <a:spAutoFit/>
+          </a:bodyPr>
+          <a:lstStyle/>
+          <a:p>
+            <a:pPr algn="ctr">
+              <a:lnSpc>
+                <a:spcPct val="118000"/>
+              </a:lnSpc>
+              <a:spcAft>
+                <a:spcPts val="0"/>
+              </a:spcAft>
+            </a:pPr>
+            <a:r>
+              <a:rPr sz="950" b="0">
+                <a:solidFill>
+                  <a:srgbClr val="475569"/>
+                </a:solidFill>
+                <a:latin typeface="Inter"/>
+              </a:rPr>
+              <a:t>—</a:t>
+            </a:r>
+          </a:p>
+        </p:txBody>
+      </p:sp>
+      <p:sp>
+        <p:nvSpPr>
+          <p:cNvPr id="52" name="TextBox 51"/>
+          <p:cNvSpPr txBox="1"/>
+          <p:nvPr/>
+        </p:nvSpPr>
+        <p:spPr>
+          <a:xfrm>
+            <a:off x="9800823" y="2743200"/>
+            <a:ext cx="747087" cy="457200"/>
+          </a:xfrm>
+          <a:prstGeom prst="rect">
+            <a:avLst/>
+          </a:prstGeom>
+          <a:noFill/>
+        </p:spPr>
+        <p:txBody>
+          <a:bodyPr wrap="square" anchor="ctr" lIns="0" rIns="0" tIns="0" bIns="0">
+            <a:spAutoFit/>
+          </a:bodyPr>
+          <a:lstStyle/>
+          <a:p>
+            <a:pPr algn="ctr">
+              <a:lnSpc>
+                <a:spcPct val="118000"/>
+              </a:lnSpc>
+              <a:spcAft>
+                <a:spcPts val="0"/>
+              </a:spcAft>
+            </a:pPr>
+            <a:r>
+              <a:rPr sz="950" b="0">
+                <a:solidFill>
+                  <a:srgbClr val="475569"/>
+                </a:solidFill>
+                <a:latin typeface="Inter"/>
+              </a:rPr>
+              <a:t>—</a:t>
+            </a:r>
+          </a:p>
+        </p:txBody>
+      </p:sp>
+      <p:sp>
+        <p:nvSpPr>
+          <p:cNvPr id="53" name="TextBox 52"/>
+          <p:cNvSpPr txBox="1"/>
+          <p:nvPr/>
+        </p:nvSpPr>
+        <p:spPr>
+          <a:xfrm>
+            <a:off x="10712503" y="2743200"/>
+            <a:ext cx="829967" cy="457200"/>
+          </a:xfrm>
+          <a:prstGeom prst="rect">
+            <a:avLst/>
+          </a:prstGeom>
+          <a:noFill/>
+        </p:spPr>
+        <p:txBody>
+          <a:bodyPr wrap="square" anchor="ctr" lIns="0" rIns="0" tIns="0" bIns="0">
+            <a:spAutoFit/>
+          </a:bodyPr>
+          <a:lstStyle/>
+          <a:p>
+            <a:pPr algn="ctr">
+              <a:lnSpc>
+                <a:spcPct val="118000"/>
+              </a:lnSpc>
+              <a:spcAft>
+                <a:spcPts val="0"/>
+              </a:spcAft>
+            </a:pPr>
+            <a:r>
+              <a:rPr sz="950" b="0">
+                <a:solidFill>
+                  <a:srgbClr val="475569"/>
+                </a:solidFill>
+                <a:latin typeface="Inter"/>
+              </a:rPr>
+              <a:t>✓</a:t>
+            </a:r>
+          </a:p>
+        </p:txBody>
+      </p:sp>
+      <p:sp>
+        <p:nvSpPr>
+          <p:cNvPr id="54" name="Rectangle 53"/>
+          <p:cNvSpPr/>
+          <p:nvPr/>
+        </p:nvSpPr>
+        <p:spPr>
+          <a:xfrm>
+            <a:off x="6693408" y="3657600"/>
+            <a:ext cx="4931359" cy="10972"/>
+          </a:xfrm>
+          <a:prstGeom prst="rect">
+            <a:avLst/>
+          </a:prstGeom>
+          <a:solidFill>
+            <a:srgbClr val="CBD5E1"/>
+          </a:solidFill>
+          <a:ln>
+            <a:noFill/>
+          </a:ln>
+          <a:effectLst/>
+        </p:spPr>
+        <p:style>
+          <a:lnRef idx="1">
+            <a:schemeClr val="accent1"/>
+          </a:lnRef>
+          <a:fillRef idx="3">
+            <a:schemeClr val="accent1"/>
+          </a:fillRef>
+          <a:effectRef idx="2">
+            <a:schemeClr val="accent1"/>
+          </a:effectRef>
+          <a:fontRef idx="minor">
+            <a:schemeClr val="lt1"/>
+          </a:fontRef>
+        </p:style>
+        <p:txBody>
+          <a:bodyPr rtlCol="0" anchor="ctr"/>
+          <a:lstStyle/>
+          <a:p/>
+        </p:txBody>
+      </p:sp>
+      <p:sp>
+        <p:nvSpPr>
+          <p:cNvPr id="55" name="TextBox 54"/>
+          <p:cNvSpPr txBox="1"/>
+          <p:nvPr/>
+        </p:nvSpPr>
+        <p:spPr>
+          <a:xfrm>
+            <a:off x="6775704" y="3200400"/>
+            <a:ext cx="1120047" cy="457200"/>
+          </a:xfrm>
+          <a:prstGeom prst="rect">
+            <a:avLst/>
+          </a:prstGeom>
+          <a:noFill/>
+        </p:spPr>
+        <p:txBody>
+          <a:bodyPr wrap="square" anchor="ctr" lIns="0" rIns="0" tIns="0" bIns="0">
+            <a:spAutoFit/>
+          </a:bodyPr>
+          <a:lstStyle/>
+          <a:p>
+            <a:pPr algn="l">
+              <a:lnSpc>
+                <a:spcPct val="118000"/>
+              </a:lnSpc>
+              <a:spcAft>
+                <a:spcPts val="0"/>
+              </a:spcAft>
+            </a:pPr>
+            <a:r>
+              <a:rPr sz="950" b="0">
+                <a:solidFill>
+                  <a:srgbClr val="0F172A"/>
+                </a:solidFill>
+                <a:latin typeface="Inter"/>
+              </a:rPr>
+              <a:t>JBD-class BMS</a:t>
+            </a:r>
+          </a:p>
+        </p:txBody>
+      </p:sp>
+      <p:sp>
+        <p:nvSpPr>
+          <p:cNvPr id="56" name="TextBox 55"/>
+          <p:cNvSpPr txBox="1"/>
+          <p:nvPr/>
+        </p:nvSpPr>
+        <p:spPr>
+          <a:xfrm>
+            <a:off x="8060343" y="3200400"/>
+            <a:ext cx="622767" cy="457200"/>
+          </a:xfrm>
+          <a:prstGeom prst="rect">
+            <a:avLst/>
+          </a:prstGeom>
+          <a:noFill/>
+        </p:spPr>
+        <p:txBody>
+          <a:bodyPr wrap="square" anchor="ctr" lIns="0" rIns="0" tIns="0" bIns="0">
+            <a:spAutoFit/>
+          </a:bodyPr>
+          <a:lstStyle/>
+          <a:p>
+            <a:pPr algn="ctr">
+              <a:lnSpc>
+                <a:spcPct val="118000"/>
+              </a:lnSpc>
+              <a:spcAft>
+                <a:spcPts val="0"/>
+              </a:spcAft>
+            </a:pPr>
+            <a:r>
+              <a:rPr sz="950" b="0">
+                <a:solidFill>
+                  <a:srgbClr val="475569"/>
+                </a:solidFill>
+                <a:latin typeface="Inter"/>
+              </a:rPr>
+              <a:t>✓</a:t>
+            </a:r>
+          </a:p>
+        </p:txBody>
+      </p:sp>
+      <p:sp>
+        <p:nvSpPr>
+          <p:cNvPr id="57" name="TextBox 56"/>
+          <p:cNvSpPr txBox="1"/>
+          <p:nvPr/>
+        </p:nvSpPr>
+        <p:spPr>
+          <a:xfrm>
+            <a:off x="8847703" y="3200400"/>
+            <a:ext cx="788527" cy="457200"/>
+          </a:xfrm>
+          <a:prstGeom prst="rect">
+            <a:avLst/>
+          </a:prstGeom>
+          <a:noFill/>
+        </p:spPr>
+        <p:txBody>
+          <a:bodyPr wrap="square" anchor="ctr" lIns="0" rIns="0" tIns="0" bIns="0">
+            <a:spAutoFit/>
+          </a:bodyPr>
+          <a:lstStyle/>
+          <a:p>
+            <a:pPr algn="ctr">
+              <a:lnSpc>
+                <a:spcPct val="118000"/>
+              </a:lnSpc>
+              <a:spcAft>
+                <a:spcPts val="0"/>
+              </a:spcAft>
+            </a:pPr>
+            <a:r>
+              <a:rPr sz="950" b="0">
+                <a:solidFill>
+                  <a:srgbClr val="475569"/>
+                </a:solidFill>
+                <a:latin typeface="Inter"/>
+              </a:rPr>
+              <a:t>—</a:t>
+            </a:r>
+          </a:p>
+        </p:txBody>
+      </p:sp>
+      <p:sp>
+        <p:nvSpPr>
+          <p:cNvPr id="58" name="TextBox 57"/>
+          <p:cNvSpPr txBox="1"/>
+          <p:nvPr/>
+        </p:nvSpPr>
+        <p:spPr>
+          <a:xfrm>
+            <a:off x="9800823" y="3200400"/>
+            <a:ext cx="747087" cy="457200"/>
+          </a:xfrm>
+          <a:prstGeom prst="rect">
+            <a:avLst/>
+          </a:prstGeom>
+          <a:noFill/>
+        </p:spPr>
+        <p:txBody>
+          <a:bodyPr wrap="square" anchor="ctr" lIns="0" rIns="0" tIns="0" bIns="0">
+            <a:spAutoFit/>
+          </a:bodyPr>
+          <a:lstStyle/>
+          <a:p>
+            <a:pPr algn="ctr">
+              <a:lnSpc>
+                <a:spcPct val="118000"/>
+              </a:lnSpc>
+              <a:spcAft>
+                <a:spcPts val="0"/>
+              </a:spcAft>
+            </a:pPr>
+            <a:r>
+              <a:rPr sz="950" b="0">
+                <a:solidFill>
+                  <a:srgbClr val="475569"/>
+                </a:solidFill>
+                <a:latin typeface="Inter"/>
+              </a:rPr>
+              <a:t>—</a:t>
+            </a:r>
+          </a:p>
+        </p:txBody>
+      </p:sp>
+      <p:sp>
+        <p:nvSpPr>
+          <p:cNvPr id="59" name="TextBox 58"/>
+          <p:cNvSpPr txBox="1"/>
+          <p:nvPr/>
+        </p:nvSpPr>
+        <p:spPr>
+          <a:xfrm>
+            <a:off x="10712503" y="3200400"/>
+            <a:ext cx="829967" cy="457200"/>
+          </a:xfrm>
+          <a:prstGeom prst="rect">
+            <a:avLst/>
+          </a:prstGeom>
+          <a:noFill/>
+        </p:spPr>
+        <p:txBody>
+          <a:bodyPr wrap="square" anchor="ctr" lIns="0" rIns="0" tIns="0" bIns="0">
+            <a:spAutoFit/>
+          </a:bodyPr>
+          <a:lstStyle/>
+          <a:p>
+            <a:pPr algn="ctr">
+              <a:lnSpc>
+                <a:spcPct val="118000"/>
+              </a:lnSpc>
+              <a:spcAft>
+                <a:spcPts val="0"/>
+              </a:spcAft>
+            </a:pPr>
+            <a:r>
+              <a:rPr sz="950" b="0">
+                <a:solidFill>
+                  <a:srgbClr val="475569"/>
+                </a:solidFill>
+                <a:latin typeface="Inter"/>
+              </a:rPr>
+              <a:t>—</a:t>
+            </a:r>
+          </a:p>
+        </p:txBody>
+      </p:sp>
+      <p:sp>
+        <p:nvSpPr>
+          <p:cNvPr id="60" name="Rectangle 59"/>
+          <p:cNvSpPr/>
+          <p:nvPr/>
+        </p:nvSpPr>
+        <p:spPr>
+          <a:xfrm>
+            <a:off x="6693408" y="3657600"/>
+            <a:ext cx="4931359" cy="457200"/>
+          </a:xfrm>
+          <a:prstGeom prst="rect">
+            <a:avLst/>
+          </a:prstGeom>
+          <a:solidFill>
+            <a:srgbClr val="E6F4F6"/>
+          </a:solidFill>
+          <a:ln w="13970">
+            <a:solidFill>
+              <a:srgbClr val="0E7490"/>
+            </a:solidFill>
+          </a:ln>
+          <a:effectLst/>
+        </p:spPr>
+        <p:style>
+          <a:lnRef idx="1">
+            <a:schemeClr val="accent1"/>
+          </a:lnRef>
+          <a:fillRef idx="3">
+            <a:schemeClr val="accent1"/>
+          </a:fillRef>
+          <a:effectRef idx="2">
+            <a:schemeClr val="accent1"/>
+          </a:effectRef>
+          <a:fontRef idx="minor">
+            <a:schemeClr val="lt1"/>
+          </a:fontRef>
+        </p:style>
+        <p:txBody>
+          <a:bodyPr rtlCol="0" anchor="ctr"/>
+          <a:lstStyle/>
+          <a:p/>
+        </p:txBody>
+      </p:sp>
+      <p:sp>
+        <p:nvSpPr>
+          <p:cNvPr id="61" name="TextBox 60"/>
+          <p:cNvSpPr txBox="1"/>
+          <p:nvPr/>
+        </p:nvSpPr>
+        <p:spPr>
+          <a:xfrm>
+            <a:off x="6775704" y="3657600"/>
+            <a:ext cx="1120047" cy="457200"/>
+          </a:xfrm>
+          <a:prstGeom prst="rect">
+            <a:avLst/>
+          </a:prstGeom>
+          <a:noFill/>
+        </p:spPr>
+        <p:txBody>
+          <a:bodyPr wrap="square" anchor="ctr" lIns="0" rIns="0" tIns="0" bIns="0">
+            <a:spAutoFit/>
+          </a:bodyPr>
+          <a:lstStyle/>
+          <a:p>
+            <a:pPr algn="l">
+              <a:lnSpc>
+                <a:spcPct val="118000"/>
+              </a:lnSpc>
+              <a:spcAft>
+                <a:spcPts val="0"/>
+              </a:spcAft>
+            </a:pPr>
+            <a:r>
+              <a:rPr sz="950" b="1">
+                <a:solidFill>
+                  <a:srgbClr val="0F172A"/>
+                </a:solidFill>
+                <a:latin typeface="Inter"/>
+              </a:rPr>
+              <a:t>AI-PBMS</a:t>
+            </a:r>
+          </a:p>
+        </p:txBody>
+      </p:sp>
+      <p:sp>
+        <p:nvSpPr>
+          <p:cNvPr id="62" name="TextBox 61"/>
+          <p:cNvSpPr txBox="1"/>
+          <p:nvPr/>
+        </p:nvSpPr>
+        <p:spPr>
+          <a:xfrm>
+            <a:off x="8060343" y="3657600"/>
+            <a:ext cx="622767" cy="457200"/>
+          </a:xfrm>
+          <a:prstGeom prst="rect">
+            <a:avLst/>
+          </a:prstGeom>
+          <a:noFill/>
+        </p:spPr>
+        <p:txBody>
+          <a:bodyPr wrap="square" anchor="ctr" lIns="0" rIns="0" tIns="0" bIns="0">
+            <a:spAutoFit/>
+          </a:bodyPr>
+          <a:lstStyle/>
+          <a:p>
+            <a:pPr algn="ctr">
+              <a:lnSpc>
+                <a:spcPct val="118000"/>
+              </a:lnSpc>
+              <a:spcAft>
+                <a:spcPts val="0"/>
+              </a:spcAft>
+            </a:pPr>
+            <a:r>
+              <a:rPr sz="950" b="1">
+                <a:solidFill>
+                  <a:srgbClr val="0E7490"/>
+                </a:solidFill>
+                <a:latin typeface="Inter"/>
+              </a:rPr>
+              <a:t>✓</a:t>
+            </a:r>
+          </a:p>
+        </p:txBody>
+      </p:sp>
+      <p:sp>
+        <p:nvSpPr>
+          <p:cNvPr id="63" name="TextBox 62"/>
+          <p:cNvSpPr txBox="1"/>
+          <p:nvPr/>
+        </p:nvSpPr>
+        <p:spPr>
+          <a:xfrm>
+            <a:off x="8847703" y="3657600"/>
+            <a:ext cx="788527" cy="457200"/>
+          </a:xfrm>
+          <a:prstGeom prst="rect">
+            <a:avLst/>
+          </a:prstGeom>
+          <a:noFill/>
+        </p:spPr>
+        <p:txBody>
+          <a:bodyPr wrap="square" anchor="ctr" lIns="0" rIns="0" tIns="0" bIns="0">
+            <a:spAutoFit/>
+          </a:bodyPr>
+          <a:lstStyle/>
+          <a:p>
+            <a:pPr algn="ctr">
+              <a:lnSpc>
+                <a:spcPct val="118000"/>
+              </a:lnSpc>
+              <a:spcAft>
+                <a:spcPts val="0"/>
+              </a:spcAft>
+            </a:pPr>
+            <a:r>
+              <a:rPr sz="950" b="1">
+                <a:solidFill>
+                  <a:srgbClr val="0E7490"/>
+                </a:solidFill>
+                <a:latin typeface="Inter"/>
+              </a:rPr>
+              <a:t>6 classes</a:t>
+            </a:r>
+          </a:p>
+        </p:txBody>
+      </p:sp>
+      <p:sp>
+        <p:nvSpPr>
+          <p:cNvPr id="64" name="TextBox 63"/>
+          <p:cNvSpPr txBox="1"/>
+          <p:nvPr/>
+        </p:nvSpPr>
+        <p:spPr>
+          <a:xfrm>
+            <a:off x="9800823" y="3657600"/>
+            <a:ext cx="747087" cy="457200"/>
+          </a:xfrm>
+          <a:prstGeom prst="rect">
+            <a:avLst/>
+          </a:prstGeom>
+          <a:noFill/>
+        </p:spPr>
+        <p:txBody>
+          <a:bodyPr wrap="square" anchor="ctr" lIns="0" rIns="0" tIns="0" bIns="0">
+            <a:spAutoFit/>
+          </a:bodyPr>
+          <a:lstStyle/>
+          <a:p>
+            <a:pPr algn="ctr">
+              <a:lnSpc>
+                <a:spcPct val="118000"/>
+              </a:lnSpc>
+              <a:spcAft>
+                <a:spcPts val="0"/>
+              </a:spcAft>
+            </a:pPr>
+            <a:r>
+              <a:rPr sz="950" b="1">
+                <a:solidFill>
+                  <a:srgbClr val="0E7490"/>
+                </a:solidFill>
+                <a:latin typeface="Inter"/>
+              </a:rPr>
+              <a:t>3 bands</a:t>
+            </a:r>
+          </a:p>
+        </p:txBody>
+      </p:sp>
+      <p:sp>
+        <p:nvSpPr>
+          <p:cNvPr id="65" name="TextBox 64"/>
+          <p:cNvSpPr txBox="1"/>
+          <p:nvPr/>
+        </p:nvSpPr>
+        <p:spPr>
+          <a:xfrm>
+            <a:off x="10712503" y="3657600"/>
+            <a:ext cx="829967" cy="457200"/>
+          </a:xfrm>
+          <a:prstGeom prst="rect">
+            <a:avLst/>
+          </a:prstGeom>
+          <a:noFill/>
+        </p:spPr>
+        <p:txBody>
+          <a:bodyPr wrap="square" anchor="ctr" lIns="0" rIns="0" tIns="0" bIns="0">
+            <a:spAutoFit/>
+          </a:bodyPr>
+          <a:lstStyle/>
+          <a:p>
+            <a:pPr algn="ctr">
+              <a:lnSpc>
+                <a:spcPct val="118000"/>
+              </a:lnSpc>
+              <a:spcAft>
+                <a:spcPts val="0"/>
+              </a:spcAft>
+            </a:pPr>
+            <a:r>
+              <a:rPr sz="950" b="1">
+                <a:solidFill>
+                  <a:srgbClr val="0E7490"/>
+                </a:solidFill>
+                <a:latin typeface="Inter"/>
+              </a:rPr>
+              <a:t>PDF → profile</a:t>
+            </a:r>
+          </a:p>
+        </p:txBody>
+      </p:sp>
+      <p:sp>
+        <p:nvSpPr>
+          <p:cNvPr id="66" name="TextBox 65"/>
+          <p:cNvSpPr txBox="1"/>
+          <p:nvPr/>
+        </p:nvSpPr>
+        <p:spPr>
+          <a:xfrm>
+            <a:off x="6693408" y="4242816"/>
+            <a:ext cx="4931359" cy="402336"/>
+          </a:xfrm>
+          <a:prstGeom prst="rect">
+            <a:avLst/>
+          </a:prstGeom>
+          <a:noFill/>
+        </p:spPr>
+        <p:txBody>
+          <a:bodyPr wrap="square" anchor="t" lIns="0" rIns="0" tIns="0" bIns="0">
+            <a:spAutoFit/>
+          </a:bodyPr>
+          <a:lstStyle/>
+          <a:p>
+            <a:pPr algn="l">
+              <a:lnSpc>
+                <a:spcPct val="124000"/>
+              </a:lnSpc>
+              <a:spcAft>
+                <a:spcPts val="0"/>
+              </a:spcAft>
+            </a:pPr>
+            <a:r>
+              <a:rPr sz="850" b="0">
+                <a:solidFill>
+                  <a:srgbClr val="B91C1C"/>
+                </a:solidFill>
+                <a:latin typeface="Inter"/>
+              </a:rPr>
+              <a:t>Competitor rows compiled from public product pages — [VERIFY against vendor datasheets]</a:t>
+            </a:r>
+          </a:p>
+        </p:txBody>
+      </p:sp>
+      <p:sp>
+        <p:nvSpPr>
+          <p:cNvPr id="67" name="Rectangle 66"/>
+          <p:cNvSpPr/>
+          <p:nvPr/>
+        </p:nvSpPr>
+        <p:spPr>
+          <a:xfrm>
+            <a:off x="6693408" y="4224528"/>
+            <a:ext cx="4931359" cy="1920240"/>
+          </a:xfrm>
+          <a:prstGeom prst="rect">
+            <a:avLst/>
+          </a:prstGeom>
+          <a:solidFill>
+            <a:srgbClr val="F1F5F9"/>
+          </a:solidFill>
+          <a:ln w="9525">
+            <a:solidFill>
+              <a:srgbClr val="CBD5E1"/>
+            </a:solidFill>
+          </a:ln>
+          <a:effectLst/>
+        </p:spPr>
+        <p:style>
+          <a:lnRef idx="1">
+            <a:schemeClr val="accent1"/>
+          </a:lnRef>
+          <a:fillRef idx="3">
+            <a:schemeClr val="accent1"/>
+          </a:fillRef>
+          <a:effectRef idx="2">
+            <a:schemeClr val="accent1"/>
+          </a:effectRef>
+          <a:fontRef idx="minor">
+            <a:schemeClr val="lt1"/>
+          </a:fontRef>
+        </p:style>
+        <p:txBody>
+          <a:bodyPr rtlCol="0" anchor="ctr"/>
+          <a:lstStyle/>
+          <a:p/>
+        </p:txBody>
+      </p:sp>
+      <p:sp>
+        <p:nvSpPr>
+          <p:cNvPr id="68" name="TextBox 67"/>
+          <p:cNvSpPr txBox="1"/>
+          <p:nvPr/>
+        </p:nvSpPr>
+        <p:spPr>
+          <a:xfrm>
+            <a:off x="6894576" y="4334256"/>
+            <a:ext cx="4529023" cy="219456"/>
+          </a:xfrm>
+          <a:prstGeom prst="rect">
+            <a:avLst/>
+          </a:prstGeom>
+          <a:noFill/>
+        </p:spPr>
+        <p:txBody>
+          <a:bodyPr wrap="square" anchor="t" lIns="0" rIns="0" tIns="0" bIns="0">
+            <a:spAutoFit/>
+          </a:bodyPr>
+          <a:lstStyle/>
+          <a:p>
+            <a:pPr algn="l">
+              <a:lnSpc>
+                <a:spcPct val="118000"/>
+              </a:lnSpc>
+              <a:spcAft>
+                <a:spcPts val="0"/>
+              </a:spcAft>
+            </a:pPr>
+            <a:r>
+              <a:rPr sz="950" b="1">
+                <a:solidFill>
+                  <a:srgbClr val="0E7490"/>
+                </a:solidFill>
+                <a:latin typeface="Inter"/>
+              </a:rPr>
+              <a:t>THE ARGUMENT IN ONE LINE</a:t>
+            </a:r>
+          </a:p>
+        </p:txBody>
+      </p:sp>
+      <p:sp>
+        <p:nvSpPr>
+          <p:cNvPr id="69" name="TextBox 68"/>
+          <p:cNvSpPr txBox="1"/>
+          <p:nvPr/>
+        </p:nvSpPr>
+        <p:spPr>
+          <a:xfrm>
+            <a:off x="6894576" y="4590288"/>
+            <a:ext cx="4529023" cy="1444752"/>
+          </a:xfrm>
+          <a:prstGeom prst="rect">
+            <a:avLst/>
+          </a:prstGeom>
+          <a:noFill/>
+        </p:spPr>
+        <p:txBody>
+          <a:bodyPr wrap="square" anchor="t" lIns="0" rIns="0" tIns="0" bIns="0">
+            <a:spAutoFit/>
+          </a:bodyPr>
+          <a:lstStyle/>
+          <a:p>
+            <a:pPr algn="l">
+              <a:lnSpc>
+                <a:spcPct val="128000"/>
+              </a:lnSpc>
+              <a:spcAft>
+                <a:spcPts val="0"/>
+              </a:spcAft>
+            </a:pPr>
+            <a:r>
+              <a:rPr sz="1150" b="0">
+                <a:solidFill>
+                  <a:srgbClr val="0F172A"/>
+                </a:solidFill>
+                <a:latin typeface="Inter"/>
+              </a:rPr>
+              <a:t>Every product in that table protects the pack once a threshold breaks. None of them tells a technician which cell is failing, how confident that call is, or adapts to a different chemistry from a PDF. That is the whole product.</a:t>
+            </a:r>
+          </a:p>
+        </p:txBody>
+      </p:sp>
+    </p:spTree>
+  </p:cSld>
+  <p:clrMapOvr>
+    <a:masterClrMapping/>
+  </p:clrMapOvr>
+</p:sld>
+</file>
+
+<file path=ppt/slides/slide11.xml><?xml version="1.0" encoding="utf-8"?>
+<p:sld xmlns:a="http://schemas.openxmlformats.org/drawingml/2006/main" xmlns:p="http://schemas.openxmlformats.org/presentationml/2006/main" xmlns:r="http://schemas.openxmlformats.org/officeDocument/2006/relationships">
+  <p:cSld>
+    <p:bg>
+      <p:bgPr>
+        <a:solidFill>
+          <a:srgbClr val="FFFFFF"/>
+        </a:solidFill>
+        <a:effectLst/>
+      </p:bgPr>
+    </p:bg>
+    <p:spTree>
+      <p:nvGrpSpPr>
+        <p:cNvPr id="1" name=""/>
+        <p:cNvGrpSpPr/>
+        <p:nvPr/>
+      </p:nvGrpSpPr>
+      <p:grpSpPr/>
+      <p:sp>
+        <p:nvSpPr>
+          <p:cNvPr id="2" name="TextBox 1"/>
+          <p:cNvSpPr txBox="1"/>
+          <p:nvPr/>
+        </p:nvSpPr>
+        <p:spPr>
+          <a:xfrm>
+            <a:off x="566928" y="365760"/>
+            <a:ext cx="11057839" cy="713232"/>
+          </a:xfrm>
+          <a:prstGeom prst="rect">
+            <a:avLst/>
+          </a:prstGeom>
+          <a:noFill/>
+        </p:spPr>
+        <p:txBody>
+          <a:bodyPr wrap="square" anchor="t" lIns="0" rIns="0" tIns="0" bIns="0">
+            <a:spAutoFit/>
+          </a:bodyPr>
+          <a:lstStyle/>
+          <a:p>
+            <a:pPr algn="l">
+              <a:lnSpc>
+                <a:spcPct val="102000"/>
+              </a:lnSpc>
+              <a:spcAft>
+                <a:spcPts val="0"/>
+              </a:spcAft>
+            </a:pPr>
+            <a:r>
+              <a:rPr sz="3300" b="1">
+                <a:solidFill>
+                  <a:srgbClr val="0F172A"/>
+                </a:solidFill>
+                <a:latin typeface="Inter"/>
+              </a:rPr>
+              <a:t>References</a:t>
+            </a:r>
+          </a:p>
+        </p:txBody>
+      </p:sp>
+      <p:sp>
+        <p:nvSpPr>
+          <p:cNvPr id="3" name="Rectangle 2"/>
+          <p:cNvSpPr/>
+          <p:nvPr/>
+        </p:nvSpPr>
+        <p:spPr>
+          <a:xfrm>
+            <a:off x="566928" y="1152144"/>
+            <a:ext cx="1965960" cy="32004"/>
+          </a:xfrm>
+          <a:prstGeom prst="rect">
+            <a:avLst/>
+          </a:prstGeom>
+          <a:solidFill>
+            <a:srgbClr val="0E7490"/>
+          </a:solidFill>
+          <a:ln>
+            <a:noFill/>
+          </a:ln>
+          <a:effectLst/>
+        </p:spPr>
+        <p:style>
+          <a:lnRef idx="1">
+            <a:schemeClr val="accent1"/>
+          </a:lnRef>
+          <a:fillRef idx="3">
+            <a:schemeClr val="accent1"/>
+          </a:fillRef>
+          <a:effectRef idx="2">
+            <a:schemeClr val="accent1"/>
+          </a:effectRef>
+          <a:fontRef idx="minor">
+            <a:schemeClr val="lt1"/>
+          </a:fontRef>
+        </p:style>
+        <p:txBody>
+          <a:bodyPr rtlCol="0" anchor="ctr"/>
+          <a:lstStyle/>
+          <a:p/>
+        </p:txBody>
+      </p:sp>
+      <p:sp>
+        <p:nvSpPr>
+          <p:cNvPr id="4" name="Rectangle 3"/>
+          <p:cNvSpPr/>
+          <p:nvPr/>
+        </p:nvSpPr>
+        <p:spPr>
+          <a:xfrm>
+            <a:off x="2532888" y="1152144"/>
+            <a:ext cx="9091879" cy="32004"/>
+          </a:xfrm>
+          <a:prstGeom prst="rect">
+            <a:avLst/>
+          </a:prstGeom>
+          <a:solidFill>
+            <a:srgbClr val="CBD5E1"/>
+          </a:solidFill>
+          <a:ln>
+            <a:noFill/>
+          </a:ln>
+          <a:effectLst/>
+        </p:spPr>
+        <p:style>
+          <a:lnRef idx="1">
+            <a:schemeClr val="accent1"/>
+          </a:lnRef>
+          <a:fillRef idx="3">
+            <a:schemeClr val="accent1"/>
+          </a:fillRef>
+          <a:effectRef idx="2">
+            <a:schemeClr val="accent1"/>
+          </a:effectRef>
+          <a:fontRef idx="minor">
+            <a:schemeClr val="lt1"/>
+          </a:fontRef>
+        </p:style>
+        <p:txBody>
+          <a:bodyPr rtlCol="0" anchor="ctr"/>
+          <a:lstStyle/>
+          <a:p/>
+        </p:txBody>
+      </p:sp>
+      <p:sp>
+        <p:nvSpPr>
+          <p:cNvPr id="5" name="TextBox 4"/>
+          <p:cNvSpPr txBox="1"/>
+          <p:nvPr/>
+        </p:nvSpPr>
+        <p:spPr>
+          <a:xfrm>
+            <a:off x="566928" y="6400800"/>
+            <a:ext cx="4572000" cy="237744"/>
+          </a:xfrm>
+          <a:prstGeom prst="rect">
+            <a:avLst/>
+          </a:prstGeom>
+          <a:noFill/>
+        </p:spPr>
+        <p:txBody>
+          <a:bodyPr wrap="square" anchor="t" lIns="0" rIns="0" tIns="0" bIns="0">
+            <a:spAutoFit/>
+          </a:bodyPr>
+          <a:lstStyle/>
+          <a:p>
+            <a:pPr algn="l">
+              <a:lnSpc>
+                <a:spcPct val="118000"/>
+              </a:lnSpc>
+              <a:spcAft>
+                <a:spcPts val="0"/>
+              </a:spcAft>
+            </a:pPr>
+            <a:r>
+              <a:rPr sz="950" b="0">
+                <a:solidFill>
+                  <a:srgbClr val="475569"/>
+                </a:solidFill>
+                <a:latin typeface="Inter"/>
+              </a:rPr>
+              <a:t>AI-PBMS  ·  Team ANS_4X</a:t>
+            </a:r>
+          </a:p>
+        </p:txBody>
+      </p:sp>
+      <p:sp>
+        <p:nvSpPr>
+          <p:cNvPr id="6" name="TextBox 5"/>
+          <p:cNvSpPr txBox="1"/>
+          <p:nvPr/>
+        </p:nvSpPr>
+        <p:spPr>
+          <a:xfrm>
+            <a:off x="10527487" y="6400800"/>
+            <a:ext cx="1097280" cy="237744"/>
+          </a:xfrm>
+          <a:prstGeom prst="rect">
+            <a:avLst/>
+          </a:prstGeom>
+          <a:noFill/>
+        </p:spPr>
+        <p:txBody>
+          <a:bodyPr wrap="square" anchor="t" lIns="0" rIns="0" tIns="0" bIns="0">
+            <a:spAutoFit/>
+          </a:bodyPr>
+          <a:lstStyle/>
+          <a:p>
+            <a:pPr algn="r">
+              <a:lnSpc>
+                <a:spcPct val="118000"/>
+              </a:lnSpc>
+              <a:spcAft>
+                <a:spcPts val="0"/>
+              </a:spcAft>
+            </a:pPr>
+            <a:r>
+              <a:rPr sz="1050" b="0">
+                <a:solidFill>
+                  <a:srgbClr val="475569"/>
+                </a:solidFill>
+                <a:latin typeface="Inter"/>
+              </a:rPr>
+              <a:t>11</a:t>
             </a:r>
           </a:p>
         </p:txBody>
@@ -7994,8 +11738,8 @@
         </p:nvSpPr>
         <p:spPr>
           <a:xfrm>
-            <a:off x="6693408" y="5998464"/>
-            <a:ext cx="4931359" cy="475488"/>
+            <a:off x="6693408" y="5980176"/>
+            <a:ext cx="4931359" cy="438912"/>
           </a:xfrm>
           <a:prstGeom prst="rect">
             <a:avLst/>
@@ -8010,14 +11754,14 @@
           <a:p>
             <a:pPr algn="l">
               <a:lnSpc>
-                <a:spcPct val="132000"/>
-              </a:lnSpc>
-              <a:spcAft>
-                <a:spcPts val="0"/>
-              </a:spcAft>
-            </a:pPr>
-            <a:r>
-              <a:rPr sz="900" b="0">
+                <a:spcPct val="128000"/>
+              </a:lnSpc>
+              <a:spcAft>
+                <a:spcPts val="0"/>
+              </a:spcAft>
+            </a:pPr>
+            <a:r>
+              <a:rPr sz="880" b="0">
                 <a:solidFill>
                   <a:srgbClr val="475569"/>
                 </a:solidFill>
@@ -14151,8 +17895,8 @@
         </p:blipFill>
         <p:spPr>
           <a:xfrm>
-            <a:off x="2404340" y="1353312"/>
-            <a:ext cx="7383013" cy="3913632"/>
+            <a:off x="2542340" y="1353312"/>
+            <a:ext cx="7107013" cy="3767328"/>
           </a:xfrm>
           <a:prstGeom prst="rect">
             <a:avLst/>
@@ -14167,8 +17911,8 @@
         </p:nvSpPr>
         <p:spPr>
           <a:xfrm>
-            <a:off x="566928" y="5321808"/>
-            <a:ext cx="3539642" cy="1005840"/>
+            <a:off x="566928" y="5193792"/>
+            <a:ext cx="2627299" cy="1143000"/>
           </a:xfrm>
           <a:prstGeom prst="rect">
             <a:avLst/>
@@ -14211,8 +17955,8 @@
         </p:nvSpPr>
         <p:spPr>
           <a:xfrm>
-            <a:off x="566928" y="5321808"/>
-            <a:ext cx="3539642" cy="50292"/>
+            <a:off x="566928" y="5193792"/>
+            <a:ext cx="2627299" cy="50292"/>
           </a:xfrm>
           <a:prstGeom prst="rect">
             <a:avLst/>
@@ -14253,8 +17997,8 @@
         </p:nvSpPr>
         <p:spPr>
           <a:xfrm>
-            <a:off x="749808" y="5449824"/>
-            <a:ext cx="3173882" cy="201168"/>
+            <a:off x="713232" y="5312664"/>
+            <a:ext cx="2334691" cy="201168"/>
           </a:xfrm>
           <a:prstGeom prst="rect">
             <a:avLst/>
@@ -14276,7 +18020,7 @@
               </a:spcAft>
             </a:pPr>
             <a:r>
-              <a:rPr sz="900" b="1">
+              <a:rPr sz="850" b="1">
                 <a:solidFill>
                   <a:srgbClr val="0E7490"/>
                 </a:solidFill>
@@ -14295,8 +18039,8 @@
         </p:nvSpPr>
         <p:spPr>
           <a:xfrm>
-            <a:off x="749808" y="5687568"/>
-            <a:ext cx="3173882" cy="585216"/>
+            <a:off x="713232" y="5541264"/>
+            <a:ext cx="2334691" cy="768096"/>
           </a:xfrm>
           <a:prstGeom prst="rect">
             <a:avLst/>
@@ -14311,14 +18055,14 @@
           <a:p>
             <a:pPr algn="l">
               <a:lnSpc>
-                <a:spcPct val="122000"/>
-              </a:lnSpc>
-              <a:spcAft>
-                <a:spcPts val="0"/>
-              </a:spcAft>
-            </a:pPr>
-            <a:r>
-              <a:rPr sz="950" b="0">
+                <a:spcPct val="120000"/>
+              </a:lnSpc>
+              <a:spcAft>
+                <a:spcPts val="0"/>
+              </a:spcAft>
+            </a:pPr>
+            <a:r>
+              <a:rPr sz="840" b="0">
                 <a:solidFill>
                   <a:srgbClr val="0F172A"/>
                 </a:solidFill>
@@ -14337,8 +18081,8 @@
         </p:nvSpPr>
         <p:spPr>
           <a:xfrm>
-            <a:off x="4326026" y="5321808"/>
-            <a:ext cx="3539642" cy="1005840"/>
+            <a:off x="3377107" y="5193792"/>
+            <a:ext cx="2627299" cy="1143000"/>
           </a:xfrm>
           <a:prstGeom prst="rect">
             <a:avLst/>
@@ -14381,8 +18125,8 @@
         </p:nvSpPr>
         <p:spPr>
           <a:xfrm>
-            <a:off x="4326026" y="5321808"/>
-            <a:ext cx="3539642" cy="50292"/>
+            <a:off x="3377107" y="5193792"/>
+            <a:ext cx="2627299" cy="50292"/>
           </a:xfrm>
           <a:prstGeom prst="rect">
             <a:avLst/>
@@ -14423,8 +18167,8 @@
         </p:nvSpPr>
         <p:spPr>
           <a:xfrm>
-            <a:off x="4508906" y="5449824"/>
-            <a:ext cx="3173882" cy="201168"/>
+            <a:off x="3523411" y="5312664"/>
+            <a:ext cx="2334691" cy="201168"/>
           </a:xfrm>
           <a:prstGeom prst="rect">
             <a:avLst/>
@@ -14446,7 +18190,7 @@
               </a:spcAft>
             </a:pPr>
             <a:r>
-              <a:rPr sz="900" b="1">
+              <a:rPr sz="850" b="1">
                 <a:solidFill>
                   <a:srgbClr val="B45309"/>
                 </a:solidFill>
@@ -14465,8 +18209,8 @@
         </p:nvSpPr>
         <p:spPr>
           <a:xfrm>
-            <a:off x="4508906" y="5687568"/>
-            <a:ext cx="3173882" cy="585216"/>
+            <a:off x="3523411" y="5541264"/>
+            <a:ext cx="2334691" cy="768096"/>
           </a:xfrm>
           <a:prstGeom prst="rect">
             <a:avLst/>
@@ -14481,20 +18225,20 @@
           <a:p>
             <a:pPr algn="l">
               <a:lnSpc>
-                <a:spcPct val="122000"/>
-              </a:lnSpc>
-              <a:spcAft>
-                <a:spcPts val="0"/>
-              </a:spcAft>
-            </a:pPr>
-            <a:r>
-              <a:rPr sz="950" b="0">
+                <a:spcPct val="120000"/>
+              </a:lnSpc>
+              <a:spcAft>
+                <a:spcPts val="0"/>
+              </a:spcAft>
+            </a:pPr>
+            <a:r>
+              <a:rPr sz="840" b="0">
                 <a:solidFill>
                   <a:srgbClr val="0F172A"/>
                 </a:solidFill>
                 <a:latin typeface="Inter"/>
               </a:rPr>
-              <a:t>Context is resolved before detection, because the same voltage sag means different things in ACCEL and IDLE.</a:t>
+              <a:t>Context is resolved before detection: the same voltage sag means different things in ACCEL and IDLE.</a:t>
             </a:r>
           </a:p>
         </p:txBody>
@@ -14507,8 +18251,8 @@
         </p:nvSpPr>
         <p:spPr>
           <a:xfrm>
-            <a:off x="8085124" y="5321808"/>
-            <a:ext cx="3539642" cy="1005840"/>
+            <a:off x="6187287" y="5193792"/>
+            <a:ext cx="2627299" cy="1143000"/>
           </a:xfrm>
           <a:prstGeom prst="rect">
             <a:avLst/>
@@ -14551,8 +18295,8 @@
         </p:nvSpPr>
         <p:spPr>
           <a:xfrm>
-            <a:off x="8085124" y="5321808"/>
-            <a:ext cx="3539642" cy="50292"/>
+            <a:off x="6187287" y="5193792"/>
+            <a:ext cx="2627299" cy="50292"/>
           </a:xfrm>
           <a:prstGeom prst="rect">
             <a:avLst/>
@@ -14593,8 +18337,8 @@
         </p:nvSpPr>
         <p:spPr>
           <a:xfrm>
-            <a:off x="8268004" y="5449824"/>
-            <a:ext cx="3173882" cy="201168"/>
+            <a:off x="6333591" y="5312664"/>
+            <a:ext cx="2334691" cy="201168"/>
           </a:xfrm>
           <a:prstGeom prst="rect">
             <a:avLst/>
@@ -14616,7 +18360,7 @@
               </a:spcAft>
             </a:pPr>
             <a:r>
-              <a:rPr sz="900" b="1">
+              <a:rPr sz="850" b="1">
                 <a:solidFill>
                   <a:srgbClr val="B91C1C"/>
                 </a:solidFill>
@@ -14635,8 +18379,8 @@
         </p:nvSpPr>
         <p:spPr>
           <a:xfrm>
-            <a:off x="8268004" y="5687568"/>
-            <a:ext cx="3173882" cy="585216"/>
+            <a:off x="6333591" y="5541264"/>
+            <a:ext cx="2334691" cy="768096"/>
           </a:xfrm>
           <a:prstGeom prst="rect">
             <a:avLst/>
@@ -14651,20 +18395,190 @@
           <a:p>
             <a:pPr algn="l">
               <a:lnSpc>
-                <a:spcPct val="122000"/>
-              </a:lnSpc>
-              <a:spcAft>
-                <a:spcPts val="0"/>
-              </a:spcAft>
-            </a:pPr>
-            <a:r>
-              <a:rPr sz="950" b="0">
+                <a:spcPct val="120000"/>
+              </a:lnSpc>
+              <a:spcAft>
+                <a:spcPts val="0"/>
+              </a:spcAft>
+            </a:pPr>
+            <a:r>
+              <a:rPr sz="840" b="0">
                 <a:solidFill>
                   <a:srgbClr val="0F172A"/>
                 </a:solidFill>
                 <a:latin typeface="Inter"/>
               </a:rPr>
               <a:t>The ML lane can abstain or be wrong. The hardware lane cannot — it runs at the pack, with no software in it.</a:t>
+            </a:r>
+          </a:p>
+        </p:txBody>
+      </p:sp>
+      <p:sp>
+        <p:nvSpPr>
+          <p:cNvPr id="20" name="Rectangle 19"/>
+          <p:cNvSpPr/>
+          <p:nvPr/>
+        </p:nvSpPr>
+        <p:spPr>
+          <a:xfrm>
+            <a:off x="8997467" y="5193792"/>
+            <a:ext cx="2627299" cy="1143000"/>
+          </a:xfrm>
+          <a:prstGeom prst="rect">
+            <a:avLst/>
+          </a:prstGeom>
+          <a:solidFill>
+            <a:srgbClr val="F1F5F9"/>
+          </a:solidFill>
+          <a:ln w="9525">
+            <a:solidFill>
+              <a:srgbClr val="CBD5E1"/>
+            </a:solidFill>
+          </a:ln>
+          <a:effectLst/>
+        </p:spPr>
+        <p:style>
+          <a:lnRef idx="1">
+            <a:schemeClr val="accent1"/>
+          </a:lnRef>
+          <a:fillRef idx="3">
+            <a:schemeClr val="accent1"/>
+          </a:fillRef>
+          <a:effectRef idx="2">
+            <a:schemeClr val="accent1"/>
+          </a:effectRef>
+          <a:fontRef idx="minor">
+            <a:schemeClr val="lt1"/>
+          </a:fontRef>
+        </p:style>
+        <p:txBody>
+          <a:bodyPr rtlCol="0" anchor="ctr"/>
+          <a:lstStyle/>
+          <a:p/>
+        </p:txBody>
+      </p:sp>
+      <p:sp>
+        <p:nvSpPr>
+          <p:cNvPr id="21" name="Rectangle 20"/>
+          <p:cNvSpPr/>
+          <p:nvPr/>
+        </p:nvSpPr>
+        <p:spPr>
+          <a:xfrm>
+            <a:off x="8997467" y="5193792"/>
+            <a:ext cx="2627299" cy="50292"/>
+          </a:xfrm>
+          <a:prstGeom prst="rect">
+            <a:avLst/>
+          </a:prstGeom>
+          <a:solidFill>
+            <a:srgbClr val="B91C1C"/>
+          </a:solidFill>
+          <a:ln>
+            <a:noFill/>
+          </a:ln>
+          <a:effectLst/>
+        </p:spPr>
+        <p:style>
+          <a:lnRef idx="1">
+            <a:schemeClr val="accent1"/>
+          </a:lnRef>
+          <a:fillRef idx="3">
+            <a:schemeClr val="accent1"/>
+          </a:fillRef>
+          <a:effectRef idx="2">
+            <a:schemeClr val="accent1"/>
+          </a:effectRef>
+          <a:fontRef idx="minor">
+            <a:schemeClr val="lt1"/>
+          </a:fontRef>
+        </p:style>
+        <p:txBody>
+          <a:bodyPr rtlCol="0" anchor="ctr"/>
+          <a:lstStyle/>
+          <a:p/>
+        </p:txBody>
+      </p:sp>
+      <p:sp>
+        <p:nvSpPr>
+          <p:cNvPr id="22" name="TextBox 21"/>
+          <p:cNvSpPr txBox="1"/>
+          <p:nvPr/>
+        </p:nvSpPr>
+        <p:spPr>
+          <a:xfrm>
+            <a:off x="9143771" y="5312664"/>
+            <a:ext cx="2334691" cy="201168"/>
+          </a:xfrm>
+          <a:prstGeom prst="rect">
+            <a:avLst/>
+          </a:prstGeom>
+          <a:noFill/>
+        </p:spPr>
+        <p:txBody>
+          <a:bodyPr wrap="square" anchor="t" lIns="0" rIns="0" tIns="0" bIns="0">
+            <a:spAutoFit/>
+          </a:bodyPr>
+          <a:lstStyle/>
+          <a:p>
+            <a:pPr algn="l">
+              <a:lnSpc>
+                <a:spcPct val="118000"/>
+              </a:lnSpc>
+              <a:spcAft>
+                <a:spcPts val="0"/>
+              </a:spcAft>
+            </a:pPr>
+            <a:r>
+              <a:rPr sz="850" b="1">
+                <a:solidFill>
+                  <a:srgbClr val="B91C1C"/>
+                </a:solidFill>
+                <a:latin typeface="Inter"/>
+              </a:rPr>
+              <a:t>KNOWN BIAS</a:t>
+            </a:r>
+          </a:p>
+        </p:txBody>
+      </p:sp>
+      <p:sp>
+        <p:nvSpPr>
+          <p:cNvPr id="23" name="TextBox 22"/>
+          <p:cNvSpPr txBox="1"/>
+          <p:nvPr/>
+        </p:nvSpPr>
+        <p:spPr>
+          <a:xfrm>
+            <a:off x="9143771" y="5541264"/>
+            <a:ext cx="2334691" cy="768096"/>
+          </a:xfrm>
+          <a:prstGeom prst="rect">
+            <a:avLst/>
+          </a:prstGeom>
+          <a:noFill/>
+        </p:spPr>
+        <p:txBody>
+          <a:bodyPr wrap="square" anchor="t" lIns="0" rIns="0" tIns="0" bIns="0">
+            <a:spAutoFit/>
+          </a:bodyPr>
+          <a:lstStyle/>
+          <a:p>
+            <a:pPr algn="l">
+              <a:lnSpc>
+                <a:spcPct val="120000"/>
+              </a:lnSpc>
+              <a:spcAft>
+                <a:spcPts val="0"/>
+              </a:spcAft>
+            </a:pPr>
+            <a:r>
+              <a:rPr sz="840" b="0">
+                <a:solidFill>
+                  <a:srgbClr val="0F172A"/>
+                </a:solidFill>
+                <a:latin typeface="Inter"/>
+              </a:rPr>
+              <a:t>Trained on one pack with one chronic defect (cell_v1), so generalisation is unproven. The datasheet configurator and in-browser retraining are the mitigation. Telemetry stays in the operator's own instance.</a:t>
             </a:r>
           </a:p>
         </p:txBody>

--- a/AI_PBMS_8Slide.pptx
+++ b/AI_PBMS_8Slide.pptx
@@ -632,12 +632,22 @@
           <a:lstStyle/>
           <a:p>
             <a:r>
-              <a:t>Cost first. The unit we built is a Raspberry Pi, an Arduino, a JBD BMS and the</a:t>
-            </a:r>
-          </a:p>
-          <a:p>
-            <a:r>
-              <a:t>cells — a retrofit box that sits alongside a pack already in service, with no</a:t>
+              <a:t>Cost first. The unit we built is a Raspberry Pi 5 with its cooler and supply at</a:t>
+            </a:r>
+          </a:p>
+          <a:p>
+            <a:r>
+              <a:t>fifteen thousand rupees, and the 8S2P pack with its JBD BMS — bought together at</a:t>
+            </a:r>
+          </a:p>
+          <a:p>
+            <a:r>
+              <a:t>thirteen thousand, thermistors included. Add the harness and enclosure and that</a:t>
+            </a:r>
+          </a:p>
+          <a:p>
+            <a:r>
+              <a:t>is the whole retrofit box: it sits alongside a pack already in service, with no</a:t>
             </a:r>
           </a:p>
           <a:p>
@@ -1377,17 +1387,22 @@
           </a:p>
           <a:p>
             <a:r>
-              <a:t>protection logic switching the MOSFETs at the pack, and the Arduino watchdog that</a:t>
-            </a:r>
-          </a:p>
-          <a:p>
-            <a:r>
-              <a:t>resets the Pi. If every line of our software failed, that lane still opens the</a:t>
-            </a:r>
-          </a:p>
-          <a:p>
-            <a:r>
-              <a:t>contactor. And the honest caveat, bottom right: this model has seen one physical</a:t>
+              <a:t>protection logic switching the MOSFETs at the pack. If every line of our</a:t>
+            </a:r>
+          </a:p>
+          <a:p>
+            <a:r>
+              <a:t>software failed, that lane still opens the</a:t>
+            </a:r>
+          </a:p>
+          <a:p>
+            <a:r>
+              <a:t>contactor. That lane is the BMS's own protection logic, not something we wrote.</a:t>
+            </a:r>
+          </a:p>
+          <a:p>
+            <a:r>
+              <a:t>And the honest caveat, bottom right: this model has seen one physical</a:t>
             </a:r>
           </a:p>
           <a:p>
@@ -1477,42 +1492,57 @@
           <a:lstStyle/>
           <a:p>
             <a:r>
-              <a:t>Three tiers, each doing what the others cannot. The BMS senses, the Pi 5 runs</a:t>
-            </a:r>
-          </a:p>
-          <a:p>
-            <a:r>
-              <a:t>the logger and the inference, and an Arduino on its own power</a:t>
-            </a:r>
-          </a:p>
-          <a:p>
-            <a:r>
-              <a:t>rail watches for a heartbeat — if it stops, it pulls the Pi's RUN pin and forces</a:t>
-            </a:r>
-          </a:p>
-          <a:p>
-            <a:r>
-              <a:t>a reset. Inference sits at the edge deliberately: push it to a server and every</a:t>
-            </a:r>
-          </a:p>
-          <a:p>
-            <a:r>
-              <a:t>network hiccup becomes an unmonitored window. The lower diagram is the whole</a:t>
-            </a:r>
-          </a:p>
-          <a:p>
-            <a:r>
-              <a:t>data path. Inference happens on the Pi; the dashboard is a Flask service</a:t>
-            </a:r>
-          </a:p>
-          <a:p>
-            <a:r>
-              <a:t>deployed on Railway, and the Pi pushes results up to it. Because the Pi only ever</a:t>
-            </a:r>
-          </a:p>
-          <a:p>
-            <a:r>
-              <a:t>dials out, we never open an inbound port on the pack itself.</a:t>
+              <a:t>Two tiers at the edge, and I want to be precise about what exists. The JBD BMS</a:t>
+            </a:r>
+          </a:p>
+          <a:p>
+            <a:r>
+              <a:t>is the sensing layer — eight cell taps, four thermistors, pack voltage and</a:t>
+            </a:r>
+          </a:p>
+          <a:p>
+            <a:r>
+              <a:t>current. The Raspberry Pi 5 is the inference layer: it runs the logger, the</a:t>
+            </a:r>
+          </a:p>
+          <a:p>
+            <a:r>
+              <a:t>feature engineering and the classifier. That is what is built and that is what</a:t>
+            </a:r>
+          </a:p>
+          <a:p>
+            <a:r>
+              <a:t>you will see in the demo. Inference sits on the Pi deliberately — push it to a</a:t>
+            </a:r>
+          </a:p>
+          <a:p>
+            <a:r>
+              <a:t>server and every network hiccup becomes a window where the pack is unmonitored.</a:t>
+            </a:r>
+          </a:p>
+          <a:p>
+            <a:r>
+              <a:t>A third tier, an independent hardware watchdog on its own power rail, is</a:t>
+            </a:r>
+          </a:p>
+          <a:p>
+            <a:r>
+              <a:t>specified and on our roadmap, but we have not built it, so it is not in this</a:t>
+            </a:r>
+          </a:p>
+          <a:p>
+            <a:r>
+              <a:t>architecture. The lower diagram is the whole data path: the Pi pushes results up</a:t>
+            </a:r>
+          </a:p>
+          <a:p>
+            <a:r>
+              <a:t>to a Flask dashboard on Railway, and because the Pi only ever dials out we never</a:t>
+            </a:r>
+          </a:p>
+          <a:p>
+            <a:r>
+              <a:t>open an inbound port on the pack.</a:t>
             </a:r>
           </a:p>
         </p:txBody>
@@ -1717,17 +1747,27 @@
           </a:p>
           <a:p>
             <a:r>
-              <a:t>can retrain on your own field telemetry from the browser. What is not finished:</a:t>
-            </a:r>
-          </a:p>
-          <a:p>
-            <a:r>
-              <a:t>imbalance recall, OOD recall, the Zynq path, a real LFP bench, and state of</a:t>
-            </a:r>
-          </a:p>
-          <a:p>
-            <a:r>
-              <a:t>health. Thank you — happy to take questions.</a:t>
+              <a:t>can retrain on your own field telemetry from the browser. What is not finished,</a:t>
+            </a:r>
+          </a:p>
+          <a:p>
+            <a:r>
+              <a:t>and I want to be straight about it: imbalance recall, unknown-fault recall, the</a:t>
+            </a:r>
+          </a:p>
+          <a:p>
+            <a:r>
+              <a:t>independent hardware watchdog on its own rail — designed and specified but not</a:t>
+            </a:r>
+          </a:p>
+          <a:p>
+            <a:r>
+              <a:t>yet built — the Zynq path, a real LFP bench, and state of health. Thank you,</a:t>
+            </a:r>
+          </a:p>
+          <a:p>
+            <a:r>
+              <a:t>happy to take questions.</a:t>
             </a:r>
           </a:p>
         </p:txBody>
@@ -6806,8 +6846,8 @@
         </p:nvSpPr>
         <p:spPr>
           <a:xfrm>
-            <a:off x="603504" y="1719072"/>
-            <a:ext cx="4242816" cy="219456"/>
+            <a:off x="603504" y="1737360"/>
+            <a:ext cx="4242816" cy="237744"/>
           </a:xfrm>
           <a:prstGeom prst="rect">
             <a:avLst/>
@@ -6829,13 +6869,13 @@
               </a:spcAft>
             </a:pPr>
             <a:r>
-              <a:rPr sz="1100" b="0">
+              <a:rPr sz="1150" b="0">
                 <a:solidFill>
                   <a:srgbClr val="0F172A"/>
                 </a:solidFill>
                 <a:latin typeface="Inter"/>
               </a:rPr>
-              <a:t>Raspberry Pi 5 (8 GB) + cooler</a:t>
+              <a:t>Raspberry Pi 5 (8 GB) + cooler + PSU</a:t>
             </a:r>
           </a:p>
         </p:txBody>
@@ -6848,8 +6888,8 @@
         </p:nvSpPr>
         <p:spPr>
           <a:xfrm>
-            <a:off x="4846320" y="1719072"/>
-            <a:ext cx="1481328" cy="219456"/>
+            <a:off x="4846320" y="1737360"/>
+            <a:ext cx="1481328" cy="237744"/>
           </a:xfrm>
           <a:prstGeom prst="rect">
             <a:avLst/>
@@ -6871,13 +6911,13 @@
               </a:spcAft>
             </a:pPr>
             <a:r>
-              <a:rPr sz="1100" b="1">
+              <a:rPr sz="1150" b="1">
                 <a:solidFill>
                   <a:srgbClr val="B45309"/>
                 </a:solidFill>
                 <a:latin typeface="Inter"/>
               </a:rPr>
-              <a:t>[FILL: ₹...]</a:t>
+              <a:t>₹15,000</a:t>
             </a:r>
           </a:p>
         </p:txBody>
@@ -6890,7 +6930,7 @@
         </p:nvSpPr>
         <p:spPr>
           <a:xfrm>
-            <a:off x="566928" y="1956816"/>
+            <a:off x="566928" y="2002536"/>
             <a:ext cx="5797296" cy="7315"/>
           </a:xfrm>
           <a:prstGeom prst="rect">
@@ -6932,8 +6972,8 @@
         </p:nvSpPr>
         <p:spPr>
           <a:xfrm>
-            <a:off x="603504" y="2029968"/>
-            <a:ext cx="4242816" cy="219456"/>
+            <a:off x="603504" y="2121408"/>
+            <a:ext cx="4242816" cy="237744"/>
           </a:xfrm>
           <a:prstGeom prst="rect">
             <a:avLst/>
@@ -6955,13 +6995,13 @@
               </a:spcAft>
             </a:pPr>
             <a:r>
-              <a:rPr sz="1100" b="0">
+              <a:rPr sz="1150" b="0">
                 <a:solidFill>
                   <a:srgbClr val="0F172A"/>
                 </a:solidFill>
                 <a:latin typeface="Inter"/>
               </a:rPr>
-              <a:t>Arduino Uno R4 WiFi watchdog</a:t>
+              <a:t>8S2P NMC pack + JBD 8S BMS (NTCs included)</a:t>
             </a:r>
           </a:p>
         </p:txBody>
@@ -6974,8 +7014,8 @@
         </p:nvSpPr>
         <p:spPr>
           <a:xfrm>
-            <a:off x="4846320" y="2029968"/>
-            <a:ext cx="1481328" cy="219456"/>
+            <a:off x="4846320" y="2121408"/>
+            <a:ext cx="1481328" cy="237744"/>
           </a:xfrm>
           <a:prstGeom prst="rect">
             <a:avLst/>
@@ -6997,13 +7037,13 @@
               </a:spcAft>
             </a:pPr>
             <a:r>
-              <a:rPr sz="1100" b="1">
+              <a:rPr sz="1150" b="1">
                 <a:solidFill>
                   <a:srgbClr val="B45309"/>
                 </a:solidFill>
                 <a:latin typeface="Inter"/>
               </a:rPr>
-              <a:t>[FILL: ₹...]</a:t>
+              <a:t>₹13,000</a:t>
             </a:r>
           </a:p>
         </p:txBody>
@@ -7016,7 +7056,7 @@
         </p:nvSpPr>
         <p:spPr>
           <a:xfrm>
-            <a:off x="566928" y="2267712"/>
+            <a:off x="566928" y="2386584"/>
             <a:ext cx="5797296" cy="7315"/>
           </a:xfrm>
           <a:prstGeom prst="rect">
@@ -7058,8 +7098,8 @@
         </p:nvSpPr>
         <p:spPr>
           <a:xfrm>
-            <a:off x="603504" y="2340864"/>
-            <a:ext cx="4242816" cy="219456"/>
+            <a:off x="603504" y="2505456"/>
+            <a:ext cx="4242816" cy="237744"/>
           </a:xfrm>
           <a:prstGeom prst="rect">
             <a:avLst/>
@@ -7081,13 +7121,13 @@
               </a:spcAft>
             </a:pPr>
             <a:r>
-              <a:rPr sz="1100" b="0">
+              <a:rPr sz="1150" b="0">
                 <a:solidFill>
                   <a:srgbClr val="0F172A"/>
                 </a:solidFill>
                 <a:latin typeface="Inter"/>
               </a:rPr>
-              <a:t>JBD SP24S007 BMS, 8S</a:t>
+              <a:t>Harness, enclosure</a:t>
             </a:r>
           </a:p>
         </p:txBody>
@@ -7100,8 +7140,8 @@
         </p:nvSpPr>
         <p:spPr>
           <a:xfrm>
-            <a:off x="4846320" y="2340864"/>
-            <a:ext cx="1481328" cy="219456"/>
+            <a:off x="4846320" y="2505456"/>
+            <a:ext cx="1481328" cy="237744"/>
           </a:xfrm>
           <a:prstGeom prst="rect">
             <a:avLst/>
@@ -7123,7 +7163,7 @@
               </a:spcAft>
             </a:pPr>
             <a:r>
-              <a:rPr sz="1100" b="1">
+              <a:rPr sz="1150" b="1">
                 <a:solidFill>
                   <a:srgbClr val="B45309"/>
                 </a:solidFill>
@@ -7142,7 +7182,7 @@
         </p:nvSpPr>
         <p:spPr>
           <a:xfrm>
-            <a:off x="566928" y="2578608"/>
+            <a:off x="566928" y="2770632"/>
             <a:ext cx="5797296" cy="7315"/>
           </a:xfrm>
           <a:prstGeom prst="rect">
@@ -7178,266 +7218,14 @@
       </p:sp>
       <p:sp>
         <p:nvSpPr>
-          <p:cNvPr id="17" name="TextBox 16"/>
-          <p:cNvSpPr txBox="1"/>
-          <p:nvPr/>
-        </p:nvSpPr>
-        <p:spPr>
-          <a:xfrm>
-            <a:off x="603504" y="2651760"/>
-            <a:ext cx="4242816" cy="219456"/>
-          </a:xfrm>
-          <a:prstGeom prst="rect">
-            <a:avLst/>
-          </a:prstGeom>
-          <a:noFill/>
-        </p:spPr>
-        <p:txBody>
-          <a:bodyPr wrap="square" anchor="t" lIns="0" rIns="0" tIns="0" bIns="0">
-            <a:spAutoFit/>
-          </a:bodyPr>
-          <a:lstStyle/>
-          <a:p>
-            <a:pPr algn="l">
-              <a:lnSpc>
-                <a:spcPct val="118000"/>
-              </a:lnSpc>
-              <a:spcAft>
-                <a:spcPts val="0"/>
-              </a:spcAft>
-            </a:pPr>
-            <a:r>
-              <a:rPr sz="1100" b="0">
-                <a:solidFill>
-                  <a:srgbClr val="0F172A"/>
-                </a:solidFill>
-                <a:latin typeface="Inter"/>
-              </a:rPr>
-              <a:t>16 × LG INR21700-M50 cells</a:t>
-            </a:r>
-          </a:p>
-        </p:txBody>
-      </p:sp>
-      <p:sp>
-        <p:nvSpPr>
-          <p:cNvPr id="18" name="TextBox 17"/>
-          <p:cNvSpPr txBox="1"/>
-          <p:nvPr/>
-        </p:nvSpPr>
-        <p:spPr>
-          <a:xfrm>
-            <a:off x="4846320" y="2651760"/>
-            <a:ext cx="1481328" cy="219456"/>
-          </a:xfrm>
-          <a:prstGeom prst="rect">
-            <a:avLst/>
-          </a:prstGeom>
-          <a:noFill/>
-        </p:spPr>
-        <p:txBody>
-          <a:bodyPr wrap="square" anchor="t" lIns="0" rIns="0" tIns="0" bIns="0">
-            <a:spAutoFit/>
-          </a:bodyPr>
-          <a:lstStyle/>
-          <a:p>
-            <a:pPr algn="r">
-              <a:lnSpc>
-                <a:spcPct val="118000"/>
-              </a:lnSpc>
-              <a:spcAft>
-                <a:spcPts val="0"/>
-              </a:spcAft>
-            </a:pPr>
-            <a:r>
-              <a:rPr sz="1100" b="1">
-                <a:solidFill>
-                  <a:srgbClr val="B45309"/>
-                </a:solidFill>
-                <a:latin typeface="Inter"/>
-              </a:rPr>
-              <a:t>[FILL: ₹...]</a:t>
-            </a:r>
-          </a:p>
-        </p:txBody>
-      </p:sp>
-      <p:sp>
-        <p:nvSpPr>
-          <p:cNvPr id="19" name="Rectangle 18"/>
+          <p:cNvPr id="17" name="Rectangle 16"/>
           <p:cNvSpPr/>
           <p:nvPr/>
         </p:nvSpPr>
         <p:spPr>
           <a:xfrm>
-            <a:off x="566928" y="2889504"/>
-            <a:ext cx="5797296" cy="7315"/>
-          </a:xfrm>
-          <a:prstGeom prst="rect">
-            <a:avLst/>
-          </a:prstGeom>
-          <a:solidFill>
-            <a:srgbClr val="CBD5E1"/>
-          </a:solidFill>
-          <a:ln>
-            <a:noFill/>
-          </a:ln>
-          <a:effectLst/>
-        </p:spPr>
-        <p:style>
-          <a:lnRef idx="1">
-            <a:schemeClr val="accent1"/>
-          </a:lnRef>
-          <a:fillRef idx="3">
-            <a:schemeClr val="accent1"/>
-          </a:fillRef>
-          <a:effectRef idx="2">
-            <a:schemeClr val="accent1"/>
-          </a:effectRef>
-          <a:fontRef idx="minor">
-            <a:schemeClr val="lt1"/>
-          </a:fontRef>
-        </p:style>
-        <p:txBody>
-          <a:bodyPr rtlCol="0" anchor="ctr"/>
-          <a:lstStyle/>
-          <a:p/>
-        </p:txBody>
-      </p:sp>
-      <p:sp>
-        <p:nvSpPr>
-          <p:cNvPr id="20" name="TextBox 19"/>
-          <p:cNvSpPr txBox="1"/>
-          <p:nvPr/>
-        </p:nvSpPr>
-        <p:spPr>
-          <a:xfrm>
-            <a:off x="603504" y="2962656"/>
-            <a:ext cx="4242816" cy="219456"/>
-          </a:xfrm>
-          <a:prstGeom prst="rect">
-            <a:avLst/>
-          </a:prstGeom>
-          <a:noFill/>
-        </p:spPr>
-        <p:txBody>
-          <a:bodyPr wrap="square" anchor="t" lIns="0" rIns="0" tIns="0" bIns="0">
-            <a:spAutoFit/>
-          </a:bodyPr>
-          <a:lstStyle/>
-          <a:p>
-            <a:pPr algn="l">
-              <a:lnSpc>
-                <a:spcPct val="118000"/>
-              </a:lnSpc>
-              <a:spcAft>
-                <a:spcPts val="0"/>
-              </a:spcAft>
-            </a:pPr>
-            <a:r>
-              <a:rPr sz="1100" b="0">
-                <a:solidFill>
-                  <a:srgbClr val="0F172A"/>
-                </a:solidFill>
-                <a:latin typeface="Inter"/>
-              </a:rPr>
-              <a:t>Harness, NTCs, enclosure</a:t>
-            </a:r>
-          </a:p>
-        </p:txBody>
-      </p:sp>
-      <p:sp>
-        <p:nvSpPr>
-          <p:cNvPr id="21" name="TextBox 20"/>
-          <p:cNvSpPr txBox="1"/>
-          <p:nvPr/>
-        </p:nvSpPr>
-        <p:spPr>
-          <a:xfrm>
-            <a:off x="4846320" y="2962656"/>
-            <a:ext cx="1481328" cy="219456"/>
-          </a:xfrm>
-          <a:prstGeom prst="rect">
-            <a:avLst/>
-          </a:prstGeom>
-          <a:noFill/>
-        </p:spPr>
-        <p:txBody>
-          <a:bodyPr wrap="square" anchor="t" lIns="0" rIns="0" tIns="0" bIns="0">
-            <a:spAutoFit/>
-          </a:bodyPr>
-          <a:lstStyle/>
-          <a:p>
-            <a:pPr algn="r">
-              <a:lnSpc>
-                <a:spcPct val="118000"/>
-              </a:lnSpc>
-              <a:spcAft>
-                <a:spcPts val="0"/>
-              </a:spcAft>
-            </a:pPr>
-            <a:r>
-              <a:rPr sz="1100" b="1">
-                <a:solidFill>
-                  <a:srgbClr val="B45309"/>
-                </a:solidFill>
-                <a:latin typeface="Inter"/>
-              </a:rPr>
-              <a:t>[FILL: ₹...]</a:t>
-            </a:r>
-          </a:p>
-        </p:txBody>
-      </p:sp>
-      <p:sp>
-        <p:nvSpPr>
-          <p:cNvPr id="22" name="Rectangle 21"/>
-          <p:cNvSpPr/>
-          <p:nvPr/>
-        </p:nvSpPr>
-        <p:spPr>
-          <a:xfrm>
-            <a:off x="566928" y="3200400"/>
-            <a:ext cx="5797296" cy="7315"/>
-          </a:xfrm>
-          <a:prstGeom prst="rect">
-            <a:avLst/>
-          </a:prstGeom>
-          <a:solidFill>
-            <a:srgbClr val="CBD5E1"/>
-          </a:solidFill>
-          <a:ln>
-            <a:noFill/>
-          </a:ln>
-          <a:effectLst/>
-        </p:spPr>
-        <p:style>
-          <a:lnRef idx="1">
-            <a:schemeClr val="accent1"/>
-          </a:lnRef>
-          <a:fillRef idx="3">
-            <a:schemeClr val="accent1"/>
-          </a:fillRef>
-          <a:effectRef idx="2">
-            <a:schemeClr val="accent1"/>
-          </a:effectRef>
-          <a:fontRef idx="minor">
-            <a:schemeClr val="lt1"/>
-          </a:fontRef>
-        </p:style>
-        <p:txBody>
-          <a:bodyPr rtlCol="0" anchor="ctr"/>
-          <a:lstStyle/>
-          <a:p/>
-        </p:txBody>
-      </p:sp>
-      <p:sp>
-        <p:nvSpPr>
-          <p:cNvPr id="23" name="Rectangle 22"/>
-          <p:cNvSpPr/>
-          <p:nvPr/>
-        </p:nvSpPr>
-        <p:spPr>
-          <a:xfrm>
-            <a:off x="566928" y="3291839"/>
-            <a:ext cx="5797296" cy="365760"/>
+            <a:off x="566928" y="2944368"/>
+            <a:ext cx="5797296" cy="438912"/>
           </a:xfrm>
           <a:prstGeom prst="rect">
             <a:avLst/>
@@ -7474,13 +7262,13 @@
       </p:sp>
       <p:sp>
         <p:nvSpPr>
-          <p:cNvPr id="24" name="TextBox 23"/>
-          <p:cNvSpPr txBox="1"/>
-          <p:nvPr/>
-        </p:nvSpPr>
-        <p:spPr>
-          <a:xfrm>
-            <a:off x="603504" y="3355847"/>
+          <p:cNvPr id="18" name="TextBox 17"/>
+          <p:cNvSpPr txBox="1"/>
+          <p:nvPr/>
+        </p:nvSpPr>
+        <p:spPr>
+          <a:xfrm>
+            <a:off x="603504" y="3044952"/>
             <a:ext cx="4242816" cy="237744"/>
           </a:xfrm>
           <a:prstGeom prst="rect">
@@ -7503,7 +7291,7 @@
               </a:spcAft>
             </a:pPr>
             <a:r>
-              <a:rPr sz="1100" b="1">
+              <a:rPr sz="1150" b="1">
                 <a:solidFill>
                   <a:srgbClr val="0F172A"/>
                 </a:solidFill>
@@ -7516,13 +7304,13 @@
       </p:sp>
       <p:sp>
         <p:nvSpPr>
-          <p:cNvPr id="25" name="TextBox 24"/>
-          <p:cNvSpPr txBox="1"/>
-          <p:nvPr/>
-        </p:nvSpPr>
-        <p:spPr>
-          <a:xfrm>
-            <a:off x="4846320" y="3355847"/>
+          <p:cNvPr id="19" name="TextBox 18"/>
+          <p:cNvSpPr txBox="1"/>
+          <p:nvPr/>
+        </p:nvSpPr>
+        <p:spPr>
+          <a:xfrm>
+            <a:off x="4846320" y="3044952"/>
             <a:ext cx="1481328" cy="237744"/>
           </a:xfrm>
           <a:prstGeom prst="rect">
@@ -7545,7 +7333,7 @@
               </a:spcAft>
             </a:pPr>
             <a:r>
-              <a:rPr sz="1100" b="1">
+              <a:rPr sz="1150" b="1">
                 <a:solidFill>
                   <a:srgbClr val="B91C1C"/>
                 </a:solidFill>
@@ -7558,13 +7346,13 @@
       </p:sp>
       <p:sp>
         <p:nvSpPr>
-          <p:cNvPr id="26" name="TextBox 25"/>
-          <p:cNvSpPr txBox="1"/>
-          <p:nvPr/>
-        </p:nvSpPr>
-        <p:spPr>
-          <a:xfrm>
-            <a:off x="566928" y="3968496"/>
+          <p:cNvPr id="20" name="TextBox 19"/>
+          <p:cNvSpPr txBox="1"/>
+          <p:nvPr/>
+        </p:nvSpPr>
+        <p:spPr>
+          <a:xfrm>
+            <a:off x="566928" y="3602736"/>
             <a:ext cx="5797296" cy="219456"/>
           </a:xfrm>
           <a:prstGeom prst="rect">
@@ -7600,14 +7388,14 @@
       </p:sp>
       <p:sp>
         <p:nvSpPr>
-          <p:cNvPr id="27" name="Rectangle 26"/>
+          <p:cNvPr id="21" name="Rectangle 20"/>
           <p:cNvSpPr/>
           <p:nvPr/>
         </p:nvSpPr>
         <p:spPr>
           <a:xfrm>
-            <a:off x="566928" y="4224528"/>
-            <a:ext cx="2807208" cy="932688"/>
+            <a:off x="566928" y="3877056"/>
+            <a:ext cx="2807208" cy="1335024"/>
           </a:xfrm>
           <a:prstGeom prst="rect">
             <a:avLst/>
@@ -7644,13 +7432,13 @@
       </p:sp>
       <p:sp>
         <p:nvSpPr>
-          <p:cNvPr id="28" name="TextBox 27"/>
-          <p:cNvSpPr txBox="1"/>
-          <p:nvPr/>
-        </p:nvSpPr>
-        <p:spPr>
-          <a:xfrm>
-            <a:off x="713232" y="4315968"/>
+          <p:cNvPr id="22" name="TextBox 21"/>
+          <p:cNvSpPr txBox="1"/>
+          <p:nvPr/>
+        </p:nvSpPr>
+        <p:spPr>
+          <a:xfrm>
+            <a:off x="713232" y="4023360"/>
             <a:ext cx="2514600" cy="219456"/>
           </a:xfrm>
           <a:prstGeom prst="rect">
@@ -7686,14 +7474,14 @@
       </p:sp>
       <p:sp>
         <p:nvSpPr>
-          <p:cNvPr id="29" name="TextBox 28"/>
-          <p:cNvSpPr txBox="1"/>
-          <p:nvPr/>
-        </p:nvSpPr>
-        <p:spPr>
-          <a:xfrm>
-            <a:off x="713232" y="4553712"/>
-            <a:ext cx="2514600" cy="548640"/>
+          <p:cNvPr id="23" name="TextBox 22"/>
+          <p:cNvSpPr txBox="1"/>
+          <p:nvPr/>
+        </p:nvSpPr>
+        <p:spPr>
+          <a:xfrm>
+            <a:off x="713232" y="4279392"/>
+            <a:ext cx="2514600" cy="804672"/>
           </a:xfrm>
           <a:prstGeom prst="rect">
             <a:avLst/>
@@ -7708,7 +7496,7 @@
           <a:p>
             <a:pPr algn="l">
               <a:lnSpc>
-                <a:spcPct val="122000"/>
+                <a:spcPct val="126000"/>
               </a:lnSpc>
               <a:spcAft>
                 <a:spcPts val="0"/>
@@ -7729,14 +7517,14 @@
       </p:sp>
       <p:sp>
         <p:nvSpPr>
-          <p:cNvPr id="30" name="Rectangle 29"/>
+          <p:cNvPr id="24" name="Rectangle 23"/>
           <p:cNvSpPr/>
           <p:nvPr/>
         </p:nvSpPr>
         <p:spPr>
           <a:xfrm>
-            <a:off x="3557016" y="4224528"/>
-            <a:ext cx="2807208" cy="932688"/>
+            <a:off x="3557016" y="3877056"/>
+            <a:ext cx="2807208" cy="1335024"/>
           </a:xfrm>
           <a:prstGeom prst="rect">
             <a:avLst/>
@@ -7773,13 +7561,13 @@
       </p:sp>
       <p:sp>
         <p:nvSpPr>
-          <p:cNvPr id="31" name="TextBox 30"/>
-          <p:cNvSpPr txBox="1"/>
-          <p:nvPr/>
-        </p:nvSpPr>
-        <p:spPr>
-          <a:xfrm>
-            <a:off x="3703320" y="4315968"/>
+          <p:cNvPr id="25" name="TextBox 24"/>
+          <p:cNvSpPr txBox="1"/>
+          <p:nvPr/>
+        </p:nvSpPr>
+        <p:spPr>
+          <a:xfrm>
+            <a:off x="3703320" y="4023360"/>
             <a:ext cx="2514600" cy="219456"/>
           </a:xfrm>
           <a:prstGeom prst="rect">
@@ -7815,14 +7603,14 @@
       </p:sp>
       <p:sp>
         <p:nvSpPr>
-          <p:cNvPr id="32" name="TextBox 31"/>
-          <p:cNvSpPr txBox="1"/>
-          <p:nvPr/>
-        </p:nvSpPr>
-        <p:spPr>
-          <a:xfrm>
-            <a:off x="3703320" y="4553712"/>
-            <a:ext cx="2514600" cy="548640"/>
+          <p:cNvPr id="26" name="TextBox 25"/>
+          <p:cNvSpPr txBox="1"/>
+          <p:nvPr/>
+        </p:nvSpPr>
+        <p:spPr>
+          <a:xfrm>
+            <a:off x="3703320" y="4279392"/>
+            <a:ext cx="2514600" cy="804672"/>
           </a:xfrm>
           <a:prstGeom prst="rect">
             <a:avLst/>
@@ -7837,7 +7625,7 @@
           <a:p>
             <a:pPr algn="l">
               <a:lnSpc>
-                <a:spcPct val="122000"/>
+                <a:spcPct val="126000"/>
               </a:lnSpc>
               <a:spcAft>
                 <a:spcPts val="0"/>
@@ -7858,92 +7646,7 @@
       </p:sp>
       <p:sp>
         <p:nvSpPr>
-          <p:cNvPr id="33" name="TextBox 32"/>
-          <p:cNvSpPr txBox="1"/>
-          <p:nvPr/>
-        </p:nvSpPr>
-        <p:spPr>
-          <a:xfrm>
-            <a:off x="566928" y="5321808"/>
-            <a:ext cx="5797296" cy="219456"/>
-          </a:xfrm>
-          <a:prstGeom prst="rect">
-            <a:avLst/>
-          </a:prstGeom>
-          <a:noFill/>
-        </p:spPr>
-        <p:txBody>
-          <a:bodyPr wrap="square" anchor="t" lIns="0" rIns="0" tIns="0" bIns="0">
-            <a:spAutoFit/>
-          </a:bodyPr>
-          <a:lstStyle/>
-          <a:p>
-            <a:pPr algn="l">
-              <a:lnSpc>
-                <a:spcPct val="118000"/>
-              </a:lnSpc>
-              <a:spcAft>
-                <a:spcPts val="0"/>
-              </a:spcAft>
-            </a:pPr>
-            <a:r>
-              <a:rPr sz="950" b="1">
-                <a:solidFill>
-                  <a:srgbClr val="B91C1C"/>
-                </a:solidFill>
-                <a:latin typeface="Inter"/>
-              </a:rPr>
-              <a:t>WHO PAYS</a:t>
-            </a:r>
-          </a:p>
-        </p:txBody>
-      </p:sp>
-      <p:sp>
-        <p:nvSpPr>
-          <p:cNvPr id="34" name="TextBox 33"/>
-          <p:cNvSpPr txBox="1"/>
-          <p:nvPr/>
-        </p:nvSpPr>
-        <p:spPr>
-          <a:xfrm>
-            <a:off x="566928" y="5577840"/>
-            <a:ext cx="5797296" cy="566928"/>
-          </a:xfrm>
-          <a:prstGeom prst="rect">
-            <a:avLst/>
-          </a:prstGeom>
-          <a:noFill/>
-        </p:spPr>
-        <p:txBody>
-          <a:bodyPr wrap="square" anchor="t" lIns="0" rIns="0" tIns="0" bIns="0">
-            <a:spAutoFit/>
-          </a:bodyPr>
-          <a:lstStyle/>
-          <a:p>
-            <a:pPr algn="l">
-              <a:lnSpc>
-                <a:spcPct val="140000"/>
-              </a:lnSpc>
-              <a:spcAft>
-                <a:spcPts val="0"/>
-              </a:spcAft>
-            </a:pPr>
-            <a:r>
-              <a:rPr sz="1050" b="0">
-                <a:solidFill>
-                  <a:srgbClr val="0F172A"/>
-                </a:solidFill>
-                <a:latin typeface="Inter"/>
-              </a:rPr>
-              <a:t>Fleet operator — avoids an early pack replacement  [FILL: ₹ per pack]
-OEM — fewer warranty claims per 1,000 packs  [FILL: ₹ or % exposure]</a:t>
-            </a:r>
-          </a:p>
-        </p:txBody>
-      </p:sp>
-      <p:sp>
-        <p:nvSpPr>
-          <p:cNvPr id="35" name="TextBox 34"/>
+          <p:cNvPr id="27" name="TextBox 26"/>
           <p:cNvSpPr txBox="1"/>
           <p:nvPr/>
         </p:nvSpPr>
@@ -7985,14 +7688,14 @@
       </p:sp>
       <p:sp>
         <p:nvSpPr>
-          <p:cNvPr id="36" name="Rectangle 35"/>
+          <p:cNvPr id="28" name="Rectangle 27"/>
           <p:cNvSpPr/>
           <p:nvPr/>
         </p:nvSpPr>
         <p:spPr>
           <a:xfrm>
-            <a:off x="6693408" y="1719072"/>
-            <a:ext cx="4931359" cy="566928"/>
+            <a:off x="6693408" y="1700784"/>
+            <a:ext cx="4931359" cy="512064"/>
           </a:xfrm>
           <a:prstGeom prst="rect">
             <a:avLst/>
@@ -8029,14 +7732,14 @@
       </p:sp>
       <p:sp>
         <p:nvSpPr>
-          <p:cNvPr id="37" name="TextBox 36"/>
-          <p:cNvSpPr txBox="1"/>
-          <p:nvPr/>
-        </p:nvSpPr>
-        <p:spPr>
-          <a:xfrm>
-            <a:off x="6775704" y="1719072"/>
-            <a:ext cx="1120047" cy="566928"/>
+          <p:cNvPr id="29" name="TextBox 28"/>
+          <p:cNvSpPr txBox="1"/>
+          <p:nvPr/>
+        </p:nvSpPr>
+        <p:spPr>
+          <a:xfrm>
+            <a:off x="6775704" y="1700784"/>
+            <a:ext cx="1120047" cy="512064"/>
           </a:xfrm>
           <a:prstGeom prst="rect">
             <a:avLst/>
@@ -8071,14 +7774,14 @@
       </p:sp>
       <p:sp>
         <p:nvSpPr>
-          <p:cNvPr id="38" name="TextBox 37"/>
-          <p:cNvSpPr txBox="1"/>
-          <p:nvPr/>
-        </p:nvSpPr>
-        <p:spPr>
-          <a:xfrm>
-            <a:off x="8060343" y="1719072"/>
-            <a:ext cx="622767" cy="566928"/>
+          <p:cNvPr id="30" name="TextBox 29"/>
+          <p:cNvSpPr txBox="1"/>
+          <p:nvPr/>
+        </p:nvSpPr>
+        <p:spPr>
+          <a:xfrm>
+            <a:off x="8060343" y="1700784"/>
+            <a:ext cx="622767" cy="512064"/>
           </a:xfrm>
           <a:prstGeom prst="rect">
             <a:avLst/>
@@ -8114,14 +7817,14 @@
       </p:sp>
       <p:sp>
         <p:nvSpPr>
-          <p:cNvPr id="39" name="TextBox 38"/>
-          <p:cNvSpPr txBox="1"/>
-          <p:nvPr/>
-        </p:nvSpPr>
-        <p:spPr>
-          <a:xfrm>
-            <a:off x="8847703" y="1719072"/>
-            <a:ext cx="788527" cy="566928"/>
+          <p:cNvPr id="31" name="TextBox 30"/>
+          <p:cNvSpPr txBox="1"/>
+          <p:nvPr/>
+        </p:nvSpPr>
+        <p:spPr>
+          <a:xfrm>
+            <a:off x="8847703" y="1700784"/>
+            <a:ext cx="788527" cy="512064"/>
           </a:xfrm>
           <a:prstGeom prst="rect">
             <a:avLst/>
@@ -8157,14 +7860,14 @@
       </p:sp>
       <p:sp>
         <p:nvSpPr>
-          <p:cNvPr id="40" name="TextBox 39"/>
-          <p:cNvSpPr txBox="1"/>
-          <p:nvPr/>
-        </p:nvSpPr>
-        <p:spPr>
-          <a:xfrm>
-            <a:off x="9800823" y="1719072"/>
-            <a:ext cx="747087" cy="566928"/>
+          <p:cNvPr id="32" name="TextBox 31"/>
+          <p:cNvSpPr txBox="1"/>
+          <p:nvPr/>
+        </p:nvSpPr>
+        <p:spPr>
+          <a:xfrm>
+            <a:off x="9800823" y="1700784"/>
+            <a:ext cx="747087" cy="512064"/>
           </a:xfrm>
           <a:prstGeom prst="rect">
             <a:avLst/>
@@ -8200,14 +7903,14 @@
       </p:sp>
       <p:sp>
         <p:nvSpPr>
-          <p:cNvPr id="41" name="TextBox 40"/>
-          <p:cNvSpPr txBox="1"/>
-          <p:nvPr/>
-        </p:nvSpPr>
-        <p:spPr>
-          <a:xfrm>
-            <a:off x="10712503" y="1719072"/>
-            <a:ext cx="829967" cy="566928"/>
+          <p:cNvPr id="33" name="TextBox 32"/>
+          <p:cNvSpPr txBox="1"/>
+          <p:nvPr/>
+        </p:nvSpPr>
+        <p:spPr>
+          <a:xfrm>
+            <a:off x="10712503" y="1700784"/>
+            <a:ext cx="829967" cy="512064"/>
           </a:xfrm>
           <a:prstGeom prst="rect">
             <a:avLst/>
@@ -8243,13 +7946,13 @@
       </p:sp>
       <p:sp>
         <p:nvSpPr>
-          <p:cNvPr id="42" name="Rectangle 41"/>
+          <p:cNvPr id="34" name="Rectangle 33"/>
           <p:cNvSpPr/>
           <p:nvPr/>
         </p:nvSpPr>
         <p:spPr>
           <a:xfrm>
-            <a:off x="6693408" y="2743200"/>
+            <a:off x="6693408" y="2633472"/>
             <a:ext cx="4931359" cy="10972"/>
           </a:xfrm>
           <a:prstGeom prst="rect">
@@ -8285,14 +7988,14 @@
       </p:sp>
       <p:sp>
         <p:nvSpPr>
-          <p:cNvPr id="43" name="TextBox 42"/>
-          <p:cNvSpPr txBox="1"/>
-          <p:nvPr/>
-        </p:nvSpPr>
-        <p:spPr>
-          <a:xfrm>
-            <a:off x="6775704" y="2286000"/>
-            <a:ext cx="1120047" cy="457200"/>
+          <p:cNvPr id="35" name="TextBox 34"/>
+          <p:cNvSpPr txBox="1"/>
+          <p:nvPr/>
+        </p:nvSpPr>
+        <p:spPr>
+          <a:xfrm>
+            <a:off x="6775704" y="2212848"/>
+            <a:ext cx="1120047" cy="420624"/>
           </a:xfrm>
           <a:prstGeom prst="rect">
             <a:avLst/>
@@ -8327,14 +8030,14 @@
       </p:sp>
       <p:sp>
         <p:nvSpPr>
-          <p:cNvPr id="44" name="TextBox 43"/>
-          <p:cNvSpPr txBox="1"/>
-          <p:nvPr/>
-        </p:nvSpPr>
-        <p:spPr>
-          <a:xfrm>
-            <a:off x="8060343" y="2286000"/>
-            <a:ext cx="622767" cy="457200"/>
+          <p:cNvPr id="36" name="TextBox 35"/>
+          <p:cNvSpPr txBox="1"/>
+          <p:nvPr/>
+        </p:nvSpPr>
+        <p:spPr>
+          <a:xfrm>
+            <a:off x="8060343" y="2212848"/>
+            <a:ext cx="622767" cy="420624"/>
           </a:xfrm>
           <a:prstGeom prst="rect">
             <a:avLst/>
@@ -8369,14 +8072,14 @@
       </p:sp>
       <p:sp>
         <p:nvSpPr>
-          <p:cNvPr id="45" name="TextBox 44"/>
-          <p:cNvSpPr txBox="1"/>
-          <p:nvPr/>
-        </p:nvSpPr>
-        <p:spPr>
-          <a:xfrm>
-            <a:off x="8847703" y="2286000"/>
-            <a:ext cx="788527" cy="457200"/>
+          <p:cNvPr id="37" name="TextBox 36"/>
+          <p:cNvSpPr txBox="1"/>
+          <p:nvPr/>
+        </p:nvSpPr>
+        <p:spPr>
+          <a:xfrm>
+            <a:off x="8847703" y="2212848"/>
+            <a:ext cx="788527" cy="420624"/>
           </a:xfrm>
           <a:prstGeom prst="rect">
             <a:avLst/>
@@ -8411,14 +8114,14 @@
       </p:sp>
       <p:sp>
         <p:nvSpPr>
-          <p:cNvPr id="46" name="TextBox 45"/>
-          <p:cNvSpPr txBox="1"/>
-          <p:nvPr/>
-        </p:nvSpPr>
-        <p:spPr>
-          <a:xfrm>
-            <a:off x="9800823" y="2286000"/>
-            <a:ext cx="747087" cy="457200"/>
+          <p:cNvPr id="38" name="TextBox 37"/>
+          <p:cNvSpPr txBox="1"/>
+          <p:nvPr/>
+        </p:nvSpPr>
+        <p:spPr>
+          <a:xfrm>
+            <a:off x="9800823" y="2212848"/>
+            <a:ext cx="747087" cy="420624"/>
           </a:xfrm>
           <a:prstGeom prst="rect">
             <a:avLst/>
@@ -8453,14 +8156,14 @@
       </p:sp>
       <p:sp>
         <p:nvSpPr>
-          <p:cNvPr id="47" name="TextBox 46"/>
-          <p:cNvSpPr txBox="1"/>
-          <p:nvPr/>
-        </p:nvSpPr>
-        <p:spPr>
-          <a:xfrm>
-            <a:off x="10712503" y="2286000"/>
-            <a:ext cx="829967" cy="457200"/>
+          <p:cNvPr id="39" name="TextBox 38"/>
+          <p:cNvSpPr txBox="1"/>
+          <p:nvPr/>
+        </p:nvSpPr>
+        <p:spPr>
+          <a:xfrm>
+            <a:off x="10712503" y="2212848"/>
+            <a:ext cx="829967" cy="420624"/>
           </a:xfrm>
           <a:prstGeom prst="rect">
             <a:avLst/>
@@ -8495,13 +8198,13 @@
       </p:sp>
       <p:sp>
         <p:nvSpPr>
-          <p:cNvPr id="48" name="Rectangle 47"/>
+          <p:cNvPr id="40" name="Rectangle 39"/>
           <p:cNvSpPr/>
           <p:nvPr/>
         </p:nvSpPr>
         <p:spPr>
           <a:xfrm>
-            <a:off x="6693408" y="3200400"/>
+            <a:off x="6693408" y="3054096"/>
             <a:ext cx="4931359" cy="10972"/>
           </a:xfrm>
           <a:prstGeom prst="rect">
@@ -8537,14 +8240,14 @@
       </p:sp>
       <p:sp>
         <p:nvSpPr>
-          <p:cNvPr id="49" name="TextBox 48"/>
-          <p:cNvSpPr txBox="1"/>
-          <p:nvPr/>
-        </p:nvSpPr>
-        <p:spPr>
-          <a:xfrm>
-            <a:off x="6775704" y="2743200"/>
-            <a:ext cx="1120047" cy="457200"/>
+          <p:cNvPr id="41" name="TextBox 40"/>
+          <p:cNvSpPr txBox="1"/>
+          <p:nvPr/>
+        </p:nvSpPr>
+        <p:spPr>
+          <a:xfrm>
+            <a:off x="6775704" y="2633472"/>
+            <a:ext cx="1120047" cy="420624"/>
           </a:xfrm>
           <a:prstGeom prst="rect">
             <a:avLst/>
@@ -8579,14 +8282,14 @@
       </p:sp>
       <p:sp>
         <p:nvSpPr>
-          <p:cNvPr id="50" name="TextBox 49"/>
-          <p:cNvSpPr txBox="1"/>
-          <p:nvPr/>
-        </p:nvSpPr>
-        <p:spPr>
-          <a:xfrm>
-            <a:off x="8060343" y="2743200"/>
-            <a:ext cx="622767" cy="457200"/>
+          <p:cNvPr id="42" name="TextBox 41"/>
+          <p:cNvSpPr txBox="1"/>
+          <p:nvPr/>
+        </p:nvSpPr>
+        <p:spPr>
+          <a:xfrm>
+            <a:off x="8060343" y="2633472"/>
+            <a:ext cx="622767" cy="420624"/>
           </a:xfrm>
           <a:prstGeom prst="rect">
             <a:avLst/>
@@ -8621,14 +8324,14 @@
       </p:sp>
       <p:sp>
         <p:nvSpPr>
-          <p:cNvPr id="51" name="TextBox 50"/>
-          <p:cNvSpPr txBox="1"/>
-          <p:nvPr/>
-        </p:nvSpPr>
-        <p:spPr>
-          <a:xfrm>
-            <a:off x="8847703" y="2743200"/>
-            <a:ext cx="788527" cy="457200"/>
+          <p:cNvPr id="43" name="TextBox 42"/>
+          <p:cNvSpPr txBox="1"/>
+          <p:nvPr/>
+        </p:nvSpPr>
+        <p:spPr>
+          <a:xfrm>
+            <a:off x="8847703" y="2633472"/>
+            <a:ext cx="788527" cy="420624"/>
           </a:xfrm>
           <a:prstGeom prst="rect">
             <a:avLst/>
@@ -8663,14 +8366,14 @@
       </p:sp>
       <p:sp>
         <p:nvSpPr>
-          <p:cNvPr id="52" name="TextBox 51"/>
-          <p:cNvSpPr txBox="1"/>
-          <p:nvPr/>
-        </p:nvSpPr>
-        <p:spPr>
-          <a:xfrm>
-            <a:off x="9800823" y="2743200"/>
-            <a:ext cx="747087" cy="457200"/>
+          <p:cNvPr id="44" name="TextBox 43"/>
+          <p:cNvSpPr txBox="1"/>
+          <p:nvPr/>
+        </p:nvSpPr>
+        <p:spPr>
+          <a:xfrm>
+            <a:off x="9800823" y="2633472"/>
+            <a:ext cx="747087" cy="420624"/>
           </a:xfrm>
           <a:prstGeom prst="rect">
             <a:avLst/>
@@ -8705,14 +8408,14 @@
       </p:sp>
       <p:sp>
         <p:nvSpPr>
-          <p:cNvPr id="53" name="TextBox 52"/>
-          <p:cNvSpPr txBox="1"/>
-          <p:nvPr/>
-        </p:nvSpPr>
-        <p:spPr>
-          <a:xfrm>
-            <a:off x="10712503" y="2743200"/>
-            <a:ext cx="829967" cy="457200"/>
+          <p:cNvPr id="45" name="TextBox 44"/>
+          <p:cNvSpPr txBox="1"/>
+          <p:nvPr/>
+        </p:nvSpPr>
+        <p:spPr>
+          <a:xfrm>
+            <a:off x="10712503" y="2633472"/>
+            <a:ext cx="829967" cy="420624"/>
           </a:xfrm>
           <a:prstGeom prst="rect">
             <a:avLst/>
@@ -8747,13 +8450,13 @@
       </p:sp>
       <p:sp>
         <p:nvSpPr>
-          <p:cNvPr id="54" name="Rectangle 53"/>
+          <p:cNvPr id="46" name="Rectangle 45"/>
           <p:cNvSpPr/>
           <p:nvPr/>
         </p:nvSpPr>
         <p:spPr>
           <a:xfrm>
-            <a:off x="6693408" y="3657600"/>
+            <a:off x="6693408" y="3474720"/>
             <a:ext cx="4931359" cy="10972"/>
           </a:xfrm>
           <a:prstGeom prst="rect">
@@ -8789,14 +8492,14 @@
       </p:sp>
       <p:sp>
         <p:nvSpPr>
-          <p:cNvPr id="55" name="TextBox 54"/>
-          <p:cNvSpPr txBox="1"/>
-          <p:nvPr/>
-        </p:nvSpPr>
-        <p:spPr>
-          <a:xfrm>
-            <a:off x="6775704" y="3200400"/>
-            <a:ext cx="1120047" cy="457200"/>
+          <p:cNvPr id="47" name="TextBox 46"/>
+          <p:cNvSpPr txBox="1"/>
+          <p:nvPr/>
+        </p:nvSpPr>
+        <p:spPr>
+          <a:xfrm>
+            <a:off x="6775704" y="3054096"/>
+            <a:ext cx="1120047" cy="420624"/>
           </a:xfrm>
           <a:prstGeom prst="rect">
             <a:avLst/>
@@ -8831,14 +8534,14 @@
       </p:sp>
       <p:sp>
         <p:nvSpPr>
-          <p:cNvPr id="56" name="TextBox 55"/>
-          <p:cNvSpPr txBox="1"/>
-          <p:nvPr/>
-        </p:nvSpPr>
-        <p:spPr>
-          <a:xfrm>
-            <a:off x="8060343" y="3200400"/>
-            <a:ext cx="622767" cy="457200"/>
+          <p:cNvPr id="48" name="TextBox 47"/>
+          <p:cNvSpPr txBox="1"/>
+          <p:nvPr/>
+        </p:nvSpPr>
+        <p:spPr>
+          <a:xfrm>
+            <a:off x="8060343" y="3054096"/>
+            <a:ext cx="622767" cy="420624"/>
           </a:xfrm>
           <a:prstGeom prst="rect">
             <a:avLst/>
@@ -8873,14 +8576,14 @@
       </p:sp>
       <p:sp>
         <p:nvSpPr>
-          <p:cNvPr id="57" name="TextBox 56"/>
-          <p:cNvSpPr txBox="1"/>
-          <p:nvPr/>
-        </p:nvSpPr>
-        <p:spPr>
-          <a:xfrm>
-            <a:off x="8847703" y="3200400"/>
-            <a:ext cx="788527" cy="457200"/>
+          <p:cNvPr id="49" name="TextBox 48"/>
+          <p:cNvSpPr txBox="1"/>
+          <p:nvPr/>
+        </p:nvSpPr>
+        <p:spPr>
+          <a:xfrm>
+            <a:off x="8847703" y="3054096"/>
+            <a:ext cx="788527" cy="420624"/>
           </a:xfrm>
           <a:prstGeom prst="rect">
             <a:avLst/>
@@ -8915,14 +8618,14 @@
       </p:sp>
       <p:sp>
         <p:nvSpPr>
-          <p:cNvPr id="58" name="TextBox 57"/>
-          <p:cNvSpPr txBox="1"/>
-          <p:nvPr/>
-        </p:nvSpPr>
-        <p:spPr>
-          <a:xfrm>
-            <a:off x="9800823" y="3200400"/>
-            <a:ext cx="747087" cy="457200"/>
+          <p:cNvPr id="50" name="TextBox 49"/>
+          <p:cNvSpPr txBox="1"/>
+          <p:nvPr/>
+        </p:nvSpPr>
+        <p:spPr>
+          <a:xfrm>
+            <a:off x="9800823" y="3054096"/>
+            <a:ext cx="747087" cy="420624"/>
           </a:xfrm>
           <a:prstGeom prst="rect">
             <a:avLst/>
@@ -8957,14 +8660,14 @@
       </p:sp>
       <p:sp>
         <p:nvSpPr>
-          <p:cNvPr id="59" name="TextBox 58"/>
-          <p:cNvSpPr txBox="1"/>
-          <p:nvPr/>
-        </p:nvSpPr>
-        <p:spPr>
-          <a:xfrm>
-            <a:off x="10712503" y="3200400"/>
-            <a:ext cx="829967" cy="457200"/>
+          <p:cNvPr id="51" name="TextBox 50"/>
+          <p:cNvSpPr txBox="1"/>
+          <p:nvPr/>
+        </p:nvSpPr>
+        <p:spPr>
+          <a:xfrm>
+            <a:off x="10712503" y="3054096"/>
+            <a:ext cx="829967" cy="420624"/>
           </a:xfrm>
           <a:prstGeom prst="rect">
             <a:avLst/>
@@ -8999,14 +8702,14 @@
       </p:sp>
       <p:sp>
         <p:nvSpPr>
-          <p:cNvPr id="60" name="Rectangle 59"/>
+          <p:cNvPr id="52" name="Rectangle 51"/>
           <p:cNvSpPr/>
           <p:nvPr/>
         </p:nvSpPr>
         <p:spPr>
           <a:xfrm>
-            <a:off x="6693408" y="3657600"/>
-            <a:ext cx="4931359" cy="457200"/>
+            <a:off x="6693408" y="3474720"/>
+            <a:ext cx="4931359" cy="420624"/>
           </a:xfrm>
           <a:prstGeom prst="rect">
             <a:avLst/>
@@ -9043,14 +8746,14 @@
       </p:sp>
       <p:sp>
         <p:nvSpPr>
-          <p:cNvPr id="61" name="TextBox 60"/>
-          <p:cNvSpPr txBox="1"/>
-          <p:nvPr/>
-        </p:nvSpPr>
-        <p:spPr>
-          <a:xfrm>
-            <a:off x="6775704" y="3657600"/>
-            <a:ext cx="1120047" cy="457200"/>
+          <p:cNvPr id="53" name="TextBox 52"/>
+          <p:cNvSpPr txBox="1"/>
+          <p:nvPr/>
+        </p:nvSpPr>
+        <p:spPr>
+          <a:xfrm>
+            <a:off x="6775704" y="3474720"/>
+            <a:ext cx="1120047" cy="420624"/>
           </a:xfrm>
           <a:prstGeom prst="rect">
             <a:avLst/>
@@ -9085,14 +8788,14 @@
       </p:sp>
       <p:sp>
         <p:nvSpPr>
-          <p:cNvPr id="62" name="TextBox 61"/>
-          <p:cNvSpPr txBox="1"/>
-          <p:nvPr/>
-        </p:nvSpPr>
-        <p:spPr>
-          <a:xfrm>
-            <a:off x="8060343" y="3657600"/>
-            <a:ext cx="622767" cy="457200"/>
+          <p:cNvPr id="54" name="TextBox 53"/>
+          <p:cNvSpPr txBox="1"/>
+          <p:nvPr/>
+        </p:nvSpPr>
+        <p:spPr>
+          <a:xfrm>
+            <a:off x="8060343" y="3474720"/>
+            <a:ext cx="622767" cy="420624"/>
           </a:xfrm>
           <a:prstGeom prst="rect">
             <a:avLst/>
@@ -9127,14 +8830,14 @@
       </p:sp>
       <p:sp>
         <p:nvSpPr>
-          <p:cNvPr id="63" name="TextBox 62"/>
-          <p:cNvSpPr txBox="1"/>
-          <p:nvPr/>
-        </p:nvSpPr>
-        <p:spPr>
-          <a:xfrm>
-            <a:off x="8847703" y="3657600"/>
-            <a:ext cx="788527" cy="457200"/>
+          <p:cNvPr id="55" name="TextBox 54"/>
+          <p:cNvSpPr txBox="1"/>
+          <p:nvPr/>
+        </p:nvSpPr>
+        <p:spPr>
+          <a:xfrm>
+            <a:off x="8847703" y="3474720"/>
+            <a:ext cx="788527" cy="420624"/>
           </a:xfrm>
           <a:prstGeom prst="rect">
             <a:avLst/>
@@ -9169,14 +8872,14 @@
       </p:sp>
       <p:sp>
         <p:nvSpPr>
-          <p:cNvPr id="64" name="TextBox 63"/>
-          <p:cNvSpPr txBox="1"/>
-          <p:nvPr/>
-        </p:nvSpPr>
-        <p:spPr>
-          <a:xfrm>
-            <a:off x="9800823" y="3657600"/>
-            <a:ext cx="747087" cy="457200"/>
+          <p:cNvPr id="56" name="TextBox 55"/>
+          <p:cNvSpPr txBox="1"/>
+          <p:nvPr/>
+        </p:nvSpPr>
+        <p:spPr>
+          <a:xfrm>
+            <a:off x="9800823" y="3474720"/>
+            <a:ext cx="747087" cy="420624"/>
           </a:xfrm>
           <a:prstGeom prst="rect">
             <a:avLst/>
@@ -9211,14 +8914,14 @@
       </p:sp>
       <p:sp>
         <p:nvSpPr>
-          <p:cNvPr id="65" name="TextBox 64"/>
-          <p:cNvSpPr txBox="1"/>
-          <p:nvPr/>
-        </p:nvSpPr>
-        <p:spPr>
-          <a:xfrm>
-            <a:off x="10712503" y="3657600"/>
-            <a:ext cx="829967" cy="457200"/>
+          <p:cNvPr id="57" name="TextBox 56"/>
+          <p:cNvSpPr txBox="1"/>
+          <p:nvPr/>
+        </p:nvSpPr>
+        <p:spPr>
+          <a:xfrm>
+            <a:off x="10712503" y="3474720"/>
+            <a:ext cx="829967" cy="420624"/>
           </a:xfrm>
           <a:prstGeom prst="rect">
             <a:avLst/>
@@ -9253,14 +8956,14 @@
       </p:sp>
       <p:sp>
         <p:nvSpPr>
-          <p:cNvPr id="66" name="TextBox 65"/>
-          <p:cNvSpPr txBox="1"/>
-          <p:nvPr/>
-        </p:nvSpPr>
-        <p:spPr>
-          <a:xfrm>
-            <a:off x="6693408" y="4242816"/>
-            <a:ext cx="4931359" cy="402336"/>
+          <p:cNvPr id="58" name="TextBox 57"/>
+          <p:cNvSpPr txBox="1"/>
+          <p:nvPr/>
+        </p:nvSpPr>
+        <p:spPr>
+          <a:xfrm>
+            <a:off x="6693408" y="3986783"/>
+            <a:ext cx="4931359" cy="365760"/>
           </a:xfrm>
           <a:prstGeom prst="rect">
             <a:avLst/>
@@ -9275,14 +8978,14 @@
           <a:p>
             <a:pPr algn="l">
               <a:lnSpc>
-                <a:spcPct val="124000"/>
-              </a:lnSpc>
-              <a:spcAft>
-                <a:spcPts val="0"/>
-              </a:spcAft>
-            </a:pPr>
-            <a:r>
-              <a:rPr sz="850" b="0">
+                <a:spcPct val="122000"/>
+              </a:lnSpc>
+              <a:spcAft>
+                <a:spcPts val="0"/>
+              </a:spcAft>
+            </a:pPr>
+            <a:r>
+              <a:rPr sz="819" b="0">
                 <a:solidFill>
                   <a:srgbClr val="B91C1C"/>
                 </a:solidFill>
@@ -9295,14 +8998,14 @@
       </p:sp>
       <p:sp>
         <p:nvSpPr>
-          <p:cNvPr id="67" name="Rectangle 66"/>
+          <p:cNvPr id="59" name="Rectangle 58"/>
           <p:cNvSpPr/>
           <p:nvPr/>
         </p:nvSpPr>
         <p:spPr>
           <a:xfrm>
-            <a:off x="6693408" y="4224528"/>
-            <a:ext cx="4931359" cy="1920240"/>
+            <a:off x="6693408" y="4389120"/>
+            <a:ext cx="4931359" cy="1005840"/>
           </a:xfrm>
           <a:prstGeom prst="rect">
             <a:avLst/>
@@ -9339,13 +9042,13 @@
       </p:sp>
       <p:sp>
         <p:nvSpPr>
-          <p:cNvPr id="68" name="TextBox 67"/>
-          <p:cNvSpPr txBox="1"/>
-          <p:nvPr/>
-        </p:nvSpPr>
-        <p:spPr>
-          <a:xfrm>
-            <a:off x="6894576" y="4334256"/>
+          <p:cNvPr id="60" name="TextBox 59"/>
+          <p:cNvSpPr txBox="1"/>
+          <p:nvPr/>
+        </p:nvSpPr>
+        <p:spPr>
+          <a:xfrm>
+            <a:off x="6894576" y="4480560"/>
             <a:ext cx="4529023" cy="219456"/>
           </a:xfrm>
           <a:prstGeom prst="rect">
@@ -9381,14 +9084,14 @@
       </p:sp>
       <p:sp>
         <p:nvSpPr>
-          <p:cNvPr id="69" name="TextBox 68"/>
-          <p:cNvSpPr txBox="1"/>
-          <p:nvPr/>
-        </p:nvSpPr>
-        <p:spPr>
-          <a:xfrm>
-            <a:off x="6894576" y="4590288"/>
-            <a:ext cx="4529023" cy="1444752"/>
+          <p:cNvPr id="61" name="TextBox 60"/>
+          <p:cNvSpPr txBox="1"/>
+          <p:nvPr/>
+        </p:nvSpPr>
+        <p:spPr>
+          <a:xfrm>
+            <a:off x="6894576" y="4700016"/>
+            <a:ext cx="4529023" cy="640080"/>
           </a:xfrm>
           <a:prstGeom prst="rect">
             <a:avLst/>
@@ -9403,20 +9106,105 @@
           <a:p>
             <a:pPr algn="l">
               <a:lnSpc>
-                <a:spcPct val="128000"/>
-              </a:lnSpc>
-              <a:spcAft>
-                <a:spcPts val="0"/>
-              </a:spcAft>
-            </a:pPr>
-            <a:r>
-              <a:rPr sz="1150" b="0">
+                <a:spcPct val="126000"/>
+              </a:lnSpc>
+              <a:spcAft>
+                <a:spcPts val="0"/>
+              </a:spcAft>
+            </a:pPr>
+            <a:r>
+              <a:rPr sz="1100" b="0">
                 <a:solidFill>
                   <a:srgbClr val="0F172A"/>
                 </a:solidFill>
                 <a:latin typeface="Inter"/>
               </a:rPr>
-              <a:t>Every product in that table protects the pack once a threshold breaks. None of them tells a technician which cell is failing, how confident that call is, or adapts to a different chemistry from a PDF. That is the whole product.</a:t>
+              <a:t>Every product there protects the pack once a threshold breaks. None tells a technician which cell is failing, how confident that call is, or adapts to a new chemistry from a PDF.</a:t>
+            </a:r>
+          </a:p>
+        </p:txBody>
+      </p:sp>
+      <p:sp>
+        <p:nvSpPr>
+          <p:cNvPr id="62" name="TextBox 61"/>
+          <p:cNvSpPr txBox="1"/>
+          <p:nvPr/>
+        </p:nvSpPr>
+        <p:spPr>
+          <a:xfrm>
+            <a:off x="6693408" y="5522976"/>
+            <a:ext cx="4931359" cy="219456"/>
+          </a:xfrm>
+          <a:prstGeom prst="rect">
+            <a:avLst/>
+          </a:prstGeom>
+          <a:noFill/>
+        </p:spPr>
+        <p:txBody>
+          <a:bodyPr wrap="square" anchor="t" lIns="0" rIns="0" tIns="0" bIns="0">
+            <a:spAutoFit/>
+          </a:bodyPr>
+          <a:lstStyle/>
+          <a:p>
+            <a:pPr algn="l">
+              <a:lnSpc>
+                <a:spcPct val="118000"/>
+              </a:lnSpc>
+              <a:spcAft>
+                <a:spcPts val="0"/>
+              </a:spcAft>
+            </a:pPr>
+            <a:r>
+              <a:rPr sz="950" b="1">
+                <a:solidFill>
+                  <a:srgbClr val="B91C1C"/>
+                </a:solidFill>
+                <a:latin typeface="Inter"/>
+              </a:rPr>
+              <a:t>WHO PAYS</a:t>
+            </a:r>
+          </a:p>
+        </p:txBody>
+      </p:sp>
+      <p:sp>
+        <p:nvSpPr>
+          <p:cNvPr id="63" name="TextBox 62"/>
+          <p:cNvSpPr txBox="1"/>
+          <p:nvPr/>
+        </p:nvSpPr>
+        <p:spPr>
+          <a:xfrm>
+            <a:off x="6693408" y="5760720"/>
+            <a:ext cx="4931359" cy="512064"/>
+          </a:xfrm>
+          <a:prstGeom prst="rect">
+            <a:avLst/>
+          </a:prstGeom>
+          <a:noFill/>
+        </p:spPr>
+        <p:txBody>
+          <a:bodyPr wrap="square" anchor="t" lIns="0" rIns="0" tIns="0" bIns="0">
+            <a:spAutoFit/>
+          </a:bodyPr>
+          <a:lstStyle/>
+          <a:p>
+            <a:pPr algn="l">
+              <a:lnSpc>
+                <a:spcPct val="140000"/>
+              </a:lnSpc>
+              <a:spcAft>
+                <a:spcPts val="0"/>
+              </a:spcAft>
+            </a:pPr>
+            <a:r>
+              <a:rPr sz="1050" b="0">
+                <a:solidFill>
+                  <a:srgbClr val="0F172A"/>
+                </a:solidFill>
+                <a:latin typeface="Inter"/>
+              </a:rPr>
+              <a:t>Fleet operator — avoids an early pack replacement  [FILL: ₹ per pack]
+OEM — fewer warranty claims per 1,000 packs  [FILL: ₹ or % exposure]</a:t>
             </a:r>
           </a:p>
         </p:txBody>
@@ -18646,7 +18434,7 @@
                 </a:solidFill>
                 <a:latin typeface="Inter"/>
               </a:rPr>
-              <a:t>Three tiers at the edge, three surfaces in the browser</a:t>
+              <a:t>Two tiers at the edge, three surfaces in the browser</a:t>
             </a:r>
           </a:p>
         </p:txBody>
@@ -18890,31 +18678,6 @@
               <a:t>Pi 5 runs the logger and XGBoost inference.</a:t>
             </a:r>
           </a:p>
-          <a:p>
-            <a:pPr marL="274320" indent="-274320">
-              <a:lnSpc>
-                <a:spcPct val="116000"/>
-              </a:lnSpc>
-              <a:spcAft>
-                <a:spcPts val="700"/>
-              </a:spcAft>
-              <a:buClr>
-                <a:srgbClr val="0E7490"/>
-              </a:buClr>
-              <a:buSzPct val="62000"/>
-              <a:buFont typeface="Arial" pitchFamily="34" charset="0"/>
-              <a:buChar char="●"/>
-            </a:pPr>
-            <a:r>
-              <a:rPr sz="1350">
-                <a:solidFill>
-                  <a:srgbClr val="0F172A"/>
-                </a:solidFill>
-                <a:latin typeface="Inter"/>
-              </a:rPr>
-              <a:t>Arduino R4 watches the Pi's heartbeat.</a:t>
-            </a:r>
-          </a:p>
         </p:txBody>
       </p:sp>
       <p:sp>
@@ -18938,31 +18701,6 @@
             <a:spAutoFit/>
           </a:bodyPr>
           <a:lstStyle/>
-          <a:p>
-            <a:pPr marL="274320" indent="-274320">
-              <a:lnSpc>
-                <a:spcPct val="116000"/>
-              </a:lnSpc>
-              <a:spcAft>
-                <a:spcPts val="700"/>
-              </a:spcAft>
-              <a:buClr>
-                <a:srgbClr val="0E7490"/>
-              </a:buClr>
-              <a:buSzPct val="62000"/>
-              <a:buFont typeface="Arial" pitchFamily="34" charset="0"/>
-              <a:buChar char="●"/>
-            </a:pPr>
-            <a:r>
-              <a:rPr sz="1350">
-                <a:solidFill>
-                  <a:srgbClr val="0F172A"/>
-                </a:solidFill>
-                <a:latin typeface="Inter"/>
-              </a:rPr>
-              <a:t>Missed beat pulls RUN pin, resets the Pi.</a:t>
-            </a:r>
-          </a:p>
           <a:p>
             <a:pPr marL="274320" indent="-274320">
               <a:lnSpc>
@@ -19151,7 +18889,7 @@
         </p:nvSpPr>
         <p:spPr>
           <a:xfrm>
-            <a:off x="1403199" y="4809744"/>
+            <a:off x="2907387" y="4809744"/>
             <a:ext cx="1116377" cy="1005840"/>
           </a:xfrm>
           <a:prstGeom prst="rect">
@@ -19203,7 +18941,7 @@
         </p:blipFill>
         <p:spPr>
           <a:xfrm>
-            <a:off x="1522071" y="4928616"/>
+            <a:off x="3026259" y="4928616"/>
             <a:ext cx="878633" cy="768096"/>
           </a:xfrm>
           <a:prstGeom prst="rect">
@@ -19213,51 +18951,49 @@
       </p:pic>
       <p:sp>
         <p:nvSpPr>
-          <p:cNvPr id="14" name="Rectangle 13"/>
-          <p:cNvSpPr/>
-          <p:nvPr/>
-        </p:nvSpPr>
-        <p:spPr>
-          <a:xfrm>
-            <a:off x="4345293" y="4809744"/>
-            <a:ext cx="1248941" cy="1005840"/>
-          </a:xfrm>
-          <a:prstGeom prst="rect">
-            <a:avLst/>
-          </a:prstGeom>
-          <a:solidFill>
-            <a:srgbClr val="FFFFFF"/>
-          </a:solidFill>
-          <a:ln w="12700">
-            <a:solidFill>
-              <a:srgbClr val="CBD5E1"/>
-            </a:solidFill>
-          </a:ln>
-          <a:effectLst/>
-        </p:spPr>
-        <p:style>
-          <a:lnRef idx="1">
-            <a:schemeClr val="accent1"/>
-          </a:lnRef>
-          <a:fillRef idx="3">
-            <a:schemeClr val="accent1"/>
-          </a:fillRef>
-          <a:effectRef idx="2">
-            <a:schemeClr val="accent1"/>
-          </a:effectRef>
-          <a:fontRef idx="minor">
-            <a:schemeClr val="lt1"/>
-          </a:fontRef>
-        </p:style>
-        <p:txBody>
-          <a:bodyPr rtlCol="0" anchor="ctr"/>
-          <a:lstStyle/>
-          <a:p/>
+          <p:cNvPr id="14" name="TextBox 13"/>
+          <p:cNvSpPr txBox="1"/>
+          <p:nvPr/>
+        </p:nvSpPr>
+        <p:spPr>
+          <a:xfrm>
+            <a:off x="2231136" y="5843016"/>
+            <a:ext cx="2468880" cy="237744"/>
+          </a:xfrm>
+          <a:prstGeom prst="rect">
+            <a:avLst/>
+          </a:prstGeom>
+          <a:noFill/>
+        </p:spPr>
+        <p:txBody>
+          <a:bodyPr wrap="square" anchor="t" lIns="0" rIns="0" tIns="0" bIns="0">
+            <a:spAutoFit/>
+          </a:bodyPr>
+          <a:lstStyle/>
+          <a:p>
+            <a:pPr algn="ctr">
+              <a:lnSpc>
+                <a:spcPct val="118000"/>
+              </a:lnSpc>
+              <a:spcAft>
+                <a:spcPts val="0"/>
+              </a:spcAft>
+            </a:pPr>
+            <a:r>
+              <a:rPr sz="950" b="0">
+                <a:solidFill>
+                  <a:srgbClr val="475569"/>
+                </a:solidFill>
+                <a:latin typeface="Inter"/>
+              </a:rPr>
+              <a:t>Raspberry Pi 5</a:t>
+            </a:r>
+          </a:p>
         </p:txBody>
       </p:sp>
       <p:pic>
         <p:nvPicPr>
-          <p:cNvPr id="15" name="Picture 14" descr="p06_img2_x52.jpeg"/>
+          <p:cNvPr id="15" name="Picture 14" descr="diag_hardware.png"/>
           <p:cNvPicPr>
             <a:picLocks noChangeAspect="1"/>
           </p:cNvPicPr>
@@ -19271,101 +19007,17 @@
         </p:blipFill>
         <p:spPr>
           <a:xfrm>
-            <a:off x="4464165" y="4928616"/>
-            <a:ext cx="1011197" cy="768096"/>
+            <a:off x="6898064" y="1481328"/>
+            <a:ext cx="4522046" cy="2240280"/>
           </a:xfrm>
           <a:prstGeom prst="rect">
             <a:avLst/>
           </a:prstGeom>
         </p:spPr>
       </p:pic>
-      <p:sp>
-        <p:nvSpPr>
-          <p:cNvPr id="16" name="TextBox 15"/>
-          <p:cNvSpPr txBox="1"/>
-          <p:nvPr/>
-        </p:nvSpPr>
-        <p:spPr>
-          <a:xfrm>
-            <a:off x="566928" y="5843016"/>
-            <a:ext cx="2788920" cy="237744"/>
-          </a:xfrm>
-          <a:prstGeom prst="rect">
-            <a:avLst/>
-          </a:prstGeom>
-          <a:noFill/>
-        </p:spPr>
-        <p:txBody>
-          <a:bodyPr wrap="square" anchor="t" lIns="0" rIns="0" tIns="0" bIns="0">
-            <a:spAutoFit/>
-          </a:bodyPr>
-          <a:lstStyle/>
-          <a:p>
-            <a:pPr algn="ctr">
-              <a:lnSpc>
-                <a:spcPct val="118000"/>
-              </a:lnSpc>
-              <a:spcAft>
-                <a:spcPts val="0"/>
-              </a:spcAft>
-            </a:pPr>
-            <a:r>
-              <a:rPr sz="950" b="0">
-                <a:solidFill>
-                  <a:srgbClr val="475569"/>
-                </a:solidFill>
-                <a:latin typeface="Inter"/>
-              </a:rPr>
-              <a:t>Raspberry Pi 5</a:t>
-            </a:r>
-          </a:p>
-        </p:txBody>
-      </p:sp>
-      <p:sp>
-        <p:nvSpPr>
-          <p:cNvPr id="17" name="TextBox 16"/>
-          <p:cNvSpPr txBox="1"/>
-          <p:nvPr/>
-        </p:nvSpPr>
-        <p:spPr>
-          <a:xfrm>
-            <a:off x="3575304" y="5843016"/>
-            <a:ext cx="2788920" cy="237744"/>
-          </a:xfrm>
-          <a:prstGeom prst="rect">
-            <a:avLst/>
-          </a:prstGeom>
-          <a:noFill/>
-        </p:spPr>
-        <p:txBody>
-          <a:bodyPr wrap="square" anchor="t" lIns="0" rIns="0" tIns="0" bIns="0">
-            <a:spAutoFit/>
-          </a:bodyPr>
-          <a:lstStyle/>
-          <a:p>
-            <a:pPr algn="ctr">
-              <a:lnSpc>
-                <a:spcPct val="118000"/>
-              </a:lnSpc>
-              <a:spcAft>
-                <a:spcPts val="0"/>
-              </a:spcAft>
-            </a:pPr>
-            <a:r>
-              <a:rPr sz="950" b="0">
-                <a:solidFill>
-                  <a:srgbClr val="475569"/>
-                </a:solidFill>
-                <a:latin typeface="Inter"/>
-              </a:rPr>
-              <a:t>Arduino Uno R4 WiFi</a:t>
-            </a:r>
-          </a:p>
-        </p:txBody>
-      </p:sp>
       <p:pic>
         <p:nvPicPr>
-          <p:cNvPr id="18" name="Picture 17" descr="diag_hardware.png"/>
+          <p:cNvPr id="16" name="Picture 15" descr="diag_system_flow.png"/>
           <p:cNvPicPr>
             <a:picLocks noChangeAspect="1"/>
           </p:cNvPicPr>
@@ -19373,30 +19025,6 @@
         </p:nvPicPr>
         <p:blipFill>
           <a:blip r:embed="rId4"/>
-          <a:stretch>
-            <a:fillRect/>
-          </a:stretch>
-        </p:blipFill>
-        <p:spPr>
-          <a:xfrm>
-            <a:off x="7144947" y="1481328"/>
-            <a:ext cx="4028280" cy="2240280"/>
-          </a:xfrm>
-          <a:prstGeom prst="rect">
-            <a:avLst/>
-          </a:prstGeom>
-        </p:spPr>
-      </p:pic>
-      <p:pic>
-        <p:nvPicPr>
-          <p:cNvPr id="19" name="Picture 18" descr="diag_system_flow.png"/>
-          <p:cNvPicPr>
-            <a:picLocks noChangeAspect="1"/>
-          </p:cNvPicPr>
-          <p:nvPr/>
-        </p:nvPicPr>
-        <p:blipFill>
-          <a:blip r:embed="rId5"/>
           <a:stretch>
             <a:fillRect/>
           </a:stretch>
@@ -21043,7 +20671,7 @@
         </p:nvSpPr>
         <p:spPr>
           <a:xfrm>
-            <a:off x="566928" y="4645152"/>
+            <a:off x="566928" y="4553712"/>
             <a:ext cx="5797296" cy="219456"/>
           </a:xfrm>
           <a:prstGeom prst="rect">
@@ -21085,8 +20713,8 @@
         </p:nvSpPr>
         <p:spPr>
           <a:xfrm>
-            <a:off x="566928" y="4919472"/>
-            <a:ext cx="54864" cy="201168"/>
+            <a:off x="566928" y="4809744"/>
+            <a:ext cx="54864" cy="182880"/>
           </a:xfrm>
           <a:prstGeom prst="rect">
             <a:avLst/>
@@ -21127,7 +20755,7 @@
         </p:nvSpPr>
         <p:spPr>
           <a:xfrm>
-            <a:off x="768096" y="4901184"/>
+            <a:off x="768096" y="4782312"/>
             <a:ext cx="5596128" cy="237744"/>
           </a:xfrm>
           <a:prstGeom prst="rect">
@@ -21169,8 +20797,8 @@
         </p:nvSpPr>
         <p:spPr>
           <a:xfrm>
-            <a:off x="566928" y="5166360"/>
-            <a:ext cx="54864" cy="201168"/>
+            <a:off x="566928" y="5038344"/>
+            <a:ext cx="54864" cy="182880"/>
           </a:xfrm>
           <a:prstGeom prst="rect">
             <a:avLst/>
@@ -21211,7 +20839,7 @@
         </p:nvSpPr>
         <p:spPr>
           <a:xfrm>
-            <a:off x="768096" y="5148072"/>
+            <a:off x="768096" y="5010912"/>
             <a:ext cx="5596128" cy="237744"/>
           </a:xfrm>
           <a:prstGeom prst="rect">
@@ -21253,8 +20881,92 @@
         </p:nvSpPr>
         <p:spPr>
           <a:xfrm>
-            <a:off x="566928" y="5413248"/>
-            <a:ext cx="54864" cy="201168"/>
+            <a:off x="566928" y="5266944"/>
+            <a:ext cx="54864" cy="182880"/>
+          </a:xfrm>
+          <a:prstGeom prst="rect">
+            <a:avLst/>
+          </a:prstGeom>
+          <a:solidFill>
+            <a:srgbClr val="B45309"/>
+          </a:solidFill>
+          <a:ln>
+            <a:noFill/>
+          </a:ln>
+          <a:effectLst/>
+        </p:spPr>
+        <p:style>
+          <a:lnRef idx="1">
+            <a:schemeClr val="accent1"/>
+          </a:lnRef>
+          <a:fillRef idx="3">
+            <a:schemeClr val="accent1"/>
+          </a:fillRef>
+          <a:effectRef idx="2">
+            <a:schemeClr val="accent1"/>
+          </a:effectRef>
+          <a:fontRef idx="minor">
+            <a:schemeClr val="lt1"/>
+          </a:fontRef>
+        </p:style>
+        <p:txBody>
+          <a:bodyPr rtlCol="0" anchor="ctr"/>
+          <a:lstStyle/>
+          <a:p/>
+        </p:txBody>
+      </p:sp>
+      <p:sp>
+        <p:nvSpPr>
+          <p:cNvPr id="18" name="TextBox 17"/>
+          <p:cNvSpPr txBox="1"/>
+          <p:nvPr/>
+        </p:nvSpPr>
+        <p:spPr>
+          <a:xfrm>
+            <a:off x="768096" y="5239512"/>
+            <a:ext cx="5596128" cy="237744"/>
+          </a:xfrm>
+          <a:prstGeom prst="rect">
+            <a:avLst/>
+          </a:prstGeom>
+          <a:noFill/>
+        </p:spPr>
+        <p:txBody>
+          <a:bodyPr wrap="square" anchor="t" lIns="0" rIns="0" tIns="0" bIns="0">
+            <a:spAutoFit/>
+          </a:bodyPr>
+          <a:lstStyle/>
+          <a:p>
+            <a:pPr algn="l">
+              <a:lnSpc>
+                <a:spcPct val="118000"/>
+              </a:lnSpc>
+              <a:spcAft>
+                <a:spcPts val="0"/>
+              </a:spcAft>
+            </a:pPr>
+            <a:r>
+              <a:rPr sz="1150" b="0">
+                <a:solidFill>
+                  <a:srgbClr val="0F172A"/>
+                </a:solidFill>
+                <a:latin typeface="Inter"/>
+              </a:rPr>
+              <a:t>Independent hardware watchdog on a separate rail</a:t>
+            </a:r>
+          </a:p>
+        </p:txBody>
+      </p:sp>
+      <p:sp>
+        <p:nvSpPr>
+          <p:cNvPr id="19" name="Rectangle 18"/>
+          <p:cNvSpPr/>
+          <p:nvPr/>
+        </p:nvSpPr>
+        <p:spPr>
+          <a:xfrm>
+            <a:off x="566928" y="5495544"/>
+            <a:ext cx="54864" cy="182880"/>
           </a:xfrm>
           <a:prstGeom prst="rect">
             <a:avLst/>
@@ -21289,13 +21001,13 @@
       </p:sp>
       <p:sp>
         <p:nvSpPr>
-          <p:cNvPr id="18" name="TextBox 17"/>
-          <p:cNvSpPr txBox="1"/>
-          <p:nvPr/>
-        </p:nvSpPr>
-        <p:spPr>
-          <a:xfrm>
-            <a:off x="768096" y="5394960"/>
+          <p:cNvPr id="20" name="TextBox 19"/>
+          <p:cNvSpPr txBox="1"/>
+          <p:nvPr/>
+        </p:nvSpPr>
+        <p:spPr>
+          <a:xfrm>
+            <a:off x="768096" y="5468112"/>
             <a:ext cx="5596128" cy="237744"/>
           </a:xfrm>
           <a:prstGeom prst="rect">
@@ -21331,14 +21043,14 @@
       </p:sp>
       <p:sp>
         <p:nvSpPr>
-          <p:cNvPr id="19" name="Rectangle 18"/>
+          <p:cNvPr id="21" name="Rectangle 20"/>
           <p:cNvSpPr/>
           <p:nvPr/>
         </p:nvSpPr>
         <p:spPr>
           <a:xfrm>
-            <a:off x="566928" y="5660136"/>
-            <a:ext cx="54864" cy="201168"/>
+            <a:off x="566928" y="5724144"/>
+            <a:ext cx="54864" cy="182880"/>
           </a:xfrm>
           <a:prstGeom prst="rect">
             <a:avLst/>
@@ -21373,13 +21085,13 @@
       </p:sp>
       <p:sp>
         <p:nvSpPr>
-          <p:cNvPr id="20" name="TextBox 19"/>
-          <p:cNvSpPr txBox="1"/>
-          <p:nvPr/>
-        </p:nvSpPr>
-        <p:spPr>
-          <a:xfrm>
-            <a:off x="768096" y="5641848"/>
+          <p:cNvPr id="22" name="TextBox 21"/>
+          <p:cNvSpPr txBox="1"/>
+          <p:nvPr/>
+        </p:nvSpPr>
+        <p:spPr>
+          <a:xfrm>
+            <a:off x="768096" y="5696712"/>
             <a:ext cx="5596128" cy="237744"/>
           </a:xfrm>
           <a:prstGeom prst="rect">
@@ -21415,14 +21127,14 @@
       </p:sp>
       <p:sp>
         <p:nvSpPr>
-          <p:cNvPr id="21" name="Rectangle 20"/>
+          <p:cNvPr id="23" name="Rectangle 22"/>
           <p:cNvSpPr/>
           <p:nvPr/>
         </p:nvSpPr>
         <p:spPr>
           <a:xfrm>
-            <a:off x="566928" y="5907023"/>
-            <a:ext cx="54864" cy="201168"/>
+            <a:off x="566928" y="5952744"/>
+            <a:ext cx="54864" cy="182880"/>
           </a:xfrm>
           <a:prstGeom prst="rect">
             <a:avLst/>
@@ -21457,13 +21169,13 @@
       </p:sp>
       <p:sp>
         <p:nvSpPr>
-          <p:cNvPr id="22" name="TextBox 21"/>
-          <p:cNvSpPr txBox="1"/>
-          <p:nvPr/>
-        </p:nvSpPr>
-        <p:spPr>
-          <a:xfrm>
-            <a:off x="768096" y="5888736"/>
+          <p:cNvPr id="24" name="TextBox 23"/>
+          <p:cNvSpPr txBox="1"/>
+          <p:nvPr/>
+        </p:nvSpPr>
+        <p:spPr>
+          <a:xfrm>
+            <a:off x="768096" y="5925312"/>
             <a:ext cx="5596128" cy="237744"/>
           </a:xfrm>
           <a:prstGeom prst="rect">
@@ -21499,7 +21211,7 @@
       </p:sp>
       <p:pic>
         <p:nvPicPr>
-          <p:cNvPr id="23" name="Picture 22" descr="diag_configurator.png"/>
+          <p:cNvPr id="25" name="Picture 24" descr="diag_configurator.png"/>
           <p:cNvPicPr>
             <a:picLocks noChangeAspect="1"/>
           </p:cNvPicPr>
@@ -21523,7 +21235,7 @@
       </p:pic>
       <p:pic>
         <p:nvPicPr>
-          <p:cNvPr id="24" name="Picture 23" descr="fig_ocv_soc.png"/>
+          <p:cNvPr id="26" name="Picture 25" descr="fig_ocv_soc.png"/>
           <p:cNvPicPr>
             <a:picLocks noChangeAspect="1"/>
           </p:cNvPicPr>
@@ -21547,7 +21259,7 @@
       </p:pic>
       <p:sp>
         <p:nvSpPr>
-          <p:cNvPr id="25" name="TextBox 24"/>
+          <p:cNvPr id="27" name="TextBox 26"/>
           <p:cNvSpPr txBox="1"/>
           <p:nvPr/>
         </p:nvSpPr>

--- a/AI_PBMS_8Slide.pptx
+++ b/AI_PBMS_8Slide.pptx
@@ -10545,7 +10545,7 @@
                 </a:solidFill>
                 <a:latin typeface="Inter"/>
               </a:rPr>
-              <a:t>cell used in the 8S2P pack</a:t>
+              <a:t>NMC tier reference</a:t>
             </a:r>
           </a:p>
         </p:txBody>
@@ -11890,7 +11890,7 @@
                 </a:solidFill>
                 <a:latin typeface="Inter"/>
               </a:rPr>
-              <a:t>Sixteen LG INR21700-M50 cells.</a:t>
+              <a:t>Sixteen NMC cells in 8S2P.</a:t>
             </a:r>
           </a:p>
         </p:txBody>

--- a/AI_PBMS_8Slide.pptx
+++ b/AI_PBMS_8Slide.pptx
@@ -522,47 +522,52 @@
           </a:p>
           <a:p>
             <a:r>
-              <a:t>fine right up until a cell takes the pack down. The battery is thirty to forty</a:t>
-            </a:r>
-          </a:p>
-          <a:p>
-            <a:r>
-              <a:t>percent of what the vehicle costs, and in a series string one weak cell caps all</a:t>
-            </a:r>
-          </a:p>
-          <a:p>
-            <a:r>
-              <a:t>sixteen — so a single failing cell can retire an otherwise healthy pack. Today</a:t>
-            </a:r>
-          </a:p>
-          <a:p>
-            <a:r>
-              <a:t>the operator gets pack voltage, current and a fault light. They cannot tell you</a:t>
-            </a:r>
-          </a:p>
-          <a:p>
-            <a:r>
-              <a:t>which cell, how far gone it is, or how long they have. We could not buy data at</a:t>
-            </a:r>
-          </a:p>
-          <a:p>
-            <a:r>
-              <a:t>that resolution, so we built it: fifty cycles, a hundred hours, a hundred and</a:t>
-            </a:r>
-          </a:p>
-          <a:p>
-            <a:r>
-              <a:t>fifty-five thousand rows off a physical 8S2P pack. And the first thing it showed</a:t>
-            </a:r>
-          </a:p>
-          <a:p>
-            <a:r>
-              <a:t>us is on the right — cell one, two hundred and eighty-nine millivolts below its</a:t>
-            </a:r>
-          </a:p>
-          <a:p>
-            <a:r>
-              <a:t>neighbours, every single cycle, completely invisible to the pack-level reading.</a:t>
+              <a:t>fine right up until a cell takes the pack down. In a series string one weak cell</a:t>
+            </a:r>
+          </a:p>
+          <a:p>
+            <a:r>
+              <a:t>caps all sixteen, so a single failing cell can retire an otherwise healthy pack.</a:t>
+            </a:r>
+          </a:p>
+          <a:p>
+            <a:r>
+              <a:t>The person who has to catch that is a fleet technician servicing packs already</a:t>
+            </a:r>
+          </a:p>
+          <a:p>
+            <a:r>
+              <a:t>out in the field. Today they get pack voltage, current and a fault light. They</a:t>
+            </a:r>
+          </a:p>
+          <a:p>
+            <a:r>
+              <a:t>cannot tell you which cell is going, how far gone it is, or how long they have.</a:t>
+            </a:r>
+          </a:p>
+          <a:p>
+            <a:r>
+              <a:t>We could not buy data at the resolution needed to answer that, so we built it:</a:t>
+            </a:r>
+          </a:p>
+          <a:p>
+            <a:r>
+              <a:t>fifty cycles, over a hundred hours, a hundred and fifty-five thousand rows off a</a:t>
+            </a:r>
+          </a:p>
+          <a:p>
+            <a:r>
+              <a:t>physical 8S2P pack. And the first thing it showed us is on the right — cell one,</a:t>
+            </a:r>
+          </a:p>
+          <a:p>
+            <a:r>
+              <a:t>two hundred and eighty-nine millivolts below its neighbours, every single cycle,</a:t>
+            </a:r>
+          </a:p>
+          <a:p>
+            <a:r>
+              <a:t>completely invisible to the pack-level reading.</a:t>
             </a:r>
           </a:p>
         </p:txBody>
@@ -632,32 +637,52 @@
           <a:lstStyle/>
           <a:p>
             <a:r>
-              <a:t>Cost first. The unit we built is a Raspberry Pi 5 with its cooler and supply at</a:t>
-            </a:r>
-          </a:p>
-          <a:p>
-            <a:r>
-              <a:t>fifteen thousand rupees, and the 8S2P pack with its JBD BMS — bought together at</a:t>
-            </a:r>
-          </a:p>
-          <a:p>
-            <a:r>
-              <a:t>thirteen thousand, thermistors included. Add the harness and enclosure and that</a:t>
-            </a:r>
-          </a:p>
-          <a:p>
-            <a:r>
-              <a:t>is the whole retrofit box: it sits alongside a pack already in service, with no</a:t>
-            </a:r>
-          </a:p>
-          <a:p>
-            <a:r>
-              <a:t>redesign and no recertification. At volume the same logic moves onto a Zynq on</a:t>
-            </a:r>
-          </a:p>
-          <a:p>
-            <a:r>
-              <a:t>the BMS board itself and the per-unit cost drops. Who pays: the fleet operator,</a:t>
+              <a:t>Cost first, and these are our actual numbers. A Raspberry Pi 5 with cooler and</a:t>
+            </a:r>
+          </a:p>
+          <a:p>
+            <a:r>
+              <a:t>supply, fifteen thousand rupees. The 8S2P pack with its JBD BMS, bought together</a:t>
+            </a:r>
+          </a:p>
+          <a:p>
+            <a:r>
+              <a:t>at thirteen thousand, thermistors included. Twenty-eight thousand for the whole</a:t>
+            </a:r>
+          </a:p>
+          <a:p>
+            <a:r>
+              <a:t>retrofit unit, and it sits alongside a pack already in service — no redesign, no</a:t>
+            </a:r>
+          </a:p>
+          <a:p>
+            <a:r>
+              <a:t>recertification. Now the economics, and note what I am not claiming. I have no</a:t>
+            </a:r>
+          </a:p>
+          <a:p>
+            <a:r>
+              <a:t>field savings figure to show you. What I can show you is the arithmetic on those</a:t>
+            </a:r>
+          </a:p>
+          <a:p>
+            <a:r>
+              <a:t>two lines: the unit is twenty-eight thousand and it is not consumed, it moves to</a:t>
+            </a:r>
+          </a:p>
+          <a:p>
+            <a:r>
+              <a:t>the next pack. A replacement pack is thirteen thousand and it is consumed. Three</a:t>
+            </a:r>
+          </a:p>
+          <a:p>
+            <a:r>
+              <a:t>replacements deferred covers the unit, and you still own the unit. At volume the</a:t>
+            </a:r>
+          </a:p>
+          <a:p>
+            <a:r>
+              <a:t>same logic moves onto a Zynq on the BMS board and the per-unit cost drops. Who pays: the fleet operator,</a:t>
             </a:r>
           </a:p>
           <a:p>
@@ -672,12 +697,12 @@
           </a:p>
           <a:p>
             <a:r>
-              <a:t>right, and I want to be precise about this. Orion, Nuvation and the JBD-class</a:t>
-            </a:r>
-          </a:p>
-          <a:p>
-            <a:r>
-              <a:t>boards all do per-cell sensing — we are not claiming otherwise. What none of</a:t>
+              <a:t>right, compiled from their public product pages, and I want to be precise about</a:t>
+            </a:r>
+          </a:p>
+          <a:p>
+            <a:r>
+              <a:t>this. Orion, Nuvation and the JBD-class boards all do per-cell sensing — we are not claiming otherwise. What none of</a:t>
             </a:r>
           </a:p>
           <a:p>
@@ -5128,7 +5153,7 @@
         <p:spPr>
           <a:xfrm>
             <a:off x="768096" y="1810512"/>
-            <a:ext cx="5532120" cy="694944"/>
+            <a:ext cx="8046720" cy="694944"/>
           </a:xfrm>
           <a:prstGeom prst="rect">
             <a:avLst/>
@@ -5169,178 +5194,8 @@
         </p:nvSpPr>
         <p:spPr>
           <a:xfrm>
-            <a:off x="6266383" y="1609344"/>
-            <a:ext cx="1627632" cy="859536"/>
-          </a:xfrm>
-          <a:prstGeom prst="rect">
-            <a:avLst/>
-          </a:prstGeom>
-          <a:solidFill>
-            <a:srgbClr val="FFFFFF"/>
-          </a:solidFill>
-          <a:ln w="13970">
-            <a:solidFill>
-              <a:srgbClr val="B91C1C"/>
-            </a:solidFill>
-          </a:ln>
-          <a:effectLst/>
-        </p:spPr>
-        <p:style>
-          <a:lnRef idx="1">
-            <a:schemeClr val="accent1"/>
-          </a:lnRef>
-          <a:fillRef idx="3">
-            <a:schemeClr val="accent1"/>
-          </a:fillRef>
-          <a:effectRef idx="2">
-            <a:schemeClr val="accent1"/>
-          </a:effectRef>
-          <a:fontRef idx="minor">
-            <a:schemeClr val="lt1"/>
-          </a:fontRef>
-        </p:style>
-        <p:txBody>
-          <a:bodyPr rtlCol="0" anchor="ctr"/>
-          <a:lstStyle/>
-          <a:p/>
-        </p:txBody>
-      </p:sp>
-      <p:sp>
-        <p:nvSpPr>
-          <p:cNvPr id="12" name="TextBox 11"/>
-          <p:cNvSpPr txBox="1"/>
-          <p:nvPr/>
-        </p:nvSpPr>
-        <p:spPr>
-          <a:xfrm>
-            <a:off x="6266383" y="1664208"/>
-            <a:ext cx="1627632" cy="274320"/>
-          </a:xfrm>
-          <a:prstGeom prst="rect">
-            <a:avLst/>
-          </a:prstGeom>
-          <a:noFill/>
-        </p:spPr>
-        <p:txBody>
-          <a:bodyPr wrap="square" anchor="t" lIns="0" rIns="0" tIns="0" bIns="0">
-            <a:spAutoFit/>
-          </a:bodyPr>
-          <a:lstStyle/>
-          <a:p>
-            <a:pPr algn="ctr">
-              <a:lnSpc>
-                <a:spcPct val="118000"/>
-              </a:lnSpc>
-              <a:spcAft>
-                <a:spcPts val="0"/>
-              </a:spcAft>
-            </a:pPr>
-            <a:r>
-              <a:rPr sz="1500" b="1">
-                <a:solidFill>
-                  <a:srgbClr val="B91C1C"/>
-                </a:solidFill>
-                <a:latin typeface="Inter"/>
-              </a:rPr>
-              <a:t>30–40%</a:t>
-            </a:r>
-          </a:p>
-        </p:txBody>
-      </p:sp>
-      <p:sp>
-        <p:nvSpPr>
-          <p:cNvPr id="13" name="TextBox 12"/>
-          <p:cNvSpPr txBox="1"/>
-          <p:nvPr/>
-        </p:nvSpPr>
-        <p:spPr>
-          <a:xfrm>
-            <a:off x="6339535" y="1965960"/>
-            <a:ext cx="1481328" cy="256032"/>
-          </a:xfrm>
-          <a:prstGeom prst="rect">
-            <a:avLst/>
-          </a:prstGeom>
-          <a:noFill/>
-        </p:spPr>
-        <p:txBody>
-          <a:bodyPr wrap="square" anchor="t" lIns="0" rIns="0" tIns="0" bIns="0">
-            <a:spAutoFit/>
-          </a:bodyPr>
-          <a:lstStyle/>
-          <a:p>
-            <a:pPr algn="ctr">
-              <a:lnSpc>
-                <a:spcPct val="118000"/>
-              </a:lnSpc>
-              <a:spcAft>
-                <a:spcPts val="0"/>
-              </a:spcAft>
-            </a:pPr>
-            <a:r>
-              <a:rPr sz="760" b="0">
-                <a:solidFill>
-                  <a:srgbClr val="475569"/>
-                </a:solidFill>
-                <a:latin typeface="Inter"/>
-              </a:rPr>
-              <a:t>of EV cost is the battery pack</a:t>
-            </a:r>
-          </a:p>
-        </p:txBody>
-      </p:sp>
-      <p:sp>
-        <p:nvSpPr>
-          <p:cNvPr id="14" name="TextBox 13"/>
-          <p:cNvSpPr txBox="1"/>
-          <p:nvPr/>
-        </p:nvSpPr>
-        <p:spPr>
-          <a:xfrm>
-            <a:off x="6339535" y="2231136"/>
-            <a:ext cx="1481328" cy="182880"/>
-          </a:xfrm>
-          <a:prstGeom prst="rect">
-            <a:avLst/>
-          </a:prstGeom>
-          <a:noFill/>
-        </p:spPr>
-        <p:txBody>
-          <a:bodyPr wrap="square" anchor="t" lIns="0" rIns="0" tIns="0" bIns="0">
-            <a:spAutoFit/>
-          </a:bodyPr>
-          <a:lstStyle/>
-          <a:p>
-            <a:pPr algn="ctr">
-              <a:lnSpc>
-                <a:spcPct val="118000"/>
-              </a:lnSpc>
-              <a:spcAft>
-                <a:spcPts val="0"/>
-              </a:spcAft>
-            </a:pPr>
-            <a:r>
-              <a:rPr sz="680" b="0">
-                <a:solidFill>
-                  <a:srgbClr val="B91C1C"/>
-                </a:solidFill>
-                <a:latin typeface="Inter"/>
-              </a:rPr>
-              <a:t>[VERIFY — source?]</a:t>
-            </a:r>
-          </a:p>
-        </p:txBody>
-      </p:sp>
-      <p:sp>
-        <p:nvSpPr>
-          <p:cNvPr id="15" name="Rectangle 14"/>
-          <p:cNvSpPr/>
-          <p:nvPr/>
-        </p:nvSpPr>
-        <p:spPr>
-          <a:xfrm>
-            <a:off x="8040319" y="1609344"/>
-            <a:ext cx="1627632" cy="859536"/>
+            <a:off x="9338767" y="1609344"/>
+            <a:ext cx="2103120" cy="859536"/>
           </a:xfrm>
           <a:prstGeom prst="rect">
             <a:avLst/>
@@ -5377,352 +5232,182 @@
       </p:sp>
       <p:sp>
         <p:nvSpPr>
+          <p:cNvPr id="12" name="TextBox 11"/>
+          <p:cNvSpPr txBox="1"/>
+          <p:nvPr/>
+        </p:nvSpPr>
+        <p:spPr>
+          <a:xfrm>
+            <a:off x="9338767" y="1664208"/>
+            <a:ext cx="2103120" cy="274320"/>
+          </a:xfrm>
+          <a:prstGeom prst="rect">
+            <a:avLst/>
+          </a:prstGeom>
+          <a:noFill/>
+        </p:spPr>
+        <p:txBody>
+          <a:bodyPr wrap="square" anchor="t" lIns="0" rIns="0" tIns="0" bIns="0">
+            <a:spAutoFit/>
+          </a:bodyPr>
+          <a:lstStyle/>
+          <a:p>
+            <a:pPr algn="ctr">
+              <a:lnSpc>
+                <a:spcPct val="118000"/>
+              </a:lnSpc>
+              <a:spcAft>
+                <a:spcPts val="0"/>
+              </a:spcAft>
+            </a:pPr>
+            <a:r>
+              <a:rPr sz="1500" b="1">
+                <a:solidFill>
+                  <a:srgbClr val="0E7490"/>
+                </a:solidFill>
+                <a:latin typeface="Inter"/>
+              </a:rPr>
+              <a:t>1 of 16</a:t>
+            </a:r>
+          </a:p>
+        </p:txBody>
+      </p:sp>
+      <p:sp>
+        <p:nvSpPr>
+          <p:cNvPr id="13" name="TextBox 12"/>
+          <p:cNvSpPr txBox="1"/>
+          <p:nvPr/>
+        </p:nvSpPr>
+        <p:spPr>
+          <a:xfrm>
+            <a:off x="9411919" y="1975104"/>
+            <a:ext cx="1956815" cy="219456"/>
+          </a:xfrm>
+          <a:prstGeom prst="rect">
+            <a:avLst/>
+          </a:prstGeom>
+          <a:noFill/>
+        </p:spPr>
+        <p:txBody>
+          <a:bodyPr wrap="square" anchor="t" lIns="0" rIns="0" tIns="0" bIns="0">
+            <a:spAutoFit/>
+          </a:bodyPr>
+          <a:lstStyle/>
+          <a:p>
+            <a:pPr algn="ctr">
+              <a:lnSpc>
+                <a:spcPct val="118000"/>
+              </a:lnSpc>
+              <a:spcAft>
+                <a:spcPts val="0"/>
+              </a:spcAft>
+            </a:pPr>
+            <a:r>
+              <a:rPr sz="819" b="0">
+                <a:solidFill>
+                  <a:srgbClr val="475569"/>
+                </a:solidFill>
+                <a:latin typeface="Inter"/>
+              </a:rPr>
+              <a:t>a weak cell caps the whole string</a:t>
+            </a:r>
+          </a:p>
+        </p:txBody>
+      </p:sp>
+      <p:sp>
+        <p:nvSpPr>
+          <p:cNvPr id="14" name="TextBox 13"/>
+          <p:cNvSpPr txBox="1"/>
+          <p:nvPr/>
+        </p:nvSpPr>
+        <p:spPr>
+          <a:xfrm>
+            <a:off x="9411919" y="2212848"/>
+            <a:ext cx="1956815" cy="201168"/>
+          </a:xfrm>
+          <a:prstGeom prst="rect">
+            <a:avLst/>
+          </a:prstGeom>
+          <a:noFill/>
+        </p:spPr>
+        <p:txBody>
+          <a:bodyPr wrap="square" anchor="t" lIns="0" rIns="0" tIns="0" bIns="0">
+            <a:spAutoFit/>
+          </a:bodyPr>
+          <a:lstStyle/>
+          <a:p>
+            <a:pPr algn="ctr">
+              <a:lnSpc>
+                <a:spcPct val="118000"/>
+              </a:lnSpc>
+              <a:spcAft>
+                <a:spcPts val="0"/>
+              </a:spcAft>
+            </a:pPr>
+            <a:r>
+              <a:rPr sz="720" b="0">
+                <a:solidFill>
+                  <a:srgbClr val="475569"/>
+                </a:solidFill>
+                <a:latin typeface="Inter"/>
+              </a:rPr>
+              <a:t>derived from our 8S2P</a:t>
+            </a:r>
+          </a:p>
+        </p:txBody>
+      </p:sp>
+      <p:sp>
+        <p:nvSpPr>
+          <p:cNvPr id="15" name="TextBox 14"/>
+          <p:cNvSpPr txBox="1"/>
+          <p:nvPr/>
+        </p:nvSpPr>
+        <p:spPr>
+          <a:xfrm>
+            <a:off x="566928" y="3493008"/>
+            <a:ext cx="5797296" cy="219456"/>
+          </a:xfrm>
+          <a:prstGeom prst="rect">
+            <a:avLst/>
+          </a:prstGeom>
+          <a:noFill/>
+        </p:spPr>
+        <p:txBody>
+          <a:bodyPr wrap="square" anchor="t" lIns="0" rIns="0" tIns="0" bIns="0">
+            <a:spAutoFit/>
+          </a:bodyPr>
+          <a:lstStyle/>
+          <a:p>
+            <a:pPr algn="l">
+              <a:lnSpc>
+                <a:spcPct val="118000"/>
+              </a:lnSpc>
+              <a:spcAft>
+                <a:spcPts val="0"/>
+              </a:spcAft>
+            </a:pPr>
+            <a:r>
+              <a:rPr sz="950" b="1">
+                <a:solidFill>
+                  <a:srgbClr val="0E7490"/>
+                </a:solidFill>
+                <a:latin typeface="Inter"/>
+              </a:rPr>
+              <a:t>WHO OPERATES THIS, AND WHAT THEY HAVE TODAY</a:t>
+            </a:r>
+          </a:p>
+        </p:txBody>
+      </p:sp>
+      <p:sp>
+        <p:nvSpPr>
           <p:cNvPr id="16" name="TextBox 15"/>
           <p:cNvSpPr txBox="1"/>
           <p:nvPr/>
         </p:nvSpPr>
         <p:spPr>
           <a:xfrm>
-            <a:off x="8040319" y="1664208"/>
-            <a:ext cx="1627632" cy="274320"/>
-          </a:xfrm>
-          <a:prstGeom prst="rect">
-            <a:avLst/>
-          </a:prstGeom>
-          <a:noFill/>
-        </p:spPr>
-        <p:txBody>
-          <a:bodyPr wrap="square" anchor="t" lIns="0" rIns="0" tIns="0" bIns="0">
-            <a:spAutoFit/>
-          </a:bodyPr>
-          <a:lstStyle/>
-          <a:p>
-            <a:pPr algn="ctr">
-              <a:lnSpc>
-                <a:spcPct val="118000"/>
-              </a:lnSpc>
-              <a:spcAft>
-                <a:spcPts val="0"/>
-              </a:spcAft>
-            </a:pPr>
-            <a:r>
-              <a:rPr sz="1500" b="1">
-                <a:solidFill>
-                  <a:srgbClr val="0E7490"/>
-                </a:solidFill>
-                <a:latin typeface="Inter"/>
-              </a:rPr>
-              <a:t>1 of 16</a:t>
-            </a:r>
-          </a:p>
-        </p:txBody>
-      </p:sp>
-      <p:sp>
-        <p:nvSpPr>
-          <p:cNvPr id="17" name="TextBox 16"/>
-          <p:cNvSpPr txBox="1"/>
-          <p:nvPr/>
-        </p:nvSpPr>
-        <p:spPr>
-          <a:xfrm>
-            <a:off x="8113471" y="1965960"/>
-            <a:ext cx="1481328" cy="256032"/>
-          </a:xfrm>
-          <a:prstGeom prst="rect">
-            <a:avLst/>
-          </a:prstGeom>
-          <a:noFill/>
-        </p:spPr>
-        <p:txBody>
-          <a:bodyPr wrap="square" anchor="t" lIns="0" rIns="0" tIns="0" bIns="0">
-            <a:spAutoFit/>
-          </a:bodyPr>
-          <a:lstStyle/>
-          <a:p>
-            <a:pPr algn="ctr">
-              <a:lnSpc>
-                <a:spcPct val="118000"/>
-              </a:lnSpc>
-              <a:spcAft>
-                <a:spcPts val="0"/>
-              </a:spcAft>
-            </a:pPr>
-            <a:r>
-              <a:rPr sz="760" b="0">
-                <a:solidFill>
-                  <a:srgbClr val="475569"/>
-                </a:solidFill>
-                <a:latin typeface="Inter"/>
-              </a:rPr>
-              <a:t>a weak cell caps the whole string</a:t>
-            </a:r>
-          </a:p>
-        </p:txBody>
-      </p:sp>
-      <p:sp>
-        <p:nvSpPr>
-          <p:cNvPr id="18" name="TextBox 17"/>
-          <p:cNvSpPr txBox="1"/>
-          <p:nvPr/>
-        </p:nvSpPr>
-        <p:spPr>
-          <a:xfrm>
-            <a:off x="8113471" y="2231136"/>
-            <a:ext cx="1481328" cy="182880"/>
-          </a:xfrm>
-          <a:prstGeom prst="rect">
-            <a:avLst/>
-          </a:prstGeom>
-          <a:noFill/>
-        </p:spPr>
-        <p:txBody>
-          <a:bodyPr wrap="square" anchor="t" lIns="0" rIns="0" tIns="0" bIns="0">
-            <a:spAutoFit/>
-          </a:bodyPr>
-          <a:lstStyle/>
-          <a:p>
-            <a:pPr algn="ctr">
-              <a:lnSpc>
-                <a:spcPct val="118000"/>
-              </a:lnSpc>
-              <a:spcAft>
-                <a:spcPts val="0"/>
-              </a:spcAft>
-            </a:pPr>
-            <a:r>
-              <a:rPr sz="680" b="0">
-                <a:solidFill>
-                  <a:srgbClr val="475569"/>
-                </a:solidFill>
-                <a:latin typeface="Inter"/>
-              </a:rPr>
-              <a:t>derived from our 8S2P</a:t>
-            </a:r>
-          </a:p>
-        </p:txBody>
-      </p:sp>
-      <p:sp>
-        <p:nvSpPr>
-          <p:cNvPr id="19" name="Rectangle 18"/>
-          <p:cNvSpPr/>
-          <p:nvPr/>
-        </p:nvSpPr>
-        <p:spPr>
-          <a:xfrm>
-            <a:off x="9814255" y="1609344"/>
-            <a:ext cx="1627632" cy="859536"/>
-          </a:xfrm>
-          <a:prstGeom prst="rect">
-            <a:avLst/>
-          </a:prstGeom>
-          <a:solidFill>
-            <a:srgbClr val="FFFFFF"/>
-          </a:solidFill>
-          <a:ln w="13970">
-            <a:solidFill>
-              <a:srgbClr val="B91C1C"/>
-            </a:solidFill>
-          </a:ln>
-          <a:effectLst/>
-        </p:spPr>
-        <p:style>
-          <a:lnRef idx="1">
-            <a:schemeClr val="accent1"/>
-          </a:lnRef>
-          <a:fillRef idx="3">
-            <a:schemeClr val="accent1"/>
-          </a:fillRef>
-          <a:effectRef idx="2">
-            <a:schemeClr val="accent1"/>
-          </a:effectRef>
-          <a:fontRef idx="minor">
-            <a:schemeClr val="lt1"/>
-          </a:fontRef>
-        </p:style>
-        <p:txBody>
-          <a:bodyPr rtlCol="0" anchor="ctr"/>
-          <a:lstStyle/>
-          <a:p/>
-        </p:txBody>
-      </p:sp>
-      <p:sp>
-        <p:nvSpPr>
-          <p:cNvPr id="20" name="TextBox 19"/>
-          <p:cNvSpPr txBox="1"/>
-          <p:nvPr/>
-        </p:nvSpPr>
-        <p:spPr>
-          <a:xfrm>
-            <a:off x="9814255" y="1664208"/>
-            <a:ext cx="1627632" cy="274320"/>
-          </a:xfrm>
-          <a:prstGeom prst="rect">
-            <a:avLst/>
-          </a:prstGeom>
-          <a:noFill/>
-        </p:spPr>
-        <p:txBody>
-          <a:bodyPr wrap="square" anchor="t" lIns="0" rIns="0" tIns="0" bIns="0">
-            <a:spAutoFit/>
-          </a:bodyPr>
-          <a:lstStyle/>
-          <a:p>
-            <a:pPr algn="ctr">
-              <a:lnSpc>
-                <a:spcPct val="118000"/>
-              </a:lnSpc>
-              <a:spcAft>
-                <a:spcPts val="0"/>
-              </a:spcAft>
-            </a:pPr>
-            <a:r>
-              <a:rPr sz="1500" b="1">
-                <a:solidFill>
-                  <a:srgbClr val="B91C1C"/>
-                </a:solidFill>
-                <a:latin typeface="Inter"/>
-              </a:rPr>
-              <a:t>[FILL]</a:t>
-            </a:r>
-          </a:p>
-        </p:txBody>
-      </p:sp>
-      <p:sp>
-        <p:nvSpPr>
-          <p:cNvPr id="21" name="TextBox 20"/>
-          <p:cNvSpPr txBox="1"/>
-          <p:nvPr/>
-        </p:nvSpPr>
-        <p:spPr>
-          <a:xfrm>
-            <a:off x="9887407" y="1965960"/>
-            <a:ext cx="1481328" cy="256032"/>
-          </a:xfrm>
-          <a:prstGeom prst="rect">
-            <a:avLst/>
-          </a:prstGeom>
-          <a:noFill/>
-        </p:spPr>
-        <p:txBody>
-          <a:bodyPr wrap="square" anchor="t" lIns="0" rIns="0" tIns="0" bIns="0">
-            <a:spAutoFit/>
-          </a:bodyPr>
-          <a:lstStyle/>
-          <a:p>
-            <a:pPr algn="ctr">
-              <a:lnSpc>
-                <a:spcPct val="118000"/>
-              </a:lnSpc>
-              <a:spcAft>
-                <a:spcPts val="0"/>
-              </a:spcAft>
-            </a:pPr>
-            <a:r>
-              <a:rPr sz="760" b="0">
-                <a:solidFill>
-                  <a:srgbClr val="475569"/>
-                </a:solidFill>
-                <a:latin typeface="Inter"/>
-              </a:rPr>
-              <a:t>India EV registrations, latest FY</a:t>
-            </a:r>
-          </a:p>
-        </p:txBody>
-      </p:sp>
-      <p:sp>
-        <p:nvSpPr>
-          <p:cNvPr id="22" name="TextBox 21"/>
-          <p:cNvSpPr txBox="1"/>
-          <p:nvPr/>
-        </p:nvSpPr>
-        <p:spPr>
-          <a:xfrm>
-            <a:off x="9887407" y="2231136"/>
-            <a:ext cx="1481328" cy="182880"/>
-          </a:xfrm>
-          <a:prstGeom prst="rect">
-            <a:avLst/>
-          </a:prstGeom>
-          <a:noFill/>
-        </p:spPr>
-        <p:txBody>
-          <a:bodyPr wrap="square" anchor="t" lIns="0" rIns="0" tIns="0" bIns="0">
-            <a:spAutoFit/>
-          </a:bodyPr>
-          <a:lstStyle/>
-          <a:p>
-            <a:pPr algn="ctr">
-              <a:lnSpc>
-                <a:spcPct val="118000"/>
-              </a:lnSpc>
-              <a:spcAft>
-                <a:spcPts val="0"/>
-              </a:spcAft>
-            </a:pPr>
-            <a:r>
-              <a:rPr sz="680" b="0">
-                <a:solidFill>
-                  <a:srgbClr val="B91C1C"/>
-                </a:solidFill>
-                <a:latin typeface="Inter"/>
-              </a:rPr>
-              <a:t>[VERIFY — source?]</a:t>
-            </a:r>
-          </a:p>
-        </p:txBody>
-      </p:sp>
-      <p:sp>
-        <p:nvSpPr>
-          <p:cNvPr id="23" name="TextBox 22"/>
-          <p:cNvSpPr txBox="1"/>
-          <p:nvPr/>
-        </p:nvSpPr>
-        <p:spPr>
-          <a:xfrm>
-            <a:off x="566928" y="2706624"/>
-            <a:ext cx="5797296" cy="219456"/>
-          </a:xfrm>
-          <a:prstGeom prst="rect">
-            <a:avLst/>
-          </a:prstGeom>
-          <a:noFill/>
-        </p:spPr>
-        <p:txBody>
-          <a:bodyPr wrap="square" anchor="t" lIns="0" rIns="0" tIns="0" bIns="0">
-            <a:spAutoFit/>
-          </a:bodyPr>
-          <a:lstStyle/>
-          <a:p>
-            <a:pPr algn="l">
-              <a:lnSpc>
-                <a:spcPct val="118000"/>
-              </a:lnSpc>
-              <a:spcAft>
-                <a:spcPts val="0"/>
-              </a:spcAft>
-            </a:pPr>
-            <a:r>
-              <a:rPr sz="950" b="1">
-                <a:solidFill>
-                  <a:srgbClr val="0E7490"/>
-                </a:solidFill>
-                <a:latin typeface="Inter"/>
-              </a:rPr>
-              <a:t>WHO OPERATES THIS, AND WHAT THEY HAVE TODAY</a:t>
-            </a:r>
-          </a:p>
-        </p:txBody>
-      </p:sp>
-      <p:sp>
-        <p:nvSpPr>
-          <p:cNvPr id="24" name="TextBox 23"/>
-          <p:cNvSpPr txBox="1"/>
-          <p:nvPr/>
-        </p:nvSpPr>
-        <p:spPr>
-          <a:xfrm>
-            <a:off x="566928" y="2980944"/>
-            <a:ext cx="5797296" cy="1554480"/>
+            <a:off x="566928" y="3803904"/>
+            <a:ext cx="5797296" cy="1463040"/>
           </a:xfrm>
           <a:prstGeom prst="rect">
             <a:avLst/>
@@ -5740,7 +5425,7 @@
                 <a:spcPct val="116000"/>
               </a:lnSpc>
               <a:spcAft>
-                <a:spcPts val="600"/>
+                <a:spcPts val="1300"/>
               </a:spcAft>
               <a:buClr>
                 <a:srgbClr val="0E7490"/>
@@ -5750,13 +5435,13 @@
               <a:buChar char="●"/>
             </a:pPr>
             <a:r>
-              <a:rPr sz="1300">
+              <a:rPr sz="1500">
                 <a:solidFill>
                   <a:srgbClr val="0F172A"/>
                 </a:solidFill>
                 <a:latin typeface="Inter"/>
               </a:rPr>
-              <a:t>[EVIDENCE: operator role — fleet technician? depot? OEM service?]</a:t>
+              <a:t>A fleet technician servicing packs already in the field.</a:t>
             </a:r>
           </a:p>
           <a:p>
@@ -5765,7 +5450,7 @@
                 <a:spcPct val="116000"/>
               </a:lnSpc>
               <a:spcAft>
-                <a:spcPts val="600"/>
+                <a:spcPts val="1300"/>
               </a:spcAft>
               <a:buClr>
                 <a:srgbClr val="0E7490"/>
@@ -5775,7 +5460,7 @@
               <a:buChar char="●"/>
             </a:pPr>
             <a:r>
-              <a:rPr sz="1300">
+              <a:rPr sz="1500">
                 <a:solidFill>
                   <a:srgbClr val="0F172A"/>
                 </a:solidFill>
@@ -5790,7 +5475,7 @@
                 <a:spcPct val="116000"/>
               </a:lnSpc>
               <a:spcAft>
-                <a:spcPts val="600"/>
+                <a:spcPts val="1300"/>
               </a:spcAft>
               <a:buClr>
                 <a:srgbClr val="0E7490"/>
@@ -5800,149 +5485,20 @@
               <a:buChar char="●"/>
             </a:pPr>
             <a:r>
-              <a:rPr sz="1300">
+              <a:rPr sz="1500">
                 <a:solidFill>
                   <a:srgbClr val="0F172A"/>
                 </a:solidFill>
                 <a:latin typeface="Inter"/>
               </a:rPr>
               <a:t>They cannot see which cell, how degraded, or how soon.</a:t>
-            </a:r>
-          </a:p>
-        </p:txBody>
-      </p:sp>
-      <p:sp>
-        <p:nvSpPr>
-          <p:cNvPr id="25" name="Rectangle 24"/>
-          <p:cNvSpPr/>
-          <p:nvPr/>
-        </p:nvSpPr>
-        <p:spPr>
-          <a:xfrm>
-            <a:off x="566928" y="4315968"/>
-            <a:ext cx="5797296" cy="1426464"/>
-          </a:xfrm>
-          <a:prstGeom prst="rect">
-            <a:avLst/>
-          </a:prstGeom>
-          <a:solidFill>
-            <a:srgbClr val="F1F5F9"/>
-          </a:solidFill>
-          <a:ln w="9525">
-            <a:solidFill>
-              <a:srgbClr val="CBD5E1"/>
-            </a:solidFill>
-          </a:ln>
-          <a:effectLst/>
-        </p:spPr>
-        <p:style>
-          <a:lnRef idx="1">
-            <a:schemeClr val="accent1"/>
-          </a:lnRef>
-          <a:fillRef idx="3">
-            <a:schemeClr val="accent1"/>
-          </a:fillRef>
-          <a:effectRef idx="2">
-            <a:schemeClr val="accent1"/>
-          </a:effectRef>
-          <a:fontRef idx="minor">
-            <a:schemeClr val="lt1"/>
-          </a:fontRef>
-        </p:style>
-        <p:txBody>
-          <a:bodyPr rtlCol="0" anchor="ctr"/>
-          <a:lstStyle/>
-          <a:p/>
-        </p:txBody>
-      </p:sp>
-      <p:sp>
-        <p:nvSpPr>
-          <p:cNvPr id="26" name="TextBox 25"/>
-          <p:cNvSpPr txBox="1"/>
-          <p:nvPr/>
-        </p:nvSpPr>
-        <p:spPr>
-          <a:xfrm>
-            <a:off x="768096" y="4425696"/>
-            <a:ext cx="5394959" cy="219456"/>
-          </a:xfrm>
-          <a:prstGeom prst="rect">
-            <a:avLst/>
-          </a:prstGeom>
-          <a:noFill/>
-        </p:spPr>
-        <p:txBody>
-          <a:bodyPr wrap="square" anchor="t" lIns="0" rIns="0" tIns="0" bIns="0">
-            <a:spAutoFit/>
-          </a:bodyPr>
-          <a:lstStyle/>
-          <a:p>
-            <a:pPr algn="l">
-              <a:lnSpc>
-                <a:spcPct val="118000"/>
-              </a:lnSpc>
-              <a:spcAft>
-                <a:spcPts val="0"/>
-              </a:spcAft>
-            </a:pPr>
-            <a:r>
-              <a:rPr sz="950" b="1">
-                <a:solidFill>
-                  <a:srgbClr val="B45309"/>
-                </a:solidFill>
-                <a:latin typeface="Inter"/>
-              </a:rPr>
-              <a:t>FIELD EVIDENCE TO INSERT</a:t>
-            </a:r>
-          </a:p>
-        </p:txBody>
-      </p:sp>
-      <p:sp>
-        <p:nvSpPr>
-          <p:cNvPr id="27" name="TextBox 26"/>
-          <p:cNvSpPr txBox="1"/>
-          <p:nvPr/>
-        </p:nvSpPr>
-        <p:spPr>
-          <a:xfrm>
-            <a:off x="768096" y="4681728"/>
-            <a:ext cx="5394959" cy="950976"/>
-          </a:xfrm>
-          <a:prstGeom prst="rect">
-            <a:avLst/>
-          </a:prstGeom>
-          <a:noFill/>
-        </p:spPr>
-        <p:txBody>
-          <a:bodyPr wrap="square" anchor="t" lIns="0" rIns="0" tIns="0" bIns="0">
-            <a:spAutoFit/>
-          </a:bodyPr>
-          <a:lstStyle/>
-          <a:p>
-            <a:pPr algn="l">
-              <a:lnSpc>
-                <a:spcPct val="142000"/>
-              </a:lnSpc>
-              <a:spcAft>
-                <a:spcPts val="0"/>
-              </a:spcAft>
-            </a:pPr>
-            <a:r>
-              <a:rPr sz="1150" b="0">
-                <a:solidFill>
-                  <a:srgbClr val="0F172A"/>
-                </a:solidFill>
-                <a:latin typeface="Inter"/>
-              </a:rPr>
-              <a:t>[EVIDENCE: fleet operator interview — what they said]
-[EVIDENCE: time or cost to diagnose one pack today]</a:t>
             </a:r>
           </a:p>
         </p:txBody>
       </p:sp>
       <p:pic>
         <p:nvPicPr>
-          <p:cNvPr id="28" name="Picture 27" descr="fig_cell_traces.png"/>
+          <p:cNvPr id="17" name="Picture 16" descr="fig_cell_traces.png"/>
           <p:cNvPicPr>
             <a:picLocks noChangeAspect="1"/>
           </p:cNvPicPr>
@@ -5956,8 +5512,8 @@
         </p:blipFill>
         <p:spPr>
           <a:xfrm>
-            <a:off x="7562967" y="2651760"/>
-            <a:ext cx="3192240" cy="2267712"/>
+            <a:off x="7472863" y="2615184"/>
+            <a:ext cx="3372447" cy="2395728"/>
           </a:xfrm>
           <a:prstGeom prst="rect">
             <a:avLst/>
@@ -5966,13 +5522,13 @@
       </p:pic>
       <p:sp>
         <p:nvSpPr>
-          <p:cNvPr id="29" name="TextBox 28"/>
-          <p:cNvSpPr txBox="1"/>
-          <p:nvPr/>
-        </p:nvSpPr>
-        <p:spPr>
-          <a:xfrm>
-            <a:off x="6693408" y="4992624"/>
+          <p:cNvPr id="18" name="TextBox 17"/>
+          <p:cNvSpPr txBox="1"/>
+          <p:nvPr/>
+        </p:nvSpPr>
+        <p:spPr>
+          <a:xfrm>
+            <a:off x="6693408" y="5065776"/>
             <a:ext cx="4931359" cy="237744"/>
           </a:xfrm>
           <a:prstGeom prst="rect">
@@ -6008,14 +5564,14 @@
       </p:sp>
       <p:sp>
         <p:nvSpPr>
-          <p:cNvPr id="30" name="TextBox 29"/>
-          <p:cNvSpPr txBox="1"/>
-          <p:nvPr/>
-        </p:nvSpPr>
-        <p:spPr>
-          <a:xfrm>
-            <a:off x="6693408" y="5285232"/>
-            <a:ext cx="4931359" cy="219456"/>
+          <p:cNvPr id="19" name="TextBox 18"/>
+          <p:cNvSpPr txBox="1"/>
+          <p:nvPr/>
+        </p:nvSpPr>
+        <p:spPr>
+          <a:xfrm>
+            <a:off x="566928" y="5321808"/>
+            <a:ext cx="11057839" cy="219456"/>
           </a:xfrm>
           <a:prstGeom prst="rect">
             <a:avLst/>
@@ -6050,14 +5606,14 @@
       </p:sp>
       <p:sp>
         <p:nvSpPr>
-          <p:cNvPr id="31" name="Rectangle 30"/>
+          <p:cNvPr id="20" name="Rectangle 19"/>
           <p:cNvSpPr/>
           <p:nvPr/>
         </p:nvSpPr>
         <p:spPr>
           <a:xfrm>
-            <a:off x="6693408" y="5541264"/>
-            <a:ext cx="1164259" cy="530352"/>
+            <a:off x="566928" y="5596128"/>
+            <a:ext cx="2668447" cy="566928"/>
           </a:xfrm>
           <a:prstGeom prst="rect">
             <a:avLst/>
@@ -6094,14 +5650,14 @@
       </p:sp>
       <p:sp>
         <p:nvSpPr>
-          <p:cNvPr id="32" name="TextBox 31"/>
-          <p:cNvSpPr txBox="1"/>
-          <p:nvPr/>
-        </p:nvSpPr>
-        <p:spPr>
-          <a:xfrm>
-            <a:off x="6693408" y="5577840"/>
-            <a:ext cx="1164259" cy="237744"/>
+          <p:cNvPr id="21" name="TextBox 20"/>
+          <p:cNvSpPr txBox="1"/>
+          <p:nvPr/>
+        </p:nvSpPr>
+        <p:spPr>
+          <a:xfrm>
+            <a:off x="566928" y="5650992"/>
+            <a:ext cx="2668447" cy="256032"/>
           </a:xfrm>
           <a:prstGeom prst="rect">
             <a:avLst/>
@@ -6123,7 +5679,7 @@
               </a:spcAft>
             </a:pPr>
             <a:r>
-              <a:rPr sz="1150" b="1">
+              <a:rPr sz="1300" b="1">
                 <a:solidFill>
                   <a:srgbClr val="0E7490"/>
                 </a:solidFill>
@@ -6136,14 +5692,14 @@
       </p:sp>
       <p:sp>
         <p:nvSpPr>
-          <p:cNvPr id="33" name="TextBox 32"/>
-          <p:cNvSpPr txBox="1"/>
-          <p:nvPr/>
-        </p:nvSpPr>
-        <p:spPr>
-          <a:xfrm>
-            <a:off x="6693408" y="5833872"/>
-            <a:ext cx="1164259" cy="201168"/>
+          <p:cNvPr id="22" name="TextBox 21"/>
+          <p:cNvSpPr txBox="1"/>
+          <p:nvPr/>
+        </p:nvSpPr>
+        <p:spPr>
+          <a:xfrm>
+            <a:off x="566928" y="5925312"/>
+            <a:ext cx="2668447" cy="201168"/>
           </a:xfrm>
           <a:prstGeom prst="rect">
             <a:avLst/>
@@ -6165,7 +5721,7 @@
               </a:spcAft>
             </a:pPr>
             <a:r>
-              <a:rPr sz="760" b="0">
+              <a:rPr sz="819" b="0">
                 <a:solidFill>
                   <a:srgbClr val="475569"/>
                 </a:solidFill>
@@ -6178,14 +5734,14 @@
       </p:sp>
       <p:sp>
         <p:nvSpPr>
-          <p:cNvPr id="34" name="Rectangle 33"/>
+          <p:cNvPr id="23" name="Rectangle 22"/>
           <p:cNvSpPr/>
           <p:nvPr/>
         </p:nvSpPr>
         <p:spPr>
           <a:xfrm>
-            <a:off x="7949107" y="5541264"/>
-            <a:ext cx="1164259" cy="530352"/>
+            <a:off x="3363391" y="5596128"/>
+            <a:ext cx="2668447" cy="566928"/>
           </a:xfrm>
           <a:prstGeom prst="rect">
             <a:avLst/>
@@ -6222,14 +5778,14 @@
       </p:sp>
       <p:sp>
         <p:nvSpPr>
-          <p:cNvPr id="35" name="TextBox 34"/>
-          <p:cNvSpPr txBox="1"/>
-          <p:nvPr/>
-        </p:nvSpPr>
-        <p:spPr>
-          <a:xfrm>
-            <a:off x="7949107" y="5577840"/>
-            <a:ext cx="1164259" cy="237744"/>
+          <p:cNvPr id="24" name="TextBox 23"/>
+          <p:cNvSpPr txBox="1"/>
+          <p:nvPr/>
+        </p:nvSpPr>
+        <p:spPr>
+          <a:xfrm>
+            <a:off x="3363391" y="5650992"/>
+            <a:ext cx="2668447" cy="256032"/>
           </a:xfrm>
           <a:prstGeom prst="rect">
             <a:avLst/>
@@ -6251,7 +5807,7 @@
               </a:spcAft>
             </a:pPr>
             <a:r>
-              <a:rPr sz="1150" b="1">
+              <a:rPr sz="1300" b="1">
                 <a:solidFill>
                   <a:srgbClr val="0E7490"/>
                 </a:solidFill>
@@ -6264,14 +5820,14 @@
       </p:sp>
       <p:sp>
         <p:nvSpPr>
-          <p:cNvPr id="36" name="TextBox 35"/>
-          <p:cNvSpPr txBox="1"/>
-          <p:nvPr/>
-        </p:nvSpPr>
-        <p:spPr>
-          <a:xfrm>
-            <a:off x="7949107" y="5833872"/>
-            <a:ext cx="1164259" cy="201168"/>
+          <p:cNvPr id="25" name="TextBox 24"/>
+          <p:cNvSpPr txBox="1"/>
+          <p:nvPr/>
+        </p:nvSpPr>
+        <p:spPr>
+          <a:xfrm>
+            <a:off x="3363391" y="5925312"/>
+            <a:ext cx="2668447" cy="201168"/>
           </a:xfrm>
           <a:prstGeom prst="rect">
             <a:avLst/>
@@ -6293,7 +5849,7 @@
               </a:spcAft>
             </a:pPr>
             <a:r>
-              <a:rPr sz="760" b="0">
+              <a:rPr sz="819" b="0">
                 <a:solidFill>
                   <a:srgbClr val="475569"/>
                 </a:solidFill>
@@ -6306,14 +5862,14 @@
       </p:sp>
       <p:sp>
         <p:nvSpPr>
-          <p:cNvPr id="37" name="Rectangle 36"/>
+          <p:cNvPr id="26" name="Rectangle 25"/>
           <p:cNvSpPr/>
           <p:nvPr/>
         </p:nvSpPr>
         <p:spPr>
           <a:xfrm>
-            <a:off x="9204807" y="5541264"/>
-            <a:ext cx="1164259" cy="530352"/>
+            <a:off x="6159855" y="5596128"/>
+            <a:ext cx="2668447" cy="566928"/>
           </a:xfrm>
           <a:prstGeom prst="rect">
             <a:avLst/>
@@ -6350,14 +5906,14 @@
       </p:sp>
       <p:sp>
         <p:nvSpPr>
-          <p:cNvPr id="38" name="TextBox 37"/>
-          <p:cNvSpPr txBox="1"/>
-          <p:nvPr/>
-        </p:nvSpPr>
-        <p:spPr>
-          <a:xfrm>
-            <a:off x="9204807" y="5577840"/>
-            <a:ext cx="1164259" cy="237744"/>
+          <p:cNvPr id="27" name="TextBox 26"/>
+          <p:cNvSpPr txBox="1"/>
+          <p:nvPr/>
+        </p:nvSpPr>
+        <p:spPr>
+          <a:xfrm>
+            <a:off x="6159855" y="5650992"/>
+            <a:ext cx="2668447" cy="256032"/>
           </a:xfrm>
           <a:prstGeom prst="rect">
             <a:avLst/>
@@ -6379,7 +5935,7 @@
               </a:spcAft>
             </a:pPr>
             <a:r>
-              <a:rPr sz="1150" b="1">
+              <a:rPr sz="1300" b="1">
                 <a:solidFill>
                   <a:srgbClr val="0E7490"/>
                 </a:solidFill>
@@ -6392,14 +5948,14 @@
       </p:sp>
       <p:sp>
         <p:nvSpPr>
-          <p:cNvPr id="39" name="TextBox 38"/>
-          <p:cNvSpPr txBox="1"/>
-          <p:nvPr/>
-        </p:nvSpPr>
-        <p:spPr>
-          <a:xfrm>
-            <a:off x="9204807" y="5833872"/>
-            <a:ext cx="1164259" cy="201168"/>
+          <p:cNvPr id="28" name="TextBox 27"/>
+          <p:cNvSpPr txBox="1"/>
+          <p:nvPr/>
+        </p:nvSpPr>
+        <p:spPr>
+          <a:xfrm>
+            <a:off x="6159855" y="5925312"/>
+            <a:ext cx="2668447" cy="201168"/>
           </a:xfrm>
           <a:prstGeom prst="rect">
             <a:avLst/>
@@ -6421,7 +5977,7 @@
               </a:spcAft>
             </a:pPr>
             <a:r>
-              <a:rPr sz="760" b="0">
+              <a:rPr sz="819" b="0">
                 <a:solidFill>
                   <a:srgbClr val="475569"/>
                 </a:solidFill>
@@ -6434,14 +5990,14 @@
       </p:sp>
       <p:sp>
         <p:nvSpPr>
-          <p:cNvPr id="40" name="Rectangle 39"/>
+          <p:cNvPr id="29" name="Rectangle 28"/>
           <p:cNvSpPr/>
           <p:nvPr/>
         </p:nvSpPr>
         <p:spPr>
           <a:xfrm>
-            <a:off x="10460507" y="5541264"/>
-            <a:ext cx="1164259" cy="530352"/>
+            <a:off x="8956319" y="5596128"/>
+            <a:ext cx="2668447" cy="566928"/>
           </a:xfrm>
           <a:prstGeom prst="rect">
             <a:avLst/>
@@ -6478,14 +6034,14 @@
       </p:sp>
       <p:sp>
         <p:nvSpPr>
-          <p:cNvPr id="41" name="TextBox 40"/>
-          <p:cNvSpPr txBox="1"/>
-          <p:nvPr/>
-        </p:nvSpPr>
-        <p:spPr>
-          <a:xfrm>
-            <a:off x="10460507" y="5577840"/>
-            <a:ext cx="1164259" cy="237744"/>
+          <p:cNvPr id="30" name="TextBox 29"/>
+          <p:cNvSpPr txBox="1"/>
+          <p:nvPr/>
+        </p:nvSpPr>
+        <p:spPr>
+          <a:xfrm>
+            <a:off x="8956319" y="5650992"/>
+            <a:ext cx="2668447" cy="256032"/>
           </a:xfrm>
           <a:prstGeom prst="rect">
             <a:avLst/>
@@ -6507,7 +6063,7 @@
               </a:spcAft>
             </a:pPr>
             <a:r>
-              <a:rPr sz="1150" b="1">
+              <a:rPr sz="1300" b="1">
                 <a:solidFill>
                   <a:srgbClr val="B91C1C"/>
                 </a:solidFill>
@@ -6520,14 +6076,14 @@
       </p:sp>
       <p:sp>
         <p:nvSpPr>
-          <p:cNvPr id="42" name="TextBox 41"/>
-          <p:cNvSpPr txBox="1"/>
-          <p:nvPr/>
-        </p:nvSpPr>
-        <p:spPr>
-          <a:xfrm>
-            <a:off x="10460507" y="5833872"/>
-            <a:ext cx="1164259" cy="201168"/>
+          <p:cNvPr id="31" name="TextBox 30"/>
+          <p:cNvSpPr txBox="1"/>
+          <p:nvPr/>
+        </p:nvSpPr>
+        <p:spPr>
+          <a:xfrm>
+            <a:off x="8956319" y="5925312"/>
+            <a:ext cx="2668447" cy="201168"/>
           </a:xfrm>
           <a:prstGeom prst="rect">
             <a:avLst/>
@@ -6549,7 +6105,7 @@
               </a:spcAft>
             </a:pPr>
             <a:r>
-              <a:rPr sz="760" b="0">
+              <a:rPr sz="819" b="0">
                 <a:solidFill>
                   <a:srgbClr val="475569"/>
                 </a:solidFill>
@@ -7092,139 +6648,13 @@
       </p:sp>
       <p:sp>
         <p:nvSpPr>
-          <p:cNvPr id="14" name="TextBox 13"/>
-          <p:cNvSpPr txBox="1"/>
-          <p:nvPr/>
-        </p:nvSpPr>
-        <p:spPr>
-          <a:xfrm>
-            <a:off x="603504" y="2505456"/>
-            <a:ext cx="4242816" cy="237744"/>
-          </a:xfrm>
-          <a:prstGeom prst="rect">
-            <a:avLst/>
-          </a:prstGeom>
-          <a:noFill/>
-        </p:spPr>
-        <p:txBody>
-          <a:bodyPr wrap="square" anchor="t" lIns="0" rIns="0" tIns="0" bIns="0">
-            <a:spAutoFit/>
-          </a:bodyPr>
-          <a:lstStyle/>
-          <a:p>
-            <a:pPr algn="l">
-              <a:lnSpc>
-                <a:spcPct val="118000"/>
-              </a:lnSpc>
-              <a:spcAft>
-                <a:spcPts val="0"/>
-              </a:spcAft>
-            </a:pPr>
-            <a:r>
-              <a:rPr sz="1150" b="0">
-                <a:solidFill>
-                  <a:srgbClr val="0F172A"/>
-                </a:solidFill>
-                <a:latin typeface="Inter"/>
-              </a:rPr>
-              <a:t>Harness, enclosure</a:t>
-            </a:r>
-          </a:p>
-        </p:txBody>
-      </p:sp>
-      <p:sp>
-        <p:nvSpPr>
-          <p:cNvPr id="15" name="TextBox 14"/>
-          <p:cNvSpPr txBox="1"/>
-          <p:nvPr/>
-        </p:nvSpPr>
-        <p:spPr>
-          <a:xfrm>
-            <a:off x="4846320" y="2505456"/>
-            <a:ext cx="1481328" cy="237744"/>
-          </a:xfrm>
-          <a:prstGeom prst="rect">
-            <a:avLst/>
-          </a:prstGeom>
-          <a:noFill/>
-        </p:spPr>
-        <p:txBody>
-          <a:bodyPr wrap="square" anchor="t" lIns="0" rIns="0" tIns="0" bIns="0">
-            <a:spAutoFit/>
-          </a:bodyPr>
-          <a:lstStyle/>
-          <a:p>
-            <a:pPr algn="r">
-              <a:lnSpc>
-                <a:spcPct val="118000"/>
-              </a:lnSpc>
-              <a:spcAft>
-                <a:spcPts val="0"/>
-              </a:spcAft>
-            </a:pPr>
-            <a:r>
-              <a:rPr sz="1150" b="1">
-                <a:solidFill>
-                  <a:srgbClr val="B45309"/>
-                </a:solidFill>
-                <a:latin typeface="Inter"/>
-              </a:rPr>
-              <a:t>[FILL: ₹...]</a:t>
-            </a:r>
-          </a:p>
-        </p:txBody>
-      </p:sp>
-      <p:sp>
-        <p:nvSpPr>
-          <p:cNvPr id="16" name="Rectangle 15"/>
+          <p:cNvPr id="14" name="Rectangle 13"/>
           <p:cNvSpPr/>
           <p:nvPr/>
         </p:nvSpPr>
         <p:spPr>
           <a:xfrm>
-            <a:off x="566928" y="2770632"/>
-            <a:ext cx="5797296" cy="7315"/>
-          </a:xfrm>
-          <a:prstGeom prst="rect">
-            <a:avLst/>
-          </a:prstGeom>
-          <a:solidFill>
-            <a:srgbClr val="CBD5E1"/>
-          </a:solidFill>
-          <a:ln>
-            <a:noFill/>
-          </a:ln>
-          <a:effectLst/>
-        </p:spPr>
-        <p:style>
-          <a:lnRef idx="1">
-            <a:schemeClr val="accent1"/>
-          </a:lnRef>
-          <a:fillRef idx="3">
-            <a:schemeClr val="accent1"/>
-          </a:fillRef>
-          <a:effectRef idx="2">
-            <a:schemeClr val="accent1"/>
-          </a:effectRef>
-          <a:fontRef idx="minor">
-            <a:schemeClr val="lt1"/>
-          </a:fontRef>
-        </p:style>
-        <p:txBody>
-          <a:bodyPr rtlCol="0" anchor="ctr"/>
-          <a:lstStyle/>
-          <a:p/>
-        </p:txBody>
-      </p:sp>
-      <p:sp>
-        <p:nvSpPr>
-          <p:cNvPr id="17" name="Rectangle 16"/>
-          <p:cNvSpPr/>
-          <p:nvPr/>
-        </p:nvSpPr>
-        <p:spPr>
-          <a:xfrm>
-            <a:off x="566928" y="2944368"/>
+            <a:off x="566928" y="2560320"/>
             <a:ext cx="5797296" cy="438912"/>
           </a:xfrm>
           <a:prstGeom prst="rect">
@@ -7262,13 +6692,13 @@
       </p:sp>
       <p:sp>
         <p:nvSpPr>
-          <p:cNvPr id="18" name="TextBox 17"/>
-          <p:cNvSpPr txBox="1"/>
-          <p:nvPr/>
-        </p:nvSpPr>
-        <p:spPr>
-          <a:xfrm>
-            <a:off x="603504" y="3044952"/>
+          <p:cNvPr id="15" name="TextBox 14"/>
+          <p:cNvSpPr txBox="1"/>
+          <p:nvPr/>
+        </p:nvSpPr>
+        <p:spPr>
+          <a:xfrm>
+            <a:off x="603504" y="2660904"/>
             <a:ext cx="4242816" cy="237744"/>
           </a:xfrm>
           <a:prstGeom prst="rect">
@@ -7304,13 +6734,13 @@
       </p:sp>
       <p:sp>
         <p:nvSpPr>
-          <p:cNvPr id="19" name="TextBox 18"/>
-          <p:cNvSpPr txBox="1"/>
-          <p:nvPr/>
-        </p:nvSpPr>
-        <p:spPr>
-          <a:xfrm>
-            <a:off x="4846320" y="3044952"/>
+          <p:cNvPr id="16" name="TextBox 15"/>
+          <p:cNvSpPr txBox="1"/>
+          <p:nvPr/>
+        </p:nvSpPr>
+        <p:spPr>
+          <a:xfrm>
+            <a:off x="4846320" y="2660904"/>
             <a:ext cx="1481328" cy="237744"/>
           </a:xfrm>
           <a:prstGeom prst="rect">
@@ -7339,14 +6769,14 @@
                 </a:solidFill>
                 <a:latin typeface="Inter"/>
               </a:rPr>
-              <a:t>[FILL: ₹...]</a:t>
-            </a:r>
-          </a:p>
-        </p:txBody>
-      </p:sp>
-      <p:sp>
-        <p:nvSpPr>
-          <p:cNvPr id="20" name="TextBox 19"/>
+              <a:t>₹28,000</a:t>
+            </a:r>
+          </a:p>
+        </p:txBody>
+      </p:sp>
+      <p:sp>
+        <p:nvSpPr>
+          <p:cNvPr id="17" name="TextBox 16"/>
           <p:cNvSpPr txBox="1"/>
           <p:nvPr/>
         </p:nvSpPr>
@@ -7388,7 +6818,7 @@
       </p:sp>
       <p:sp>
         <p:nvSpPr>
-          <p:cNvPr id="21" name="Rectangle 20"/>
+          <p:cNvPr id="18" name="Rectangle 17"/>
           <p:cNvSpPr/>
           <p:nvPr/>
         </p:nvSpPr>
@@ -7432,7 +6862,7 @@
       </p:sp>
       <p:sp>
         <p:nvSpPr>
-          <p:cNvPr id="22" name="TextBox 21"/>
+          <p:cNvPr id="19" name="TextBox 18"/>
           <p:cNvSpPr txBox="1"/>
           <p:nvPr/>
         </p:nvSpPr>
@@ -7474,7 +6904,7 @@
       </p:sp>
       <p:sp>
         <p:nvSpPr>
-          <p:cNvPr id="23" name="TextBox 22"/>
+          <p:cNvPr id="20" name="TextBox 19"/>
           <p:cNvSpPr txBox="1"/>
           <p:nvPr/>
         </p:nvSpPr>
@@ -7517,7 +6947,7 @@
       </p:sp>
       <p:sp>
         <p:nvSpPr>
-          <p:cNvPr id="24" name="Rectangle 23"/>
+          <p:cNvPr id="21" name="Rectangle 20"/>
           <p:cNvSpPr/>
           <p:nvPr/>
         </p:nvSpPr>
@@ -7561,7 +6991,7 @@
       </p:sp>
       <p:sp>
         <p:nvSpPr>
-          <p:cNvPr id="25" name="TextBox 24"/>
+          <p:cNvPr id="22" name="TextBox 21"/>
           <p:cNvSpPr txBox="1"/>
           <p:nvPr/>
         </p:nvSpPr>
@@ -7603,7 +7033,7 @@
       </p:sp>
       <p:sp>
         <p:nvSpPr>
-          <p:cNvPr id="26" name="TextBox 25"/>
+          <p:cNvPr id="23" name="TextBox 22"/>
           <p:cNvSpPr txBox="1"/>
           <p:nvPr/>
         </p:nvSpPr>
@@ -7646,7 +7076,7 @@
       </p:sp>
       <p:sp>
         <p:nvSpPr>
-          <p:cNvPr id="27" name="TextBox 26"/>
+          <p:cNvPr id="24" name="TextBox 23"/>
           <p:cNvSpPr txBox="1"/>
           <p:nvPr/>
         </p:nvSpPr>
@@ -7688,7 +7118,7 @@
       </p:sp>
       <p:sp>
         <p:nvSpPr>
-          <p:cNvPr id="28" name="Rectangle 27"/>
+          <p:cNvPr id="25" name="Rectangle 24"/>
           <p:cNvSpPr/>
           <p:nvPr/>
         </p:nvSpPr>
@@ -7732,7 +7162,7 @@
       </p:sp>
       <p:sp>
         <p:nvSpPr>
-          <p:cNvPr id="29" name="TextBox 28"/>
+          <p:cNvPr id="26" name="TextBox 25"/>
           <p:cNvSpPr txBox="1"/>
           <p:nvPr/>
         </p:nvSpPr>
@@ -7774,7 +7204,7 @@
       </p:sp>
       <p:sp>
         <p:nvSpPr>
-          <p:cNvPr id="30" name="TextBox 29"/>
+          <p:cNvPr id="27" name="TextBox 26"/>
           <p:cNvSpPr txBox="1"/>
           <p:nvPr/>
         </p:nvSpPr>
@@ -7817,7 +7247,7 @@
       </p:sp>
       <p:sp>
         <p:nvSpPr>
-          <p:cNvPr id="31" name="TextBox 30"/>
+          <p:cNvPr id="28" name="TextBox 27"/>
           <p:cNvSpPr txBox="1"/>
           <p:nvPr/>
         </p:nvSpPr>
@@ -7860,7 +7290,7 @@
       </p:sp>
       <p:sp>
         <p:nvSpPr>
-          <p:cNvPr id="32" name="TextBox 31"/>
+          <p:cNvPr id="29" name="TextBox 28"/>
           <p:cNvSpPr txBox="1"/>
           <p:nvPr/>
         </p:nvSpPr>
@@ -7903,7 +7333,7 @@
       </p:sp>
       <p:sp>
         <p:nvSpPr>
-          <p:cNvPr id="33" name="TextBox 32"/>
+          <p:cNvPr id="30" name="TextBox 29"/>
           <p:cNvSpPr txBox="1"/>
           <p:nvPr/>
         </p:nvSpPr>
@@ -7946,7 +7376,7 @@
       </p:sp>
       <p:sp>
         <p:nvSpPr>
-          <p:cNvPr id="34" name="Rectangle 33"/>
+          <p:cNvPr id="31" name="Rectangle 30"/>
           <p:cNvSpPr/>
           <p:nvPr/>
         </p:nvSpPr>
@@ -7988,7 +7418,7 @@
       </p:sp>
       <p:sp>
         <p:nvSpPr>
-          <p:cNvPr id="35" name="TextBox 34"/>
+          <p:cNvPr id="32" name="TextBox 31"/>
           <p:cNvSpPr txBox="1"/>
           <p:nvPr/>
         </p:nvSpPr>
@@ -8030,7 +7460,7 @@
       </p:sp>
       <p:sp>
         <p:nvSpPr>
-          <p:cNvPr id="36" name="TextBox 35"/>
+          <p:cNvPr id="33" name="TextBox 32"/>
           <p:cNvSpPr txBox="1"/>
           <p:nvPr/>
         </p:nvSpPr>
@@ -8072,7 +7502,7 @@
       </p:sp>
       <p:sp>
         <p:nvSpPr>
-          <p:cNvPr id="37" name="TextBox 36"/>
+          <p:cNvPr id="34" name="TextBox 33"/>
           <p:cNvSpPr txBox="1"/>
           <p:nvPr/>
         </p:nvSpPr>
@@ -8114,7 +7544,7 @@
       </p:sp>
       <p:sp>
         <p:nvSpPr>
-          <p:cNvPr id="38" name="TextBox 37"/>
+          <p:cNvPr id="35" name="TextBox 34"/>
           <p:cNvSpPr txBox="1"/>
           <p:nvPr/>
         </p:nvSpPr>
@@ -8156,7 +7586,7 @@
       </p:sp>
       <p:sp>
         <p:nvSpPr>
-          <p:cNvPr id="39" name="TextBox 38"/>
+          <p:cNvPr id="36" name="TextBox 35"/>
           <p:cNvSpPr txBox="1"/>
           <p:nvPr/>
         </p:nvSpPr>
@@ -8198,7 +7628,7 @@
       </p:sp>
       <p:sp>
         <p:nvSpPr>
-          <p:cNvPr id="40" name="Rectangle 39"/>
+          <p:cNvPr id="37" name="Rectangle 36"/>
           <p:cNvSpPr/>
           <p:nvPr/>
         </p:nvSpPr>
@@ -8240,7 +7670,7 @@
       </p:sp>
       <p:sp>
         <p:nvSpPr>
-          <p:cNvPr id="41" name="TextBox 40"/>
+          <p:cNvPr id="38" name="TextBox 37"/>
           <p:cNvSpPr txBox="1"/>
           <p:nvPr/>
         </p:nvSpPr>
@@ -8282,7 +7712,7 @@
       </p:sp>
       <p:sp>
         <p:nvSpPr>
-          <p:cNvPr id="42" name="TextBox 41"/>
+          <p:cNvPr id="39" name="TextBox 38"/>
           <p:cNvSpPr txBox="1"/>
           <p:nvPr/>
         </p:nvSpPr>
@@ -8324,7 +7754,7 @@
       </p:sp>
       <p:sp>
         <p:nvSpPr>
-          <p:cNvPr id="43" name="TextBox 42"/>
+          <p:cNvPr id="40" name="TextBox 39"/>
           <p:cNvSpPr txBox="1"/>
           <p:nvPr/>
         </p:nvSpPr>
@@ -8366,7 +7796,7 @@
       </p:sp>
       <p:sp>
         <p:nvSpPr>
-          <p:cNvPr id="44" name="TextBox 43"/>
+          <p:cNvPr id="41" name="TextBox 40"/>
           <p:cNvSpPr txBox="1"/>
           <p:nvPr/>
         </p:nvSpPr>
@@ -8408,7 +7838,7 @@
       </p:sp>
       <p:sp>
         <p:nvSpPr>
-          <p:cNvPr id="45" name="TextBox 44"/>
+          <p:cNvPr id="42" name="TextBox 41"/>
           <p:cNvSpPr txBox="1"/>
           <p:nvPr/>
         </p:nvSpPr>
@@ -8450,7 +7880,7 @@
       </p:sp>
       <p:sp>
         <p:nvSpPr>
-          <p:cNvPr id="46" name="Rectangle 45"/>
+          <p:cNvPr id="43" name="Rectangle 42"/>
           <p:cNvSpPr/>
           <p:nvPr/>
         </p:nvSpPr>
@@ -8492,7 +7922,7 @@
       </p:sp>
       <p:sp>
         <p:nvSpPr>
-          <p:cNvPr id="47" name="TextBox 46"/>
+          <p:cNvPr id="44" name="TextBox 43"/>
           <p:cNvSpPr txBox="1"/>
           <p:nvPr/>
         </p:nvSpPr>
@@ -8534,7 +7964,7 @@
       </p:sp>
       <p:sp>
         <p:nvSpPr>
-          <p:cNvPr id="48" name="TextBox 47"/>
+          <p:cNvPr id="45" name="TextBox 44"/>
           <p:cNvSpPr txBox="1"/>
           <p:nvPr/>
         </p:nvSpPr>
@@ -8576,7 +8006,7 @@
       </p:sp>
       <p:sp>
         <p:nvSpPr>
-          <p:cNvPr id="49" name="TextBox 48"/>
+          <p:cNvPr id="46" name="TextBox 45"/>
           <p:cNvSpPr txBox="1"/>
           <p:nvPr/>
         </p:nvSpPr>
@@ -8618,7 +8048,7 @@
       </p:sp>
       <p:sp>
         <p:nvSpPr>
-          <p:cNvPr id="50" name="TextBox 49"/>
+          <p:cNvPr id="47" name="TextBox 46"/>
           <p:cNvSpPr txBox="1"/>
           <p:nvPr/>
         </p:nvSpPr>
@@ -8660,7 +8090,7 @@
       </p:sp>
       <p:sp>
         <p:nvSpPr>
-          <p:cNvPr id="51" name="TextBox 50"/>
+          <p:cNvPr id="48" name="TextBox 47"/>
           <p:cNvSpPr txBox="1"/>
           <p:nvPr/>
         </p:nvSpPr>
@@ -8702,7 +8132,7 @@
       </p:sp>
       <p:sp>
         <p:nvSpPr>
-          <p:cNvPr id="52" name="Rectangle 51"/>
+          <p:cNvPr id="49" name="Rectangle 48"/>
           <p:cNvSpPr/>
           <p:nvPr/>
         </p:nvSpPr>
@@ -8746,7 +8176,7 @@
       </p:sp>
       <p:sp>
         <p:nvSpPr>
-          <p:cNvPr id="53" name="TextBox 52"/>
+          <p:cNvPr id="50" name="TextBox 49"/>
           <p:cNvSpPr txBox="1"/>
           <p:nvPr/>
         </p:nvSpPr>
@@ -8788,7 +8218,7 @@
       </p:sp>
       <p:sp>
         <p:nvSpPr>
-          <p:cNvPr id="54" name="TextBox 53"/>
+          <p:cNvPr id="51" name="TextBox 50"/>
           <p:cNvSpPr txBox="1"/>
           <p:nvPr/>
         </p:nvSpPr>
@@ -8830,7 +8260,7 @@
       </p:sp>
       <p:sp>
         <p:nvSpPr>
-          <p:cNvPr id="55" name="TextBox 54"/>
+          <p:cNvPr id="52" name="TextBox 51"/>
           <p:cNvSpPr txBox="1"/>
           <p:nvPr/>
         </p:nvSpPr>
@@ -8872,7 +8302,7 @@
       </p:sp>
       <p:sp>
         <p:nvSpPr>
-          <p:cNvPr id="56" name="TextBox 55"/>
+          <p:cNvPr id="53" name="TextBox 52"/>
           <p:cNvSpPr txBox="1"/>
           <p:nvPr/>
         </p:nvSpPr>
@@ -8914,7 +8344,7 @@
       </p:sp>
       <p:sp>
         <p:nvSpPr>
-          <p:cNvPr id="57" name="TextBox 56"/>
+          <p:cNvPr id="54" name="TextBox 53"/>
           <p:cNvSpPr txBox="1"/>
           <p:nvPr/>
         </p:nvSpPr>
@@ -8956,14 +8386,14 @@
       </p:sp>
       <p:sp>
         <p:nvSpPr>
-          <p:cNvPr id="58" name="TextBox 57"/>
+          <p:cNvPr id="55" name="TextBox 54"/>
           <p:cNvSpPr txBox="1"/>
           <p:nvPr/>
         </p:nvSpPr>
         <p:spPr>
           <a:xfrm>
             <a:off x="6693408" y="3986783"/>
-            <a:ext cx="4931359" cy="365760"/>
+            <a:ext cx="4931359" cy="219456"/>
           </a:xfrm>
           <a:prstGeom prst="rect">
             <a:avLst/>
@@ -8978,7 +8408,7 @@
           <a:p>
             <a:pPr algn="l">
               <a:lnSpc>
-                <a:spcPct val="122000"/>
+                <a:spcPct val="118000"/>
               </a:lnSpc>
               <a:spcAft>
                 <a:spcPts val="0"/>
@@ -8987,18 +8417,18 @@
             <a:r>
               <a:rPr sz="819" b="0">
                 <a:solidFill>
-                  <a:srgbClr val="B91C1C"/>
-                </a:solidFill>
-                <a:latin typeface="Inter"/>
-              </a:rPr>
-              <a:t>Competitor rows compiled from public product pages — [VERIFY against vendor datasheets]</a:t>
-            </a:r>
-          </a:p>
-        </p:txBody>
-      </p:sp>
-      <p:sp>
-        <p:nvSpPr>
-          <p:cNvPr id="59" name="Rectangle 58"/>
+                  <a:srgbClr val="475569"/>
+                </a:solidFill>
+                <a:latin typeface="Inter"/>
+              </a:rPr>
+              <a:t>Compiled from public product pages</a:t>
+            </a:r>
+          </a:p>
+        </p:txBody>
+      </p:sp>
+      <p:sp>
+        <p:nvSpPr>
+          <p:cNvPr id="56" name="Rectangle 55"/>
           <p:cNvSpPr/>
           <p:nvPr/>
         </p:nvSpPr>
@@ -9042,7 +8472,7 @@
       </p:sp>
       <p:sp>
         <p:nvSpPr>
-          <p:cNvPr id="60" name="TextBox 59"/>
+          <p:cNvPr id="57" name="TextBox 56"/>
           <p:cNvSpPr txBox="1"/>
           <p:nvPr/>
         </p:nvSpPr>
@@ -9084,7 +8514,7 @@
       </p:sp>
       <p:sp>
         <p:nvSpPr>
-          <p:cNvPr id="61" name="TextBox 60"/>
+          <p:cNvPr id="58" name="TextBox 57"/>
           <p:cNvSpPr txBox="1"/>
           <p:nvPr/>
         </p:nvSpPr>
@@ -9126,13 +8556,13 @@
       </p:sp>
       <p:sp>
         <p:nvSpPr>
-          <p:cNvPr id="62" name="TextBox 61"/>
-          <p:cNvSpPr txBox="1"/>
-          <p:nvPr/>
-        </p:nvSpPr>
-        <p:spPr>
-          <a:xfrm>
-            <a:off x="6693408" y="5522976"/>
+          <p:cNvPr id="59" name="TextBox 58"/>
+          <p:cNvSpPr txBox="1"/>
+          <p:nvPr/>
+        </p:nvSpPr>
+        <p:spPr>
+          <a:xfrm>
+            <a:off x="6693408" y="5486400"/>
             <a:ext cx="4931359" cy="219456"/>
           </a:xfrm>
           <a:prstGeom prst="rect">
@@ -9161,21 +8591,21 @@
                 </a:solidFill>
                 <a:latin typeface="Inter"/>
               </a:rPr>
-              <a:t>WHO PAYS</a:t>
-            </a:r>
-          </a:p>
-        </p:txBody>
-      </p:sp>
-      <p:sp>
-        <p:nvSpPr>
-          <p:cNvPr id="63" name="TextBox 62"/>
-          <p:cNvSpPr txBox="1"/>
-          <p:nvPr/>
-        </p:nvSpPr>
-        <p:spPr>
-          <a:xfrm>
-            <a:off x="6693408" y="5760720"/>
-            <a:ext cx="4931359" cy="512064"/>
+              <a:t>WHO PAYS, AND WHY</a:t>
+            </a:r>
+          </a:p>
+        </p:txBody>
+      </p:sp>
+      <p:sp>
+        <p:nvSpPr>
+          <p:cNvPr id="60" name="TextBox 59"/>
+          <p:cNvSpPr txBox="1"/>
+          <p:nvPr/>
+        </p:nvSpPr>
+        <p:spPr>
+          <a:xfrm>
+            <a:off x="6693408" y="5724144"/>
+            <a:ext cx="4931359" cy="548640"/>
           </a:xfrm>
           <a:prstGeom prst="rect">
             <a:avLst/>
@@ -9190,7 +8620,7 @@
           <a:p>
             <a:pPr algn="l">
               <a:lnSpc>
-                <a:spcPct val="140000"/>
+                <a:spcPct val="134000"/>
               </a:lnSpc>
               <a:spcAft>
                 <a:spcPts val="0"/>
@@ -9203,8 +8633,7 @@
                 </a:solidFill>
                 <a:latin typeface="Inter"/>
               </a:rPr>
-              <a:t>Fleet operator — avoids an early pack replacement  [FILL: ₹ per pack]
-OEM — fewer warranty claims per 1,000 packs  [FILL: ₹ or % exposure]</a:t>
+              <a:t>The ₹28,000 unit is not consumed — it moves to the next pack. A replacement pack is ₹13,000 and is. Three replacements deferred covers the unit, and the unit is still in service.</a:t>
             </a:r>
           </a:p>
         </p:txBody>
